--- a/에너지경제학/자원에너지경제학_Chapter_4 (석탄).pptx
+++ b/에너지경제학/자원에너지경제학_Chapter_4 (석탄).pptx
@@ -5,7 +5,7 @@
     <p:sldMasterId id="2147483648" r:id="rId1"/>
   </p:sldMasterIdLst>
   <p:notesMasterIdLst>
-    <p:notesMasterId r:id="rId18"/>
+    <p:notesMasterId r:id="rId24"/>
   </p:notesMasterIdLst>
   <p:sldIdLst>
     <p:sldId id="375" r:id="rId2"/>
@@ -14,16 +14,22 @@
     <p:sldId id="376" r:id="rId5"/>
     <p:sldId id="609" r:id="rId6"/>
     <p:sldId id="599" r:id="rId7"/>
-    <p:sldId id="601" r:id="rId8"/>
-    <p:sldId id="602" r:id="rId9"/>
-    <p:sldId id="603" r:id="rId10"/>
-    <p:sldId id="604" r:id="rId11"/>
-    <p:sldId id="606" r:id="rId12"/>
-    <p:sldId id="605" r:id="rId13"/>
-    <p:sldId id="607" r:id="rId14"/>
-    <p:sldId id="608" r:id="rId15"/>
-    <p:sldId id="600" r:id="rId16"/>
-    <p:sldId id="598" r:id="rId17"/>
+    <p:sldId id="610" r:id="rId8"/>
+    <p:sldId id="611" r:id="rId9"/>
+    <p:sldId id="601" r:id="rId10"/>
+    <p:sldId id="612" r:id="rId11"/>
+    <p:sldId id="613" r:id="rId12"/>
+    <p:sldId id="614" r:id="rId13"/>
+    <p:sldId id="615" r:id="rId14"/>
+    <p:sldId id="602" r:id="rId15"/>
+    <p:sldId id="603" r:id="rId16"/>
+    <p:sldId id="604" r:id="rId17"/>
+    <p:sldId id="606" r:id="rId18"/>
+    <p:sldId id="605" r:id="rId19"/>
+    <p:sldId id="607" r:id="rId20"/>
+    <p:sldId id="608" r:id="rId21"/>
+    <p:sldId id="600" r:id="rId22"/>
+    <p:sldId id="598" r:id="rId23"/>
   </p:sldIdLst>
   <p:sldSz cx="12192000" cy="6858000"/>
   <p:notesSz cx="6858000" cy="9144000"/>
@@ -234,7 +240,7 @@
           <a:p>
             <a:fld id="{4A5E00EF-AEA4-43E2-9451-8F9C59A39471}" type="datetimeFigureOut">
               <a:rPr lang="ko-KR" altLang="en-US" smtClean="0"/>
-              <a:t>2026-06-11</a:t>
+              <a:t>2026-06-12</a:t>
             </a:fld>
             <a:endParaRPr lang="ko-KR" altLang="en-US"/>
           </a:p>
@@ -656,7 +662,7 @@
           <a:p>
             <a:fld id="{CD32C56F-BD27-4999-9E6D-D4EACE3DA9F4}" type="datetime1">
               <a:rPr lang="ko-KR" altLang="en-US" smtClean="0"/>
-              <a:t>2026-06-11</a:t>
+              <a:t>2026-06-12</a:t>
             </a:fld>
             <a:endParaRPr lang="ko-KR" altLang="en-US"/>
           </a:p>
@@ -870,7 +876,7 @@
           <a:p>
             <a:fld id="{8EF4A19C-72C8-45CA-8E3F-68A7FA345D6C}" type="datetime1">
               <a:rPr lang="ko-KR" altLang="en-US" smtClean="0"/>
-              <a:t>2026-06-11</a:t>
+              <a:t>2026-06-12</a:t>
             </a:fld>
             <a:endParaRPr lang="ko-KR" altLang="en-US"/>
           </a:p>
@@ -1094,7 +1100,7 @@
           <a:p>
             <a:fld id="{56A175B2-010B-4341-954C-5F8F5C70B124}" type="datetime1">
               <a:rPr lang="ko-KR" altLang="en-US" smtClean="0"/>
-              <a:t>2026-06-11</a:t>
+              <a:t>2026-06-12</a:t>
             </a:fld>
             <a:endParaRPr lang="ko-KR" altLang="en-US"/>
           </a:p>
@@ -1308,7 +1314,7 @@
           <a:p>
             <a:fld id="{16B83F9E-22C9-45CA-9E85-070F1D3EF530}" type="datetime1">
               <a:rPr lang="ko-KR" altLang="en-US" smtClean="0"/>
-              <a:t>2026-06-11</a:t>
+              <a:t>2026-06-12</a:t>
             </a:fld>
             <a:endParaRPr lang="ko-KR" altLang="en-US"/>
           </a:p>
@@ -1599,7 +1605,7 @@
           <a:p>
             <a:fld id="{03278F45-FB3C-4C4D-B89A-7BC3F5F229F6}" type="datetime1">
               <a:rPr lang="ko-KR" altLang="en-US" smtClean="0"/>
-              <a:t>2026-06-11</a:t>
+              <a:t>2026-06-12</a:t>
             </a:fld>
             <a:endParaRPr lang="ko-KR" altLang="en-US"/>
           </a:p>
@@ -1992,7 +1998,7 @@
           <a:p>
             <a:fld id="{38FDAC3C-35A6-415C-9F03-738A6AC328B1}" type="datetime1">
               <a:rPr lang="ko-KR" altLang="en-US" smtClean="0"/>
-              <a:t>2026-06-11</a:t>
+              <a:t>2026-06-12</a:t>
             </a:fld>
             <a:endParaRPr lang="ko-KR" altLang="en-US"/>
           </a:p>
@@ -3586,7 +3592,7 @@
           <a:p>
             <a:fld id="{507A0DF1-AEE6-4B0D-89D2-351E7B3EF65C}" type="datetime1">
               <a:rPr lang="ko-KR" altLang="en-US" smtClean="0"/>
-              <a:t>2026-06-11</a:t>
+              <a:t>2026-06-12</a:t>
             </a:fld>
             <a:endParaRPr lang="ko-KR" altLang="en-US"/>
           </a:p>
@@ -4014,7 +4020,7 @@
           <a:p>
             <a:fld id="{CA93B8C9-630F-4D57-944D-04FD37CECCD3}" type="datetime1">
               <a:rPr lang="ko-KR" altLang="en-US" smtClean="0"/>
-              <a:t>2026-06-11</a:t>
+              <a:t>2026-06-12</a:t>
             </a:fld>
             <a:endParaRPr lang="ko-KR" altLang="en-US"/>
           </a:p>
@@ -4171,7 +4177,7 @@
           <a:p>
             <a:fld id="{E986165A-AC43-4902-9541-874ECD310BA3}" type="datetime1">
               <a:rPr lang="ko-KR" altLang="en-US" smtClean="0"/>
-              <a:t>2026-06-11</a:t>
+              <a:t>2026-06-12</a:t>
             </a:fld>
             <a:endParaRPr lang="ko-KR" altLang="en-US"/>
           </a:p>
@@ -4498,7 +4504,7 @@
           <a:p>
             <a:fld id="{47E6EE6D-2B0E-43A9-87A2-7354CDB998F4}" type="datetime1">
               <a:rPr lang="ko-KR" altLang="en-US" smtClean="0"/>
-              <a:t>2026-06-11</a:t>
+              <a:t>2026-06-12</a:t>
             </a:fld>
             <a:endParaRPr lang="ko-KR" altLang="en-US"/>
           </a:p>
@@ -4802,7 +4808,7 @@
           <a:p>
             <a:fld id="{5CC5944E-0BC8-4FAA-9F94-6B4B05834E10}" type="datetime1">
               <a:rPr lang="ko-KR" altLang="en-US" smtClean="0"/>
-              <a:t>2026-06-11</a:t>
+              <a:t>2026-06-12</a:t>
             </a:fld>
             <a:endParaRPr lang="ko-KR" altLang="en-US"/>
           </a:p>
@@ -7244,7 +7250,1881 @@
         <p:cNvPr id="1" name="">
           <a:extLst>
             <a:ext uri="{FF2B5EF4-FFF2-40B4-BE49-F238E27FC236}">
-              <a16:creationId xmlns:a16="http://schemas.microsoft.com/office/drawing/2014/main" id="{1A68800B-CB6C-BBEA-6864-FD40CF8E59D3}"/>
+              <a16:creationId xmlns:a16="http://schemas.microsoft.com/office/drawing/2014/main" id="{C8618232-325B-109E-E755-C7762A1881E6}"/>
+            </a:ext>
+          </a:extLst>
+        </p:cNvPr>
+        <p:cNvGrpSpPr/>
+        <p:nvPr/>
+      </p:nvGrpSpPr>
+      <p:grpSpPr>
+        <a:xfrm>
+          <a:off x="0" y="0"/>
+          <a:ext cx="0" cy="0"/>
+          <a:chOff x="0" y="0"/>
+          <a:chExt cx="0" cy="0"/>
+        </a:xfrm>
+      </p:grpSpPr>
+      <p:sp>
+        <p:nvSpPr>
+          <p:cNvPr id="2" name="제목 1">
+            <a:extLst>
+              <a:ext uri="{FF2B5EF4-FFF2-40B4-BE49-F238E27FC236}">
+                <a16:creationId xmlns:a16="http://schemas.microsoft.com/office/drawing/2014/main" id="{A4D5093F-8BE7-16FE-9229-C179F9D56AE2}"/>
+              </a:ext>
+            </a:extLst>
+          </p:cNvPr>
+          <p:cNvSpPr>
+            <a:spLocks noGrp="1"/>
+          </p:cNvSpPr>
+          <p:nvPr>
+            <p:ph type="title"/>
+          </p:nvPr>
+        </p:nvSpPr>
+        <p:spPr/>
+        <p:txBody>
+          <a:bodyPr/>
+          <a:lstStyle/>
+          <a:p>
+            <a:r>
+              <a:rPr lang="ko-KR" altLang="en-US" dirty="0"/>
+              <a:t>석탄의 분류와 특징</a:t>
+            </a:r>
+          </a:p>
+        </p:txBody>
+      </p:sp>
+      <p:sp>
+        <p:nvSpPr>
+          <p:cNvPr id="4" name="슬라이드 번호 개체 틀 3">
+            <a:extLst>
+              <a:ext uri="{FF2B5EF4-FFF2-40B4-BE49-F238E27FC236}">
+                <a16:creationId xmlns:a16="http://schemas.microsoft.com/office/drawing/2014/main" id="{822DAA90-9C6A-88B8-8B4B-6481FA05E93C}"/>
+              </a:ext>
+            </a:extLst>
+          </p:cNvPr>
+          <p:cNvSpPr>
+            <a:spLocks noGrp="1"/>
+          </p:cNvSpPr>
+          <p:nvPr>
+            <p:ph type="sldNum" sz="quarter" idx="12"/>
+          </p:nvPr>
+        </p:nvSpPr>
+        <p:spPr/>
+        <p:txBody>
+          <a:bodyPr/>
+          <a:lstStyle/>
+          <a:p>
+            <a:fld id="{109C872D-39A9-4065-8BF3-6A613116E2A1}" type="slidenum">
+              <a:rPr lang="ko-KR" altLang="en-US" smtClean="0"/>
+              <a:t>10</a:t>
+            </a:fld>
+            <a:endParaRPr lang="ko-KR" altLang="en-US"/>
+          </a:p>
+        </p:txBody>
+      </p:sp>
+      <p:sp>
+        <p:nvSpPr>
+          <p:cNvPr id="3" name="TextBox 2">
+            <a:extLst>
+              <a:ext uri="{FF2B5EF4-FFF2-40B4-BE49-F238E27FC236}">
+                <a16:creationId xmlns:a16="http://schemas.microsoft.com/office/drawing/2014/main" id="{2719CCB4-17D0-C488-9EDC-1B2A7D071D41}"/>
+              </a:ext>
+            </a:extLst>
+          </p:cNvPr>
+          <p:cNvSpPr txBox="1"/>
+          <p:nvPr/>
+        </p:nvSpPr>
+        <p:spPr>
+          <a:xfrm>
+            <a:off x="288790" y="958844"/>
+            <a:ext cx="11118453" cy="5584670"/>
+          </a:xfrm>
+          <a:prstGeom prst="rect">
+            <a:avLst/>
+          </a:prstGeom>
+          <a:noFill/>
+        </p:spPr>
+        <p:txBody>
+          <a:bodyPr wrap="square" rtlCol="0" anchor="t">
+            <a:spAutoFit/>
+          </a:bodyPr>
+          <a:lstStyle/>
+          <a:p>
+            <a:pPr marL="377825" indent="-285750">
+              <a:lnSpc>
+                <a:spcPct val="150000"/>
+              </a:lnSpc>
+              <a:buFont typeface="Arial" panose="020B0604020202020204" pitchFamily="34" charset="0"/>
+              <a:buChar char="•"/>
+            </a:pPr>
+            <a:r>
+              <a:rPr lang="ko-KR" altLang="en-US" sz="1600" dirty="0"/>
+              <a:t>석탄의 물리적 및 화학적 특성은 석탄화 과정에서 원 식물 유기물이 얼마나 완전히 탄화 되었는지에 따라 결정된다</a:t>
+            </a:r>
+            <a:r>
+              <a:rPr lang="en-US" altLang="ko-KR" sz="1600" dirty="0"/>
+              <a:t>.</a:t>
+            </a:r>
+          </a:p>
+          <a:p>
+            <a:pPr marL="835025" lvl="1" indent="-285750">
+              <a:lnSpc>
+                <a:spcPct val="150000"/>
+              </a:lnSpc>
+              <a:buFont typeface="Wingdings" panose="05000000000000000000" pitchFamily="2" charset="2"/>
+              <a:buChar char="ü"/>
+            </a:pPr>
+            <a:r>
+              <a:rPr lang="ko-KR" altLang="en-US" sz="1600" dirty="0"/>
+              <a:t>석탄화 과정은 유기물이 열과 압력을 받아 석탄으로 전환되는 탄화과정을 의미한다</a:t>
+            </a:r>
+            <a:r>
+              <a:rPr lang="en-US" altLang="ko-KR" sz="1600" dirty="0"/>
+              <a:t>.</a:t>
+            </a:r>
+          </a:p>
+          <a:p>
+            <a:pPr marL="835025" lvl="1" indent="-285750">
+              <a:lnSpc>
+                <a:spcPct val="150000"/>
+              </a:lnSpc>
+              <a:buFont typeface="Wingdings" panose="05000000000000000000" pitchFamily="2" charset="2"/>
+              <a:buChar char="ü"/>
+            </a:pPr>
+            <a:r>
+              <a:rPr lang="ko-KR" altLang="en-US" sz="1600" dirty="0"/>
+              <a:t>이 석탄화 정도에 따라 석탄은 탄소 함량</a:t>
+            </a:r>
+            <a:r>
+              <a:rPr lang="en-US" altLang="ko-KR" sz="1600" dirty="0"/>
+              <a:t>, </a:t>
+            </a:r>
+            <a:r>
+              <a:rPr lang="ko-KR" altLang="en-US" sz="1600" dirty="0"/>
+              <a:t>수분</a:t>
+            </a:r>
+            <a:r>
+              <a:rPr lang="en-US" altLang="ko-KR" sz="1600" dirty="0"/>
+              <a:t>, </a:t>
+            </a:r>
+            <a:r>
+              <a:rPr lang="ko-KR" altLang="en-US" sz="1600" dirty="0"/>
+              <a:t>휘발성분</a:t>
+            </a:r>
+            <a:r>
+              <a:rPr lang="en-US" altLang="ko-KR" sz="1600" dirty="0"/>
+              <a:t>, </a:t>
+            </a:r>
+            <a:r>
+              <a:rPr lang="ko-KR" altLang="en-US" sz="1600" dirty="0"/>
+              <a:t>회분</a:t>
+            </a:r>
+            <a:r>
+              <a:rPr lang="en-US" altLang="ko-KR" sz="1600" dirty="0"/>
+              <a:t>, </a:t>
+            </a:r>
+            <a:r>
+              <a:rPr lang="ko-KR" altLang="en-US" sz="1600" dirty="0"/>
+              <a:t>에너지 밀도 등의 특성이 달라진다</a:t>
+            </a:r>
+            <a:r>
+              <a:rPr lang="en-US" altLang="ko-KR" sz="1600" dirty="0"/>
+              <a:t>.</a:t>
+            </a:r>
+          </a:p>
+          <a:p>
+            <a:pPr marL="835025" lvl="1" indent="-285750">
+              <a:lnSpc>
+                <a:spcPct val="150000"/>
+              </a:lnSpc>
+              <a:buFont typeface="Wingdings" panose="05000000000000000000" pitchFamily="2" charset="2"/>
+              <a:buChar char="ü"/>
+            </a:pPr>
+            <a:r>
+              <a:rPr lang="ko-KR" altLang="en-US" sz="1600" dirty="0"/>
+              <a:t>일반적으로</a:t>
+            </a:r>
+            <a:r>
+              <a:rPr lang="en-US" altLang="ko-KR" sz="1600" dirty="0"/>
+              <a:t>, </a:t>
+            </a:r>
+            <a:r>
+              <a:rPr lang="ko-KR" altLang="en-US" sz="1600" dirty="0"/>
+              <a:t>갈탄</a:t>
+            </a:r>
+            <a:r>
+              <a:rPr lang="en-US" altLang="ko-KR" sz="1600" dirty="0"/>
+              <a:t>, </a:t>
+            </a:r>
+            <a:r>
+              <a:rPr lang="ko-KR" altLang="en-US" sz="1600" dirty="0" err="1"/>
+              <a:t>아역청탄</a:t>
+            </a:r>
+            <a:r>
+              <a:rPr lang="en-US" altLang="ko-KR" sz="1600" dirty="0"/>
+              <a:t>, </a:t>
+            </a:r>
+            <a:r>
+              <a:rPr lang="ko-KR" altLang="en-US" sz="1600" dirty="0"/>
+              <a:t>역청탄</a:t>
+            </a:r>
+            <a:r>
+              <a:rPr lang="en-US" altLang="ko-KR" sz="1600" dirty="0"/>
+              <a:t>, </a:t>
+            </a:r>
+            <a:r>
+              <a:rPr lang="ko-KR" altLang="en-US" sz="1600" dirty="0"/>
+              <a:t>무연탄 으로 분류된다</a:t>
+            </a:r>
+            <a:r>
+              <a:rPr lang="en-US" altLang="ko-KR" sz="1600" dirty="0"/>
+              <a:t>.</a:t>
+            </a:r>
+          </a:p>
+          <a:p>
+            <a:pPr marL="835025" lvl="1" indent="-285750">
+              <a:lnSpc>
+                <a:spcPct val="150000"/>
+              </a:lnSpc>
+              <a:buFont typeface="Wingdings" panose="05000000000000000000" pitchFamily="2" charset="2"/>
+              <a:buChar char="ü"/>
+            </a:pPr>
+            <a:endParaRPr lang="en-US" altLang="ko-KR" sz="1600" dirty="0"/>
+          </a:p>
+          <a:p>
+            <a:pPr marL="92075">
+              <a:lnSpc>
+                <a:spcPct val="150000"/>
+              </a:lnSpc>
+            </a:pPr>
+            <a:r>
+              <a:rPr lang="ko-KR" altLang="en-US" sz="1600" u="sng" dirty="0">
+                <a:ln w="3175">
+                  <a:noFill/>
+                </a:ln>
+                <a:latin typeface="HY헤드라인M" panose="02030600000101010101" pitchFamily="18" charset="-127"/>
+                <a:ea typeface="HY헤드라인M" panose="02030600000101010101" pitchFamily="18" charset="-127"/>
+              </a:rPr>
+              <a:t>갈탄</a:t>
+            </a:r>
+            <a:endParaRPr lang="en-US" altLang="ko-KR" sz="1600" dirty="0"/>
+          </a:p>
+          <a:p>
+            <a:pPr marL="377825" indent="-285750">
+              <a:lnSpc>
+                <a:spcPct val="150000"/>
+              </a:lnSpc>
+              <a:buFont typeface="Arial" panose="020B0604020202020204" pitchFamily="34" charset="0"/>
+              <a:buChar char="•"/>
+            </a:pPr>
+            <a:r>
+              <a:rPr lang="ko-KR" altLang="en-US" sz="1600" dirty="0"/>
+              <a:t>갈탄은 탄화과정이 충분히 진행되지 않은</a:t>
+            </a:r>
+            <a:r>
+              <a:rPr lang="en-US" altLang="ko-KR" sz="1600" dirty="0"/>
+              <a:t>, </a:t>
+            </a:r>
+            <a:r>
+              <a:rPr lang="ko-KR" altLang="en-US" sz="1600" dirty="0"/>
+              <a:t>석탄화 정도가 가장 낮은 </a:t>
+            </a:r>
+            <a:r>
+              <a:rPr lang="ko-KR" altLang="en-US" sz="1600" dirty="0" err="1"/>
+              <a:t>저등급</a:t>
+            </a:r>
+            <a:r>
+              <a:rPr lang="ko-KR" altLang="en-US" sz="1600" dirty="0"/>
+              <a:t> 석탄이다</a:t>
+            </a:r>
+            <a:r>
+              <a:rPr lang="en-US" altLang="ko-KR" sz="1600" dirty="0"/>
+              <a:t>.</a:t>
+            </a:r>
+          </a:p>
+          <a:p>
+            <a:pPr marL="835025" lvl="1" indent="-285750">
+              <a:lnSpc>
+                <a:spcPct val="150000"/>
+              </a:lnSpc>
+              <a:buFont typeface="Wingdings" panose="05000000000000000000" pitchFamily="2" charset="2"/>
+              <a:buChar char="ü"/>
+            </a:pPr>
+            <a:r>
+              <a:rPr lang="ko-KR" altLang="en-US" sz="1600" dirty="0"/>
+              <a:t>탄소 함량이 </a:t>
+            </a:r>
+            <a:r>
+              <a:rPr lang="en-US" altLang="ko-KR" sz="1600" dirty="0"/>
+              <a:t>30%</a:t>
+            </a:r>
+            <a:r>
+              <a:rPr lang="ko-KR" altLang="en-US" sz="1600" dirty="0"/>
+              <a:t>에 불과하고</a:t>
+            </a:r>
+            <a:r>
+              <a:rPr lang="en-US" altLang="ko-KR" sz="1600" dirty="0"/>
+              <a:t>, </a:t>
+            </a:r>
+            <a:r>
+              <a:rPr lang="ko-KR" altLang="en-US" sz="1600" dirty="0"/>
+              <a:t>수분 함량이 높고</a:t>
+            </a:r>
+            <a:r>
+              <a:rPr lang="en-US" altLang="ko-KR" sz="1600" dirty="0"/>
+              <a:t>, </a:t>
+            </a:r>
+            <a:r>
+              <a:rPr lang="ko-KR" altLang="en-US" sz="1600" dirty="0"/>
+              <a:t>이로 인해 연소 효율이 낮고</a:t>
+            </a:r>
+            <a:r>
+              <a:rPr lang="en-US" altLang="ko-KR" sz="1600" dirty="0"/>
+              <a:t>, </a:t>
+            </a:r>
+            <a:r>
+              <a:rPr lang="ko-KR" altLang="en-US" sz="1600" dirty="0"/>
+              <a:t>저장 운송과정에도 제약이 있다</a:t>
+            </a:r>
+            <a:r>
+              <a:rPr lang="en-US" altLang="ko-KR" sz="1600" dirty="0"/>
+              <a:t>.</a:t>
+            </a:r>
+          </a:p>
+          <a:p>
+            <a:pPr marL="835025" lvl="1" indent="-285750">
+              <a:lnSpc>
+                <a:spcPct val="150000"/>
+              </a:lnSpc>
+              <a:buFont typeface="Wingdings" panose="05000000000000000000" pitchFamily="2" charset="2"/>
+              <a:buChar char="ü"/>
+            </a:pPr>
+            <a:r>
+              <a:rPr lang="ko-KR" altLang="en-US" sz="1600" dirty="0"/>
+              <a:t>외관상 흑갈색을 띠며</a:t>
+            </a:r>
+            <a:r>
+              <a:rPr lang="en-US" altLang="ko-KR" sz="1600" dirty="0"/>
+              <a:t>, </a:t>
+            </a:r>
+            <a:r>
+              <a:rPr lang="ko-KR" altLang="en-US" sz="1600" dirty="0"/>
+              <a:t>구조는 부드럽고 쉽게 부서지는 성질을 갖고 있어</a:t>
+            </a:r>
+            <a:r>
+              <a:rPr lang="en-US" altLang="ko-KR" sz="1600" dirty="0"/>
+              <a:t>, </a:t>
+            </a:r>
+            <a:r>
+              <a:rPr lang="ko-KR" altLang="en-US" sz="1600" dirty="0"/>
+              <a:t>분쇄는 용이하나</a:t>
+            </a:r>
+            <a:r>
+              <a:rPr lang="en-US" altLang="ko-KR" sz="1600" dirty="0"/>
+              <a:t>, </a:t>
+            </a:r>
+            <a:r>
+              <a:rPr lang="ko-KR" altLang="en-US" sz="1600" dirty="0"/>
+              <a:t>취급 과정에서 손실이 발생하기 쉽다</a:t>
+            </a:r>
+            <a:r>
+              <a:rPr lang="en-US" altLang="ko-KR" sz="1600" dirty="0"/>
+              <a:t>.</a:t>
+            </a:r>
+          </a:p>
+          <a:p>
+            <a:pPr marL="377825" indent="-285750">
+              <a:lnSpc>
+                <a:spcPct val="150000"/>
+              </a:lnSpc>
+              <a:buFont typeface="Arial" panose="020B0604020202020204" pitchFamily="34" charset="0"/>
+              <a:buChar char="•"/>
+            </a:pPr>
+            <a:endParaRPr lang="en-US" altLang="ko-KR" sz="1600" dirty="0"/>
+          </a:p>
+          <a:p>
+            <a:pPr marL="377825" indent="-285750">
+              <a:lnSpc>
+                <a:spcPct val="150000"/>
+              </a:lnSpc>
+              <a:buFont typeface="Arial" panose="020B0604020202020204" pitchFamily="34" charset="0"/>
+              <a:buChar char="•"/>
+            </a:pPr>
+            <a:r>
+              <a:rPr lang="ko-KR" altLang="en-US" sz="1600" dirty="0"/>
+              <a:t>갈탄의 발열량은 다른 탄에 비해 낮은 수준이다</a:t>
+            </a:r>
+            <a:r>
+              <a:rPr lang="en-US" altLang="ko-KR" sz="1600" dirty="0"/>
+              <a:t>. (10~20 MJ/kg)</a:t>
+            </a:r>
+          </a:p>
+          <a:p>
+            <a:pPr marL="835025" lvl="1" indent="-285750">
+              <a:lnSpc>
+                <a:spcPct val="150000"/>
+              </a:lnSpc>
+              <a:buFont typeface="Wingdings" panose="05000000000000000000" pitchFamily="2" charset="2"/>
+              <a:buChar char="ü"/>
+            </a:pPr>
+            <a:r>
+              <a:rPr lang="ko-KR" altLang="en-US" sz="1600" dirty="0"/>
+              <a:t>이로 인해 갈탄은 대규모 산업용보다 발전소에서 전력 생산용 연료로 사용된다</a:t>
+            </a:r>
+            <a:r>
+              <a:rPr lang="en-US" altLang="ko-KR" sz="1600" dirty="0"/>
+              <a:t>.</a:t>
+            </a:r>
+          </a:p>
+          <a:p>
+            <a:pPr marL="835025" lvl="1" indent="-285750">
+              <a:lnSpc>
+                <a:spcPct val="150000"/>
+              </a:lnSpc>
+              <a:buFont typeface="Wingdings" panose="05000000000000000000" pitchFamily="2" charset="2"/>
+              <a:buChar char="ü"/>
+            </a:pPr>
+            <a:r>
+              <a:rPr lang="ko-KR" altLang="en-US" sz="1600" dirty="0"/>
+              <a:t>장거리 </a:t>
+            </a:r>
+            <a:r>
+              <a:rPr lang="ko-KR" altLang="en-US" sz="1600" dirty="0" err="1"/>
+              <a:t>수송시</a:t>
+            </a:r>
+            <a:r>
+              <a:rPr lang="ko-KR" altLang="en-US" sz="1600" dirty="0"/>
+              <a:t> 수분이 증발하여 에너지손실과 물류비용이 커지기 때문에 광산 인근에 위치한 광산밀착형 발전소에서 직접 소비되는 경우가 일반적이다</a:t>
+            </a:r>
+            <a:r>
+              <a:rPr lang="en-US" altLang="ko-KR" sz="1600" dirty="0"/>
+              <a:t>.</a:t>
+            </a:r>
+          </a:p>
+        </p:txBody>
+      </p:sp>
+    </p:spTree>
+    <p:extLst>
+      <p:ext uri="{BB962C8B-B14F-4D97-AF65-F5344CB8AC3E}">
+        <p14:creationId xmlns:p14="http://schemas.microsoft.com/office/powerpoint/2010/main" val="2881235819"/>
+      </p:ext>
+    </p:extLst>
+  </p:cSld>
+  <p:clrMapOvr>
+    <a:masterClrMapping/>
+  </p:clrMapOvr>
+</p:sld>
+</file>
+
+<file path=ppt/slides/slide11.xml><?xml version="1.0" encoding="utf-8"?>
+<p:sld xmlns:a="http://schemas.openxmlformats.org/drawingml/2006/main" xmlns:r="http://schemas.openxmlformats.org/officeDocument/2006/relationships" xmlns:p="http://schemas.openxmlformats.org/presentationml/2006/main">
+  <p:cSld>
+    <p:spTree>
+      <p:nvGrpSpPr>
+        <p:cNvPr id="1" name="">
+          <a:extLst>
+            <a:ext uri="{FF2B5EF4-FFF2-40B4-BE49-F238E27FC236}">
+              <a16:creationId xmlns:a16="http://schemas.microsoft.com/office/drawing/2014/main" id="{3C090F2C-3F1B-38F6-9C0F-C2AB119393FC}"/>
+            </a:ext>
+          </a:extLst>
+        </p:cNvPr>
+        <p:cNvGrpSpPr/>
+        <p:nvPr/>
+      </p:nvGrpSpPr>
+      <p:grpSpPr>
+        <a:xfrm>
+          <a:off x="0" y="0"/>
+          <a:ext cx="0" cy="0"/>
+          <a:chOff x="0" y="0"/>
+          <a:chExt cx="0" cy="0"/>
+        </a:xfrm>
+      </p:grpSpPr>
+      <p:sp>
+        <p:nvSpPr>
+          <p:cNvPr id="2" name="제목 1">
+            <a:extLst>
+              <a:ext uri="{FF2B5EF4-FFF2-40B4-BE49-F238E27FC236}">
+                <a16:creationId xmlns:a16="http://schemas.microsoft.com/office/drawing/2014/main" id="{0BF690FD-974C-97D3-ED43-51CCE2E2737F}"/>
+              </a:ext>
+            </a:extLst>
+          </p:cNvPr>
+          <p:cNvSpPr>
+            <a:spLocks noGrp="1"/>
+          </p:cNvSpPr>
+          <p:nvPr>
+            <p:ph type="title"/>
+          </p:nvPr>
+        </p:nvSpPr>
+        <p:spPr/>
+        <p:txBody>
+          <a:bodyPr/>
+          <a:lstStyle/>
+          <a:p>
+            <a:r>
+              <a:rPr lang="ko-KR" altLang="en-US" dirty="0"/>
+              <a:t>석탄의 분류와 특징</a:t>
+            </a:r>
+          </a:p>
+        </p:txBody>
+      </p:sp>
+      <p:sp>
+        <p:nvSpPr>
+          <p:cNvPr id="4" name="슬라이드 번호 개체 틀 3">
+            <a:extLst>
+              <a:ext uri="{FF2B5EF4-FFF2-40B4-BE49-F238E27FC236}">
+                <a16:creationId xmlns:a16="http://schemas.microsoft.com/office/drawing/2014/main" id="{8BA5B807-831D-CED5-05BB-BA2EA954C754}"/>
+              </a:ext>
+            </a:extLst>
+          </p:cNvPr>
+          <p:cNvSpPr>
+            <a:spLocks noGrp="1"/>
+          </p:cNvSpPr>
+          <p:nvPr>
+            <p:ph type="sldNum" sz="quarter" idx="12"/>
+          </p:nvPr>
+        </p:nvSpPr>
+        <p:spPr/>
+        <p:txBody>
+          <a:bodyPr/>
+          <a:lstStyle/>
+          <a:p>
+            <a:fld id="{109C872D-39A9-4065-8BF3-6A613116E2A1}" type="slidenum">
+              <a:rPr lang="ko-KR" altLang="en-US" smtClean="0"/>
+              <a:t>11</a:t>
+            </a:fld>
+            <a:endParaRPr lang="ko-KR" altLang="en-US"/>
+          </a:p>
+        </p:txBody>
+      </p:sp>
+      <p:sp>
+        <p:nvSpPr>
+          <p:cNvPr id="3" name="TextBox 2">
+            <a:extLst>
+              <a:ext uri="{FF2B5EF4-FFF2-40B4-BE49-F238E27FC236}">
+                <a16:creationId xmlns:a16="http://schemas.microsoft.com/office/drawing/2014/main" id="{B7029CBC-506A-EA60-A9F6-E4FB6145ED85}"/>
+              </a:ext>
+            </a:extLst>
+          </p:cNvPr>
+          <p:cNvSpPr txBox="1"/>
+          <p:nvPr/>
+        </p:nvSpPr>
+        <p:spPr>
+          <a:xfrm>
+            <a:off x="288790" y="958844"/>
+            <a:ext cx="11118453" cy="5584670"/>
+          </a:xfrm>
+          <a:prstGeom prst="rect">
+            <a:avLst/>
+          </a:prstGeom>
+          <a:noFill/>
+        </p:spPr>
+        <p:txBody>
+          <a:bodyPr wrap="square" rtlCol="0" anchor="t">
+            <a:spAutoFit/>
+          </a:bodyPr>
+          <a:lstStyle/>
+          <a:p>
+            <a:pPr marL="377825" indent="-285750">
+              <a:lnSpc>
+                <a:spcPct val="150000"/>
+              </a:lnSpc>
+              <a:buFont typeface="Arial" panose="020B0604020202020204" pitchFamily="34" charset="0"/>
+              <a:buChar char="•"/>
+            </a:pPr>
+            <a:r>
+              <a:rPr lang="ko-KR" altLang="en-US" sz="1600" dirty="0"/>
+              <a:t>갈탄은 에너지 밀도가 낮고</a:t>
+            </a:r>
+            <a:r>
+              <a:rPr lang="en-US" altLang="ko-KR" sz="1600" dirty="0"/>
+              <a:t>, </a:t>
+            </a:r>
+            <a:r>
+              <a:rPr lang="ko-KR" altLang="en-US" sz="1600" dirty="0" err="1"/>
+              <a:t>연소시</a:t>
+            </a:r>
+            <a:r>
+              <a:rPr lang="ko-KR" altLang="en-US" sz="1600" dirty="0"/>
+              <a:t> 오염물질 </a:t>
+            </a:r>
+            <a:r>
+              <a:rPr lang="en-US" altLang="ko-KR" sz="1600" dirty="0"/>
+              <a:t>(</a:t>
+            </a:r>
+            <a:r>
+              <a:rPr lang="ko-KR" altLang="en-US" sz="1600" dirty="0"/>
+              <a:t>이산화탄소</a:t>
+            </a:r>
+            <a:r>
+              <a:rPr lang="en-US" altLang="ko-KR" sz="1600" dirty="0"/>
+              <a:t>, </a:t>
+            </a:r>
+            <a:r>
+              <a:rPr lang="ko-KR" altLang="en-US" sz="1600" dirty="0"/>
+              <a:t>질소산화물</a:t>
+            </a:r>
+            <a:r>
+              <a:rPr lang="en-US" altLang="ko-KR" sz="1600" dirty="0"/>
+              <a:t>, </a:t>
+            </a:r>
+            <a:r>
+              <a:rPr lang="ko-KR" altLang="en-US" sz="1600" dirty="0"/>
+              <a:t>황산화물 등</a:t>
+            </a:r>
+            <a:r>
+              <a:rPr lang="en-US" altLang="ko-KR" sz="1600" dirty="0"/>
+              <a:t>)</a:t>
+            </a:r>
+            <a:r>
+              <a:rPr lang="ko-KR" altLang="en-US" sz="1600" dirty="0"/>
+              <a:t>을 다량 배출하기 때문에</a:t>
+            </a:r>
+            <a:r>
+              <a:rPr lang="en-US" altLang="ko-KR" sz="1600" dirty="0"/>
+              <a:t>, </a:t>
+            </a:r>
+            <a:r>
+              <a:rPr lang="ko-KR" altLang="en-US" sz="1600" dirty="0"/>
+              <a:t>환경적 측면에서는 가장 부정적인 평가를 받는다</a:t>
+            </a:r>
+            <a:r>
+              <a:rPr lang="en-US" altLang="ko-KR" sz="1600" dirty="0"/>
+              <a:t>.</a:t>
+            </a:r>
+          </a:p>
+          <a:p>
+            <a:pPr marL="835025" lvl="1" indent="-285750">
+              <a:lnSpc>
+                <a:spcPct val="150000"/>
+              </a:lnSpc>
+              <a:buFont typeface="Wingdings" panose="05000000000000000000" pitchFamily="2" charset="2"/>
+              <a:buChar char="ü"/>
+            </a:pPr>
+            <a:r>
+              <a:rPr lang="ko-KR" altLang="en-US" sz="1600" dirty="0"/>
+              <a:t>이러한 환경문제로 많은 국가에서 갈탄 기반 발전소 신규건설을 제한하고</a:t>
+            </a:r>
+            <a:r>
+              <a:rPr lang="en-US" altLang="ko-KR" sz="1600" dirty="0"/>
+              <a:t>, </a:t>
+            </a:r>
+            <a:r>
+              <a:rPr lang="ko-KR" altLang="en-US" sz="1600" dirty="0"/>
+              <a:t>조기퇴출을 검토하고 있다</a:t>
+            </a:r>
+            <a:r>
+              <a:rPr lang="en-US" altLang="ko-KR" sz="1600" dirty="0"/>
+              <a:t>.</a:t>
+            </a:r>
+          </a:p>
+          <a:p>
+            <a:pPr marL="835025" lvl="1" indent="-285750">
+              <a:lnSpc>
+                <a:spcPct val="150000"/>
+              </a:lnSpc>
+              <a:buFont typeface="Wingdings" panose="05000000000000000000" pitchFamily="2" charset="2"/>
+              <a:buChar char="ü"/>
+            </a:pPr>
+            <a:r>
+              <a:rPr lang="ko-KR" altLang="en-US" sz="1600" dirty="0"/>
+              <a:t>갈탄 자원이 풍부한 국가에서는 여전히 경제성과 접근성 측면에서 중요한 역할을 담당하고 있다</a:t>
+            </a:r>
+            <a:r>
+              <a:rPr lang="en-US" altLang="ko-KR" sz="1600" dirty="0"/>
+              <a:t>.</a:t>
+            </a:r>
+          </a:p>
+          <a:p>
+            <a:pPr marL="835025" lvl="1" indent="-285750">
+              <a:lnSpc>
+                <a:spcPct val="150000"/>
+              </a:lnSpc>
+              <a:buFont typeface="Wingdings" panose="05000000000000000000" pitchFamily="2" charset="2"/>
+              <a:buChar char="ü"/>
+            </a:pPr>
+            <a:endParaRPr lang="en-US" altLang="ko-KR" sz="1600" dirty="0"/>
+          </a:p>
+          <a:p>
+            <a:pPr marL="92075">
+              <a:lnSpc>
+                <a:spcPct val="150000"/>
+              </a:lnSpc>
+            </a:pPr>
+            <a:r>
+              <a:rPr lang="ko-KR" altLang="en-US" sz="1600" u="sng" dirty="0" err="1">
+                <a:ln w="3175">
+                  <a:noFill/>
+                </a:ln>
+                <a:latin typeface="HY헤드라인M" panose="02030600000101010101" pitchFamily="18" charset="-127"/>
+                <a:ea typeface="HY헤드라인M" panose="02030600000101010101" pitchFamily="18" charset="-127"/>
+              </a:rPr>
+              <a:t>아역청탄</a:t>
+            </a:r>
+            <a:endParaRPr lang="en-US" altLang="ko-KR" sz="1600" u="sng" dirty="0">
+              <a:ln w="3175">
+                <a:noFill/>
+              </a:ln>
+              <a:latin typeface="HY헤드라인M" panose="02030600000101010101" pitchFamily="18" charset="-127"/>
+              <a:ea typeface="HY헤드라인M" panose="02030600000101010101" pitchFamily="18" charset="-127"/>
+            </a:endParaRPr>
+          </a:p>
+          <a:p>
+            <a:pPr marL="377825" indent="-285750">
+              <a:lnSpc>
+                <a:spcPct val="150000"/>
+              </a:lnSpc>
+              <a:buFont typeface="Arial" panose="020B0604020202020204" pitchFamily="34" charset="0"/>
+              <a:buChar char="•"/>
+            </a:pPr>
+            <a:r>
+              <a:rPr lang="ko-KR" altLang="en-US" sz="1600" dirty="0" err="1"/>
+              <a:t>아역청탄은</a:t>
+            </a:r>
+            <a:r>
+              <a:rPr lang="ko-KR" altLang="en-US" sz="1600" dirty="0"/>
+              <a:t> 석탄화 정도가 갈탄보다 더 진행된 중간단계의 </a:t>
+            </a:r>
+            <a:r>
+              <a:rPr lang="ko-KR" altLang="en-US" sz="1600" dirty="0" err="1"/>
+              <a:t>저등급</a:t>
+            </a:r>
+            <a:r>
+              <a:rPr lang="ko-KR" altLang="en-US" sz="1600" dirty="0"/>
+              <a:t> 석탄이다</a:t>
+            </a:r>
+            <a:r>
+              <a:rPr lang="en-US" altLang="ko-KR" sz="1600" dirty="0"/>
+              <a:t>.</a:t>
+            </a:r>
+          </a:p>
+          <a:p>
+            <a:pPr marL="835025" lvl="1" indent="-285750">
+              <a:lnSpc>
+                <a:spcPct val="150000"/>
+              </a:lnSpc>
+              <a:buFont typeface="Wingdings" panose="05000000000000000000" pitchFamily="2" charset="2"/>
+              <a:buChar char="ü"/>
+            </a:pPr>
+            <a:r>
+              <a:rPr lang="ko-KR" altLang="en-US" sz="1600" dirty="0"/>
+              <a:t>탄소함량은 </a:t>
+            </a:r>
+            <a:r>
+              <a:rPr lang="en-US" altLang="ko-KR" sz="1600" dirty="0"/>
+              <a:t>40% </a:t>
+            </a:r>
+            <a:r>
+              <a:rPr lang="ko-KR" altLang="en-US" sz="1600" dirty="0"/>
+              <a:t>수준이고</a:t>
+            </a:r>
+            <a:r>
+              <a:rPr lang="en-US" altLang="ko-KR" sz="1600" dirty="0"/>
+              <a:t>, </a:t>
+            </a:r>
+            <a:r>
+              <a:rPr lang="ko-KR" altLang="en-US" sz="1600" dirty="0"/>
+              <a:t>상대적으로 낮은 휘발분과 수분함량을 갖고 있다</a:t>
+            </a:r>
+            <a:r>
+              <a:rPr lang="en-US" altLang="ko-KR" sz="1600" dirty="0"/>
+              <a:t>.</a:t>
+            </a:r>
+          </a:p>
+          <a:p>
+            <a:pPr marL="835025" lvl="1" indent="-285750">
+              <a:lnSpc>
+                <a:spcPct val="150000"/>
+              </a:lnSpc>
+              <a:buFont typeface="Wingdings" panose="05000000000000000000" pitchFamily="2" charset="2"/>
+              <a:buChar char="ü"/>
+            </a:pPr>
+            <a:r>
+              <a:rPr lang="ko-KR" altLang="en-US" sz="1600" dirty="0"/>
+              <a:t>외관상 칙칙한 검은색 또는 어두운 회갈색이며</a:t>
+            </a:r>
+            <a:r>
+              <a:rPr lang="en-US" altLang="ko-KR" sz="1600" dirty="0"/>
+              <a:t>, </a:t>
+            </a:r>
+            <a:r>
+              <a:rPr lang="ko-KR" altLang="en-US" sz="1600" dirty="0"/>
+              <a:t>조직은 갈탄보다 치밀하고 견고하나</a:t>
+            </a:r>
+            <a:r>
+              <a:rPr lang="en-US" altLang="ko-KR" sz="1600" dirty="0"/>
+              <a:t>, </a:t>
+            </a:r>
+            <a:r>
+              <a:rPr lang="ko-KR" altLang="en-US" sz="1600" dirty="0"/>
+              <a:t>무연탄이나 역청탄에 비해 부드럽다</a:t>
+            </a:r>
+            <a:r>
+              <a:rPr lang="en-US" altLang="ko-KR" sz="1600" dirty="0"/>
+              <a:t>.</a:t>
+            </a:r>
+          </a:p>
+          <a:p>
+            <a:pPr marL="835025" lvl="1" indent="-285750">
+              <a:lnSpc>
+                <a:spcPct val="150000"/>
+              </a:lnSpc>
+              <a:buFont typeface="Wingdings" panose="05000000000000000000" pitchFamily="2" charset="2"/>
+              <a:buChar char="ü"/>
+            </a:pPr>
+            <a:endParaRPr lang="en-US" altLang="ko-KR" sz="1600" dirty="0"/>
+          </a:p>
+          <a:p>
+            <a:pPr marL="377825" indent="-285750">
+              <a:lnSpc>
+                <a:spcPct val="150000"/>
+              </a:lnSpc>
+              <a:buFont typeface="Arial" panose="020B0604020202020204" pitchFamily="34" charset="0"/>
+              <a:buChar char="•"/>
+            </a:pPr>
+            <a:r>
+              <a:rPr lang="ko-KR" altLang="en-US" sz="1600" dirty="0" err="1"/>
+              <a:t>아역청탄은</a:t>
+            </a:r>
+            <a:r>
+              <a:rPr lang="ko-KR" altLang="en-US" sz="1600" dirty="0"/>
+              <a:t> 갈탄에 비해 상대적으로 발열량이 높다</a:t>
+            </a:r>
+            <a:r>
+              <a:rPr lang="en-US" altLang="ko-KR" sz="1600" dirty="0"/>
+              <a:t>. (18~24 MJ/kg)</a:t>
+            </a:r>
+          </a:p>
+          <a:p>
+            <a:pPr marL="835025" lvl="1" indent="-285750">
+              <a:lnSpc>
+                <a:spcPct val="150000"/>
+              </a:lnSpc>
+              <a:buFont typeface="Wingdings" panose="05000000000000000000" pitchFamily="2" charset="2"/>
+              <a:buChar char="ü"/>
+            </a:pPr>
+            <a:r>
+              <a:rPr lang="ko-KR" altLang="en-US" sz="1600" dirty="0"/>
+              <a:t>갈탄에 비해 에너지 효율이 높아 전력 생산용으로 널리 활용된다</a:t>
+            </a:r>
+            <a:r>
+              <a:rPr lang="en-US" altLang="ko-KR" sz="1600" dirty="0"/>
+              <a:t>.</a:t>
+            </a:r>
+          </a:p>
+          <a:p>
+            <a:pPr marL="835025" lvl="1" indent="-285750">
+              <a:lnSpc>
+                <a:spcPct val="150000"/>
+              </a:lnSpc>
+              <a:buFont typeface="Wingdings" panose="05000000000000000000" pitchFamily="2" charset="2"/>
+              <a:buChar char="ü"/>
+            </a:pPr>
+            <a:r>
+              <a:rPr lang="ko-KR" altLang="en-US" sz="1600" dirty="0"/>
+              <a:t>연소 특성이 안정적이고</a:t>
+            </a:r>
+            <a:r>
+              <a:rPr lang="en-US" altLang="ko-KR" sz="1600" dirty="0"/>
+              <a:t>, </a:t>
+            </a:r>
+            <a:r>
+              <a:rPr lang="ko-KR" altLang="en-US" sz="1600" dirty="0"/>
+              <a:t>회분 함량이 낮고</a:t>
+            </a:r>
+            <a:r>
+              <a:rPr lang="en-US" altLang="ko-KR" sz="1600" dirty="0"/>
+              <a:t>, </a:t>
+            </a:r>
+            <a:r>
+              <a:rPr lang="ko-KR" altLang="en-US" sz="1600" dirty="0"/>
+              <a:t>연소 온도가 상대적으로 낮다</a:t>
+            </a:r>
+            <a:r>
+              <a:rPr lang="en-US" altLang="ko-KR" sz="1600" dirty="0"/>
+              <a:t>.</a:t>
+            </a:r>
+          </a:p>
+          <a:p>
+            <a:pPr marL="835025" lvl="1" indent="-285750">
+              <a:lnSpc>
+                <a:spcPct val="150000"/>
+              </a:lnSpc>
+              <a:buFont typeface="Wingdings" panose="05000000000000000000" pitchFamily="2" charset="2"/>
+              <a:buChar char="ü"/>
+            </a:pPr>
+            <a:r>
+              <a:rPr lang="ko-KR" altLang="en-US" sz="1600" dirty="0"/>
+              <a:t>석탄화력을 주요 전력 공급원으로 작용하는 국가에서는 경제성과 실용성을 갖춘 연료로 활용된다</a:t>
+            </a:r>
+            <a:r>
+              <a:rPr lang="en-US" altLang="ko-KR" sz="1600" dirty="0"/>
+              <a:t>.</a:t>
+            </a:r>
+          </a:p>
+        </p:txBody>
+      </p:sp>
+    </p:spTree>
+    <p:extLst>
+      <p:ext uri="{BB962C8B-B14F-4D97-AF65-F5344CB8AC3E}">
+        <p14:creationId xmlns:p14="http://schemas.microsoft.com/office/powerpoint/2010/main" val="3587220839"/>
+      </p:ext>
+    </p:extLst>
+  </p:cSld>
+  <p:clrMapOvr>
+    <a:masterClrMapping/>
+  </p:clrMapOvr>
+</p:sld>
+</file>
+
+<file path=ppt/slides/slide12.xml><?xml version="1.0" encoding="utf-8"?>
+<p:sld xmlns:a="http://schemas.openxmlformats.org/drawingml/2006/main" xmlns:r="http://schemas.openxmlformats.org/officeDocument/2006/relationships" xmlns:p="http://schemas.openxmlformats.org/presentationml/2006/main">
+  <p:cSld>
+    <p:spTree>
+      <p:nvGrpSpPr>
+        <p:cNvPr id="1" name="">
+          <a:extLst>
+            <a:ext uri="{FF2B5EF4-FFF2-40B4-BE49-F238E27FC236}">
+              <a16:creationId xmlns:a16="http://schemas.microsoft.com/office/drawing/2014/main" id="{6E24680E-2B40-5B44-0272-709EBC024A71}"/>
+            </a:ext>
+          </a:extLst>
+        </p:cNvPr>
+        <p:cNvGrpSpPr/>
+        <p:nvPr/>
+      </p:nvGrpSpPr>
+      <p:grpSpPr>
+        <a:xfrm>
+          <a:off x="0" y="0"/>
+          <a:ext cx="0" cy="0"/>
+          <a:chOff x="0" y="0"/>
+          <a:chExt cx="0" cy="0"/>
+        </a:xfrm>
+      </p:grpSpPr>
+      <p:sp>
+        <p:nvSpPr>
+          <p:cNvPr id="2" name="제목 1">
+            <a:extLst>
+              <a:ext uri="{FF2B5EF4-FFF2-40B4-BE49-F238E27FC236}">
+                <a16:creationId xmlns:a16="http://schemas.microsoft.com/office/drawing/2014/main" id="{5AFBA020-5B08-FF16-59E4-0CE13A9DA948}"/>
+              </a:ext>
+            </a:extLst>
+          </p:cNvPr>
+          <p:cNvSpPr>
+            <a:spLocks noGrp="1"/>
+          </p:cNvSpPr>
+          <p:nvPr>
+            <p:ph type="title"/>
+          </p:nvPr>
+        </p:nvSpPr>
+        <p:spPr/>
+        <p:txBody>
+          <a:bodyPr/>
+          <a:lstStyle/>
+          <a:p>
+            <a:r>
+              <a:rPr lang="ko-KR" altLang="en-US" dirty="0"/>
+              <a:t>석탄의 분류와 특징</a:t>
+            </a:r>
+          </a:p>
+        </p:txBody>
+      </p:sp>
+      <p:sp>
+        <p:nvSpPr>
+          <p:cNvPr id="4" name="슬라이드 번호 개체 틀 3">
+            <a:extLst>
+              <a:ext uri="{FF2B5EF4-FFF2-40B4-BE49-F238E27FC236}">
+                <a16:creationId xmlns:a16="http://schemas.microsoft.com/office/drawing/2014/main" id="{3D60FCC8-15D6-8232-334B-E4FCE59F613D}"/>
+              </a:ext>
+            </a:extLst>
+          </p:cNvPr>
+          <p:cNvSpPr>
+            <a:spLocks noGrp="1"/>
+          </p:cNvSpPr>
+          <p:nvPr>
+            <p:ph type="sldNum" sz="quarter" idx="12"/>
+          </p:nvPr>
+        </p:nvSpPr>
+        <p:spPr/>
+        <p:txBody>
+          <a:bodyPr/>
+          <a:lstStyle/>
+          <a:p>
+            <a:fld id="{109C872D-39A9-4065-8BF3-6A613116E2A1}" type="slidenum">
+              <a:rPr lang="ko-KR" altLang="en-US" smtClean="0"/>
+              <a:t>12</a:t>
+            </a:fld>
+            <a:endParaRPr lang="ko-KR" altLang="en-US"/>
+          </a:p>
+        </p:txBody>
+      </p:sp>
+      <p:sp>
+        <p:nvSpPr>
+          <p:cNvPr id="3" name="TextBox 2">
+            <a:extLst>
+              <a:ext uri="{FF2B5EF4-FFF2-40B4-BE49-F238E27FC236}">
+                <a16:creationId xmlns:a16="http://schemas.microsoft.com/office/drawing/2014/main" id="{0C1A781F-C092-84FA-21D4-8D4A01C77E78}"/>
+              </a:ext>
+            </a:extLst>
+          </p:cNvPr>
+          <p:cNvSpPr txBox="1"/>
+          <p:nvPr/>
+        </p:nvSpPr>
+        <p:spPr>
+          <a:xfrm>
+            <a:off x="288790" y="958844"/>
+            <a:ext cx="11118453" cy="5584670"/>
+          </a:xfrm>
+          <a:prstGeom prst="rect">
+            <a:avLst/>
+          </a:prstGeom>
+          <a:noFill/>
+        </p:spPr>
+        <p:txBody>
+          <a:bodyPr wrap="square" rtlCol="0" anchor="t">
+            <a:spAutoFit/>
+          </a:bodyPr>
+          <a:lstStyle/>
+          <a:p>
+            <a:pPr marL="377825" indent="-285750">
+              <a:lnSpc>
+                <a:spcPct val="150000"/>
+              </a:lnSpc>
+              <a:buFont typeface="Arial" panose="020B0604020202020204" pitchFamily="34" charset="0"/>
+              <a:buChar char="•"/>
+            </a:pPr>
+            <a:r>
+              <a:rPr lang="ko-KR" altLang="en-US" sz="1600" dirty="0" err="1"/>
+              <a:t>아역청탄은</a:t>
+            </a:r>
+            <a:r>
+              <a:rPr lang="ko-KR" altLang="en-US" sz="1600" dirty="0"/>
+              <a:t> 미국</a:t>
+            </a:r>
+            <a:r>
+              <a:rPr lang="en-US" altLang="ko-KR" sz="1600" dirty="0"/>
+              <a:t>, </a:t>
+            </a:r>
+            <a:r>
+              <a:rPr lang="ko-KR" altLang="en-US" sz="1600" dirty="0"/>
+              <a:t>인도네시아</a:t>
+            </a:r>
+            <a:r>
+              <a:rPr lang="en-US" altLang="ko-KR" sz="1600" dirty="0"/>
+              <a:t>, </a:t>
+            </a:r>
+            <a:r>
+              <a:rPr lang="ko-KR" altLang="en-US" sz="1600" dirty="0"/>
+              <a:t>러시아</a:t>
+            </a:r>
+            <a:r>
+              <a:rPr lang="en-US" altLang="ko-KR" sz="1600" dirty="0"/>
+              <a:t>, </a:t>
+            </a:r>
+            <a:r>
+              <a:rPr lang="ko-KR" altLang="en-US" sz="1600" dirty="0"/>
+              <a:t>중국 등 광범위하게 매장되어 있다</a:t>
+            </a:r>
+            <a:r>
+              <a:rPr lang="en-US" altLang="ko-KR" sz="1600" dirty="0"/>
+              <a:t>.</a:t>
+            </a:r>
+          </a:p>
+          <a:p>
+            <a:pPr marL="835025" lvl="1" indent="-285750">
+              <a:lnSpc>
+                <a:spcPct val="150000"/>
+              </a:lnSpc>
+              <a:buFont typeface="Wingdings" panose="05000000000000000000" pitchFamily="2" charset="2"/>
+              <a:buChar char="ü"/>
+            </a:pPr>
+            <a:r>
+              <a:rPr lang="ko-KR" altLang="en-US" sz="1600" dirty="0"/>
+              <a:t>미국 </a:t>
+            </a:r>
+            <a:r>
+              <a:rPr lang="ko-KR" altLang="en-US" sz="1600" dirty="0" err="1"/>
+              <a:t>와이오밍</a:t>
+            </a:r>
+            <a:r>
+              <a:rPr lang="ko-KR" altLang="en-US" sz="1600" dirty="0"/>
+              <a:t> 주의 </a:t>
+            </a:r>
+            <a:r>
+              <a:rPr lang="ko-KR" altLang="en-US" sz="1600" dirty="0" err="1"/>
+              <a:t>파우더리버</a:t>
+            </a:r>
+            <a:r>
+              <a:rPr lang="ko-KR" altLang="en-US" sz="1600" dirty="0"/>
+              <a:t> 분지는 세계에서 가장 큰 </a:t>
+            </a:r>
+            <a:r>
+              <a:rPr lang="ko-KR" altLang="en-US" sz="1600" dirty="0" err="1"/>
+              <a:t>아역청탄</a:t>
+            </a:r>
+            <a:r>
+              <a:rPr lang="ko-KR" altLang="en-US" sz="1600" dirty="0"/>
+              <a:t> 생산지 중 하나이다</a:t>
+            </a:r>
+            <a:r>
+              <a:rPr lang="en-US" altLang="ko-KR" sz="1600" dirty="0"/>
+              <a:t>.</a:t>
+            </a:r>
+          </a:p>
+          <a:p>
+            <a:pPr marL="835025" lvl="1" indent="-285750">
+              <a:lnSpc>
+                <a:spcPct val="150000"/>
+              </a:lnSpc>
+              <a:buFont typeface="Wingdings" panose="05000000000000000000" pitchFamily="2" charset="2"/>
+              <a:buChar char="ü"/>
+            </a:pPr>
+            <a:r>
+              <a:rPr lang="ko-KR" altLang="en-US" sz="1600" dirty="0"/>
+              <a:t>인도네시아는 동남아시아 최대의 석탄 수출국으로</a:t>
+            </a:r>
+            <a:r>
+              <a:rPr lang="en-US" altLang="ko-KR" sz="1600" dirty="0"/>
+              <a:t>, </a:t>
+            </a:r>
+            <a:r>
+              <a:rPr lang="ko-KR" altLang="en-US" sz="1600" dirty="0" err="1"/>
+              <a:t>아역청탄을</a:t>
+            </a:r>
+            <a:r>
+              <a:rPr lang="ko-KR" altLang="en-US" sz="1600" dirty="0"/>
+              <a:t> 중심으로 아시아 시장에 대한 공급을 지속적으로 확대하고 있다</a:t>
+            </a:r>
+            <a:r>
+              <a:rPr lang="en-US" altLang="ko-KR" sz="1600" dirty="0"/>
+              <a:t>.</a:t>
+            </a:r>
+          </a:p>
+          <a:p>
+            <a:pPr marL="377825" indent="-285750">
+              <a:lnSpc>
+                <a:spcPct val="150000"/>
+              </a:lnSpc>
+              <a:buFont typeface="Arial" panose="020B0604020202020204" pitchFamily="34" charset="0"/>
+              <a:buChar char="•"/>
+            </a:pPr>
+            <a:r>
+              <a:rPr lang="ko-KR" altLang="en-US" sz="1600" dirty="0"/>
+              <a:t>환경적 측면에서 </a:t>
+            </a:r>
+            <a:r>
+              <a:rPr lang="ko-KR" altLang="en-US" sz="1600" dirty="0" err="1"/>
+              <a:t>아역청탄이</a:t>
+            </a:r>
+            <a:r>
+              <a:rPr lang="ko-KR" altLang="en-US" sz="1600" dirty="0"/>
+              <a:t> 갈탄보다 온실가스 및 대기오염물질 배출량이 적지만</a:t>
+            </a:r>
+            <a:r>
+              <a:rPr lang="en-US" altLang="ko-KR" sz="1600" dirty="0"/>
+              <a:t>, </a:t>
+            </a:r>
+            <a:r>
+              <a:rPr lang="ko-KR" altLang="en-US" sz="1600" dirty="0"/>
+              <a:t>여전히 재생에너지 및 천연가스에 비해 탄소배출량이 높아 기후정책에 의해 제한되는 추세이다</a:t>
+            </a:r>
+            <a:r>
+              <a:rPr lang="en-US" altLang="ko-KR" sz="1600" dirty="0"/>
+              <a:t>.</a:t>
+            </a:r>
+          </a:p>
+          <a:p>
+            <a:pPr marL="377825" indent="-285750">
+              <a:lnSpc>
+                <a:spcPct val="150000"/>
+              </a:lnSpc>
+              <a:buFont typeface="Arial" panose="020B0604020202020204" pitchFamily="34" charset="0"/>
+              <a:buChar char="•"/>
+            </a:pPr>
+            <a:endParaRPr lang="en-US" altLang="ko-KR" sz="1600" dirty="0"/>
+          </a:p>
+          <a:p>
+            <a:pPr marL="377825" indent="-285750">
+              <a:lnSpc>
+                <a:spcPct val="150000"/>
+              </a:lnSpc>
+              <a:buFont typeface="Arial" panose="020B0604020202020204" pitchFamily="34" charset="0"/>
+              <a:buChar char="•"/>
+            </a:pPr>
+            <a:endParaRPr lang="en-US" altLang="ko-KR" sz="1600" dirty="0"/>
+          </a:p>
+          <a:p>
+            <a:pPr marL="92075">
+              <a:lnSpc>
+                <a:spcPct val="150000"/>
+              </a:lnSpc>
+            </a:pPr>
+            <a:r>
+              <a:rPr lang="ko-KR" altLang="en-US" sz="1600" u="sng" dirty="0">
+                <a:ln w="3175">
+                  <a:noFill/>
+                </a:ln>
+                <a:latin typeface="HY헤드라인M" panose="02030600000101010101" pitchFamily="18" charset="-127"/>
+                <a:ea typeface="HY헤드라인M" panose="02030600000101010101" pitchFamily="18" charset="-127"/>
+              </a:rPr>
+              <a:t>역청탄</a:t>
+            </a:r>
+            <a:endParaRPr lang="en-US" altLang="ko-KR" sz="1600" u="sng" dirty="0">
+              <a:ln w="3175">
+                <a:noFill/>
+              </a:ln>
+              <a:latin typeface="HY헤드라인M" panose="02030600000101010101" pitchFamily="18" charset="-127"/>
+              <a:ea typeface="HY헤드라인M" panose="02030600000101010101" pitchFamily="18" charset="-127"/>
+            </a:endParaRPr>
+          </a:p>
+          <a:p>
+            <a:pPr marL="377825" indent="-285750">
+              <a:lnSpc>
+                <a:spcPct val="150000"/>
+              </a:lnSpc>
+              <a:buFont typeface="Arial" panose="020B0604020202020204" pitchFamily="34" charset="0"/>
+              <a:buChar char="•"/>
+            </a:pPr>
+            <a:r>
+              <a:rPr lang="ko-KR" altLang="en-US" sz="1600" dirty="0"/>
+              <a:t>전세계적으로 가장 널리 사용되는 중</a:t>
+            </a:r>
+            <a:r>
+              <a:rPr lang="en-US" altLang="ko-KR" sz="1600" dirty="0"/>
+              <a:t>·</a:t>
+            </a:r>
+            <a:r>
+              <a:rPr lang="ko-KR" altLang="en-US" sz="1600" dirty="0" err="1"/>
+              <a:t>고등급</a:t>
+            </a:r>
+            <a:r>
+              <a:rPr lang="ko-KR" altLang="en-US" sz="1600" dirty="0"/>
+              <a:t> 석탄이다</a:t>
+            </a:r>
+            <a:r>
+              <a:rPr lang="en-US" altLang="ko-KR" sz="1600" dirty="0"/>
+              <a:t>.</a:t>
+            </a:r>
+          </a:p>
+          <a:p>
+            <a:pPr marL="835025" lvl="1" indent="-285750">
+              <a:lnSpc>
+                <a:spcPct val="150000"/>
+              </a:lnSpc>
+              <a:buFont typeface="Wingdings" panose="05000000000000000000" pitchFamily="2" charset="2"/>
+              <a:buChar char="ü"/>
+            </a:pPr>
+            <a:r>
+              <a:rPr lang="ko-KR" altLang="en-US" sz="1600" dirty="0"/>
+              <a:t>석탄화 정도가 갈탄이나 </a:t>
+            </a:r>
+            <a:r>
+              <a:rPr lang="ko-KR" altLang="en-US" sz="1600" dirty="0" err="1"/>
+              <a:t>아역청탄보다</a:t>
+            </a:r>
+            <a:r>
+              <a:rPr lang="ko-KR" altLang="en-US" sz="1600" dirty="0"/>
+              <a:t> 훨씬 높고</a:t>
+            </a:r>
+            <a:r>
+              <a:rPr lang="en-US" altLang="ko-KR" sz="1600" dirty="0"/>
+              <a:t>, </a:t>
+            </a:r>
+            <a:r>
+              <a:rPr lang="ko-KR" altLang="en-US" sz="1600" dirty="0"/>
+              <a:t>탄소 함량은 </a:t>
+            </a:r>
+            <a:r>
+              <a:rPr lang="en-US" altLang="ko-KR" sz="1600" dirty="0"/>
+              <a:t>45~86%</a:t>
+            </a:r>
+            <a:r>
+              <a:rPr lang="ko-KR" altLang="en-US" sz="1600" dirty="0"/>
+              <a:t>에 이른다</a:t>
+            </a:r>
+            <a:r>
+              <a:rPr lang="en-US" altLang="ko-KR" sz="1600" dirty="0"/>
+              <a:t>.</a:t>
+            </a:r>
+          </a:p>
+          <a:p>
+            <a:pPr marL="835025" lvl="1" indent="-285750">
+              <a:lnSpc>
+                <a:spcPct val="150000"/>
+              </a:lnSpc>
+              <a:buFont typeface="Wingdings" panose="05000000000000000000" pitchFamily="2" charset="2"/>
+              <a:buChar char="ü"/>
+            </a:pPr>
+            <a:r>
+              <a:rPr lang="ko-KR" altLang="en-US" sz="1600" dirty="0"/>
+              <a:t>수분과 </a:t>
+            </a:r>
+            <a:r>
+              <a:rPr lang="ko-KR" altLang="en-US" sz="1600" dirty="0" err="1"/>
+              <a:t>휘발분</a:t>
+            </a:r>
+            <a:r>
+              <a:rPr lang="ko-KR" altLang="en-US" sz="1600" dirty="0"/>
+              <a:t> 함량이 낮아 </a:t>
+            </a:r>
+            <a:r>
+              <a:rPr lang="ko-KR" altLang="en-US" sz="1600" dirty="0" err="1"/>
+              <a:t>연료로서의</a:t>
+            </a:r>
+            <a:r>
+              <a:rPr lang="ko-KR" altLang="en-US" sz="1600" dirty="0"/>
+              <a:t> 품질이 우수하고</a:t>
+            </a:r>
+            <a:r>
+              <a:rPr lang="en-US" altLang="ko-KR" sz="1600" dirty="0"/>
+              <a:t>, </a:t>
+            </a:r>
+            <a:r>
+              <a:rPr lang="ko-KR" altLang="en-US" sz="1600" dirty="0"/>
+              <a:t>에너지 밀도가 높다</a:t>
+            </a:r>
+            <a:r>
+              <a:rPr lang="en-US" altLang="ko-KR" sz="1600" dirty="0"/>
+              <a:t>.</a:t>
+            </a:r>
+          </a:p>
+          <a:p>
+            <a:pPr marL="835025" lvl="1" indent="-285750">
+              <a:lnSpc>
+                <a:spcPct val="150000"/>
+              </a:lnSpc>
+              <a:buFont typeface="Wingdings" panose="05000000000000000000" pitchFamily="2" charset="2"/>
+              <a:buChar char="ü"/>
+            </a:pPr>
+            <a:r>
+              <a:rPr lang="ko-KR" altLang="en-US" sz="1600" dirty="0"/>
+              <a:t>광택이 나는 흑색이고</a:t>
+            </a:r>
+            <a:r>
+              <a:rPr lang="en-US" altLang="ko-KR" sz="1600" dirty="0"/>
+              <a:t>, </a:t>
+            </a:r>
+            <a:r>
+              <a:rPr lang="ko-KR" altLang="en-US" sz="1600" dirty="0"/>
+              <a:t>구조는 단단하고 치밀하여 기계적 강도가 높다</a:t>
+            </a:r>
+            <a:r>
+              <a:rPr lang="en-US" altLang="ko-KR" sz="1600" dirty="0"/>
+              <a:t>.</a:t>
+            </a:r>
+          </a:p>
+          <a:p>
+            <a:pPr marL="835025" lvl="1" indent="-285750">
+              <a:lnSpc>
+                <a:spcPct val="150000"/>
+              </a:lnSpc>
+              <a:buFont typeface="Wingdings" panose="05000000000000000000" pitchFamily="2" charset="2"/>
+              <a:buChar char="ü"/>
+            </a:pPr>
+            <a:endParaRPr lang="en-US" altLang="ko-KR" sz="1600" dirty="0"/>
+          </a:p>
+          <a:p>
+            <a:pPr marL="377825" indent="-285750">
+              <a:lnSpc>
+                <a:spcPct val="150000"/>
+              </a:lnSpc>
+              <a:buFont typeface="Arial" panose="020B0604020202020204" pitchFamily="34" charset="0"/>
+              <a:buChar char="•"/>
+            </a:pPr>
+            <a:endParaRPr lang="en-US" altLang="ko-KR" sz="1600" dirty="0"/>
+          </a:p>
+        </p:txBody>
+      </p:sp>
+    </p:spTree>
+    <p:extLst>
+      <p:ext uri="{BB962C8B-B14F-4D97-AF65-F5344CB8AC3E}">
+        <p14:creationId xmlns:p14="http://schemas.microsoft.com/office/powerpoint/2010/main" val="3216323162"/>
+      </p:ext>
+    </p:extLst>
+  </p:cSld>
+  <p:clrMapOvr>
+    <a:masterClrMapping/>
+  </p:clrMapOvr>
+</p:sld>
+</file>
+
+<file path=ppt/slides/slide13.xml><?xml version="1.0" encoding="utf-8"?>
+<p:sld xmlns:a="http://schemas.openxmlformats.org/drawingml/2006/main" xmlns:r="http://schemas.openxmlformats.org/officeDocument/2006/relationships" xmlns:p="http://schemas.openxmlformats.org/presentationml/2006/main">
+  <p:cSld>
+    <p:spTree>
+      <p:nvGrpSpPr>
+        <p:cNvPr id="1" name="">
+          <a:extLst>
+            <a:ext uri="{FF2B5EF4-FFF2-40B4-BE49-F238E27FC236}">
+              <a16:creationId xmlns:a16="http://schemas.microsoft.com/office/drawing/2014/main" id="{5E23B9FD-50EF-1878-18D2-965469CAE746}"/>
+            </a:ext>
+          </a:extLst>
+        </p:cNvPr>
+        <p:cNvGrpSpPr/>
+        <p:nvPr/>
+      </p:nvGrpSpPr>
+      <p:grpSpPr>
+        <a:xfrm>
+          <a:off x="0" y="0"/>
+          <a:ext cx="0" cy="0"/>
+          <a:chOff x="0" y="0"/>
+          <a:chExt cx="0" cy="0"/>
+        </a:xfrm>
+      </p:grpSpPr>
+      <p:sp>
+        <p:nvSpPr>
+          <p:cNvPr id="2" name="제목 1">
+            <a:extLst>
+              <a:ext uri="{FF2B5EF4-FFF2-40B4-BE49-F238E27FC236}">
+                <a16:creationId xmlns:a16="http://schemas.microsoft.com/office/drawing/2014/main" id="{1E630702-5896-0E4E-8729-F9719CB74B22}"/>
+              </a:ext>
+            </a:extLst>
+          </p:cNvPr>
+          <p:cNvSpPr>
+            <a:spLocks noGrp="1"/>
+          </p:cNvSpPr>
+          <p:nvPr>
+            <p:ph type="title"/>
+          </p:nvPr>
+        </p:nvSpPr>
+        <p:spPr/>
+        <p:txBody>
+          <a:bodyPr/>
+          <a:lstStyle/>
+          <a:p>
+            <a:r>
+              <a:rPr lang="ko-KR" altLang="en-US" dirty="0"/>
+              <a:t>석탄의 분류와 특징</a:t>
+            </a:r>
+          </a:p>
+        </p:txBody>
+      </p:sp>
+      <p:sp>
+        <p:nvSpPr>
+          <p:cNvPr id="4" name="슬라이드 번호 개체 틀 3">
+            <a:extLst>
+              <a:ext uri="{FF2B5EF4-FFF2-40B4-BE49-F238E27FC236}">
+                <a16:creationId xmlns:a16="http://schemas.microsoft.com/office/drawing/2014/main" id="{CE936D8B-D49E-1258-8401-5546AAF8B658}"/>
+              </a:ext>
+            </a:extLst>
+          </p:cNvPr>
+          <p:cNvSpPr>
+            <a:spLocks noGrp="1"/>
+          </p:cNvSpPr>
+          <p:nvPr>
+            <p:ph type="sldNum" sz="quarter" idx="12"/>
+          </p:nvPr>
+        </p:nvSpPr>
+        <p:spPr/>
+        <p:txBody>
+          <a:bodyPr/>
+          <a:lstStyle/>
+          <a:p>
+            <a:fld id="{109C872D-39A9-4065-8BF3-6A613116E2A1}" type="slidenum">
+              <a:rPr lang="ko-KR" altLang="en-US" smtClean="0"/>
+              <a:t>13</a:t>
+            </a:fld>
+            <a:endParaRPr lang="ko-KR" altLang="en-US"/>
+          </a:p>
+        </p:txBody>
+      </p:sp>
+      <p:sp>
+        <p:nvSpPr>
+          <p:cNvPr id="3" name="TextBox 2">
+            <a:extLst>
+              <a:ext uri="{FF2B5EF4-FFF2-40B4-BE49-F238E27FC236}">
+                <a16:creationId xmlns:a16="http://schemas.microsoft.com/office/drawing/2014/main" id="{9BDCA5A2-149B-8670-3C3C-C1CBBFDD1FB2}"/>
+              </a:ext>
+            </a:extLst>
+          </p:cNvPr>
+          <p:cNvSpPr txBox="1"/>
+          <p:nvPr/>
+        </p:nvSpPr>
+        <p:spPr>
+          <a:xfrm>
+            <a:off x="288790" y="958844"/>
+            <a:ext cx="11118453" cy="5584670"/>
+          </a:xfrm>
+          <a:prstGeom prst="rect">
+            <a:avLst/>
+          </a:prstGeom>
+          <a:noFill/>
+        </p:spPr>
+        <p:txBody>
+          <a:bodyPr wrap="square" rtlCol="0" anchor="t">
+            <a:spAutoFit/>
+          </a:bodyPr>
+          <a:lstStyle/>
+          <a:p>
+            <a:pPr marL="377825" indent="-285750">
+              <a:lnSpc>
+                <a:spcPct val="150000"/>
+              </a:lnSpc>
+              <a:buFont typeface="Arial" panose="020B0604020202020204" pitchFamily="34" charset="0"/>
+              <a:buChar char="•"/>
+            </a:pPr>
+            <a:r>
+              <a:rPr lang="ko-KR" altLang="en-US" sz="1600" dirty="0" err="1"/>
+              <a:t>아역청탄은</a:t>
+            </a:r>
+            <a:r>
+              <a:rPr lang="ko-KR" altLang="en-US" sz="1600" dirty="0"/>
+              <a:t> 미국</a:t>
+            </a:r>
+            <a:r>
+              <a:rPr lang="en-US" altLang="ko-KR" sz="1600" dirty="0"/>
+              <a:t>, </a:t>
+            </a:r>
+            <a:r>
+              <a:rPr lang="ko-KR" altLang="en-US" sz="1600" dirty="0"/>
+              <a:t>인도네시아</a:t>
+            </a:r>
+            <a:r>
+              <a:rPr lang="en-US" altLang="ko-KR" sz="1600" dirty="0"/>
+              <a:t>, </a:t>
+            </a:r>
+            <a:r>
+              <a:rPr lang="ko-KR" altLang="en-US" sz="1600" dirty="0"/>
+              <a:t>러시아</a:t>
+            </a:r>
+            <a:r>
+              <a:rPr lang="en-US" altLang="ko-KR" sz="1600" dirty="0"/>
+              <a:t>, </a:t>
+            </a:r>
+            <a:r>
+              <a:rPr lang="ko-KR" altLang="en-US" sz="1600" dirty="0"/>
+              <a:t>중국 등 광범위하게 매장되어 있다</a:t>
+            </a:r>
+            <a:r>
+              <a:rPr lang="en-US" altLang="ko-KR" sz="1600" dirty="0"/>
+              <a:t>.</a:t>
+            </a:r>
+          </a:p>
+          <a:p>
+            <a:pPr marL="835025" lvl="1" indent="-285750">
+              <a:lnSpc>
+                <a:spcPct val="150000"/>
+              </a:lnSpc>
+              <a:buFont typeface="Wingdings" panose="05000000000000000000" pitchFamily="2" charset="2"/>
+              <a:buChar char="ü"/>
+            </a:pPr>
+            <a:r>
+              <a:rPr lang="ko-KR" altLang="en-US" sz="1600" dirty="0"/>
+              <a:t>미국 </a:t>
+            </a:r>
+            <a:r>
+              <a:rPr lang="ko-KR" altLang="en-US" sz="1600" dirty="0" err="1"/>
+              <a:t>와이오밍</a:t>
+            </a:r>
+            <a:r>
+              <a:rPr lang="ko-KR" altLang="en-US" sz="1600" dirty="0"/>
+              <a:t> 주의 </a:t>
+            </a:r>
+            <a:r>
+              <a:rPr lang="ko-KR" altLang="en-US" sz="1600" dirty="0" err="1"/>
+              <a:t>파우더리버</a:t>
+            </a:r>
+            <a:r>
+              <a:rPr lang="ko-KR" altLang="en-US" sz="1600" dirty="0"/>
+              <a:t> 분지는 세계에서 가장 큰 </a:t>
+            </a:r>
+            <a:r>
+              <a:rPr lang="ko-KR" altLang="en-US" sz="1600" dirty="0" err="1"/>
+              <a:t>아역청탄</a:t>
+            </a:r>
+            <a:r>
+              <a:rPr lang="ko-KR" altLang="en-US" sz="1600" dirty="0"/>
+              <a:t> 생산지 중 하나이다</a:t>
+            </a:r>
+            <a:r>
+              <a:rPr lang="en-US" altLang="ko-KR" sz="1600" dirty="0"/>
+              <a:t>.</a:t>
+            </a:r>
+          </a:p>
+          <a:p>
+            <a:pPr marL="835025" lvl="1" indent="-285750">
+              <a:lnSpc>
+                <a:spcPct val="150000"/>
+              </a:lnSpc>
+              <a:buFont typeface="Wingdings" panose="05000000000000000000" pitchFamily="2" charset="2"/>
+              <a:buChar char="ü"/>
+            </a:pPr>
+            <a:r>
+              <a:rPr lang="ko-KR" altLang="en-US" sz="1600" dirty="0"/>
+              <a:t>인도네시아는 동남아시아 최대의 석탄 수출국으로</a:t>
+            </a:r>
+            <a:r>
+              <a:rPr lang="en-US" altLang="ko-KR" sz="1600" dirty="0"/>
+              <a:t>, </a:t>
+            </a:r>
+            <a:r>
+              <a:rPr lang="ko-KR" altLang="en-US" sz="1600" dirty="0" err="1"/>
+              <a:t>아역청탄을</a:t>
+            </a:r>
+            <a:r>
+              <a:rPr lang="ko-KR" altLang="en-US" sz="1600" dirty="0"/>
+              <a:t> 중심으로 아시아 시장에 대한 공급을 지속적으로 확대하고 있다</a:t>
+            </a:r>
+            <a:r>
+              <a:rPr lang="en-US" altLang="ko-KR" sz="1600" dirty="0"/>
+              <a:t>.</a:t>
+            </a:r>
+          </a:p>
+          <a:p>
+            <a:pPr marL="377825" indent="-285750">
+              <a:lnSpc>
+                <a:spcPct val="150000"/>
+              </a:lnSpc>
+              <a:buFont typeface="Arial" panose="020B0604020202020204" pitchFamily="34" charset="0"/>
+              <a:buChar char="•"/>
+            </a:pPr>
+            <a:r>
+              <a:rPr lang="ko-KR" altLang="en-US" sz="1600" dirty="0"/>
+              <a:t>환경적 측면에서 </a:t>
+            </a:r>
+            <a:r>
+              <a:rPr lang="ko-KR" altLang="en-US" sz="1600" dirty="0" err="1"/>
+              <a:t>아역청탄이</a:t>
+            </a:r>
+            <a:r>
+              <a:rPr lang="ko-KR" altLang="en-US" sz="1600" dirty="0"/>
+              <a:t> 갈탄보다 온실가스 및 대기오염물질 배출량이 적지만</a:t>
+            </a:r>
+            <a:r>
+              <a:rPr lang="en-US" altLang="ko-KR" sz="1600" dirty="0"/>
+              <a:t>, </a:t>
+            </a:r>
+            <a:r>
+              <a:rPr lang="ko-KR" altLang="en-US" sz="1600" dirty="0"/>
+              <a:t>여전히 재생에너지 및 천연가스에 비해 탄소배출량이 높아 기후정책에 의해 제한되는 추세이다</a:t>
+            </a:r>
+            <a:r>
+              <a:rPr lang="en-US" altLang="ko-KR" sz="1600" dirty="0"/>
+              <a:t>.</a:t>
+            </a:r>
+          </a:p>
+          <a:p>
+            <a:pPr marL="377825" indent="-285750">
+              <a:lnSpc>
+                <a:spcPct val="150000"/>
+              </a:lnSpc>
+              <a:buFont typeface="Arial" panose="020B0604020202020204" pitchFamily="34" charset="0"/>
+              <a:buChar char="•"/>
+            </a:pPr>
+            <a:endParaRPr lang="en-US" altLang="ko-KR" sz="1600" dirty="0"/>
+          </a:p>
+          <a:p>
+            <a:pPr marL="377825" indent="-285750">
+              <a:lnSpc>
+                <a:spcPct val="150000"/>
+              </a:lnSpc>
+              <a:buFont typeface="Arial" panose="020B0604020202020204" pitchFamily="34" charset="0"/>
+              <a:buChar char="•"/>
+            </a:pPr>
+            <a:endParaRPr lang="en-US" altLang="ko-KR" sz="1600" dirty="0"/>
+          </a:p>
+          <a:p>
+            <a:pPr marL="92075">
+              <a:lnSpc>
+                <a:spcPct val="150000"/>
+              </a:lnSpc>
+            </a:pPr>
+            <a:r>
+              <a:rPr lang="ko-KR" altLang="en-US" sz="1600" u="sng" dirty="0">
+                <a:ln w="3175">
+                  <a:noFill/>
+                </a:ln>
+                <a:latin typeface="HY헤드라인M" panose="02030600000101010101" pitchFamily="18" charset="-127"/>
+                <a:ea typeface="HY헤드라인M" panose="02030600000101010101" pitchFamily="18" charset="-127"/>
+              </a:rPr>
+              <a:t>역청탄</a:t>
+            </a:r>
+            <a:endParaRPr lang="en-US" altLang="ko-KR" sz="1600" u="sng" dirty="0">
+              <a:ln w="3175">
+                <a:noFill/>
+              </a:ln>
+              <a:latin typeface="HY헤드라인M" panose="02030600000101010101" pitchFamily="18" charset="-127"/>
+              <a:ea typeface="HY헤드라인M" panose="02030600000101010101" pitchFamily="18" charset="-127"/>
+            </a:endParaRPr>
+          </a:p>
+          <a:p>
+            <a:pPr marL="377825" indent="-285750">
+              <a:lnSpc>
+                <a:spcPct val="150000"/>
+              </a:lnSpc>
+              <a:buFont typeface="Arial" panose="020B0604020202020204" pitchFamily="34" charset="0"/>
+              <a:buChar char="•"/>
+            </a:pPr>
+            <a:r>
+              <a:rPr lang="ko-KR" altLang="en-US" sz="1600" dirty="0"/>
+              <a:t>전세계적으로 가장 널리 사용되는 중</a:t>
+            </a:r>
+            <a:r>
+              <a:rPr lang="en-US" altLang="ko-KR" sz="1600" dirty="0"/>
+              <a:t>·</a:t>
+            </a:r>
+            <a:r>
+              <a:rPr lang="ko-KR" altLang="en-US" sz="1600" dirty="0" err="1"/>
+              <a:t>고등급</a:t>
+            </a:r>
+            <a:r>
+              <a:rPr lang="ko-KR" altLang="en-US" sz="1600" dirty="0"/>
+              <a:t> 석탄이다</a:t>
+            </a:r>
+            <a:r>
+              <a:rPr lang="en-US" altLang="ko-KR" sz="1600" dirty="0"/>
+              <a:t>.</a:t>
+            </a:r>
+          </a:p>
+          <a:p>
+            <a:pPr marL="835025" lvl="1" indent="-285750">
+              <a:lnSpc>
+                <a:spcPct val="150000"/>
+              </a:lnSpc>
+              <a:buFont typeface="Wingdings" panose="05000000000000000000" pitchFamily="2" charset="2"/>
+              <a:buChar char="ü"/>
+            </a:pPr>
+            <a:r>
+              <a:rPr lang="ko-KR" altLang="en-US" sz="1600" dirty="0"/>
+              <a:t>석탄화 정도가 갈탄이나 </a:t>
+            </a:r>
+            <a:r>
+              <a:rPr lang="ko-KR" altLang="en-US" sz="1600" dirty="0" err="1"/>
+              <a:t>아역청탄보다</a:t>
+            </a:r>
+            <a:r>
+              <a:rPr lang="ko-KR" altLang="en-US" sz="1600" dirty="0"/>
+              <a:t> 훨씬 높고</a:t>
+            </a:r>
+            <a:r>
+              <a:rPr lang="en-US" altLang="ko-KR" sz="1600" dirty="0"/>
+              <a:t>, </a:t>
+            </a:r>
+            <a:r>
+              <a:rPr lang="ko-KR" altLang="en-US" sz="1600" dirty="0"/>
+              <a:t>탄소 함량은 </a:t>
+            </a:r>
+            <a:r>
+              <a:rPr lang="en-US" altLang="ko-KR" sz="1600" dirty="0"/>
+              <a:t>45~86%</a:t>
+            </a:r>
+            <a:r>
+              <a:rPr lang="ko-KR" altLang="en-US" sz="1600" dirty="0"/>
+              <a:t>에 이른다</a:t>
+            </a:r>
+            <a:r>
+              <a:rPr lang="en-US" altLang="ko-KR" sz="1600" dirty="0"/>
+              <a:t>.</a:t>
+            </a:r>
+          </a:p>
+          <a:p>
+            <a:pPr marL="835025" lvl="1" indent="-285750">
+              <a:lnSpc>
+                <a:spcPct val="150000"/>
+              </a:lnSpc>
+              <a:buFont typeface="Wingdings" panose="05000000000000000000" pitchFamily="2" charset="2"/>
+              <a:buChar char="ü"/>
+            </a:pPr>
+            <a:r>
+              <a:rPr lang="ko-KR" altLang="en-US" sz="1600" dirty="0"/>
+              <a:t>수분과 </a:t>
+            </a:r>
+            <a:r>
+              <a:rPr lang="ko-KR" altLang="en-US" sz="1600" dirty="0" err="1"/>
+              <a:t>휘발분</a:t>
+            </a:r>
+            <a:r>
+              <a:rPr lang="ko-KR" altLang="en-US" sz="1600" dirty="0"/>
+              <a:t> 함량이 낮아 </a:t>
+            </a:r>
+            <a:r>
+              <a:rPr lang="ko-KR" altLang="en-US" sz="1600" dirty="0" err="1"/>
+              <a:t>연료로서의</a:t>
+            </a:r>
+            <a:r>
+              <a:rPr lang="ko-KR" altLang="en-US" sz="1600" dirty="0"/>
+              <a:t> 품질이 우수하고</a:t>
+            </a:r>
+            <a:r>
+              <a:rPr lang="en-US" altLang="ko-KR" sz="1600" dirty="0"/>
+              <a:t>, </a:t>
+            </a:r>
+            <a:r>
+              <a:rPr lang="ko-KR" altLang="en-US" sz="1600" dirty="0"/>
+              <a:t>에너지 밀도가 높다</a:t>
+            </a:r>
+            <a:r>
+              <a:rPr lang="en-US" altLang="ko-KR" sz="1600" dirty="0"/>
+              <a:t>.</a:t>
+            </a:r>
+          </a:p>
+          <a:p>
+            <a:pPr marL="835025" lvl="1" indent="-285750">
+              <a:lnSpc>
+                <a:spcPct val="150000"/>
+              </a:lnSpc>
+              <a:buFont typeface="Wingdings" panose="05000000000000000000" pitchFamily="2" charset="2"/>
+              <a:buChar char="ü"/>
+            </a:pPr>
+            <a:r>
+              <a:rPr lang="ko-KR" altLang="en-US" sz="1600" dirty="0"/>
+              <a:t>광택이 나는 흑색이고</a:t>
+            </a:r>
+            <a:r>
+              <a:rPr lang="en-US" altLang="ko-KR" sz="1600" dirty="0"/>
+              <a:t>, </a:t>
+            </a:r>
+            <a:r>
+              <a:rPr lang="ko-KR" altLang="en-US" sz="1600" dirty="0"/>
+              <a:t>구조는 단단하고 치밀하여 기계적 강도가 높다</a:t>
+            </a:r>
+            <a:r>
+              <a:rPr lang="en-US" altLang="ko-KR" sz="1600" dirty="0"/>
+              <a:t>.</a:t>
+            </a:r>
+          </a:p>
+          <a:p>
+            <a:pPr marL="835025" lvl="1" indent="-285750">
+              <a:lnSpc>
+                <a:spcPct val="150000"/>
+              </a:lnSpc>
+              <a:buFont typeface="Wingdings" panose="05000000000000000000" pitchFamily="2" charset="2"/>
+              <a:buChar char="ü"/>
+            </a:pPr>
+            <a:endParaRPr lang="en-US" altLang="ko-KR" sz="1600" dirty="0"/>
+          </a:p>
+          <a:p>
+            <a:pPr marL="377825" indent="-285750">
+              <a:lnSpc>
+                <a:spcPct val="150000"/>
+              </a:lnSpc>
+              <a:buFont typeface="Arial" panose="020B0604020202020204" pitchFamily="34" charset="0"/>
+              <a:buChar char="•"/>
+            </a:pPr>
+            <a:endParaRPr lang="en-US" altLang="ko-KR" sz="1600" dirty="0"/>
+          </a:p>
+        </p:txBody>
+      </p:sp>
+    </p:spTree>
+    <p:extLst>
+      <p:ext uri="{BB962C8B-B14F-4D97-AF65-F5344CB8AC3E}">
+        <p14:creationId xmlns:p14="http://schemas.microsoft.com/office/powerpoint/2010/main" val="1830095693"/>
+      </p:ext>
+    </p:extLst>
+  </p:cSld>
+  <p:clrMapOvr>
+    <a:masterClrMapping/>
+  </p:clrMapOvr>
+</p:sld>
+</file>
+
+<file path=ppt/slides/slide14.xml><?xml version="1.0" encoding="utf-8"?>
+<p:sld xmlns:a="http://schemas.openxmlformats.org/drawingml/2006/main" xmlns:r="http://schemas.openxmlformats.org/officeDocument/2006/relationships" xmlns:p="http://schemas.openxmlformats.org/presentationml/2006/main">
+  <p:cSld>
+    <p:spTree>
+      <p:nvGrpSpPr>
+        <p:cNvPr id="1" name="">
+          <a:extLst>
+            <a:ext uri="{FF2B5EF4-FFF2-40B4-BE49-F238E27FC236}">
+              <a16:creationId xmlns:a16="http://schemas.microsoft.com/office/drawing/2014/main" id="{85A68F1B-5E34-A367-7110-ABB9A9ECC8F6}"/>
             </a:ext>
           </a:extLst>
         </p:cNvPr>
@@ -7264,7 +9144,7 @@
           <p:cNvPr id="6" name="그림 5" descr="텍스트, 로고, 원, 폰트이(가) 표시된 사진&#10;&#10;AI 생성 콘텐츠는 정확하지 않을 수 있습니다.">
             <a:extLst>
               <a:ext uri="{FF2B5EF4-FFF2-40B4-BE49-F238E27FC236}">
-                <a16:creationId xmlns:a16="http://schemas.microsoft.com/office/drawing/2014/main" id="{7197371F-099C-3A5C-5A23-755E558B5FF9}"/>
+                <a16:creationId xmlns:a16="http://schemas.microsoft.com/office/drawing/2014/main" id="{5E294C9B-2391-6A16-58AE-051EF8904E65}"/>
               </a:ext>
             </a:extLst>
           </p:cNvPr>
@@ -7301,7 +9181,7 @@
           <p:cNvPr id="4" name="슬라이드 번호 개체 틀 3">
             <a:extLst>
               <a:ext uri="{FF2B5EF4-FFF2-40B4-BE49-F238E27FC236}">
-                <a16:creationId xmlns:a16="http://schemas.microsoft.com/office/drawing/2014/main" id="{D403CE3D-FF37-6FEB-D958-7BF84F49ADB8}"/>
+                <a16:creationId xmlns:a16="http://schemas.microsoft.com/office/drawing/2014/main" id="{4E82732C-F866-045D-71C3-7E6540659584}"/>
               </a:ext>
             </a:extLst>
           </p:cNvPr>
@@ -7319,7 +9199,7 @@
           <a:p>
             <a:fld id="{109C872D-39A9-4065-8BF3-6A613116E2A1}" type="slidenum">
               <a:rPr lang="ko-KR" altLang="en-US" smtClean="0"/>
-              <a:t>10</a:t>
+              <a:t>14</a:t>
             </a:fld>
             <a:endParaRPr lang="ko-KR" altLang="en-US"/>
           </a:p>
@@ -7330,7 +9210,7 @@
           <p:cNvPr id="7" name="제목 1">
             <a:extLst>
               <a:ext uri="{FF2B5EF4-FFF2-40B4-BE49-F238E27FC236}">
-                <a16:creationId xmlns:a16="http://schemas.microsoft.com/office/drawing/2014/main" id="{DAE71EA6-541D-6782-1125-4EE46868B032}"/>
+                <a16:creationId xmlns:a16="http://schemas.microsoft.com/office/drawing/2014/main" id="{1E2ABE6B-B9BA-E122-0E00-4787041552E9}"/>
               </a:ext>
             </a:extLst>
           </p:cNvPr>
@@ -7356,6 +9236,292 @@
           <a:p>
             <a:r>
               <a:rPr lang="en-US" altLang="ko-KR" sz="4000" b="1" i="0" spc="150" dirty="0"/>
+              <a:t>Section 4. </a:t>
+            </a:r>
+            <a:r>
+              <a:rPr lang="ko-KR" altLang="en-US" sz="4000" b="1" i="0" spc="150" dirty="0"/>
+              <a:t>석탄의 가치사슬</a:t>
+            </a:r>
+            <a:endParaRPr lang="ko-KR" altLang="en-US" sz="3600" i="0" spc="150" dirty="0"/>
+          </a:p>
+        </p:txBody>
+      </p:sp>
+    </p:spTree>
+    <p:extLst>
+      <p:ext uri="{BB962C8B-B14F-4D97-AF65-F5344CB8AC3E}">
+        <p14:creationId xmlns:p14="http://schemas.microsoft.com/office/powerpoint/2010/main" val="420485513"/>
+      </p:ext>
+    </p:extLst>
+  </p:cSld>
+  <p:clrMapOvr>
+    <a:masterClrMapping/>
+  </p:clrMapOvr>
+</p:sld>
+</file>
+
+<file path=ppt/slides/slide15.xml><?xml version="1.0" encoding="utf-8"?>
+<p:sld xmlns:a="http://schemas.openxmlformats.org/drawingml/2006/main" xmlns:r="http://schemas.openxmlformats.org/officeDocument/2006/relationships" xmlns:p="http://schemas.openxmlformats.org/presentationml/2006/main">
+  <p:cSld>
+    <p:spTree>
+      <p:nvGrpSpPr>
+        <p:cNvPr id="1" name="">
+          <a:extLst>
+            <a:ext uri="{FF2B5EF4-FFF2-40B4-BE49-F238E27FC236}">
+              <a16:creationId xmlns:a16="http://schemas.microsoft.com/office/drawing/2014/main" id="{84536F5A-83E8-8B18-800C-F4D061E329EC}"/>
+            </a:ext>
+          </a:extLst>
+        </p:cNvPr>
+        <p:cNvGrpSpPr/>
+        <p:nvPr/>
+      </p:nvGrpSpPr>
+      <p:grpSpPr>
+        <a:xfrm>
+          <a:off x="0" y="0"/>
+          <a:ext cx="0" cy="0"/>
+          <a:chOff x="0" y="0"/>
+          <a:chExt cx="0" cy="0"/>
+        </a:xfrm>
+      </p:grpSpPr>
+      <p:pic>
+        <p:nvPicPr>
+          <p:cNvPr id="6" name="그림 5" descr="텍스트, 로고, 원, 폰트이(가) 표시된 사진&#10;&#10;AI 생성 콘텐츠는 정확하지 않을 수 있습니다.">
+            <a:extLst>
+              <a:ext uri="{FF2B5EF4-FFF2-40B4-BE49-F238E27FC236}">
+                <a16:creationId xmlns:a16="http://schemas.microsoft.com/office/drawing/2014/main" id="{29E1E638-DB99-5028-2B0D-15C4F8986AF3}"/>
+              </a:ext>
+            </a:extLst>
+          </p:cNvPr>
+          <p:cNvPicPr>
+            <a:picLocks noChangeAspect="1"/>
+          </p:cNvPicPr>
+          <p:nvPr/>
+        </p:nvPicPr>
+        <p:blipFill>
+          <a:blip r:embed="rId2">
+            <a:alphaModFix amt="20000"/>
+            <a:extLst>
+              <a:ext uri="{28A0092B-C50C-407E-A947-70E740481C1C}">
+                <a14:useLocalDpi xmlns:a14="http://schemas.microsoft.com/office/drawing/2010/main" val="0"/>
+              </a:ext>
+            </a:extLst>
+          </a:blip>
+          <a:stretch>
+            <a:fillRect/>
+          </a:stretch>
+        </p:blipFill>
+        <p:spPr>
+          <a:xfrm>
+            <a:off x="4012070" y="1673061"/>
+            <a:ext cx="4167861" cy="4167861"/>
+          </a:xfrm>
+          <a:prstGeom prst="rect">
+            <a:avLst/>
+          </a:prstGeom>
+        </p:spPr>
+      </p:pic>
+      <p:sp>
+        <p:nvSpPr>
+          <p:cNvPr id="4" name="슬라이드 번호 개체 틀 3">
+            <a:extLst>
+              <a:ext uri="{FF2B5EF4-FFF2-40B4-BE49-F238E27FC236}">
+                <a16:creationId xmlns:a16="http://schemas.microsoft.com/office/drawing/2014/main" id="{F43DE9FF-AC43-300C-CC7B-2A47533DC698}"/>
+              </a:ext>
+            </a:extLst>
+          </p:cNvPr>
+          <p:cNvSpPr>
+            <a:spLocks noGrp="1"/>
+          </p:cNvSpPr>
+          <p:nvPr>
+            <p:ph type="sldNum" sz="quarter" idx="12"/>
+          </p:nvPr>
+        </p:nvSpPr>
+        <p:spPr/>
+        <p:txBody>
+          <a:bodyPr/>
+          <a:lstStyle/>
+          <a:p>
+            <a:fld id="{109C872D-39A9-4065-8BF3-6A613116E2A1}" type="slidenum">
+              <a:rPr lang="ko-KR" altLang="en-US" smtClean="0"/>
+              <a:t>15</a:t>
+            </a:fld>
+            <a:endParaRPr lang="ko-KR" altLang="en-US"/>
+          </a:p>
+        </p:txBody>
+      </p:sp>
+      <p:sp>
+        <p:nvSpPr>
+          <p:cNvPr id="7" name="제목 1">
+            <a:extLst>
+              <a:ext uri="{FF2B5EF4-FFF2-40B4-BE49-F238E27FC236}">
+                <a16:creationId xmlns:a16="http://schemas.microsoft.com/office/drawing/2014/main" id="{0A6F38EE-3A32-8A8E-3C54-16E9A1AF41DA}"/>
+              </a:ext>
+            </a:extLst>
+          </p:cNvPr>
+          <p:cNvSpPr>
+            <a:spLocks noGrp="1"/>
+          </p:cNvSpPr>
+          <p:nvPr>
+            <p:ph type="title"/>
+          </p:nvPr>
+        </p:nvSpPr>
+        <p:spPr>
+          <a:xfrm>
+            <a:off x="831850" y="3765550"/>
+            <a:ext cx="11150600" cy="652818"/>
+          </a:xfrm>
+          <a:effectLst>
+            <a:reflection blurRad="50800" stA="45000" endPos="44000" dir="5400000" sy="-100000" algn="bl" rotWithShape="0"/>
+          </a:effectLst>
+        </p:spPr>
+        <p:txBody>
+          <a:bodyPr anchor="b"/>
+          <a:lstStyle/>
+          <a:p>
+            <a:r>
+              <a:rPr lang="en-US" altLang="ko-KR" sz="4000" b="1" i="0" spc="150" dirty="0"/>
+              <a:t>Section 5. </a:t>
+            </a:r>
+            <a:r>
+              <a:rPr lang="ko-KR" altLang="en-US" sz="4000" b="1" i="0" spc="150" dirty="0"/>
+              <a:t>석탄생산기술과 비용구조</a:t>
+            </a:r>
+            <a:endParaRPr lang="ko-KR" altLang="en-US" sz="3600" i="0" spc="150" dirty="0"/>
+          </a:p>
+        </p:txBody>
+      </p:sp>
+    </p:spTree>
+    <p:extLst>
+      <p:ext uri="{BB962C8B-B14F-4D97-AF65-F5344CB8AC3E}">
+        <p14:creationId xmlns:p14="http://schemas.microsoft.com/office/powerpoint/2010/main" val="3112273833"/>
+      </p:ext>
+    </p:extLst>
+  </p:cSld>
+  <p:clrMapOvr>
+    <a:masterClrMapping/>
+  </p:clrMapOvr>
+</p:sld>
+</file>
+
+<file path=ppt/slides/slide16.xml><?xml version="1.0" encoding="utf-8"?>
+<p:sld xmlns:a="http://schemas.openxmlformats.org/drawingml/2006/main" xmlns:r="http://schemas.openxmlformats.org/officeDocument/2006/relationships" xmlns:p="http://schemas.openxmlformats.org/presentationml/2006/main">
+  <p:cSld>
+    <p:spTree>
+      <p:nvGrpSpPr>
+        <p:cNvPr id="1" name="">
+          <a:extLst>
+            <a:ext uri="{FF2B5EF4-FFF2-40B4-BE49-F238E27FC236}">
+              <a16:creationId xmlns:a16="http://schemas.microsoft.com/office/drawing/2014/main" id="{1A68800B-CB6C-BBEA-6864-FD40CF8E59D3}"/>
+            </a:ext>
+          </a:extLst>
+        </p:cNvPr>
+        <p:cNvGrpSpPr/>
+        <p:nvPr/>
+      </p:nvGrpSpPr>
+      <p:grpSpPr>
+        <a:xfrm>
+          <a:off x="0" y="0"/>
+          <a:ext cx="0" cy="0"/>
+          <a:chOff x="0" y="0"/>
+          <a:chExt cx="0" cy="0"/>
+        </a:xfrm>
+      </p:grpSpPr>
+      <p:pic>
+        <p:nvPicPr>
+          <p:cNvPr id="6" name="그림 5" descr="텍스트, 로고, 원, 폰트이(가) 표시된 사진&#10;&#10;AI 생성 콘텐츠는 정확하지 않을 수 있습니다.">
+            <a:extLst>
+              <a:ext uri="{FF2B5EF4-FFF2-40B4-BE49-F238E27FC236}">
+                <a16:creationId xmlns:a16="http://schemas.microsoft.com/office/drawing/2014/main" id="{7197371F-099C-3A5C-5A23-755E558B5FF9}"/>
+              </a:ext>
+            </a:extLst>
+          </p:cNvPr>
+          <p:cNvPicPr>
+            <a:picLocks noChangeAspect="1"/>
+          </p:cNvPicPr>
+          <p:nvPr/>
+        </p:nvPicPr>
+        <p:blipFill>
+          <a:blip r:embed="rId2">
+            <a:alphaModFix amt="20000"/>
+            <a:extLst>
+              <a:ext uri="{28A0092B-C50C-407E-A947-70E740481C1C}">
+                <a14:useLocalDpi xmlns:a14="http://schemas.microsoft.com/office/drawing/2010/main" val="0"/>
+              </a:ext>
+            </a:extLst>
+          </a:blip>
+          <a:stretch>
+            <a:fillRect/>
+          </a:stretch>
+        </p:blipFill>
+        <p:spPr>
+          <a:xfrm>
+            <a:off x="4012070" y="1673061"/>
+            <a:ext cx="4167861" cy="4167861"/>
+          </a:xfrm>
+          <a:prstGeom prst="rect">
+            <a:avLst/>
+          </a:prstGeom>
+        </p:spPr>
+      </p:pic>
+      <p:sp>
+        <p:nvSpPr>
+          <p:cNvPr id="4" name="슬라이드 번호 개체 틀 3">
+            <a:extLst>
+              <a:ext uri="{FF2B5EF4-FFF2-40B4-BE49-F238E27FC236}">
+                <a16:creationId xmlns:a16="http://schemas.microsoft.com/office/drawing/2014/main" id="{D403CE3D-FF37-6FEB-D958-7BF84F49ADB8}"/>
+              </a:ext>
+            </a:extLst>
+          </p:cNvPr>
+          <p:cNvSpPr>
+            <a:spLocks noGrp="1"/>
+          </p:cNvSpPr>
+          <p:nvPr>
+            <p:ph type="sldNum" sz="quarter" idx="12"/>
+          </p:nvPr>
+        </p:nvSpPr>
+        <p:spPr/>
+        <p:txBody>
+          <a:bodyPr/>
+          <a:lstStyle/>
+          <a:p>
+            <a:fld id="{109C872D-39A9-4065-8BF3-6A613116E2A1}" type="slidenum">
+              <a:rPr lang="ko-KR" altLang="en-US" smtClean="0"/>
+              <a:t>16</a:t>
+            </a:fld>
+            <a:endParaRPr lang="ko-KR" altLang="en-US"/>
+          </a:p>
+        </p:txBody>
+      </p:sp>
+      <p:sp>
+        <p:nvSpPr>
+          <p:cNvPr id="7" name="제목 1">
+            <a:extLst>
+              <a:ext uri="{FF2B5EF4-FFF2-40B4-BE49-F238E27FC236}">
+                <a16:creationId xmlns:a16="http://schemas.microsoft.com/office/drawing/2014/main" id="{DAE71EA6-541D-6782-1125-4EE46868B032}"/>
+              </a:ext>
+            </a:extLst>
+          </p:cNvPr>
+          <p:cNvSpPr>
+            <a:spLocks noGrp="1"/>
+          </p:cNvSpPr>
+          <p:nvPr>
+            <p:ph type="title"/>
+          </p:nvPr>
+        </p:nvSpPr>
+        <p:spPr>
+          <a:xfrm>
+            <a:off x="831850" y="3765550"/>
+            <a:ext cx="11150600" cy="652818"/>
+          </a:xfrm>
+          <a:effectLst>
+            <a:reflection blurRad="50800" stA="45000" endPos="44000" dir="5400000" sy="-100000" algn="bl" rotWithShape="0"/>
+          </a:effectLst>
+        </p:spPr>
+        <p:txBody>
+          <a:bodyPr anchor="b"/>
+          <a:lstStyle/>
+          <a:p>
+            <a:r>
+              <a:rPr lang="en-US" altLang="ko-KR" sz="4000" b="1" i="0" spc="150" dirty="0"/>
               <a:t>Section 6. </a:t>
             </a:r>
             <a:br>
@@ -7386,7 +9552,7 @@
 </p:sld>
 </file>
 
-<file path=ppt/slides/slide11.xml><?xml version="1.0" encoding="utf-8"?>
+<file path=ppt/slides/slide17.xml><?xml version="1.0" encoding="utf-8"?>
 <p:sld xmlns:a="http://schemas.openxmlformats.org/drawingml/2006/main" xmlns:r="http://schemas.openxmlformats.org/officeDocument/2006/relationships" xmlns:p="http://schemas.openxmlformats.org/presentationml/2006/main">
   <p:cSld>
     <p:spTree>
@@ -7469,7 +9635,7 @@
           <a:p>
             <a:fld id="{109C872D-39A9-4065-8BF3-6A613116E2A1}" type="slidenum">
               <a:rPr lang="ko-KR" altLang="en-US" smtClean="0"/>
-              <a:t>11</a:t>
+              <a:t>17</a:t>
             </a:fld>
             <a:endParaRPr lang="ko-KR" altLang="en-US"/>
           </a:p>
@@ -7529,7 +9695,7 @@
 </p:sld>
 </file>
 
-<file path=ppt/slides/slide12.xml><?xml version="1.0" encoding="utf-8"?>
+<file path=ppt/slides/slide18.xml><?xml version="1.0" encoding="utf-8"?>
 <p:sld xmlns:a="http://schemas.openxmlformats.org/drawingml/2006/main" xmlns:r="http://schemas.openxmlformats.org/officeDocument/2006/relationships" xmlns:p="http://schemas.openxmlformats.org/presentationml/2006/main">
   <p:cSld>
     <p:spTree>
@@ -7612,7 +9778,7 @@
           <a:p>
             <a:fld id="{109C872D-39A9-4065-8BF3-6A613116E2A1}" type="slidenum">
               <a:rPr lang="ko-KR" altLang="en-US" smtClean="0"/>
-              <a:t>12</a:t>
+              <a:t>18</a:t>
             </a:fld>
             <a:endParaRPr lang="ko-KR" altLang="en-US"/>
           </a:p>
@@ -7672,7 +9838,7 @@
 </p:sld>
 </file>
 
-<file path=ppt/slides/slide13.xml><?xml version="1.0" encoding="utf-8"?>
+<file path=ppt/slides/slide19.xml><?xml version="1.0" encoding="utf-8"?>
 <p:sld xmlns:a="http://schemas.openxmlformats.org/drawingml/2006/main" xmlns:r="http://schemas.openxmlformats.org/officeDocument/2006/relationships" xmlns:p="http://schemas.openxmlformats.org/presentationml/2006/main">
   <p:cSld>
     <p:spTree>
@@ -7755,7 +9921,7 @@
           <a:p>
             <a:fld id="{109C872D-39A9-4065-8BF3-6A613116E2A1}" type="slidenum">
               <a:rPr lang="ko-KR" altLang="en-US" smtClean="0"/>
-              <a:t>13</a:t>
+              <a:t>19</a:t>
             </a:fld>
             <a:endParaRPr lang="ko-KR" altLang="en-US"/>
           </a:p>
@@ -7806,439 +9972,6 @@
     <p:extLst>
       <p:ext uri="{BB962C8B-B14F-4D97-AF65-F5344CB8AC3E}">
         <p14:creationId xmlns:p14="http://schemas.microsoft.com/office/powerpoint/2010/main" val="1453959967"/>
-      </p:ext>
-    </p:extLst>
-  </p:cSld>
-  <p:clrMapOvr>
-    <a:masterClrMapping/>
-  </p:clrMapOvr>
-</p:sld>
-</file>
-
-<file path=ppt/slides/slide14.xml><?xml version="1.0" encoding="utf-8"?>
-<p:sld xmlns:a="http://schemas.openxmlformats.org/drawingml/2006/main" xmlns:r="http://schemas.openxmlformats.org/officeDocument/2006/relationships" xmlns:p="http://schemas.openxmlformats.org/presentationml/2006/main">
-  <p:cSld>
-    <p:spTree>
-      <p:nvGrpSpPr>
-        <p:cNvPr id="1" name="">
-          <a:extLst>
-            <a:ext uri="{FF2B5EF4-FFF2-40B4-BE49-F238E27FC236}">
-              <a16:creationId xmlns:a16="http://schemas.microsoft.com/office/drawing/2014/main" id="{7FAEBC00-A2FB-71AC-F2E7-A6AB1A2A6E10}"/>
-            </a:ext>
-          </a:extLst>
-        </p:cNvPr>
-        <p:cNvGrpSpPr/>
-        <p:nvPr/>
-      </p:nvGrpSpPr>
-      <p:grpSpPr>
-        <a:xfrm>
-          <a:off x="0" y="0"/>
-          <a:ext cx="0" cy="0"/>
-          <a:chOff x="0" y="0"/>
-          <a:chExt cx="0" cy="0"/>
-        </a:xfrm>
-      </p:grpSpPr>
-      <p:pic>
-        <p:nvPicPr>
-          <p:cNvPr id="6" name="그림 5" descr="텍스트, 로고, 원, 폰트이(가) 표시된 사진&#10;&#10;AI 생성 콘텐츠는 정확하지 않을 수 있습니다.">
-            <a:extLst>
-              <a:ext uri="{FF2B5EF4-FFF2-40B4-BE49-F238E27FC236}">
-                <a16:creationId xmlns:a16="http://schemas.microsoft.com/office/drawing/2014/main" id="{132D39AE-6E93-E852-0031-629430E3D819}"/>
-              </a:ext>
-            </a:extLst>
-          </p:cNvPr>
-          <p:cNvPicPr>
-            <a:picLocks noChangeAspect="1"/>
-          </p:cNvPicPr>
-          <p:nvPr/>
-        </p:nvPicPr>
-        <p:blipFill>
-          <a:blip r:embed="rId2">
-            <a:alphaModFix amt="20000"/>
-            <a:extLst>
-              <a:ext uri="{28A0092B-C50C-407E-A947-70E740481C1C}">
-                <a14:useLocalDpi xmlns:a14="http://schemas.microsoft.com/office/drawing/2010/main" val="0"/>
-              </a:ext>
-            </a:extLst>
-          </a:blip>
-          <a:stretch>
-            <a:fillRect/>
-          </a:stretch>
-        </p:blipFill>
-        <p:spPr>
-          <a:xfrm>
-            <a:off x="4012070" y="1673061"/>
-            <a:ext cx="4167861" cy="4167861"/>
-          </a:xfrm>
-          <a:prstGeom prst="rect">
-            <a:avLst/>
-          </a:prstGeom>
-        </p:spPr>
-      </p:pic>
-      <p:sp>
-        <p:nvSpPr>
-          <p:cNvPr id="4" name="슬라이드 번호 개체 틀 3">
-            <a:extLst>
-              <a:ext uri="{FF2B5EF4-FFF2-40B4-BE49-F238E27FC236}">
-                <a16:creationId xmlns:a16="http://schemas.microsoft.com/office/drawing/2014/main" id="{16216CA1-E430-58F6-13F3-CB0FBB12A1B1}"/>
-              </a:ext>
-            </a:extLst>
-          </p:cNvPr>
-          <p:cNvSpPr>
-            <a:spLocks noGrp="1"/>
-          </p:cNvSpPr>
-          <p:nvPr>
-            <p:ph type="sldNum" sz="quarter" idx="12"/>
-          </p:nvPr>
-        </p:nvSpPr>
-        <p:spPr/>
-        <p:txBody>
-          <a:bodyPr/>
-          <a:lstStyle/>
-          <a:p>
-            <a:fld id="{109C872D-39A9-4065-8BF3-6A613116E2A1}" type="slidenum">
-              <a:rPr lang="ko-KR" altLang="en-US" smtClean="0"/>
-              <a:t>14</a:t>
-            </a:fld>
-            <a:endParaRPr lang="ko-KR" altLang="en-US"/>
-          </a:p>
-        </p:txBody>
-      </p:sp>
-      <p:sp>
-        <p:nvSpPr>
-          <p:cNvPr id="7" name="제목 1">
-            <a:extLst>
-              <a:ext uri="{FF2B5EF4-FFF2-40B4-BE49-F238E27FC236}">
-                <a16:creationId xmlns:a16="http://schemas.microsoft.com/office/drawing/2014/main" id="{8D4DF8D8-9F32-5507-3E2A-E5E0B0B01B3F}"/>
-              </a:ext>
-            </a:extLst>
-          </p:cNvPr>
-          <p:cNvSpPr>
-            <a:spLocks noGrp="1"/>
-          </p:cNvSpPr>
-          <p:nvPr>
-            <p:ph type="title"/>
-          </p:nvPr>
-        </p:nvSpPr>
-        <p:spPr>
-          <a:xfrm>
-            <a:off x="831850" y="3765550"/>
-            <a:ext cx="11150600" cy="652818"/>
-          </a:xfrm>
-          <a:effectLst>
-            <a:reflection blurRad="50800" stA="45000" endPos="44000" dir="5400000" sy="-100000" algn="bl" rotWithShape="0"/>
-          </a:effectLst>
-        </p:spPr>
-        <p:txBody>
-          <a:bodyPr anchor="b"/>
-          <a:lstStyle/>
-          <a:p>
-            <a:r>
-              <a:rPr lang="en-US" altLang="ko-KR" sz="4000" b="1" i="0" spc="150" dirty="0"/>
-              <a:t>Section 10. </a:t>
-            </a:r>
-            <a:r>
-              <a:rPr lang="ko-KR" altLang="en-US" sz="4000" b="1" i="0" spc="150" dirty="0"/>
-              <a:t>석탄시장의 구조변화와 좌초자산</a:t>
-            </a:r>
-            <a:endParaRPr lang="ko-KR" altLang="en-US" sz="3600" i="0" spc="150" dirty="0"/>
-          </a:p>
-        </p:txBody>
-      </p:sp>
-    </p:spTree>
-    <p:extLst>
-      <p:ext uri="{BB962C8B-B14F-4D97-AF65-F5344CB8AC3E}">
-        <p14:creationId xmlns:p14="http://schemas.microsoft.com/office/powerpoint/2010/main" val="707442002"/>
-      </p:ext>
-    </p:extLst>
-  </p:cSld>
-  <p:clrMapOvr>
-    <a:masterClrMapping/>
-  </p:clrMapOvr>
-</p:sld>
-</file>
-
-<file path=ppt/slides/slide15.xml><?xml version="1.0" encoding="utf-8"?>
-<p:sld xmlns:a="http://schemas.openxmlformats.org/drawingml/2006/main" xmlns:r="http://schemas.openxmlformats.org/officeDocument/2006/relationships" xmlns:p="http://schemas.openxmlformats.org/presentationml/2006/main">
-  <p:cSld>
-    <p:spTree>
-      <p:nvGrpSpPr>
-        <p:cNvPr id="1" name="">
-          <a:extLst>
-            <a:ext uri="{FF2B5EF4-FFF2-40B4-BE49-F238E27FC236}">
-              <a16:creationId xmlns:a16="http://schemas.microsoft.com/office/drawing/2014/main" id="{58D1A724-FF5F-F795-8171-E14A2B4F16F8}"/>
-            </a:ext>
-          </a:extLst>
-        </p:cNvPr>
-        <p:cNvGrpSpPr/>
-        <p:nvPr/>
-      </p:nvGrpSpPr>
-      <p:grpSpPr>
-        <a:xfrm>
-          <a:off x="0" y="0"/>
-          <a:ext cx="0" cy="0"/>
-          <a:chOff x="0" y="0"/>
-          <a:chExt cx="0" cy="0"/>
-        </a:xfrm>
-      </p:grpSpPr>
-      <p:pic>
-        <p:nvPicPr>
-          <p:cNvPr id="6" name="그림 5" descr="텍스트, 로고, 원, 폰트이(가) 표시된 사진&#10;&#10;AI 생성 콘텐츠는 정확하지 않을 수 있습니다.">
-            <a:extLst>
-              <a:ext uri="{FF2B5EF4-FFF2-40B4-BE49-F238E27FC236}">
-                <a16:creationId xmlns:a16="http://schemas.microsoft.com/office/drawing/2014/main" id="{BBB9BD40-31B0-CF75-80CC-4964C75E9B88}"/>
-              </a:ext>
-            </a:extLst>
-          </p:cNvPr>
-          <p:cNvPicPr>
-            <a:picLocks noChangeAspect="1"/>
-          </p:cNvPicPr>
-          <p:nvPr/>
-        </p:nvPicPr>
-        <p:blipFill>
-          <a:blip r:embed="rId2">
-            <a:alphaModFix amt="20000"/>
-            <a:extLst>
-              <a:ext uri="{28A0092B-C50C-407E-A947-70E740481C1C}">
-                <a14:useLocalDpi xmlns:a14="http://schemas.microsoft.com/office/drawing/2010/main" val="0"/>
-              </a:ext>
-            </a:extLst>
-          </a:blip>
-          <a:stretch>
-            <a:fillRect/>
-          </a:stretch>
-        </p:blipFill>
-        <p:spPr>
-          <a:xfrm>
-            <a:off x="4012070" y="1673061"/>
-            <a:ext cx="4167861" cy="4167861"/>
-          </a:xfrm>
-          <a:prstGeom prst="rect">
-            <a:avLst/>
-          </a:prstGeom>
-        </p:spPr>
-      </p:pic>
-      <p:sp>
-        <p:nvSpPr>
-          <p:cNvPr id="4" name="슬라이드 번호 개체 틀 3">
-            <a:extLst>
-              <a:ext uri="{FF2B5EF4-FFF2-40B4-BE49-F238E27FC236}">
-                <a16:creationId xmlns:a16="http://schemas.microsoft.com/office/drawing/2014/main" id="{D747C5E9-0275-EAE5-E692-6C80776F901A}"/>
-              </a:ext>
-            </a:extLst>
-          </p:cNvPr>
-          <p:cNvSpPr>
-            <a:spLocks noGrp="1"/>
-          </p:cNvSpPr>
-          <p:nvPr>
-            <p:ph type="sldNum" sz="quarter" idx="12"/>
-          </p:nvPr>
-        </p:nvSpPr>
-        <p:spPr/>
-        <p:txBody>
-          <a:bodyPr/>
-          <a:lstStyle/>
-          <a:p>
-            <a:fld id="{109C872D-39A9-4065-8BF3-6A613116E2A1}" type="slidenum">
-              <a:rPr lang="ko-KR" altLang="en-US" smtClean="0"/>
-              <a:t>15</a:t>
-            </a:fld>
-            <a:endParaRPr lang="ko-KR" altLang="en-US"/>
-          </a:p>
-        </p:txBody>
-      </p:sp>
-      <p:sp>
-        <p:nvSpPr>
-          <p:cNvPr id="7" name="제목 1">
-            <a:extLst>
-              <a:ext uri="{FF2B5EF4-FFF2-40B4-BE49-F238E27FC236}">
-                <a16:creationId xmlns:a16="http://schemas.microsoft.com/office/drawing/2014/main" id="{AF1A278D-627D-B7E6-D54B-C4D6D391DA7F}"/>
-              </a:ext>
-            </a:extLst>
-          </p:cNvPr>
-          <p:cNvSpPr>
-            <a:spLocks noGrp="1"/>
-          </p:cNvSpPr>
-          <p:nvPr>
-            <p:ph type="title"/>
-          </p:nvPr>
-        </p:nvSpPr>
-        <p:spPr>
-          <a:xfrm>
-            <a:off x="831850" y="3765550"/>
-            <a:ext cx="11150600" cy="652818"/>
-          </a:xfrm>
-          <a:effectLst>
-            <a:reflection blurRad="50800" stA="45000" endPos="44000" dir="5400000" sy="-100000" algn="bl" rotWithShape="0"/>
-          </a:effectLst>
-        </p:spPr>
-        <p:txBody>
-          <a:bodyPr anchor="b"/>
-          <a:lstStyle/>
-          <a:p>
-            <a:r>
-              <a:rPr lang="en-US" altLang="ko-KR" sz="4000" b="1" i="0" spc="150" dirty="0"/>
-              <a:t>Section 1. </a:t>
-            </a:r>
-            <a:r>
-              <a:rPr lang="ko-KR" altLang="en-US" sz="4000" b="1" i="0" spc="150" dirty="0"/>
-              <a:t>개 론</a:t>
-            </a:r>
-            <a:endParaRPr lang="ko-KR" altLang="en-US" sz="3600" i="0" spc="150" dirty="0"/>
-          </a:p>
-        </p:txBody>
-      </p:sp>
-    </p:spTree>
-    <p:extLst>
-      <p:ext uri="{BB962C8B-B14F-4D97-AF65-F5344CB8AC3E}">
-        <p14:creationId xmlns:p14="http://schemas.microsoft.com/office/powerpoint/2010/main" val="4221688942"/>
-      </p:ext>
-    </p:extLst>
-  </p:cSld>
-  <p:clrMapOvr>
-    <a:masterClrMapping/>
-  </p:clrMapOvr>
-</p:sld>
-</file>
-
-<file path=ppt/slides/slide16.xml><?xml version="1.0" encoding="utf-8"?>
-<p:sld xmlns:a="http://schemas.openxmlformats.org/drawingml/2006/main" xmlns:r="http://schemas.openxmlformats.org/officeDocument/2006/relationships" xmlns:p="http://schemas.openxmlformats.org/presentationml/2006/main">
-  <p:cSld>
-    <p:spTree>
-      <p:nvGrpSpPr>
-        <p:cNvPr id="1" name="">
-          <a:extLst>
-            <a:ext uri="{FF2B5EF4-FFF2-40B4-BE49-F238E27FC236}">
-              <a16:creationId xmlns:a16="http://schemas.microsoft.com/office/drawing/2014/main" id="{2221EDDE-B308-8FA7-8116-DAD482D863C8}"/>
-            </a:ext>
-          </a:extLst>
-        </p:cNvPr>
-        <p:cNvGrpSpPr/>
-        <p:nvPr/>
-      </p:nvGrpSpPr>
-      <p:grpSpPr>
-        <a:xfrm>
-          <a:off x="0" y="0"/>
-          <a:ext cx="0" cy="0"/>
-          <a:chOff x="0" y="0"/>
-          <a:chExt cx="0" cy="0"/>
-        </a:xfrm>
-      </p:grpSpPr>
-      <p:pic>
-        <p:nvPicPr>
-          <p:cNvPr id="3" name="그림 2" descr="텍스트, 로고, 원, 폰트이(가) 표시된 사진&#10;&#10;AI 생성 콘텐츠는 정확하지 않을 수 있습니다.">
-            <a:extLst>
-              <a:ext uri="{FF2B5EF4-FFF2-40B4-BE49-F238E27FC236}">
-                <a16:creationId xmlns:a16="http://schemas.microsoft.com/office/drawing/2014/main" id="{396FF0BD-25A1-7840-4B63-B2ECDF7CFA54}"/>
-              </a:ext>
-            </a:extLst>
-          </p:cNvPr>
-          <p:cNvPicPr>
-            <a:picLocks noChangeAspect="1"/>
-          </p:cNvPicPr>
-          <p:nvPr/>
-        </p:nvPicPr>
-        <p:blipFill>
-          <a:blip r:embed="rId2">
-            <a:alphaModFix amt="20000"/>
-            <a:extLst>
-              <a:ext uri="{28A0092B-C50C-407E-A947-70E740481C1C}">
-                <a14:useLocalDpi xmlns:a14="http://schemas.microsoft.com/office/drawing/2010/main" val="0"/>
-              </a:ext>
-            </a:extLst>
-          </a:blip>
-          <a:stretch>
-            <a:fillRect/>
-          </a:stretch>
-        </p:blipFill>
-        <p:spPr>
-          <a:xfrm>
-            <a:off x="4012070" y="1673061"/>
-            <a:ext cx="4167861" cy="4167861"/>
-          </a:xfrm>
-          <a:prstGeom prst="rect">
-            <a:avLst/>
-          </a:prstGeom>
-        </p:spPr>
-      </p:pic>
-      <p:sp>
-        <p:nvSpPr>
-          <p:cNvPr id="2" name="제목 1">
-            <a:extLst>
-              <a:ext uri="{FF2B5EF4-FFF2-40B4-BE49-F238E27FC236}">
-                <a16:creationId xmlns:a16="http://schemas.microsoft.com/office/drawing/2014/main" id="{CA03F291-495C-4A31-DF0A-8F9CC97672B8}"/>
-              </a:ext>
-            </a:extLst>
-          </p:cNvPr>
-          <p:cNvSpPr>
-            <a:spLocks noGrp="1"/>
-          </p:cNvSpPr>
-          <p:nvPr>
-            <p:ph type="title"/>
-          </p:nvPr>
-        </p:nvSpPr>
-        <p:spPr>
-          <a:xfrm>
-            <a:off x="831850" y="1709739"/>
-            <a:ext cx="10515600" cy="2134292"/>
-          </a:xfrm>
-          <a:effectLst>
-            <a:reflection blurRad="50800" stA="45000" endPos="44000" dir="5400000" sy="-100000" algn="bl" rotWithShape="0"/>
-          </a:effectLst>
-        </p:spPr>
-        <p:txBody>
-          <a:bodyPr/>
-          <a:lstStyle/>
-          <a:p>
-            <a:r>
-              <a:rPr lang="en-US" altLang="ko-KR" b="1" i="0" spc="150">
-                <a:solidFill>
-                  <a:schemeClr val="accent2"/>
-                </a:solidFill>
-              </a:rPr>
-              <a:t>T</a:t>
-            </a:r>
-            <a:r>
-              <a:rPr lang="en-US" altLang="ko-KR" sz="5400" i="0" spc="100"/>
-              <a:t>hank you</a:t>
-            </a:r>
-            <a:endParaRPr lang="ko-KR" altLang="en-US" sz="5400" i="0" spc="100"/>
-          </a:p>
-        </p:txBody>
-      </p:sp>
-      <p:sp>
-        <p:nvSpPr>
-          <p:cNvPr id="4" name="슬라이드 번호 개체 틀 3">
-            <a:extLst>
-              <a:ext uri="{FF2B5EF4-FFF2-40B4-BE49-F238E27FC236}">
-                <a16:creationId xmlns:a16="http://schemas.microsoft.com/office/drawing/2014/main" id="{6EFC0B50-C677-27B7-56F6-14F7BF9A70A9}"/>
-              </a:ext>
-            </a:extLst>
-          </p:cNvPr>
-          <p:cNvSpPr>
-            <a:spLocks noGrp="1"/>
-          </p:cNvSpPr>
-          <p:nvPr>
-            <p:ph type="sldNum" sz="quarter" idx="12"/>
-          </p:nvPr>
-        </p:nvSpPr>
-        <p:spPr/>
-        <p:txBody>
-          <a:bodyPr/>
-          <a:lstStyle/>
-          <a:p>
-            <a:fld id="{109C872D-39A9-4065-8BF3-6A613116E2A1}" type="slidenum">
-              <a:rPr lang="ko-KR" altLang="en-US" smtClean="0"/>
-              <a:t>16</a:t>
-            </a:fld>
-            <a:endParaRPr lang="ko-KR" altLang="en-US"/>
-          </a:p>
-        </p:txBody>
-      </p:sp>
-    </p:spTree>
-    <p:extLst>
-      <p:ext uri="{BB962C8B-B14F-4D97-AF65-F5344CB8AC3E}">
-        <p14:creationId xmlns:p14="http://schemas.microsoft.com/office/powerpoint/2010/main" val="103939182"/>
       </p:ext>
     </p:extLst>
   </p:cSld>
@@ -8388,6 +10121,439 @@
     <p:extLst>
       <p:ext uri="{BB962C8B-B14F-4D97-AF65-F5344CB8AC3E}">
         <p14:creationId xmlns:p14="http://schemas.microsoft.com/office/powerpoint/2010/main" val="2655123632"/>
+      </p:ext>
+    </p:extLst>
+  </p:cSld>
+  <p:clrMapOvr>
+    <a:masterClrMapping/>
+  </p:clrMapOvr>
+</p:sld>
+</file>
+
+<file path=ppt/slides/slide20.xml><?xml version="1.0" encoding="utf-8"?>
+<p:sld xmlns:a="http://schemas.openxmlformats.org/drawingml/2006/main" xmlns:r="http://schemas.openxmlformats.org/officeDocument/2006/relationships" xmlns:p="http://schemas.openxmlformats.org/presentationml/2006/main">
+  <p:cSld>
+    <p:spTree>
+      <p:nvGrpSpPr>
+        <p:cNvPr id="1" name="">
+          <a:extLst>
+            <a:ext uri="{FF2B5EF4-FFF2-40B4-BE49-F238E27FC236}">
+              <a16:creationId xmlns:a16="http://schemas.microsoft.com/office/drawing/2014/main" id="{7FAEBC00-A2FB-71AC-F2E7-A6AB1A2A6E10}"/>
+            </a:ext>
+          </a:extLst>
+        </p:cNvPr>
+        <p:cNvGrpSpPr/>
+        <p:nvPr/>
+      </p:nvGrpSpPr>
+      <p:grpSpPr>
+        <a:xfrm>
+          <a:off x="0" y="0"/>
+          <a:ext cx="0" cy="0"/>
+          <a:chOff x="0" y="0"/>
+          <a:chExt cx="0" cy="0"/>
+        </a:xfrm>
+      </p:grpSpPr>
+      <p:pic>
+        <p:nvPicPr>
+          <p:cNvPr id="6" name="그림 5" descr="텍스트, 로고, 원, 폰트이(가) 표시된 사진&#10;&#10;AI 생성 콘텐츠는 정확하지 않을 수 있습니다.">
+            <a:extLst>
+              <a:ext uri="{FF2B5EF4-FFF2-40B4-BE49-F238E27FC236}">
+                <a16:creationId xmlns:a16="http://schemas.microsoft.com/office/drawing/2014/main" id="{132D39AE-6E93-E852-0031-629430E3D819}"/>
+              </a:ext>
+            </a:extLst>
+          </p:cNvPr>
+          <p:cNvPicPr>
+            <a:picLocks noChangeAspect="1"/>
+          </p:cNvPicPr>
+          <p:nvPr/>
+        </p:nvPicPr>
+        <p:blipFill>
+          <a:blip r:embed="rId2">
+            <a:alphaModFix amt="20000"/>
+            <a:extLst>
+              <a:ext uri="{28A0092B-C50C-407E-A947-70E740481C1C}">
+                <a14:useLocalDpi xmlns:a14="http://schemas.microsoft.com/office/drawing/2010/main" val="0"/>
+              </a:ext>
+            </a:extLst>
+          </a:blip>
+          <a:stretch>
+            <a:fillRect/>
+          </a:stretch>
+        </p:blipFill>
+        <p:spPr>
+          <a:xfrm>
+            <a:off x="4012070" y="1673061"/>
+            <a:ext cx="4167861" cy="4167861"/>
+          </a:xfrm>
+          <a:prstGeom prst="rect">
+            <a:avLst/>
+          </a:prstGeom>
+        </p:spPr>
+      </p:pic>
+      <p:sp>
+        <p:nvSpPr>
+          <p:cNvPr id="4" name="슬라이드 번호 개체 틀 3">
+            <a:extLst>
+              <a:ext uri="{FF2B5EF4-FFF2-40B4-BE49-F238E27FC236}">
+                <a16:creationId xmlns:a16="http://schemas.microsoft.com/office/drawing/2014/main" id="{16216CA1-E430-58F6-13F3-CB0FBB12A1B1}"/>
+              </a:ext>
+            </a:extLst>
+          </p:cNvPr>
+          <p:cNvSpPr>
+            <a:spLocks noGrp="1"/>
+          </p:cNvSpPr>
+          <p:nvPr>
+            <p:ph type="sldNum" sz="quarter" idx="12"/>
+          </p:nvPr>
+        </p:nvSpPr>
+        <p:spPr/>
+        <p:txBody>
+          <a:bodyPr/>
+          <a:lstStyle/>
+          <a:p>
+            <a:fld id="{109C872D-39A9-4065-8BF3-6A613116E2A1}" type="slidenum">
+              <a:rPr lang="ko-KR" altLang="en-US" smtClean="0"/>
+              <a:t>20</a:t>
+            </a:fld>
+            <a:endParaRPr lang="ko-KR" altLang="en-US"/>
+          </a:p>
+        </p:txBody>
+      </p:sp>
+      <p:sp>
+        <p:nvSpPr>
+          <p:cNvPr id="7" name="제목 1">
+            <a:extLst>
+              <a:ext uri="{FF2B5EF4-FFF2-40B4-BE49-F238E27FC236}">
+                <a16:creationId xmlns:a16="http://schemas.microsoft.com/office/drawing/2014/main" id="{8D4DF8D8-9F32-5507-3E2A-E5E0B0B01B3F}"/>
+              </a:ext>
+            </a:extLst>
+          </p:cNvPr>
+          <p:cNvSpPr>
+            <a:spLocks noGrp="1"/>
+          </p:cNvSpPr>
+          <p:nvPr>
+            <p:ph type="title"/>
+          </p:nvPr>
+        </p:nvSpPr>
+        <p:spPr>
+          <a:xfrm>
+            <a:off x="831850" y="3765550"/>
+            <a:ext cx="11150600" cy="652818"/>
+          </a:xfrm>
+          <a:effectLst>
+            <a:reflection blurRad="50800" stA="45000" endPos="44000" dir="5400000" sy="-100000" algn="bl" rotWithShape="0"/>
+          </a:effectLst>
+        </p:spPr>
+        <p:txBody>
+          <a:bodyPr anchor="b"/>
+          <a:lstStyle/>
+          <a:p>
+            <a:r>
+              <a:rPr lang="en-US" altLang="ko-KR" sz="4000" b="1" i="0" spc="150" dirty="0"/>
+              <a:t>Section 10. </a:t>
+            </a:r>
+            <a:r>
+              <a:rPr lang="ko-KR" altLang="en-US" sz="4000" b="1" i="0" spc="150" dirty="0"/>
+              <a:t>석탄시장의 구조변화와 좌초자산</a:t>
+            </a:r>
+            <a:endParaRPr lang="ko-KR" altLang="en-US" sz="3600" i="0" spc="150" dirty="0"/>
+          </a:p>
+        </p:txBody>
+      </p:sp>
+    </p:spTree>
+    <p:extLst>
+      <p:ext uri="{BB962C8B-B14F-4D97-AF65-F5344CB8AC3E}">
+        <p14:creationId xmlns:p14="http://schemas.microsoft.com/office/powerpoint/2010/main" val="707442002"/>
+      </p:ext>
+    </p:extLst>
+  </p:cSld>
+  <p:clrMapOvr>
+    <a:masterClrMapping/>
+  </p:clrMapOvr>
+</p:sld>
+</file>
+
+<file path=ppt/slides/slide21.xml><?xml version="1.0" encoding="utf-8"?>
+<p:sld xmlns:a="http://schemas.openxmlformats.org/drawingml/2006/main" xmlns:r="http://schemas.openxmlformats.org/officeDocument/2006/relationships" xmlns:p="http://schemas.openxmlformats.org/presentationml/2006/main">
+  <p:cSld>
+    <p:spTree>
+      <p:nvGrpSpPr>
+        <p:cNvPr id="1" name="">
+          <a:extLst>
+            <a:ext uri="{FF2B5EF4-FFF2-40B4-BE49-F238E27FC236}">
+              <a16:creationId xmlns:a16="http://schemas.microsoft.com/office/drawing/2014/main" id="{58D1A724-FF5F-F795-8171-E14A2B4F16F8}"/>
+            </a:ext>
+          </a:extLst>
+        </p:cNvPr>
+        <p:cNvGrpSpPr/>
+        <p:nvPr/>
+      </p:nvGrpSpPr>
+      <p:grpSpPr>
+        <a:xfrm>
+          <a:off x="0" y="0"/>
+          <a:ext cx="0" cy="0"/>
+          <a:chOff x="0" y="0"/>
+          <a:chExt cx="0" cy="0"/>
+        </a:xfrm>
+      </p:grpSpPr>
+      <p:pic>
+        <p:nvPicPr>
+          <p:cNvPr id="6" name="그림 5" descr="텍스트, 로고, 원, 폰트이(가) 표시된 사진&#10;&#10;AI 생성 콘텐츠는 정확하지 않을 수 있습니다.">
+            <a:extLst>
+              <a:ext uri="{FF2B5EF4-FFF2-40B4-BE49-F238E27FC236}">
+                <a16:creationId xmlns:a16="http://schemas.microsoft.com/office/drawing/2014/main" id="{BBB9BD40-31B0-CF75-80CC-4964C75E9B88}"/>
+              </a:ext>
+            </a:extLst>
+          </p:cNvPr>
+          <p:cNvPicPr>
+            <a:picLocks noChangeAspect="1"/>
+          </p:cNvPicPr>
+          <p:nvPr/>
+        </p:nvPicPr>
+        <p:blipFill>
+          <a:blip r:embed="rId2">
+            <a:alphaModFix amt="20000"/>
+            <a:extLst>
+              <a:ext uri="{28A0092B-C50C-407E-A947-70E740481C1C}">
+                <a14:useLocalDpi xmlns:a14="http://schemas.microsoft.com/office/drawing/2010/main" val="0"/>
+              </a:ext>
+            </a:extLst>
+          </a:blip>
+          <a:stretch>
+            <a:fillRect/>
+          </a:stretch>
+        </p:blipFill>
+        <p:spPr>
+          <a:xfrm>
+            <a:off x="4012070" y="1673061"/>
+            <a:ext cx="4167861" cy="4167861"/>
+          </a:xfrm>
+          <a:prstGeom prst="rect">
+            <a:avLst/>
+          </a:prstGeom>
+        </p:spPr>
+      </p:pic>
+      <p:sp>
+        <p:nvSpPr>
+          <p:cNvPr id="4" name="슬라이드 번호 개체 틀 3">
+            <a:extLst>
+              <a:ext uri="{FF2B5EF4-FFF2-40B4-BE49-F238E27FC236}">
+                <a16:creationId xmlns:a16="http://schemas.microsoft.com/office/drawing/2014/main" id="{D747C5E9-0275-EAE5-E692-6C80776F901A}"/>
+              </a:ext>
+            </a:extLst>
+          </p:cNvPr>
+          <p:cNvSpPr>
+            <a:spLocks noGrp="1"/>
+          </p:cNvSpPr>
+          <p:nvPr>
+            <p:ph type="sldNum" sz="quarter" idx="12"/>
+          </p:nvPr>
+        </p:nvSpPr>
+        <p:spPr/>
+        <p:txBody>
+          <a:bodyPr/>
+          <a:lstStyle/>
+          <a:p>
+            <a:fld id="{109C872D-39A9-4065-8BF3-6A613116E2A1}" type="slidenum">
+              <a:rPr lang="ko-KR" altLang="en-US" smtClean="0"/>
+              <a:t>21</a:t>
+            </a:fld>
+            <a:endParaRPr lang="ko-KR" altLang="en-US"/>
+          </a:p>
+        </p:txBody>
+      </p:sp>
+      <p:sp>
+        <p:nvSpPr>
+          <p:cNvPr id="7" name="제목 1">
+            <a:extLst>
+              <a:ext uri="{FF2B5EF4-FFF2-40B4-BE49-F238E27FC236}">
+                <a16:creationId xmlns:a16="http://schemas.microsoft.com/office/drawing/2014/main" id="{AF1A278D-627D-B7E6-D54B-C4D6D391DA7F}"/>
+              </a:ext>
+            </a:extLst>
+          </p:cNvPr>
+          <p:cNvSpPr>
+            <a:spLocks noGrp="1"/>
+          </p:cNvSpPr>
+          <p:nvPr>
+            <p:ph type="title"/>
+          </p:nvPr>
+        </p:nvSpPr>
+        <p:spPr>
+          <a:xfrm>
+            <a:off x="831850" y="3765550"/>
+            <a:ext cx="11150600" cy="652818"/>
+          </a:xfrm>
+          <a:effectLst>
+            <a:reflection blurRad="50800" stA="45000" endPos="44000" dir="5400000" sy="-100000" algn="bl" rotWithShape="0"/>
+          </a:effectLst>
+        </p:spPr>
+        <p:txBody>
+          <a:bodyPr anchor="b"/>
+          <a:lstStyle/>
+          <a:p>
+            <a:r>
+              <a:rPr lang="en-US" altLang="ko-KR" sz="4000" b="1" i="0" spc="150" dirty="0"/>
+              <a:t>Section 1. </a:t>
+            </a:r>
+            <a:r>
+              <a:rPr lang="ko-KR" altLang="en-US" sz="4000" b="1" i="0" spc="150" dirty="0"/>
+              <a:t>개 론</a:t>
+            </a:r>
+            <a:endParaRPr lang="ko-KR" altLang="en-US" sz="3600" i="0" spc="150" dirty="0"/>
+          </a:p>
+        </p:txBody>
+      </p:sp>
+    </p:spTree>
+    <p:extLst>
+      <p:ext uri="{BB962C8B-B14F-4D97-AF65-F5344CB8AC3E}">
+        <p14:creationId xmlns:p14="http://schemas.microsoft.com/office/powerpoint/2010/main" val="4221688942"/>
+      </p:ext>
+    </p:extLst>
+  </p:cSld>
+  <p:clrMapOvr>
+    <a:masterClrMapping/>
+  </p:clrMapOvr>
+</p:sld>
+</file>
+
+<file path=ppt/slides/slide22.xml><?xml version="1.0" encoding="utf-8"?>
+<p:sld xmlns:a="http://schemas.openxmlformats.org/drawingml/2006/main" xmlns:r="http://schemas.openxmlformats.org/officeDocument/2006/relationships" xmlns:p="http://schemas.openxmlformats.org/presentationml/2006/main">
+  <p:cSld>
+    <p:spTree>
+      <p:nvGrpSpPr>
+        <p:cNvPr id="1" name="">
+          <a:extLst>
+            <a:ext uri="{FF2B5EF4-FFF2-40B4-BE49-F238E27FC236}">
+              <a16:creationId xmlns:a16="http://schemas.microsoft.com/office/drawing/2014/main" id="{2221EDDE-B308-8FA7-8116-DAD482D863C8}"/>
+            </a:ext>
+          </a:extLst>
+        </p:cNvPr>
+        <p:cNvGrpSpPr/>
+        <p:nvPr/>
+      </p:nvGrpSpPr>
+      <p:grpSpPr>
+        <a:xfrm>
+          <a:off x="0" y="0"/>
+          <a:ext cx="0" cy="0"/>
+          <a:chOff x="0" y="0"/>
+          <a:chExt cx="0" cy="0"/>
+        </a:xfrm>
+      </p:grpSpPr>
+      <p:pic>
+        <p:nvPicPr>
+          <p:cNvPr id="3" name="그림 2" descr="텍스트, 로고, 원, 폰트이(가) 표시된 사진&#10;&#10;AI 생성 콘텐츠는 정확하지 않을 수 있습니다.">
+            <a:extLst>
+              <a:ext uri="{FF2B5EF4-FFF2-40B4-BE49-F238E27FC236}">
+                <a16:creationId xmlns:a16="http://schemas.microsoft.com/office/drawing/2014/main" id="{396FF0BD-25A1-7840-4B63-B2ECDF7CFA54}"/>
+              </a:ext>
+            </a:extLst>
+          </p:cNvPr>
+          <p:cNvPicPr>
+            <a:picLocks noChangeAspect="1"/>
+          </p:cNvPicPr>
+          <p:nvPr/>
+        </p:nvPicPr>
+        <p:blipFill>
+          <a:blip r:embed="rId2">
+            <a:alphaModFix amt="20000"/>
+            <a:extLst>
+              <a:ext uri="{28A0092B-C50C-407E-A947-70E740481C1C}">
+                <a14:useLocalDpi xmlns:a14="http://schemas.microsoft.com/office/drawing/2010/main" val="0"/>
+              </a:ext>
+            </a:extLst>
+          </a:blip>
+          <a:stretch>
+            <a:fillRect/>
+          </a:stretch>
+        </p:blipFill>
+        <p:spPr>
+          <a:xfrm>
+            <a:off x="4012070" y="1673061"/>
+            <a:ext cx="4167861" cy="4167861"/>
+          </a:xfrm>
+          <a:prstGeom prst="rect">
+            <a:avLst/>
+          </a:prstGeom>
+        </p:spPr>
+      </p:pic>
+      <p:sp>
+        <p:nvSpPr>
+          <p:cNvPr id="2" name="제목 1">
+            <a:extLst>
+              <a:ext uri="{FF2B5EF4-FFF2-40B4-BE49-F238E27FC236}">
+                <a16:creationId xmlns:a16="http://schemas.microsoft.com/office/drawing/2014/main" id="{CA03F291-495C-4A31-DF0A-8F9CC97672B8}"/>
+              </a:ext>
+            </a:extLst>
+          </p:cNvPr>
+          <p:cNvSpPr>
+            <a:spLocks noGrp="1"/>
+          </p:cNvSpPr>
+          <p:nvPr>
+            <p:ph type="title"/>
+          </p:nvPr>
+        </p:nvSpPr>
+        <p:spPr>
+          <a:xfrm>
+            <a:off x="831850" y="1709739"/>
+            <a:ext cx="10515600" cy="2134292"/>
+          </a:xfrm>
+          <a:effectLst>
+            <a:reflection blurRad="50800" stA="45000" endPos="44000" dir="5400000" sy="-100000" algn="bl" rotWithShape="0"/>
+          </a:effectLst>
+        </p:spPr>
+        <p:txBody>
+          <a:bodyPr/>
+          <a:lstStyle/>
+          <a:p>
+            <a:r>
+              <a:rPr lang="en-US" altLang="ko-KR" b="1" i="0" spc="150">
+                <a:solidFill>
+                  <a:schemeClr val="accent2"/>
+                </a:solidFill>
+              </a:rPr>
+              <a:t>T</a:t>
+            </a:r>
+            <a:r>
+              <a:rPr lang="en-US" altLang="ko-KR" sz="5400" i="0" spc="100"/>
+              <a:t>hank you</a:t>
+            </a:r>
+            <a:endParaRPr lang="ko-KR" altLang="en-US" sz="5400" i="0" spc="100"/>
+          </a:p>
+        </p:txBody>
+      </p:sp>
+      <p:sp>
+        <p:nvSpPr>
+          <p:cNvPr id="4" name="슬라이드 번호 개체 틀 3">
+            <a:extLst>
+              <a:ext uri="{FF2B5EF4-FFF2-40B4-BE49-F238E27FC236}">
+                <a16:creationId xmlns:a16="http://schemas.microsoft.com/office/drawing/2014/main" id="{6EFC0B50-C677-27B7-56F6-14F7BF9A70A9}"/>
+              </a:ext>
+            </a:extLst>
+          </p:cNvPr>
+          <p:cNvSpPr>
+            <a:spLocks noGrp="1"/>
+          </p:cNvSpPr>
+          <p:nvPr>
+            <p:ph type="sldNum" sz="quarter" idx="12"/>
+          </p:nvPr>
+        </p:nvSpPr>
+        <p:spPr/>
+        <p:txBody>
+          <a:bodyPr/>
+          <a:lstStyle/>
+          <a:p>
+            <a:fld id="{109C872D-39A9-4065-8BF3-6A613116E2A1}" type="slidenum">
+              <a:rPr lang="ko-KR" altLang="en-US" smtClean="0"/>
+              <a:t>22</a:t>
+            </a:fld>
+            <a:endParaRPr lang="ko-KR" altLang="en-US"/>
+          </a:p>
+        </p:txBody>
+      </p:sp>
+    </p:spTree>
+    <p:extLst>
+      <p:ext uri="{BB962C8B-B14F-4D97-AF65-F5344CB8AC3E}">
+        <p14:creationId xmlns:p14="http://schemas.microsoft.com/office/powerpoint/2010/main" val="103939182"/>
       </p:ext>
     </p:extLst>
   </p:cSld>
@@ -9366,6 +11532,874 @@
         <p:cNvPr id="1" name="">
           <a:extLst>
             <a:ext uri="{FF2B5EF4-FFF2-40B4-BE49-F238E27FC236}">
+              <a16:creationId xmlns:a16="http://schemas.microsoft.com/office/drawing/2014/main" id="{C828857B-3683-2BC3-A086-B64A2E17A404}"/>
+            </a:ext>
+          </a:extLst>
+        </p:cNvPr>
+        <p:cNvGrpSpPr/>
+        <p:nvPr/>
+      </p:nvGrpSpPr>
+      <p:grpSpPr>
+        <a:xfrm>
+          <a:off x="0" y="0"/>
+          <a:ext cx="0" cy="0"/>
+          <a:chOff x="0" y="0"/>
+          <a:chExt cx="0" cy="0"/>
+        </a:xfrm>
+      </p:grpSpPr>
+      <p:sp>
+        <p:nvSpPr>
+          <p:cNvPr id="2" name="제목 1">
+            <a:extLst>
+              <a:ext uri="{FF2B5EF4-FFF2-40B4-BE49-F238E27FC236}">
+                <a16:creationId xmlns:a16="http://schemas.microsoft.com/office/drawing/2014/main" id="{9B7328EF-F34F-8995-A223-A4E560812E8F}"/>
+              </a:ext>
+            </a:extLst>
+          </p:cNvPr>
+          <p:cNvSpPr>
+            <a:spLocks noGrp="1"/>
+          </p:cNvSpPr>
+          <p:nvPr>
+            <p:ph type="title"/>
+          </p:nvPr>
+        </p:nvSpPr>
+        <p:spPr/>
+        <p:txBody>
+          <a:bodyPr/>
+          <a:lstStyle/>
+          <a:p>
+            <a:r>
+              <a:rPr lang="ko-KR" altLang="en-US" dirty="0"/>
+              <a:t>석탄산업의 역사</a:t>
+            </a:r>
+          </a:p>
+        </p:txBody>
+      </p:sp>
+      <p:sp>
+        <p:nvSpPr>
+          <p:cNvPr id="4" name="슬라이드 번호 개체 틀 3">
+            <a:extLst>
+              <a:ext uri="{FF2B5EF4-FFF2-40B4-BE49-F238E27FC236}">
+                <a16:creationId xmlns:a16="http://schemas.microsoft.com/office/drawing/2014/main" id="{325E0A92-85AA-8412-935C-D0C55D22B1A4}"/>
+              </a:ext>
+            </a:extLst>
+          </p:cNvPr>
+          <p:cNvSpPr>
+            <a:spLocks noGrp="1"/>
+          </p:cNvSpPr>
+          <p:nvPr>
+            <p:ph type="sldNum" sz="quarter" idx="12"/>
+          </p:nvPr>
+        </p:nvSpPr>
+        <p:spPr/>
+        <p:txBody>
+          <a:bodyPr/>
+          <a:lstStyle/>
+          <a:p>
+            <a:fld id="{109C872D-39A9-4065-8BF3-6A613116E2A1}" type="slidenum">
+              <a:rPr lang="ko-KR" altLang="en-US" smtClean="0"/>
+              <a:t>7</a:t>
+            </a:fld>
+            <a:endParaRPr lang="ko-KR" altLang="en-US"/>
+          </a:p>
+        </p:txBody>
+      </p:sp>
+      <p:sp>
+        <p:nvSpPr>
+          <p:cNvPr id="3" name="TextBox 2">
+            <a:extLst>
+              <a:ext uri="{FF2B5EF4-FFF2-40B4-BE49-F238E27FC236}">
+                <a16:creationId xmlns:a16="http://schemas.microsoft.com/office/drawing/2014/main" id="{7B2F4D06-06D6-0B4D-6DC6-5F57827D95E4}"/>
+              </a:ext>
+            </a:extLst>
+          </p:cNvPr>
+          <p:cNvSpPr txBox="1"/>
+          <p:nvPr/>
+        </p:nvSpPr>
+        <p:spPr>
+          <a:xfrm>
+            <a:off x="288790" y="958844"/>
+            <a:ext cx="11118453" cy="5584670"/>
+          </a:xfrm>
+          <a:prstGeom prst="rect">
+            <a:avLst/>
+          </a:prstGeom>
+          <a:noFill/>
+        </p:spPr>
+        <p:txBody>
+          <a:bodyPr wrap="square" rtlCol="0" anchor="t">
+            <a:spAutoFit/>
+          </a:bodyPr>
+          <a:lstStyle/>
+          <a:p>
+            <a:pPr marL="377825" indent="-285750">
+              <a:lnSpc>
+                <a:spcPct val="150000"/>
+              </a:lnSpc>
+              <a:buFont typeface="Arial" panose="020B0604020202020204" pitchFamily="34" charset="0"/>
+              <a:buChar char="•"/>
+            </a:pPr>
+            <a:r>
+              <a:rPr lang="ko-KR" altLang="en-US" sz="1600" dirty="0"/>
+              <a:t>석탄의 사용은 수천년 전으로 거슬러 올라가지만</a:t>
+            </a:r>
+            <a:r>
+              <a:rPr lang="en-US" altLang="ko-KR" sz="1600" dirty="0"/>
+              <a:t>, </a:t>
+            </a:r>
+            <a:r>
+              <a:rPr lang="ko-KR" altLang="en-US" sz="1600" dirty="0"/>
+              <a:t>본격적인 산업적인 용도의 활용은 근대 초기에 비로소 나타난다</a:t>
+            </a:r>
+            <a:r>
+              <a:rPr lang="en-US" altLang="ko-KR" sz="1600" dirty="0"/>
+              <a:t>.</a:t>
+            </a:r>
+          </a:p>
+          <a:p>
+            <a:pPr marL="835025" lvl="1" indent="-285750">
+              <a:lnSpc>
+                <a:spcPct val="150000"/>
+              </a:lnSpc>
+              <a:buFont typeface="Wingdings" panose="05000000000000000000" pitchFamily="2" charset="2"/>
+              <a:buChar char="ü"/>
+            </a:pPr>
+            <a:r>
+              <a:rPr lang="ko-KR" altLang="en-US" sz="1600" dirty="0"/>
+              <a:t>기록에 따르면 중국에서는 기원전 </a:t>
+            </a:r>
+            <a:r>
+              <a:rPr lang="en-US" altLang="ko-KR" sz="1600" dirty="0"/>
+              <a:t>1000</a:t>
+            </a:r>
+            <a:r>
+              <a:rPr lang="ko-KR" altLang="en-US" sz="1600" dirty="0" err="1"/>
+              <a:t>년경부터</a:t>
+            </a:r>
+            <a:r>
+              <a:rPr lang="ko-KR" altLang="en-US" sz="1600" dirty="0"/>
+              <a:t> 석탄을 난방 연료로 사용하였다</a:t>
+            </a:r>
+            <a:r>
+              <a:rPr lang="en-US" altLang="ko-KR" sz="1600" dirty="0"/>
+              <a:t>.</a:t>
+            </a:r>
+          </a:p>
+          <a:p>
+            <a:pPr marL="835025" lvl="1" indent="-285750">
+              <a:lnSpc>
+                <a:spcPct val="150000"/>
+              </a:lnSpc>
+              <a:buFont typeface="Wingdings" panose="05000000000000000000" pitchFamily="2" charset="2"/>
+              <a:buChar char="ü"/>
+            </a:pPr>
+            <a:r>
+              <a:rPr lang="ko-KR" altLang="en-US" sz="1600" dirty="0"/>
+              <a:t>로마 제국 시기인 서기 </a:t>
+            </a:r>
+            <a:r>
+              <a:rPr lang="en-US" altLang="ko-KR" sz="1600" dirty="0"/>
+              <a:t>200</a:t>
+            </a:r>
+            <a:r>
+              <a:rPr lang="ko-KR" altLang="en-US" sz="1600" dirty="0" err="1"/>
+              <a:t>년경에도</a:t>
+            </a:r>
+            <a:r>
+              <a:rPr lang="ko-KR" altLang="en-US" sz="1600" dirty="0"/>
+              <a:t> 석탄 사용이 확인된다</a:t>
+            </a:r>
+            <a:r>
+              <a:rPr lang="en-US" altLang="ko-KR" sz="1600" dirty="0"/>
+              <a:t>.</a:t>
+            </a:r>
+          </a:p>
+          <a:p>
+            <a:pPr marL="835025" lvl="1" indent="-285750">
+              <a:lnSpc>
+                <a:spcPct val="150000"/>
+              </a:lnSpc>
+              <a:buFont typeface="Wingdings" panose="05000000000000000000" pitchFamily="2" charset="2"/>
+              <a:buChar char="ü"/>
+            </a:pPr>
+            <a:r>
+              <a:rPr lang="ko-KR" altLang="en-US" sz="1600" dirty="0"/>
+              <a:t>석탄이 산업적으로 광범위하게 사용되기 시작한 것은 </a:t>
+            </a:r>
+            <a:r>
+              <a:rPr lang="en-US" altLang="ko-KR" sz="1600" dirty="0"/>
+              <a:t>13</a:t>
+            </a:r>
+            <a:r>
+              <a:rPr lang="ko-KR" altLang="en-US" sz="1600" dirty="0"/>
+              <a:t>세기경 영국이며</a:t>
+            </a:r>
+            <a:r>
+              <a:rPr lang="en-US" altLang="ko-KR" sz="1600" dirty="0"/>
+              <a:t>, </a:t>
+            </a:r>
+            <a:r>
+              <a:rPr lang="ko-KR" altLang="en-US" sz="1600" dirty="0"/>
+              <a:t>난방과 대장장이업에서 사용되었다</a:t>
+            </a:r>
+            <a:r>
+              <a:rPr lang="en-US" altLang="ko-KR" sz="1600" dirty="0"/>
+              <a:t>.</a:t>
+            </a:r>
+          </a:p>
+          <a:p>
+            <a:pPr marL="835025" lvl="1" indent="-285750">
+              <a:lnSpc>
+                <a:spcPct val="150000"/>
+              </a:lnSpc>
+              <a:buFont typeface="Wingdings" panose="05000000000000000000" pitchFamily="2" charset="2"/>
+              <a:buChar char="ü"/>
+            </a:pPr>
+            <a:endParaRPr lang="en-US" altLang="ko-KR" sz="1600" dirty="0"/>
+          </a:p>
+          <a:p>
+            <a:pPr marL="377825" indent="-285750">
+              <a:lnSpc>
+                <a:spcPct val="150000"/>
+              </a:lnSpc>
+              <a:buFont typeface="Arial" panose="020B0604020202020204" pitchFamily="34" charset="0"/>
+              <a:buChar char="•"/>
+            </a:pPr>
+            <a:r>
+              <a:rPr lang="en-US" altLang="ko-KR" sz="1600" dirty="0"/>
+              <a:t>16</a:t>
+            </a:r>
+            <a:r>
+              <a:rPr lang="ko-KR" altLang="en-US" sz="1600" dirty="0"/>
+              <a:t>세기 말부터 </a:t>
+            </a:r>
+            <a:r>
+              <a:rPr lang="en-US" altLang="ko-KR" sz="1600" dirty="0"/>
+              <a:t>17</a:t>
+            </a:r>
+            <a:r>
+              <a:rPr lang="ko-KR" altLang="en-US" sz="1600" dirty="0"/>
+              <a:t>세기 초</a:t>
+            </a:r>
+            <a:r>
+              <a:rPr lang="en-US" altLang="ko-KR" sz="1600" dirty="0"/>
+              <a:t>,</a:t>
+            </a:r>
+            <a:r>
+              <a:rPr lang="ko-KR" altLang="en-US" sz="1600" dirty="0"/>
+              <a:t> 인구증가와 수공업의 확대에 따라 에너지 수요가 급증하고 석탄채굴이 산업화 되었다</a:t>
+            </a:r>
+            <a:r>
+              <a:rPr lang="en-US" altLang="ko-KR" sz="1600" dirty="0"/>
+              <a:t>.</a:t>
+            </a:r>
+          </a:p>
+          <a:p>
+            <a:pPr marL="835025" lvl="1" indent="-285750">
+              <a:lnSpc>
+                <a:spcPct val="150000"/>
+              </a:lnSpc>
+              <a:buFont typeface="Wingdings" panose="05000000000000000000" pitchFamily="2" charset="2"/>
+              <a:buChar char="ü"/>
+            </a:pPr>
+            <a:r>
+              <a:rPr lang="ko-KR" altLang="en-US" sz="1600" dirty="0"/>
+              <a:t>특히 </a:t>
+            </a:r>
+            <a:r>
+              <a:rPr lang="en-US" altLang="ko-KR" sz="1600" dirty="0"/>
+              <a:t>17</a:t>
+            </a:r>
+            <a:r>
+              <a:rPr lang="ko-KR" altLang="en-US" sz="1600" dirty="0"/>
+              <a:t>세기 말까지 영국에서는 탄광이 경제의 핵심부문으로 성장하였다</a:t>
+            </a:r>
+            <a:r>
+              <a:rPr lang="en-US" altLang="ko-KR" sz="1600" dirty="0"/>
+              <a:t>.</a:t>
+            </a:r>
+          </a:p>
+          <a:p>
+            <a:pPr marL="835025" lvl="1" indent="-285750">
+              <a:lnSpc>
+                <a:spcPct val="150000"/>
+              </a:lnSpc>
+              <a:buFont typeface="Wingdings" panose="05000000000000000000" pitchFamily="2" charset="2"/>
+              <a:buChar char="ü"/>
+            </a:pPr>
+            <a:r>
+              <a:rPr lang="ko-KR" altLang="en-US" sz="1600" dirty="0"/>
+              <a:t>석탄은 목재의 대체재로서 중요한 역할을 하기 시작하였다</a:t>
+            </a:r>
+            <a:r>
+              <a:rPr lang="en-US" altLang="ko-KR" sz="1600" dirty="0"/>
+              <a:t>.</a:t>
+            </a:r>
+          </a:p>
+          <a:p>
+            <a:pPr marL="835025" lvl="1" indent="-285750">
+              <a:lnSpc>
+                <a:spcPct val="150000"/>
+              </a:lnSpc>
+              <a:buFont typeface="Wingdings" panose="05000000000000000000" pitchFamily="2" charset="2"/>
+              <a:buChar char="ü"/>
+            </a:pPr>
+            <a:endParaRPr lang="en-US" altLang="ko-KR" sz="1600" dirty="0"/>
+          </a:p>
+          <a:p>
+            <a:pPr marL="377825" indent="-285750">
+              <a:lnSpc>
+                <a:spcPct val="150000"/>
+              </a:lnSpc>
+              <a:buFont typeface="Arial" panose="020B0604020202020204" pitchFamily="34" charset="0"/>
+              <a:buChar char="•"/>
+            </a:pPr>
+            <a:r>
+              <a:rPr lang="en-US" altLang="ko-KR" sz="1600" dirty="0"/>
+              <a:t>18</a:t>
+            </a:r>
+            <a:r>
+              <a:rPr lang="ko-KR" altLang="en-US" sz="1600" dirty="0"/>
+              <a:t>세기 말 산업혁명의 도래는 석탄의 역사에서 결정적인 전환점을 이룬다</a:t>
+            </a:r>
+            <a:r>
+              <a:rPr lang="en-US" altLang="ko-KR" sz="1600" dirty="0"/>
+              <a:t>.</a:t>
+            </a:r>
+          </a:p>
+          <a:p>
+            <a:pPr marL="835025" lvl="1" indent="-285750">
+              <a:lnSpc>
+                <a:spcPct val="150000"/>
+              </a:lnSpc>
+              <a:buFont typeface="Wingdings" panose="05000000000000000000" pitchFamily="2" charset="2"/>
+              <a:buChar char="ü"/>
+            </a:pPr>
+            <a:r>
+              <a:rPr lang="ko-KR" altLang="en-US" sz="1600" dirty="0"/>
+              <a:t>새로운 기술과 기계의 출현으로 에너지 수요가 급증한다</a:t>
+            </a:r>
+            <a:r>
+              <a:rPr lang="en-US" altLang="ko-KR" sz="1600" dirty="0"/>
+              <a:t>.</a:t>
+            </a:r>
+          </a:p>
+          <a:p>
+            <a:pPr marL="1292225" lvl="2" indent="-285750">
+              <a:lnSpc>
+                <a:spcPct val="150000"/>
+              </a:lnSpc>
+              <a:buFont typeface="Wingdings" panose="05000000000000000000" pitchFamily="2" charset="2"/>
+              <a:buChar char="Ø"/>
+            </a:pPr>
+            <a:r>
+              <a:rPr lang="ko-KR" altLang="en-US" sz="1600" dirty="0"/>
+              <a:t>목재 및 숯을 대체하는 에너지원이 되었다</a:t>
+            </a:r>
+            <a:r>
+              <a:rPr lang="en-US" altLang="ko-KR" sz="1600" dirty="0"/>
+              <a:t>.</a:t>
+            </a:r>
+          </a:p>
+          <a:p>
+            <a:pPr marL="1292225" lvl="2" indent="-285750">
+              <a:lnSpc>
+                <a:spcPct val="150000"/>
+              </a:lnSpc>
+              <a:buFont typeface="Wingdings" panose="05000000000000000000" pitchFamily="2" charset="2"/>
+              <a:buChar char="Ø"/>
+            </a:pPr>
+            <a:r>
+              <a:rPr lang="ko-KR" altLang="en-US" sz="1600" dirty="0"/>
+              <a:t>증기기관의 동력원으로서 섬유</a:t>
+            </a:r>
+            <a:r>
+              <a:rPr lang="en-US" altLang="ko-KR" sz="1600" dirty="0"/>
+              <a:t>, </a:t>
+            </a:r>
+            <a:r>
+              <a:rPr lang="ko-KR" altLang="en-US" sz="1600" dirty="0"/>
+              <a:t>철도</a:t>
+            </a:r>
+            <a:r>
+              <a:rPr lang="en-US" altLang="ko-KR" sz="1600" dirty="0"/>
+              <a:t>, </a:t>
+            </a:r>
+            <a:r>
+              <a:rPr lang="ko-KR" altLang="en-US" sz="1600" dirty="0"/>
+              <a:t>강철 산업 등의 기반이 되었다</a:t>
+            </a:r>
+            <a:r>
+              <a:rPr lang="en-US" altLang="ko-KR" sz="1600" dirty="0"/>
+              <a:t>.</a:t>
+            </a:r>
+          </a:p>
+          <a:p>
+            <a:pPr marL="377825" indent="-285750">
+              <a:lnSpc>
+                <a:spcPct val="150000"/>
+              </a:lnSpc>
+              <a:buFont typeface="Arial" panose="020B0604020202020204" pitchFamily="34" charset="0"/>
+              <a:buChar char="•"/>
+            </a:pPr>
+            <a:endParaRPr lang="en-US" altLang="ko-KR" sz="1600" dirty="0"/>
+          </a:p>
+          <a:p>
+            <a:pPr marL="377825" indent="-285750">
+              <a:lnSpc>
+                <a:spcPct val="150000"/>
+              </a:lnSpc>
+              <a:buFont typeface="Arial" panose="020B0604020202020204" pitchFamily="34" charset="0"/>
+              <a:buChar char="•"/>
+            </a:pPr>
+            <a:r>
+              <a:rPr lang="en-US" altLang="ko-KR" sz="1600" dirty="0"/>
+              <a:t>19</a:t>
+            </a:r>
+            <a:r>
+              <a:rPr lang="ko-KR" altLang="en-US" sz="1600" dirty="0"/>
+              <a:t>세기 내내 석탄은 영국 경제의 중심이 되었으며</a:t>
+            </a:r>
+            <a:r>
+              <a:rPr lang="en-US" altLang="ko-KR" sz="1600" dirty="0"/>
+              <a:t>, </a:t>
+            </a:r>
+            <a:r>
+              <a:rPr lang="ko-KR" altLang="en-US" sz="1600" dirty="0"/>
+              <a:t>유사한 경향이 독일과 미국에서도 나타났다</a:t>
+            </a:r>
+            <a:r>
+              <a:rPr lang="en-US" altLang="ko-KR" sz="1600" dirty="0"/>
+              <a:t>.</a:t>
+            </a:r>
+          </a:p>
+        </p:txBody>
+      </p:sp>
+    </p:spTree>
+    <p:extLst>
+      <p:ext uri="{BB962C8B-B14F-4D97-AF65-F5344CB8AC3E}">
+        <p14:creationId xmlns:p14="http://schemas.microsoft.com/office/powerpoint/2010/main" val="461192370"/>
+      </p:ext>
+    </p:extLst>
+  </p:cSld>
+  <p:clrMapOvr>
+    <a:masterClrMapping/>
+  </p:clrMapOvr>
+</p:sld>
+</file>
+
+<file path=ppt/slides/slide8.xml><?xml version="1.0" encoding="utf-8"?>
+<p:sld xmlns:a="http://schemas.openxmlformats.org/drawingml/2006/main" xmlns:r="http://schemas.openxmlformats.org/officeDocument/2006/relationships" xmlns:p="http://schemas.openxmlformats.org/presentationml/2006/main">
+  <p:cSld>
+    <p:spTree>
+      <p:nvGrpSpPr>
+        <p:cNvPr id="1" name="">
+          <a:extLst>
+            <a:ext uri="{FF2B5EF4-FFF2-40B4-BE49-F238E27FC236}">
+              <a16:creationId xmlns:a16="http://schemas.microsoft.com/office/drawing/2014/main" id="{A647412D-3BFB-B909-0EE7-82B7F857BD8A}"/>
+            </a:ext>
+          </a:extLst>
+        </p:cNvPr>
+        <p:cNvGrpSpPr/>
+        <p:nvPr/>
+      </p:nvGrpSpPr>
+      <p:grpSpPr>
+        <a:xfrm>
+          <a:off x="0" y="0"/>
+          <a:ext cx="0" cy="0"/>
+          <a:chOff x="0" y="0"/>
+          <a:chExt cx="0" cy="0"/>
+        </a:xfrm>
+      </p:grpSpPr>
+      <p:sp>
+        <p:nvSpPr>
+          <p:cNvPr id="2" name="제목 1">
+            <a:extLst>
+              <a:ext uri="{FF2B5EF4-FFF2-40B4-BE49-F238E27FC236}">
+                <a16:creationId xmlns:a16="http://schemas.microsoft.com/office/drawing/2014/main" id="{7193ACDE-375F-F406-9EEA-DA57D0B24738}"/>
+              </a:ext>
+            </a:extLst>
+          </p:cNvPr>
+          <p:cNvSpPr>
+            <a:spLocks noGrp="1"/>
+          </p:cNvSpPr>
+          <p:nvPr>
+            <p:ph type="title"/>
+          </p:nvPr>
+        </p:nvSpPr>
+        <p:spPr/>
+        <p:txBody>
+          <a:bodyPr/>
+          <a:lstStyle/>
+          <a:p>
+            <a:r>
+              <a:rPr lang="ko-KR" altLang="en-US" dirty="0"/>
+              <a:t>석탄산업의 역사</a:t>
+            </a:r>
+          </a:p>
+        </p:txBody>
+      </p:sp>
+      <p:sp>
+        <p:nvSpPr>
+          <p:cNvPr id="4" name="슬라이드 번호 개체 틀 3">
+            <a:extLst>
+              <a:ext uri="{FF2B5EF4-FFF2-40B4-BE49-F238E27FC236}">
+                <a16:creationId xmlns:a16="http://schemas.microsoft.com/office/drawing/2014/main" id="{E02737CC-BE48-2795-5D30-5CE201BBF24B}"/>
+              </a:ext>
+            </a:extLst>
+          </p:cNvPr>
+          <p:cNvSpPr>
+            <a:spLocks noGrp="1"/>
+          </p:cNvSpPr>
+          <p:nvPr>
+            <p:ph type="sldNum" sz="quarter" idx="12"/>
+          </p:nvPr>
+        </p:nvSpPr>
+        <p:spPr/>
+        <p:txBody>
+          <a:bodyPr/>
+          <a:lstStyle/>
+          <a:p>
+            <a:fld id="{109C872D-39A9-4065-8BF3-6A613116E2A1}" type="slidenum">
+              <a:rPr lang="ko-KR" altLang="en-US" smtClean="0"/>
+              <a:t>8</a:t>
+            </a:fld>
+            <a:endParaRPr lang="ko-KR" altLang="en-US"/>
+          </a:p>
+        </p:txBody>
+      </p:sp>
+      <p:sp>
+        <p:nvSpPr>
+          <p:cNvPr id="3" name="TextBox 2">
+            <a:extLst>
+              <a:ext uri="{FF2B5EF4-FFF2-40B4-BE49-F238E27FC236}">
+                <a16:creationId xmlns:a16="http://schemas.microsoft.com/office/drawing/2014/main" id="{03EA76E8-64EB-EBD7-1C9F-A0261C6B074C}"/>
+              </a:ext>
+            </a:extLst>
+          </p:cNvPr>
+          <p:cNvSpPr txBox="1"/>
+          <p:nvPr/>
+        </p:nvSpPr>
+        <p:spPr>
+          <a:xfrm>
+            <a:off x="288790" y="958844"/>
+            <a:ext cx="11118453" cy="4846007"/>
+          </a:xfrm>
+          <a:prstGeom prst="rect">
+            <a:avLst/>
+          </a:prstGeom>
+          <a:noFill/>
+        </p:spPr>
+        <p:txBody>
+          <a:bodyPr wrap="square" rtlCol="0" anchor="t">
+            <a:spAutoFit/>
+          </a:bodyPr>
+          <a:lstStyle/>
+          <a:p>
+            <a:pPr marL="377825" indent="-285750">
+              <a:lnSpc>
+                <a:spcPct val="150000"/>
+              </a:lnSpc>
+              <a:buFont typeface="Arial" panose="020B0604020202020204" pitchFamily="34" charset="0"/>
+              <a:buChar char="•"/>
+            </a:pPr>
+            <a:r>
+              <a:rPr lang="en-US" altLang="ko-KR" sz="1600" dirty="0"/>
+              <a:t>20</a:t>
+            </a:r>
+            <a:r>
+              <a:rPr lang="ko-KR" altLang="en-US" sz="1600" dirty="0"/>
+              <a:t>세기에는 석탄 생산이 정점을 맞이하며</a:t>
+            </a:r>
+            <a:r>
+              <a:rPr lang="en-US" altLang="ko-KR" sz="1600" dirty="0"/>
+              <a:t>, </a:t>
+            </a:r>
+            <a:r>
+              <a:rPr lang="ko-KR" altLang="en-US" sz="1600" dirty="0"/>
+              <a:t>제</a:t>
+            </a:r>
+            <a:r>
+              <a:rPr lang="en-US" altLang="ko-KR" sz="1600" dirty="0"/>
+              <a:t>2</a:t>
+            </a:r>
+            <a:r>
+              <a:rPr lang="ko-KR" altLang="en-US" sz="1600" dirty="0"/>
+              <a:t>차 세계대전 기간 동안 군수 산업과 전쟁 수행에 있어 필수적인 에너지원으로 기능하였다</a:t>
+            </a:r>
+            <a:r>
+              <a:rPr lang="en-US" altLang="ko-KR" sz="1600" dirty="0"/>
+              <a:t>.</a:t>
+            </a:r>
+          </a:p>
+          <a:p>
+            <a:pPr marL="835025" lvl="1" indent="-285750">
+              <a:lnSpc>
+                <a:spcPct val="150000"/>
+              </a:lnSpc>
+              <a:buFont typeface="Wingdings" panose="05000000000000000000" pitchFamily="2" charset="2"/>
+              <a:buChar char="ü"/>
+            </a:pPr>
+            <a:r>
+              <a:rPr lang="ko-KR" altLang="en-US" sz="1600" dirty="0"/>
+              <a:t>그러나 전후에는 석유</a:t>
+            </a:r>
+            <a:r>
+              <a:rPr lang="en-US" altLang="ko-KR" sz="1600" dirty="0"/>
+              <a:t>, </a:t>
+            </a:r>
+            <a:r>
+              <a:rPr lang="ko-KR" altLang="en-US" sz="1600" dirty="0"/>
+              <a:t>천연가스</a:t>
+            </a:r>
+            <a:r>
+              <a:rPr lang="en-US" altLang="ko-KR" sz="1600" dirty="0"/>
+              <a:t>, </a:t>
+            </a:r>
+            <a:r>
+              <a:rPr lang="ko-KR" altLang="en-US" sz="1600" dirty="0"/>
+              <a:t>원자력의 확산과 함께 석탄의 상대적 비중은 점차 하락하였다</a:t>
+            </a:r>
+            <a:r>
+              <a:rPr lang="en-US" altLang="ko-KR" sz="1600" dirty="0"/>
+              <a:t>.</a:t>
+            </a:r>
+          </a:p>
+          <a:p>
+            <a:pPr marL="835025" lvl="1" indent="-285750">
+              <a:lnSpc>
+                <a:spcPct val="150000"/>
+              </a:lnSpc>
+              <a:buFont typeface="Wingdings" panose="05000000000000000000" pitchFamily="2" charset="2"/>
+              <a:buChar char="ü"/>
+            </a:pPr>
+            <a:r>
+              <a:rPr lang="ko-KR" altLang="en-US" sz="1600" dirty="0"/>
+              <a:t>또 석탄채굴과 연소로 인한 환경오염</a:t>
+            </a:r>
+            <a:r>
+              <a:rPr lang="en-US" altLang="ko-KR" sz="1600" dirty="0"/>
+              <a:t>, </a:t>
+            </a:r>
+            <a:r>
+              <a:rPr lang="ko-KR" altLang="en-US" sz="1600" dirty="0" err="1"/>
+              <a:t>대기질</a:t>
+            </a:r>
+            <a:r>
+              <a:rPr lang="ko-KR" altLang="en-US" sz="1600" dirty="0"/>
+              <a:t> 저하</a:t>
+            </a:r>
+            <a:r>
+              <a:rPr lang="en-US" altLang="ko-KR" sz="1600" dirty="0"/>
+              <a:t>, </a:t>
+            </a:r>
+            <a:r>
+              <a:rPr lang="ko-KR" altLang="en-US" sz="1600" dirty="0"/>
+              <a:t>건강 피해 등의 사회문제가 부상하며 쇠퇴하기 시작하였다</a:t>
+            </a:r>
+            <a:r>
+              <a:rPr lang="en-US" altLang="ko-KR" sz="1600" dirty="0"/>
+              <a:t>.</a:t>
+            </a:r>
+          </a:p>
+          <a:p>
+            <a:pPr marL="835025" lvl="1" indent="-285750">
+              <a:lnSpc>
+                <a:spcPct val="150000"/>
+              </a:lnSpc>
+              <a:buFont typeface="Wingdings" panose="05000000000000000000" pitchFamily="2" charset="2"/>
+              <a:buChar char="ü"/>
+            </a:pPr>
+            <a:r>
+              <a:rPr lang="en-US" altLang="ko-KR" sz="1600" dirty="0"/>
+              <a:t>20</a:t>
+            </a:r>
+            <a:r>
+              <a:rPr lang="ko-KR" altLang="en-US" sz="1600" dirty="0"/>
+              <a:t>세기 후반 이후 유럽과 북미의 많은 탄광이 폐쇄되고</a:t>
+            </a:r>
+            <a:r>
+              <a:rPr lang="en-US" altLang="ko-KR" sz="1600" dirty="0"/>
+              <a:t>, </a:t>
+            </a:r>
+            <a:r>
+              <a:rPr lang="ko-KR" altLang="en-US" sz="1600" dirty="0"/>
+              <a:t>석탄 산업의 중심은 중국</a:t>
+            </a:r>
+            <a:r>
+              <a:rPr lang="en-US" altLang="ko-KR" sz="1600" dirty="0"/>
+              <a:t>, </a:t>
+            </a:r>
+            <a:r>
+              <a:rPr lang="ko-KR" altLang="en-US" sz="1600" dirty="0"/>
+              <a:t>인도</a:t>
+            </a:r>
+            <a:r>
+              <a:rPr lang="en-US" altLang="ko-KR" sz="1600" dirty="0"/>
+              <a:t>, </a:t>
+            </a:r>
+            <a:r>
+              <a:rPr lang="ko-KR" altLang="en-US" sz="1600" dirty="0"/>
+              <a:t>인도네시아 등 생산비용이 낮고 수요가 지속되는 지역으로 이동하였다</a:t>
+            </a:r>
+            <a:r>
+              <a:rPr lang="en-US" altLang="ko-KR" sz="1600" dirty="0"/>
+              <a:t>. </a:t>
+            </a:r>
+          </a:p>
+          <a:p>
+            <a:pPr marL="1292225" lvl="2" indent="-285750">
+              <a:lnSpc>
+                <a:spcPct val="150000"/>
+              </a:lnSpc>
+              <a:buFont typeface="Wingdings" panose="05000000000000000000" pitchFamily="2" charset="2"/>
+              <a:buChar char="Ø"/>
+            </a:pPr>
+            <a:r>
+              <a:rPr lang="ko-KR" altLang="en-US" sz="1600" dirty="0"/>
+              <a:t>이와 같은 </a:t>
+            </a:r>
+            <a:r>
+              <a:rPr lang="ko-KR" altLang="en-US" sz="1600" dirty="0" err="1"/>
+              <a:t>쇄락에도</a:t>
+            </a:r>
+            <a:r>
+              <a:rPr lang="ko-KR" altLang="en-US" sz="1600" dirty="0"/>
+              <a:t> 불구하고 여전히 개발도상국에서는 접근성과 경제성 측면에서 유리한 에너지원이다</a:t>
+            </a:r>
+            <a:r>
+              <a:rPr lang="en-US" altLang="ko-KR" sz="1600" dirty="0"/>
+              <a:t>.</a:t>
+            </a:r>
+          </a:p>
+          <a:p>
+            <a:pPr marL="1292225" lvl="2" indent="-285750">
+              <a:lnSpc>
+                <a:spcPct val="150000"/>
+              </a:lnSpc>
+              <a:buFont typeface="Wingdings" panose="05000000000000000000" pitchFamily="2" charset="2"/>
+              <a:buChar char="Ø"/>
+            </a:pPr>
+            <a:endParaRPr lang="en-US" altLang="ko-KR" sz="1600" dirty="0"/>
+          </a:p>
+          <a:p>
+            <a:pPr marL="377825" indent="-285750">
+              <a:lnSpc>
+                <a:spcPct val="150000"/>
+              </a:lnSpc>
+              <a:buFont typeface="Arial" panose="020B0604020202020204" pitchFamily="34" charset="0"/>
+              <a:buChar char="•"/>
+            </a:pPr>
+            <a:r>
+              <a:rPr lang="en-US" altLang="ko-KR" sz="1600" dirty="0"/>
+              <a:t>21</a:t>
+            </a:r>
+            <a:r>
+              <a:rPr lang="ko-KR" altLang="en-US" sz="1600" dirty="0"/>
+              <a:t>세기 들어서면서 석탄 산업은 전 세계적으로 복합적인 도전에 직면하고 있다</a:t>
+            </a:r>
+            <a:r>
+              <a:rPr lang="en-US" altLang="ko-KR" sz="1600" dirty="0"/>
+              <a:t>.</a:t>
+            </a:r>
+          </a:p>
+          <a:p>
+            <a:pPr marL="892175" lvl="1" indent="-342900">
+              <a:lnSpc>
+                <a:spcPct val="150000"/>
+              </a:lnSpc>
+              <a:buFont typeface="Wingdings" panose="05000000000000000000" pitchFamily="2" charset="2"/>
+              <a:buChar char="ü"/>
+            </a:pPr>
+            <a:r>
+              <a:rPr lang="ko-KR" altLang="en-US" sz="1600" dirty="0"/>
+              <a:t>탈탄소화를 위한 환경규제 강화</a:t>
+            </a:r>
+            <a:r>
+              <a:rPr lang="en-US" altLang="ko-KR" sz="1600" dirty="0"/>
+              <a:t>, </a:t>
+            </a:r>
+            <a:r>
+              <a:rPr lang="ko-KR" altLang="en-US" sz="1600" dirty="0"/>
+              <a:t>재생에너지 기술의 확산</a:t>
+            </a:r>
+            <a:r>
+              <a:rPr lang="en-US" altLang="ko-KR" sz="1600" dirty="0"/>
+              <a:t>, </a:t>
+            </a:r>
+            <a:r>
+              <a:rPr lang="ko-KR" altLang="en-US" sz="1600" dirty="0"/>
+              <a:t>금융기관의 석탄 투자 회피 등은 석탄 생산 및 소비에 지속적인 압력을 가하고 있다</a:t>
+            </a:r>
+            <a:r>
+              <a:rPr lang="en-US" altLang="ko-KR" sz="1600" dirty="0"/>
+              <a:t>.</a:t>
+            </a:r>
+          </a:p>
+          <a:p>
+            <a:pPr marL="892175" lvl="1" indent="-342900">
+              <a:lnSpc>
+                <a:spcPct val="150000"/>
+              </a:lnSpc>
+              <a:buFont typeface="Wingdings" panose="05000000000000000000" pitchFamily="2" charset="2"/>
+              <a:buChar char="ü"/>
+            </a:pPr>
+            <a:r>
+              <a:rPr lang="ko-KR" altLang="en-US" sz="1600" dirty="0"/>
+              <a:t>많은 선진국에서는 석탄이 청정에너지로 점차 대체되고 있으나</a:t>
+            </a:r>
+            <a:r>
+              <a:rPr lang="en-US" altLang="ko-KR" sz="1600" dirty="0"/>
+              <a:t>, </a:t>
+            </a:r>
+            <a:r>
+              <a:rPr lang="ko-KR" altLang="en-US" sz="1600" dirty="0"/>
+              <a:t>중국</a:t>
+            </a:r>
+            <a:r>
+              <a:rPr lang="en-US" altLang="ko-KR" sz="1600" dirty="0"/>
+              <a:t>, </a:t>
+            </a:r>
+            <a:r>
+              <a:rPr lang="ko-KR" altLang="en-US" sz="1600" dirty="0"/>
+              <a:t>인도</a:t>
+            </a:r>
+            <a:r>
+              <a:rPr lang="en-US" altLang="ko-KR" sz="1600" dirty="0"/>
+              <a:t>, </a:t>
+            </a:r>
+            <a:r>
+              <a:rPr lang="ko-KR" altLang="en-US" sz="1600" dirty="0"/>
+              <a:t>아프리카 일부 국가에서는 여전히 석탄이 에너지믹스의 중추적인 역할을 하고 있다</a:t>
+            </a:r>
+            <a:r>
+              <a:rPr lang="en-US" altLang="ko-KR" sz="1600" dirty="0"/>
+              <a:t>.</a:t>
+            </a:r>
+          </a:p>
+        </p:txBody>
+      </p:sp>
+    </p:spTree>
+    <p:extLst>
+      <p:ext uri="{BB962C8B-B14F-4D97-AF65-F5344CB8AC3E}">
+        <p14:creationId xmlns:p14="http://schemas.microsoft.com/office/powerpoint/2010/main" val="881014436"/>
+      </p:ext>
+    </p:extLst>
+  </p:cSld>
+  <p:clrMapOvr>
+    <a:masterClrMapping/>
+  </p:clrMapOvr>
+</p:sld>
+</file>
+
+<file path=ppt/slides/slide9.xml><?xml version="1.0" encoding="utf-8"?>
+<p:sld xmlns:a="http://schemas.openxmlformats.org/drawingml/2006/main" xmlns:r="http://schemas.openxmlformats.org/officeDocument/2006/relationships" xmlns:p="http://schemas.openxmlformats.org/presentationml/2006/main">
+  <p:cSld>
+    <p:spTree>
+      <p:nvGrpSpPr>
+        <p:cNvPr id="1" name="">
+          <a:extLst>
+            <a:ext uri="{FF2B5EF4-FFF2-40B4-BE49-F238E27FC236}">
               <a16:creationId xmlns:a16="http://schemas.microsoft.com/office/drawing/2014/main" id="{3624925B-FC5E-7414-224B-EA1EA7745ED7}"/>
             </a:ext>
           </a:extLst>
@@ -9441,7 +12475,7 @@
           <a:p>
             <a:fld id="{109C872D-39A9-4065-8BF3-6A613116E2A1}" type="slidenum">
               <a:rPr lang="ko-KR" altLang="en-US" smtClean="0"/>
-              <a:t>7</a:t>
+              <a:t>9</a:t>
             </a:fld>
             <a:endParaRPr lang="ko-KR" altLang="en-US"/>
           </a:p>
@@ -9492,292 +12526,6 @@
     <p:extLst>
       <p:ext uri="{BB962C8B-B14F-4D97-AF65-F5344CB8AC3E}">
         <p14:creationId xmlns:p14="http://schemas.microsoft.com/office/powerpoint/2010/main" val="3646686185"/>
-      </p:ext>
-    </p:extLst>
-  </p:cSld>
-  <p:clrMapOvr>
-    <a:masterClrMapping/>
-  </p:clrMapOvr>
-</p:sld>
-</file>
-
-<file path=ppt/slides/slide8.xml><?xml version="1.0" encoding="utf-8"?>
-<p:sld xmlns:a="http://schemas.openxmlformats.org/drawingml/2006/main" xmlns:r="http://schemas.openxmlformats.org/officeDocument/2006/relationships" xmlns:p="http://schemas.openxmlformats.org/presentationml/2006/main">
-  <p:cSld>
-    <p:spTree>
-      <p:nvGrpSpPr>
-        <p:cNvPr id="1" name="">
-          <a:extLst>
-            <a:ext uri="{FF2B5EF4-FFF2-40B4-BE49-F238E27FC236}">
-              <a16:creationId xmlns:a16="http://schemas.microsoft.com/office/drawing/2014/main" id="{85A68F1B-5E34-A367-7110-ABB9A9ECC8F6}"/>
-            </a:ext>
-          </a:extLst>
-        </p:cNvPr>
-        <p:cNvGrpSpPr/>
-        <p:nvPr/>
-      </p:nvGrpSpPr>
-      <p:grpSpPr>
-        <a:xfrm>
-          <a:off x="0" y="0"/>
-          <a:ext cx="0" cy="0"/>
-          <a:chOff x="0" y="0"/>
-          <a:chExt cx="0" cy="0"/>
-        </a:xfrm>
-      </p:grpSpPr>
-      <p:pic>
-        <p:nvPicPr>
-          <p:cNvPr id="6" name="그림 5" descr="텍스트, 로고, 원, 폰트이(가) 표시된 사진&#10;&#10;AI 생성 콘텐츠는 정확하지 않을 수 있습니다.">
-            <a:extLst>
-              <a:ext uri="{FF2B5EF4-FFF2-40B4-BE49-F238E27FC236}">
-                <a16:creationId xmlns:a16="http://schemas.microsoft.com/office/drawing/2014/main" id="{5E294C9B-2391-6A16-58AE-051EF8904E65}"/>
-              </a:ext>
-            </a:extLst>
-          </p:cNvPr>
-          <p:cNvPicPr>
-            <a:picLocks noChangeAspect="1"/>
-          </p:cNvPicPr>
-          <p:nvPr/>
-        </p:nvPicPr>
-        <p:blipFill>
-          <a:blip r:embed="rId2">
-            <a:alphaModFix amt="20000"/>
-            <a:extLst>
-              <a:ext uri="{28A0092B-C50C-407E-A947-70E740481C1C}">
-                <a14:useLocalDpi xmlns:a14="http://schemas.microsoft.com/office/drawing/2010/main" val="0"/>
-              </a:ext>
-            </a:extLst>
-          </a:blip>
-          <a:stretch>
-            <a:fillRect/>
-          </a:stretch>
-        </p:blipFill>
-        <p:spPr>
-          <a:xfrm>
-            <a:off x="4012070" y="1673061"/>
-            <a:ext cx="4167861" cy="4167861"/>
-          </a:xfrm>
-          <a:prstGeom prst="rect">
-            <a:avLst/>
-          </a:prstGeom>
-        </p:spPr>
-      </p:pic>
-      <p:sp>
-        <p:nvSpPr>
-          <p:cNvPr id="4" name="슬라이드 번호 개체 틀 3">
-            <a:extLst>
-              <a:ext uri="{FF2B5EF4-FFF2-40B4-BE49-F238E27FC236}">
-                <a16:creationId xmlns:a16="http://schemas.microsoft.com/office/drawing/2014/main" id="{4E82732C-F866-045D-71C3-7E6540659584}"/>
-              </a:ext>
-            </a:extLst>
-          </p:cNvPr>
-          <p:cNvSpPr>
-            <a:spLocks noGrp="1"/>
-          </p:cNvSpPr>
-          <p:nvPr>
-            <p:ph type="sldNum" sz="quarter" idx="12"/>
-          </p:nvPr>
-        </p:nvSpPr>
-        <p:spPr/>
-        <p:txBody>
-          <a:bodyPr/>
-          <a:lstStyle/>
-          <a:p>
-            <a:fld id="{109C872D-39A9-4065-8BF3-6A613116E2A1}" type="slidenum">
-              <a:rPr lang="ko-KR" altLang="en-US" smtClean="0"/>
-              <a:t>8</a:t>
-            </a:fld>
-            <a:endParaRPr lang="ko-KR" altLang="en-US"/>
-          </a:p>
-        </p:txBody>
-      </p:sp>
-      <p:sp>
-        <p:nvSpPr>
-          <p:cNvPr id="7" name="제목 1">
-            <a:extLst>
-              <a:ext uri="{FF2B5EF4-FFF2-40B4-BE49-F238E27FC236}">
-                <a16:creationId xmlns:a16="http://schemas.microsoft.com/office/drawing/2014/main" id="{1E2ABE6B-B9BA-E122-0E00-4787041552E9}"/>
-              </a:ext>
-            </a:extLst>
-          </p:cNvPr>
-          <p:cNvSpPr>
-            <a:spLocks noGrp="1"/>
-          </p:cNvSpPr>
-          <p:nvPr>
-            <p:ph type="title"/>
-          </p:nvPr>
-        </p:nvSpPr>
-        <p:spPr>
-          <a:xfrm>
-            <a:off x="831850" y="3765550"/>
-            <a:ext cx="11150600" cy="652818"/>
-          </a:xfrm>
-          <a:effectLst>
-            <a:reflection blurRad="50800" stA="45000" endPos="44000" dir="5400000" sy="-100000" algn="bl" rotWithShape="0"/>
-          </a:effectLst>
-        </p:spPr>
-        <p:txBody>
-          <a:bodyPr anchor="b"/>
-          <a:lstStyle/>
-          <a:p>
-            <a:r>
-              <a:rPr lang="en-US" altLang="ko-KR" sz="4000" b="1" i="0" spc="150" dirty="0"/>
-              <a:t>Section 4. </a:t>
-            </a:r>
-            <a:r>
-              <a:rPr lang="ko-KR" altLang="en-US" sz="4000" b="1" i="0" spc="150" dirty="0"/>
-              <a:t>석탄의 가치사슬</a:t>
-            </a:r>
-            <a:endParaRPr lang="ko-KR" altLang="en-US" sz="3600" i="0" spc="150" dirty="0"/>
-          </a:p>
-        </p:txBody>
-      </p:sp>
-    </p:spTree>
-    <p:extLst>
-      <p:ext uri="{BB962C8B-B14F-4D97-AF65-F5344CB8AC3E}">
-        <p14:creationId xmlns:p14="http://schemas.microsoft.com/office/powerpoint/2010/main" val="420485513"/>
-      </p:ext>
-    </p:extLst>
-  </p:cSld>
-  <p:clrMapOvr>
-    <a:masterClrMapping/>
-  </p:clrMapOvr>
-</p:sld>
-</file>
-
-<file path=ppt/slides/slide9.xml><?xml version="1.0" encoding="utf-8"?>
-<p:sld xmlns:a="http://schemas.openxmlformats.org/drawingml/2006/main" xmlns:r="http://schemas.openxmlformats.org/officeDocument/2006/relationships" xmlns:p="http://schemas.openxmlformats.org/presentationml/2006/main">
-  <p:cSld>
-    <p:spTree>
-      <p:nvGrpSpPr>
-        <p:cNvPr id="1" name="">
-          <a:extLst>
-            <a:ext uri="{FF2B5EF4-FFF2-40B4-BE49-F238E27FC236}">
-              <a16:creationId xmlns:a16="http://schemas.microsoft.com/office/drawing/2014/main" id="{84536F5A-83E8-8B18-800C-F4D061E329EC}"/>
-            </a:ext>
-          </a:extLst>
-        </p:cNvPr>
-        <p:cNvGrpSpPr/>
-        <p:nvPr/>
-      </p:nvGrpSpPr>
-      <p:grpSpPr>
-        <a:xfrm>
-          <a:off x="0" y="0"/>
-          <a:ext cx="0" cy="0"/>
-          <a:chOff x="0" y="0"/>
-          <a:chExt cx="0" cy="0"/>
-        </a:xfrm>
-      </p:grpSpPr>
-      <p:pic>
-        <p:nvPicPr>
-          <p:cNvPr id="6" name="그림 5" descr="텍스트, 로고, 원, 폰트이(가) 표시된 사진&#10;&#10;AI 생성 콘텐츠는 정확하지 않을 수 있습니다.">
-            <a:extLst>
-              <a:ext uri="{FF2B5EF4-FFF2-40B4-BE49-F238E27FC236}">
-                <a16:creationId xmlns:a16="http://schemas.microsoft.com/office/drawing/2014/main" id="{29E1E638-DB99-5028-2B0D-15C4F8986AF3}"/>
-              </a:ext>
-            </a:extLst>
-          </p:cNvPr>
-          <p:cNvPicPr>
-            <a:picLocks noChangeAspect="1"/>
-          </p:cNvPicPr>
-          <p:nvPr/>
-        </p:nvPicPr>
-        <p:blipFill>
-          <a:blip r:embed="rId2">
-            <a:alphaModFix amt="20000"/>
-            <a:extLst>
-              <a:ext uri="{28A0092B-C50C-407E-A947-70E740481C1C}">
-                <a14:useLocalDpi xmlns:a14="http://schemas.microsoft.com/office/drawing/2010/main" val="0"/>
-              </a:ext>
-            </a:extLst>
-          </a:blip>
-          <a:stretch>
-            <a:fillRect/>
-          </a:stretch>
-        </p:blipFill>
-        <p:spPr>
-          <a:xfrm>
-            <a:off x="4012070" y="1673061"/>
-            <a:ext cx="4167861" cy="4167861"/>
-          </a:xfrm>
-          <a:prstGeom prst="rect">
-            <a:avLst/>
-          </a:prstGeom>
-        </p:spPr>
-      </p:pic>
-      <p:sp>
-        <p:nvSpPr>
-          <p:cNvPr id="4" name="슬라이드 번호 개체 틀 3">
-            <a:extLst>
-              <a:ext uri="{FF2B5EF4-FFF2-40B4-BE49-F238E27FC236}">
-                <a16:creationId xmlns:a16="http://schemas.microsoft.com/office/drawing/2014/main" id="{F43DE9FF-AC43-300C-CC7B-2A47533DC698}"/>
-              </a:ext>
-            </a:extLst>
-          </p:cNvPr>
-          <p:cNvSpPr>
-            <a:spLocks noGrp="1"/>
-          </p:cNvSpPr>
-          <p:nvPr>
-            <p:ph type="sldNum" sz="quarter" idx="12"/>
-          </p:nvPr>
-        </p:nvSpPr>
-        <p:spPr/>
-        <p:txBody>
-          <a:bodyPr/>
-          <a:lstStyle/>
-          <a:p>
-            <a:fld id="{109C872D-39A9-4065-8BF3-6A613116E2A1}" type="slidenum">
-              <a:rPr lang="ko-KR" altLang="en-US" smtClean="0"/>
-              <a:t>9</a:t>
-            </a:fld>
-            <a:endParaRPr lang="ko-KR" altLang="en-US"/>
-          </a:p>
-        </p:txBody>
-      </p:sp>
-      <p:sp>
-        <p:nvSpPr>
-          <p:cNvPr id="7" name="제목 1">
-            <a:extLst>
-              <a:ext uri="{FF2B5EF4-FFF2-40B4-BE49-F238E27FC236}">
-                <a16:creationId xmlns:a16="http://schemas.microsoft.com/office/drawing/2014/main" id="{0A6F38EE-3A32-8A8E-3C54-16E9A1AF41DA}"/>
-              </a:ext>
-            </a:extLst>
-          </p:cNvPr>
-          <p:cNvSpPr>
-            <a:spLocks noGrp="1"/>
-          </p:cNvSpPr>
-          <p:nvPr>
-            <p:ph type="title"/>
-          </p:nvPr>
-        </p:nvSpPr>
-        <p:spPr>
-          <a:xfrm>
-            <a:off x="831850" y="3765550"/>
-            <a:ext cx="11150600" cy="652818"/>
-          </a:xfrm>
-          <a:effectLst>
-            <a:reflection blurRad="50800" stA="45000" endPos="44000" dir="5400000" sy="-100000" algn="bl" rotWithShape="0"/>
-          </a:effectLst>
-        </p:spPr>
-        <p:txBody>
-          <a:bodyPr anchor="b"/>
-          <a:lstStyle/>
-          <a:p>
-            <a:r>
-              <a:rPr lang="en-US" altLang="ko-KR" sz="4000" b="1" i="0" spc="150" dirty="0"/>
-              <a:t>Section 5. </a:t>
-            </a:r>
-            <a:r>
-              <a:rPr lang="ko-KR" altLang="en-US" sz="4000" b="1" i="0" spc="150" dirty="0"/>
-              <a:t>석탄생산기술과 비용구조</a:t>
-            </a:r>
-            <a:endParaRPr lang="ko-KR" altLang="en-US" sz="3600" i="0" spc="150" dirty="0"/>
-          </a:p>
-        </p:txBody>
-      </p:sp>
-    </p:spTree>
-    <p:extLst>
-      <p:ext uri="{BB962C8B-B14F-4D97-AF65-F5344CB8AC3E}">
-        <p14:creationId xmlns:p14="http://schemas.microsoft.com/office/powerpoint/2010/main" val="3112273833"/>
       </p:ext>
     </p:extLst>
   </p:cSld>

--- a/에너지경제학/자원에너지경제학_Chapter_4 (석탄).pptx
+++ b/에너지경제학/자원에너지경제학_Chapter_4 (석탄).pptx
@@ -5,7 +5,7 @@
     <p:sldMasterId id="2147483648" r:id="rId1"/>
   </p:sldMasterIdLst>
   <p:notesMasterIdLst>
-    <p:notesMasterId r:id="rId24"/>
+    <p:notesMasterId r:id="rId36"/>
   </p:notesMasterIdLst>
   <p:sldIdLst>
     <p:sldId id="375" r:id="rId2"/>
@@ -20,16 +20,28 @@
     <p:sldId id="612" r:id="rId11"/>
     <p:sldId id="613" r:id="rId12"/>
     <p:sldId id="614" r:id="rId13"/>
-    <p:sldId id="615" r:id="rId14"/>
-    <p:sldId id="602" r:id="rId15"/>
-    <p:sldId id="603" r:id="rId16"/>
-    <p:sldId id="604" r:id="rId17"/>
-    <p:sldId id="606" r:id="rId18"/>
-    <p:sldId id="605" r:id="rId19"/>
-    <p:sldId id="607" r:id="rId20"/>
-    <p:sldId id="608" r:id="rId21"/>
-    <p:sldId id="600" r:id="rId22"/>
-    <p:sldId id="598" r:id="rId23"/>
+    <p:sldId id="618" r:id="rId14"/>
+    <p:sldId id="615" r:id="rId15"/>
+    <p:sldId id="617" r:id="rId16"/>
+    <p:sldId id="602" r:id="rId17"/>
+    <p:sldId id="619" r:id="rId18"/>
+    <p:sldId id="620" r:id="rId19"/>
+    <p:sldId id="621" r:id="rId20"/>
+    <p:sldId id="622" r:id="rId21"/>
+    <p:sldId id="623" r:id="rId22"/>
+    <p:sldId id="624" r:id="rId23"/>
+    <p:sldId id="603" r:id="rId24"/>
+    <p:sldId id="625" r:id="rId25"/>
+    <p:sldId id="626" r:id="rId26"/>
+    <p:sldId id="627" r:id="rId27"/>
+    <p:sldId id="604" r:id="rId28"/>
+    <p:sldId id="628" r:id="rId29"/>
+    <p:sldId id="606" r:id="rId30"/>
+    <p:sldId id="605" r:id="rId31"/>
+    <p:sldId id="607" r:id="rId32"/>
+    <p:sldId id="608" r:id="rId33"/>
+    <p:sldId id="600" r:id="rId34"/>
+    <p:sldId id="598" r:id="rId35"/>
   </p:sldIdLst>
   <p:sldSz cx="12192000" cy="6858000"/>
   <p:notesSz cx="6858000" cy="9144000"/>
@@ -7337,7 +7349,7 @@
         <p:spPr>
           <a:xfrm>
             <a:off x="288790" y="958844"/>
-            <a:ext cx="11118453" cy="5584670"/>
+            <a:ext cx="11118453" cy="3368679"/>
           </a:xfrm>
           <a:prstGeom prst="rect">
             <a:avLst/>
@@ -7492,24 +7504,6 @@
             <a:endParaRPr lang="en-US" altLang="ko-KR" sz="1600" dirty="0"/>
           </a:p>
           <a:p>
-            <a:pPr marL="92075">
-              <a:lnSpc>
-                <a:spcPct val="150000"/>
-              </a:lnSpc>
-            </a:pPr>
-            <a:r>
-              <a:rPr lang="ko-KR" altLang="en-US" sz="1600" u="sng" dirty="0">
-                <a:ln w="3175">
-                  <a:noFill/>
-                </a:ln>
-                <a:latin typeface="HY헤드라인M" panose="02030600000101010101" pitchFamily="18" charset="-127"/>
-                <a:ea typeface="HY헤드라인M" panose="02030600000101010101" pitchFamily="18" charset="-127"/>
-              </a:rPr>
-              <a:t>갈탄</a:t>
-            </a:r>
-            <a:endParaRPr lang="en-US" altLang="ko-KR" sz="1600" dirty="0"/>
-          </a:p>
-          <a:p>
             <a:pPr marL="377825" indent="-285750">
               <a:lnSpc>
                 <a:spcPct val="150000"/>
@@ -7519,23 +7513,23 @@
             </a:pPr>
             <a:r>
               <a:rPr lang="ko-KR" altLang="en-US" sz="1600" dirty="0"/>
-              <a:t>갈탄은 탄화과정이 충분히 진행되지 않은</a:t>
-            </a:r>
-            <a:r>
-              <a:rPr lang="en-US" altLang="ko-KR" sz="1600" dirty="0"/>
-              <a:t>, </a:t>
-            </a:r>
-            <a:r>
-              <a:rPr lang="ko-KR" altLang="en-US" sz="1600" dirty="0"/>
-              <a:t>석탄화 정도가 가장 낮은 </a:t>
-            </a:r>
-            <a:r>
-              <a:rPr lang="ko-KR" altLang="en-US" sz="1600" dirty="0" err="1"/>
-              <a:t>저등급</a:t>
-            </a:r>
-            <a:r>
-              <a:rPr lang="ko-KR" altLang="en-US" sz="1600" dirty="0"/>
-              <a:t> 석탄이다</a:t>
+              <a:t>석탄은 경제적 측면에서 가장 저렴한 화석연료로 간주되고</a:t>
+            </a:r>
+            <a:r>
+              <a:rPr lang="en-US" altLang="ko-KR" sz="1600" dirty="0"/>
+              <a:t>, </a:t>
+            </a:r>
+            <a:r>
+              <a:rPr lang="ko-KR" altLang="en-US" sz="1600" dirty="0"/>
+              <a:t>석유나 천연가스에 비해 채굴</a:t>
+            </a:r>
+            <a:r>
+              <a:rPr lang="en-US" altLang="ko-KR" sz="1600" dirty="0"/>
+              <a:t>·</a:t>
+            </a:r>
+            <a:r>
+              <a:rPr lang="ko-KR" altLang="en-US" sz="1600" dirty="0"/>
+              <a:t>취급 비용이 낮다</a:t>
             </a:r>
             <a:r>
               <a:rPr lang="en-US" altLang="ko-KR" sz="1600" dirty="0"/>
@@ -7552,39 +7546,15 @@
             </a:pPr>
             <a:r>
               <a:rPr lang="ko-KR" altLang="en-US" sz="1600" dirty="0"/>
-              <a:t>탄소 함량이 </a:t>
-            </a:r>
-            <a:r>
-              <a:rPr lang="en-US" altLang="ko-KR" sz="1600" dirty="0"/>
-              <a:t>30%</a:t>
-            </a:r>
-            <a:r>
-              <a:rPr lang="ko-KR" altLang="en-US" sz="1600" dirty="0"/>
-              <a:t>에 불과하고</a:t>
-            </a:r>
-            <a:r>
-              <a:rPr lang="en-US" altLang="ko-KR" sz="1600" dirty="0"/>
-              <a:t>, </a:t>
-            </a:r>
-            <a:r>
-              <a:rPr lang="ko-KR" altLang="en-US" sz="1600" dirty="0"/>
-              <a:t>수분 함량이 높고</a:t>
-            </a:r>
-            <a:r>
-              <a:rPr lang="en-US" altLang="ko-KR" sz="1600" dirty="0"/>
-              <a:t>, </a:t>
-            </a:r>
-            <a:r>
-              <a:rPr lang="ko-KR" altLang="en-US" sz="1600" dirty="0"/>
-              <a:t>이로 인해 연소 효율이 낮고</a:t>
-            </a:r>
-            <a:r>
-              <a:rPr lang="en-US" altLang="ko-KR" sz="1600" dirty="0"/>
-              <a:t>, </a:t>
-            </a:r>
-            <a:r>
-              <a:rPr lang="ko-KR" altLang="en-US" sz="1600" dirty="0"/>
-              <a:t>저장 운송과정에도 제약이 있다</a:t>
+              <a:t>그러나 재생에너지의 비용이 지속적으로 하락하고</a:t>
+            </a:r>
+            <a:r>
+              <a:rPr lang="en-US" altLang="ko-KR" sz="1600" dirty="0"/>
+              <a:t>, </a:t>
+            </a:r>
+            <a:r>
+              <a:rPr lang="ko-KR" altLang="en-US" sz="1600" dirty="0"/>
+              <a:t>환경규제와 탄소가격제도가 강화되면서 석탄의 경제성은 점점 악화되고 있다</a:t>
             </a:r>
             <a:r>
               <a:rPr lang="en-US" altLang="ko-KR" sz="1600" dirty="0"/>
@@ -7599,107 +7569,7 @@
               <a:buFont typeface="Wingdings" panose="05000000000000000000" pitchFamily="2" charset="2"/>
               <a:buChar char="ü"/>
             </a:pPr>
-            <a:r>
-              <a:rPr lang="ko-KR" altLang="en-US" sz="1600" dirty="0"/>
-              <a:t>외관상 흑갈색을 띠며</a:t>
-            </a:r>
-            <a:r>
-              <a:rPr lang="en-US" altLang="ko-KR" sz="1600" dirty="0"/>
-              <a:t>, </a:t>
-            </a:r>
-            <a:r>
-              <a:rPr lang="ko-KR" altLang="en-US" sz="1600" dirty="0"/>
-              <a:t>구조는 부드럽고 쉽게 부서지는 성질을 갖고 있어</a:t>
-            </a:r>
-            <a:r>
-              <a:rPr lang="en-US" altLang="ko-KR" sz="1600" dirty="0"/>
-              <a:t>, </a:t>
-            </a:r>
-            <a:r>
-              <a:rPr lang="ko-KR" altLang="en-US" sz="1600" dirty="0"/>
-              <a:t>분쇄는 용이하나</a:t>
-            </a:r>
-            <a:r>
-              <a:rPr lang="en-US" altLang="ko-KR" sz="1600" dirty="0"/>
-              <a:t>, </a:t>
-            </a:r>
-            <a:r>
-              <a:rPr lang="ko-KR" altLang="en-US" sz="1600" dirty="0"/>
-              <a:t>취급 과정에서 손실이 발생하기 쉽다</a:t>
-            </a:r>
-            <a:r>
-              <a:rPr lang="en-US" altLang="ko-KR" sz="1600" dirty="0"/>
-              <a:t>.</a:t>
-            </a:r>
-          </a:p>
-          <a:p>
-            <a:pPr marL="377825" indent="-285750">
-              <a:lnSpc>
-                <a:spcPct val="150000"/>
-              </a:lnSpc>
-              <a:buFont typeface="Arial" panose="020B0604020202020204" pitchFamily="34" charset="0"/>
-              <a:buChar char="•"/>
-            </a:pPr>
             <a:endParaRPr lang="en-US" altLang="ko-KR" sz="1600" dirty="0"/>
-          </a:p>
-          <a:p>
-            <a:pPr marL="377825" indent="-285750">
-              <a:lnSpc>
-                <a:spcPct val="150000"/>
-              </a:lnSpc>
-              <a:buFont typeface="Arial" panose="020B0604020202020204" pitchFamily="34" charset="0"/>
-              <a:buChar char="•"/>
-            </a:pPr>
-            <a:r>
-              <a:rPr lang="ko-KR" altLang="en-US" sz="1600" dirty="0"/>
-              <a:t>갈탄의 발열량은 다른 탄에 비해 낮은 수준이다</a:t>
-            </a:r>
-            <a:r>
-              <a:rPr lang="en-US" altLang="ko-KR" sz="1600" dirty="0"/>
-              <a:t>. (10~20 MJ/kg)</a:t>
-            </a:r>
-          </a:p>
-          <a:p>
-            <a:pPr marL="835025" lvl="1" indent="-285750">
-              <a:lnSpc>
-                <a:spcPct val="150000"/>
-              </a:lnSpc>
-              <a:buFont typeface="Wingdings" panose="05000000000000000000" pitchFamily="2" charset="2"/>
-              <a:buChar char="ü"/>
-            </a:pPr>
-            <a:r>
-              <a:rPr lang="ko-KR" altLang="en-US" sz="1600" dirty="0"/>
-              <a:t>이로 인해 갈탄은 대규모 산업용보다 발전소에서 전력 생산용 연료로 사용된다</a:t>
-            </a:r>
-            <a:r>
-              <a:rPr lang="en-US" altLang="ko-KR" sz="1600" dirty="0"/>
-              <a:t>.</a:t>
-            </a:r>
-          </a:p>
-          <a:p>
-            <a:pPr marL="835025" lvl="1" indent="-285750">
-              <a:lnSpc>
-                <a:spcPct val="150000"/>
-              </a:lnSpc>
-              <a:buFont typeface="Wingdings" panose="05000000000000000000" pitchFamily="2" charset="2"/>
-              <a:buChar char="ü"/>
-            </a:pPr>
-            <a:r>
-              <a:rPr lang="ko-KR" altLang="en-US" sz="1600" dirty="0"/>
-              <a:t>장거리 </a:t>
-            </a:r>
-            <a:r>
-              <a:rPr lang="ko-KR" altLang="en-US" sz="1600" dirty="0" err="1"/>
-              <a:t>수송시</a:t>
-            </a:r>
-            <a:r>
-              <a:rPr lang="ko-KR" altLang="en-US" sz="1600" dirty="0"/>
-              <a:t> 수분이 증발하여 에너지손실과 물류비용이 커지기 때문에 광산 인근에 위치한 광산밀착형 발전소에서 직접 소비되는 경우가 일반적이다</a:t>
-            </a:r>
-            <a:r>
-              <a:rPr lang="en-US" altLang="ko-KR" sz="1600" dirty="0"/>
-              <a:t>.</a:t>
-            </a:r>
           </a:p>
         </p:txBody>
       </p:sp>
@@ -7824,149 +7694,22 @@
           </a:bodyPr>
           <a:lstStyle/>
           <a:p>
-            <a:pPr marL="377825" indent="-285750">
-              <a:lnSpc>
-                <a:spcPct val="150000"/>
-              </a:lnSpc>
-              <a:buFont typeface="Arial" panose="020B0604020202020204" pitchFamily="34" charset="0"/>
-              <a:buChar char="•"/>
-            </a:pPr>
-            <a:r>
-              <a:rPr lang="ko-KR" altLang="en-US" sz="1600" dirty="0"/>
-              <a:t>갈탄은 에너지 밀도가 낮고</a:t>
-            </a:r>
-            <a:r>
-              <a:rPr lang="en-US" altLang="ko-KR" sz="1600" dirty="0"/>
-              <a:t>, </a:t>
-            </a:r>
-            <a:r>
-              <a:rPr lang="ko-KR" altLang="en-US" sz="1600" dirty="0" err="1"/>
-              <a:t>연소시</a:t>
-            </a:r>
-            <a:r>
-              <a:rPr lang="ko-KR" altLang="en-US" sz="1600" dirty="0"/>
-              <a:t> 오염물질 </a:t>
-            </a:r>
-            <a:r>
-              <a:rPr lang="en-US" altLang="ko-KR" sz="1600" dirty="0"/>
-              <a:t>(</a:t>
-            </a:r>
-            <a:r>
-              <a:rPr lang="ko-KR" altLang="en-US" sz="1600" dirty="0"/>
-              <a:t>이산화탄소</a:t>
-            </a:r>
-            <a:r>
-              <a:rPr lang="en-US" altLang="ko-KR" sz="1600" dirty="0"/>
-              <a:t>, </a:t>
-            </a:r>
-            <a:r>
-              <a:rPr lang="ko-KR" altLang="en-US" sz="1600" dirty="0"/>
-              <a:t>질소산화물</a:t>
-            </a:r>
-            <a:r>
-              <a:rPr lang="en-US" altLang="ko-KR" sz="1600" dirty="0"/>
-              <a:t>, </a:t>
-            </a:r>
-            <a:r>
-              <a:rPr lang="ko-KR" altLang="en-US" sz="1600" dirty="0"/>
-              <a:t>황산화물 등</a:t>
-            </a:r>
-            <a:r>
-              <a:rPr lang="en-US" altLang="ko-KR" sz="1600" dirty="0"/>
-              <a:t>)</a:t>
-            </a:r>
-            <a:r>
-              <a:rPr lang="ko-KR" altLang="en-US" sz="1600" dirty="0"/>
-              <a:t>을 다량 배출하기 때문에</a:t>
-            </a:r>
-            <a:r>
-              <a:rPr lang="en-US" altLang="ko-KR" sz="1600" dirty="0"/>
-              <a:t>, </a:t>
-            </a:r>
-            <a:r>
-              <a:rPr lang="ko-KR" altLang="en-US" sz="1600" dirty="0"/>
-              <a:t>환경적 측면에서는 가장 부정적인 평가를 받는다</a:t>
-            </a:r>
-            <a:r>
-              <a:rPr lang="en-US" altLang="ko-KR" sz="1600" dirty="0"/>
-              <a:t>.</a:t>
-            </a:r>
-          </a:p>
-          <a:p>
-            <a:pPr marL="835025" lvl="1" indent="-285750">
-              <a:lnSpc>
-                <a:spcPct val="150000"/>
-              </a:lnSpc>
-              <a:buFont typeface="Wingdings" panose="05000000000000000000" pitchFamily="2" charset="2"/>
-              <a:buChar char="ü"/>
-            </a:pPr>
-            <a:r>
-              <a:rPr lang="ko-KR" altLang="en-US" sz="1600" dirty="0"/>
-              <a:t>이러한 환경문제로 많은 국가에서 갈탄 기반 발전소 신규건설을 제한하고</a:t>
-            </a:r>
-            <a:r>
-              <a:rPr lang="en-US" altLang="ko-KR" sz="1600" dirty="0"/>
-              <a:t>, </a:t>
-            </a:r>
-            <a:r>
-              <a:rPr lang="ko-KR" altLang="en-US" sz="1600" dirty="0"/>
-              <a:t>조기퇴출을 검토하고 있다</a:t>
-            </a:r>
-            <a:r>
-              <a:rPr lang="en-US" altLang="ko-KR" sz="1600" dirty="0"/>
-              <a:t>.</a:t>
-            </a:r>
-          </a:p>
-          <a:p>
-            <a:pPr marL="835025" lvl="1" indent="-285750">
-              <a:lnSpc>
-                <a:spcPct val="150000"/>
-              </a:lnSpc>
-              <a:buFont typeface="Wingdings" panose="05000000000000000000" pitchFamily="2" charset="2"/>
-              <a:buChar char="ü"/>
-            </a:pPr>
-            <a:r>
-              <a:rPr lang="ko-KR" altLang="en-US" sz="1600" dirty="0"/>
-              <a:t>갈탄 자원이 풍부한 국가에서는 여전히 경제성과 접근성 측면에서 중요한 역할을 담당하고 있다</a:t>
-            </a:r>
-            <a:r>
-              <a:rPr lang="en-US" altLang="ko-KR" sz="1600" dirty="0"/>
-              <a:t>.</a:t>
-            </a:r>
-          </a:p>
-          <a:p>
-            <a:pPr marL="835025" lvl="1" indent="-285750">
-              <a:lnSpc>
-                <a:spcPct val="150000"/>
-              </a:lnSpc>
-              <a:buFont typeface="Wingdings" panose="05000000000000000000" pitchFamily="2" charset="2"/>
-              <a:buChar char="ü"/>
-            </a:pPr>
-            <a:endParaRPr lang="en-US" altLang="ko-KR" sz="1600" dirty="0"/>
-          </a:p>
-          <a:p>
             <a:pPr marL="92075">
               <a:lnSpc>
                 <a:spcPct val="150000"/>
               </a:lnSpc>
             </a:pPr>
             <a:r>
-              <a:rPr lang="ko-KR" altLang="en-US" sz="1600" u="sng" dirty="0" err="1">
+              <a:rPr lang="ko-KR" altLang="en-US" sz="1600" u="sng" dirty="0">
                 <a:ln w="3175">
                   <a:noFill/>
                 </a:ln>
                 <a:latin typeface="HY헤드라인M" panose="02030600000101010101" pitchFamily="18" charset="-127"/>
                 <a:ea typeface="HY헤드라인M" panose="02030600000101010101" pitchFamily="18" charset="-127"/>
               </a:rPr>
-              <a:t>아역청탄</a:t>
-            </a:r>
-            <a:endParaRPr lang="en-US" altLang="ko-KR" sz="1600" u="sng" dirty="0">
-              <a:ln w="3175">
-                <a:noFill/>
-              </a:ln>
-              <a:latin typeface="HY헤드라인M" panose="02030600000101010101" pitchFamily="18" charset="-127"/>
-              <a:ea typeface="HY헤드라인M" panose="02030600000101010101" pitchFamily="18" charset="-127"/>
-            </a:endParaRPr>
+              <a:t>갈탄</a:t>
+            </a:r>
+            <a:endParaRPr lang="en-US" altLang="ko-KR" sz="1600" dirty="0"/>
           </a:p>
           <a:p>
             <a:pPr marL="377825" indent="-285750">
@@ -7977,12 +7720,16 @@
               <a:buChar char="•"/>
             </a:pPr>
             <a:r>
-              <a:rPr lang="ko-KR" altLang="en-US" sz="1600" dirty="0" err="1"/>
-              <a:t>아역청탄은</a:t>
-            </a:r>
-            <a:r>
-              <a:rPr lang="ko-KR" altLang="en-US" sz="1600" dirty="0"/>
-              <a:t> 석탄화 정도가 갈탄보다 더 진행된 중간단계의 </a:t>
+              <a:rPr lang="ko-KR" altLang="en-US" sz="1600" dirty="0"/>
+              <a:t>갈탄은 탄화과정이 충분히 진행되지 않은</a:t>
+            </a:r>
+            <a:r>
+              <a:rPr lang="en-US" altLang="ko-KR" sz="1600" dirty="0"/>
+              <a:t>, </a:t>
+            </a:r>
+            <a:r>
+              <a:rPr lang="ko-KR" altLang="en-US" sz="1600" dirty="0"/>
+              <a:t>석탄화 정도가 가장 낮은 </a:t>
             </a:r>
             <a:r>
               <a:rPr lang="ko-KR" altLang="en-US" sz="1600" dirty="0" err="1"/>
@@ -8007,23 +7754,39 @@
             </a:pPr>
             <a:r>
               <a:rPr lang="ko-KR" altLang="en-US" sz="1600" dirty="0"/>
-              <a:t>탄소함량은 </a:t>
-            </a:r>
-            <a:r>
-              <a:rPr lang="en-US" altLang="ko-KR" sz="1600" dirty="0"/>
-              <a:t>40% </a:t>
-            </a:r>
-            <a:r>
-              <a:rPr lang="ko-KR" altLang="en-US" sz="1600" dirty="0"/>
-              <a:t>수준이고</a:t>
-            </a:r>
-            <a:r>
-              <a:rPr lang="en-US" altLang="ko-KR" sz="1600" dirty="0"/>
-              <a:t>, </a:t>
-            </a:r>
-            <a:r>
-              <a:rPr lang="ko-KR" altLang="en-US" sz="1600" dirty="0"/>
-              <a:t>상대적으로 낮은 휘발분과 수분함량을 갖고 있다</a:t>
+              <a:t>탄소 함량이 </a:t>
+            </a:r>
+            <a:r>
+              <a:rPr lang="en-US" altLang="ko-KR" sz="1600" dirty="0"/>
+              <a:t>30%</a:t>
+            </a:r>
+            <a:r>
+              <a:rPr lang="ko-KR" altLang="en-US" sz="1600" dirty="0"/>
+              <a:t>에 불과하고</a:t>
+            </a:r>
+            <a:r>
+              <a:rPr lang="en-US" altLang="ko-KR" sz="1600" dirty="0"/>
+              <a:t>, </a:t>
+            </a:r>
+            <a:r>
+              <a:rPr lang="ko-KR" altLang="en-US" sz="1600" dirty="0"/>
+              <a:t>수분 함량이 높고</a:t>
+            </a:r>
+            <a:r>
+              <a:rPr lang="en-US" altLang="ko-KR" sz="1600" dirty="0"/>
+              <a:t>, </a:t>
+            </a:r>
+            <a:r>
+              <a:rPr lang="ko-KR" altLang="en-US" sz="1600" dirty="0"/>
+              <a:t>이로 인해 연소 효율이 낮고</a:t>
+            </a:r>
+            <a:r>
+              <a:rPr lang="en-US" altLang="ko-KR" sz="1600" dirty="0"/>
+              <a:t>, </a:t>
+            </a:r>
+            <a:r>
+              <a:rPr lang="ko-KR" altLang="en-US" sz="1600" dirty="0"/>
+              <a:t>저장 운송과정에도 제약이 있다</a:t>
             </a:r>
             <a:r>
               <a:rPr lang="en-US" altLang="ko-KR" sz="1600" dirty="0"/>
@@ -8040,27 +7803,62 @@
             </a:pPr>
             <a:r>
               <a:rPr lang="ko-KR" altLang="en-US" sz="1600" dirty="0"/>
-              <a:t>외관상 칙칙한 검은색 또는 어두운 회갈색이며</a:t>
-            </a:r>
-            <a:r>
-              <a:rPr lang="en-US" altLang="ko-KR" sz="1600" dirty="0"/>
-              <a:t>, </a:t>
-            </a:r>
-            <a:r>
-              <a:rPr lang="ko-KR" altLang="en-US" sz="1600" dirty="0"/>
-              <a:t>조직은 갈탄보다 치밀하고 견고하나</a:t>
-            </a:r>
-            <a:r>
-              <a:rPr lang="en-US" altLang="ko-KR" sz="1600" dirty="0"/>
-              <a:t>, </a:t>
-            </a:r>
-            <a:r>
-              <a:rPr lang="ko-KR" altLang="en-US" sz="1600" dirty="0"/>
-              <a:t>무연탄이나 역청탄에 비해 부드럽다</a:t>
+              <a:t>외관상 흑갈색을 띠며</a:t>
+            </a:r>
+            <a:r>
+              <a:rPr lang="en-US" altLang="ko-KR" sz="1600" dirty="0"/>
+              <a:t>, </a:t>
+            </a:r>
+            <a:r>
+              <a:rPr lang="ko-KR" altLang="en-US" sz="1600" dirty="0"/>
+              <a:t>구조는 부드럽고 쉽게 부서지는 성질을 갖고 있어</a:t>
+            </a:r>
+            <a:r>
+              <a:rPr lang="en-US" altLang="ko-KR" sz="1600" dirty="0"/>
+              <a:t>, </a:t>
+            </a:r>
+            <a:r>
+              <a:rPr lang="ko-KR" altLang="en-US" sz="1600" dirty="0"/>
+              <a:t>분쇄는 용이하나</a:t>
+            </a:r>
+            <a:r>
+              <a:rPr lang="en-US" altLang="ko-KR" sz="1600" dirty="0"/>
+              <a:t>, </a:t>
+            </a:r>
+            <a:r>
+              <a:rPr lang="ko-KR" altLang="en-US" sz="1600" dirty="0"/>
+              <a:t>취급 과정에서 손실이 발생하기 쉽다</a:t>
             </a:r>
             <a:r>
               <a:rPr lang="en-US" altLang="ko-KR" sz="1600" dirty="0"/>
               <a:t>.</a:t>
+            </a:r>
+          </a:p>
+          <a:p>
+            <a:pPr marL="377825" indent="-285750">
+              <a:lnSpc>
+                <a:spcPct val="150000"/>
+              </a:lnSpc>
+              <a:buFont typeface="Arial" panose="020B0604020202020204" pitchFamily="34" charset="0"/>
+              <a:buChar char="•"/>
+            </a:pPr>
+            <a:endParaRPr lang="en-US" altLang="ko-KR" sz="1600" dirty="0"/>
+          </a:p>
+          <a:p>
+            <a:pPr marL="377825" indent="-285750">
+              <a:lnSpc>
+                <a:spcPct val="150000"/>
+              </a:lnSpc>
+              <a:buFont typeface="Arial" panose="020B0604020202020204" pitchFamily="34" charset="0"/>
+              <a:buChar char="•"/>
+            </a:pPr>
+            <a:r>
+              <a:rPr lang="ko-KR" altLang="en-US" sz="1600" dirty="0"/>
+              <a:t>갈탄의 발열량은 다른 탄에 비해 낮은 수준이다</a:t>
+            </a:r>
+            <a:r>
+              <a:rPr lang="en-US" altLang="ko-KR" sz="1600" dirty="0"/>
+              <a:t>. (10~20 MJ/kg)</a:t>
             </a:r>
           </a:p>
           <a:p>
@@ -8071,7 +7869,39 @@
               <a:buFont typeface="Wingdings" panose="05000000000000000000" pitchFamily="2" charset="2"/>
               <a:buChar char="ü"/>
             </a:pPr>
-            <a:endParaRPr lang="en-US" altLang="ko-KR" sz="1600" dirty="0"/>
+            <a:r>
+              <a:rPr lang="ko-KR" altLang="en-US" sz="1600" dirty="0"/>
+              <a:t>이로 인해 갈탄은 대규모 산업용보다 발전소에서 전력 생산용 연료로 사용된다</a:t>
+            </a:r>
+            <a:r>
+              <a:rPr lang="en-US" altLang="ko-KR" sz="1600" dirty="0"/>
+              <a:t>.</a:t>
+            </a:r>
+          </a:p>
+          <a:p>
+            <a:pPr marL="835025" lvl="1" indent="-285750">
+              <a:lnSpc>
+                <a:spcPct val="150000"/>
+              </a:lnSpc>
+              <a:buFont typeface="Wingdings" panose="05000000000000000000" pitchFamily="2" charset="2"/>
+              <a:buChar char="ü"/>
+            </a:pPr>
+            <a:r>
+              <a:rPr lang="ko-KR" altLang="en-US" sz="1600" dirty="0"/>
+              <a:t>장거리 </a:t>
+            </a:r>
+            <a:r>
+              <a:rPr lang="ko-KR" altLang="en-US" sz="1600" dirty="0" err="1"/>
+              <a:t>수송시</a:t>
+            </a:r>
+            <a:r>
+              <a:rPr lang="ko-KR" altLang="en-US" sz="1600" dirty="0"/>
+              <a:t> 수분이 증발하여 에너지손실과 물류비용이 커지기 때문에 광산 인근에 위치한 광산밀착형 발전소에서 직접 소비되는 경우가 일반적이다</a:t>
+            </a:r>
+            <a:r>
+              <a:rPr lang="en-US" altLang="ko-KR" sz="1600" dirty="0"/>
+              <a:t>.</a:t>
+            </a:r>
           </a:p>
           <a:p>
             <a:pPr marL="377825" indent="-285750">
@@ -8081,17 +7911,75 @@
               <a:buFont typeface="Arial" panose="020B0604020202020204" pitchFamily="34" charset="0"/>
               <a:buChar char="•"/>
             </a:pPr>
+            <a:endParaRPr lang="en-US" altLang="ko-KR" sz="1600" dirty="0"/>
+          </a:p>
+          <a:p>
+            <a:pPr marL="377825" indent="-285750">
+              <a:lnSpc>
+                <a:spcPct val="150000"/>
+              </a:lnSpc>
+              <a:buFont typeface="Arial" panose="020B0604020202020204" pitchFamily="34" charset="0"/>
+              <a:buChar char="•"/>
+            </a:pPr>
+            <a:r>
+              <a:rPr lang="ko-KR" altLang="en-US" sz="1600" dirty="0"/>
+              <a:t>갈탄은 에너지 밀도가 낮고</a:t>
+            </a:r>
+            <a:r>
+              <a:rPr lang="en-US" altLang="ko-KR" sz="1600" dirty="0"/>
+              <a:t>, </a:t>
+            </a:r>
             <a:r>
               <a:rPr lang="ko-KR" altLang="en-US" sz="1600" dirty="0" err="1"/>
-              <a:t>아역청탄은</a:t>
-            </a:r>
-            <a:r>
-              <a:rPr lang="ko-KR" altLang="en-US" sz="1600" dirty="0"/>
-              <a:t> 갈탄에 비해 상대적으로 발열량이 높다</a:t>
-            </a:r>
-            <a:r>
-              <a:rPr lang="en-US" altLang="ko-KR" sz="1600" dirty="0"/>
-              <a:t>. (18~24 MJ/kg)</a:t>
+              <a:t>연소시</a:t>
+            </a:r>
+            <a:r>
+              <a:rPr lang="ko-KR" altLang="en-US" sz="1600" dirty="0"/>
+              <a:t> 오염물질 </a:t>
+            </a:r>
+            <a:r>
+              <a:rPr lang="en-US" altLang="ko-KR" sz="1600" dirty="0"/>
+              <a:t>(</a:t>
+            </a:r>
+            <a:r>
+              <a:rPr lang="ko-KR" altLang="en-US" sz="1600" dirty="0"/>
+              <a:t>이산화탄소</a:t>
+            </a:r>
+            <a:r>
+              <a:rPr lang="en-US" altLang="ko-KR" sz="1600" dirty="0"/>
+              <a:t>, </a:t>
+            </a:r>
+            <a:r>
+              <a:rPr lang="ko-KR" altLang="en-US" sz="1600" dirty="0"/>
+              <a:t>질소산화물</a:t>
+            </a:r>
+            <a:r>
+              <a:rPr lang="en-US" altLang="ko-KR" sz="1600" dirty="0"/>
+              <a:t>, </a:t>
+            </a:r>
+            <a:r>
+              <a:rPr lang="ko-KR" altLang="en-US" sz="1600" dirty="0"/>
+              <a:t>황산화물 등</a:t>
+            </a:r>
+            <a:r>
+              <a:rPr lang="en-US" altLang="ko-KR" sz="1600" dirty="0"/>
+              <a:t>)</a:t>
+            </a:r>
+            <a:r>
+              <a:rPr lang="ko-KR" altLang="en-US" sz="1600" dirty="0"/>
+              <a:t>을 다량 배출하기 때문에</a:t>
+            </a:r>
+            <a:r>
+              <a:rPr lang="en-US" altLang="ko-KR" sz="1600" dirty="0"/>
+              <a:t>, </a:t>
+            </a:r>
+            <a:r>
+              <a:rPr lang="ko-KR" altLang="en-US" sz="1600" dirty="0"/>
+              <a:t>환경적 측면에서는 가장 부정적인 평가를 받는다</a:t>
+            </a:r>
+            <a:r>
+              <a:rPr lang="en-US" altLang="ko-KR" sz="1600" dirty="0"/>
+              <a:t>.</a:t>
             </a:r>
           </a:p>
           <a:p>
@@ -8104,7 +7992,15 @@
             </a:pPr>
             <a:r>
               <a:rPr lang="ko-KR" altLang="en-US" sz="1600" dirty="0"/>
-              <a:t>갈탄에 비해 에너지 효율이 높아 전력 생산용으로 널리 활용된다</a:t>
+              <a:t>이러한 환경문제로 많은 국가에서 갈탄 기반 발전소 신규건설을 제한하고</a:t>
+            </a:r>
+            <a:r>
+              <a:rPr lang="en-US" altLang="ko-KR" sz="1600" dirty="0"/>
+              <a:t>, </a:t>
+            </a:r>
+            <a:r>
+              <a:rPr lang="ko-KR" altLang="en-US" sz="1600" dirty="0"/>
+              <a:t>조기퇴출을 검토하고 있다</a:t>
             </a:r>
             <a:r>
               <a:rPr lang="en-US" altLang="ko-KR" sz="1600" dirty="0"/>
@@ -8121,40 +8017,7 @@
             </a:pPr>
             <a:r>
               <a:rPr lang="ko-KR" altLang="en-US" sz="1600" dirty="0"/>
-              <a:t>연소 특성이 안정적이고</a:t>
-            </a:r>
-            <a:r>
-              <a:rPr lang="en-US" altLang="ko-KR" sz="1600" dirty="0"/>
-              <a:t>, </a:t>
-            </a:r>
-            <a:r>
-              <a:rPr lang="ko-KR" altLang="en-US" sz="1600" dirty="0"/>
-              <a:t>회분 함량이 낮고</a:t>
-            </a:r>
-            <a:r>
-              <a:rPr lang="en-US" altLang="ko-KR" sz="1600" dirty="0"/>
-              <a:t>, </a:t>
-            </a:r>
-            <a:r>
-              <a:rPr lang="ko-KR" altLang="en-US" sz="1600" dirty="0"/>
-              <a:t>연소 온도가 상대적으로 낮다</a:t>
-            </a:r>
-            <a:r>
-              <a:rPr lang="en-US" altLang="ko-KR" sz="1600" dirty="0"/>
-              <a:t>.</a:t>
-            </a:r>
-          </a:p>
-          <a:p>
-            <a:pPr marL="835025" lvl="1" indent="-285750">
-              <a:lnSpc>
-                <a:spcPct val="150000"/>
-              </a:lnSpc>
-              <a:buFont typeface="Wingdings" panose="05000000000000000000" pitchFamily="2" charset="2"/>
-              <a:buChar char="ü"/>
-            </a:pPr>
-            <a:r>
-              <a:rPr lang="ko-KR" altLang="en-US" sz="1600" dirty="0"/>
-              <a:t>석탄화력을 주요 전력 공급원으로 작용하는 국가에서는 경제성과 실용성을 갖춘 연료로 활용된다</a:t>
+              <a:t>갈탄 자원이 풍부한 국가에서는 여전히 경제성과 접근성 측면에서 중요한 역할을 담당하고 있다</a:t>
             </a:r>
             <a:r>
               <a:rPr lang="en-US" altLang="ko-KR" sz="1600" dirty="0"/>
@@ -8284,188 +8147,20 @@
           </a:bodyPr>
           <a:lstStyle/>
           <a:p>
-            <a:pPr marL="377825" indent="-285750">
-              <a:lnSpc>
-                <a:spcPct val="150000"/>
-              </a:lnSpc>
-              <a:buFont typeface="Arial" panose="020B0604020202020204" pitchFamily="34" charset="0"/>
-              <a:buChar char="•"/>
-            </a:pPr>
-            <a:r>
-              <a:rPr lang="ko-KR" altLang="en-US" sz="1600" dirty="0" err="1"/>
-              <a:t>아역청탄은</a:t>
-            </a:r>
-            <a:r>
-              <a:rPr lang="ko-KR" altLang="en-US" sz="1600" dirty="0"/>
-              <a:t> 미국</a:t>
-            </a:r>
-            <a:r>
-              <a:rPr lang="en-US" altLang="ko-KR" sz="1600" dirty="0"/>
-              <a:t>, </a:t>
-            </a:r>
-            <a:r>
-              <a:rPr lang="ko-KR" altLang="en-US" sz="1600" dirty="0"/>
-              <a:t>인도네시아</a:t>
-            </a:r>
-            <a:r>
-              <a:rPr lang="en-US" altLang="ko-KR" sz="1600" dirty="0"/>
-              <a:t>, </a:t>
-            </a:r>
-            <a:r>
-              <a:rPr lang="ko-KR" altLang="en-US" sz="1600" dirty="0"/>
-              <a:t>러시아</a:t>
-            </a:r>
-            <a:r>
-              <a:rPr lang="en-US" altLang="ko-KR" sz="1600" dirty="0"/>
-              <a:t>, </a:t>
-            </a:r>
-            <a:r>
-              <a:rPr lang="ko-KR" altLang="en-US" sz="1600" dirty="0"/>
-              <a:t>중국 등 광범위하게 매장되어 있다</a:t>
-            </a:r>
-            <a:r>
-              <a:rPr lang="en-US" altLang="ko-KR" sz="1600" dirty="0"/>
-              <a:t>.</a:t>
-            </a:r>
-          </a:p>
-          <a:p>
-            <a:pPr marL="835025" lvl="1" indent="-285750">
-              <a:lnSpc>
-                <a:spcPct val="150000"/>
-              </a:lnSpc>
-              <a:buFont typeface="Wingdings" panose="05000000000000000000" pitchFamily="2" charset="2"/>
-              <a:buChar char="ü"/>
-            </a:pPr>
-            <a:r>
-              <a:rPr lang="ko-KR" altLang="en-US" sz="1600" dirty="0"/>
-              <a:t>미국 </a:t>
-            </a:r>
-            <a:r>
-              <a:rPr lang="ko-KR" altLang="en-US" sz="1600" dirty="0" err="1"/>
-              <a:t>와이오밍</a:t>
-            </a:r>
-            <a:r>
-              <a:rPr lang="ko-KR" altLang="en-US" sz="1600" dirty="0"/>
-              <a:t> 주의 </a:t>
-            </a:r>
-            <a:r>
-              <a:rPr lang="ko-KR" altLang="en-US" sz="1600" dirty="0" err="1"/>
-              <a:t>파우더리버</a:t>
-            </a:r>
-            <a:r>
-              <a:rPr lang="ko-KR" altLang="en-US" sz="1600" dirty="0"/>
-              <a:t> 분지는 세계에서 가장 큰 </a:t>
-            </a:r>
-            <a:r>
-              <a:rPr lang="ko-KR" altLang="en-US" sz="1600" dirty="0" err="1"/>
-              <a:t>아역청탄</a:t>
-            </a:r>
-            <a:r>
-              <a:rPr lang="ko-KR" altLang="en-US" sz="1600" dirty="0"/>
-              <a:t> 생산지 중 하나이다</a:t>
-            </a:r>
-            <a:r>
-              <a:rPr lang="en-US" altLang="ko-KR" sz="1600" dirty="0"/>
-              <a:t>.</a:t>
-            </a:r>
-          </a:p>
-          <a:p>
-            <a:pPr marL="835025" lvl="1" indent="-285750">
-              <a:lnSpc>
-                <a:spcPct val="150000"/>
-              </a:lnSpc>
-              <a:buFont typeface="Wingdings" panose="05000000000000000000" pitchFamily="2" charset="2"/>
-              <a:buChar char="ü"/>
-            </a:pPr>
-            <a:r>
-              <a:rPr lang="ko-KR" altLang="en-US" sz="1600" dirty="0"/>
-              <a:t>인도네시아는 동남아시아 최대의 석탄 수출국으로</a:t>
-            </a:r>
-            <a:r>
-              <a:rPr lang="en-US" altLang="ko-KR" sz="1600" dirty="0"/>
-              <a:t>, </a:t>
-            </a:r>
-            <a:r>
-              <a:rPr lang="ko-KR" altLang="en-US" sz="1600" dirty="0" err="1"/>
-              <a:t>아역청탄을</a:t>
-            </a:r>
-            <a:r>
-              <a:rPr lang="ko-KR" altLang="en-US" sz="1600" dirty="0"/>
-              <a:t> 중심으로 아시아 시장에 대한 공급을 지속적으로 확대하고 있다</a:t>
-            </a:r>
-            <a:r>
-              <a:rPr lang="en-US" altLang="ko-KR" sz="1600" dirty="0"/>
-              <a:t>.</a:t>
-            </a:r>
-          </a:p>
-          <a:p>
-            <a:pPr marL="377825" indent="-285750">
-              <a:lnSpc>
-                <a:spcPct val="150000"/>
-              </a:lnSpc>
-              <a:buFont typeface="Arial" panose="020B0604020202020204" pitchFamily="34" charset="0"/>
-              <a:buChar char="•"/>
-            </a:pPr>
-            <a:r>
-              <a:rPr lang="ko-KR" altLang="en-US" sz="1600" dirty="0"/>
-              <a:t>환경적 측면에서 </a:t>
-            </a:r>
-            <a:r>
-              <a:rPr lang="ko-KR" altLang="en-US" sz="1600" dirty="0" err="1"/>
-              <a:t>아역청탄이</a:t>
-            </a:r>
-            <a:r>
-              <a:rPr lang="ko-KR" altLang="en-US" sz="1600" dirty="0"/>
-              <a:t> 갈탄보다 온실가스 및 대기오염물질 배출량이 적지만</a:t>
-            </a:r>
-            <a:r>
-              <a:rPr lang="en-US" altLang="ko-KR" sz="1600" dirty="0"/>
-              <a:t>, </a:t>
-            </a:r>
-            <a:r>
-              <a:rPr lang="ko-KR" altLang="en-US" sz="1600" dirty="0"/>
-              <a:t>여전히 재생에너지 및 천연가스에 비해 탄소배출량이 높아 기후정책에 의해 제한되는 추세이다</a:t>
-            </a:r>
-            <a:r>
-              <a:rPr lang="en-US" altLang="ko-KR" sz="1600" dirty="0"/>
-              <a:t>.</a:t>
-            </a:r>
-          </a:p>
-          <a:p>
-            <a:pPr marL="377825" indent="-285750">
-              <a:lnSpc>
-                <a:spcPct val="150000"/>
-              </a:lnSpc>
-              <a:buFont typeface="Arial" panose="020B0604020202020204" pitchFamily="34" charset="0"/>
-              <a:buChar char="•"/>
-            </a:pPr>
-            <a:endParaRPr lang="en-US" altLang="ko-KR" sz="1600" dirty="0"/>
-          </a:p>
-          <a:p>
-            <a:pPr marL="377825" indent="-285750">
-              <a:lnSpc>
-                <a:spcPct val="150000"/>
-              </a:lnSpc>
-              <a:buFont typeface="Arial" panose="020B0604020202020204" pitchFamily="34" charset="0"/>
-              <a:buChar char="•"/>
-            </a:pPr>
-            <a:endParaRPr lang="en-US" altLang="ko-KR" sz="1600" dirty="0"/>
-          </a:p>
-          <a:p>
             <a:pPr marL="92075">
               <a:lnSpc>
                 <a:spcPct val="150000"/>
               </a:lnSpc>
             </a:pPr>
             <a:r>
-              <a:rPr lang="ko-KR" altLang="en-US" sz="1600" u="sng" dirty="0">
+              <a:rPr lang="ko-KR" altLang="en-US" sz="1600" u="sng" dirty="0" err="1">
                 <a:ln w="3175">
                   <a:noFill/>
                 </a:ln>
                 <a:latin typeface="HY헤드라인M" panose="02030600000101010101" pitchFamily="18" charset="-127"/>
                 <a:ea typeface="HY헤드라인M" panose="02030600000101010101" pitchFamily="18" charset="-127"/>
               </a:rPr>
-              <a:t>역청탄</a:t>
+              <a:t>아역청탄</a:t>
             </a:r>
             <a:endParaRPr lang="en-US" altLang="ko-KR" sz="1600" u="sng" dirty="0">
               <a:ln w="3175">
@@ -8484,16 +8179,16 @@
               <a:buChar char="•"/>
             </a:pPr>
             <a:r>
-              <a:rPr lang="ko-KR" altLang="en-US" sz="1600" dirty="0"/>
-              <a:t>전세계적으로 가장 널리 사용되는 중</a:t>
-            </a:r>
-            <a:r>
-              <a:rPr lang="en-US" altLang="ko-KR" sz="1600" dirty="0"/>
-              <a:t>·</a:t>
-            </a:r>
-            <a:r>
               <a:rPr lang="ko-KR" altLang="en-US" sz="1600" dirty="0" err="1"/>
-              <a:t>고등급</a:t>
+              <a:t>아역청탄은</a:t>
+            </a:r>
+            <a:r>
+              <a:rPr lang="ko-KR" altLang="en-US" sz="1600" dirty="0"/>
+              <a:t> 석탄화 정도가 갈탄보다 더 진행된 중간단계의 </a:t>
+            </a:r>
+            <a:r>
+              <a:rPr lang="ko-KR" altLang="en-US" sz="1600" dirty="0" err="1"/>
+              <a:t>저등급</a:t>
             </a:r>
             <a:r>
               <a:rPr lang="ko-KR" altLang="en-US" sz="1600" dirty="0"/>
@@ -8514,31 +8209,23 @@
             </a:pPr>
             <a:r>
               <a:rPr lang="ko-KR" altLang="en-US" sz="1600" dirty="0"/>
-              <a:t>석탄화 정도가 갈탄이나 </a:t>
-            </a:r>
-            <a:r>
-              <a:rPr lang="ko-KR" altLang="en-US" sz="1600" dirty="0" err="1"/>
-              <a:t>아역청탄보다</a:t>
-            </a:r>
-            <a:r>
-              <a:rPr lang="ko-KR" altLang="en-US" sz="1600" dirty="0"/>
-              <a:t> 훨씬 높고</a:t>
-            </a:r>
-            <a:r>
-              <a:rPr lang="en-US" altLang="ko-KR" sz="1600" dirty="0"/>
-              <a:t>, </a:t>
-            </a:r>
-            <a:r>
-              <a:rPr lang="ko-KR" altLang="en-US" sz="1600" dirty="0"/>
-              <a:t>탄소 함량은 </a:t>
-            </a:r>
-            <a:r>
-              <a:rPr lang="en-US" altLang="ko-KR" sz="1600" dirty="0"/>
-              <a:t>45~86%</a:t>
-            </a:r>
-            <a:r>
-              <a:rPr lang="ko-KR" altLang="en-US" sz="1600" dirty="0"/>
-              <a:t>에 이른다</a:t>
+              <a:t>탄소함량은 </a:t>
+            </a:r>
+            <a:r>
+              <a:rPr lang="en-US" altLang="ko-KR" sz="1600" dirty="0"/>
+              <a:t>40% </a:t>
+            </a:r>
+            <a:r>
+              <a:rPr lang="ko-KR" altLang="en-US" sz="1600" dirty="0"/>
+              <a:t>수준이고</a:t>
+            </a:r>
+            <a:r>
+              <a:rPr lang="en-US" altLang="ko-KR" sz="1600" dirty="0"/>
+              <a:t>, </a:t>
+            </a:r>
+            <a:r>
+              <a:rPr lang="ko-KR" altLang="en-US" sz="1600" dirty="0"/>
+              <a:t>상대적으로 낮은 휘발분과 수분함량을 갖고 있다</a:t>
             </a:r>
             <a:r>
               <a:rPr lang="en-US" altLang="ko-KR" sz="1600" dirty="0"/>
@@ -8555,35 +8242,48 @@
             </a:pPr>
             <a:r>
               <a:rPr lang="ko-KR" altLang="en-US" sz="1600" dirty="0"/>
-              <a:t>수분과 </a:t>
-            </a:r>
+              <a:t>외관상 칙칙한 검은색 또는 어두운 회갈색이며</a:t>
+            </a:r>
+            <a:r>
+              <a:rPr lang="en-US" altLang="ko-KR" sz="1600" dirty="0"/>
+              <a:t>, </a:t>
+            </a:r>
+            <a:r>
+              <a:rPr lang="ko-KR" altLang="en-US" sz="1600" dirty="0"/>
+              <a:t>조직은 갈탄보다 치밀하고 견고하나</a:t>
+            </a:r>
+            <a:r>
+              <a:rPr lang="en-US" altLang="ko-KR" sz="1600" dirty="0"/>
+              <a:t>, </a:t>
+            </a:r>
+            <a:r>
+              <a:rPr lang="ko-KR" altLang="en-US" sz="1600" dirty="0"/>
+              <a:t>무연탄이나 역청탄에 비해 부드럽다</a:t>
+            </a:r>
+            <a:r>
+              <a:rPr lang="en-US" altLang="ko-KR" sz="1600" dirty="0"/>
+              <a:t>.</a:t>
+            </a:r>
+          </a:p>
+          <a:p>
+            <a:pPr marL="377825" indent="-285750">
+              <a:lnSpc>
+                <a:spcPct val="150000"/>
+              </a:lnSpc>
+              <a:buFont typeface="Arial" panose="020B0604020202020204" pitchFamily="34" charset="0"/>
+              <a:buChar char="•"/>
+            </a:pPr>
             <a:r>
               <a:rPr lang="ko-KR" altLang="en-US" sz="1600" dirty="0" err="1"/>
-              <a:t>휘발분</a:t>
-            </a:r>
-            <a:r>
-              <a:rPr lang="ko-KR" altLang="en-US" sz="1600" dirty="0"/>
-              <a:t> 함량이 낮아 </a:t>
-            </a:r>
-            <a:r>
-              <a:rPr lang="ko-KR" altLang="en-US" sz="1600" dirty="0" err="1"/>
-              <a:t>연료로서의</a:t>
-            </a:r>
-            <a:r>
-              <a:rPr lang="ko-KR" altLang="en-US" sz="1600" dirty="0"/>
-              <a:t> 품질이 우수하고</a:t>
-            </a:r>
-            <a:r>
-              <a:rPr lang="en-US" altLang="ko-KR" sz="1600" dirty="0"/>
-              <a:t>, </a:t>
-            </a:r>
-            <a:r>
-              <a:rPr lang="ko-KR" altLang="en-US" sz="1600" dirty="0"/>
-              <a:t>에너지 밀도가 높다</a:t>
-            </a:r>
-            <a:r>
-              <a:rPr lang="en-US" altLang="ko-KR" sz="1600" dirty="0"/>
-              <a:t>.</a:t>
+              <a:t>아역청탄은</a:t>
+            </a:r>
+            <a:r>
+              <a:rPr lang="ko-KR" altLang="en-US" sz="1600" dirty="0"/>
+              <a:t> 갈탄에 비해 상대적으로 발열량이 높다</a:t>
+            </a:r>
+            <a:r>
+              <a:rPr lang="en-US" altLang="ko-KR" sz="1600" dirty="0"/>
+              <a:t>. (18~24 MJ/kg)</a:t>
             </a:r>
           </a:p>
           <a:p>
@@ -8596,15 +8296,7 @@
             </a:pPr>
             <a:r>
               <a:rPr lang="ko-KR" altLang="en-US" sz="1600" dirty="0"/>
-              <a:t>광택이 나는 흑색이고</a:t>
-            </a:r>
-            <a:r>
-              <a:rPr lang="en-US" altLang="ko-KR" sz="1600" dirty="0"/>
-              <a:t>, </a:t>
-            </a:r>
-            <a:r>
-              <a:rPr lang="ko-KR" altLang="en-US" sz="1600" dirty="0"/>
-              <a:t>구조는 단단하고 치밀하여 기계적 강도가 높다</a:t>
+              <a:t>갈탄에 비해 에너지 효율이 높아 전력 생산용으로 널리 활용된다</a:t>
             </a:r>
             <a:r>
               <a:rPr lang="en-US" altLang="ko-KR" sz="1600" dirty="0"/>
@@ -8619,7 +8311,47 @@
               <a:buFont typeface="Wingdings" panose="05000000000000000000" pitchFamily="2" charset="2"/>
               <a:buChar char="ü"/>
             </a:pPr>
-            <a:endParaRPr lang="en-US" altLang="ko-KR" sz="1600" dirty="0"/>
+            <a:r>
+              <a:rPr lang="ko-KR" altLang="en-US" sz="1600" dirty="0"/>
+              <a:t>연소 특성이 안정적이고</a:t>
+            </a:r>
+            <a:r>
+              <a:rPr lang="en-US" altLang="ko-KR" sz="1600" dirty="0"/>
+              <a:t>, </a:t>
+            </a:r>
+            <a:r>
+              <a:rPr lang="ko-KR" altLang="en-US" sz="1600" dirty="0"/>
+              <a:t>회분 함량이 낮고</a:t>
+            </a:r>
+            <a:r>
+              <a:rPr lang="en-US" altLang="ko-KR" sz="1600" dirty="0"/>
+              <a:t>, </a:t>
+            </a:r>
+            <a:r>
+              <a:rPr lang="ko-KR" altLang="en-US" sz="1600" dirty="0"/>
+              <a:t>연소 온도가 상대적으로 낮다</a:t>
+            </a:r>
+            <a:r>
+              <a:rPr lang="en-US" altLang="ko-KR" sz="1600" dirty="0"/>
+              <a:t>.</a:t>
+            </a:r>
+          </a:p>
+          <a:p>
+            <a:pPr marL="835025" lvl="1" indent="-285750">
+              <a:lnSpc>
+                <a:spcPct val="150000"/>
+              </a:lnSpc>
+              <a:buFont typeface="Wingdings" panose="05000000000000000000" pitchFamily="2" charset="2"/>
+              <a:buChar char="ü"/>
+            </a:pPr>
+            <a:r>
+              <a:rPr lang="ko-KR" altLang="en-US" sz="1600" dirty="0"/>
+              <a:t>석탄화력을 주요 전력 공급원으로 작용하는 국가에서는 경제성과 실용성을 갖춘 연료로 활용된다</a:t>
+            </a:r>
+            <a:r>
+              <a:rPr lang="en-US" altLang="ko-KR" sz="1600" dirty="0"/>
+              <a:t>.</a:t>
+            </a:r>
           </a:p>
           <a:p>
             <a:pPr marL="377825" indent="-285750">
@@ -8629,7 +8361,145 @@
               <a:buFont typeface="Arial" panose="020B0604020202020204" pitchFamily="34" charset="0"/>
               <a:buChar char="•"/>
             </a:pPr>
-            <a:endParaRPr lang="en-US" altLang="ko-KR" sz="1600" dirty="0"/>
+            <a:r>
+              <a:rPr lang="ko-KR" altLang="en-US" sz="1600" dirty="0" err="1"/>
+              <a:t>아역청탄은</a:t>
+            </a:r>
+            <a:r>
+              <a:rPr lang="ko-KR" altLang="en-US" sz="1600" dirty="0"/>
+              <a:t> 미국</a:t>
+            </a:r>
+            <a:r>
+              <a:rPr lang="en-US" altLang="ko-KR" sz="1600" dirty="0"/>
+              <a:t>, </a:t>
+            </a:r>
+            <a:r>
+              <a:rPr lang="ko-KR" altLang="en-US" sz="1600" dirty="0"/>
+              <a:t>인도네시아</a:t>
+            </a:r>
+            <a:r>
+              <a:rPr lang="en-US" altLang="ko-KR" sz="1600" dirty="0"/>
+              <a:t>, </a:t>
+            </a:r>
+            <a:r>
+              <a:rPr lang="ko-KR" altLang="en-US" sz="1600" dirty="0"/>
+              <a:t>러시아</a:t>
+            </a:r>
+            <a:r>
+              <a:rPr lang="en-US" altLang="ko-KR" sz="1600" dirty="0"/>
+              <a:t>, </a:t>
+            </a:r>
+            <a:r>
+              <a:rPr lang="ko-KR" altLang="en-US" sz="1600" dirty="0"/>
+              <a:t>중국 등 광범위하게 매장되어 있다</a:t>
+            </a:r>
+            <a:r>
+              <a:rPr lang="en-US" altLang="ko-KR" sz="1600" dirty="0"/>
+              <a:t>.</a:t>
+            </a:r>
+          </a:p>
+          <a:p>
+            <a:pPr marL="835025" lvl="1" indent="-285750">
+              <a:lnSpc>
+                <a:spcPct val="150000"/>
+              </a:lnSpc>
+              <a:buFont typeface="Wingdings" panose="05000000000000000000" pitchFamily="2" charset="2"/>
+              <a:buChar char="ü"/>
+            </a:pPr>
+            <a:r>
+              <a:rPr lang="ko-KR" altLang="en-US" sz="1600" dirty="0"/>
+              <a:t>미국 </a:t>
+            </a:r>
+            <a:r>
+              <a:rPr lang="ko-KR" altLang="en-US" sz="1600" dirty="0" err="1"/>
+              <a:t>와이오밍</a:t>
+            </a:r>
+            <a:r>
+              <a:rPr lang="ko-KR" altLang="en-US" sz="1600" dirty="0"/>
+              <a:t> 주의 </a:t>
+            </a:r>
+            <a:r>
+              <a:rPr lang="ko-KR" altLang="en-US" sz="1600" dirty="0" err="1"/>
+              <a:t>파우더리버</a:t>
+            </a:r>
+            <a:r>
+              <a:rPr lang="ko-KR" altLang="en-US" sz="1600" dirty="0"/>
+              <a:t> 분지는 세계에서 가장 큰 </a:t>
+            </a:r>
+            <a:r>
+              <a:rPr lang="ko-KR" altLang="en-US" sz="1600" dirty="0" err="1"/>
+              <a:t>아역청탄</a:t>
+            </a:r>
+            <a:r>
+              <a:rPr lang="ko-KR" altLang="en-US" sz="1600" dirty="0"/>
+              <a:t> 생산지 중 하나이다</a:t>
+            </a:r>
+            <a:r>
+              <a:rPr lang="en-US" altLang="ko-KR" sz="1600" dirty="0"/>
+              <a:t>.</a:t>
+            </a:r>
+          </a:p>
+          <a:p>
+            <a:pPr marL="835025" lvl="1" indent="-285750">
+              <a:lnSpc>
+                <a:spcPct val="150000"/>
+              </a:lnSpc>
+              <a:buFont typeface="Wingdings" panose="05000000000000000000" pitchFamily="2" charset="2"/>
+              <a:buChar char="ü"/>
+            </a:pPr>
+            <a:r>
+              <a:rPr lang="ko-KR" altLang="en-US" sz="1600" dirty="0"/>
+              <a:t>인도네시아는 동남아시아 최대의 석탄 수출국으로</a:t>
+            </a:r>
+            <a:r>
+              <a:rPr lang="en-US" altLang="ko-KR" sz="1600" dirty="0"/>
+              <a:t>, </a:t>
+            </a:r>
+            <a:r>
+              <a:rPr lang="ko-KR" altLang="en-US" sz="1600" dirty="0" err="1"/>
+              <a:t>아역청탄을</a:t>
+            </a:r>
+            <a:r>
+              <a:rPr lang="ko-KR" altLang="en-US" sz="1600" dirty="0"/>
+              <a:t> 중심으로 아시아 시장에 대한 공급을 지속적으로 확대하고 있다</a:t>
+            </a:r>
+            <a:r>
+              <a:rPr lang="en-US" altLang="ko-KR" sz="1600" dirty="0"/>
+              <a:t>.</a:t>
+            </a:r>
+          </a:p>
+          <a:p>
+            <a:pPr marL="377825" indent="-285750">
+              <a:lnSpc>
+                <a:spcPct val="150000"/>
+              </a:lnSpc>
+              <a:buFont typeface="Arial" panose="020B0604020202020204" pitchFamily="34" charset="0"/>
+              <a:buChar char="•"/>
+            </a:pPr>
+            <a:r>
+              <a:rPr lang="ko-KR" altLang="en-US" sz="1600" dirty="0"/>
+              <a:t>환경적 측면에서 </a:t>
+            </a:r>
+            <a:r>
+              <a:rPr lang="ko-KR" altLang="en-US" sz="1600" dirty="0" err="1"/>
+              <a:t>아역청탄이</a:t>
+            </a:r>
+            <a:r>
+              <a:rPr lang="ko-KR" altLang="en-US" sz="1600" dirty="0"/>
+              <a:t> 갈탄보다 온실가스 및 대기오염물질 배출량이 적지만</a:t>
+            </a:r>
+            <a:r>
+              <a:rPr lang="en-US" altLang="ko-KR" sz="1600" dirty="0"/>
+              <a:t>, </a:t>
+            </a:r>
+            <a:r>
+              <a:rPr lang="ko-KR" altLang="en-US" sz="1600" dirty="0"/>
+              <a:t>여전히 재생에너지 및 천연가스에 비해 탄소배출량이 높아 기후정책에 의해 제한되는 추세이다</a:t>
+            </a:r>
+            <a:r>
+              <a:rPr lang="en-US" altLang="ko-KR" sz="1600" dirty="0"/>
+              <a:t>.</a:t>
+            </a:r>
           </a:p>
         </p:txBody>
       </p:sp>
@@ -8647,6 +8517,422 @@
 </file>
 
 <file path=ppt/slides/slide13.xml><?xml version="1.0" encoding="utf-8"?>
+<p:sld xmlns:a="http://schemas.openxmlformats.org/drawingml/2006/main" xmlns:r="http://schemas.openxmlformats.org/officeDocument/2006/relationships" xmlns:p="http://schemas.openxmlformats.org/presentationml/2006/main">
+  <p:cSld>
+    <p:spTree>
+      <p:nvGrpSpPr>
+        <p:cNvPr id="1" name="">
+          <a:extLst>
+            <a:ext uri="{FF2B5EF4-FFF2-40B4-BE49-F238E27FC236}">
+              <a16:creationId xmlns:a16="http://schemas.microsoft.com/office/drawing/2014/main" id="{47F61E90-1FE1-AF37-2721-221E12852028}"/>
+            </a:ext>
+          </a:extLst>
+        </p:cNvPr>
+        <p:cNvGrpSpPr/>
+        <p:nvPr/>
+      </p:nvGrpSpPr>
+      <p:grpSpPr>
+        <a:xfrm>
+          <a:off x="0" y="0"/>
+          <a:ext cx="0" cy="0"/>
+          <a:chOff x="0" y="0"/>
+          <a:chExt cx="0" cy="0"/>
+        </a:xfrm>
+      </p:grpSpPr>
+      <p:sp>
+        <p:nvSpPr>
+          <p:cNvPr id="2" name="제목 1">
+            <a:extLst>
+              <a:ext uri="{FF2B5EF4-FFF2-40B4-BE49-F238E27FC236}">
+                <a16:creationId xmlns:a16="http://schemas.microsoft.com/office/drawing/2014/main" id="{78272C6C-31D2-8655-9596-EE07524E5A8B}"/>
+              </a:ext>
+            </a:extLst>
+          </p:cNvPr>
+          <p:cNvSpPr>
+            <a:spLocks noGrp="1"/>
+          </p:cNvSpPr>
+          <p:nvPr>
+            <p:ph type="title"/>
+          </p:nvPr>
+        </p:nvSpPr>
+        <p:spPr/>
+        <p:txBody>
+          <a:bodyPr/>
+          <a:lstStyle/>
+          <a:p>
+            <a:r>
+              <a:rPr lang="ko-KR" altLang="en-US" dirty="0"/>
+              <a:t>석탄의 분류와 특징</a:t>
+            </a:r>
+          </a:p>
+        </p:txBody>
+      </p:sp>
+      <p:sp>
+        <p:nvSpPr>
+          <p:cNvPr id="4" name="슬라이드 번호 개체 틀 3">
+            <a:extLst>
+              <a:ext uri="{FF2B5EF4-FFF2-40B4-BE49-F238E27FC236}">
+                <a16:creationId xmlns:a16="http://schemas.microsoft.com/office/drawing/2014/main" id="{6D0997A5-FE4B-3496-3AA7-DECAD83E6C8B}"/>
+              </a:ext>
+            </a:extLst>
+          </p:cNvPr>
+          <p:cNvSpPr>
+            <a:spLocks noGrp="1"/>
+          </p:cNvSpPr>
+          <p:nvPr>
+            <p:ph type="sldNum" sz="quarter" idx="12"/>
+          </p:nvPr>
+        </p:nvSpPr>
+        <p:spPr/>
+        <p:txBody>
+          <a:bodyPr/>
+          <a:lstStyle/>
+          <a:p>
+            <a:fld id="{109C872D-39A9-4065-8BF3-6A613116E2A1}" type="slidenum">
+              <a:rPr lang="ko-KR" altLang="en-US" smtClean="0"/>
+              <a:t>13</a:t>
+            </a:fld>
+            <a:endParaRPr lang="ko-KR" altLang="en-US"/>
+          </a:p>
+        </p:txBody>
+      </p:sp>
+      <p:sp>
+        <p:nvSpPr>
+          <p:cNvPr id="3" name="TextBox 2">
+            <a:extLst>
+              <a:ext uri="{FF2B5EF4-FFF2-40B4-BE49-F238E27FC236}">
+                <a16:creationId xmlns:a16="http://schemas.microsoft.com/office/drawing/2014/main" id="{F6564D71-ED20-F9EA-E6CC-E5FE2A1F7759}"/>
+              </a:ext>
+            </a:extLst>
+          </p:cNvPr>
+          <p:cNvSpPr txBox="1"/>
+          <p:nvPr/>
+        </p:nvSpPr>
+        <p:spPr>
+          <a:xfrm>
+            <a:off x="288790" y="958844"/>
+            <a:ext cx="11118453" cy="4846007"/>
+          </a:xfrm>
+          <a:prstGeom prst="rect">
+            <a:avLst/>
+          </a:prstGeom>
+          <a:noFill/>
+        </p:spPr>
+        <p:txBody>
+          <a:bodyPr wrap="square" rtlCol="0" anchor="t">
+            <a:spAutoFit/>
+          </a:bodyPr>
+          <a:lstStyle/>
+          <a:p>
+            <a:pPr marL="92075">
+              <a:lnSpc>
+                <a:spcPct val="150000"/>
+              </a:lnSpc>
+            </a:pPr>
+            <a:r>
+              <a:rPr lang="ko-KR" altLang="en-US" sz="1600" u="sng" dirty="0">
+                <a:ln w="3175">
+                  <a:noFill/>
+                </a:ln>
+                <a:latin typeface="HY헤드라인M" panose="02030600000101010101" pitchFamily="18" charset="-127"/>
+                <a:ea typeface="HY헤드라인M" panose="02030600000101010101" pitchFamily="18" charset="-127"/>
+              </a:rPr>
+              <a:t>역청탄</a:t>
+            </a:r>
+            <a:endParaRPr lang="en-US" altLang="ko-KR" sz="1600" u="sng" dirty="0">
+              <a:ln w="3175">
+                <a:noFill/>
+              </a:ln>
+              <a:latin typeface="HY헤드라인M" panose="02030600000101010101" pitchFamily="18" charset="-127"/>
+              <a:ea typeface="HY헤드라인M" panose="02030600000101010101" pitchFamily="18" charset="-127"/>
+            </a:endParaRPr>
+          </a:p>
+          <a:p>
+            <a:pPr marL="377825" indent="-285750">
+              <a:lnSpc>
+                <a:spcPct val="150000"/>
+              </a:lnSpc>
+              <a:buFont typeface="Arial" panose="020B0604020202020204" pitchFamily="34" charset="0"/>
+              <a:buChar char="•"/>
+            </a:pPr>
+            <a:r>
+              <a:rPr lang="ko-KR" altLang="en-US" sz="1600" dirty="0"/>
+              <a:t>전세계적으로 가장 널리 사용되는 중</a:t>
+            </a:r>
+            <a:r>
+              <a:rPr lang="en-US" altLang="ko-KR" sz="1600" dirty="0"/>
+              <a:t>·</a:t>
+            </a:r>
+            <a:r>
+              <a:rPr lang="ko-KR" altLang="en-US" sz="1600" dirty="0" err="1"/>
+              <a:t>고등급</a:t>
+            </a:r>
+            <a:r>
+              <a:rPr lang="ko-KR" altLang="en-US" sz="1600" dirty="0"/>
+              <a:t> 석탄이다</a:t>
+            </a:r>
+            <a:r>
+              <a:rPr lang="en-US" altLang="ko-KR" sz="1600" dirty="0"/>
+              <a:t>.</a:t>
+            </a:r>
+          </a:p>
+          <a:p>
+            <a:pPr marL="835025" lvl="1" indent="-285750">
+              <a:lnSpc>
+                <a:spcPct val="150000"/>
+              </a:lnSpc>
+              <a:buFont typeface="Wingdings" panose="05000000000000000000" pitchFamily="2" charset="2"/>
+              <a:buChar char="ü"/>
+            </a:pPr>
+            <a:r>
+              <a:rPr lang="ko-KR" altLang="en-US" sz="1600" dirty="0"/>
+              <a:t>석탄화 정도가 갈탄이나 </a:t>
+            </a:r>
+            <a:r>
+              <a:rPr lang="ko-KR" altLang="en-US" sz="1600" dirty="0" err="1"/>
+              <a:t>아역청탄보다</a:t>
+            </a:r>
+            <a:r>
+              <a:rPr lang="ko-KR" altLang="en-US" sz="1600" dirty="0"/>
+              <a:t> 훨씬 높고</a:t>
+            </a:r>
+            <a:r>
+              <a:rPr lang="en-US" altLang="ko-KR" sz="1600" dirty="0"/>
+              <a:t>, </a:t>
+            </a:r>
+            <a:r>
+              <a:rPr lang="ko-KR" altLang="en-US" sz="1600" dirty="0"/>
+              <a:t>탄소 함량은 </a:t>
+            </a:r>
+            <a:r>
+              <a:rPr lang="en-US" altLang="ko-KR" sz="1600" dirty="0"/>
+              <a:t>45~86%</a:t>
+            </a:r>
+            <a:r>
+              <a:rPr lang="ko-KR" altLang="en-US" sz="1600" dirty="0"/>
+              <a:t>에 이른다</a:t>
+            </a:r>
+            <a:r>
+              <a:rPr lang="en-US" altLang="ko-KR" sz="1600" dirty="0"/>
+              <a:t>.</a:t>
+            </a:r>
+          </a:p>
+          <a:p>
+            <a:pPr marL="835025" lvl="1" indent="-285750">
+              <a:lnSpc>
+                <a:spcPct val="150000"/>
+              </a:lnSpc>
+              <a:buFont typeface="Wingdings" panose="05000000000000000000" pitchFamily="2" charset="2"/>
+              <a:buChar char="ü"/>
+            </a:pPr>
+            <a:r>
+              <a:rPr lang="ko-KR" altLang="en-US" sz="1600" dirty="0"/>
+              <a:t>수분과 </a:t>
+            </a:r>
+            <a:r>
+              <a:rPr lang="ko-KR" altLang="en-US" sz="1600" dirty="0" err="1"/>
+              <a:t>휘발분</a:t>
+            </a:r>
+            <a:r>
+              <a:rPr lang="ko-KR" altLang="en-US" sz="1600" dirty="0"/>
+              <a:t> 함량이 낮아 </a:t>
+            </a:r>
+            <a:r>
+              <a:rPr lang="ko-KR" altLang="en-US" sz="1600" dirty="0" err="1"/>
+              <a:t>연료로서의</a:t>
+            </a:r>
+            <a:r>
+              <a:rPr lang="ko-KR" altLang="en-US" sz="1600" dirty="0"/>
+              <a:t> 품질이 우수하고</a:t>
+            </a:r>
+            <a:r>
+              <a:rPr lang="en-US" altLang="ko-KR" sz="1600" dirty="0"/>
+              <a:t>, </a:t>
+            </a:r>
+            <a:r>
+              <a:rPr lang="ko-KR" altLang="en-US" sz="1600" dirty="0"/>
+              <a:t>에너지 밀도가 높다</a:t>
+            </a:r>
+            <a:r>
+              <a:rPr lang="en-US" altLang="ko-KR" sz="1600" dirty="0"/>
+              <a:t>.</a:t>
+            </a:r>
+          </a:p>
+          <a:p>
+            <a:pPr marL="835025" lvl="1" indent="-285750">
+              <a:lnSpc>
+                <a:spcPct val="150000"/>
+              </a:lnSpc>
+              <a:buFont typeface="Wingdings" panose="05000000000000000000" pitchFamily="2" charset="2"/>
+              <a:buChar char="ü"/>
+            </a:pPr>
+            <a:r>
+              <a:rPr lang="ko-KR" altLang="en-US" sz="1600" dirty="0"/>
+              <a:t>광택이 나는 흑색이고</a:t>
+            </a:r>
+            <a:r>
+              <a:rPr lang="en-US" altLang="ko-KR" sz="1600" dirty="0"/>
+              <a:t>, </a:t>
+            </a:r>
+            <a:r>
+              <a:rPr lang="ko-KR" altLang="en-US" sz="1600" dirty="0"/>
+              <a:t>구조는 단단하고 치밀하여 기계적 강도가 높다</a:t>
+            </a:r>
+            <a:r>
+              <a:rPr lang="en-US" altLang="ko-KR" sz="1600" dirty="0"/>
+              <a:t>.</a:t>
+            </a:r>
+          </a:p>
+          <a:p>
+            <a:pPr marL="549275" lvl="1">
+              <a:lnSpc>
+                <a:spcPct val="150000"/>
+              </a:lnSpc>
+            </a:pPr>
+            <a:endParaRPr lang="en-US" altLang="ko-KR" sz="1600" dirty="0"/>
+          </a:p>
+          <a:p>
+            <a:pPr marL="377825" indent="-285750">
+              <a:lnSpc>
+                <a:spcPct val="150000"/>
+              </a:lnSpc>
+              <a:buFont typeface="Arial" panose="020B0604020202020204" pitchFamily="34" charset="0"/>
+              <a:buChar char="•"/>
+            </a:pPr>
+            <a:r>
+              <a:rPr lang="ko-KR" altLang="en-US" sz="1600" dirty="0"/>
+              <a:t>역청탄의 발열량은 약 </a:t>
+            </a:r>
+            <a:r>
+              <a:rPr lang="en-US" altLang="ko-KR" sz="1600" dirty="0"/>
+              <a:t>24~35MJ/kg</a:t>
+            </a:r>
+            <a:r>
+              <a:rPr lang="ko-KR" altLang="en-US" sz="1600" dirty="0"/>
+              <a:t>으로 </a:t>
+            </a:r>
+            <a:r>
+              <a:rPr lang="ko-KR" altLang="en-US" sz="1600" dirty="0" err="1"/>
+              <a:t>아역청탄보다</a:t>
+            </a:r>
+            <a:r>
+              <a:rPr lang="ko-KR" altLang="en-US" sz="1600" dirty="0"/>
+              <a:t> 높다</a:t>
+            </a:r>
+            <a:r>
+              <a:rPr lang="en-US" altLang="ko-KR" sz="1600" dirty="0"/>
+              <a:t>.</a:t>
+            </a:r>
+          </a:p>
+          <a:p>
+            <a:pPr marL="835025" lvl="1" indent="-285750">
+              <a:lnSpc>
+                <a:spcPct val="150000"/>
+              </a:lnSpc>
+              <a:buFont typeface="Wingdings" panose="05000000000000000000" pitchFamily="2" charset="2"/>
+              <a:buChar char="ü"/>
+            </a:pPr>
+            <a:r>
+              <a:rPr lang="ko-KR" altLang="en-US" sz="1600" dirty="0"/>
+              <a:t>전력 생산을 위한 연료로 널리 활용되고</a:t>
+            </a:r>
+            <a:r>
+              <a:rPr lang="en-US" altLang="ko-KR" sz="1600" dirty="0"/>
+              <a:t>, </a:t>
+            </a:r>
+            <a:r>
+              <a:rPr lang="ko-KR" altLang="en-US" sz="1600" dirty="0"/>
+              <a:t>산업부문에서는 철강 생산에 필수적인 원료로 사용된다</a:t>
+            </a:r>
+            <a:r>
+              <a:rPr lang="en-US" altLang="ko-KR" sz="1600" dirty="0"/>
+              <a:t>.</a:t>
+            </a:r>
+          </a:p>
+          <a:p>
+            <a:pPr marL="1292225" lvl="2" indent="-285750">
+              <a:lnSpc>
+                <a:spcPct val="150000"/>
+              </a:lnSpc>
+              <a:buFont typeface="Wingdings" panose="05000000000000000000" pitchFamily="2" charset="2"/>
+              <a:buChar char="Ø"/>
+            </a:pPr>
+            <a:r>
+              <a:rPr lang="ko-KR" altLang="en-US" sz="1600" dirty="0"/>
+              <a:t>역청탄 중에서도 </a:t>
+            </a:r>
+            <a:r>
+              <a:rPr lang="ko-KR" altLang="en-US" sz="1600" dirty="0" err="1"/>
+              <a:t>코킹탄은</a:t>
+            </a:r>
+            <a:r>
+              <a:rPr lang="ko-KR" altLang="en-US" sz="1600" dirty="0"/>
+              <a:t> 고온 처리 시 휘발분이 제거되고 탄화가 진행되며</a:t>
+            </a:r>
+            <a:r>
+              <a:rPr lang="en-US" altLang="ko-KR" sz="1600" dirty="0"/>
+              <a:t>, </a:t>
+            </a:r>
+            <a:r>
+              <a:rPr lang="ko-KR" altLang="en-US" sz="1600" dirty="0"/>
+              <a:t>금속 제조에 사용되는 코크스로 전환된다</a:t>
+            </a:r>
+            <a:r>
+              <a:rPr lang="en-US" altLang="ko-KR" sz="1600" dirty="0"/>
+              <a:t>.</a:t>
+            </a:r>
+          </a:p>
+          <a:p>
+            <a:pPr marL="1292225" lvl="2" indent="-285750">
+              <a:lnSpc>
+                <a:spcPct val="150000"/>
+              </a:lnSpc>
+              <a:buFont typeface="Wingdings" panose="05000000000000000000" pitchFamily="2" charset="2"/>
+              <a:buChar char="Ø"/>
+            </a:pPr>
+            <a:r>
+              <a:rPr lang="ko-KR" altLang="en-US" sz="1600" dirty="0"/>
+              <a:t>이 코크스는 용광로에서 철광석을 환원시키고 고온을 유지하는 데 핵심적 역할을 하고</a:t>
+            </a:r>
+            <a:r>
+              <a:rPr lang="en-US" altLang="ko-KR" sz="1600" dirty="0"/>
+              <a:t>, </a:t>
+            </a:r>
+            <a:r>
+              <a:rPr lang="ko-KR" altLang="en-US" sz="1600" dirty="0"/>
+              <a:t>제철 공정에서 필수적인 소재이다</a:t>
+            </a:r>
+            <a:r>
+              <a:rPr lang="en-US" altLang="ko-KR" sz="1600" dirty="0"/>
+              <a:t>.</a:t>
+            </a:r>
+          </a:p>
+          <a:p>
+            <a:pPr marL="377825" indent="-285750">
+              <a:lnSpc>
+                <a:spcPct val="150000"/>
+              </a:lnSpc>
+              <a:buFont typeface="Arial" panose="020B0604020202020204" pitchFamily="34" charset="0"/>
+              <a:buChar char="•"/>
+            </a:pPr>
+            <a:endParaRPr lang="en-US" altLang="ko-KR" sz="1600" dirty="0"/>
+          </a:p>
+        </p:txBody>
+      </p:sp>
+    </p:spTree>
+    <p:extLst>
+      <p:ext uri="{BB962C8B-B14F-4D97-AF65-F5344CB8AC3E}">
+        <p14:creationId xmlns:p14="http://schemas.microsoft.com/office/powerpoint/2010/main" val="3531022483"/>
+      </p:ext>
+    </p:extLst>
+  </p:cSld>
+  <p:clrMapOvr>
+    <a:masterClrMapping/>
+  </p:clrMapOvr>
+</p:sld>
+</file>
+
+<file path=ppt/slides/slide14.xml><?xml version="1.0" encoding="utf-8"?>
 <p:sld xmlns:a="http://schemas.openxmlformats.org/drawingml/2006/main" xmlns:r="http://schemas.openxmlformats.org/officeDocument/2006/relationships" xmlns:p="http://schemas.openxmlformats.org/presentationml/2006/main">
   <p:cSld>
     <p:spTree>
@@ -8720,7 +9006,7 @@
           <a:p>
             <a:fld id="{109C872D-39A9-4065-8BF3-6A613116E2A1}" type="slidenum">
               <a:rPr lang="ko-KR" altLang="en-US" smtClean="0"/>
-              <a:t>13</a:t>
+              <a:t>14</a:t>
             </a:fld>
             <a:endParaRPr lang="ko-KR" altLang="en-US"/>
           </a:p>
@@ -8732,6 +9018,363 @@
             <a:extLst>
               <a:ext uri="{FF2B5EF4-FFF2-40B4-BE49-F238E27FC236}">
                 <a16:creationId xmlns:a16="http://schemas.microsoft.com/office/drawing/2014/main" id="{9BDCA5A2-149B-8670-3C3C-C1CBBFDD1FB2}"/>
+              </a:ext>
+            </a:extLst>
+          </p:cNvPr>
+          <p:cNvSpPr txBox="1"/>
+          <p:nvPr/>
+        </p:nvSpPr>
+        <p:spPr>
+          <a:xfrm>
+            <a:off x="288790" y="958844"/>
+            <a:ext cx="11118453" cy="4107343"/>
+          </a:xfrm>
+          <a:prstGeom prst="rect">
+            <a:avLst/>
+          </a:prstGeom>
+          <a:noFill/>
+        </p:spPr>
+        <p:txBody>
+          <a:bodyPr wrap="square" rtlCol="0" anchor="t">
+            <a:spAutoFit/>
+          </a:bodyPr>
+          <a:lstStyle/>
+          <a:p>
+            <a:pPr marL="377825" indent="-285750">
+              <a:lnSpc>
+                <a:spcPct val="150000"/>
+              </a:lnSpc>
+              <a:buFont typeface="Arial" panose="020B0604020202020204" pitchFamily="34" charset="0"/>
+              <a:buChar char="•"/>
+            </a:pPr>
+            <a:r>
+              <a:rPr lang="ko-KR" altLang="en-US" sz="1600" dirty="0"/>
+              <a:t>역청탄은 미국</a:t>
+            </a:r>
+            <a:r>
+              <a:rPr lang="en-US" altLang="ko-KR" sz="1600" dirty="0"/>
+              <a:t>, </a:t>
+            </a:r>
+            <a:r>
+              <a:rPr lang="ko-KR" altLang="en-US" sz="1600" dirty="0"/>
+              <a:t>중국</a:t>
+            </a:r>
+            <a:r>
+              <a:rPr lang="en-US" altLang="ko-KR" sz="1600" dirty="0"/>
+              <a:t>, </a:t>
+            </a:r>
+            <a:r>
+              <a:rPr lang="ko-KR" altLang="en-US" sz="1600" dirty="0"/>
+              <a:t>러시아</a:t>
+            </a:r>
+            <a:r>
+              <a:rPr lang="en-US" altLang="ko-KR" sz="1600" dirty="0"/>
+              <a:t>, </a:t>
+            </a:r>
+            <a:r>
+              <a:rPr lang="ko-KR" altLang="en-US" sz="1600" dirty="0"/>
+              <a:t>인도</a:t>
+            </a:r>
+            <a:r>
+              <a:rPr lang="en-US" altLang="ko-KR" sz="1600" dirty="0"/>
+              <a:t>, </a:t>
+            </a:r>
+            <a:r>
+              <a:rPr lang="ko-KR" altLang="en-US" sz="1600" dirty="0"/>
+              <a:t>호주</a:t>
+            </a:r>
+            <a:r>
+              <a:rPr lang="en-US" altLang="ko-KR" sz="1600" dirty="0"/>
+              <a:t> </a:t>
+            </a:r>
+            <a:r>
+              <a:rPr lang="ko-KR" altLang="en-US" sz="1600" dirty="0"/>
+              <a:t>등지에서 대규모로 채굴되고 있고</a:t>
+            </a:r>
+            <a:r>
+              <a:rPr lang="en-US" altLang="ko-KR" sz="1600" dirty="0"/>
+              <a:t>, </a:t>
+            </a:r>
+            <a:r>
+              <a:rPr lang="ko-KR" altLang="en-US" sz="1600" dirty="0"/>
+              <a:t>국제 석탄시장에서 가장 활발히 거래되는 품종 중 하나이다</a:t>
+            </a:r>
+            <a:r>
+              <a:rPr lang="en-US" altLang="ko-KR" sz="1600" dirty="0"/>
+              <a:t>.</a:t>
+            </a:r>
+          </a:p>
+          <a:p>
+            <a:pPr marL="835025" lvl="1" indent="-285750">
+              <a:lnSpc>
+                <a:spcPct val="150000"/>
+              </a:lnSpc>
+              <a:buFont typeface="Wingdings" panose="05000000000000000000" pitchFamily="2" charset="2"/>
+              <a:buChar char="ü"/>
+            </a:pPr>
+            <a:r>
+              <a:rPr lang="ko-KR" altLang="en-US" sz="1600" spc="-100" dirty="0"/>
+              <a:t>특히 고급 </a:t>
+            </a:r>
+            <a:r>
+              <a:rPr lang="ko-KR" altLang="en-US" sz="1600" spc="-100" dirty="0" err="1"/>
+              <a:t>코킹탄은</a:t>
+            </a:r>
+            <a:r>
+              <a:rPr lang="ko-KR" altLang="en-US" sz="1600" spc="-100" dirty="0"/>
+              <a:t> 품질</a:t>
+            </a:r>
+            <a:r>
+              <a:rPr lang="en-US" altLang="ko-KR" sz="1600" spc="-100" dirty="0"/>
+              <a:t>, </a:t>
+            </a:r>
+            <a:r>
+              <a:rPr lang="ko-KR" altLang="en-US" sz="1600" spc="-100" dirty="0" err="1"/>
+              <a:t>점결력</a:t>
+            </a:r>
+            <a:r>
+              <a:rPr lang="en-US" altLang="ko-KR" sz="1600" spc="-100" dirty="0"/>
+              <a:t>, </a:t>
+            </a:r>
+            <a:r>
+              <a:rPr lang="ko-KR" altLang="en-US" sz="1600" spc="-100" dirty="0"/>
+              <a:t>휘발성 등에 따라 가격이 차별화되어 거래되며</a:t>
+            </a:r>
+            <a:r>
+              <a:rPr lang="en-US" altLang="ko-KR" sz="1600" spc="-100" dirty="0"/>
+              <a:t>, </a:t>
+            </a:r>
+            <a:r>
+              <a:rPr lang="ko-KR" altLang="en-US" sz="1600" spc="-100" dirty="0"/>
+              <a:t>철강수요와 밀접한 연계를 보인다</a:t>
+            </a:r>
+            <a:r>
+              <a:rPr lang="en-US" altLang="ko-KR" sz="1600" spc="-100" dirty="0"/>
+              <a:t>.</a:t>
+            </a:r>
+          </a:p>
+          <a:p>
+            <a:pPr marL="835025" lvl="1" indent="-285750">
+              <a:lnSpc>
+                <a:spcPct val="150000"/>
+              </a:lnSpc>
+              <a:buFont typeface="Wingdings" panose="05000000000000000000" pitchFamily="2" charset="2"/>
+              <a:buChar char="ü"/>
+            </a:pPr>
+            <a:endParaRPr lang="en-US" altLang="ko-KR" sz="1600" spc="-100" dirty="0"/>
+          </a:p>
+          <a:p>
+            <a:pPr marL="377825" indent="-285750">
+              <a:lnSpc>
+                <a:spcPct val="150000"/>
+              </a:lnSpc>
+              <a:buFont typeface="Arial" panose="020B0604020202020204" pitchFamily="34" charset="0"/>
+              <a:buChar char="•"/>
+            </a:pPr>
+            <a:r>
+              <a:rPr lang="ko-KR" altLang="en-US" sz="1600" dirty="0"/>
+              <a:t>환경적 측면에서는 역청탄이 높은 에너지효율을 지닌 반면</a:t>
+            </a:r>
+            <a:r>
+              <a:rPr lang="en-US" altLang="ko-KR" sz="1600" dirty="0"/>
+              <a:t>, </a:t>
+            </a:r>
+            <a:r>
+              <a:rPr lang="ko-KR" altLang="en-US" sz="1600" dirty="0"/>
+              <a:t>황 함량이 상대적으로 높아 연소 시 이산화황 배출이 많아지는 문제가 있다</a:t>
+            </a:r>
+            <a:r>
+              <a:rPr lang="en-US" altLang="ko-KR" sz="1600" dirty="0"/>
+              <a:t>. </a:t>
+            </a:r>
+          </a:p>
+          <a:p>
+            <a:pPr marL="835025" lvl="1" indent="-285750">
+              <a:lnSpc>
+                <a:spcPct val="150000"/>
+              </a:lnSpc>
+              <a:buFont typeface="Wingdings" panose="05000000000000000000" pitchFamily="2" charset="2"/>
+              <a:buChar char="ü"/>
+            </a:pPr>
+            <a:r>
+              <a:rPr lang="ko-KR" altLang="en-US" sz="1600" dirty="0"/>
+              <a:t>이산화황은 산성비의 원인이 되어</a:t>
+            </a:r>
+            <a:r>
+              <a:rPr lang="en-US" altLang="ko-KR" sz="1600" dirty="0"/>
+              <a:t>, </a:t>
+            </a:r>
+            <a:r>
+              <a:rPr lang="ko-KR" altLang="en-US" sz="1600" dirty="0"/>
+              <a:t>환경 규제가 엄격한 국가에서는 황 제거 기술 도입이 필수적이다</a:t>
+            </a:r>
+            <a:r>
+              <a:rPr lang="en-US" altLang="ko-KR" sz="1600" dirty="0"/>
+              <a:t>.</a:t>
+            </a:r>
+          </a:p>
+          <a:p>
+            <a:pPr marL="835025" lvl="1" indent="-285750">
+              <a:lnSpc>
+                <a:spcPct val="150000"/>
+              </a:lnSpc>
+              <a:buFont typeface="Wingdings" panose="05000000000000000000" pitchFamily="2" charset="2"/>
+              <a:buChar char="ü"/>
+            </a:pPr>
+            <a:r>
+              <a:rPr lang="ko-KR" altLang="en-US" sz="1600" dirty="0"/>
+              <a:t>석탄 발전소에서는 질소산화물</a:t>
+            </a:r>
+            <a:r>
+              <a:rPr lang="en-US" altLang="ko-KR" sz="1600" dirty="0"/>
+              <a:t>, </a:t>
+            </a:r>
+            <a:r>
+              <a:rPr lang="ko-KR" altLang="en-US" sz="1600" dirty="0"/>
+              <a:t>미세먼지</a:t>
+            </a:r>
+            <a:r>
+              <a:rPr lang="en-US" altLang="ko-KR" sz="1600" dirty="0"/>
+              <a:t>, </a:t>
+            </a:r>
+            <a:r>
+              <a:rPr lang="ko-KR" altLang="en-US" sz="1600" dirty="0"/>
+              <a:t>수은 등 다양한 유해물질에 대한 규제가 강화되고 있어</a:t>
+            </a:r>
+            <a:r>
+              <a:rPr lang="en-US" altLang="ko-KR" sz="1600" dirty="0"/>
+              <a:t>, </a:t>
+            </a:r>
+            <a:r>
+              <a:rPr lang="ko-KR" altLang="en-US" sz="1600" dirty="0"/>
+              <a:t>역청탄 사용에는 점점 높은 수준의 환경관리 기술이 요구되고 있다</a:t>
+            </a:r>
+            <a:r>
+              <a:rPr lang="en-US" altLang="ko-KR" sz="1600" dirty="0"/>
+              <a:t>.</a:t>
+            </a:r>
+          </a:p>
+          <a:p>
+            <a:pPr marL="835025" lvl="1" indent="-285750">
+              <a:lnSpc>
+                <a:spcPct val="150000"/>
+              </a:lnSpc>
+              <a:buFont typeface="Wingdings" panose="05000000000000000000" pitchFamily="2" charset="2"/>
+              <a:buChar char="ü"/>
+            </a:pPr>
+            <a:endParaRPr lang="en-US" altLang="ko-KR" sz="1600" dirty="0"/>
+          </a:p>
+          <a:p>
+            <a:pPr marL="377825" indent="-285750">
+              <a:lnSpc>
+                <a:spcPct val="150000"/>
+              </a:lnSpc>
+              <a:buFont typeface="Arial" panose="020B0604020202020204" pitchFamily="34" charset="0"/>
+              <a:buChar char="•"/>
+            </a:pPr>
+            <a:endParaRPr lang="en-US" altLang="ko-KR" sz="1600" dirty="0"/>
+          </a:p>
+        </p:txBody>
+      </p:sp>
+    </p:spTree>
+    <p:extLst>
+      <p:ext uri="{BB962C8B-B14F-4D97-AF65-F5344CB8AC3E}">
+        <p14:creationId xmlns:p14="http://schemas.microsoft.com/office/powerpoint/2010/main" val="1830095693"/>
+      </p:ext>
+    </p:extLst>
+  </p:cSld>
+  <p:clrMapOvr>
+    <a:masterClrMapping/>
+  </p:clrMapOvr>
+</p:sld>
+</file>
+
+<file path=ppt/slides/slide15.xml><?xml version="1.0" encoding="utf-8"?>
+<p:sld xmlns:a="http://schemas.openxmlformats.org/drawingml/2006/main" xmlns:r="http://schemas.openxmlformats.org/officeDocument/2006/relationships" xmlns:p="http://schemas.openxmlformats.org/presentationml/2006/main">
+  <p:cSld>
+    <p:spTree>
+      <p:nvGrpSpPr>
+        <p:cNvPr id="1" name="">
+          <a:extLst>
+            <a:ext uri="{FF2B5EF4-FFF2-40B4-BE49-F238E27FC236}">
+              <a16:creationId xmlns:a16="http://schemas.microsoft.com/office/drawing/2014/main" id="{3278937D-DC6D-C78B-3821-7CDC71687ACA}"/>
+            </a:ext>
+          </a:extLst>
+        </p:cNvPr>
+        <p:cNvGrpSpPr/>
+        <p:nvPr/>
+      </p:nvGrpSpPr>
+      <p:grpSpPr>
+        <a:xfrm>
+          <a:off x="0" y="0"/>
+          <a:ext cx="0" cy="0"/>
+          <a:chOff x="0" y="0"/>
+          <a:chExt cx="0" cy="0"/>
+        </a:xfrm>
+      </p:grpSpPr>
+      <p:sp>
+        <p:nvSpPr>
+          <p:cNvPr id="2" name="제목 1">
+            <a:extLst>
+              <a:ext uri="{FF2B5EF4-FFF2-40B4-BE49-F238E27FC236}">
+                <a16:creationId xmlns:a16="http://schemas.microsoft.com/office/drawing/2014/main" id="{778A4425-4E04-35FE-384C-7D546C62D0A3}"/>
+              </a:ext>
+            </a:extLst>
+          </p:cNvPr>
+          <p:cNvSpPr>
+            <a:spLocks noGrp="1"/>
+          </p:cNvSpPr>
+          <p:nvPr>
+            <p:ph type="title"/>
+          </p:nvPr>
+        </p:nvSpPr>
+        <p:spPr/>
+        <p:txBody>
+          <a:bodyPr/>
+          <a:lstStyle/>
+          <a:p>
+            <a:r>
+              <a:rPr lang="ko-KR" altLang="en-US" dirty="0"/>
+              <a:t>석탄의 분류와 특징</a:t>
+            </a:r>
+          </a:p>
+        </p:txBody>
+      </p:sp>
+      <p:sp>
+        <p:nvSpPr>
+          <p:cNvPr id="4" name="슬라이드 번호 개체 틀 3">
+            <a:extLst>
+              <a:ext uri="{FF2B5EF4-FFF2-40B4-BE49-F238E27FC236}">
+                <a16:creationId xmlns:a16="http://schemas.microsoft.com/office/drawing/2014/main" id="{F87EF550-A3FA-C004-157B-ED378F65B8A1}"/>
+              </a:ext>
+            </a:extLst>
+          </p:cNvPr>
+          <p:cNvSpPr>
+            <a:spLocks noGrp="1"/>
+          </p:cNvSpPr>
+          <p:nvPr>
+            <p:ph type="sldNum" sz="quarter" idx="12"/>
+          </p:nvPr>
+        </p:nvSpPr>
+        <p:spPr/>
+        <p:txBody>
+          <a:bodyPr/>
+          <a:lstStyle/>
+          <a:p>
+            <a:fld id="{109C872D-39A9-4065-8BF3-6A613116E2A1}" type="slidenum">
+              <a:rPr lang="ko-KR" altLang="en-US" smtClean="0"/>
+              <a:t>15</a:t>
+            </a:fld>
+            <a:endParaRPr lang="ko-KR" altLang="en-US"/>
+          </a:p>
+        </p:txBody>
+      </p:sp>
+      <p:sp>
+        <p:nvSpPr>
+          <p:cNvPr id="3" name="TextBox 2">
+            <a:extLst>
+              <a:ext uri="{FF2B5EF4-FFF2-40B4-BE49-F238E27FC236}">
+                <a16:creationId xmlns:a16="http://schemas.microsoft.com/office/drawing/2014/main" id="{3EA17002-61F6-AA30-7FCF-7255A154CE00}"/>
               </a:ext>
             </a:extLst>
           </p:cNvPr>
@@ -8754,174 +9397,6 @@
           </a:bodyPr>
           <a:lstStyle/>
           <a:p>
-            <a:pPr marL="377825" indent="-285750">
-              <a:lnSpc>
-                <a:spcPct val="150000"/>
-              </a:lnSpc>
-              <a:buFont typeface="Arial" panose="020B0604020202020204" pitchFamily="34" charset="0"/>
-              <a:buChar char="•"/>
-            </a:pPr>
-            <a:r>
-              <a:rPr lang="ko-KR" altLang="en-US" sz="1600" dirty="0" err="1"/>
-              <a:t>아역청탄은</a:t>
-            </a:r>
-            <a:r>
-              <a:rPr lang="ko-KR" altLang="en-US" sz="1600" dirty="0"/>
-              <a:t> 미국</a:t>
-            </a:r>
-            <a:r>
-              <a:rPr lang="en-US" altLang="ko-KR" sz="1600" dirty="0"/>
-              <a:t>, </a:t>
-            </a:r>
-            <a:r>
-              <a:rPr lang="ko-KR" altLang="en-US" sz="1600" dirty="0"/>
-              <a:t>인도네시아</a:t>
-            </a:r>
-            <a:r>
-              <a:rPr lang="en-US" altLang="ko-KR" sz="1600" dirty="0"/>
-              <a:t>, </a:t>
-            </a:r>
-            <a:r>
-              <a:rPr lang="ko-KR" altLang="en-US" sz="1600" dirty="0"/>
-              <a:t>러시아</a:t>
-            </a:r>
-            <a:r>
-              <a:rPr lang="en-US" altLang="ko-KR" sz="1600" dirty="0"/>
-              <a:t>, </a:t>
-            </a:r>
-            <a:r>
-              <a:rPr lang="ko-KR" altLang="en-US" sz="1600" dirty="0"/>
-              <a:t>중국 등 광범위하게 매장되어 있다</a:t>
-            </a:r>
-            <a:r>
-              <a:rPr lang="en-US" altLang="ko-KR" sz="1600" dirty="0"/>
-              <a:t>.</a:t>
-            </a:r>
-          </a:p>
-          <a:p>
-            <a:pPr marL="835025" lvl="1" indent="-285750">
-              <a:lnSpc>
-                <a:spcPct val="150000"/>
-              </a:lnSpc>
-              <a:buFont typeface="Wingdings" panose="05000000000000000000" pitchFamily="2" charset="2"/>
-              <a:buChar char="ü"/>
-            </a:pPr>
-            <a:r>
-              <a:rPr lang="ko-KR" altLang="en-US" sz="1600" dirty="0"/>
-              <a:t>미국 </a:t>
-            </a:r>
-            <a:r>
-              <a:rPr lang="ko-KR" altLang="en-US" sz="1600" dirty="0" err="1"/>
-              <a:t>와이오밍</a:t>
-            </a:r>
-            <a:r>
-              <a:rPr lang="ko-KR" altLang="en-US" sz="1600" dirty="0"/>
-              <a:t> 주의 </a:t>
-            </a:r>
-            <a:r>
-              <a:rPr lang="ko-KR" altLang="en-US" sz="1600" dirty="0" err="1"/>
-              <a:t>파우더리버</a:t>
-            </a:r>
-            <a:r>
-              <a:rPr lang="ko-KR" altLang="en-US" sz="1600" dirty="0"/>
-              <a:t> 분지는 세계에서 가장 큰 </a:t>
-            </a:r>
-            <a:r>
-              <a:rPr lang="ko-KR" altLang="en-US" sz="1600" dirty="0" err="1"/>
-              <a:t>아역청탄</a:t>
-            </a:r>
-            <a:r>
-              <a:rPr lang="ko-KR" altLang="en-US" sz="1600" dirty="0"/>
-              <a:t> 생산지 중 하나이다</a:t>
-            </a:r>
-            <a:r>
-              <a:rPr lang="en-US" altLang="ko-KR" sz="1600" dirty="0"/>
-              <a:t>.</a:t>
-            </a:r>
-          </a:p>
-          <a:p>
-            <a:pPr marL="835025" lvl="1" indent="-285750">
-              <a:lnSpc>
-                <a:spcPct val="150000"/>
-              </a:lnSpc>
-              <a:buFont typeface="Wingdings" panose="05000000000000000000" pitchFamily="2" charset="2"/>
-              <a:buChar char="ü"/>
-            </a:pPr>
-            <a:r>
-              <a:rPr lang="ko-KR" altLang="en-US" sz="1600" dirty="0"/>
-              <a:t>인도네시아는 동남아시아 최대의 석탄 수출국으로</a:t>
-            </a:r>
-            <a:r>
-              <a:rPr lang="en-US" altLang="ko-KR" sz="1600" dirty="0"/>
-              <a:t>, </a:t>
-            </a:r>
-            <a:r>
-              <a:rPr lang="ko-KR" altLang="en-US" sz="1600" dirty="0" err="1"/>
-              <a:t>아역청탄을</a:t>
-            </a:r>
-            <a:r>
-              <a:rPr lang="ko-KR" altLang="en-US" sz="1600" dirty="0"/>
-              <a:t> 중심으로 아시아 시장에 대한 공급을 지속적으로 확대하고 있다</a:t>
-            </a:r>
-            <a:r>
-              <a:rPr lang="en-US" altLang="ko-KR" sz="1600" dirty="0"/>
-              <a:t>.</a:t>
-            </a:r>
-          </a:p>
-          <a:p>
-            <a:pPr marL="377825" indent="-285750">
-              <a:lnSpc>
-                <a:spcPct val="150000"/>
-              </a:lnSpc>
-              <a:buFont typeface="Arial" panose="020B0604020202020204" pitchFamily="34" charset="0"/>
-              <a:buChar char="•"/>
-            </a:pPr>
-            <a:r>
-              <a:rPr lang="ko-KR" altLang="en-US" sz="1600" dirty="0"/>
-              <a:t>환경적 측면에서 </a:t>
-            </a:r>
-            <a:r>
-              <a:rPr lang="ko-KR" altLang="en-US" sz="1600" dirty="0" err="1"/>
-              <a:t>아역청탄이</a:t>
-            </a:r>
-            <a:r>
-              <a:rPr lang="ko-KR" altLang="en-US" sz="1600" dirty="0"/>
-              <a:t> 갈탄보다 온실가스 및 대기오염물질 배출량이 적지만</a:t>
-            </a:r>
-            <a:r>
-              <a:rPr lang="en-US" altLang="ko-KR" sz="1600" dirty="0"/>
-              <a:t>, </a:t>
-            </a:r>
-            <a:r>
-              <a:rPr lang="ko-KR" altLang="en-US" sz="1600" dirty="0"/>
-              <a:t>여전히 재생에너지 및 천연가스에 비해 탄소배출량이 높아 기후정책에 의해 제한되는 추세이다</a:t>
-            </a:r>
-            <a:r>
-              <a:rPr lang="en-US" altLang="ko-KR" sz="1600" dirty="0"/>
-              <a:t>.</a:t>
-            </a:r>
-          </a:p>
-          <a:p>
-            <a:pPr marL="377825" indent="-285750">
-              <a:lnSpc>
-                <a:spcPct val="150000"/>
-              </a:lnSpc>
-              <a:buFont typeface="Arial" panose="020B0604020202020204" pitchFamily="34" charset="0"/>
-              <a:buChar char="•"/>
-            </a:pPr>
-            <a:endParaRPr lang="en-US" altLang="ko-KR" sz="1600" dirty="0"/>
-          </a:p>
-          <a:p>
-            <a:pPr marL="377825" indent="-285750">
-              <a:lnSpc>
-                <a:spcPct val="150000"/>
-              </a:lnSpc>
-              <a:buFont typeface="Arial" panose="020B0604020202020204" pitchFamily="34" charset="0"/>
-              <a:buChar char="•"/>
-            </a:pPr>
-            <a:endParaRPr lang="en-US" altLang="ko-KR" sz="1600" dirty="0"/>
-          </a:p>
-          <a:p>
             <a:pPr marL="92075">
               <a:lnSpc>
                 <a:spcPct val="150000"/>
@@ -8935,7 +9410,7 @@
                 <a:latin typeface="HY헤드라인M" panose="02030600000101010101" pitchFamily="18" charset="-127"/>
                 <a:ea typeface="HY헤드라인M" panose="02030600000101010101" pitchFamily="18" charset="-127"/>
               </a:rPr>
-              <a:t>역청탄</a:t>
+              <a:t>무연탄</a:t>
             </a:r>
             <a:endParaRPr lang="en-US" altLang="ko-KR" sz="1600" u="sng" dirty="0">
               <a:ln w="3175">
@@ -8955,11 +9430,7 @@
             </a:pPr>
             <a:r>
               <a:rPr lang="ko-KR" altLang="en-US" sz="1600" dirty="0"/>
-              <a:t>전세계적으로 가장 널리 사용되는 중</a:t>
-            </a:r>
-            <a:r>
-              <a:rPr lang="en-US" altLang="ko-KR" sz="1600" dirty="0"/>
-              <a:t>·</a:t>
+              <a:t>석탄화 정도가 가장 진전된 </a:t>
             </a:r>
             <a:r>
               <a:rPr lang="ko-KR" altLang="en-US" sz="1600" dirty="0" err="1"/>
@@ -8967,7 +9438,39 @@
             </a:r>
             <a:r>
               <a:rPr lang="ko-KR" altLang="en-US" sz="1600" dirty="0"/>
-              <a:t> 석탄이다</a:t>
+              <a:t> 석탄으로</a:t>
+            </a:r>
+            <a:r>
+              <a:rPr lang="en-US" altLang="ko-KR" sz="1600" dirty="0"/>
+              <a:t>, </a:t>
+            </a:r>
+            <a:r>
+              <a:rPr lang="ko-KR" altLang="en-US" sz="1600" dirty="0"/>
+              <a:t>탄소 함량이 </a:t>
+            </a:r>
+            <a:r>
+              <a:rPr lang="en-US" altLang="ko-KR" sz="1600" dirty="0"/>
+              <a:t>86% </a:t>
+            </a:r>
+            <a:r>
+              <a:rPr lang="ko-KR" altLang="en-US" sz="1600" dirty="0"/>
+              <a:t>이상에 달하며</a:t>
+            </a:r>
+            <a:r>
+              <a:rPr lang="en-US" altLang="ko-KR" sz="1600" dirty="0"/>
+              <a:t>, </a:t>
+            </a:r>
+            <a:r>
+              <a:rPr lang="ko-KR" altLang="en-US" sz="1600" dirty="0"/>
+              <a:t>수분과 휘발성분은 매우 낮은 반면</a:t>
+            </a:r>
+            <a:r>
+              <a:rPr lang="en-US" altLang="ko-KR" sz="1600" dirty="0"/>
+              <a:t>, </a:t>
+            </a:r>
+            <a:r>
+              <a:rPr lang="ko-KR" altLang="en-US" sz="1600" dirty="0"/>
+              <a:t>고체 탄소의 밀도는 가장 높은 수준을 보인다</a:t>
             </a:r>
             <a:r>
               <a:rPr lang="en-US" altLang="ko-KR" sz="1600" dirty="0"/>
@@ -8984,31 +9487,97 @@
             </a:pPr>
             <a:r>
               <a:rPr lang="ko-KR" altLang="en-US" sz="1600" dirty="0"/>
-              <a:t>석탄화 정도가 갈탄이나 </a:t>
+              <a:t>이러한 특성은 무연탄을 다른 석탄과 </a:t>
             </a:r>
             <a:r>
               <a:rPr lang="ko-KR" altLang="en-US" sz="1600" dirty="0" err="1"/>
-              <a:t>아역청탄보다</a:t>
-            </a:r>
-            <a:r>
-              <a:rPr lang="ko-KR" altLang="en-US" sz="1600" dirty="0"/>
-              <a:t> 훨씬 높고</a:t>
-            </a:r>
-            <a:r>
-              <a:rPr lang="en-US" altLang="ko-KR" sz="1600" dirty="0"/>
-              <a:t>, </a:t>
-            </a:r>
-            <a:r>
-              <a:rPr lang="ko-KR" altLang="en-US" sz="1600" dirty="0"/>
-              <a:t>탄소 함량은 </a:t>
-            </a:r>
-            <a:r>
-              <a:rPr lang="en-US" altLang="ko-KR" sz="1600" dirty="0"/>
-              <a:t>45~86%</a:t>
-            </a:r>
-            <a:r>
-              <a:rPr lang="ko-KR" altLang="en-US" sz="1600" dirty="0"/>
-              <a:t>에 이른다</a:t>
+              <a:t>구분짓는</a:t>
+            </a:r>
+            <a:r>
+              <a:rPr lang="ko-KR" altLang="en-US" sz="1600" dirty="0"/>
+              <a:t> 핵심 요소로</a:t>
+            </a:r>
+            <a:r>
+              <a:rPr lang="en-US" altLang="ko-KR" sz="1600" dirty="0"/>
+              <a:t>, </a:t>
+            </a:r>
+            <a:r>
+              <a:rPr lang="ko-KR" altLang="en-US" sz="1600" dirty="0"/>
+              <a:t>구조는 단단하고 광택이 나는 흑색이다</a:t>
+            </a:r>
+            <a:r>
+              <a:rPr lang="en-US" altLang="ko-KR" sz="1600" dirty="0"/>
+              <a:t>.</a:t>
+            </a:r>
+          </a:p>
+          <a:p>
+            <a:pPr marL="1292225" lvl="2" indent="-285750">
+              <a:lnSpc>
+                <a:spcPct val="150000"/>
+              </a:lnSpc>
+              <a:buFont typeface="Wingdings" panose="05000000000000000000" pitchFamily="2" charset="2"/>
+              <a:buChar char="Ø"/>
+            </a:pPr>
+            <a:r>
+              <a:rPr lang="ko-KR" altLang="en-US" sz="1600" dirty="0"/>
+              <a:t>연소 시 연기가 거의 없고</a:t>
+            </a:r>
+            <a:r>
+              <a:rPr lang="en-US" altLang="ko-KR" sz="1600" dirty="0"/>
+              <a:t>, </a:t>
+            </a:r>
+            <a:r>
+              <a:rPr lang="ko-KR" altLang="en-US" sz="1600" dirty="0"/>
+              <a:t>불꽃도 적어 </a:t>
+            </a:r>
+            <a:r>
+              <a:rPr lang="en-US" altLang="ko-KR" sz="1600" dirty="0"/>
+              <a:t>‘</a:t>
+            </a:r>
+            <a:r>
+              <a:rPr lang="ko-KR" altLang="en-US" sz="1600" dirty="0"/>
+              <a:t>청정 석탄</a:t>
+            </a:r>
+            <a:r>
+              <a:rPr lang="en-US" altLang="ko-KR" sz="1600" dirty="0"/>
+              <a:t>’</a:t>
+            </a:r>
+            <a:r>
+              <a:rPr lang="ko-KR" altLang="en-US" sz="1600" dirty="0"/>
+              <a:t> 이라고 불리기도 한다</a:t>
+            </a:r>
+            <a:r>
+              <a:rPr lang="en-US" altLang="ko-KR" sz="1600" dirty="0"/>
+              <a:t>.</a:t>
+            </a:r>
+          </a:p>
+          <a:p>
+            <a:pPr marL="377825" indent="-285750">
+              <a:lnSpc>
+                <a:spcPct val="150000"/>
+              </a:lnSpc>
+              <a:buFont typeface="Arial" panose="020B0604020202020204" pitchFamily="34" charset="0"/>
+              <a:buChar char="•"/>
+            </a:pPr>
+            <a:r>
+              <a:rPr lang="ko-KR" altLang="en-US" sz="1600" dirty="0"/>
+              <a:t>무연탄의 발열량은 </a:t>
+            </a:r>
+            <a:r>
+              <a:rPr lang="en-US" altLang="ko-KR" sz="1600" dirty="0"/>
+              <a:t>30~35MJ/kg</a:t>
+            </a:r>
+            <a:r>
+              <a:rPr lang="ko-KR" altLang="en-US" sz="1600" dirty="0"/>
+              <a:t> 이고</a:t>
+            </a:r>
+            <a:r>
+              <a:rPr lang="en-US" altLang="ko-KR" sz="1600" dirty="0"/>
+              <a:t>, </a:t>
+            </a:r>
+            <a:r>
+              <a:rPr lang="ko-KR" altLang="en-US" sz="1600" dirty="0"/>
+              <a:t>높은 에너지 밀도와 안정된 연소 특성을 보인다</a:t>
             </a:r>
             <a:r>
               <a:rPr lang="en-US" altLang="ko-KR" sz="1600" dirty="0"/>
@@ -9025,36 +9594,42 @@
             </a:pPr>
             <a:r>
               <a:rPr lang="ko-KR" altLang="en-US" sz="1600" dirty="0"/>
-              <a:t>수분과 </a:t>
-            </a:r>
-            <a:r>
-              <a:rPr lang="ko-KR" altLang="en-US" sz="1600" dirty="0" err="1"/>
-              <a:t>휘발분</a:t>
-            </a:r>
-            <a:r>
-              <a:rPr lang="ko-KR" altLang="en-US" sz="1600" dirty="0"/>
-              <a:t> 함량이 낮아 </a:t>
-            </a:r>
-            <a:r>
-              <a:rPr lang="ko-KR" altLang="en-US" sz="1600" dirty="0" err="1"/>
-              <a:t>연료로서의</a:t>
-            </a:r>
-            <a:r>
-              <a:rPr lang="ko-KR" altLang="en-US" sz="1600" dirty="0"/>
-              <a:t> 품질이 우수하고</a:t>
-            </a:r>
-            <a:r>
-              <a:rPr lang="en-US" altLang="ko-KR" sz="1600" dirty="0"/>
-              <a:t>, </a:t>
-            </a:r>
-            <a:r>
-              <a:rPr lang="ko-KR" altLang="en-US" sz="1600" dirty="0"/>
-              <a:t>에너지 밀도가 높다</a:t>
+              <a:t>이러한 특성으로 가정용 연탄이나 산업용 열원으로 사용되는 경우가 많다</a:t>
             </a:r>
             <a:r>
               <a:rPr lang="en-US" altLang="ko-KR" sz="1600" dirty="0"/>
               <a:t>.</a:t>
             </a:r>
+          </a:p>
+          <a:p>
+            <a:pPr marL="377825" indent="-285750">
+              <a:lnSpc>
+                <a:spcPct val="150000"/>
+              </a:lnSpc>
+              <a:buFont typeface="Arial" panose="020B0604020202020204" pitchFamily="34" charset="0"/>
+              <a:buChar char="•"/>
+            </a:pPr>
+            <a:r>
+              <a:rPr lang="ko-KR" altLang="en-US" sz="1600" dirty="0"/>
+              <a:t>주요 생산국으로는 중국</a:t>
+            </a:r>
+            <a:r>
+              <a:rPr lang="en-US" altLang="ko-KR" sz="1600" dirty="0"/>
+              <a:t>, </a:t>
+            </a:r>
+            <a:r>
+              <a:rPr lang="ko-KR" altLang="en-US" sz="1600" dirty="0"/>
+              <a:t>러시아</a:t>
+            </a:r>
+            <a:r>
+              <a:rPr lang="en-US" altLang="ko-KR" sz="1600" dirty="0"/>
+              <a:t>, </a:t>
+            </a:r>
+            <a:r>
+              <a:rPr lang="ko-KR" altLang="en-US" sz="1600" dirty="0"/>
+              <a:t>우크라이나 등이 있다</a:t>
+            </a:r>
+            <a:endParaRPr lang="en-US" altLang="ko-KR" sz="1600" dirty="0"/>
           </a:p>
           <a:p>
             <a:pPr marL="835025" lvl="1" indent="-285750">
@@ -9066,15 +9641,115 @@
             </a:pPr>
             <a:r>
               <a:rPr lang="ko-KR" altLang="en-US" sz="1600" dirty="0"/>
-              <a:t>광택이 나는 흑색이고</a:t>
-            </a:r>
-            <a:r>
-              <a:rPr lang="en-US" altLang="ko-KR" sz="1600" dirty="0"/>
-              <a:t>, </a:t>
-            </a:r>
-            <a:r>
-              <a:rPr lang="ko-KR" altLang="en-US" sz="1600" dirty="0"/>
-              <a:t>구조는 단단하고 치밀하여 기계적 강도가 높다</a:t>
+              <a:t>무연탄은 지질학적으로 희소성이 높은 자원이고</a:t>
+            </a:r>
+            <a:r>
+              <a:rPr lang="en-US" altLang="ko-KR" sz="1600" dirty="0"/>
+              <a:t>, </a:t>
+            </a:r>
+            <a:r>
+              <a:rPr lang="ko-KR" altLang="en-US" sz="1600" dirty="0"/>
+              <a:t>전 세계 석탄 매장량 중 차지하는 비중은 </a:t>
+            </a:r>
+            <a:r>
+              <a:rPr lang="en-US" altLang="ko-KR" sz="1600" dirty="0"/>
+              <a:t>1%</a:t>
+            </a:r>
+            <a:r>
+              <a:rPr lang="ko-KR" altLang="en-US" sz="1600" dirty="0"/>
+              <a:t>에 불과하다</a:t>
+            </a:r>
+            <a:r>
+              <a:rPr lang="en-US" altLang="ko-KR" sz="1600" dirty="0"/>
+              <a:t>.</a:t>
+            </a:r>
+          </a:p>
+          <a:p>
+            <a:pPr marL="835025" lvl="1" indent="-285750">
+              <a:lnSpc>
+                <a:spcPct val="150000"/>
+              </a:lnSpc>
+              <a:buFont typeface="Wingdings" panose="05000000000000000000" pitchFamily="2" charset="2"/>
+              <a:buChar char="ü"/>
+            </a:pPr>
+            <a:r>
+              <a:rPr lang="ko-KR" altLang="en-US" sz="1600" dirty="0"/>
+              <a:t>대한민국도 한때 무연탄 생산국이었고</a:t>
+            </a:r>
+            <a:r>
+              <a:rPr lang="en-US" altLang="ko-KR" sz="1600" dirty="0"/>
+              <a:t>, 20</a:t>
+            </a:r>
+            <a:r>
+              <a:rPr lang="ko-KR" altLang="en-US" sz="1600" dirty="0"/>
+              <a:t>세기 중반까지 가정용 난방에 널리 사용된 바 있다</a:t>
+            </a:r>
+            <a:r>
+              <a:rPr lang="en-US" altLang="ko-KR" sz="1600" dirty="0"/>
+              <a:t>.</a:t>
+            </a:r>
+          </a:p>
+          <a:p>
+            <a:pPr marL="377825" indent="-285750">
+              <a:lnSpc>
+                <a:spcPct val="150000"/>
+              </a:lnSpc>
+              <a:buFont typeface="Arial" panose="020B0604020202020204" pitchFamily="34" charset="0"/>
+              <a:buChar char="•"/>
+            </a:pPr>
+            <a:r>
+              <a:rPr lang="ko-KR" altLang="en-US" sz="1600" dirty="0"/>
+              <a:t>무연탄은 고정 탄소 함량이 높고 불완전 연소가 적어 이산화탄소 및 오염물질 배출이 비교적 적다</a:t>
+            </a:r>
+            <a:r>
+              <a:rPr lang="en-US" altLang="ko-KR" sz="1600" dirty="0"/>
+              <a:t>.</a:t>
+            </a:r>
+          </a:p>
+          <a:p>
+            <a:pPr marL="835025" lvl="1" indent="-285750">
+              <a:lnSpc>
+                <a:spcPct val="150000"/>
+              </a:lnSpc>
+              <a:buFont typeface="Wingdings" panose="05000000000000000000" pitchFamily="2" charset="2"/>
+              <a:buChar char="ü"/>
+            </a:pPr>
+            <a:r>
+              <a:rPr lang="ko-KR" altLang="en-US" sz="1600" dirty="0"/>
+              <a:t>석탄 중 가장 높은 탄소 함량과 낮은 휘발분을 가져 연소 효율이 높고 오염물질 배출이 상대적으로 적다</a:t>
+            </a:r>
+            <a:r>
+              <a:rPr lang="en-US" altLang="ko-KR" sz="1600" dirty="0"/>
+              <a:t>.</a:t>
+            </a:r>
+          </a:p>
+          <a:p>
+            <a:pPr marL="835025" lvl="1" indent="-285750">
+              <a:lnSpc>
+                <a:spcPct val="150000"/>
+              </a:lnSpc>
+              <a:buFont typeface="Wingdings" panose="05000000000000000000" pitchFamily="2" charset="2"/>
+              <a:buChar char="ü"/>
+            </a:pPr>
+            <a:r>
+              <a:rPr lang="ko-KR" altLang="en-US" sz="1600" dirty="0"/>
+              <a:t>다만 전세계 생산량이 제한적이고</a:t>
+            </a:r>
+            <a:r>
+              <a:rPr lang="en-US" altLang="ko-KR" sz="1600" dirty="0"/>
+              <a:t>, </a:t>
+            </a:r>
+            <a:r>
+              <a:rPr lang="ko-KR" altLang="en-US" sz="1600" dirty="0"/>
+              <a:t>채굴 비용이 높아</a:t>
+            </a:r>
+            <a:r>
+              <a:rPr lang="en-US" altLang="ko-KR" sz="1600" dirty="0"/>
+              <a:t>, </a:t>
+            </a:r>
+            <a:r>
+              <a:rPr lang="ko-KR" altLang="en-US" sz="1600" dirty="0"/>
+              <a:t>가격경쟁력과 안정성 측면에서 한계가 있다</a:t>
             </a:r>
             <a:r>
               <a:rPr lang="en-US" altLang="ko-KR" sz="1600" dirty="0"/>
@@ -9106,7 +9781,7 @@
     </p:spTree>
     <p:extLst>
       <p:ext uri="{BB962C8B-B14F-4D97-AF65-F5344CB8AC3E}">
-        <p14:creationId xmlns:p14="http://schemas.microsoft.com/office/powerpoint/2010/main" val="1830095693"/>
+        <p14:creationId xmlns:p14="http://schemas.microsoft.com/office/powerpoint/2010/main" val="1027024174"/>
       </p:ext>
     </p:extLst>
   </p:cSld>
@@ -9116,7 +9791,7 @@
 </p:sld>
 </file>
 
-<file path=ppt/slides/slide14.xml><?xml version="1.0" encoding="utf-8"?>
+<file path=ppt/slides/slide16.xml><?xml version="1.0" encoding="utf-8"?>
 <p:sld xmlns:a="http://schemas.openxmlformats.org/drawingml/2006/main" xmlns:r="http://schemas.openxmlformats.org/officeDocument/2006/relationships" xmlns:p="http://schemas.openxmlformats.org/presentationml/2006/main">
   <p:cSld>
     <p:spTree>
@@ -9199,7 +9874,7 @@
           <a:p>
             <a:fld id="{109C872D-39A9-4065-8BF3-6A613116E2A1}" type="slidenum">
               <a:rPr lang="ko-KR" altLang="en-US" smtClean="0"/>
-              <a:t>14</a:t>
+              <a:t>16</a:t>
             </a:fld>
             <a:endParaRPr lang="ko-KR" altLang="en-US"/>
           </a:p>
@@ -9259,7 +9934,7 @@
 </p:sld>
 </file>
 
-<file path=ppt/slides/slide15.xml><?xml version="1.0" encoding="utf-8"?>
+<file path=ppt/slides/slide17.xml><?xml version="1.0" encoding="utf-8"?>
 <p:sld xmlns:a="http://schemas.openxmlformats.org/drawingml/2006/main" xmlns:r="http://schemas.openxmlformats.org/officeDocument/2006/relationships" xmlns:p="http://schemas.openxmlformats.org/presentationml/2006/main">
   <p:cSld>
     <p:spTree>
@@ -9267,7 +9942,7 @@
         <p:cNvPr id="1" name="">
           <a:extLst>
             <a:ext uri="{FF2B5EF4-FFF2-40B4-BE49-F238E27FC236}">
-              <a16:creationId xmlns:a16="http://schemas.microsoft.com/office/drawing/2014/main" id="{84536F5A-83E8-8B18-800C-F4D061E329EC}"/>
+              <a16:creationId xmlns:a16="http://schemas.microsoft.com/office/drawing/2014/main" id="{17A8B9A0-832A-1E5B-D29B-FCF36908B24D}"/>
             </a:ext>
           </a:extLst>
         </p:cNvPr>
@@ -9282,49 +9957,40 @@
           <a:chExt cx="0" cy="0"/>
         </a:xfrm>
       </p:grpSpPr>
-      <p:pic>
-        <p:nvPicPr>
-          <p:cNvPr id="6" name="그림 5" descr="텍스트, 로고, 원, 폰트이(가) 표시된 사진&#10;&#10;AI 생성 콘텐츠는 정확하지 않을 수 있습니다.">
+      <p:sp>
+        <p:nvSpPr>
+          <p:cNvPr id="2" name="제목 1">
             <a:extLst>
               <a:ext uri="{FF2B5EF4-FFF2-40B4-BE49-F238E27FC236}">
-                <a16:creationId xmlns:a16="http://schemas.microsoft.com/office/drawing/2014/main" id="{29E1E638-DB99-5028-2B0D-15C4F8986AF3}"/>
+                <a16:creationId xmlns:a16="http://schemas.microsoft.com/office/drawing/2014/main" id="{2FB34616-C531-CADA-B43F-640D86EB4399}"/>
               </a:ext>
             </a:extLst>
           </p:cNvPr>
-          <p:cNvPicPr>
-            <a:picLocks noChangeAspect="1"/>
-          </p:cNvPicPr>
-          <p:nvPr/>
-        </p:nvPicPr>
-        <p:blipFill>
-          <a:blip r:embed="rId2">
-            <a:alphaModFix amt="20000"/>
-            <a:extLst>
-              <a:ext uri="{28A0092B-C50C-407E-A947-70E740481C1C}">
-                <a14:useLocalDpi xmlns:a14="http://schemas.microsoft.com/office/drawing/2010/main" val="0"/>
-              </a:ext>
-            </a:extLst>
-          </a:blip>
-          <a:stretch>
-            <a:fillRect/>
-          </a:stretch>
-        </p:blipFill>
-        <p:spPr>
-          <a:xfrm>
-            <a:off x="4012070" y="1673061"/>
-            <a:ext cx="4167861" cy="4167861"/>
-          </a:xfrm>
-          <a:prstGeom prst="rect">
-            <a:avLst/>
-          </a:prstGeom>
-        </p:spPr>
-      </p:pic>
+          <p:cNvSpPr>
+            <a:spLocks noGrp="1"/>
+          </p:cNvSpPr>
+          <p:nvPr>
+            <p:ph type="title"/>
+          </p:nvPr>
+        </p:nvSpPr>
+        <p:spPr/>
+        <p:txBody>
+          <a:bodyPr/>
+          <a:lstStyle/>
+          <a:p>
+            <a:r>
+              <a:rPr lang="ko-KR" altLang="en-US" dirty="0"/>
+              <a:t>탐사와 채굴</a:t>
+            </a:r>
+          </a:p>
+        </p:txBody>
+      </p:sp>
       <p:sp>
         <p:nvSpPr>
           <p:cNvPr id="4" name="슬라이드 번호 개체 틀 3">
             <a:extLst>
               <a:ext uri="{FF2B5EF4-FFF2-40B4-BE49-F238E27FC236}">
-                <a16:creationId xmlns:a16="http://schemas.microsoft.com/office/drawing/2014/main" id="{F43DE9FF-AC43-300C-CC7B-2A47533DC698}"/>
+                <a16:creationId xmlns:a16="http://schemas.microsoft.com/office/drawing/2014/main" id="{49F9FE50-AB47-084D-83A3-0DD2DCC79ACF}"/>
               </a:ext>
             </a:extLst>
           </p:cNvPr>
@@ -9342,7 +10008,7 @@
           <a:p>
             <a:fld id="{109C872D-39A9-4065-8BF3-6A613116E2A1}" type="slidenum">
               <a:rPr lang="ko-KR" altLang="en-US" smtClean="0"/>
-              <a:t>15</a:t>
+              <a:t>17</a:t>
             </a:fld>
             <a:endParaRPr lang="ko-KR" altLang="en-US"/>
           </a:p>
@@ -9350,342 +10016,453 @@
       </p:sp>
       <p:sp>
         <p:nvSpPr>
-          <p:cNvPr id="7" name="제목 1">
+          <p:cNvPr id="3" name="TextBox 2">
             <a:extLst>
               <a:ext uri="{FF2B5EF4-FFF2-40B4-BE49-F238E27FC236}">
-                <a16:creationId xmlns:a16="http://schemas.microsoft.com/office/drawing/2014/main" id="{0A6F38EE-3A32-8A8E-3C54-16E9A1AF41DA}"/>
+                <a16:creationId xmlns:a16="http://schemas.microsoft.com/office/drawing/2014/main" id="{D3A0E748-BACE-2CD9-89AC-89AB471117DF}"/>
               </a:ext>
             </a:extLst>
           </p:cNvPr>
-          <p:cNvSpPr>
-            <a:spLocks noGrp="1"/>
-          </p:cNvSpPr>
-          <p:nvPr>
-            <p:ph type="title"/>
-          </p:nvPr>
+          <p:cNvSpPr txBox="1"/>
+          <p:nvPr/>
         </p:nvSpPr>
         <p:spPr>
           <a:xfrm>
-            <a:off x="831850" y="3765550"/>
-            <a:ext cx="11150600" cy="652818"/>
+            <a:off x="288790" y="958844"/>
+            <a:ext cx="11118453" cy="5584670"/>
           </a:xfrm>
-          <a:effectLst>
-            <a:reflection blurRad="50800" stA="45000" endPos="44000" dir="5400000" sy="-100000" algn="bl" rotWithShape="0"/>
-          </a:effectLst>
+          <a:prstGeom prst="rect">
+            <a:avLst/>
+          </a:prstGeom>
+          <a:noFill/>
         </p:spPr>
         <p:txBody>
-          <a:bodyPr anchor="b"/>
+          <a:bodyPr wrap="square" rtlCol="0" anchor="t">
+            <a:spAutoFit/>
+          </a:bodyPr>
           <a:lstStyle/>
           <a:p>
-            <a:r>
-              <a:rPr lang="en-US" altLang="ko-KR" sz="4000" b="1" i="0" spc="150" dirty="0"/>
-              <a:t>Section 5. </a:t>
-            </a:r>
-            <a:r>
-              <a:rPr lang="ko-KR" altLang="en-US" sz="4000" b="1" i="0" spc="150" dirty="0"/>
-              <a:t>석탄생산기술과 비용구조</a:t>
-            </a:r>
-            <a:endParaRPr lang="ko-KR" altLang="en-US" sz="3600" i="0" spc="150" dirty="0"/>
+            <a:pPr marL="377825" indent="-285750">
+              <a:lnSpc>
+                <a:spcPct val="150000"/>
+              </a:lnSpc>
+              <a:buFont typeface="Arial" panose="020B0604020202020204" pitchFamily="34" charset="0"/>
+              <a:buChar char="•"/>
+            </a:pPr>
+            <a:r>
+              <a:rPr lang="ko-KR" altLang="en-US" sz="1600" dirty="0"/>
+              <a:t>석탄의 가치사슬의 주요 단계는 탐사 및 채굴</a:t>
+            </a:r>
+            <a:r>
+              <a:rPr lang="en-US" altLang="ko-KR" sz="1600" dirty="0"/>
+              <a:t>, </a:t>
+            </a:r>
+            <a:r>
+              <a:rPr lang="ko-KR" altLang="en-US" sz="1600" dirty="0"/>
+              <a:t>처리 및 세정</a:t>
+            </a:r>
+            <a:r>
+              <a:rPr lang="en-US" altLang="ko-KR" sz="1600" dirty="0"/>
+              <a:t>, </a:t>
+            </a:r>
+            <a:r>
+              <a:rPr lang="ko-KR" altLang="en-US" sz="1600" dirty="0"/>
+              <a:t>수송과 물류</a:t>
+            </a:r>
+            <a:r>
+              <a:rPr lang="en-US" altLang="ko-KR" sz="1600" dirty="0"/>
+              <a:t>, </a:t>
+            </a:r>
+            <a:r>
+              <a:rPr lang="ko-KR" altLang="en-US" sz="1600" dirty="0"/>
+              <a:t>전환 및 활용</a:t>
+            </a:r>
+            <a:r>
+              <a:rPr lang="en-US" altLang="ko-KR" sz="1600" dirty="0"/>
+              <a:t>,</a:t>
+            </a:r>
+            <a:r>
+              <a:rPr lang="ko-KR" altLang="en-US" sz="1600" dirty="0"/>
+              <a:t> 그리고 최종판매로 구성된다</a:t>
+            </a:r>
+            <a:r>
+              <a:rPr lang="en-US" altLang="ko-KR" sz="1600" dirty="0"/>
+              <a:t>.</a:t>
+            </a:r>
+          </a:p>
+          <a:p>
+            <a:pPr marL="835025" lvl="1" indent="-285750">
+              <a:lnSpc>
+                <a:spcPct val="150000"/>
+              </a:lnSpc>
+              <a:buFont typeface="Wingdings" panose="05000000000000000000" pitchFamily="2" charset="2"/>
+              <a:buChar char="ü"/>
+            </a:pPr>
+            <a:endParaRPr lang="en-US" altLang="ko-KR" sz="1600" dirty="0"/>
+          </a:p>
+          <a:p>
+            <a:pPr marL="92075">
+              <a:lnSpc>
+                <a:spcPct val="150000"/>
+              </a:lnSpc>
+            </a:pPr>
+            <a:r>
+              <a:rPr lang="ko-KR" altLang="en-US" sz="1600" u="sng" dirty="0">
+                <a:ln w="3175">
+                  <a:noFill/>
+                </a:ln>
+                <a:latin typeface="HY헤드라인M" panose="02030600000101010101" pitchFamily="18" charset="-127"/>
+                <a:ea typeface="HY헤드라인M" panose="02030600000101010101" pitchFamily="18" charset="-127"/>
+              </a:rPr>
+              <a:t>탐사와 채굴</a:t>
+            </a:r>
+            <a:endParaRPr lang="en-US" altLang="ko-KR" sz="1600" u="sng" dirty="0">
+              <a:ln w="3175">
+                <a:noFill/>
+              </a:ln>
+              <a:latin typeface="HY헤드라인M" panose="02030600000101010101" pitchFamily="18" charset="-127"/>
+              <a:ea typeface="HY헤드라인M" panose="02030600000101010101" pitchFamily="18" charset="-127"/>
+            </a:endParaRPr>
+          </a:p>
+          <a:p>
+            <a:pPr marL="377825" indent="-285750">
+              <a:lnSpc>
+                <a:spcPct val="150000"/>
+              </a:lnSpc>
+              <a:buFont typeface="Arial" panose="020B0604020202020204" pitchFamily="34" charset="0"/>
+              <a:buChar char="•"/>
+            </a:pPr>
+            <a:r>
+              <a:rPr lang="ko-KR" altLang="en-US" sz="1600" dirty="0" err="1"/>
+              <a:t>첫단계로서</a:t>
+            </a:r>
+            <a:r>
+              <a:rPr lang="ko-KR" altLang="en-US" sz="1600" dirty="0"/>
+              <a:t> 지질학적 탐사를 하게 되며</a:t>
+            </a:r>
+            <a:r>
+              <a:rPr lang="en-US" altLang="ko-KR" sz="1600" dirty="0"/>
+              <a:t>, </a:t>
+            </a:r>
+            <a:r>
+              <a:rPr lang="ko-KR" altLang="en-US" sz="1600" dirty="0"/>
+              <a:t>위성영상</a:t>
+            </a:r>
+            <a:r>
+              <a:rPr lang="en-US" altLang="ko-KR" sz="1600" dirty="0"/>
+              <a:t>, </a:t>
+            </a:r>
+            <a:r>
+              <a:rPr lang="ko-KR" altLang="en-US" sz="1600" dirty="0"/>
+              <a:t>항공사진 분석</a:t>
+            </a:r>
+            <a:r>
+              <a:rPr lang="en-US" altLang="ko-KR" sz="1600" dirty="0"/>
+              <a:t>, </a:t>
+            </a:r>
+            <a:r>
+              <a:rPr lang="ko-KR" altLang="en-US" sz="1600" dirty="0"/>
+              <a:t>지표조사</a:t>
+            </a:r>
+            <a:r>
+              <a:rPr lang="en-US" altLang="ko-KR" sz="1600" dirty="0"/>
+              <a:t>, </a:t>
+            </a:r>
+            <a:r>
+              <a:rPr lang="ko-KR" altLang="en-US" sz="1600" dirty="0"/>
+              <a:t>물리탐사와 같은 예비조사에 이어 시추와 탄질분석을 통해 실제 탄층의 위치</a:t>
+            </a:r>
+            <a:r>
+              <a:rPr lang="en-US" altLang="ko-KR" sz="1600" dirty="0"/>
+              <a:t>, </a:t>
+            </a:r>
+            <a:r>
+              <a:rPr lang="ko-KR" altLang="en-US" sz="1600" dirty="0"/>
+              <a:t>두께</a:t>
+            </a:r>
+            <a:r>
+              <a:rPr lang="en-US" altLang="ko-KR" sz="1600" dirty="0"/>
+              <a:t>, </a:t>
+            </a:r>
+            <a:r>
+              <a:rPr lang="ko-KR" altLang="en-US" sz="1600" dirty="0"/>
+              <a:t>품질 및 연속성을 파악한다</a:t>
+            </a:r>
+            <a:r>
+              <a:rPr lang="en-US" altLang="ko-KR" sz="1600" dirty="0"/>
+              <a:t>.</a:t>
+            </a:r>
+          </a:p>
+          <a:p>
+            <a:pPr marL="377825" indent="-285750">
+              <a:lnSpc>
+                <a:spcPct val="150000"/>
+              </a:lnSpc>
+              <a:buFont typeface="Arial" panose="020B0604020202020204" pitchFamily="34" charset="0"/>
+              <a:buChar char="•"/>
+            </a:pPr>
+            <a:r>
+              <a:rPr lang="ko-KR" altLang="en-US" sz="1600" dirty="0"/>
+              <a:t>석탄층이 확인되고 경제성이 확보되면 본격적인 채굴 단계로 들어간다</a:t>
+            </a:r>
+            <a:r>
+              <a:rPr lang="en-US" altLang="ko-KR" sz="1600" dirty="0"/>
+              <a:t>.</a:t>
+            </a:r>
+          </a:p>
+          <a:p>
+            <a:pPr marL="835025" lvl="1" indent="-285750">
+              <a:lnSpc>
+                <a:spcPct val="150000"/>
+              </a:lnSpc>
+              <a:buFont typeface="Wingdings" panose="05000000000000000000" pitchFamily="2" charset="2"/>
+              <a:buChar char="ü"/>
+            </a:pPr>
+            <a:r>
+              <a:rPr lang="ko-KR" altLang="en-US" sz="1600" dirty="0"/>
+              <a:t>채굴 방식은 탄층의 깊이</a:t>
+            </a:r>
+            <a:r>
+              <a:rPr lang="en-US" altLang="ko-KR" sz="1600" dirty="0"/>
+              <a:t>, </a:t>
+            </a:r>
+            <a:r>
+              <a:rPr lang="ko-KR" altLang="en-US" sz="1600" dirty="0"/>
+              <a:t>두께</a:t>
+            </a:r>
+            <a:r>
+              <a:rPr lang="en-US" altLang="ko-KR" sz="1600" dirty="0"/>
+              <a:t>, </a:t>
+            </a:r>
+            <a:r>
+              <a:rPr lang="ko-KR" altLang="en-US" sz="1600" dirty="0"/>
+              <a:t>경사도</a:t>
+            </a:r>
+            <a:r>
+              <a:rPr lang="en-US" altLang="ko-KR" sz="1600" dirty="0"/>
+              <a:t>, </a:t>
+            </a:r>
+            <a:r>
+              <a:rPr lang="ko-KR" altLang="en-US" sz="1600" dirty="0"/>
+              <a:t>피복층의 조건</a:t>
+            </a:r>
+            <a:r>
+              <a:rPr lang="en-US" altLang="ko-KR" sz="1600" dirty="0"/>
+              <a:t>,</a:t>
+            </a:r>
+            <a:r>
+              <a:rPr lang="ko-KR" altLang="en-US" sz="1600" dirty="0"/>
+              <a:t> 지형 및 환경 규제 등 다양한 요인에 의해 결정된다</a:t>
+            </a:r>
+            <a:r>
+              <a:rPr lang="en-US" altLang="ko-KR" sz="1600" dirty="0"/>
+              <a:t>.</a:t>
+            </a:r>
+          </a:p>
+          <a:p>
+            <a:pPr marL="835025" lvl="1" indent="-285750">
+              <a:lnSpc>
+                <a:spcPct val="150000"/>
+              </a:lnSpc>
+              <a:buFont typeface="Wingdings" panose="05000000000000000000" pitchFamily="2" charset="2"/>
+              <a:buChar char="ü"/>
+            </a:pPr>
+            <a:r>
+              <a:rPr lang="ko-KR" altLang="en-US" sz="1600" dirty="0"/>
+              <a:t>일반적으로 노천채굴은 지표면에서 가까운 얕은 탄층을 대상으로 하며</a:t>
+            </a:r>
+            <a:r>
+              <a:rPr lang="en-US" altLang="ko-KR" sz="1600" dirty="0"/>
+              <a:t>, </a:t>
+            </a:r>
+            <a:r>
+              <a:rPr lang="ko-KR" altLang="en-US" sz="1600" dirty="0"/>
+              <a:t>광범위한 기계화가 가능하고 단위 생산비용이 낮다</a:t>
+            </a:r>
+            <a:r>
+              <a:rPr lang="en-US" altLang="ko-KR" sz="1600" dirty="0"/>
+              <a:t>.</a:t>
+            </a:r>
+          </a:p>
+          <a:p>
+            <a:pPr marL="1292225" lvl="2" indent="-285750">
+              <a:lnSpc>
+                <a:spcPct val="150000"/>
+              </a:lnSpc>
+              <a:buFont typeface="Wingdings" panose="05000000000000000000" pitchFamily="2" charset="2"/>
+              <a:buChar char="Ø"/>
+            </a:pPr>
+            <a:r>
+              <a:rPr lang="ko-KR" altLang="en-US" sz="1600" dirty="0"/>
+              <a:t>미국 서부</a:t>
+            </a:r>
+            <a:r>
+              <a:rPr lang="en-US" altLang="ko-KR" sz="1600" dirty="0"/>
+              <a:t>, </a:t>
+            </a:r>
+            <a:r>
+              <a:rPr lang="ko-KR" altLang="en-US" sz="1600" dirty="0"/>
+              <a:t>호주</a:t>
+            </a:r>
+            <a:r>
+              <a:rPr lang="en-US" altLang="ko-KR" sz="1600" dirty="0"/>
+              <a:t>, </a:t>
+            </a:r>
+            <a:r>
+              <a:rPr lang="ko-KR" altLang="en-US" sz="1600" dirty="0"/>
+              <a:t>인도네시아 등 광활한 토지가 확보된 지역에서 널리 활용된다</a:t>
+            </a:r>
+            <a:r>
+              <a:rPr lang="en-US" altLang="ko-KR" sz="1600" dirty="0"/>
+              <a:t>.</a:t>
+            </a:r>
+          </a:p>
+          <a:p>
+            <a:pPr marL="835025" lvl="1" indent="-285750">
+              <a:lnSpc>
+                <a:spcPct val="150000"/>
+              </a:lnSpc>
+              <a:buFont typeface="Wingdings" panose="05000000000000000000" pitchFamily="2" charset="2"/>
+              <a:buChar char="ü"/>
+            </a:pPr>
+            <a:r>
+              <a:rPr lang="ko-KR" altLang="en-US" sz="1600" dirty="0"/>
+              <a:t>지하채굴은 탄층이 깊거나 지형적 제약이 있는 지역에서 선택된다</a:t>
+            </a:r>
+            <a:r>
+              <a:rPr lang="en-US" altLang="ko-KR" sz="1600" dirty="0"/>
+              <a:t>.</a:t>
+            </a:r>
+          </a:p>
+          <a:p>
+            <a:pPr marL="1292225" lvl="2" indent="-285750">
+              <a:lnSpc>
+                <a:spcPct val="150000"/>
+              </a:lnSpc>
+              <a:buFont typeface="Wingdings" panose="05000000000000000000" pitchFamily="2" charset="2"/>
+              <a:buChar char="Ø"/>
+            </a:pPr>
+            <a:r>
+              <a:rPr lang="ko-KR" altLang="en-US" sz="1600" dirty="0"/>
+              <a:t>갱도</a:t>
+            </a:r>
+            <a:r>
+              <a:rPr lang="en-US" altLang="ko-KR" sz="1600" dirty="0"/>
+              <a:t>, </a:t>
+            </a:r>
+            <a:r>
+              <a:rPr lang="ko-KR" altLang="en-US" sz="1600" dirty="0" err="1"/>
+              <a:t>경사갱을</a:t>
+            </a:r>
+            <a:r>
+              <a:rPr lang="ko-KR" altLang="en-US" sz="1600" dirty="0"/>
+              <a:t> 통해 진입하고</a:t>
+            </a:r>
+            <a:r>
+              <a:rPr lang="en-US" altLang="ko-KR" sz="1600" dirty="0"/>
+              <a:t>, </a:t>
+            </a:r>
+            <a:r>
+              <a:rPr lang="ko-KR" altLang="en-US" sz="1600" dirty="0"/>
+              <a:t>채굴한 석탄을 컨베이어나 승강 시스템으로 지표면으로 운반한다</a:t>
+            </a:r>
+            <a:r>
+              <a:rPr lang="en-US" altLang="ko-KR" sz="1600" dirty="0"/>
+              <a:t>.</a:t>
+            </a:r>
+          </a:p>
+          <a:p>
+            <a:pPr marL="1292225" lvl="2" indent="-285750">
+              <a:lnSpc>
+                <a:spcPct val="150000"/>
+              </a:lnSpc>
+              <a:buFont typeface="Wingdings" panose="05000000000000000000" pitchFamily="2" charset="2"/>
+              <a:buChar char="Ø"/>
+            </a:pPr>
+            <a:r>
+              <a:rPr lang="ko-KR" altLang="en-US" sz="1600" dirty="0"/>
+              <a:t>지하채굴은 상대적으로 고비용 구조이며</a:t>
+            </a:r>
+            <a:r>
+              <a:rPr lang="en-US" altLang="ko-KR" sz="1600" dirty="0"/>
+              <a:t>, </a:t>
+            </a:r>
+            <a:r>
+              <a:rPr lang="ko-KR" altLang="en-US" sz="1600" dirty="0"/>
+              <a:t>환기 시스템</a:t>
+            </a:r>
+            <a:r>
+              <a:rPr lang="en-US" altLang="ko-KR" sz="1600" dirty="0"/>
+              <a:t>, </a:t>
+            </a:r>
+            <a:r>
+              <a:rPr lang="ko-KR" altLang="en-US" sz="1600" dirty="0"/>
+              <a:t>붕괴 방지용 </a:t>
+            </a:r>
+            <a:r>
+              <a:rPr lang="ko-KR" altLang="en-US" sz="1600" dirty="0" err="1"/>
+              <a:t>지보공</a:t>
+            </a:r>
+            <a:r>
+              <a:rPr lang="en-US" altLang="ko-KR" sz="1600" dirty="0"/>
+              <a:t>, </a:t>
+            </a:r>
+            <a:r>
+              <a:rPr lang="ko-KR" altLang="en-US" sz="1600" dirty="0"/>
+              <a:t>채굴 후 복원 계획 등 안전 및 환경 요소에 대한 고려가 복잡하다</a:t>
+            </a:r>
+            <a:r>
+              <a:rPr lang="en-US" altLang="ko-KR" sz="1600" dirty="0"/>
+              <a:t>. </a:t>
+            </a:r>
+          </a:p>
+          <a:p>
+            <a:pPr marL="377825" indent="-285750">
+              <a:lnSpc>
+                <a:spcPct val="150000"/>
+              </a:lnSpc>
+              <a:buFont typeface="Arial" panose="020B0604020202020204" pitchFamily="34" charset="0"/>
+              <a:buChar char="•"/>
+            </a:pPr>
+            <a:r>
+              <a:rPr lang="ko-KR" altLang="en-US" sz="1600" dirty="0"/>
+              <a:t>채굴된 석탄은 이물질 제거</a:t>
+            </a:r>
+            <a:r>
+              <a:rPr lang="en-US" altLang="ko-KR" sz="1600" dirty="0"/>
+              <a:t>, </a:t>
+            </a:r>
+            <a:r>
+              <a:rPr lang="ko-KR" altLang="en-US" sz="1600" dirty="0"/>
+              <a:t>크기 분류</a:t>
+            </a:r>
+            <a:r>
+              <a:rPr lang="en-US" altLang="ko-KR" sz="1600" dirty="0"/>
+              <a:t>, </a:t>
+            </a:r>
+            <a:r>
+              <a:rPr lang="ko-KR" altLang="en-US" sz="1600" dirty="0"/>
+              <a:t>수분 조절 등을 위한 세정 및 </a:t>
+            </a:r>
+            <a:r>
+              <a:rPr lang="ko-KR" altLang="en-US" sz="1600" dirty="0" err="1"/>
+              <a:t>전처리</a:t>
+            </a:r>
+            <a:r>
+              <a:rPr lang="ko-KR" altLang="en-US" sz="1600" dirty="0"/>
+              <a:t> 단계를 거쳐 다음 단계로 이동한다</a:t>
+            </a:r>
+            <a:r>
+              <a:rPr lang="en-US" altLang="ko-KR" sz="1600" dirty="0"/>
+              <a:t>.</a:t>
+            </a:r>
           </a:p>
         </p:txBody>
       </p:sp>
     </p:spTree>
     <p:extLst>
       <p:ext uri="{BB962C8B-B14F-4D97-AF65-F5344CB8AC3E}">
-        <p14:creationId xmlns:p14="http://schemas.microsoft.com/office/powerpoint/2010/main" val="3112273833"/>
-      </p:ext>
-    </p:extLst>
-  </p:cSld>
-  <p:clrMapOvr>
-    <a:masterClrMapping/>
-  </p:clrMapOvr>
-</p:sld>
-</file>
-
-<file path=ppt/slides/slide16.xml><?xml version="1.0" encoding="utf-8"?>
-<p:sld xmlns:a="http://schemas.openxmlformats.org/drawingml/2006/main" xmlns:r="http://schemas.openxmlformats.org/officeDocument/2006/relationships" xmlns:p="http://schemas.openxmlformats.org/presentationml/2006/main">
-  <p:cSld>
-    <p:spTree>
-      <p:nvGrpSpPr>
-        <p:cNvPr id="1" name="">
-          <a:extLst>
-            <a:ext uri="{FF2B5EF4-FFF2-40B4-BE49-F238E27FC236}">
-              <a16:creationId xmlns:a16="http://schemas.microsoft.com/office/drawing/2014/main" id="{1A68800B-CB6C-BBEA-6864-FD40CF8E59D3}"/>
-            </a:ext>
-          </a:extLst>
-        </p:cNvPr>
-        <p:cNvGrpSpPr/>
-        <p:nvPr/>
-      </p:nvGrpSpPr>
-      <p:grpSpPr>
-        <a:xfrm>
-          <a:off x="0" y="0"/>
-          <a:ext cx="0" cy="0"/>
-          <a:chOff x="0" y="0"/>
-          <a:chExt cx="0" cy="0"/>
-        </a:xfrm>
-      </p:grpSpPr>
-      <p:pic>
-        <p:nvPicPr>
-          <p:cNvPr id="6" name="그림 5" descr="텍스트, 로고, 원, 폰트이(가) 표시된 사진&#10;&#10;AI 생성 콘텐츠는 정확하지 않을 수 있습니다.">
-            <a:extLst>
-              <a:ext uri="{FF2B5EF4-FFF2-40B4-BE49-F238E27FC236}">
-                <a16:creationId xmlns:a16="http://schemas.microsoft.com/office/drawing/2014/main" id="{7197371F-099C-3A5C-5A23-755E558B5FF9}"/>
-              </a:ext>
-            </a:extLst>
-          </p:cNvPr>
-          <p:cNvPicPr>
-            <a:picLocks noChangeAspect="1"/>
-          </p:cNvPicPr>
-          <p:nvPr/>
-        </p:nvPicPr>
-        <p:blipFill>
-          <a:blip r:embed="rId2">
-            <a:alphaModFix amt="20000"/>
-            <a:extLst>
-              <a:ext uri="{28A0092B-C50C-407E-A947-70E740481C1C}">
-                <a14:useLocalDpi xmlns:a14="http://schemas.microsoft.com/office/drawing/2010/main" val="0"/>
-              </a:ext>
-            </a:extLst>
-          </a:blip>
-          <a:stretch>
-            <a:fillRect/>
-          </a:stretch>
-        </p:blipFill>
-        <p:spPr>
-          <a:xfrm>
-            <a:off x="4012070" y="1673061"/>
-            <a:ext cx="4167861" cy="4167861"/>
-          </a:xfrm>
-          <a:prstGeom prst="rect">
-            <a:avLst/>
-          </a:prstGeom>
-        </p:spPr>
-      </p:pic>
-      <p:sp>
-        <p:nvSpPr>
-          <p:cNvPr id="4" name="슬라이드 번호 개체 틀 3">
-            <a:extLst>
-              <a:ext uri="{FF2B5EF4-FFF2-40B4-BE49-F238E27FC236}">
-                <a16:creationId xmlns:a16="http://schemas.microsoft.com/office/drawing/2014/main" id="{D403CE3D-FF37-6FEB-D958-7BF84F49ADB8}"/>
-              </a:ext>
-            </a:extLst>
-          </p:cNvPr>
-          <p:cNvSpPr>
-            <a:spLocks noGrp="1"/>
-          </p:cNvSpPr>
-          <p:nvPr>
-            <p:ph type="sldNum" sz="quarter" idx="12"/>
-          </p:nvPr>
-        </p:nvSpPr>
-        <p:spPr/>
-        <p:txBody>
-          <a:bodyPr/>
-          <a:lstStyle/>
-          <a:p>
-            <a:fld id="{109C872D-39A9-4065-8BF3-6A613116E2A1}" type="slidenum">
-              <a:rPr lang="ko-KR" altLang="en-US" smtClean="0"/>
-              <a:t>16</a:t>
-            </a:fld>
-            <a:endParaRPr lang="ko-KR" altLang="en-US"/>
-          </a:p>
-        </p:txBody>
-      </p:sp>
-      <p:sp>
-        <p:nvSpPr>
-          <p:cNvPr id="7" name="제목 1">
-            <a:extLst>
-              <a:ext uri="{FF2B5EF4-FFF2-40B4-BE49-F238E27FC236}">
-                <a16:creationId xmlns:a16="http://schemas.microsoft.com/office/drawing/2014/main" id="{DAE71EA6-541D-6782-1125-4EE46868B032}"/>
-              </a:ext>
-            </a:extLst>
-          </p:cNvPr>
-          <p:cNvSpPr>
-            <a:spLocks noGrp="1"/>
-          </p:cNvSpPr>
-          <p:nvPr>
-            <p:ph type="title"/>
-          </p:nvPr>
-        </p:nvSpPr>
-        <p:spPr>
-          <a:xfrm>
-            <a:off x="831850" y="3765550"/>
-            <a:ext cx="11150600" cy="652818"/>
-          </a:xfrm>
-          <a:effectLst>
-            <a:reflection blurRad="50800" stA="45000" endPos="44000" dir="5400000" sy="-100000" algn="bl" rotWithShape="0"/>
-          </a:effectLst>
-        </p:spPr>
-        <p:txBody>
-          <a:bodyPr anchor="b"/>
-          <a:lstStyle/>
-          <a:p>
-            <a:r>
-              <a:rPr lang="en-US" altLang="ko-KR" sz="4000" b="1" i="0" spc="150" dirty="0"/>
-              <a:t>Section 6. </a:t>
-            </a:r>
-            <a:br>
-              <a:rPr lang="en-US" altLang="ko-KR" sz="4000" b="1" i="0" spc="150" dirty="0"/>
-            </a:br>
-            <a:r>
-              <a:rPr lang="ko-KR" altLang="en-US" sz="4000" b="1" i="0" spc="150" dirty="0" err="1"/>
-              <a:t>석탄채굴과정의</a:t>
-            </a:r>
-            <a:r>
-              <a:rPr lang="ko-KR" altLang="en-US" sz="4000" b="1" i="0" spc="150" dirty="0"/>
-              <a:t> 사회적 환경적 문제</a:t>
-            </a:r>
-            <a:endParaRPr lang="ko-KR" altLang="en-US" sz="3600" i="0" spc="150" dirty="0"/>
-          </a:p>
-        </p:txBody>
-      </p:sp>
-    </p:spTree>
-    <p:extLst>
-      <p:ext uri="{BB962C8B-B14F-4D97-AF65-F5344CB8AC3E}">
-        <p14:creationId xmlns:p14="http://schemas.microsoft.com/office/powerpoint/2010/main" val="2672994572"/>
-      </p:ext>
-    </p:extLst>
-  </p:cSld>
-  <p:clrMapOvr>
-    <a:masterClrMapping/>
-  </p:clrMapOvr>
-</p:sld>
-</file>
-
-<file path=ppt/slides/slide17.xml><?xml version="1.0" encoding="utf-8"?>
-<p:sld xmlns:a="http://schemas.openxmlformats.org/drawingml/2006/main" xmlns:r="http://schemas.openxmlformats.org/officeDocument/2006/relationships" xmlns:p="http://schemas.openxmlformats.org/presentationml/2006/main">
-  <p:cSld>
-    <p:spTree>
-      <p:nvGrpSpPr>
-        <p:cNvPr id="1" name="">
-          <a:extLst>
-            <a:ext uri="{FF2B5EF4-FFF2-40B4-BE49-F238E27FC236}">
-              <a16:creationId xmlns:a16="http://schemas.microsoft.com/office/drawing/2014/main" id="{2BB52C00-4FB8-6E54-7AB8-1AF3515CDC04}"/>
-            </a:ext>
-          </a:extLst>
-        </p:cNvPr>
-        <p:cNvGrpSpPr/>
-        <p:nvPr/>
-      </p:nvGrpSpPr>
-      <p:grpSpPr>
-        <a:xfrm>
-          <a:off x="0" y="0"/>
-          <a:ext cx="0" cy="0"/>
-          <a:chOff x="0" y="0"/>
-          <a:chExt cx="0" cy="0"/>
-        </a:xfrm>
-      </p:grpSpPr>
-      <p:pic>
-        <p:nvPicPr>
-          <p:cNvPr id="6" name="그림 5" descr="텍스트, 로고, 원, 폰트이(가) 표시된 사진&#10;&#10;AI 생성 콘텐츠는 정확하지 않을 수 있습니다.">
-            <a:extLst>
-              <a:ext uri="{FF2B5EF4-FFF2-40B4-BE49-F238E27FC236}">
-                <a16:creationId xmlns:a16="http://schemas.microsoft.com/office/drawing/2014/main" id="{5A56A791-A436-FF30-C46F-320B6C969F65}"/>
-              </a:ext>
-            </a:extLst>
-          </p:cNvPr>
-          <p:cNvPicPr>
-            <a:picLocks noChangeAspect="1"/>
-          </p:cNvPicPr>
-          <p:nvPr/>
-        </p:nvPicPr>
-        <p:blipFill>
-          <a:blip r:embed="rId2">
-            <a:alphaModFix amt="20000"/>
-            <a:extLst>
-              <a:ext uri="{28A0092B-C50C-407E-A947-70E740481C1C}">
-                <a14:useLocalDpi xmlns:a14="http://schemas.microsoft.com/office/drawing/2010/main" val="0"/>
-              </a:ext>
-            </a:extLst>
-          </a:blip>
-          <a:stretch>
-            <a:fillRect/>
-          </a:stretch>
-        </p:blipFill>
-        <p:spPr>
-          <a:xfrm>
-            <a:off x="4012070" y="1673061"/>
-            <a:ext cx="4167861" cy="4167861"/>
-          </a:xfrm>
-          <a:prstGeom prst="rect">
-            <a:avLst/>
-          </a:prstGeom>
-        </p:spPr>
-      </p:pic>
-      <p:sp>
-        <p:nvSpPr>
-          <p:cNvPr id="4" name="슬라이드 번호 개체 틀 3">
-            <a:extLst>
-              <a:ext uri="{FF2B5EF4-FFF2-40B4-BE49-F238E27FC236}">
-                <a16:creationId xmlns:a16="http://schemas.microsoft.com/office/drawing/2014/main" id="{EC90D0E0-E6B8-B422-7F51-366317F7B2FE}"/>
-              </a:ext>
-            </a:extLst>
-          </p:cNvPr>
-          <p:cNvSpPr>
-            <a:spLocks noGrp="1"/>
-          </p:cNvSpPr>
-          <p:nvPr>
-            <p:ph type="sldNum" sz="quarter" idx="12"/>
-          </p:nvPr>
-        </p:nvSpPr>
-        <p:spPr/>
-        <p:txBody>
-          <a:bodyPr/>
-          <a:lstStyle/>
-          <a:p>
-            <a:fld id="{109C872D-39A9-4065-8BF3-6A613116E2A1}" type="slidenum">
-              <a:rPr lang="ko-KR" altLang="en-US" smtClean="0"/>
-              <a:t>17</a:t>
-            </a:fld>
-            <a:endParaRPr lang="ko-KR" altLang="en-US"/>
-          </a:p>
-        </p:txBody>
-      </p:sp>
-      <p:sp>
-        <p:nvSpPr>
-          <p:cNvPr id="7" name="제목 1">
-            <a:extLst>
-              <a:ext uri="{FF2B5EF4-FFF2-40B4-BE49-F238E27FC236}">
-                <a16:creationId xmlns:a16="http://schemas.microsoft.com/office/drawing/2014/main" id="{F7BA6FFD-890A-1B62-9230-139A081897CC}"/>
-              </a:ext>
-            </a:extLst>
-          </p:cNvPr>
-          <p:cNvSpPr>
-            <a:spLocks noGrp="1"/>
-          </p:cNvSpPr>
-          <p:nvPr>
-            <p:ph type="title"/>
-          </p:nvPr>
-        </p:nvSpPr>
-        <p:spPr>
-          <a:xfrm>
-            <a:off x="831850" y="3765550"/>
-            <a:ext cx="11150600" cy="652818"/>
-          </a:xfrm>
-          <a:effectLst>
-            <a:reflection blurRad="50800" stA="45000" endPos="44000" dir="5400000" sy="-100000" algn="bl" rotWithShape="0"/>
-          </a:effectLst>
-        </p:spPr>
-        <p:txBody>
-          <a:bodyPr anchor="b"/>
-          <a:lstStyle/>
-          <a:p>
-            <a:r>
-              <a:rPr lang="en-US" altLang="ko-KR" sz="4000" b="1" i="0" spc="150" dirty="0"/>
-              <a:t>Section 7. </a:t>
-            </a:r>
-            <a:r>
-              <a:rPr lang="ko-KR" altLang="en-US" sz="4000" b="1" i="0" spc="150" dirty="0"/>
-              <a:t>석탄산업의 구조와 경쟁</a:t>
-            </a:r>
-            <a:endParaRPr lang="ko-KR" altLang="en-US" sz="3600" i="0" spc="150" dirty="0"/>
-          </a:p>
-        </p:txBody>
-      </p:sp>
-    </p:spTree>
-    <p:extLst>
-      <p:ext uri="{BB962C8B-B14F-4D97-AF65-F5344CB8AC3E}">
-        <p14:creationId xmlns:p14="http://schemas.microsoft.com/office/powerpoint/2010/main" val="3862282321"/>
+        <p14:creationId xmlns:p14="http://schemas.microsoft.com/office/powerpoint/2010/main" val="1403504205"/>
       </p:ext>
     </p:extLst>
   </p:cSld>
@@ -9703,7 +10480,7 @@
         <p:cNvPr id="1" name="">
           <a:extLst>
             <a:ext uri="{FF2B5EF4-FFF2-40B4-BE49-F238E27FC236}">
-              <a16:creationId xmlns:a16="http://schemas.microsoft.com/office/drawing/2014/main" id="{A8EC7BC0-44CC-D7F4-E6DD-57DD5DF7AA34}"/>
+              <a16:creationId xmlns:a16="http://schemas.microsoft.com/office/drawing/2014/main" id="{722DFC8F-C710-0528-FA35-08C6B3E36EC2}"/>
             </a:ext>
           </a:extLst>
         </p:cNvPr>
@@ -9718,49 +10495,40 @@
           <a:chExt cx="0" cy="0"/>
         </a:xfrm>
       </p:grpSpPr>
-      <p:pic>
-        <p:nvPicPr>
-          <p:cNvPr id="6" name="그림 5" descr="텍스트, 로고, 원, 폰트이(가) 표시된 사진&#10;&#10;AI 생성 콘텐츠는 정확하지 않을 수 있습니다.">
+      <p:sp>
+        <p:nvSpPr>
+          <p:cNvPr id="2" name="제목 1">
             <a:extLst>
               <a:ext uri="{FF2B5EF4-FFF2-40B4-BE49-F238E27FC236}">
-                <a16:creationId xmlns:a16="http://schemas.microsoft.com/office/drawing/2014/main" id="{B81F0DEA-AE25-B4E8-343A-FEF36817CAB9}"/>
+                <a16:creationId xmlns:a16="http://schemas.microsoft.com/office/drawing/2014/main" id="{3587979C-6193-145D-A99C-4F9B4CB0460F}"/>
               </a:ext>
             </a:extLst>
           </p:cNvPr>
-          <p:cNvPicPr>
-            <a:picLocks noChangeAspect="1"/>
-          </p:cNvPicPr>
-          <p:nvPr/>
-        </p:nvPicPr>
-        <p:blipFill>
-          <a:blip r:embed="rId2">
-            <a:alphaModFix amt="20000"/>
-            <a:extLst>
-              <a:ext uri="{28A0092B-C50C-407E-A947-70E740481C1C}">
-                <a14:useLocalDpi xmlns:a14="http://schemas.microsoft.com/office/drawing/2010/main" val="0"/>
-              </a:ext>
-            </a:extLst>
-          </a:blip>
-          <a:stretch>
-            <a:fillRect/>
-          </a:stretch>
-        </p:blipFill>
-        <p:spPr>
-          <a:xfrm>
-            <a:off x="4012070" y="1673061"/>
-            <a:ext cx="4167861" cy="4167861"/>
-          </a:xfrm>
-          <a:prstGeom prst="rect">
-            <a:avLst/>
-          </a:prstGeom>
-        </p:spPr>
-      </p:pic>
+          <p:cNvSpPr>
+            <a:spLocks noGrp="1"/>
+          </p:cNvSpPr>
+          <p:nvPr>
+            <p:ph type="title"/>
+          </p:nvPr>
+        </p:nvSpPr>
+        <p:spPr/>
+        <p:txBody>
+          <a:bodyPr/>
+          <a:lstStyle/>
+          <a:p>
+            <a:r>
+              <a:rPr lang="ko-KR" altLang="en-US" dirty="0"/>
+              <a:t>처리 및 세정</a:t>
+            </a:r>
+          </a:p>
+        </p:txBody>
+      </p:sp>
       <p:sp>
         <p:nvSpPr>
           <p:cNvPr id="4" name="슬라이드 번호 개체 틀 3">
             <a:extLst>
               <a:ext uri="{FF2B5EF4-FFF2-40B4-BE49-F238E27FC236}">
-                <a16:creationId xmlns:a16="http://schemas.microsoft.com/office/drawing/2014/main" id="{CB5BD1CC-4832-28EA-F890-0A6C9BA90D0C}"/>
+                <a16:creationId xmlns:a16="http://schemas.microsoft.com/office/drawing/2014/main" id="{3692672E-ADC6-D6DF-6DA2-D611CA5F89EC}"/>
               </a:ext>
             </a:extLst>
           </p:cNvPr>
@@ -9786,49 +10554,351 @@
       </p:sp>
       <p:sp>
         <p:nvSpPr>
-          <p:cNvPr id="7" name="제목 1">
+          <p:cNvPr id="3" name="TextBox 2">
             <a:extLst>
               <a:ext uri="{FF2B5EF4-FFF2-40B4-BE49-F238E27FC236}">
-                <a16:creationId xmlns:a16="http://schemas.microsoft.com/office/drawing/2014/main" id="{4E50D6D8-C49D-3D8B-C6BD-1CFAA1E59A4F}"/>
+                <a16:creationId xmlns:a16="http://schemas.microsoft.com/office/drawing/2014/main" id="{AD917C9A-4943-9580-2FF5-E19865F4DBC9}"/>
               </a:ext>
             </a:extLst>
           </p:cNvPr>
-          <p:cNvSpPr>
-            <a:spLocks noGrp="1"/>
-          </p:cNvSpPr>
-          <p:nvPr>
-            <p:ph type="title"/>
-          </p:nvPr>
+          <p:cNvSpPr txBox="1"/>
+          <p:nvPr/>
         </p:nvSpPr>
         <p:spPr>
           <a:xfrm>
-            <a:off x="831850" y="3765550"/>
-            <a:ext cx="11150600" cy="652818"/>
+            <a:off x="288790" y="958844"/>
+            <a:ext cx="11118453" cy="4846007"/>
           </a:xfrm>
-          <a:effectLst>
-            <a:reflection blurRad="50800" stA="45000" endPos="44000" dir="5400000" sy="-100000" algn="bl" rotWithShape="0"/>
-          </a:effectLst>
+          <a:prstGeom prst="rect">
+            <a:avLst/>
+          </a:prstGeom>
+          <a:noFill/>
         </p:spPr>
         <p:txBody>
-          <a:bodyPr anchor="b"/>
+          <a:bodyPr wrap="square" rtlCol="0" anchor="t">
+            <a:spAutoFit/>
+          </a:bodyPr>
           <a:lstStyle/>
           <a:p>
-            <a:r>
-              <a:rPr lang="en-US" altLang="ko-KR" sz="4000" b="1" i="0" spc="150" dirty="0"/>
-              <a:t>Section 8. </a:t>
-            </a:r>
-            <a:r>
-              <a:rPr lang="ko-KR" altLang="en-US" sz="4000" b="1" i="0" spc="150" dirty="0"/>
-              <a:t>석탄시장의 거래 현황</a:t>
-            </a:r>
-            <a:endParaRPr lang="ko-KR" altLang="en-US" sz="3600" i="0" spc="150" dirty="0"/>
+            <a:pPr marL="377825" indent="-285750">
+              <a:lnSpc>
+                <a:spcPct val="150000"/>
+              </a:lnSpc>
+              <a:buFont typeface="Arial" panose="020B0604020202020204" pitchFamily="34" charset="0"/>
+              <a:buChar char="•"/>
+            </a:pPr>
+            <a:r>
+              <a:rPr lang="ko-KR" altLang="en-US" sz="1600" dirty="0"/>
+              <a:t>채굴된 원석탄은 토사</a:t>
+            </a:r>
+            <a:r>
+              <a:rPr lang="en-US" altLang="ko-KR" sz="1600" dirty="0"/>
+              <a:t>, </a:t>
+            </a:r>
+            <a:r>
+              <a:rPr lang="ko-KR" altLang="en-US" sz="1600" dirty="0"/>
+              <a:t>바위</a:t>
+            </a:r>
+            <a:r>
+              <a:rPr lang="en-US" altLang="ko-KR" sz="1600" dirty="0"/>
+              <a:t>, </a:t>
+            </a:r>
+            <a:r>
+              <a:rPr lang="ko-KR" altLang="en-US" sz="1600" dirty="0"/>
+              <a:t>점토</a:t>
+            </a:r>
+            <a:r>
+              <a:rPr lang="en-US" altLang="ko-KR" sz="1600" dirty="0"/>
+              <a:t>, </a:t>
+            </a:r>
+            <a:r>
+              <a:rPr lang="ko-KR" altLang="en-US" sz="1600" dirty="0"/>
+              <a:t>황 화합물 등 다양한 불순물을 포함하고 있다</a:t>
+            </a:r>
+            <a:r>
+              <a:rPr lang="en-US" altLang="ko-KR" sz="1600" dirty="0"/>
+              <a:t>.</a:t>
+            </a:r>
+          </a:p>
+          <a:p>
+            <a:pPr marL="835025" lvl="1" indent="-285750">
+              <a:lnSpc>
+                <a:spcPct val="150000"/>
+              </a:lnSpc>
+              <a:buFont typeface="Wingdings" panose="05000000000000000000" pitchFamily="2" charset="2"/>
+              <a:buChar char="ü"/>
+            </a:pPr>
+            <a:r>
+              <a:rPr lang="ko-KR" altLang="en-US" sz="1600" dirty="0"/>
+              <a:t>이러한 불순물은 석탄의 연소 효율을 저하시키고 대기오염을 유발하는 주요 원인이 된다</a:t>
+            </a:r>
+            <a:r>
+              <a:rPr lang="en-US" altLang="ko-KR" sz="1600" dirty="0"/>
+              <a:t>.</a:t>
+            </a:r>
+          </a:p>
+          <a:p>
+            <a:pPr marL="1292225" lvl="2" indent="-285750">
+              <a:lnSpc>
+                <a:spcPct val="150000"/>
+              </a:lnSpc>
+              <a:buFont typeface="Wingdings" panose="05000000000000000000" pitchFamily="2" charset="2"/>
+              <a:buChar char="Ø"/>
+            </a:pPr>
+            <a:r>
+              <a:rPr lang="ko-KR" altLang="en-US" sz="1600" dirty="0"/>
+              <a:t>연료 품질을 향상시키고</a:t>
+            </a:r>
+            <a:r>
+              <a:rPr lang="en-US" altLang="ko-KR" sz="1600" dirty="0"/>
+              <a:t>, </a:t>
+            </a:r>
+            <a:r>
+              <a:rPr lang="ko-KR" altLang="en-US" sz="1600" dirty="0"/>
+              <a:t>환경 영향을 줄이기 위해서는 석탄세정 혹은 석탄준비라고 하는 정제 과정을 거쳐야 한다</a:t>
+            </a:r>
+            <a:r>
+              <a:rPr lang="en-US" altLang="ko-KR" sz="1600" dirty="0"/>
+              <a:t>.</a:t>
+            </a:r>
+          </a:p>
+          <a:p>
+            <a:pPr marL="377825" indent="-285750">
+              <a:lnSpc>
+                <a:spcPct val="150000"/>
+              </a:lnSpc>
+              <a:buFont typeface="Arial" panose="020B0604020202020204" pitchFamily="34" charset="0"/>
+              <a:buChar char="•"/>
+            </a:pPr>
+            <a:r>
+              <a:rPr lang="ko-KR" altLang="en-US" sz="1600" dirty="0"/>
+              <a:t>석탄 세정은 물리적 방법을 통해 수행되며</a:t>
+            </a:r>
+            <a:r>
+              <a:rPr lang="en-US" altLang="ko-KR" sz="1600" dirty="0"/>
+              <a:t>, </a:t>
+            </a:r>
+            <a:r>
+              <a:rPr lang="ko-KR" altLang="en-US" sz="1600" dirty="0"/>
+              <a:t>석탄과 불순물 간의 밀도 차이를 활용하여 분리하는 방식이다</a:t>
+            </a:r>
+            <a:r>
+              <a:rPr lang="en-US" altLang="ko-KR" sz="1600" dirty="0"/>
+              <a:t>.</a:t>
+            </a:r>
+          </a:p>
+          <a:p>
+            <a:pPr marL="835025" lvl="1" indent="-285750">
+              <a:lnSpc>
+                <a:spcPct val="150000"/>
+              </a:lnSpc>
+              <a:buFont typeface="Wingdings" panose="05000000000000000000" pitchFamily="2" charset="2"/>
+              <a:buChar char="ü"/>
+            </a:pPr>
+            <a:r>
+              <a:rPr lang="ko-KR" altLang="en-US" sz="1600" dirty="0"/>
+              <a:t>대표적인 방법으로는 중력 분리</a:t>
+            </a:r>
+            <a:r>
+              <a:rPr lang="en-US" altLang="ko-KR" sz="1600" dirty="0"/>
+              <a:t>, </a:t>
+            </a:r>
+            <a:r>
+              <a:rPr lang="ko-KR" altLang="en-US" sz="1600" dirty="0"/>
+              <a:t>사이클론</a:t>
+            </a:r>
+            <a:r>
+              <a:rPr lang="en-US" altLang="ko-KR" sz="1600" dirty="0"/>
+              <a:t>, </a:t>
+            </a:r>
+            <a:r>
+              <a:rPr lang="ko-KR" altLang="en-US" sz="1600" dirty="0" err="1"/>
+              <a:t>플로테이션</a:t>
+            </a:r>
+            <a:r>
+              <a:rPr lang="ko-KR" altLang="en-US" sz="1600" dirty="0"/>
+              <a:t> 공정 등이 있다</a:t>
+            </a:r>
+            <a:r>
+              <a:rPr lang="en-US" altLang="ko-KR" sz="1600" dirty="0"/>
+              <a:t>.</a:t>
+            </a:r>
+          </a:p>
+          <a:p>
+            <a:pPr marL="835025" lvl="1" indent="-285750">
+              <a:lnSpc>
+                <a:spcPct val="150000"/>
+              </a:lnSpc>
+              <a:buFont typeface="Wingdings" panose="05000000000000000000" pitchFamily="2" charset="2"/>
+              <a:buChar char="ü"/>
+            </a:pPr>
+            <a:r>
+              <a:rPr lang="ko-KR" altLang="en-US" sz="1600" dirty="0"/>
+              <a:t>기계적 처리는 석탄을 일정한 크기로 분쇄하고</a:t>
+            </a:r>
+            <a:r>
+              <a:rPr lang="en-US" altLang="ko-KR" sz="1600" dirty="0"/>
+              <a:t>, </a:t>
+            </a:r>
+            <a:r>
+              <a:rPr lang="ko-KR" altLang="en-US" sz="1600" dirty="0"/>
+              <a:t>크기별로 선별하는 과정을 포함한다</a:t>
+            </a:r>
+            <a:r>
+              <a:rPr lang="en-US" altLang="ko-KR" sz="1600" dirty="0"/>
+              <a:t>.</a:t>
+            </a:r>
+          </a:p>
+          <a:p>
+            <a:pPr marL="835025" lvl="1" indent="-285750">
+              <a:lnSpc>
+                <a:spcPct val="150000"/>
+              </a:lnSpc>
+              <a:buFont typeface="Wingdings" panose="05000000000000000000" pitchFamily="2" charset="2"/>
+              <a:buChar char="ü"/>
+            </a:pPr>
+            <a:r>
+              <a:rPr lang="ko-KR" altLang="en-US" sz="1600" dirty="0"/>
+              <a:t>일부 </a:t>
+            </a:r>
+            <a:r>
+              <a:rPr lang="ko-KR" altLang="en-US" sz="1600" dirty="0" err="1"/>
+              <a:t>고황함유</a:t>
+            </a:r>
+            <a:r>
+              <a:rPr lang="ko-KR" altLang="en-US" sz="1600" dirty="0"/>
+              <a:t> 석탄의 경우</a:t>
+            </a:r>
+            <a:r>
+              <a:rPr lang="en-US" altLang="ko-KR" sz="1600" dirty="0"/>
+              <a:t>, </a:t>
+            </a:r>
+            <a:r>
+              <a:rPr lang="ko-KR" altLang="en-US" sz="1600" dirty="0"/>
+              <a:t>화학적 처리를 통해 황을 제거하거나</a:t>
+            </a:r>
+            <a:r>
+              <a:rPr lang="en-US" altLang="ko-KR" sz="1600" dirty="0"/>
+              <a:t>, </a:t>
+            </a:r>
+            <a:r>
+              <a:rPr lang="ko-KR" altLang="en-US" sz="1600" dirty="0"/>
+              <a:t>황산화물 배출을 줄이기 위한 사전 조치가 이루어지기도 한다</a:t>
+            </a:r>
+            <a:r>
+              <a:rPr lang="en-US" altLang="ko-KR" sz="1600" dirty="0"/>
+              <a:t>.</a:t>
+            </a:r>
+          </a:p>
+          <a:p>
+            <a:pPr marL="835025" lvl="1" indent="-285750">
+              <a:lnSpc>
+                <a:spcPct val="150000"/>
+              </a:lnSpc>
+              <a:buFont typeface="Wingdings" panose="05000000000000000000" pitchFamily="2" charset="2"/>
+              <a:buChar char="ü"/>
+            </a:pPr>
+            <a:r>
+              <a:rPr lang="ko-KR" altLang="en-US" sz="1600" dirty="0"/>
+              <a:t>세정 과정을 통해 석탄의 발열량은 증가하고</a:t>
+            </a:r>
+            <a:r>
+              <a:rPr lang="en-US" altLang="ko-KR" sz="1600" dirty="0"/>
+              <a:t>, </a:t>
+            </a:r>
+            <a:r>
+              <a:rPr lang="ko-KR" altLang="en-US" sz="1600" dirty="0"/>
+              <a:t>회분 및 황 함량은 감소함으로써 연소 과정에서 발생하는 이산화황</a:t>
+            </a:r>
+            <a:r>
+              <a:rPr lang="en-US" altLang="ko-KR" sz="1600" dirty="0"/>
+              <a:t>, </a:t>
+            </a:r>
+            <a:r>
+              <a:rPr lang="ko-KR" altLang="en-US" sz="1600" dirty="0" err="1"/>
+              <a:t>미세먼지등의</a:t>
+            </a:r>
+            <a:r>
+              <a:rPr lang="ko-KR" altLang="en-US" sz="1600" dirty="0"/>
+              <a:t> 오염물질 배출량을 줄일 수 있다</a:t>
+            </a:r>
+            <a:r>
+              <a:rPr lang="en-US" altLang="ko-KR" sz="1600" dirty="0"/>
+              <a:t>.</a:t>
+            </a:r>
+          </a:p>
+          <a:p>
+            <a:pPr marL="377825" indent="-285750">
+              <a:lnSpc>
+                <a:spcPct val="150000"/>
+              </a:lnSpc>
+              <a:buFont typeface="Arial" panose="020B0604020202020204" pitchFamily="34" charset="0"/>
+              <a:buChar char="•"/>
+            </a:pPr>
+            <a:r>
+              <a:rPr lang="ko-KR" altLang="en-US" sz="1600" dirty="0"/>
+              <a:t>세정이 완료된 석탄은 일반적으로 입자 크기별로 분류되고</a:t>
+            </a:r>
+            <a:r>
+              <a:rPr lang="en-US" altLang="ko-KR" sz="1600" dirty="0"/>
+              <a:t>, </a:t>
+            </a:r>
+            <a:r>
+              <a:rPr lang="ko-KR" altLang="en-US" sz="1600" dirty="0"/>
+              <a:t>용도별로 </a:t>
+            </a:r>
+            <a:r>
+              <a:rPr lang="ko-KR" altLang="en-US" sz="1600" dirty="0" err="1"/>
+              <a:t>등급화된다</a:t>
+            </a:r>
+            <a:r>
+              <a:rPr lang="en-US" altLang="ko-KR" sz="1600" dirty="0"/>
+              <a:t>.</a:t>
+            </a:r>
+          </a:p>
+          <a:p>
+            <a:pPr marL="835025" lvl="1" indent="-285750">
+              <a:lnSpc>
+                <a:spcPct val="150000"/>
+              </a:lnSpc>
+              <a:buFont typeface="Wingdings" panose="05000000000000000000" pitchFamily="2" charset="2"/>
+              <a:buChar char="ü"/>
+            </a:pPr>
+            <a:r>
+              <a:rPr lang="ko-KR" altLang="en-US" sz="1600" dirty="0"/>
+              <a:t>입자가 큰 석탄은 코크스용</a:t>
+            </a:r>
+            <a:r>
+              <a:rPr lang="en-US" altLang="ko-KR" sz="1600" dirty="0"/>
+              <a:t>, </a:t>
+            </a:r>
+            <a:r>
+              <a:rPr lang="ko-KR" altLang="en-US" sz="1600" dirty="0"/>
+              <a:t>중간입자는 전력 발전용</a:t>
+            </a:r>
+            <a:r>
+              <a:rPr lang="en-US" altLang="ko-KR" sz="1600" dirty="0"/>
+              <a:t>, </a:t>
+            </a:r>
+            <a:r>
+              <a:rPr lang="ko-KR" altLang="en-US" sz="1600" dirty="0" err="1"/>
+              <a:t>세립탄은</a:t>
+            </a:r>
+            <a:r>
+              <a:rPr lang="ko-KR" altLang="en-US" sz="1600" dirty="0"/>
+              <a:t> 산업용 보일러 또는 가정용 난방으로 공급된다</a:t>
+            </a:r>
+            <a:r>
+              <a:rPr lang="en-US" altLang="ko-KR" sz="1600" dirty="0"/>
+              <a:t>.</a:t>
+            </a:r>
           </a:p>
         </p:txBody>
       </p:sp>
     </p:spTree>
     <p:extLst>
       <p:ext uri="{BB962C8B-B14F-4D97-AF65-F5344CB8AC3E}">
-        <p14:creationId xmlns:p14="http://schemas.microsoft.com/office/powerpoint/2010/main" val="1523942650"/>
+        <p14:creationId xmlns:p14="http://schemas.microsoft.com/office/powerpoint/2010/main" val="1031140733"/>
       </p:ext>
     </p:extLst>
   </p:cSld>
@@ -9846,7 +10916,7 @@
         <p:cNvPr id="1" name="">
           <a:extLst>
             <a:ext uri="{FF2B5EF4-FFF2-40B4-BE49-F238E27FC236}">
-              <a16:creationId xmlns:a16="http://schemas.microsoft.com/office/drawing/2014/main" id="{BD16502F-0528-3EDF-A225-5DDABB306E5B}"/>
+              <a16:creationId xmlns:a16="http://schemas.microsoft.com/office/drawing/2014/main" id="{A26A5D0F-52DC-8C17-278B-C01AC6196328}"/>
             </a:ext>
           </a:extLst>
         </p:cNvPr>
@@ -9861,49 +10931,40 @@
           <a:chExt cx="0" cy="0"/>
         </a:xfrm>
       </p:grpSpPr>
-      <p:pic>
-        <p:nvPicPr>
-          <p:cNvPr id="6" name="그림 5" descr="텍스트, 로고, 원, 폰트이(가) 표시된 사진&#10;&#10;AI 생성 콘텐츠는 정확하지 않을 수 있습니다.">
+      <p:sp>
+        <p:nvSpPr>
+          <p:cNvPr id="2" name="제목 1">
             <a:extLst>
               <a:ext uri="{FF2B5EF4-FFF2-40B4-BE49-F238E27FC236}">
-                <a16:creationId xmlns:a16="http://schemas.microsoft.com/office/drawing/2014/main" id="{92A372EA-D856-6D5C-A598-D9FB00ABE1AB}"/>
+                <a16:creationId xmlns:a16="http://schemas.microsoft.com/office/drawing/2014/main" id="{869B247A-38BC-1D04-0C2D-8831F1C0EE5B}"/>
               </a:ext>
             </a:extLst>
           </p:cNvPr>
-          <p:cNvPicPr>
-            <a:picLocks noChangeAspect="1"/>
-          </p:cNvPicPr>
-          <p:nvPr/>
-        </p:nvPicPr>
-        <p:blipFill>
-          <a:blip r:embed="rId2">
-            <a:alphaModFix amt="20000"/>
-            <a:extLst>
-              <a:ext uri="{28A0092B-C50C-407E-A947-70E740481C1C}">
-                <a14:useLocalDpi xmlns:a14="http://schemas.microsoft.com/office/drawing/2010/main" val="0"/>
-              </a:ext>
-            </a:extLst>
-          </a:blip>
-          <a:stretch>
-            <a:fillRect/>
-          </a:stretch>
-        </p:blipFill>
-        <p:spPr>
-          <a:xfrm>
-            <a:off x="4012070" y="1673061"/>
-            <a:ext cx="4167861" cy="4167861"/>
-          </a:xfrm>
-          <a:prstGeom prst="rect">
-            <a:avLst/>
-          </a:prstGeom>
-        </p:spPr>
-      </p:pic>
+          <p:cNvSpPr>
+            <a:spLocks noGrp="1"/>
+          </p:cNvSpPr>
+          <p:nvPr>
+            <p:ph type="title"/>
+          </p:nvPr>
+        </p:nvSpPr>
+        <p:spPr/>
+        <p:txBody>
+          <a:bodyPr/>
+          <a:lstStyle/>
+          <a:p>
+            <a:r>
+              <a:rPr lang="ko-KR" altLang="en-US" dirty="0"/>
+              <a:t>수송과 물류</a:t>
+            </a:r>
+          </a:p>
+        </p:txBody>
+      </p:sp>
       <p:sp>
         <p:nvSpPr>
           <p:cNvPr id="4" name="슬라이드 번호 개체 틀 3">
             <a:extLst>
               <a:ext uri="{FF2B5EF4-FFF2-40B4-BE49-F238E27FC236}">
-                <a16:creationId xmlns:a16="http://schemas.microsoft.com/office/drawing/2014/main" id="{05FF8610-BFF7-A94E-BE6D-005ED2BAE116}"/>
+                <a16:creationId xmlns:a16="http://schemas.microsoft.com/office/drawing/2014/main" id="{7D298B12-3289-7642-E92D-690AC3CF6E3A}"/>
               </a:ext>
             </a:extLst>
           </p:cNvPr>
@@ -9929,49 +10990,370 @@
       </p:sp>
       <p:sp>
         <p:nvSpPr>
-          <p:cNvPr id="7" name="제목 1">
+          <p:cNvPr id="3" name="TextBox 2">
             <a:extLst>
               <a:ext uri="{FF2B5EF4-FFF2-40B4-BE49-F238E27FC236}">
-                <a16:creationId xmlns:a16="http://schemas.microsoft.com/office/drawing/2014/main" id="{64D21FAA-7D58-50E2-4F0A-D7ED0636E014}"/>
+                <a16:creationId xmlns:a16="http://schemas.microsoft.com/office/drawing/2014/main" id="{0114A95C-65F7-1045-09EC-8B11A1978CED}"/>
               </a:ext>
             </a:extLst>
           </p:cNvPr>
-          <p:cNvSpPr>
-            <a:spLocks noGrp="1"/>
-          </p:cNvSpPr>
-          <p:nvPr>
-            <p:ph type="title"/>
-          </p:nvPr>
+          <p:cNvSpPr txBox="1"/>
+          <p:nvPr/>
         </p:nvSpPr>
         <p:spPr>
           <a:xfrm>
-            <a:off x="831850" y="3765550"/>
-            <a:ext cx="11150600" cy="652818"/>
+            <a:off x="288790" y="958844"/>
+            <a:ext cx="11118453" cy="5215338"/>
           </a:xfrm>
-          <a:effectLst>
-            <a:reflection blurRad="50800" stA="45000" endPos="44000" dir="5400000" sy="-100000" algn="bl" rotWithShape="0"/>
-          </a:effectLst>
+          <a:prstGeom prst="rect">
+            <a:avLst/>
+          </a:prstGeom>
+          <a:noFill/>
         </p:spPr>
         <p:txBody>
-          <a:bodyPr anchor="b"/>
+          <a:bodyPr wrap="square" rtlCol="0" anchor="t">
+            <a:spAutoFit/>
+          </a:bodyPr>
           <a:lstStyle/>
           <a:p>
-            <a:r>
-              <a:rPr lang="en-US" altLang="ko-KR" sz="4000" b="1" i="0" spc="150" dirty="0"/>
-              <a:t>Section 9. </a:t>
-            </a:r>
-            <a:r>
-              <a:rPr lang="ko-KR" altLang="en-US" sz="4000" b="1" i="0" spc="150" dirty="0"/>
-              <a:t>석탄산업의 혁신과 청정 석탄기술</a:t>
-            </a:r>
-            <a:endParaRPr lang="ko-KR" altLang="en-US" sz="3600" i="0" spc="150" dirty="0"/>
+            <a:pPr marL="377825" indent="-285750">
+              <a:lnSpc>
+                <a:spcPct val="150000"/>
+              </a:lnSpc>
+              <a:buFont typeface="Arial" panose="020B0604020202020204" pitchFamily="34" charset="0"/>
+              <a:buChar char="•"/>
+            </a:pPr>
+            <a:r>
+              <a:rPr lang="ko-KR" altLang="en-US" sz="1600" dirty="0"/>
+              <a:t>석탄은 고체 연료로서 단위 부피당 에너지 밀도가 낮고 무게가 무거우며</a:t>
+            </a:r>
+            <a:r>
+              <a:rPr lang="en-US" altLang="ko-KR" sz="1600" dirty="0"/>
+              <a:t>, </a:t>
+            </a:r>
+            <a:r>
+              <a:rPr lang="ko-KR" altLang="en-US" sz="1600" dirty="0"/>
+              <a:t>일반적으로 생산지와 소비지가 지리적으로 멀기 때문에</a:t>
+            </a:r>
+            <a:r>
+              <a:rPr lang="en-US" altLang="ko-KR" sz="1600" dirty="0"/>
+              <a:t>, </a:t>
+            </a:r>
+            <a:r>
+              <a:rPr lang="ko-KR" altLang="en-US" sz="1600" dirty="0"/>
+              <a:t>수송비용이 전체 공급비용에서 차지하는 비중이 높다</a:t>
+            </a:r>
+            <a:r>
+              <a:rPr lang="en-US" altLang="ko-KR" sz="1600" dirty="0"/>
+              <a:t>.</a:t>
+            </a:r>
+          </a:p>
+          <a:p>
+            <a:pPr marL="377825" indent="-285750">
+              <a:lnSpc>
+                <a:spcPct val="150000"/>
+              </a:lnSpc>
+              <a:buFont typeface="Arial" panose="020B0604020202020204" pitchFamily="34" charset="0"/>
+              <a:buChar char="•"/>
+            </a:pPr>
+            <a:endParaRPr lang="en-US" altLang="ko-KR" sz="1600" dirty="0"/>
+          </a:p>
+          <a:p>
+            <a:pPr marL="377825" indent="-285750">
+              <a:lnSpc>
+                <a:spcPct val="150000"/>
+              </a:lnSpc>
+              <a:buFont typeface="Arial" panose="020B0604020202020204" pitchFamily="34" charset="0"/>
+              <a:buChar char="•"/>
+            </a:pPr>
+            <a:r>
+              <a:rPr lang="ko-KR" altLang="en-US" sz="1600" dirty="0"/>
+              <a:t>석탄 수송에는 다양한 운송 수단이 활용되고</a:t>
+            </a:r>
+            <a:r>
+              <a:rPr lang="en-US" altLang="ko-KR" sz="1600" dirty="0"/>
+              <a:t>, </a:t>
+            </a:r>
+            <a:r>
+              <a:rPr lang="ko-KR" altLang="en-US" sz="1600" dirty="0"/>
+              <a:t>거리</a:t>
+            </a:r>
+            <a:r>
+              <a:rPr lang="en-US" altLang="ko-KR" sz="1600" dirty="0"/>
+              <a:t>, </a:t>
+            </a:r>
+            <a:r>
+              <a:rPr lang="ko-KR" altLang="en-US" sz="1600" dirty="0"/>
+              <a:t>지형 물류</a:t>
+            </a:r>
+            <a:r>
+              <a:rPr lang="en-US" altLang="ko-KR" sz="1600" dirty="0"/>
+              <a:t> </a:t>
+            </a:r>
+            <a:r>
+              <a:rPr lang="ko-KR" altLang="en-US" sz="1600" dirty="0"/>
+              <a:t>인프라</a:t>
+            </a:r>
+            <a:r>
+              <a:rPr lang="en-US" altLang="ko-KR" sz="1600" dirty="0"/>
+              <a:t> </a:t>
+            </a:r>
+            <a:r>
+              <a:rPr lang="ko-KR" altLang="en-US" sz="1600" dirty="0"/>
+              <a:t>등에 따라 선택이 달라진다</a:t>
+            </a:r>
+            <a:r>
+              <a:rPr lang="en-US" altLang="ko-KR" sz="1600" dirty="0"/>
+              <a:t>.</a:t>
+            </a:r>
+          </a:p>
+          <a:p>
+            <a:pPr marL="835025" lvl="1" indent="-285750">
+              <a:lnSpc>
+                <a:spcPct val="150000"/>
+              </a:lnSpc>
+              <a:buFont typeface="Wingdings" panose="05000000000000000000" pitchFamily="2" charset="2"/>
+              <a:buChar char="ü"/>
+            </a:pPr>
+            <a:r>
+              <a:rPr lang="ko-KR" altLang="en-US" sz="1600" dirty="0"/>
+              <a:t>주요 방식으로 철도</a:t>
+            </a:r>
+            <a:r>
+              <a:rPr lang="en-US" altLang="ko-KR" sz="1600" dirty="0"/>
+              <a:t>, </a:t>
+            </a:r>
+            <a:r>
+              <a:rPr lang="ko-KR" altLang="en-US" sz="1600" dirty="0" err="1"/>
+              <a:t>벨트컨베이어</a:t>
+            </a:r>
+            <a:r>
+              <a:rPr lang="en-US" altLang="ko-KR" sz="1600" dirty="0"/>
+              <a:t>, </a:t>
+            </a:r>
+            <a:r>
+              <a:rPr lang="ko-KR" altLang="en-US" sz="1600" dirty="0"/>
+              <a:t>트럭</a:t>
+            </a:r>
+            <a:r>
+              <a:rPr lang="en-US" altLang="ko-KR" sz="1600" dirty="0"/>
+              <a:t>, </a:t>
+            </a:r>
+            <a:r>
+              <a:rPr lang="ko-KR" altLang="en-US" sz="1600" dirty="0" err="1"/>
+              <a:t>내륙수운</a:t>
+            </a:r>
+            <a:r>
+              <a:rPr lang="en-US" altLang="ko-KR" sz="1600" dirty="0"/>
+              <a:t>, </a:t>
+            </a:r>
+            <a:r>
+              <a:rPr lang="ko-KR" altLang="en-US" sz="1600" dirty="0"/>
+              <a:t>해상운송 등이 있다</a:t>
+            </a:r>
+            <a:r>
+              <a:rPr lang="en-US" altLang="ko-KR" sz="1600" dirty="0"/>
+              <a:t>.</a:t>
+            </a:r>
+          </a:p>
+          <a:p>
+            <a:pPr marL="835025" lvl="1" indent="-285750">
+              <a:lnSpc>
+                <a:spcPct val="150000"/>
+              </a:lnSpc>
+              <a:buFont typeface="Wingdings" panose="05000000000000000000" pitchFamily="2" charset="2"/>
+              <a:buChar char="ü"/>
+            </a:pPr>
+            <a:r>
+              <a:rPr lang="ko-KR" altLang="en-US" sz="1600" dirty="0"/>
+              <a:t>단거리 이송에는 트럭이나 컨베이어 벨트</a:t>
+            </a:r>
+            <a:r>
+              <a:rPr lang="en-US" altLang="ko-KR" sz="1600" dirty="0"/>
+              <a:t>, </a:t>
+            </a:r>
+            <a:r>
+              <a:rPr lang="ko-KR" altLang="en-US" sz="1600" dirty="0"/>
+              <a:t>장거리 이송에는 철도와 해상 수송이 일반적이다</a:t>
+            </a:r>
+            <a:r>
+              <a:rPr lang="en-US" altLang="ko-KR" sz="1600" dirty="0"/>
+              <a:t>.</a:t>
+            </a:r>
+          </a:p>
+          <a:p>
+            <a:pPr marL="377825" indent="-285750">
+              <a:lnSpc>
+                <a:spcPct val="150000"/>
+              </a:lnSpc>
+              <a:buFont typeface="Arial" panose="020B0604020202020204" pitchFamily="34" charset="0"/>
+              <a:buChar char="•"/>
+            </a:pPr>
+            <a:r>
+              <a:rPr lang="ko-KR" altLang="en-US" sz="1600" dirty="0"/>
+              <a:t>미국의 경우 철도 운송이 전체 석탄 수송의 </a:t>
+            </a:r>
+            <a:r>
+              <a:rPr lang="en-US" altLang="ko-KR" sz="1600" dirty="0"/>
+              <a:t>70% </a:t>
+            </a:r>
+            <a:r>
+              <a:rPr lang="ko-KR" altLang="en-US" sz="1600" dirty="0"/>
+              <a:t>이상을 차지하며</a:t>
+            </a:r>
+            <a:r>
+              <a:rPr lang="en-US" altLang="ko-KR" sz="1600" dirty="0"/>
+              <a:t>, </a:t>
+            </a:r>
+            <a:r>
+              <a:rPr lang="ko-KR" altLang="en-US" sz="1600" dirty="0" err="1"/>
+              <a:t>파우더리버</a:t>
+            </a:r>
+            <a:r>
+              <a:rPr lang="ko-KR" altLang="en-US" sz="1600" dirty="0"/>
+              <a:t> 분지에서 대형 발전소까지 장거리 이송을 위한 철도망이 정교하게 구축되어 있다</a:t>
+            </a:r>
+            <a:r>
+              <a:rPr lang="en-US" altLang="ko-KR" sz="1600" dirty="0"/>
+              <a:t>.</a:t>
+            </a:r>
+          </a:p>
+          <a:p>
+            <a:pPr marL="377825" indent="-285750">
+              <a:lnSpc>
+                <a:spcPct val="150000"/>
+              </a:lnSpc>
+              <a:buFont typeface="Arial" panose="020B0604020202020204" pitchFamily="34" charset="0"/>
+              <a:buChar char="•"/>
+            </a:pPr>
+            <a:r>
+              <a:rPr lang="ko-KR" altLang="en-US" sz="1600" dirty="0"/>
+              <a:t>인도네시아나 호주는 해상 수출을 위한 대형 항만시설과 연결된 물류 인프라가 중심이며</a:t>
+            </a:r>
+            <a:r>
+              <a:rPr lang="en-US" altLang="ko-KR" sz="1600" dirty="0"/>
+              <a:t>, </a:t>
+            </a:r>
+            <a:r>
+              <a:rPr lang="ko-KR" altLang="en-US" sz="1600" dirty="0"/>
+              <a:t>광산에서 항만까지의 연결성을 최적화하는데 초점을 둔다</a:t>
+            </a:r>
+            <a:r>
+              <a:rPr lang="en-US" altLang="ko-KR" sz="1600" dirty="0"/>
+              <a:t>.</a:t>
+            </a:r>
+          </a:p>
+          <a:p>
+            <a:pPr marL="377825" indent="-285750">
+              <a:lnSpc>
+                <a:spcPct val="150000"/>
+              </a:lnSpc>
+              <a:buFont typeface="Arial" panose="020B0604020202020204" pitchFamily="34" charset="0"/>
+              <a:buChar char="•"/>
+            </a:pPr>
+            <a:endParaRPr lang="en-US" altLang="ko-KR" sz="1600" dirty="0"/>
+          </a:p>
+          <a:p>
+            <a:pPr marL="377825" indent="-285750">
+              <a:lnSpc>
+                <a:spcPct val="150000"/>
+              </a:lnSpc>
+              <a:buFont typeface="Arial" panose="020B0604020202020204" pitchFamily="34" charset="0"/>
+              <a:buChar char="•"/>
+            </a:pPr>
+            <a:r>
+              <a:rPr lang="ko-KR" altLang="en-US" sz="1600" dirty="0"/>
+              <a:t>수송단계에서는 경제성뿐 아니라 연료의 품질 유지가 중요한 고려사항이다</a:t>
+            </a:r>
+            <a:r>
+              <a:rPr lang="en-US" altLang="ko-KR" sz="1600" dirty="0"/>
+              <a:t>.</a:t>
+            </a:r>
+          </a:p>
+          <a:p>
+            <a:pPr marL="835025" lvl="1" indent="-285750">
+              <a:lnSpc>
+                <a:spcPct val="150000"/>
+              </a:lnSpc>
+              <a:buFont typeface="Wingdings" panose="05000000000000000000" pitchFamily="2" charset="2"/>
+              <a:buChar char="ü"/>
+            </a:pPr>
+            <a:r>
+              <a:rPr lang="ko-KR" altLang="en-US" sz="1600" dirty="0"/>
+              <a:t>석탄은 수송 중 분진 발생</a:t>
+            </a:r>
+            <a:r>
+              <a:rPr lang="en-US" altLang="ko-KR" sz="1600" dirty="0"/>
+              <a:t>, </a:t>
+            </a:r>
+            <a:r>
+              <a:rPr lang="ko-KR" altLang="en-US" sz="1600" dirty="0" err="1"/>
+              <a:t>열손실</a:t>
+            </a:r>
+            <a:r>
+              <a:rPr lang="en-US" altLang="ko-KR" sz="1600" dirty="0"/>
+              <a:t>, </a:t>
+            </a:r>
+            <a:r>
+              <a:rPr lang="ko-KR" altLang="en-US" sz="1600" dirty="0"/>
+              <a:t>습기 흡수로 인해 발열량이 저하 될 수 있고</a:t>
+            </a:r>
+            <a:r>
+              <a:rPr lang="en-US" altLang="ko-KR" sz="1600" dirty="0"/>
+              <a:t>, </a:t>
+            </a:r>
+            <a:r>
+              <a:rPr lang="ko-KR" altLang="en-US" sz="1600" dirty="0" err="1"/>
+              <a:t>자발연</a:t>
+            </a:r>
+            <a:r>
+              <a:rPr lang="ko-KR" altLang="en-US" sz="1600" dirty="0"/>
+              <a:t> 위험도 있다</a:t>
+            </a:r>
+            <a:r>
+              <a:rPr lang="en-US" altLang="ko-KR" sz="1600" dirty="0"/>
+              <a:t>.</a:t>
+            </a:r>
+          </a:p>
+          <a:p>
+            <a:pPr marL="835025" lvl="1" indent="-285750">
+              <a:lnSpc>
+                <a:spcPct val="150000"/>
+              </a:lnSpc>
+              <a:buFont typeface="Wingdings" panose="05000000000000000000" pitchFamily="2" charset="2"/>
+              <a:buChar char="ü"/>
+            </a:pPr>
+            <a:r>
+              <a:rPr lang="ko-KR" altLang="en-US" sz="1600" dirty="0"/>
+              <a:t>이러한 손실을 방지하기 위해 적재</a:t>
+            </a:r>
+            <a:r>
+              <a:rPr lang="en-US" altLang="ko-KR" sz="1600" dirty="0"/>
+              <a:t>·</a:t>
+            </a:r>
+            <a:r>
+              <a:rPr lang="ko-KR" altLang="en-US" sz="1600" dirty="0"/>
+              <a:t>피복</a:t>
+            </a:r>
+            <a:r>
+              <a:rPr lang="en-US" altLang="ko-KR" sz="1600" dirty="0"/>
+              <a:t>·</a:t>
+            </a:r>
+            <a:r>
+              <a:rPr lang="ko-KR" altLang="en-US" sz="1600" dirty="0"/>
+              <a:t>환기 전략이 병행되어야 한다</a:t>
+            </a:r>
+            <a:r>
+              <a:rPr lang="en-US" altLang="ko-KR" sz="1600" dirty="0"/>
+              <a:t>.</a:t>
+            </a:r>
           </a:p>
         </p:txBody>
       </p:sp>
     </p:spTree>
     <p:extLst>
       <p:ext uri="{BB962C8B-B14F-4D97-AF65-F5344CB8AC3E}">
-        <p14:creationId xmlns:p14="http://schemas.microsoft.com/office/powerpoint/2010/main" val="1453959967"/>
+        <p14:creationId xmlns:p14="http://schemas.microsoft.com/office/powerpoint/2010/main" val="2032072486"/>
       </p:ext>
     </p:extLst>
   </p:cSld>
@@ -10138,7 +11520,1208 @@
         <p:cNvPr id="1" name="">
           <a:extLst>
             <a:ext uri="{FF2B5EF4-FFF2-40B4-BE49-F238E27FC236}">
-              <a16:creationId xmlns:a16="http://schemas.microsoft.com/office/drawing/2014/main" id="{7FAEBC00-A2FB-71AC-F2E7-A6AB1A2A6E10}"/>
+              <a16:creationId xmlns:a16="http://schemas.microsoft.com/office/drawing/2014/main" id="{5E116D5A-2A2F-B81C-F7CB-15757CF87DEB}"/>
+            </a:ext>
+          </a:extLst>
+        </p:cNvPr>
+        <p:cNvGrpSpPr/>
+        <p:nvPr/>
+      </p:nvGrpSpPr>
+      <p:grpSpPr>
+        <a:xfrm>
+          <a:off x="0" y="0"/>
+          <a:ext cx="0" cy="0"/>
+          <a:chOff x="0" y="0"/>
+          <a:chExt cx="0" cy="0"/>
+        </a:xfrm>
+      </p:grpSpPr>
+      <p:sp>
+        <p:nvSpPr>
+          <p:cNvPr id="2" name="제목 1">
+            <a:extLst>
+              <a:ext uri="{FF2B5EF4-FFF2-40B4-BE49-F238E27FC236}">
+                <a16:creationId xmlns:a16="http://schemas.microsoft.com/office/drawing/2014/main" id="{D73B01AC-0FB1-91A1-DD98-B130DBE10BA9}"/>
+              </a:ext>
+            </a:extLst>
+          </p:cNvPr>
+          <p:cNvSpPr>
+            <a:spLocks noGrp="1"/>
+          </p:cNvSpPr>
+          <p:nvPr>
+            <p:ph type="title"/>
+          </p:nvPr>
+        </p:nvSpPr>
+        <p:spPr/>
+        <p:txBody>
+          <a:bodyPr/>
+          <a:lstStyle/>
+          <a:p>
+            <a:r>
+              <a:rPr lang="ko-KR" altLang="en-US" dirty="0"/>
+              <a:t>전환과 활용</a:t>
+            </a:r>
+          </a:p>
+        </p:txBody>
+      </p:sp>
+      <p:sp>
+        <p:nvSpPr>
+          <p:cNvPr id="4" name="슬라이드 번호 개체 틀 3">
+            <a:extLst>
+              <a:ext uri="{FF2B5EF4-FFF2-40B4-BE49-F238E27FC236}">
+                <a16:creationId xmlns:a16="http://schemas.microsoft.com/office/drawing/2014/main" id="{6781637A-55E1-2C77-342B-325307B4735A}"/>
+              </a:ext>
+            </a:extLst>
+          </p:cNvPr>
+          <p:cNvSpPr>
+            <a:spLocks noGrp="1"/>
+          </p:cNvSpPr>
+          <p:nvPr>
+            <p:ph type="sldNum" sz="quarter" idx="12"/>
+          </p:nvPr>
+        </p:nvSpPr>
+        <p:spPr/>
+        <p:txBody>
+          <a:bodyPr/>
+          <a:lstStyle/>
+          <a:p>
+            <a:fld id="{109C872D-39A9-4065-8BF3-6A613116E2A1}" type="slidenum">
+              <a:rPr lang="ko-KR" altLang="en-US" smtClean="0"/>
+              <a:t>20</a:t>
+            </a:fld>
+            <a:endParaRPr lang="ko-KR" altLang="en-US"/>
+          </a:p>
+        </p:txBody>
+      </p:sp>
+      <p:sp>
+        <p:nvSpPr>
+          <p:cNvPr id="3" name="TextBox 2">
+            <a:extLst>
+              <a:ext uri="{FF2B5EF4-FFF2-40B4-BE49-F238E27FC236}">
+                <a16:creationId xmlns:a16="http://schemas.microsoft.com/office/drawing/2014/main" id="{41F4664C-9B64-CEBB-17CA-5BE8D94E653C}"/>
+              </a:ext>
+            </a:extLst>
+          </p:cNvPr>
+          <p:cNvSpPr txBox="1"/>
+          <p:nvPr/>
+        </p:nvSpPr>
+        <p:spPr>
+          <a:xfrm>
+            <a:off x="288790" y="958844"/>
+            <a:ext cx="11118453" cy="4476675"/>
+          </a:xfrm>
+          <a:prstGeom prst="rect">
+            <a:avLst/>
+          </a:prstGeom>
+          <a:noFill/>
+        </p:spPr>
+        <p:txBody>
+          <a:bodyPr wrap="square" rtlCol="0" anchor="t">
+            <a:spAutoFit/>
+          </a:bodyPr>
+          <a:lstStyle/>
+          <a:p>
+            <a:pPr marL="92075">
+              <a:lnSpc>
+                <a:spcPct val="150000"/>
+              </a:lnSpc>
+            </a:pPr>
+            <a:r>
+              <a:rPr lang="ko-KR" altLang="en-US" sz="1600" u="sng" dirty="0">
+                <a:ln w="3175">
+                  <a:noFill/>
+                </a:ln>
+                <a:latin typeface="HY헤드라인M" panose="02030600000101010101" pitchFamily="18" charset="-127"/>
+                <a:ea typeface="HY헤드라인M" panose="02030600000101010101" pitchFamily="18" charset="-127"/>
+              </a:rPr>
+              <a:t>전환과 활용</a:t>
+            </a:r>
+            <a:endParaRPr lang="en-US" altLang="ko-KR" sz="1600" u="sng" dirty="0">
+              <a:ln w="3175">
+                <a:noFill/>
+              </a:ln>
+              <a:latin typeface="HY헤드라인M" panose="02030600000101010101" pitchFamily="18" charset="-127"/>
+              <a:ea typeface="HY헤드라인M" panose="02030600000101010101" pitchFamily="18" charset="-127"/>
+            </a:endParaRPr>
+          </a:p>
+          <a:p>
+            <a:pPr marL="377825" indent="-285750">
+              <a:lnSpc>
+                <a:spcPct val="150000"/>
+              </a:lnSpc>
+              <a:buFont typeface="Arial" panose="020B0604020202020204" pitchFamily="34" charset="0"/>
+              <a:buChar char="•"/>
+            </a:pPr>
+            <a:r>
+              <a:rPr lang="ko-KR" altLang="en-US" sz="1600" dirty="0"/>
+              <a:t>석탄의 주요 활용처는 전력 생산과 철강 산업으로</a:t>
+            </a:r>
+            <a:r>
+              <a:rPr lang="en-US" altLang="ko-KR" sz="1600" dirty="0"/>
+              <a:t>, </a:t>
+            </a:r>
+            <a:r>
+              <a:rPr lang="ko-KR" altLang="en-US" sz="1600" dirty="0"/>
+              <a:t>이 두 부문이 전체 석탄 수요의 대부분을 차지하고 있다</a:t>
+            </a:r>
+            <a:r>
+              <a:rPr lang="en-US" altLang="ko-KR" sz="1600" dirty="0"/>
+              <a:t>.</a:t>
+            </a:r>
+          </a:p>
+          <a:p>
+            <a:pPr marL="835025" lvl="1" indent="-285750">
+              <a:lnSpc>
+                <a:spcPct val="150000"/>
+              </a:lnSpc>
+              <a:buFont typeface="Wingdings" panose="05000000000000000000" pitchFamily="2" charset="2"/>
+              <a:buChar char="ü"/>
+            </a:pPr>
+            <a:r>
+              <a:rPr lang="ko-KR" altLang="en-US" sz="1600" dirty="0"/>
+              <a:t>전력부문에서는 석탄이 연소 과정을 통해 고온</a:t>
+            </a:r>
+            <a:r>
+              <a:rPr lang="en-US" altLang="ko-KR" sz="1600" dirty="0"/>
+              <a:t>·</a:t>
+            </a:r>
+            <a:r>
+              <a:rPr lang="ko-KR" altLang="en-US" sz="1600" dirty="0"/>
+              <a:t>고압의 증기를 생성하고</a:t>
+            </a:r>
+            <a:r>
+              <a:rPr lang="en-US" altLang="ko-KR" sz="1600" dirty="0"/>
+              <a:t>, </a:t>
+            </a:r>
+            <a:r>
+              <a:rPr lang="ko-KR" altLang="en-US" sz="1600" dirty="0"/>
+              <a:t>이 증기로 증기터빈을 회전시켜 전기를 생산하는 방식이 일반적이다</a:t>
+            </a:r>
+            <a:r>
+              <a:rPr lang="en-US" altLang="ko-KR" sz="1600" dirty="0"/>
+              <a:t>.</a:t>
+            </a:r>
+          </a:p>
+          <a:p>
+            <a:pPr marL="1292225" lvl="2" indent="-285750">
+              <a:lnSpc>
+                <a:spcPct val="150000"/>
+              </a:lnSpc>
+              <a:buFont typeface="Wingdings" panose="05000000000000000000" pitchFamily="2" charset="2"/>
+              <a:buChar char="Ø"/>
+            </a:pPr>
+            <a:r>
+              <a:rPr lang="ko-KR" altLang="en-US" sz="1600" dirty="0"/>
+              <a:t>이를 석탄화력 발전이라고 하며</a:t>
+            </a:r>
+            <a:r>
+              <a:rPr lang="en-US" altLang="ko-KR" sz="1600" dirty="0"/>
+              <a:t>, </a:t>
+            </a:r>
+            <a:r>
+              <a:rPr lang="ko-KR" altLang="en-US" sz="1600" dirty="0"/>
+              <a:t>중국</a:t>
+            </a:r>
+            <a:r>
+              <a:rPr lang="en-US" altLang="ko-KR" sz="1600" dirty="0"/>
+              <a:t>, </a:t>
+            </a:r>
+            <a:r>
+              <a:rPr lang="ko-KR" altLang="en-US" sz="1600" dirty="0"/>
+              <a:t>인도</a:t>
+            </a:r>
+            <a:r>
+              <a:rPr lang="en-US" altLang="ko-KR" sz="1600" dirty="0"/>
+              <a:t>, </a:t>
+            </a:r>
+            <a:r>
+              <a:rPr lang="ko-KR" altLang="en-US" sz="1600" dirty="0"/>
+              <a:t>인도네시아와 같은 개발도상국에서는 석탄 발전이 여전히 전력 공급의 주축을 이루고 있으며</a:t>
+            </a:r>
+            <a:r>
+              <a:rPr lang="en-US" altLang="ko-KR" sz="1600" dirty="0"/>
+              <a:t>, </a:t>
+            </a:r>
+            <a:r>
+              <a:rPr lang="ko-KR" altLang="en-US" sz="1600" dirty="0"/>
+              <a:t>에너지 안보와 경제성 측면에서 중요한 위치를 차지하고 있다</a:t>
+            </a:r>
+            <a:r>
+              <a:rPr lang="en-US" altLang="ko-KR" sz="1600" dirty="0"/>
+              <a:t>.</a:t>
+            </a:r>
+          </a:p>
+          <a:p>
+            <a:pPr marL="835025" lvl="1" indent="-285750">
+              <a:lnSpc>
+                <a:spcPct val="150000"/>
+              </a:lnSpc>
+              <a:buFont typeface="Wingdings" panose="05000000000000000000" pitchFamily="2" charset="2"/>
+              <a:buChar char="ü"/>
+            </a:pPr>
+            <a:r>
+              <a:rPr lang="ko-KR" altLang="en-US" sz="1600" dirty="0"/>
+              <a:t>철강산업에서는 필수적인 에너지원이자 환원제로 사용된다</a:t>
+            </a:r>
+            <a:r>
+              <a:rPr lang="en-US" altLang="ko-KR" sz="1600" dirty="0"/>
+              <a:t>.</a:t>
+            </a:r>
+          </a:p>
+          <a:p>
+            <a:pPr marL="1292225" lvl="2" indent="-285750">
+              <a:lnSpc>
+                <a:spcPct val="150000"/>
+              </a:lnSpc>
+              <a:buFont typeface="Wingdings" panose="05000000000000000000" pitchFamily="2" charset="2"/>
+              <a:buChar char="Ø"/>
+            </a:pPr>
+            <a:r>
+              <a:rPr lang="ko-KR" altLang="en-US" sz="1600" dirty="0"/>
+              <a:t>역청탄은 </a:t>
+            </a:r>
+            <a:r>
+              <a:rPr lang="ko-KR" altLang="en-US" sz="1600" dirty="0" err="1"/>
+              <a:t>코킹</a:t>
+            </a:r>
+            <a:r>
+              <a:rPr lang="ko-KR" altLang="en-US" sz="1600" dirty="0"/>
+              <a:t> 과정을 거쳐 코크스로 전환되며</a:t>
+            </a:r>
+            <a:r>
+              <a:rPr lang="en-US" altLang="ko-KR" sz="1600" dirty="0"/>
+              <a:t>, </a:t>
+            </a:r>
+            <a:r>
+              <a:rPr lang="ko-KR" altLang="en-US" sz="1600" dirty="0"/>
+              <a:t>이는 용광로에서 철광석을 환원시켜 쇳물을 생산하는 데 핵심적인 역할을 한다</a:t>
+            </a:r>
+            <a:r>
+              <a:rPr lang="en-US" altLang="ko-KR" sz="1600" dirty="0"/>
+              <a:t>.</a:t>
+            </a:r>
+          </a:p>
+          <a:p>
+            <a:pPr marL="1292225" lvl="2" indent="-285750">
+              <a:lnSpc>
+                <a:spcPct val="150000"/>
+              </a:lnSpc>
+              <a:buFont typeface="Wingdings" panose="05000000000000000000" pitchFamily="2" charset="2"/>
+              <a:buChar char="Ø"/>
+            </a:pPr>
+            <a:r>
+              <a:rPr lang="ko-KR" altLang="en-US" sz="1600" dirty="0"/>
+              <a:t>코크스는 단순한 열원 이상의 역할을 하며</a:t>
+            </a:r>
+            <a:r>
+              <a:rPr lang="en-US" altLang="ko-KR" sz="1600" dirty="0"/>
+              <a:t>, </a:t>
+            </a:r>
+            <a:r>
+              <a:rPr lang="ko-KR" altLang="en-US" sz="1600" dirty="0"/>
+              <a:t>고온 유지</a:t>
+            </a:r>
+            <a:r>
+              <a:rPr lang="en-US" altLang="ko-KR" sz="1600" dirty="0"/>
+              <a:t>, </a:t>
+            </a:r>
+            <a:r>
+              <a:rPr lang="ko-KR" altLang="en-US" sz="1600" dirty="0"/>
+              <a:t>가스 투과성 확보</a:t>
+            </a:r>
+            <a:r>
+              <a:rPr lang="en-US" altLang="ko-KR" sz="1600" dirty="0"/>
+              <a:t>, </a:t>
+            </a:r>
+            <a:r>
+              <a:rPr lang="ko-KR" altLang="en-US" sz="1600" dirty="0"/>
+              <a:t>환원 반응 유도 등 다기능성 물질로 활용된다</a:t>
+            </a:r>
+            <a:r>
+              <a:rPr lang="en-US" altLang="ko-KR" sz="1600" dirty="0"/>
+              <a:t>.</a:t>
+            </a:r>
+          </a:p>
+          <a:p>
+            <a:pPr marL="1292225" lvl="2" indent="-285750">
+              <a:lnSpc>
+                <a:spcPct val="150000"/>
+              </a:lnSpc>
+              <a:buFont typeface="Wingdings" panose="05000000000000000000" pitchFamily="2" charset="2"/>
+              <a:buChar char="Ø"/>
+            </a:pPr>
+            <a:r>
+              <a:rPr lang="ko-KR" altLang="en-US" sz="1600" dirty="0"/>
+              <a:t>용광로 기반 제철공정에서는 고품질 코크스 공급이 생산성과 직결된다</a:t>
+            </a:r>
+            <a:r>
+              <a:rPr lang="en-US" altLang="ko-KR" sz="1600" dirty="0"/>
+              <a:t>.</a:t>
+            </a:r>
+          </a:p>
+        </p:txBody>
+      </p:sp>
+    </p:spTree>
+    <p:extLst>
+      <p:ext uri="{BB962C8B-B14F-4D97-AF65-F5344CB8AC3E}">
+        <p14:creationId xmlns:p14="http://schemas.microsoft.com/office/powerpoint/2010/main" val="495564301"/>
+      </p:ext>
+    </p:extLst>
+  </p:cSld>
+  <p:clrMapOvr>
+    <a:masterClrMapping/>
+  </p:clrMapOvr>
+</p:sld>
+</file>
+
+<file path=ppt/slides/slide21.xml><?xml version="1.0" encoding="utf-8"?>
+<p:sld xmlns:a="http://schemas.openxmlformats.org/drawingml/2006/main" xmlns:r="http://schemas.openxmlformats.org/officeDocument/2006/relationships" xmlns:p="http://schemas.openxmlformats.org/presentationml/2006/main">
+  <p:cSld>
+    <p:spTree>
+      <p:nvGrpSpPr>
+        <p:cNvPr id="1" name="">
+          <a:extLst>
+            <a:ext uri="{FF2B5EF4-FFF2-40B4-BE49-F238E27FC236}">
+              <a16:creationId xmlns:a16="http://schemas.microsoft.com/office/drawing/2014/main" id="{11315ED4-EF61-75B1-069E-AA99B1BD964F}"/>
+            </a:ext>
+          </a:extLst>
+        </p:cNvPr>
+        <p:cNvGrpSpPr/>
+        <p:nvPr/>
+      </p:nvGrpSpPr>
+      <p:grpSpPr>
+        <a:xfrm>
+          <a:off x="0" y="0"/>
+          <a:ext cx="0" cy="0"/>
+          <a:chOff x="0" y="0"/>
+          <a:chExt cx="0" cy="0"/>
+        </a:xfrm>
+      </p:grpSpPr>
+      <p:sp>
+        <p:nvSpPr>
+          <p:cNvPr id="2" name="제목 1">
+            <a:extLst>
+              <a:ext uri="{FF2B5EF4-FFF2-40B4-BE49-F238E27FC236}">
+                <a16:creationId xmlns:a16="http://schemas.microsoft.com/office/drawing/2014/main" id="{B33FE562-92A3-95D4-03DE-AD56DA1915D4}"/>
+              </a:ext>
+            </a:extLst>
+          </p:cNvPr>
+          <p:cNvSpPr>
+            <a:spLocks noGrp="1"/>
+          </p:cNvSpPr>
+          <p:nvPr>
+            <p:ph type="title"/>
+          </p:nvPr>
+        </p:nvSpPr>
+        <p:spPr/>
+        <p:txBody>
+          <a:bodyPr/>
+          <a:lstStyle/>
+          <a:p>
+            <a:r>
+              <a:rPr lang="ko-KR" altLang="en-US" dirty="0"/>
+              <a:t>전환과 활용</a:t>
+            </a:r>
+          </a:p>
+        </p:txBody>
+      </p:sp>
+      <p:sp>
+        <p:nvSpPr>
+          <p:cNvPr id="4" name="슬라이드 번호 개체 틀 3">
+            <a:extLst>
+              <a:ext uri="{FF2B5EF4-FFF2-40B4-BE49-F238E27FC236}">
+                <a16:creationId xmlns:a16="http://schemas.microsoft.com/office/drawing/2014/main" id="{EA4E4C45-DC1F-C6A8-50C7-CBCF98BBDB48}"/>
+              </a:ext>
+            </a:extLst>
+          </p:cNvPr>
+          <p:cNvSpPr>
+            <a:spLocks noGrp="1"/>
+          </p:cNvSpPr>
+          <p:nvPr>
+            <p:ph type="sldNum" sz="quarter" idx="12"/>
+          </p:nvPr>
+        </p:nvSpPr>
+        <p:spPr/>
+        <p:txBody>
+          <a:bodyPr/>
+          <a:lstStyle/>
+          <a:p>
+            <a:fld id="{109C872D-39A9-4065-8BF3-6A613116E2A1}" type="slidenum">
+              <a:rPr lang="ko-KR" altLang="en-US" smtClean="0"/>
+              <a:t>21</a:t>
+            </a:fld>
+            <a:endParaRPr lang="ko-KR" altLang="en-US"/>
+          </a:p>
+        </p:txBody>
+      </p:sp>
+      <p:sp>
+        <p:nvSpPr>
+          <p:cNvPr id="3" name="TextBox 2">
+            <a:extLst>
+              <a:ext uri="{FF2B5EF4-FFF2-40B4-BE49-F238E27FC236}">
+                <a16:creationId xmlns:a16="http://schemas.microsoft.com/office/drawing/2014/main" id="{3FCB0206-CB69-CFCF-A12B-DB0EAAE63989}"/>
+              </a:ext>
+            </a:extLst>
+          </p:cNvPr>
+          <p:cNvSpPr txBox="1"/>
+          <p:nvPr/>
+        </p:nvSpPr>
+        <p:spPr>
+          <a:xfrm>
+            <a:off x="288790" y="958844"/>
+            <a:ext cx="11118453" cy="3738011"/>
+          </a:xfrm>
+          <a:prstGeom prst="rect">
+            <a:avLst/>
+          </a:prstGeom>
+          <a:noFill/>
+        </p:spPr>
+        <p:txBody>
+          <a:bodyPr wrap="square" rtlCol="0" anchor="t">
+            <a:spAutoFit/>
+          </a:bodyPr>
+          <a:lstStyle/>
+          <a:p>
+            <a:pPr marL="377825" indent="-285750">
+              <a:lnSpc>
+                <a:spcPct val="150000"/>
+              </a:lnSpc>
+              <a:buFont typeface="Arial" panose="020B0604020202020204" pitchFamily="34" charset="0"/>
+              <a:buChar char="•"/>
+            </a:pPr>
+            <a:r>
+              <a:rPr lang="ko-KR" altLang="en-US" sz="1600" dirty="0"/>
+              <a:t>이 외에도  석탄은 가스화 및 액화 등의 전환 기술을 통해 합성가스</a:t>
+            </a:r>
+            <a:r>
+              <a:rPr lang="en-US" altLang="ko-KR" sz="1600" dirty="0"/>
+              <a:t>, </a:t>
+            </a:r>
+            <a:r>
+              <a:rPr lang="ko-KR" altLang="en-US" sz="1600" dirty="0"/>
+              <a:t>화학제품</a:t>
+            </a:r>
+            <a:r>
+              <a:rPr lang="en-US" altLang="ko-KR" sz="1600" dirty="0"/>
+              <a:t>, </a:t>
+            </a:r>
+            <a:r>
+              <a:rPr lang="ko-KR" altLang="en-US" sz="1600" dirty="0"/>
+              <a:t>액체연료 등으로도 활용될 수 있다</a:t>
+            </a:r>
+            <a:r>
+              <a:rPr lang="en-US" altLang="ko-KR" sz="1600" dirty="0"/>
+              <a:t>.</a:t>
+            </a:r>
+          </a:p>
+          <a:p>
+            <a:pPr marL="835025" lvl="1" indent="-285750">
+              <a:lnSpc>
+                <a:spcPct val="150000"/>
+              </a:lnSpc>
+              <a:buFont typeface="Wingdings" panose="05000000000000000000" pitchFamily="2" charset="2"/>
+              <a:buChar char="ü"/>
+            </a:pPr>
+            <a:r>
+              <a:rPr lang="ko-KR" altLang="en-US" sz="1600" dirty="0"/>
+              <a:t>석탄가스화는 산소와 수증기 하에서 석탄을 불완전 연소시켜 일산화탄소와 수소를 생성하는 과정이다</a:t>
+            </a:r>
+            <a:r>
+              <a:rPr lang="en-US" altLang="ko-KR" sz="1600" dirty="0"/>
+              <a:t>.</a:t>
+            </a:r>
+          </a:p>
+          <a:p>
+            <a:pPr marL="1292225" lvl="2" indent="-285750">
+              <a:lnSpc>
+                <a:spcPct val="150000"/>
+              </a:lnSpc>
+              <a:buFont typeface="Wingdings" panose="05000000000000000000" pitchFamily="2" charset="2"/>
+              <a:buChar char="Ø"/>
+            </a:pPr>
+            <a:r>
+              <a:rPr lang="ko-KR" altLang="en-US" sz="1600" dirty="0"/>
+              <a:t>이 합성가스는 발전</a:t>
+            </a:r>
+            <a:r>
+              <a:rPr lang="en-US" altLang="ko-KR" sz="1600" dirty="0"/>
+              <a:t>, </a:t>
+            </a:r>
+            <a:r>
+              <a:rPr lang="ko-KR" altLang="en-US" sz="1600" dirty="0"/>
+              <a:t>수소 생산</a:t>
+            </a:r>
+            <a:r>
+              <a:rPr lang="en-US" altLang="ko-KR" sz="1600" dirty="0"/>
+              <a:t>, </a:t>
+            </a:r>
+            <a:r>
+              <a:rPr lang="ko-KR" altLang="en-US" sz="1600" dirty="0"/>
+              <a:t>화학 원료 등 다양한 용도로 사용될 수 있다</a:t>
+            </a:r>
+            <a:r>
+              <a:rPr lang="en-US" altLang="ko-KR" sz="1600" dirty="0"/>
+              <a:t>.</a:t>
+            </a:r>
+          </a:p>
+          <a:p>
+            <a:pPr marL="835025" lvl="1" indent="-285750">
+              <a:lnSpc>
+                <a:spcPct val="150000"/>
+              </a:lnSpc>
+              <a:buFont typeface="Wingdings" panose="05000000000000000000" pitchFamily="2" charset="2"/>
+              <a:buChar char="ü"/>
+            </a:pPr>
+            <a:r>
+              <a:rPr lang="ko-KR" altLang="en-US" sz="1600" dirty="0"/>
+              <a:t>석탄액화는 고온</a:t>
+            </a:r>
+            <a:r>
+              <a:rPr lang="en-US" altLang="ko-KR" sz="1600" dirty="0"/>
+              <a:t>·</a:t>
+            </a:r>
+            <a:r>
+              <a:rPr lang="ko-KR" altLang="en-US" sz="1600" dirty="0"/>
+              <a:t>고압 조건에서 석탄을 직접 또는 간접적으로 액체연료로 전환하는 기술이다</a:t>
+            </a:r>
+            <a:r>
+              <a:rPr lang="en-US" altLang="ko-KR" sz="1600" dirty="0"/>
+              <a:t>.</a:t>
+            </a:r>
+          </a:p>
+          <a:p>
+            <a:pPr marL="1292225" lvl="2" indent="-285750">
+              <a:lnSpc>
+                <a:spcPct val="150000"/>
+              </a:lnSpc>
+              <a:buFont typeface="Wingdings" panose="05000000000000000000" pitchFamily="2" charset="2"/>
+              <a:buChar char="Ø"/>
+            </a:pPr>
+            <a:r>
+              <a:rPr lang="ko-KR" altLang="en-US" sz="1600" dirty="0"/>
+              <a:t>액체연료 수입 의존도가 높은 국가에서 에너지 안보 수단으로 활용될 수 있다</a:t>
+            </a:r>
+            <a:r>
+              <a:rPr lang="en-US" altLang="ko-KR" sz="1600" dirty="0"/>
+              <a:t>.</a:t>
+            </a:r>
+          </a:p>
+          <a:p>
+            <a:pPr marL="377825" indent="-285750">
+              <a:lnSpc>
+                <a:spcPct val="150000"/>
+              </a:lnSpc>
+              <a:buFont typeface="Arial" panose="020B0604020202020204" pitchFamily="34" charset="0"/>
+              <a:buChar char="•"/>
+            </a:pPr>
+            <a:endParaRPr lang="en-US" altLang="ko-KR" sz="1600" dirty="0"/>
+          </a:p>
+          <a:p>
+            <a:pPr marL="377825" indent="-285750">
+              <a:lnSpc>
+                <a:spcPct val="150000"/>
+              </a:lnSpc>
+              <a:buFont typeface="Arial" panose="020B0604020202020204" pitchFamily="34" charset="0"/>
+              <a:buChar char="•"/>
+            </a:pPr>
+            <a:r>
+              <a:rPr lang="ko-KR" altLang="en-US" sz="1600" dirty="0"/>
+              <a:t>그러나 이러한 석탄의 전환기술은 고비용</a:t>
+            </a:r>
+            <a:r>
+              <a:rPr lang="en-US" altLang="ko-KR" sz="1600" dirty="0"/>
+              <a:t>, </a:t>
+            </a:r>
+            <a:r>
+              <a:rPr lang="ko-KR" altLang="en-US" sz="1600" dirty="0"/>
+              <a:t>기술 복잡성</a:t>
+            </a:r>
+            <a:r>
+              <a:rPr lang="en-US" altLang="ko-KR" sz="1600" dirty="0"/>
+              <a:t>, </a:t>
+            </a:r>
+            <a:r>
+              <a:rPr lang="ko-KR" altLang="en-US" sz="1600" dirty="0"/>
+              <a:t>에너지 소비량이 크며</a:t>
+            </a:r>
+            <a:r>
+              <a:rPr lang="en-US" altLang="ko-KR" sz="1600" dirty="0"/>
+              <a:t>, </a:t>
+            </a:r>
+            <a:r>
+              <a:rPr lang="ko-KR" altLang="en-US" sz="1600" dirty="0"/>
+              <a:t>무엇보다도 이산화탄소 배출</a:t>
+            </a:r>
+            <a:r>
+              <a:rPr lang="en-US" altLang="ko-KR" sz="1600" dirty="0"/>
+              <a:t>, </a:t>
+            </a:r>
+            <a:r>
+              <a:rPr lang="ko-KR" altLang="en-US" sz="1600" dirty="0"/>
+              <a:t>폐수 및 고형폐기물 발생 등의 환경문제로 상업적 활용이 제한적이다</a:t>
+            </a:r>
+            <a:r>
+              <a:rPr lang="en-US" altLang="ko-KR" sz="1600" dirty="0"/>
+              <a:t>.</a:t>
+            </a:r>
+          </a:p>
+          <a:p>
+            <a:pPr marL="835025" lvl="1" indent="-285750">
+              <a:lnSpc>
+                <a:spcPct val="150000"/>
+              </a:lnSpc>
+              <a:buFont typeface="Wingdings" panose="05000000000000000000" pitchFamily="2" charset="2"/>
+              <a:buChar char="ü"/>
+            </a:pPr>
+            <a:r>
+              <a:rPr lang="ko-KR" altLang="en-US" sz="1600" dirty="0"/>
+              <a:t>기후변화 대응이 국제적 의무로 자리잡은 이후에는 석탄 전환 기술의 상용화는 </a:t>
+            </a:r>
+            <a:r>
+              <a:rPr lang="ko-KR" altLang="en-US" sz="1600" dirty="0" err="1"/>
+              <a:t>탄소포집</a:t>
+            </a:r>
+            <a:r>
+              <a:rPr lang="en-US" altLang="ko-KR" sz="1600" dirty="0"/>
+              <a:t>·</a:t>
+            </a:r>
+            <a:r>
+              <a:rPr lang="ko-KR" altLang="en-US" sz="1600" dirty="0"/>
+              <a:t>저장 기술과의 연계 없이는 확장되기 어려운 상황이다</a:t>
+            </a:r>
+            <a:r>
+              <a:rPr lang="en-US" altLang="ko-KR" sz="1600" dirty="0"/>
+              <a:t>.</a:t>
+            </a:r>
+          </a:p>
+        </p:txBody>
+      </p:sp>
+    </p:spTree>
+    <p:extLst>
+      <p:ext uri="{BB962C8B-B14F-4D97-AF65-F5344CB8AC3E}">
+        <p14:creationId xmlns:p14="http://schemas.microsoft.com/office/powerpoint/2010/main" val="675372654"/>
+      </p:ext>
+    </p:extLst>
+  </p:cSld>
+  <p:clrMapOvr>
+    <a:masterClrMapping/>
+  </p:clrMapOvr>
+</p:sld>
+</file>
+
+<file path=ppt/slides/slide22.xml><?xml version="1.0" encoding="utf-8"?>
+<p:sld xmlns:a="http://schemas.openxmlformats.org/drawingml/2006/main" xmlns:r="http://schemas.openxmlformats.org/officeDocument/2006/relationships" xmlns:p="http://schemas.openxmlformats.org/presentationml/2006/main">
+  <p:cSld>
+    <p:spTree>
+      <p:nvGrpSpPr>
+        <p:cNvPr id="1" name="">
+          <a:extLst>
+            <a:ext uri="{FF2B5EF4-FFF2-40B4-BE49-F238E27FC236}">
+              <a16:creationId xmlns:a16="http://schemas.microsoft.com/office/drawing/2014/main" id="{E1BF516A-30EF-5EE6-8D04-32415C321EA9}"/>
+            </a:ext>
+          </a:extLst>
+        </p:cNvPr>
+        <p:cNvGrpSpPr/>
+        <p:nvPr/>
+      </p:nvGrpSpPr>
+      <p:grpSpPr>
+        <a:xfrm>
+          <a:off x="0" y="0"/>
+          <a:ext cx="0" cy="0"/>
+          <a:chOff x="0" y="0"/>
+          <a:chExt cx="0" cy="0"/>
+        </a:xfrm>
+      </p:grpSpPr>
+      <p:sp>
+        <p:nvSpPr>
+          <p:cNvPr id="2" name="제목 1">
+            <a:extLst>
+              <a:ext uri="{FF2B5EF4-FFF2-40B4-BE49-F238E27FC236}">
+                <a16:creationId xmlns:a16="http://schemas.microsoft.com/office/drawing/2014/main" id="{F596295E-9343-4F74-2074-0CFD49D183D2}"/>
+              </a:ext>
+            </a:extLst>
+          </p:cNvPr>
+          <p:cNvSpPr>
+            <a:spLocks noGrp="1"/>
+          </p:cNvSpPr>
+          <p:nvPr>
+            <p:ph type="title"/>
+          </p:nvPr>
+        </p:nvSpPr>
+        <p:spPr/>
+        <p:txBody>
+          <a:bodyPr/>
+          <a:lstStyle/>
+          <a:p>
+            <a:r>
+              <a:rPr lang="ko-KR" altLang="en-US" dirty="0"/>
+              <a:t>판매</a:t>
+            </a:r>
+          </a:p>
+        </p:txBody>
+      </p:sp>
+      <p:sp>
+        <p:nvSpPr>
+          <p:cNvPr id="4" name="슬라이드 번호 개체 틀 3">
+            <a:extLst>
+              <a:ext uri="{FF2B5EF4-FFF2-40B4-BE49-F238E27FC236}">
+                <a16:creationId xmlns:a16="http://schemas.microsoft.com/office/drawing/2014/main" id="{2AEC1FA6-7CD5-422D-1E44-D1D5E82160CE}"/>
+              </a:ext>
+            </a:extLst>
+          </p:cNvPr>
+          <p:cNvSpPr>
+            <a:spLocks noGrp="1"/>
+          </p:cNvSpPr>
+          <p:nvPr>
+            <p:ph type="sldNum" sz="quarter" idx="12"/>
+          </p:nvPr>
+        </p:nvSpPr>
+        <p:spPr/>
+        <p:txBody>
+          <a:bodyPr/>
+          <a:lstStyle/>
+          <a:p>
+            <a:fld id="{109C872D-39A9-4065-8BF3-6A613116E2A1}" type="slidenum">
+              <a:rPr lang="ko-KR" altLang="en-US" smtClean="0"/>
+              <a:t>22</a:t>
+            </a:fld>
+            <a:endParaRPr lang="ko-KR" altLang="en-US"/>
+          </a:p>
+        </p:txBody>
+      </p:sp>
+      <p:sp>
+        <p:nvSpPr>
+          <p:cNvPr id="3" name="TextBox 2">
+            <a:extLst>
+              <a:ext uri="{FF2B5EF4-FFF2-40B4-BE49-F238E27FC236}">
+                <a16:creationId xmlns:a16="http://schemas.microsoft.com/office/drawing/2014/main" id="{B8CDB8E2-9DF9-B62E-BE95-B32FC3361710}"/>
+              </a:ext>
+            </a:extLst>
+          </p:cNvPr>
+          <p:cNvSpPr txBox="1"/>
+          <p:nvPr/>
+        </p:nvSpPr>
+        <p:spPr>
+          <a:xfrm>
+            <a:off x="288790" y="958844"/>
+            <a:ext cx="11118453" cy="5584670"/>
+          </a:xfrm>
+          <a:prstGeom prst="rect">
+            <a:avLst/>
+          </a:prstGeom>
+          <a:noFill/>
+        </p:spPr>
+        <p:txBody>
+          <a:bodyPr wrap="square" rtlCol="0" anchor="t">
+            <a:spAutoFit/>
+          </a:bodyPr>
+          <a:lstStyle/>
+          <a:p>
+            <a:pPr marL="377825" indent="-285750">
+              <a:lnSpc>
+                <a:spcPct val="150000"/>
+              </a:lnSpc>
+              <a:buFont typeface="Arial" panose="020B0604020202020204" pitchFamily="34" charset="0"/>
+              <a:buChar char="•"/>
+            </a:pPr>
+            <a:r>
+              <a:rPr lang="ko-KR" altLang="en-US" sz="1600" dirty="0"/>
+              <a:t>석탄의 주요 구매자는 화력발전소</a:t>
+            </a:r>
+            <a:r>
+              <a:rPr lang="en-US" altLang="ko-KR" sz="1600" dirty="0"/>
+              <a:t>, </a:t>
+            </a:r>
+            <a:r>
+              <a:rPr lang="ko-KR" altLang="en-US" sz="1600" dirty="0"/>
+              <a:t>제철소</a:t>
+            </a:r>
+            <a:r>
+              <a:rPr lang="en-US" altLang="ko-KR" sz="1600" dirty="0"/>
+              <a:t>, </a:t>
+            </a:r>
+            <a:r>
+              <a:rPr lang="ko-KR" altLang="en-US" sz="1600" dirty="0"/>
+              <a:t>시멘트 공장</a:t>
+            </a:r>
+            <a:r>
+              <a:rPr lang="en-US" altLang="ko-KR" sz="1600" dirty="0"/>
+              <a:t>, </a:t>
+            </a:r>
+            <a:r>
+              <a:rPr lang="ko-KR" altLang="en-US" sz="1600" dirty="0"/>
+              <a:t>산업용 보일러 시설 등으로 구성되며</a:t>
+            </a:r>
+            <a:r>
+              <a:rPr lang="en-US" altLang="ko-KR" sz="1600" dirty="0"/>
+              <a:t>, </a:t>
+            </a:r>
+            <a:r>
+              <a:rPr lang="ko-KR" altLang="en-US" sz="1600" dirty="0"/>
+              <a:t>판매는 일반적으로 직접 계약 또는 중개인을 통한 상업 거래 방식으로 이루어진다</a:t>
+            </a:r>
+            <a:r>
+              <a:rPr lang="en-US" altLang="ko-KR" sz="1600" dirty="0"/>
+              <a:t>.</a:t>
+            </a:r>
+          </a:p>
+          <a:p>
+            <a:pPr marL="835025" lvl="1" indent="-285750">
+              <a:lnSpc>
+                <a:spcPct val="150000"/>
+              </a:lnSpc>
+              <a:buFont typeface="Wingdings" panose="05000000000000000000" pitchFamily="2" charset="2"/>
+              <a:buChar char="ü"/>
+            </a:pPr>
+            <a:r>
+              <a:rPr lang="ko-KR" altLang="en-US" sz="1600" dirty="0"/>
+              <a:t>거래는 일정 물량을 장기간에 걸쳐 공급하는 장기계약 형태로 체결되기도 하며</a:t>
+            </a:r>
+            <a:r>
+              <a:rPr lang="en-US" altLang="ko-KR" sz="1600" dirty="0"/>
+              <a:t>, </a:t>
+            </a:r>
+            <a:r>
+              <a:rPr lang="ko-KR" altLang="en-US" sz="1600" dirty="0"/>
+              <a:t>시장 가격 변동에 따라 수시로 조정되는 단기 현물거래를 병행하는 경우도 많다</a:t>
+            </a:r>
+            <a:r>
+              <a:rPr lang="en-US" altLang="ko-KR" sz="1600" dirty="0"/>
+              <a:t>.</a:t>
+            </a:r>
+          </a:p>
+          <a:p>
+            <a:pPr marL="1292225" lvl="2" indent="-285750">
+              <a:lnSpc>
+                <a:spcPct val="150000"/>
+              </a:lnSpc>
+              <a:buFont typeface="Wingdings" panose="05000000000000000000" pitchFamily="2" charset="2"/>
+              <a:buChar char="Ø"/>
+            </a:pPr>
+            <a:r>
+              <a:rPr lang="ko-KR" altLang="en-US" sz="1600" dirty="0"/>
+              <a:t>단기거래는 국제 시황에 민감하게 반응하며</a:t>
+            </a:r>
+            <a:r>
+              <a:rPr lang="en-US" altLang="ko-KR" sz="1600" dirty="0"/>
+              <a:t>, </a:t>
+            </a:r>
+            <a:r>
+              <a:rPr lang="ko-KR" altLang="en-US" sz="1600" dirty="0"/>
+              <a:t>계절 수요</a:t>
+            </a:r>
+            <a:r>
+              <a:rPr lang="en-US" altLang="ko-KR" sz="1600" dirty="0"/>
+              <a:t>, </a:t>
+            </a:r>
+            <a:r>
+              <a:rPr lang="ko-KR" altLang="en-US" sz="1600" dirty="0"/>
+              <a:t>해상물류 상황</a:t>
+            </a:r>
+            <a:r>
+              <a:rPr lang="en-US" altLang="ko-KR" sz="1600" dirty="0"/>
+              <a:t>, </a:t>
+            </a:r>
+            <a:r>
+              <a:rPr lang="ko-KR" altLang="en-US" sz="1600" dirty="0"/>
+              <a:t>환율 등에 영향을 받는다</a:t>
+            </a:r>
+            <a:r>
+              <a:rPr lang="en-US" altLang="ko-KR" sz="1600" dirty="0"/>
+              <a:t>.</a:t>
+            </a:r>
+          </a:p>
+          <a:p>
+            <a:pPr marL="377825" indent="-285750">
+              <a:lnSpc>
+                <a:spcPct val="150000"/>
+              </a:lnSpc>
+              <a:buFont typeface="Arial" panose="020B0604020202020204" pitchFamily="34" charset="0"/>
+              <a:buChar char="•"/>
+            </a:pPr>
+            <a:r>
+              <a:rPr lang="ko-KR" altLang="en-US" sz="1600" dirty="0"/>
+              <a:t>석탄의 가격은 여러 요인에 영향을 반영하여 결정되는데</a:t>
+            </a:r>
+            <a:r>
+              <a:rPr lang="en-US" altLang="ko-KR" sz="1600" dirty="0"/>
+              <a:t>, </a:t>
+            </a:r>
+            <a:r>
+              <a:rPr lang="ko-KR" altLang="en-US" sz="1600" dirty="0"/>
+              <a:t>가장 중요한 기준은 석탄의 발열량이다</a:t>
+            </a:r>
+            <a:r>
+              <a:rPr lang="en-US" altLang="ko-KR" sz="1600" dirty="0"/>
+              <a:t>.</a:t>
+            </a:r>
+          </a:p>
+          <a:p>
+            <a:pPr marL="835025" lvl="1" indent="-285750">
+              <a:lnSpc>
+                <a:spcPct val="150000"/>
+              </a:lnSpc>
+              <a:buFont typeface="Wingdings" panose="05000000000000000000" pitchFamily="2" charset="2"/>
+              <a:buChar char="ü"/>
+            </a:pPr>
+            <a:r>
+              <a:rPr lang="ko-KR" altLang="en-US" sz="1600" dirty="0"/>
+              <a:t>발열량이 높을수록 더 높은 가격을 형성하지만</a:t>
+            </a:r>
+            <a:r>
+              <a:rPr lang="en-US" altLang="ko-KR" sz="1600" dirty="0"/>
+              <a:t>, </a:t>
+            </a:r>
+            <a:r>
+              <a:rPr lang="ko-KR" altLang="en-US" sz="1600" dirty="0"/>
+              <a:t>황과 회분 함량</a:t>
+            </a:r>
+            <a:r>
+              <a:rPr lang="en-US" altLang="ko-KR" sz="1600" dirty="0"/>
+              <a:t>, </a:t>
+            </a:r>
+            <a:r>
+              <a:rPr lang="ko-KR" altLang="en-US" sz="1600" dirty="0"/>
+              <a:t>수분 함량</a:t>
+            </a:r>
+            <a:r>
+              <a:rPr lang="en-US" altLang="ko-KR" sz="1600" dirty="0"/>
+              <a:t>, </a:t>
+            </a:r>
+            <a:r>
+              <a:rPr lang="ko-KR" altLang="en-US" sz="1600" dirty="0"/>
+              <a:t>입자 크기와 </a:t>
+            </a:r>
+            <a:r>
+              <a:rPr lang="ko-KR" altLang="en-US" sz="1600" dirty="0" err="1"/>
+              <a:t>균일성</a:t>
+            </a:r>
+            <a:r>
+              <a:rPr lang="ko-KR" altLang="en-US" sz="1600" dirty="0"/>
+              <a:t> 등도 중요한 가격 결정 변수로 작용한다</a:t>
+            </a:r>
+            <a:r>
+              <a:rPr lang="en-US" altLang="ko-KR" sz="1600" dirty="0"/>
+              <a:t>.</a:t>
+            </a:r>
+          </a:p>
+          <a:p>
+            <a:pPr marL="1292225" lvl="2" indent="-285750">
+              <a:lnSpc>
+                <a:spcPct val="150000"/>
+              </a:lnSpc>
+              <a:buFont typeface="Wingdings" panose="05000000000000000000" pitchFamily="2" charset="2"/>
+              <a:buChar char="Ø"/>
+            </a:pPr>
+            <a:r>
+              <a:rPr lang="ko-KR" altLang="en-US" sz="1600" dirty="0"/>
+              <a:t>예컨대</a:t>
+            </a:r>
+            <a:r>
+              <a:rPr lang="en-US" altLang="ko-KR" sz="1600" dirty="0"/>
+              <a:t>, </a:t>
+            </a:r>
+            <a:r>
+              <a:rPr lang="ko-KR" altLang="en-US" sz="1600" dirty="0" err="1"/>
+              <a:t>고황</a:t>
+            </a:r>
+            <a:r>
+              <a:rPr lang="ko-KR" altLang="en-US" sz="1600" dirty="0"/>
+              <a:t> 석탄은 연소 시 이산화황 배출이 많아 환경규제 대응 비용이 크기 때문에 시장에서 할인되어 거래되며</a:t>
+            </a:r>
+            <a:r>
+              <a:rPr lang="en-US" altLang="ko-KR" sz="1600" dirty="0"/>
+              <a:t>, </a:t>
+            </a:r>
+            <a:r>
+              <a:rPr lang="ko-KR" altLang="en-US" sz="1600" dirty="0"/>
+              <a:t>반대로 </a:t>
+            </a:r>
+            <a:r>
+              <a:rPr lang="ko-KR" altLang="en-US" sz="1600" dirty="0" err="1"/>
+              <a:t>저황</a:t>
+            </a:r>
+            <a:r>
+              <a:rPr lang="en-US" altLang="ko-KR" sz="1600" dirty="0"/>
+              <a:t>·</a:t>
+            </a:r>
+            <a:r>
+              <a:rPr lang="ko-KR" altLang="en-US" sz="1600" dirty="0" err="1"/>
+              <a:t>고발열</a:t>
+            </a:r>
+            <a:r>
+              <a:rPr lang="ko-KR" altLang="en-US" sz="1600" dirty="0"/>
+              <a:t> 석탄은 상대적으로 프리미엄이 붙는 경향이 있다</a:t>
+            </a:r>
+            <a:r>
+              <a:rPr lang="en-US" altLang="ko-KR" sz="1600" dirty="0"/>
+              <a:t>.</a:t>
+            </a:r>
+          </a:p>
+          <a:p>
+            <a:pPr marL="835025" lvl="1" indent="-285750">
+              <a:lnSpc>
+                <a:spcPct val="150000"/>
+              </a:lnSpc>
+              <a:buFont typeface="Wingdings" panose="05000000000000000000" pitchFamily="2" charset="2"/>
+              <a:buChar char="ü"/>
+            </a:pPr>
+            <a:r>
+              <a:rPr lang="ko-KR" altLang="en-US" sz="1600" dirty="0"/>
+              <a:t>수송 거리와 방식 또한 중요한 변수로</a:t>
+            </a:r>
+            <a:r>
+              <a:rPr lang="en-US" altLang="ko-KR" sz="1600" dirty="0"/>
+              <a:t>, FOB(Free On Board</a:t>
+            </a:r>
+            <a:r>
+              <a:rPr lang="ko-KR" altLang="en-US" sz="1600" dirty="0"/>
+              <a:t>본선 인도</a:t>
+            </a:r>
+            <a:r>
+              <a:rPr lang="en-US" altLang="ko-KR" sz="1600" dirty="0"/>
+              <a:t>) </a:t>
+            </a:r>
+            <a:r>
+              <a:rPr lang="ko-KR" altLang="en-US" sz="1600" dirty="0"/>
+              <a:t>조건에서는 운송 비용은 구매자가 부담하고</a:t>
+            </a:r>
+            <a:r>
+              <a:rPr lang="en-US" altLang="ko-KR" sz="1600" dirty="0"/>
+              <a:t>, CIF(Cost, Insurance, Freight) </a:t>
+            </a:r>
+            <a:r>
+              <a:rPr lang="ko-KR" altLang="en-US" sz="1600" dirty="0"/>
+              <a:t>조건에서는 판매자가 물류 부담을 지게 된다</a:t>
+            </a:r>
+            <a:r>
+              <a:rPr lang="en-US" altLang="ko-KR" sz="1600" dirty="0"/>
+              <a:t>.</a:t>
+            </a:r>
+          </a:p>
+          <a:p>
+            <a:pPr marL="377825" indent="-285750">
+              <a:lnSpc>
+                <a:spcPct val="150000"/>
+              </a:lnSpc>
+              <a:buFont typeface="Arial" panose="020B0604020202020204" pitchFamily="34" charset="0"/>
+              <a:buChar char="•"/>
+            </a:pPr>
+            <a:endParaRPr lang="en-US" altLang="ko-KR" sz="1600" dirty="0"/>
+          </a:p>
+          <a:p>
+            <a:pPr marL="377825" indent="-285750">
+              <a:lnSpc>
+                <a:spcPct val="150000"/>
+              </a:lnSpc>
+              <a:buFont typeface="Arial" panose="020B0604020202020204" pitchFamily="34" charset="0"/>
+              <a:buChar char="•"/>
+            </a:pPr>
+            <a:r>
+              <a:rPr lang="ko-KR" altLang="en-US" sz="1600" spc="-100" dirty="0"/>
+              <a:t>단순한 가격 협상 외에도 품질 보증</a:t>
+            </a:r>
+            <a:r>
+              <a:rPr lang="en-US" altLang="ko-KR" sz="1600" spc="-100" dirty="0"/>
+              <a:t>, </a:t>
+            </a:r>
+            <a:r>
+              <a:rPr lang="ko-KR" altLang="en-US" sz="1600" spc="-100" dirty="0"/>
+              <a:t>규격 인증</a:t>
+            </a:r>
+            <a:r>
+              <a:rPr lang="en-US" altLang="ko-KR" sz="1600" spc="-100" dirty="0"/>
+              <a:t>, </a:t>
+            </a:r>
+            <a:r>
+              <a:rPr lang="ko-KR" altLang="en-US" sz="1600" spc="-100" dirty="0"/>
+              <a:t>환경규제 대응 등 다양한 기술적</a:t>
+            </a:r>
+            <a:r>
+              <a:rPr lang="en-US" altLang="ko-KR" sz="1600" spc="-100" dirty="0"/>
+              <a:t>·</a:t>
+            </a:r>
+            <a:r>
+              <a:rPr lang="ko-KR" altLang="en-US" sz="1600" spc="-100" dirty="0"/>
+              <a:t>행정적 요소가 함께 고려되어야 한다</a:t>
+            </a:r>
+            <a:r>
+              <a:rPr lang="en-US" altLang="ko-KR" sz="1600" spc="-100" dirty="0"/>
+              <a:t>.</a:t>
+            </a:r>
+          </a:p>
+          <a:p>
+            <a:pPr marL="835025" lvl="1" indent="-285750">
+              <a:lnSpc>
+                <a:spcPct val="150000"/>
+              </a:lnSpc>
+              <a:buFont typeface="Wingdings" panose="05000000000000000000" pitchFamily="2" charset="2"/>
+              <a:buChar char="ü"/>
+            </a:pPr>
+            <a:r>
+              <a:rPr lang="ko-KR" altLang="en-US" sz="1600" spc="-100" dirty="0"/>
+              <a:t>최근</a:t>
+            </a:r>
+            <a:r>
+              <a:rPr lang="en-US" altLang="ko-KR" sz="1600" spc="-100" dirty="0"/>
+              <a:t>, </a:t>
+            </a:r>
+            <a:r>
+              <a:rPr lang="ko-KR" altLang="en-US" sz="1600" spc="-100" dirty="0"/>
+              <a:t>석탄 구매자는 공급자의 </a:t>
+            </a:r>
+            <a:r>
+              <a:rPr lang="en-US" altLang="ko-KR" sz="1600" spc="-100" dirty="0"/>
+              <a:t>ESG</a:t>
+            </a:r>
+            <a:r>
+              <a:rPr lang="ko-KR" altLang="en-US" sz="1600" spc="-100" dirty="0"/>
+              <a:t>기준 충족 수준</a:t>
+            </a:r>
+            <a:r>
+              <a:rPr lang="en-US" altLang="ko-KR" sz="1600" spc="-100" dirty="0"/>
+              <a:t>, </a:t>
+            </a:r>
+            <a:r>
+              <a:rPr lang="ko-KR" altLang="en-US" sz="1600" spc="-100" dirty="0"/>
+              <a:t>지역사회 영향</a:t>
+            </a:r>
+            <a:r>
+              <a:rPr lang="en-US" altLang="ko-KR" sz="1600" spc="-100" dirty="0"/>
+              <a:t>, </a:t>
+            </a:r>
+            <a:r>
+              <a:rPr lang="ko-KR" altLang="en-US" sz="1600" spc="-100" dirty="0"/>
+              <a:t>탄소배출 정보 등 다양한 측면을 요구하고 있다</a:t>
+            </a:r>
+            <a:r>
+              <a:rPr lang="en-US" altLang="ko-KR" sz="1600" spc="-100" dirty="0"/>
+              <a:t>.</a:t>
+            </a:r>
+          </a:p>
+        </p:txBody>
+      </p:sp>
+    </p:spTree>
+    <p:extLst>
+      <p:ext uri="{BB962C8B-B14F-4D97-AF65-F5344CB8AC3E}">
+        <p14:creationId xmlns:p14="http://schemas.microsoft.com/office/powerpoint/2010/main" val="2235294142"/>
+      </p:ext>
+    </p:extLst>
+  </p:cSld>
+  <p:clrMapOvr>
+    <a:masterClrMapping/>
+  </p:clrMapOvr>
+</p:sld>
+</file>
+
+<file path=ppt/slides/slide23.xml><?xml version="1.0" encoding="utf-8"?>
+<p:sld xmlns:a="http://schemas.openxmlformats.org/drawingml/2006/main" xmlns:r="http://schemas.openxmlformats.org/officeDocument/2006/relationships" xmlns:p="http://schemas.openxmlformats.org/presentationml/2006/main">
+  <p:cSld>
+    <p:spTree>
+      <p:nvGrpSpPr>
+        <p:cNvPr id="1" name="">
+          <a:extLst>
+            <a:ext uri="{FF2B5EF4-FFF2-40B4-BE49-F238E27FC236}">
+              <a16:creationId xmlns:a16="http://schemas.microsoft.com/office/drawing/2014/main" id="{84536F5A-83E8-8B18-800C-F4D061E329EC}"/>
             </a:ext>
           </a:extLst>
         </p:cNvPr>
@@ -10158,7 +12741,7 @@
           <p:cNvPr id="6" name="그림 5" descr="텍스트, 로고, 원, 폰트이(가) 표시된 사진&#10;&#10;AI 생성 콘텐츠는 정확하지 않을 수 있습니다.">
             <a:extLst>
               <a:ext uri="{FF2B5EF4-FFF2-40B4-BE49-F238E27FC236}">
-                <a16:creationId xmlns:a16="http://schemas.microsoft.com/office/drawing/2014/main" id="{132D39AE-6E93-E852-0031-629430E3D819}"/>
+                <a16:creationId xmlns:a16="http://schemas.microsoft.com/office/drawing/2014/main" id="{29E1E638-DB99-5028-2B0D-15C4F8986AF3}"/>
               </a:ext>
             </a:extLst>
           </p:cNvPr>
@@ -10195,7 +12778,7 @@
           <p:cNvPr id="4" name="슬라이드 번호 개체 틀 3">
             <a:extLst>
               <a:ext uri="{FF2B5EF4-FFF2-40B4-BE49-F238E27FC236}">
-                <a16:creationId xmlns:a16="http://schemas.microsoft.com/office/drawing/2014/main" id="{16216CA1-E430-58F6-13F3-CB0FBB12A1B1}"/>
+                <a16:creationId xmlns:a16="http://schemas.microsoft.com/office/drawing/2014/main" id="{F43DE9FF-AC43-300C-CC7B-2A47533DC698}"/>
               </a:ext>
             </a:extLst>
           </p:cNvPr>
@@ -10213,7 +12796,7 @@
           <a:p>
             <a:fld id="{109C872D-39A9-4065-8BF3-6A613116E2A1}" type="slidenum">
               <a:rPr lang="ko-KR" altLang="en-US" smtClean="0"/>
-              <a:t>20</a:t>
+              <a:t>23</a:t>
             </a:fld>
             <a:endParaRPr lang="ko-KR" altLang="en-US"/>
           </a:p>
@@ -10224,7 +12807,7 @@
           <p:cNvPr id="7" name="제목 1">
             <a:extLst>
               <a:ext uri="{FF2B5EF4-FFF2-40B4-BE49-F238E27FC236}">
-                <a16:creationId xmlns:a16="http://schemas.microsoft.com/office/drawing/2014/main" id="{8D4DF8D8-9F32-5507-3E2A-E5E0B0B01B3F}"/>
+                <a16:creationId xmlns:a16="http://schemas.microsoft.com/office/drawing/2014/main" id="{0A6F38EE-3A32-8A8E-3C54-16E9A1AF41DA}"/>
               </a:ext>
             </a:extLst>
           </p:cNvPr>
@@ -10250,11 +12833,11 @@
           <a:p>
             <a:r>
               <a:rPr lang="en-US" altLang="ko-KR" sz="4000" b="1" i="0" spc="150" dirty="0"/>
-              <a:t>Section 10. </a:t>
+              <a:t>Section 5. </a:t>
             </a:r>
             <a:r>
               <a:rPr lang="ko-KR" altLang="en-US" sz="4000" b="1" i="0" spc="150" dirty="0"/>
-              <a:t>석탄시장의 구조변화와 좌초자산</a:t>
+              <a:t>석탄생산기술과 비용구조</a:t>
             </a:r>
             <a:endParaRPr lang="ko-KR" altLang="en-US" sz="3600" i="0" spc="150" dirty="0"/>
           </a:p>
@@ -10263,7 +12846,7 @@
     </p:spTree>
     <p:extLst>
       <p:ext uri="{BB962C8B-B14F-4D97-AF65-F5344CB8AC3E}">
-        <p14:creationId xmlns:p14="http://schemas.microsoft.com/office/powerpoint/2010/main" val="707442002"/>
+        <p14:creationId xmlns:p14="http://schemas.microsoft.com/office/powerpoint/2010/main" val="3112273833"/>
       </p:ext>
     </p:extLst>
   </p:cSld>
@@ -10273,7 +12856,7 @@
 </p:sld>
 </file>
 
-<file path=ppt/slides/slide21.xml><?xml version="1.0" encoding="utf-8"?>
+<file path=ppt/slides/slide24.xml><?xml version="1.0" encoding="utf-8"?>
 <p:sld xmlns:a="http://schemas.openxmlformats.org/drawingml/2006/main" xmlns:r="http://schemas.openxmlformats.org/officeDocument/2006/relationships" xmlns:p="http://schemas.openxmlformats.org/presentationml/2006/main">
   <p:cSld>
     <p:spTree>
@@ -10281,7 +12864,1311 @@
         <p:cNvPr id="1" name="">
           <a:extLst>
             <a:ext uri="{FF2B5EF4-FFF2-40B4-BE49-F238E27FC236}">
-              <a16:creationId xmlns:a16="http://schemas.microsoft.com/office/drawing/2014/main" id="{58D1A724-FF5F-F795-8171-E14A2B4F16F8}"/>
+              <a16:creationId xmlns:a16="http://schemas.microsoft.com/office/drawing/2014/main" id="{DB5E780C-07E7-8AFA-6E5A-EE38FCB59245}"/>
+            </a:ext>
+          </a:extLst>
+        </p:cNvPr>
+        <p:cNvGrpSpPr/>
+        <p:nvPr/>
+      </p:nvGrpSpPr>
+      <p:grpSpPr>
+        <a:xfrm>
+          <a:off x="0" y="0"/>
+          <a:ext cx="0" cy="0"/>
+          <a:chOff x="0" y="0"/>
+          <a:chExt cx="0" cy="0"/>
+        </a:xfrm>
+      </p:grpSpPr>
+      <p:sp>
+        <p:nvSpPr>
+          <p:cNvPr id="2" name="제목 1">
+            <a:extLst>
+              <a:ext uri="{FF2B5EF4-FFF2-40B4-BE49-F238E27FC236}">
+                <a16:creationId xmlns:a16="http://schemas.microsoft.com/office/drawing/2014/main" id="{1D256505-7DA7-1B5B-0116-4BE078725EC2}"/>
+              </a:ext>
+            </a:extLst>
+          </p:cNvPr>
+          <p:cNvSpPr>
+            <a:spLocks noGrp="1"/>
+          </p:cNvSpPr>
+          <p:nvPr>
+            <p:ph type="title"/>
+          </p:nvPr>
+        </p:nvSpPr>
+        <p:spPr/>
+        <p:txBody>
+          <a:bodyPr/>
+          <a:lstStyle/>
+          <a:p>
+            <a:r>
+              <a:rPr lang="ko-KR" altLang="en-US" dirty="0"/>
+              <a:t>석탄생산기술과 비용구조</a:t>
+            </a:r>
+          </a:p>
+        </p:txBody>
+      </p:sp>
+      <p:sp>
+        <p:nvSpPr>
+          <p:cNvPr id="4" name="슬라이드 번호 개체 틀 3">
+            <a:extLst>
+              <a:ext uri="{FF2B5EF4-FFF2-40B4-BE49-F238E27FC236}">
+                <a16:creationId xmlns:a16="http://schemas.microsoft.com/office/drawing/2014/main" id="{7CE15216-1E75-EA94-EC10-9AE7E7F467F4}"/>
+              </a:ext>
+            </a:extLst>
+          </p:cNvPr>
+          <p:cNvSpPr>
+            <a:spLocks noGrp="1"/>
+          </p:cNvSpPr>
+          <p:nvPr>
+            <p:ph type="sldNum" sz="quarter" idx="12"/>
+          </p:nvPr>
+        </p:nvSpPr>
+        <p:spPr/>
+        <p:txBody>
+          <a:bodyPr/>
+          <a:lstStyle/>
+          <a:p>
+            <a:fld id="{109C872D-39A9-4065-8BF3-6A613116E2A1}" type="slidenum">
+              <a:rPr lang="ko-KR" altLang="en-US" smtClean="0"/>
+              <a:t>24</a:t>
+            </a:fld>
+            <a:endParaRPr lang="ko-KR" altLang="en-US"/>
+          </a:p>
+        </p:txBody>
+      </p:sp>
+      <p:sp>
+        <p:nvSpPr>
+          <p:cNvPr id="3" name="TextBox 2">
+            <a:extLst>
+              <a:ext uri="{FF2B5EF4-FFF2-40B4-BE49-F238E27FC236}">
+                <a16:creationId xmlns:a16="http://schemas.microsoft.com/office/drawing/2014/main" id="{8C88BA9C-8451-C4CA-8C51-C302F29D5161}"/>
+              </a:ext>
+            </a:extLst>
+          </p:cNvPr>
+          <p:cNvSpPr txBox="1"/>
+          <p:nvPr/>
+        </p:nvSpPr>
+        <p:spPr>
+          <a:xfrm>
+            <a:off x="288790" y="958844"/>
+            <a:ext cx="11118453" cy="5215338"/>
+          </a:xfrm>
+          <a:prstGeom prst="rect">
+            <a:avLst/>
+          </a:prstGeom>
+          <a:noFill/>
+        </p:spPr>
+        <p:txBody>
+          <a:bodyPr wrap="square" rtlCol="0" anchor="t">
+            <a:spAutoFit/>
+          </a:bodyPr>
+          <a:lstStyle/>
+          <a:p>
+            <a:pPr marL="377825" indent="-285750">
+              <a:lnSpc>
+                <a:spcPct val="150000"/>
+              </a:lnSpc>
+              <a:buFont typeface="Arial" panose="020B0604020202020204" pitchFamily="34" charset="0"/>
+              <a:buChar char="•"/>
+            </a:pPr>
+            <a:r>
+              <a:rPr lang="ko-KR" altLang="en-US" sz="1600" dirty="0"/>
+              <a:t>석탄의 생산기술과 비용구조는 채굴방식</a:t>
+            </a:r>
+            <a:r>
+              <a:rPr lang="en-US" altLang="ko-KR" sz="1600" dirty="0"/>
+              <a:t>, </a:t>
+            </a:r>
+            <a:r>
+              <a:rPr lang="ko-KR" altLang="en-US" sz="1600" dirty="0"/>
+              <a:t>광상 깊이</a:t>
+            </a:r>
+            <a:r>
+              <a:rPr lang="en-US" altLang="ko-KR" sz="1600" dirty="0"/>
+              <a:t>, </a:t>
+            </a:r>
+            <a:r>
+              <a:rPr lang="ko-KR" altLang="en-US" sz="1600" dirty="0"/>
+              <a:t>지질조건</a:t>
+            </a:r>
+            <a:r>
+              <a:rPr lang="en-US" altLang="ko-KR" sz="1600" dirty="0"/>
+              <a:t>,</a:t>
+            </a:r>
+            <a:r>
+              <a:rPr lang="ko-KR" altLang="en-US" sz="1600" dirty="0"/>
+              <a:t> 기술수준</a:t>
+            </a:r>
+            <a:r>
+              <a:rPr lang="en-US" altLang="ko-KR" sz="1600" dirty="0"/>
+              <a:t>, </a:t>
+            </a:r>
+            <a:r>
+              <a:rPr lang="ko-KR" altLang="en-US" sz="1600" dirty="0"/>
+              <a:t>에너지 및 노동비용</a:t>
+            </a:r>
+            <a:r>
+              <a:rPr lang="en-US" altLang="ko-KR" sz="1600" dirty="0"/>
+              <a:t>, </a:t>
+            </a:r>
+            <a:r>
+              <a:rPr lang="ko-KR" altLang="en-US" sz="1600" dirty="0"/>
+              <a:t>환경규제 등 다양한 요인에 의해 결정된다</a:t>
+            </a:r>
+            <a:r>
+              <a:rPr lang="en-US" altLang="ko-KR" sz="1600" dirty="0"/>
+              <a:t>.</a:t>
+            </a:r>
+          </a:p>
+          <a:p>
+            <a:pPr marL="835025" lvl="1" indent="-285750">
+              <a:lnSpc>
+                <a:spcPct val="150000"/>
+              </a:lnSpc>
+              <a:buFont typeface="Wingdings" panose="05000000000000000000" pitchFamily="2" charset="2"/>
+              <a:buChar char="ü"/>
+            </a:pPr>
+            <a:r>
+              <a:rPr lang="ko-KR" altLang="en-US" sz="1600" dirty="0"/>
+              <a:t>이러한 요인들은 생산지의 지역적 특성과 산업발전 수준에 따라 다르게 작용하고</a:t>
+            </a:r>
+            <a:r>
+              <a:rPr lang="en-US" altLang="ko-KR" sz="1600" dirty="0"/>
+              <a:t>, </a:t>
+            </a:r>
+            <a:r>
+              <a:rPr lang="ko-KR" altLang="en-US" sz="1600" dirty="0"/>
+              <a:t>결과적으로 단위당 생산비용에 상당한 이질성을 초래한다</a:t>
+            </a:r>
+            <a:r>
+              <a:rPr lang="en-US" altLang="ko-KR" sz="1600" dirty="0"/>
+              <a:t>.</a:t>
+            </a:r>
+          </a:p>
+          <a:p>
+            <a:pPr marL="377825" indent="-285750">
+              <a:lnSpc>
+                <a:spcPct val="150000"/>
+              </a:lnSpc>
+              <a:buFont typeface="Arial" panose="020B0604020202020204" pitchFamily="34" charset="0"/>
+              <a:buChar char="•"/>
+            </a:pPr>
+            <a:r>
+              <a:rPr lang="ko-KR" altLang="en-US" sz="1600" dirty="0"/>
+              <a:t>석탄 채굴 방식으로 노천채굴과 지하채굴로 구분하였었다</a:t>
+            </a:r>
+            <a:r>
+              <a:rPr lang="en-US" altLang="ko-KR" sz="1600" dirty="0"/>
+              <a:t>.</a:t>
+            </a:r>
+          </a:p>
+          <a:p>
+            <a:pPr marL="835025" lvl="1" indent="-285750">
+              <a:lnSpc>
+                <a:spcPct val="150000"/>
+              </a:lnSpc>
+              <a:buFont typeface="Wingdings" panose="05000000000000000000" pitchFamily="2" charset="2"/>
+              <a:buChar char="ü"/>
+            </a:pPr>
+            <a:r>
+              <a:rPr lang="ko-KR" altLang="en-US" sz="1600" dirty="0"/>
+              <a:t>노천채굴은 지표면 가까이에 석탄이 위치하므로</a:t>
+            </a:r>
+            <a:r>
+              <a:rPr lang="en-US" altLang="ko-KR" sz="1600" dirty="0"/>
+              <a:t>, </a:t>
+            </a:r>
+            <a:r>
+              <a:rPr lang="ko-KR" altLang="en-US" sz="1600" dirty="0"/>
+              <a:t>대형 기계장비를 활용하여 자동화가 가능해 상대적으로 단위 생산비용이 낮다</a:t>
+            </a:r>
+            <a:r>
+              <a:rPr lang="en-US" altLang="ko-KR" sz="1600" dirty="0"/>
+              <a:t>.</a:t>
+            </a:r>
+          </a:p>
+          <a:p>
+            <a:pPr marL="1292225" lvl="2" indent="-285750">
+              <a:lnSpc>
+                <a:spcPct val="150000"/>
+              </a:lnSpc>
+              <a:buFont typeface="Wingdings" panose="05000000000000000000" pitchFamily="2" charset="2"/>
+              <a:buChar char="Ø"/>
+            </a:pPr>
+            <a:r>
+              <a:rPr lang="ko-KR" altLang="en-US" sz="1600" dirty="0"/>
+              <a:t>자동화 및 기계화 수준은 비용구조에 결정적인데</a:t>
+            </a:r>
+            <a:r>
+              <a:rPr lang="en-US" altLang="ko-KR" sz="1600" dirty="0"/>
+              <a:t>, </a:t>
+            </a:r>
+            <a:r>
+              <a:rPr lang="ko-KR" altLang="en-US" sz="1600" dirty="0" err="1"/>
+              <a:t>드론</a:t>
+            </a:r>
+            <a:r>
+              <a:rPr lang="ko-KR" altLang="en-US" sz="1600" dirty="0"/>
+              <a:t> 기반 측량</a:t>
+            </a:r>
+            <a:r>
+              <a:rPr lang="en-US" altLang="ko-KR" sz="1600" dirty="0"/>
+              <a:t>, </a:t>
+            </a:r>
+            <a:r>
+              <a:rPr lang="ko-KR" altLang="en-US" sz="1600" dirty="0"/>
+              <a:t>자율주행 운반차량이 </a:t>
+            </a:r>
+            <a:r>
+              <a:rPr lang="ko-KR" altLang="en-US" sz="1600" dirty="0" err="1"/>
+              <a:t>도입된는</a:t>
+            </a:r>
+            <a:r>
+              <a:rPr lang="ko-KR" altLang="en-US" sz="1600" dirty="0"/>
+              <a:t> 경우가 대표적인 예이다</a:t>
+            </a:r>
+            <a:r>
+              <a:rPr lang="en-US" altLang="ko-KR" sz="1600" dirty="0"/>
+              <a:t>.</a:t>
+            </a:r>
+          </a:p>
+          <a:p>
+            <a:pPr marL="1292225" lvl="2" indent="-285750">
+              <a:lnSpc>
+                <a:spcPct val="150000"/>
+              </a:lnSpc>
+              <a:buFont typeface="Wingdings" panose="05000000000000000000" pitchFamily="2" charset="2"/>
+              <a:buChar char="Ø"/>
+            </a:pPr>
+            <a:r>
+              <a:rPr lang="ko-KR" altLang="en-US" sz="1600" dirty="0"/>
+              <a:t>미국이나 호주의 경우</a:t>
+            </a:r>
+            <a:r>
+              <a:rPr lang="en-US" altLang="ko-KR" sz="1600" dirty="0"/>
+              <a:t>, </a:t>
+            </a:r>
+            <a:r>
+              <a:rPr lang="ko-KR" altLang="en-US" sz="1600" dirty="0"/>
+              <a:t>톤당 생산비용이 </a:t>
+            </a:r>
+            <a:r>
+              <a:rPr lang="en-US" altLang="ko-KR" sz="1600" dirty="0"/>
+              <a:t>20~30</a:t>
+            </a:r>
+            <a:r>
+              <a:rPr lang="ko-KR" altLang="en-US" sz="1600" dirty="0"/>
+              <a:t>달러 수준이다</a:t>
+            </a:r>
+            <a:r>
+              <a:rPr lang="en-US" altLang="ko-KR" sz="1600" dirty="0"/>
+              <a:t>.</a:t>
+            </a:r>
+          </a:p>
+          <a:p>
+            <a:pPr marL="1292225" lvl="2" indent="-285750">
+              <a:lnSpc>
+                <a:spcPct val="150000"/>
+              </a:lnSpc>
+              <a:buFont typeface="Wingdings" panose="05000000000000000000" pitchFamily="2" charset="2"/>
+              <a:buChar char="Ø"/>
+            </a:pPr>
+            <a:endParaRPr lang="en-US" altLang="ko-KR" sz="1600" dirty="0"/>
+          </a:p>
+          <a:p>
+            <a:pPr marL="835025" lvl="1" indent="-285750">
+              <a:lnSpc>
+                <a:spcPct val="150000"/>
+              </a:lnSpc>
+              <a:buFont typeface="Wingdings" panose="05000000000000000000" pitchFamily="2" charset="2"/>
+              <a:buChar char="ü"/>
+            </a:pPr>
+            <a:r>
+              <a:rPr lang="ko-KR" altLang="en-US" sz="1600" dirty="0"/>
+              <a:t>한편 지하채굴은 깊은 지층의 석탄을 채굴하기 위해 복잡한 환기</a:t>
+            </a:r>
+            <a:r>
+              <a:rPr lang="en-US" altLang="ko-KR" sz="1600" dirty="0"/>
+              <a:t>, </a:t>
+            </a:r>
+            <a:r>
+              <a:rPr lang="ko-KR" altLang="en-US" sz="1600" dirty="0"/>
+              <a:t>안전</a:t>
+            </a:r>
+            <a:r>
+              <a:rPr lang="en-US" altLang="ko-KR" sz="1600" dirty="0"/>
+              <a:t>, </a:t>
+            </a:r>
+            <a:r>
+              <a:rPr lang="ko-KR" altLang="en-US" sz="1600" dirty="0"/>
+              <a:t>배수 설비를 설치해야 하므로 인건비 및 설비비용이 크게 증가한다</a:t>
+            </a:r>
+            <a:r>
+              <a:rPr lang="en-US" altLang="ko-KR" sz="1600" dirty="0"/>
+              <a:t>.</a:t>
+            </a:r>
+          </a:p>
+          <a:p>
+            <a:pPr marL="1292225" lvl="2" indent="-285750">
+              <a:lnSpc>
+                <a:spcPct val="150000"/>
+              </a:lnSpc>
+              <a:buFont typeface="Wingdings" panose="05000000000000000000" pitchFamily="2" charset="2"/>
+              <a:buChar char="Ø"/>
+            </a:pPr>
+            <a:r>
+              <a:rPr lang="ko-KR" altLang="en-US" sz="1600" dirty="0"/>
+              <a:t>인도나 중국의 경우</a:t>
+            </a:r>
+            <a:r>
+              <a:rPr lang="en-US" altLang="ko-KR" sz="1600" dirty="0"/>
+              <a:t>, </a:t>
+            </a:r>
+            <a:r>
+              <a:rPr lang="ko-KR" altLang="en-US" sz="1600" dirty="0"/>
+              <a:t>톤당 </a:t>
+            </a:r>
+            <a:r>
+              <a:rPr lang="en-US" altLang="ko-KR" sz="1600" dirty="0"/>
+              <a:t>60~80</a:t>
+            </a:r>
+            <a:r>
+              <a:rPr lang="ko-KR" altLang="en-US" sz="1600" dirty="0"/>
+              <a:t>달러 이상으로 상승하는 경향이 있다</a:t>
+            </a:r>
+            <a:r>
+              <a:rPr lang="en-US" altLang="ko-KR" sz="1600" dirty="0"/>
+              <a:t>.</a:t>
+            </a:r>
+          </a:p>
+        </p:txBody>
+      </p:sp>
+    </p:spTree>
+    <p:extLst>
+      <p:ext uri="{BB962C8B-B14F-4D97-AF65-F5344CB8AC3E}">
+        <p14:creationId xmlns:p14="http://schemas.microsoft.com/office/powerpoint/2010/main" val="2268808733"/>
+      </p:ext>
+    </p:extLst>
+  </p:cSld>
+  <p:clrMapOvr>
+    <a:masterClrMapping/>
+  </p:clrMapOvr>
+</p:sld>
+</file>
+
+<file path=ppt/slides/slide25.xml><?xml version="1.0" encoding="utf-8"?>
+<p:sld xmlns:a="http://schemas.openxmlformats.org/drawingml/2006/main" xmlns:r="http://schemas.openxmlformats.org/officeDocument/2006/relationships" xmlns:p="http://schemas.openxmlformats.org/presentationml/2006/main">
+  <p:cSld>
+    <p:spTree>
+      <p:nvGrpSpPr>
+        <p:cNvPr id="1" name="">
+          <a:extLst>
+            <a:ext uri="{FF2B5EF4-FFF2-40B4-BE49-F238E27FC236}">
+              <a16:creationId xmlns:a16="http://schemas.microsoft.com/office/drawing/2014/main" id="{E85DCBDD-5587-12CF-E54C-A14A43C87813}"/>
+            </a:ext>
+          </a:extLst>
+        </p:cNvPr>
+        <p:cNvGrpSpPr/>
+        <p:nvPr/>
+      </p:nvGrpSpPr>
+      <p:grpSpPr>
+        <a:xfrm>
+          <a:off x="0" y="0"/>
+          <a:ext cx="0" cy="0"/>
+          <a:chOff x="0" y="0"/>
+          <a:chExt cx="0" cy="0"/>
+        </a:xfrm>
+      </p:grpSpPr>
+      <p:sp>
+        <p:nvSpPr>
+          <p:cNvPr id="2" name="제목 1">
+            <a:extLst>
+              <a:ext uri="{FF2B5EF4-FFF2-40B4-BE49-F238E27FC236}">
+                <a16:creationId xmlns:a16="http://schemas.microsoft.com/office/drawing/2014/main" id="{A50FB91A-1244-D544-66DF-0030741D48E7}"/>
+              </a:ext>
+            </a:extLst>
+          </p:cNvPr>
+          <p:cNvSpPr>
+            <a:spLocks noGrp="1"/>
+          </p:cNvSpPr>
+          <p:nvPr>
+            <p:ph type="title"/>
+          </p:nvPr>
+        </p:nvSpPr>
+        <p:spPr/>
+        <p:txBody>
+          <a:bodyPr/>
+          <a:lstStyle/>
+          <a:p>
+            <a:r>
+              <a:rPr lang="ko-KR" altLang="en-US" dirty="0"/>
+              <a:t>석탄생산기술과 비용구조</a:t>
+            </a:r>
+          </a:p>
+        </p:txBody>
+      </p:sp>
+      <p:sp>
+        <p:nvSpPr>
+          <p:cNvPr id="4" name="슬라이드 번호 개체 틀 3">
+            <a:extLst>
+              <a:ext uri="{FF2B5EF4-FFF2-40B4-BE49-F238E27FC236}">
+                <a16:creationId xmlns:a16="http://schemas.microsoft.com/office/drawing/2014/main" id="{735C320F-DFBA-0194-31D1-CF8CB945E884}"/>
+              </a:ext>
+            </a:extLst>
+          </p:cNvPr>
+          <p:cNvSpPr>
+            <a:spLocks noGrp="1"/>
+          </p:cNvSpPr>
+          <p:nvPr>
+            <p:ph type="sldNum" sz="quarter" idx="12"/>
+          </p:nvPr>
+        </p:nvSpPr>
+        <p:spPr/>
+        <p:txBody>
+          <a:bodyPr/>
+          <a:lstStyle/>
+          <a:p>
+            <a:fld id="{109C872D-39A9-4065-8BF3-6A613116E2A1}" type="slidenum">
+              <a:rPr lang="ko-KR" altLang="en-US" smtClean="0"/>
+              <a:t>25</a:t>
+            </a:fld>
+            <a:endParaRPr lang="ko-KR" altLang="en-US"/>
+          </a:p>
+        </p:txBody>
+      </p:sp>
+      <p:sp>
+        <p:nvSpPr>
+          <p:cNvPr id="3" name="TextBox 2">
+            <a:extLst>
+              <a:ext uri="{FF2B5EF4-FFF2-40B4-BE49-F238E27FC236}">
+                <a16:creationId xmlns:a16="http://schemas.microsoft.com/office/drawing/2014/main" id="{CBC5BF6A-ABA1-EDAD-F4D5-223867D76951}"/>
+              </a:ext>
+            </a:extLst>
+          </p:cNvPr>
+          <p:cNvSpPr txBox="1"/>
+          <p:nvPr/>
+        </p:nvSpPr>
+        <p:spPr>
+          <a:xfrm>
+            <a:off x="288790" y="958844"/>
+            <a:ext cx="11118453" cy="5215338"/>
+          </a:xfrm>
+          <a:prstGeom prst="rect">
+            <a:avLst/>
+          </a:prstGeom>
+          <a:noFill/>
+        </p:spPr>
+        <p:txBody>
+          <a:bodyPr wrap="square" rtlCol="0" anchor="t">
+            <a:spAutoFit/>
+          </a:bodyPr>
+          <a:lstStyle/>
+          <a:p>
+            <a:pPr marL="377825" indent="-285750">
+              <a:lnSpc>
+                <a:spcPct val="150000"/>
+              </a:lnSpc>
+              <a:buFont typeface="Arial" panose="020B0604020202020204" pitchFamily="34" charset="0"/>
+              <a:buChar char="•"/>
+            </a:pPr>
+            <a:r>
+              <a:rPr lang="ko-KR" altLang="en-US" sz="1600" dirty="0"/>
+              <a:t>석탄의 생산기술과 비용구조는 채굴방식</a:t>
+            </a:r>
+            <a:r>
+              <a:rPr lang="en-US" altLang="ko-KR" sz="1600" dirty="0"/>
+              <a:t>, </a:t>
+            </a:r>
+            <a:r>
+              <a:rPr lang="ko-KR" altLang="en-US" sz="1600" dirty="0"/>
+              <a:t>광상 깊이</a:t>
+            </a:r>
+            <a:r>
+              <a:rPr lang="en-US" altLang="ko-KR" sz="1600" dirty="0"/>
+              <a:t>, </a:t>
+            </a:r>
+            <a:r>
+              <a:rPr lang="ko-KR" altLang="en-US" sz="1600" dirty="0"/>
+              <a:t>지질조건</a:t>
+            </a:r>
+            <a:r>
+              <a:rPr lang="en-US" altLang="ko-KR" sz="1600" dirty="0"/>
+              <a:t>,</a:t>
+            </a:r>
+            <a:r>
+              <a:rPr lang="ko-KR" altLang="en-US" sz="1600" dirty="0"/>
+              <a:t> 기술수준</a:t>
+            </a:r>
+            <a:r>
+              <a:rPr lang="en-US" altLang="ko-KR" sz="1600" dirty="0"/>
+              <a:t>, </a:t>
+            </a:r>
+            <a:r>
+              <a:rPr lang="ko-KR" altLang="en-US" sz="1600" dirty="0"/>
+              <a:t>에너지 및 노동비용</a:t>
+            </a:r>
+            <a:r>
+              <a:rPr lang="en-US" altLang="ko-KR" sz="1600" dirty="0"/>
+              <a:t>, </a:t>
+            </a:r>
+            <a:r>
+              <a:rPr lang="ko-KR" altLang="en-US" sz="1600" dirty="0"/>
+              <a:t>환경규제 등 다양한 요인에 의해 결정된다</a:t>
+            </a:r>
+            <a:r>
+              <a:rPr lang="en-US" altLang="ko-KR" sz="1600" dirty="0"/>
+              <a:t>.</a:t>
+            </a:r>
+          </a:p>
+          <a:p>
+            <a:pPr marL="835025" lvl="1" indent="-285750">
+              <a:lnSpc>
+                <a:spcPct val="150000"/>
+              </a:lnSpc>
+              <a:buFont typeface="Wingdings" panose="05000000000000000000" pitchFamily="2" charset="2"/>
+              <a:buChar char="ü"/>
+            </a:pPr>
+            <a:r>
+              <a:rPr lang="ko-KR" altLang="en-US" sz="1600" dirty="0"/>
+              <a:t>이러한 요인들은 생산지의 지역적 특성과 산업발전 수준에 따라 다르게 작용하고</a:t>
+            </a:r>
+            <a:r>
+              <a:rPr lang="en-US" altLang="ko-KR" sz="1600" dirty="0"/>
+              <a:t>, </a:t>
+            </a:r>
+            <a:r>
+              <a:rPr lang="ko-KR" altLang="en-US" sz="1600" dirty="0"/>
+              <a:t>결과적으로 단위당 생산비용에 상당한 이질성을 초래한다</a:t>
+            </a:r>
+            <a:r>
+              <a:rPr lang="en-US" altLang="ko-KR" sz="1600" dirty="0"/>
+              <a:t>.</a:t>
+            </a:r>
+          </a:p>
+          <a:p>
+            <a:pPr marL="377825" indent="-285750">
+              <a:lnSpc>
+                <a:spcPct val="150000"/>
+              </a:lnSpc>
+              <a:buFont typeface="Arial" panose="020B0604020202020204" pitchFamily="34" charset="0"/>
+              <a:buChar char="•"/>
+            </a:pPr>
+            <a:r>
+              <a:rPr lang="ko-KR" altLang="en-US" sz="1600" dirty="0"/>
+              <a:t>채굴방식에 따라 비용구조가 크게 다른데</a:t>
+            </a:r>
+            <a:r>
+              <a:rPr lang="en-US" altLang="ko-KR" sz="1600" dirty="0"/>
+              <a:t>, </a:t>
+            </a:r>
+            <a:r>
+              <a:rPr lang="ko-KR" altLang="en-US" sz="1600" dirty="0"/>
+              <a:t>석탄 채굴 방식으로 노천채굴과 지하채굴로 구분하였었다</a:t>
+            </a:r>
+            <a:r>
+              <a:rPr lang="en-US" altLang="ko-KR" sz="1600" dirty="0"/>
+              <a:t>.</a:t>
+            </a:r>
+          </a:p>
+          <a:p>
+            <a:pPr marL="835025" lvl="1" indent="-285750">
+              <a:lnSpc>
+                <a:spcPct val="150000"/>
+              </a:lnSpc>
+              <a:buFont typeface="Wingdings" panose="05000000000000000000" pitchFamily="2" charset="2"/>
+              <a:buChar char="ü"/>
+            </a:pPr>
+            <a:r>
+              <a:rPr lang="ko-KR" altLang="en-US" sz="1600" dirty="0"/>
+              <a:t>노천채굴은 지표면 가까이에 석탄이 위치하므로</a:t>
+            </a:r>
+            <a:r>
+              <a:rPr lang="en-US" altLang="ko-KR" sz="1600" dirty="0"/>
+              <a:t>, </a:t>
+            </a:r>
+            <a:r>
+              <a:rPr lang="ko-KR" altLang="en-US" sz="1600" dirty="0"/>
+              <a:t>대형 기계장비를 활용하여 자동화가 가능해 상대적으로 단위 생산비용이 낮다</a:t>
+            </a:r>
+            <a:r>
+              <a:rPr lang="en-US" altLang="ko-KR" sz="1600" dirty="0"/>
+              <a:t>.</a:t>
+            </a:r>
+          </a:p>
+          <a:p>
+            <a:pPr marL="1292225" lvl="2" indent="-285750">
+              <a:lnSpc>
+                <a:spcPct val="150000"/>
+              </a:lnSpc>
+              <a:buFont typeface="Wingdings" panose="05000000000000000000" pitchFamily="2" charset="2"/>
+              <a:buChar char="Ø"/>
+            </a:pPr>
+            <a:r>
+              <a:rPr lang="ko-KR" altLang="en-US" sz="1600" dirty="0"/>
+              <a:t>미국이나 호주의 경우</a:t>
+            </a:r>
+            <a:r>
+              <a:rPr lang="en-US" altLang="ko-KR" sz="1600" dirty="0"/>
+              <a:t>, </a:t>
+            </a:r>
+            <a:r>
+              <a:rPr lang="ko-KR" altLang="en-US" sz="1600" dirty="0"/>
+              <a:t>톤당 생산비용이 </a:t>
+            </a:r>
+            <a:r>
+              <a:rPr lang="en-US" altLang="ko-KR" sz="1600" dirty="0"/>
+              <a:t>20~30</a:t>
+            </a:r>
+            <a:r>
+              <a:rPr lang="ko-KR" altLang="en-US" sz="1600" dirty="0"/>
+              <a:t>달러 수준이다</a:t>
+            </a:r>
+            <a:r>
+              <a:rPr lang="en-US" altLang="ko-KR" sz="1600" dirty="0"/>
+              <a:t>.</a:t>
+            </a:r>
+          </a:p>
+          <a:p>
+            <a:pPr marL="835025" lvl="1" indent="-285750">
+              <a:lnSpc>
+                <a:spcPct val="150000"/>
+              </a:lnSpc>
+              <a:buFont typeface="Wingdings" panose="05000000000000000000" pitchFamily="2" charset="2"/>
+              <a:buChar char="ü"/>
+            </a:pPr>
+            <a:r>
+              <a:rPr lang="ko-KR" altLang="en-US" sz="1600" dirty="0"/>
+              <a:t>한편 지하채굴은 깊은 지층의 석탄을 채굴하기 위해 복잡한 환기</a:t>
+            </a:r>
+            <a:r>
+              <a:rPr lang="en-US" altLang="ko-KR" sz="1600" dirty="0"/>
+              <a:t>, </a:t>
+            </a:r>
+            <a:r>
+              <a:rPr lang="ko-KR" altLang="en-US" sz="1600" dirty="0"/>
+              <a:t>안전</a:t>
+            </a:r>
+            <a:r>
+              <a:rPr lang="en-US" altLang="ko-KR" sz="1600" dirty="0"/>
+              <a:t>, </a:t>
+            </a:r>
+            <a:r>
+              <a:rPr lang="ko-KR" altLang="en-US" sz="1600" dirty="0"/>
+              <a:t>배수 설비를 설치해야 하므로 인건비 및 설비비용이 크게 증가한다</a:t>
+            </a:r>
+            <a:r>
+              <a:rPr lang="en-US" altLang="ko-KR" sz="1600" dirty="0"/>
+              <a:t>.</a:t>
+            </a:r>
+          </a:p>
+          <a:p>
+            <a:pPr marL="1292225" lvl="2" indent="-285750">
+              <a:lnSpc>
+                <a:spcPct val="150000"/>
+              </a:lnSpc>
+              <a:buFont typeface="Wingdings" panose="05000000000000000000" pitchFamily="2" charset="2"/>
+              <a:buChar char="Ø"/>
+            </a:pPr>
+            <a:r>
+              <a:rPr lang="ko-KR" altLang="en-US" sz="1600" dirty="0"/>
+              <a:t>인도나 중국의 경우</a:t>
+            </a:r>
+            <a:r>
+              <a:rPr lang="en-US" altLang="ko-KR" sz="1600" dirty="0"/>
+              <a:t>, </a:t>
+            </a:r>
+            <a:r>
+              <a:rPr lang="ko-KR" altLang="en-US" sz="1600" dirty="0"/>
+              <a:t>톤당 </a:t>
+            </a:r>
+            <a:r>
+              <a:rPr lang="en-US" altLang="ko-KR" sz="1600" dirty="0"/>
+              <a:t>60~80</a:t>
+            </a:r>
+            <a:r>
+              <a:rPr lang="ko-KR" altLang="en-US" sz="1600" dirty="0"/>
+              <a:t>달러 이상으로 상승하는 경향이 있다</a:t>
+            </a:r>
+            <a:r>
+              <a:rPr lang="en-US" altLang="ko-KR" sz="1600" dirty="0"/>
+              <a:t>.</a:t>
+            </a:r>
+          </a:p>
+          <a:p>
+            <a:pPr marL="377825" indent="-285750">
+              <a:lnSpc>
+                <a:spcPct val="150000"/>
+              </a:lnSpc>
+              <a:buFont typeface="Arial" panose="020B0604020202020204" pitchFamily="34" charset="0"/>
+              <a:buChar char="•"/>
+            </a:pPr>
+            <a:r>
+              <a:rPr lang="ko-KR" altLang="en-US" sz="1600" dirty="0"/>
+              <a:t>생산기술의 자동화 및 기계화 수준도 비용구조에 결정적인 영향을 미친다</a:t>
+            </a:r>
+            <a:r>
+              <a:rPr lang="en-US" altLang="ko-KR" sz="1600" dirty="0"/>
+              <a:t>.</a:t>
+            </a:r>
+          </a:p>
+          <a:p>
+            <a:pPr marL="835025" lvl="1" indent="-285750">
+              <a:lnSpc>
+                <a:spcPct val="150000"/>
+              </a:lnSpc>
+              <a:buFont typeface="Wingdings" panose="05000000000000000000" pitchFamily="2" charset="2"/>
+              <a:buChar char="ü"/>
+            </a:pPr>
+            <a:r>
+              <a:rPr lang="ko-KR" altLang="en-US" sz="1600" dirty="0"/>
+              <a:t>자동화 및 기계화 수준은 비용구조에 결정적인데</a:t>
+            </a:r>
+            <a:r>
+              <a:rPr lang="en-US" altLang="ko-KR" sz="1600" dirty="0"/>
+              <a:t>, </a:t>
+            </a:r>
+            <a:r>
+              <a:rPr lang="ko-KR" altLang="en-US" sz="1600" dirty="0"/>
+              <a:t>호주의 경우</a:t>
+            </a:r>
+            <a:r>
+              <a:rPr lang="en-US" altLang="ko-KR" sz="1600" dirty="0"/>
+              <a:t> </a:t>
+            </a:r>
+            <a:r>
+              <a:rPr lang="ko-KR" altLang="en-US" sz="1600" dirty="0" err="1"/>
+              <a:t>드론</a:t>
+            </a:r>
+            <a:r>
+              <a:rPr lang="ko-KR" altLang="en-US" sz="1600" dirty="0"/>
+              <a:t> 기반 측량</a:t>
+            </a:r>
+            <a:r>
+              <a:rPr lang="en-US" altLang="ko-KR" sz="1600" dirty="0"/>
+              <a:t>, </a:t>
+            </a:r>
+            <a:r>
+              <a:rPr lang="ko-KR" altLang="en-US" sz="1600" dirty="0"/>
+              <a:t>자율주행 차량을 도입하였다</a:t>
+            </a:r>
+            <a:r>
+              <a:rPr lang="en-US" altLang="ko-KR" sz="1600" dirty="0"/>
+              <a:t>.</a:t>
+            </a:r>
+          </a:p>
+          <a:p>
+            <a:pPr marL="835025" lvl="1" indent="-285750">
+              <a:lnSpc>
+                <a:spcPct val="150000"/>
+              </a:lnSpc>
+              <a:buFont typeface="Wingdings" panose="05000000000000000000" pitchFamily="2" charset="2"/>
+              <a:buChar char="ü"/>
+            </a:pPr>
+            <a:r>
+              <a:rPr lang="ko-KR" altLang="en-US" sz="1600" dirty="0"/>
+              <a:t>개도국의 경우</a:t>
+            </a:r>
+            <a:r>
+              <a:rPr lang="en-US" altLang="ko-KR" sz="1600" dirty="0"/>
+              <a:t>, </a:t>
+            </a:r>
+            <a:r>
+              <a:rPr lang="ko-KR" altLang="en-US" sz="1600" dirty="0"/>
+              <a:t>노동집약적 방식이 일반적이며</a:t>
+            </a:r>
+            <a:r>
+              <a:rPr lang="en-US" altLang="ko-KR" sz="1600" dirty="0"/>
+              <a:t>, </a:t>
+            </a:r>
+            <a:r>
+              <a:rPr lang="ko-KR" altLang="en-US" sz="1600" dirty="0"/>
+              <a:t>인건비</a:t>
+            </a:r>
+            <a:r>
+              <a:rPr lang="en-US" altLang="ko-KR" sz="1600" dirty="0"/>
+              <a:t>, </a:t>
+            </a:r>
+            <a:r>
+              <a:rPr lang="ko-KR" altLang="en-US" sz="1600" dirty="0"/>
+              <a:t>의료비용</a:t>
+            </a:r>
+            <a:r>
+              <a:rPr lang="en-US" altLang="ko-KR" sz="1600" dirty="0"/>
+              <a:t>, </a:t>
+            </a:r>
+            <a:r>
+              <a:rPr lang="ko-KR" altLang="en-US" sz="1600" dirty="0"/>
+              <a:t>보험료</a:t>
+            </a:r>
+            <a:r>
+              <a:rPr lang="en-US" altLang="ko-KR" sz="1600" dirty="0"/>
+              <a:t> </a:t>
+            </a:r>
+            <a:r>
+              <a:rPr lang="ko-KR" altLang="en-US" sz="1600" dirty="0"/>
+              <a:t>등 높은 비용이 소요된다</a:t>
+            </a:r>
+            <a:r>
+              <a:rPr lang="en-US" altLang="ko-KR" sz="1600" dirty="0"/>
+              <a:t>.</a:t>
+            </a:r>
+          </a:p>
+        </p:txBody>
+      </p:sp>
+    </p:spTree>
+    <p:extLst>
+      <p:ext uri="{BB962C8B-B14F-4D97-AF65-F5344CB8AC3E}">
+        <p14:creationId xmlns:p14="http://schemas.microsoft.com/office/powerpoint/2010/main" val="1348566381"/>
+      </p:ext>
+    </p:extLst>
+  </p:cSld>
+  <p:clrMapOvr>
+    <a:masterClrMapping/>
+  </p:clrMapOvr>
+</p:sld>
+</file>
+
+<file path=ppt/slides/slide26.xml><?xml version="1.0" encoding="utf-8"?>
+<p:sld xmlns:a="http://schemas.openxmlformats.org/drawingml/2006/main" xmlns:r="http://schemas.openxmlformats.org/officeDocument/2006/relationships" xmlns:p="http://schemas.openxmlformats.org/presentationml/2006/main">
+  <p:cSld>
+    <p:spTree>
+      <p:nvGrpSpPr>
+        <p:cNvPr id="1" name="">
+          <a:extLst>
+            <a:ext uri="{FF2B5EF4-FFF2-40B4-BE49-F238E27FC236}">
+              <a16:creationId xmlns:a16="http://schemas.microsoft.com/office/drawing/2014/main" id="{D9D54912-6C05-E339-1029-A91F49C97328}"/>
+            </a:ext>
+          </a:extLst>
+        </p:cNvPr>
+        <p:cNvGrpSpPr/>
+        <p:nvPr/>
+      </p:nvGrpSpPr>
+      <p:grpSpPr>
+        <a:xfrm>
+          <a:off x="0" y="0"/>
+          <a:ext cx="0" cy="0"/>
+          <a:chOff x="0" y="0"/>
+          <a:chExt cx="0" cy="0"/>
+        </a:xfrm>
+      </p:grpSpPr>
+      <p:sp>
+        <p:nvSpPr>
+          <p:cNvPr id="2" name="제목 1">
+            <a:extLst>
+              <a:ext uri="{FF2B5EF4-FFF2-40B4-BE49-F238E27FC236}">
+                <a16:creationId xmlns:a16="http://schemas.microsoft.com/office/drawing/2014/main" id="{A77401C6-7D23-0E35-BC44-20A9BF5906D2}"/>
+              </a:ext>
+            </a:extLst>
+          </p:cNvPr>
+          <p:cNvSpPr>
+            <a:spLocks noGrp="1"/>
+          </p:cNvSpPr>
+          <p:nvPr>
+            <p:ph type="title"/>
+          </p:nvPr>
+        </p:nvSpPr>
+        <p:spPr/>
+        <p:txBody>
+          <a:bodyPr/>
+          <a:lstStyle/>
+          <a:p>
+            <a:r>
+              <a:rPr lang="ko-KR" altLang="en-US" dirty="0"/>
+              <a:t>석탄생산기술과 비용구조</a:t>
+            </a:r>
+          </a:p>
+        </p:txBody>
+      </p:sp>
+      <p:sp>
+        <p:nvSpPr>
+          <p:cNvPr id="4" name="슬라이드 번호 개체 틀 3">
+            <a:extLst>
+              <a:ext uri="{FF2B5EF4-FFF2-40B4-BE49-F238E27FC236}">
+                <a16:creationId xmlns:a16="http://schemas.microsoft.com/office/drawing/2014/main" id="{FAD4166C-36B7-E061-11F1-FDACF8A21568}"/>
+              </a:ext>
+            </a:extLst>
+          </p:cNvPr>
+          <p:cNvSpPr>
+            <a:spLocks noGrp="1"/>
+          </p:cNvSpPr>
+          <p:nvPr>
+            <p:ph type="sldNum" sz="quarter" idx="12"/>
+          </p:nvPr>
+        </p:nvSpPr>
+        <p:spPr/>
+        <p:txBody>
+          <a:bodyPr/>
+          <a:lstStyle/>
+          <a:p>
+            <a:fld id="{109C872D-39A9-4065-8BF3-6A613116E2A1}" type="slidenum">
+              <a:rPr lang="ko-KR" altLang="en-US" smtClean="0"/>
+              <a:t>26</a:t>
+            </a:fld>
+            <a:endParaRPr lang="ko-KR" altLang="en-US"/>
+          </a:p>
+        </p:txBody>
+      </p:sp>
+      <p:sp>
+        <p:nvSpPr>
+          <p:cNvPr id="3" name="TextBox 2">
+            <a:extLst>
+              <a:ext uri="{FF2B5EF4-FFF2-40B4-BE49-F238E27FC236}">
+                <a16:creationId xmlns:a16="http://schemas.microsoft.com/office/drawing/2014/main" id="{8EB3A4CF-3FDD-BB1D-C2E9-6DAFCF380B11}"/>
+              </a:ext>
+            </a:extLst>
+          </p:cNvPr>
+          <p:cNvSpPr txBox="1"/>
+          <p:nvPr/>
+        </p:nvSpPr>
+        <p:spPr>
+          <a:xfrm>
+            <a:off x="288790" y="958844"/>
+            <a:ext cx="11118453" cy="5215338"/>
+          </a:xfrm>
+          <a:prstGeom prst="rect">
+            <a:avLst/>
+          </a:prstGeom>
+          <a:noFill/>
+        </p:spPr>
+        <p:txBody>
+          <a:bodyPr wrap="square" rtlCol="0" anchor="t">
+            <a:spAutoFit/>
+          </a:bodyPr>
+          <a:lstStyle/>
+          <a:p>
+            <a:pPr marL="377825" indent="-285750">
+              <a:lnSpc>
+                <a:spcPct val="150000"/>
+              </a:lnSpc>
+              <a:buFont typeface="Arial" panose="020B0604020202020204" pitchFamily="34" charset="0"/>
+              <a:buChar char="•"/>
+            </a:pPr>
+            <a:r>
+              <a:rPr lang="ko-KR" altLang="en-US" sz="1600" dirty="0"/>
+              <a:t>석탄 채굴은 대규모 전력 및 연료가 필요한 산업으로</a:t>
+            </a:r>
+            <a:r>
+              <a:rPr lang="en-US" altLang="ko-KR" sz="1600" dirty="0"/>
+              <a:t>, </a:t>
+            </a:r>
+            <a:r>
+              <a:rPr lang="ko-KR" altLang="en-US" sz="1600" dirty="0"/>
+              <a:t>에너지 가격 변동에 매우 민감하다</a:t>
+            </a:r>
+            <a:r>
+              <a:rPr lang="en-US" altLang="ko-KR" sz="1600" dirty="0"/>
+              <a:t>.</a:t>
+            </a:r>
+          </a:p>
+          <a:p>
+            <a:pPr marL="835025" lvl="1" indent="-285750">
+              <a:lnSpc>
+                <a:spcPct val="150000"/>
+              </a:lnSpc>
+              <a:buFont typeface="Wingdings" panose="05000000000000000000" pitchFamily="2" charset="2"/>
+              <a:buChar char="ü"/>
+            </a:pPr>
+            <a:r>
+              <a:rPr lang="ko-KR" altLang="en-US" sz="1600" dirty="0"/>
+              <a:t>대형 장비 운용</a:t>
+            </a:r>
+            <a:r>
+              <a:rPr lang="en-US" altLang="ko-KR" sz="1600" dirty="0"/>
+              <a:t>, </a:t>
+            </a:r>
+            <a:r>
+              <a:rPr lang="ko-KR" altLang="en-US" sz="1600" dirty="0"/>
+              <a:t>환기 시스템</a:t>
+            </a:r>
+            <a:r>
+              <a:rPr lang="en-US" altLang="ko-KR" sz="1600" dirty="0"/>
+              <a:t>, </a:t>
+            </a:r>
+            <a:r>
+              <a:rPr lang="ko-KR" altLang="en-US" sz="1600" dirty="0"/>
+              <a:t>지하수 배수 시설 등은 막대한 전력소비를 필요로 한다</a:t>
+            </a:r>
+            <a:r>
+              <a:rPr lang="en-US" altLang="ko-KR" sz="1600" dirty="0"/>
+              <a:t>.</a:t>
+            </a:r>
+          </a:p>
+          <a:p>
+            <a:pPr marL="1292225" lvl="2" indent="-285750">
+              <a:lnSpc>
+                <a:spcPct val="150000"/>
+              </a:lnSpc>
+              <a:buFont typeface="Wingdings" panose="05000000000000000000" pitchFamily="2" charset="2"/>
+              <a:buChar char="Ø"/>
+            </a:pPr>
+            <a:r>
+              <a:rPr lang="ko-KR" altLang="en-US" sz="1600" dirty="0"/>
+              <a:t>운영비에서 에너지비용이 </a:t>
+            </a:r>
+            <a:r>
+              <a:rPr lang="en-US" altLang="ko-KR" sz="1600" dirty="0"/>
+              <a:t>15~40%</a:t>
+            </a:r>
+            <a:r>
+              <a:rPr lang="ko-KR" altLang="en-US" sz="1600" dirty="0"/>
+              <a:t>의 비중을 차지하며</a:t>
+            </a:r>
+            <a:r>
+              <a:rPr lang="en-US" altLang="ko-KR" sz="1600" dirty="0"/>
+              <a:t>, </a:t>
+            </a:r>
+            <a:r>
+              <a:rPr lang="ko-KR" altLang="en-US" sz="1600" dirty="0"/>
+              <a:t>전력요금</a:t>
+            </a:r>
+            <a:r>
+              <a:rPr lang="en-US" altLang="ko-KR" sz="1600" dirty="0"/>
+              <a:t>, </a:t>
+            </a:r>
+            <a:r>
+              <a:rPr lang="ko-KR" altLang="en-US" sz="1600" dirty="0"/>
+              <a:t>유가 상승은 생산비 증가로 이어진다</a:t>
+            </a:r>
+            <a:r>
+              <a:rPr lang="en-US" altLang="ko-KR" sz="1600" dirty="0"/>
+              <a:t>.</a:t>
+            </a:r>
+          </a:p>
+          <a:p>
+            <a:pPr marL="1292225" lvl="2" indent="-285750">
+              <a:lnSpc>
+                <a:spcPct val="150000"/>
+              </a:lnSpc>
+              <a:buFont typeface="Wingdings" panose="05000000000000000000" pitchFamily="2" charset="2"/>
+              <a:buChar char="Ø"/>
+            </a:pPr>
+            <a:endParaRPr lang="en-US" altLang="ko-KR" sz="1600" dirty="0"/>
+          </a:p>
+          <a:p>
+            <a:pPr marL="377825" indent="-285750">
+              <a:lnSpc>
+                <a:spcPct val="150000"/>
+              </a:lnSpc>
+              <a:buFont typeface="Arial" panose="020B0604020202020204" pitchFamily="34" charset="0"/>
+              <a:buChar char="•"/>
+            </a:pPr>
+            <a:r>
+              <a:rPr lang="ko-KR" altLang="en-US" sz="1600" dirty="0"/>
+              <a:t>환경규제는 석탄 생산비용에서 점차 중요한 외생요인 중 하나로 부상하고 있다</a:t>
+            </a:r>
+            <a:r>
+              <a:rPr lang="en-US" altLang="ko-KR" sz="1600" dirty="0"/>
+              <a:t>.</a:t>
+            </a:r>
+          </a:p>
+          <a:p>
+            <a:pPr marL="835025" lvl="1" indent="-285750">
+              <a:lnSpc>
+                <a:spcPct val="150000"/>
+              </a:lnSpc>
+              <a:buFont typeface="Wingdings" panose="05000000000000000000" pitchFamily="2" charset="2"/>
+              <a:buChar char="ü"/>
+            </a:pPr>
+            <a:r>
+              <a:rPr lang="ko-KR" altLang="en-US" sz="1600" dirty="0"/>
+              <a:t>많은 국가에서는 광산개발 단계에서 환경영향평가</a:t>
+            </a:r>
+            <a:r>
+              <a:rPr lang="en-US" altLang="ko-KR" sz="1600" dirty="0"/>
+              <a:t>, </a:t>
+            </a:r>
+            <a:r>
+              <a:rPr lang="ko-KR" altLang="en-US" sz="1600" dirty="0"/>
+              <a:t>복원계획</a:t>
+            </a:r>
+            <a:r>
+              <a:rPr lang="en-US" altLang="ko-KR" sz="1600" dirty="0"/>
+              <a:t>, </a:t>
+            </a:r>
+            <a:r>
+              <a:rPr lang="ko-KR" altLang="en-US" sz="1600" dirty="0"/>
+              <a:t>배출 기준 준수</a:t>
+            </a:r>
+            <a:r>
+              <a:rPr lang="en-US" altLang="ko-KR" sz="1600" dirty="0"/>
+              <a:t>, </a:t>
+            </a:r>
+            <a:r>
+              <a:rPr lang="ko-KR" altLang="en-US" sz="1600" dirty="0"/>
+              <a:t>지하수 보호</a:t>
+            </a:r>
+            <a:r>
+              <a:rPr lang="en-US" altLang="ko-KR" sz="1600" dirty="0"/>
+              <a:t>, </a:t>
+            </a:r>
+            <a:r>
+              <a:rPr lang="ko-KR" altLang="en-US" sz="1600" dirty="0"/>
+              <a:t>미세먼지 관리 등을 요구하며</a:t>
+            </a:r>
+            <a:r>
+              <a:rPr lang="en-US" altLang="ko-KR" sz="1600" dirty="0"/>
+              <a:t>, </a:t>
+            </a:r>
+            <a:r>
+              <a:rPr lang="ko-KR" altLang="en-US" sz="1600" dirty="0"/>
+              <a:t>이에 따른 복구비용 및 규제 대응비용이 생산비용을 증가시키고 있다</a:t>
+            </a:r>
+            <a:r>
+              <a:rPr lang="en-US" altLang="ko-KR" sz="1600" dirty="0"/>
+              <a:t>.</a:t>
+            </a:r>
+          </a:p>
+          <a:p>
+            <a:pPr marL="1292225" lvl="2" indent="-285750">
+              <a:lnSpc>
+                <a:spcPct val="150000"/>
+              </a:lnSpc>
+              <a:buFont typeface="Wingdings" panose="05000000000000000000" pitchFamily="2" charset="2"/>
+              <a:buChar char="Ø"/>
+            </a:pPr>
+            <a:r>
+              <a:rPr lang="ko-KR" altLang="en-US" sz="1600" dirty="0"/>
+              <a:t>미국과 유럽에서는 광산 폐쇄 후 복구 복원비용을 포함한 부담금이 사전에 산정되어야 하며</a:t>
+            </a:r>
+            <a:r>
+              <a:rPr lang="en-US" altLang="ko-KR" sz="1600" dirty="0"/>
+              <a:t>, </a:t>
+            </a:r>
+            <a:r>
+              <a:rPr lang="ko-KR" altLang="en-US" sz="1600" dirty="0"/>
+              <a:t>이는 프로젝트 수익성에 직접적인 영향을 미친다</a:t>
+            </a:r>
+            <a:r>
+              <a:rPr lang="en-US" altLang="ko-KR" sz="1600" dirty="0"/>
+              <a:t>.</a:t>
+            </a:r>
+          </a:p>
+          <a:p>
+            <a:pPr marL="1292225" lvl="2" indent="-285750">
+              <a:lnSpc>
+                <a:spcPct val="150000"/>
+              </a:lnSpc>
+              <a:buFont typeface="Wingdings" panose="05000000000000000000" pitchFamily="2" charset="2"/>
+              <a:buChar char="Ø"/>
+            </a:pPr>
+            <a:endParaRPr lang="en-US" altLang="ko-KR" sz="1600" dirty="0"/>
+          </a:p>
+          <a:p>
+            <a:pPr marL="377825" indent="-285750">
+              <a:lnSpc>
+                <a:spcPct val="150000"/>
+              </a:lnSpc>
+              <a:buFont typeface="Arial" panose="020B0604020202020204" pitchFamily="34" charset="0"/>
+              <a:buChar char="•"/>
+            </a:pPr>
+            <a:r>
+              <a:rPr lang="ko-KR" altLang="en-US" sz="1600" dirty="0"/>
+              <a:t>석탄의 생산비용에는 채굴 이후의 운송 및 물류 비용도 중요한 비중을 차지한다</a:t>
+            </a:r>
+            <a:r>
+              <a:rPr lang="en-US" altLang="ko-KR" sz="1600" dirty="0"/>
+              <a:t>.</a:t>
+            </a:r>
+          </a:p>
+          <a:p>
+            <a:pPr marL="835025" lvl="1" indent="-285750">
+              <a:lnSpc>
+                <a:spcPct val="150000"/>
+              </a:lnSpc>
+              <a:buFont typeface="Wingdings" panose="05000000000000000000" pitchFamily="2" charset="2"/>
+              <a:buChar char="ü"/>
+            </a:pPr>
+            <a:r>
+              <a:rPr lang="ko-KR" altLang="en-US" sz="1600" dirty="0"/>
+              <a:t>철도</a:t>
+            </a:r>
+            <a:r>
+              <a:rPr lang="en-US" altLang="ko-KR" sz="1600" dirty="0"/>
+              <a:t>, </a:t>
+            </a:r>
+            <a:r>
+              <a:rPr lang="ko-KR" altLang="en-US" sz="1600" dirty="0"/>
+              <a:t>항만</a:t>
+            </a:r>
+            <a:r>
+              <a:rPr lang="en-US" altLang="ko-KR" sz="1600" dirty="0"/>
+              <a:t>, </a:t>
+            </a:r>
+            <a:r>
+              <a:rPr lang="ko-KR" altLang="en-US" sz="1600" dirty="0"/>
+              <a:t>도로 등 수송 인프라의 접근성은 물류비용과 공급 안정성에 직결된다</a:t>
+            </a:r>
+            <a:r>
+              <a:rPr lang="en-US" altLang="ko-KR" sz="1600" dirty="0"/>
+              <a:t>.</a:t>
+            </a:r>
+          </a:p>
+          <a:p>
+            <a:pPr marL="835025" lvl="1" indent="-285750">
+              <a:lnSpc>
+                <a:spcPct val="150000"/>
+              </a:lnSpc>
+              <a:buFont typeface="Wingdings" panose="05000000000000000000" pitchFamily="2" charset="2"/>
+              <a:buChar char="ü"/>
+            </a:pPr>
+            <a:r>
+              <a:rPr lang="ko-KR" altLang="en-US" sz="1600" dirty="0"/>
+              <a:t>인프라가 미비한 지역에서는 생산된 석탄의 시장접근성이 떨어져 경쟁력이 약화될 수 있다</a:t>
+            </a:r>
+            <a:r>
+              <a:rPr lang="en-US" altLang="ko-KR" sz="1600" dirty="0"/>
+              <a:t>.</a:t>
+            </a:r>
+          </a:p>
+          <a:p>
+            <a:pPr marL="835025" lvl="1" indent="-285750">
+              <a:lnSpc>
+                <a:spcPct val="150000"/>
+              </a:lnSpc>
+              <a:buFont typeface="Wingdings" panose="05000000000000000000" pitchFamily="2" charset="2"/>
+              <a:buChar char="ü"/>
+            </a:pPr>
+            <a:r>
+              <a:rPr lang="ko-KR" altLang="en-US" sz="1600" dirty="0"/>
+              <a:t>석탄의 수분함량</a:t>
+            </a:r>
+            <a:r>
+              <a:rPr lang="en-US" altLang="ko-KR" sz="1600" dirty="0"/>
+              <a:t>, </a:t>
+            </a:r>
+            <a:r>
+              <a:rPr lang="ko-KR" altLang="en-US" sz="1600" dirty="0"/>
+              <a:t>분진 발생 특성상 운송 중 품질 저하와 손실 문제도 존재한다</a:t>
+            </a:r>
+            <a:r>
+              <a:rPr lang="en-US" altLang="ko-KR" sz="1600" dirty="0"/>
+              <a:t>.</a:t>
+            </a:r>
+          </a:p>
+        </p:txBody>
+      </p:sp>
+    </p:spTree>
+    <p:extLst>
+      <p:ext uri="{BB962C8B-B14F-4D97-AF65-F5344CB8AC3E}">
+        <p14:creationId xmlns:p14="http://schemas.microsoft.com/office/powerpoint/2010/main" val="1675134703"/>
+      </p:ext>
+    </p:extLst>
+  </p:cSld>
+  <p:clrMapOvr>
+    <a:masterClrMapping/>
+  </p:clrMapOvr>
+</p:sld>
+</file>
+
+<file path=ppt/slides/slide27.xml><?xml version="1.0" encoding="utf-8"?>
+<p:sld xmlns:a="http://schemas.openxmlformats.org/drawingml/2006/main" xmlns:r="http://schemas.openxmlformats.org/officeDocument/2006/relationships" xmlns:p="http://schemas.openxmlformats.org/presentationml/2006/main">
+  <p:cSld>
+    <p:spTree>
+      <p:nvGrpSpPr>
+        <p:cNvPr id="1" name="">
+          <a:extLst>
+            <a:ext uri="{FF2B5EF4-FFF2-40B4-BE49-F238E27FC236}">
+              <a16:creationId xmlns:a16="http://schemas.microsoft.com/office/drawing/2014/main" id="{1A68800B-CB6C-BBEA-6864-FD40CF8E59D3}"/>
             </a:ext>
           </a:extLst>
         </p:cNvPr>
@@ -10301,7 +14188,7 @@
           <p:cNvPr id="6" name="그림 5" descr="텍스트, 로고, 원, 폰트이(가) 표시된 사진&#10;&#10;AI 생성 콘텐츠는 정확하지 않을 수 있습니다.">
             <a:extLst>
               <a:ext uri="{FF2B5EF4-FFF2-40B4-BE49-F238E27FC236}">
-                <a16:creationId xmlns:a16="http://schemas.microsoft.com/office/drawing/2014/main" id="{BBB9BD40-31B0-CF75-80CC-4964C75E9B88}"/>
+                <a16:creationId xmlns:a16="http://schemas.microsoft.com/office/drawing/2014/main" id="{7197371F-099C-3A5C-5A23-755E558B5FF9}"/>
               </a:ext>
             </a:extLst>
           </p:cNvPr>
@@ -10338,7 +14225,7 @@
           <p:cNvPr id="4" name="슬라이드 번호 개체 틀 3">
             <a:extLst>
               <a:ext uri="{FF2B5EF4-FFF2-40B4-BE49-F238E27FC236}">
-                <a16:creationId xmlns:a16="http://schemas.microsoft.com/office/drawing/2014/main" id="{D747C5E9-0275-EAE5-E692-6C80776F901A}"/>
+                <a16:creationId xmlns:a16="http://schemas.microsoft.com/office/drawing/2014/main" id="{D403CE3D-FF37-6FEB-D958-7BF84F49ADB8}"/>
               </a:ext>
             </a:extLst>
           </p:cNvPr>
@@ -10356,7 +14243,7 @@
           <a:p>
             <a:fld id="{109C872D-39A9-4065-8BF3-6A613116E2A1}" type="slidenum">
               <a:rPr lang="ko-KR" altLang="en-US" smtClean="0"/>
-              <a:t>21</a:t>
+              <a:t>27</a:t>
             </a:fld>
             <a:endParaRPr lang="ko-KR" altLang="en-US"/>
           </a:p>
@@ -10367,7 +14254,7 @@
           <p:cNvPr id="7" name="제목 1">
             <a:extLst>
               <a:ext uri="{FF2B5EF4-FFF2-40B4-BE49-F238E27FC236}">
-                <a16:creationId xmlns:a16="http://schemas.microsoft.com/office/drawing/2014/main" id="{AF1A278D-627D-B7E6-D54B-C4D6D391DA7F}"/>
+                <a16:creationId xmlns:a16="http://schemas.microsoft.com/office/drawing/2014/main" id="{DAE71EA6-541D-6782-1125-4EE46868B032}"/>
               </a:ext>
             </a:extLst>
           </p:cNvPr>
@@ -10393,11 +14280,18 @@
           <a:p>
             <a:r>
               <a:rPr lang="en-US" altLang="ko-KR" sz="4000" b="1" i="0" spc="150" dirty="0"/>
-              <a:t>Section 1. </a:t>
+              <a:t>Section 6. </a:t>
+            </a:r>
+            <a:br>
+              <a:rPr lang="en-US" altLang="ko-KR" sz="4000" b="1" i="0" spc="150" dirty="0"/>
+            </a:br>
+            <a:r>
+              <a:rPr lang="ko-KR" altLang="en-US" sz="4000" b="1" i="0" spc="150" dirty="0" err="1"/>
+              <a:t>석탄채굴과정의</a:t>
             </a:r>
             <a:r>
               <a:rPr lang="ko-KR" altLang="en-US" sz="4000" b="1" i="0" spc="150" dirty="0"/>
-              <a:t>개 론</a:t>
+              <a:t> 사회적 환경적 문제</a:t>
             </a:r>
             <a:endParaRPr lang="ko-KR" altLang="en-US" sz="3600" i="0" spc="150" dirty="0"/>
           </a:p>
@@ -10406,7 +14300,7 @@
     </p:spTree>
     <p:extLst>
       <p:ext uri="{BB962C8B-B14F-4D97-AF65-F5344CB8AC3E}">
-        <p14:creationId xmlns:p14="http://schemas.microsoft.com/office/powerpoint/2010/main" val="4221688942"/>
+        <p14:creationId xmlns:p14="http://schemas.microsoft.com/office/powerpoint/2010/main" val="2672994572"/>
       </p:ext>
     </p:extLst>
   </p:cSld>
@@ -10416,7 +14310,7 @@
 </p:sld>
 </file>
 
-<file path=ppt/slides/slide22.xml><?xml version="1.0" encoding="utf-8"?>
+<file path=ppt/slides/slide28.xml><?xml version="1.0" encoding="utf-8"?>
 <p:sld xmlns:a="http://schemas.openxmlformats.org/drawingml/2006/main" xmlns:r="http://schemas.openxmlformats.org/officeDocument/2006/relationships" xmlns:p="http://schemas.openxmlformats.org/presentationml/2006/main">
   <p:cSld>
     <p:spTree>
@@ -10424,7 +14318,371 @@
         <p:cNvPr id="1" name="">
           <a:extLst>
             <a:ext uri="{FF2B5EF4-FFF2-40B4-BE49-F238E27FC236}">
-              <a16:creationId xmlns:a16="http://schemas.microsoft.com/office/drawing/2014/main" id="{2221EDDE-B308-8FA7-8116-DAD482D863C8}"/>
+              <a16:creationId xmlns:a16="http://schemas.microsoft.com/office/drawing/2014/main" id="{F3F9D724-1E7C-8A49-84A0-3D7DF2FB2D51}"/>
+            </a:ext>
+          </a:extLst>
+        </p:cNvPr>
+        <p:cNvGrpSpPr/>
+        <p:nvPr/>
+      </p:nvGrpSpPr>
+      <p:grpSpPr>
+        <a:xfrm>
+          <a:off x="0" y="0"/>
+          <a:ext cx="0" cy="0"/>
+          <a:chOff x="0" y="0"/>
+          <a:chExt cx="0" cy="0"/>
+        </a:xfrm>
+      </p:grpSpPr>
+      <p:sp>
+        <p:nvSpPr>
+          <p:cNvPr id="2" name="제목 1">
+            <a:extLst>
+              <a:ext uri="{FF2B5EF4-FFF2-40B4-BE49-F238E27FC236}">
+                <a16:creationId xmlns:a16="http://schemas.microsoft.com/office/drawing/2014/main" id="{72474FB9-C6AD-A8A6-C15A-EFBF9CA50BEE}"/>
+              </a:ext>
+            </a:extLst>
+          </p:cNvPr>
+          <p:cNvSpPr>
+            <a:spLocks noGrp="1"/>
+          </p:cNvSpPr>
+          <p:nvPr>
+            <p:ph type="title"/>
+          </p:nvPr>
+        </p:nvSpPr>
+        <p:spPr/>
+        <p:txBody>
+          <a:bodyPr/>
+          <a:lstStyle/>
+          <a:p>
+            <a:r>
+              <a:rPr lang="ko-KR" altLang="en-US" dirty="0"/>
+              <a:t>채굴과정에서의 사회적</a:t>
+            </a:r>
+            <a:r>
+              <a:rPr lang="en-US" altLang="ko-KR" dirty="0"/>
+              <a:t>·</a:t>
+            </a:r>
+            <a:r>
+              <a:rPr lang="ko-KR" altLang="en-US" dirty="0"/>
+              <a:t>환경적 문제</a:t>
+            </a:r>
+          </a:p>
+        </p:txBody>
+      </p:sp>
+      <p:sp>
+        <p:nvSpPr>
+          <p:cNvPr id="4" name="슬라이드 번호 개체 틀 3">
+            <a:extLst>
+              <a:ext uri="{FF2B5EF4-FFF2-40B4-BE49-F238E27FC236}">
+                <a16:creationId xmlns:a16="http://schemas.microsoft.com/office/drawing/2014/main" id="{44BE9E43-DB40-9537-65BA-52B738356C77}"/>
+              </a:ext>
+            </a:extLst>
+          </p:cNvPr>
+          <p:cNvSpPr>
+            <a:spLocks noGrp="1"/>
+          </p:cNvSpPr>
+          <p:nvPr>
+            <p:ph type="sldNum" sz="quarter" idx="12"/>
+          </p:nvPr>
+        </p:nvSpPr>
+        <p:spPr/>
+        <p:txBody>
+          <a:bodyPr/>
+          <a:lstStyle/>
+          <a:p>
+            <a:fld id="{109C872D-39A9-4065-8BF3-6A613116E2A1}" type="slidenum">
+              <a:rPr lang="ko-KR" altLang="en-US" smtClean="0"/>
+              <a:t>28</a:t>
+            </a:fld>
+            <a:endParaRPr lang="ko-KR" altLang="en-US"/>
+          </a:p>
+        </p:txBody>
+      </p:sp>
+      <p:sp>
+        <p:nvSpPr>
+          <p:cNvPr id="3" name="TextBox 2">
+            <a:extLst>
+              <a:ext uri="{FF2B5EF4-FFF2-40B4-BE49-F238E27FC236}">
+                <a16:creationId xmlns:a16="http://schemas.microsoft.com/office/drawing/2014/main" id="{85F1BFB7-5BE9-62EB-BA3E-CD96FB479E42}"/>
+              </a:ext>
+            </a:extLst>
+          </p:cNvPr>
+          <p:cNvSpPr txBox="1"/>
+          <p:nvPr/>
+        </p:nvSpPr>
+        <p:spPr>
+          <a:xfrm>
+            <a:off x="288790" y="958844"/>
+            <a:ext cx="11118453" cy="4107343"/>
+          </a:xfrm>
+          <a:prstGeom prst="rect">
+            <a:avLst/>
+          </a:prstGeom>
+          <a:noFill/>
+        </p:spPr>
+        <p:txBody>
+          <a:bodyPr wrap="square" rtlCol="0" anchor="t">
+            <a:spAutoFit/>
+          </a:bodyPr>
+          <a:lstStyle/>
+          <a:p>
+            <a:pPr marL="377825" indent="-285750">
+              <a:lnSpc>
+                <a:spcPct val="150000"/>
+              </a:lnSpc>
+              <a:buFont typeface="Arial" panose="020B0604020202020204" pitchFamily="34" charset="0"/>
+              <a:buChar char="•"/>
+            </a:pPr>
+            <a:r>
+              <a:rPr lang="ko-KR" altLang="en-US" sz="1600" dirty="0"/>
+              <a:t>석탄 채굴 과정은 에너지 자원 확보라는 경제적 이익에도 불구하고</a:t>
+            </a:r>
+            <a:r>
+              <a:rPr lang="en-US" altLang="ko-KR" sz="1600" dirty="0"/>
+              <a:t>, </a:t>
+            </a:r>
+            <a:r>
+              <a:rPr lang="ko-KR" altLang="en-US" sz="1600" dirty="0"/>
+              <a:t>다양한 환경적</a:t>
+            </a:r>
+            <a:r>
+              <a:rPr lang="en-US" altLang="ko-KR" sz="1600" dirty="0"/>
+              <a:t>·</a:t>
+            </a:r>
+            <a:r>
+              <a:rPr lang="ko-KR" altLang="en-US" sz="1600" dirty="0"/>
+              <a:t>사회적 문제를 초래하여 지속가능성과 형평성 측면에서 심각한 도전을 제기한다</a:t>
+            </a:r>
+            <a:r>
+              <a:rPr lang="en-US" altLang="ko-KR" sz="1600" dirty="0"/>
+              <a:t>.</a:t>
+            </a:r>
+          </a:p>
+          <a:p>
+            <a:pPr marL="835025" lvl="1" indent="-285750">
+              <a:lnSpc>
+                <a:spcPct val="150000"/>
+              </a:lnSpc>
+              <a:buFont typeface="Wingdings" panose="05000000000000000000" pitchFamily="2" charset="2"/>
+              <a:buChar char="ü"/>
+            </a:pPr>
+            <a:r>
+              <a:rPr lang="ko-KR" altLang="en-US" sz="1600" dirty="0"/>
+              <a:t>기후변화 대응</a:t>
+            </a:r>
+            <a:r>
+              <a:rPr lang="en-US" altLang="ko-KR" sz="1600" dirty="0"/>
+              <a:t>, </a:t>
+            </a:r>
+            <a:r>
+              <a:rPr lang="ko-KR" altLang="en-US" sz="1600" dirty="0"/>
+              <a:t>생물다양성 손실</a:t>
+            </a:r>
+            <a:r>
+              <a:rPr lang="en-US" altLang="ko-KR" sz="1600" dirty="0"/>
+              <a:t>, </a:t>
+            </a:r>
+            <a:r>
+              <a:rPr lang="ko-KR" altLang="en-US" sz="1600" dirty="0"/>
+              <a:t>지역 불평등</a:t>
+            </a:r>
+            <a:r>
+              <a:rPr lang="en-US" altLang="ko-KR" sz="1600" dirty="0"/>
+              <a:t>, </a:t>
+            </a:r>
+            <a:r>
+              <a:rPr lang="ko-KR" altLang="en-US" sz="1600" dirty="0"/>
+              <a:t>노동권 침해 등 이슈는 세계적으로 중요한 관심사이다</a:t>
+            </a:r>
+            <a:r>
+              <a:rPr lang="en-US" altLang="ko-KR" sz="1600" dirty="0"/>
+              <a:t>.</a:t>
+            </a:r>
+          </a:p>
+          <a:p>
+            <a:pPr marL="835025" lvl="1" indent="-285750">
+              <a:lnSpc>
+                <a:spcPct val="150000"/>
+              </a:lnSpc>
+              <a:buFont typeface="Wingdings" panose="05000000000000000000" pitchFamily="2" charset="2"/>
+              <a:buChar char="ü"/>
+            </a:pPr>
+            <a:endParaRPr lang="en-US" altLang="ko-KR" sz="1600" dirty="0"/>
+          </a:p>
+          <a:p>
+            <a:pPr marL="377825" indent="-285750">
+              <a:lnSpc>
+                <a:spcPct val="150000"/>
+              </a:lnSpc>
+              <a:buFont typeface="Arial" panose="020B0604020202020204" pitchFamily="34" charset="0"/>
+              <a:buChar char="•"/>
+            </a:pPr>
+            <a:r>
+              <a:rPr lang="ko-KR" altLang="en-US" sz="1600" dirty="0"/>
+              <a:t>석탄 채굴은 토지 훼손</a:t>
+            </a:r>
+            <a:r>
+              <a:rPr lang="en-US" altLang="ko-KR" sz="1600" dirty="0"/>
+              <a:t>, </a:t>
+            </a:r>
+            <a:r>
+              <a:rPr lang="ko-KR" altLang="en-US" sz="1600" dirty="0"/>
+              <a:t>생태계 파괴</a:t>
+            </a:r>
+            <a:r>
+              <a:rPr lang="en-US" altLang="ko-KR" sz="1600" dirty="0"/>
+              <a:t>, </a:t>
+            </a:r>
+            <a:r>
+              <a:rPr lang="ko-KR" altLang="en-US" sz="1600" dirty="0"/>
+              <a:t>수질 및 대기오염 등 다방면에서 환경에 심대한 영향을 미친다</a:t>
+            </a:r>
+            <a:r>
+              <a:rPr lang="en-US" altLang="ko-KR" sz="1600" dirty="0"/>
+              <a:t>.</a:t>
+            </a:r>
+          </a:p>
+          <a:p>
+            <a:pPr marL="835025" lvl="1" indent="-285750">
+              <a:lnSpc>
+                <a:spcPct val="150000"/>
+              </a:lnSpc>
+              <a:buFont typeface="Wingdings" panose="05000000000000000000" pitchFamily="2" charset="2"/>
+              <a:buChar char="ü"/>
+            </a:pPr>
+            <a:r>
+              <a:rPr lang="ko-KR" altLang="en-US" sz="1600" dirty="0"/>
+              <a:t>탄광개발이 습지</a:t>
+            </a:r>
+            <a:r>
+              <a:rPr lang="en-US" altLang="ko-KR" sz="1600" dirty="0"/>
+              <a:t>, </a:t>
+            </a:r>
+            <a:r>
+              <a:rPr lang="ko-KR" altLang="en-US" sz="1600" dirty="0"/>
+              <a:t>강</a:t>
+            </a:r>
+            <a:r>
+              <a:rPr lang="en-US" altLang="ko-KR" sz="1600" dirty="0"/>
+              <a:t>, </a:t>
+            </a:r>
+            <a:r>
+              <a:rPr lang="ko-KR" altLang="en-US" sz="1600" dirty="0"/>
+              <a:t>하천</a:t>
+            </a:r>
+            <a:r>
+              <a:rPr lang="en-US" altLang="ko-KR" sz="1600" dirty="0"/>
+              <a:t>, </a:t>
+            </a:r>
+            <a:r>
+              <a:rPr lang="ko-KR" altLang="en-US" sz="1600" dirty="0"/>
+              <a:t>경작지 등 환경적 가치가 높은 지역에 위치하여 지속가능한 토지 이용과 충돌을 일으키고 있다</a:t>
+            </a:r>
+            <a:r>
+              <a:rPr lang="en-US" altLang="ko-KR" sz="1600" dirty="0"/>
+              <a:t>. </a:t>
+            </a:r>
+          </a:p>
+          <a:p>
+            <a:pPr marL="835025" lvl="1" indent="-285750">
+              <a:lnSpc>
+                <a:spcPct val="150000"/>
+              </a:lnSpc>
+              <a:buFont typeface="Wingdings" panose="05000000000000000000" pitchFamily="2" charset="2"/>
+              <a:buChar char="ü"/>
+            </a:pPr>
+            <a:r>
+              <a:rPr lang="ko-KR" altLang="en-US" sz="1600" dirty="0"/>
+              <a:t>수질오염 역시 중요한 문제인데</a:t>
+            </a:r>
+            <a:r>
+              <a:rPr lang="en-US" altLang="ko-KR" sz="1600" dirty="0"/>
+              <a:t>, </a:t>
+            </a:r>
+            <a:r>
+              <a:rPr lang="ko-KR" altLang="en-US" sz="1600" dirty="0"/>
+              <a:t>석탄 채굴 과정에서 발생하는 산성광산배수는 황화광물의 산화로 인해 생성되며</a:t>
+            </a:r>
+            <a:r>
+              <a:rPr lang="en-US" altLang="ko-KR" sz="1600" dirty="0"/>
+              <a:t>, </a:t>
+            </a:r>
+            <a:r>
+              <a:rPr lang="ko-KR" altLang="en-US" sz="1600" dirty="0"/>
+              <a:t>중금속이 함유된 오염수가 하천 및 지하수로 유입되어 장기적으로 수자원 생태계와 인간 건강에 악영향을 미친다</a:t>
+            </a:r>
+            <a:r>
+              <a:rPr lang="en-US" altLang="ko-KR" sz="1600" dirty="0"/>
+              <a:t>. (</a:t>
+            </a:r>
+            <a:r>
+              <a:rPr lang="ko-KR" altLang="en-US" sz="1600" dirty="0"/>
+              <a:t>미국의 </a:t>
+            </a:r>
+            <a:r>
+              <a:rPr lang="ko-KR" altLang="en-US" sz="1600" dirty="0" err="1"/>
+              <a:t>웨스트버지니아</a:t>
+            </a:r>
+            <a:r>
+              <a:rPr lang="en-US" altLang="ko-KR" sz="1600" dirty="0"/>
+              <a:t>, </a:t>
+            </a:r>
+            <a:r>
+              <a:rPr lang="ko-KR" altLang="en-US" sz="1600" dirty="0"/>
+              <a:t>인도의 </a:t>
+            </a:r>
+            <a:r>
+              <a:rPr lang="ko-KR" altLang="en-US" sz="1600" dirty="0" err="1"/>
+              <a:t>자르칸드</a:t>
+            </a:r>
+            <a:r>
+              <a:rPr lang="ko-KR" altLang="en-US" sz="1600" dirty="0"/>
+              <a:t> 지역에 광산배수 오염사례</a:t>
+            </a:r>
+            <a:r>
+              <a:rPr lang="en-US" altLang="ko-KR" sz="1600"/>
+              <a:t>)</a:t>
+            </a:r>
+            <a:endParaRPr lang="en-US" altLang="ko-KR" sz="1600" dirty="0"/>
+          </a:p>
+          <a:p>
+            <a:pPr marL="835025" lvl="1" indent="-285750">
+              <a:lnSpc>
+                <a:spcPct val="150000"/>
+              </a:lnSpc>
+              <a:buFont typeface="Wingdings" panose="05000000000000000000" pitchFamily="2" charset="2"/>
+              <a:buChar char="ü"/>
+            </a:pPr>
+            <a:r>
+              <a:rPr lang="ko-KR" altLang="en-US" sz="1600" dirty="0"/>
+              <a:t> </a:t>
+            </a:r>
+            <a:endParaRPr lang="en-US" altLang="ko-KR" sz="1600" dirty="0"/>
+          </a:p>
+        </p:txBody>
+      </p:sp>
+    </p:spTree>
+    <p:extLst>
+      <p:ext uri="{BB962C8B-B14F-4D97-AF65-F5344CB8AC3E}">
+        <p14:creationId xmlns:p14="http://schemas.microsoft.com/office/powerpoint/2010/main" val="261239782"/>
+      </p:ext>
+    </p:extLst>
+  </p:cSld>
+  <p:clrMapOvr>
+    <a:masterClrMapping/>
+  </p:clrMapOvr>
+</p:sld>
+</file>
+
+<file path=ppt/slides/slide29.xml><?xml version="1.0" encoding="utf-8"?>
+<p:sld xmlns:a="http://schemas.openxmlformats.org/drawingml/2006/main" xmlns:r="http://schemas.openxmlformats.org/officeDocument/2006/relationships" xmlns:p="http://schemas.openxmlformats.org/presentationml/2006/main">
+  <p:cSld>
+    <p:spTree>
+      <p:nvGrpSpPr>
+        <p:cNvPr id="1" name="">
+          <a:extLst>
+            <a:ext uri="{FF2B5EF4-FFF2-40B4-BE49-F238E27FC236}">
+              <a16:creationId xmlns:a16="http://schemas.microsoft.com/office/drawing/2014/main" id="{2BB52C00-4FB8-6E54-7AB8-1AF3515CDC04}"/>
             </a:ext>
           </a:extLst>
         </p:cNvPr>
@@ -10441,10 +14699,10 @@
       </p:grpSpPr>
       <p:pic>
         <p:nvPicPr>
-          <p:cNvPr id="3" name="그림 2" descr="텍스트, 로고, 원, 폰트이(가) 표시된 사진&#10;&#10;AI 생성 콘텐츠는 정확하지 않을 수 있습니다.">
+          <p:cNvPr id="6" name="그림 5" descr="텍스트, 로고, 원, 폰트이(가) 표시된 사진&#10;&#10;AI 생성 콘텐츠는 정확하지 않을 수 있습니다.">
             <a:extLst>
               <a:ext uri="{FF2B5EF4-FFF2-40B4-BE49-F238E27FC236}">
-                <a16:creationId xmlns:a16="http://schemas.microsoft.com/office/drawing/2014/main" id="{396FF0BD-25A1-7840-4B63-B2ECDF7CFA54}"/>
+                <a16:creationId xmlns:a16="http://schemas.microsoft.com/office/drawing/2014/main" id="{5A56A791-A436-FF30-C46F-320B6C969F65}"/>
               </a:ext>
             </a:extLst>
           </p:cNvPr>
@@ -10478,55 +14736,10 @@
       </p:pic>
       <p:sp>
         <p:nvSpPr>
-          <p:cNvPr id="2" name="제목 1">
+          <p:cNvPr id="4" name="슬라이드 번호 개체 틀 3">
             <a:extLst>
               <a:ext uri="{FF2B5EF4-FFF2-40B4-BE49-F238E27FC236}">
-                <a16:creationId xmlns:a16="http://schemas.microsoft.com/office/drawing/2014/main" id="{CA03F291-495C-4A31-DF0A-8F9CC97672B8}"/>
-              </a:ext>
-            </a:extLst>
-          </p:cNvPr>
-          <p:cNvSpPr>
-            <a:spLocks noGrp="1"/>
-          </p:cNvSpPr>
-          <p:nvPr>
-            <p:ph type="title"/>
-          </p:nvPr>
-        </p:nvSpPr>
-        <p:spPr>
-          <a:xfrm>
-            <a:off x="831850" y="1709739"/>
-            <a:ext cx="10515600" cy="2134292"/>
-          </a:xfrm>
-          <a:effectLst>
-            <a:reflection blurRad="50800" stA="45000" endPos="44000" dir="5400000" sy="-100000" algn="bl" rotWithShape="0"/>
-          </a:effectLst>
-        </p:spPr>
-        <p:txBody>
-          <a:bodyPr/>
-          <a:lstStyle/>
-          <a:p>
-            <a:r>
-              <a:rPr lang="en-US" altLang="ko-KR" b="1" i="0" spc="150">
-                <a:solidFill>
-                  <a:schemeClr val="accent2"/>
-                </a:solidFill>
-              </a:rPr>
-              <a:t>T</a:t>
-            </a:r>
-            <a:r>
-              <a:rPr lang="en-US" altLang="ko-KR" sz="5400" i="0" spc="100"/>
-              <a:t>hank you</a:t>
-            </a:r>
-            <a:endParaRPr lang="ko-KR" altLang="en-US" sz="5400" i="0" spc="100"/>
-          </a:p>
-        </p:txBody>
-      </p:sp>
-      <p:sp>
-        <p:nvSpPr>
-          <p:cNvPr id="4" name="슬라이드 번호 개체 틀 3">
-            <a:extLst>
-              <a:ext uri="{FF2B5EF4-FFF2-40B4-BE49-F238E27FC236}">
-                <a16:creationId xmlns:a16="http://schemas.microsoft.com/office/drawing/2014/main" id="{6EFC0B50-C677-27B7-56F6-14F7BF9A70A9}"/>
+                <a16:creationId xmlns:a16="http://schemas.microsoft.com/office/drawing/2014/main" id="{EC90D0E0-E6B8-B422-7F51-366317F7B2FE}"/>
               </a:ext>
             </a:extLst>
           </p:cNvPr>
@@ -10544,16 +14757,57 @@
           <a:p>
             <a:fld id="{109C872D-39A9-4065-8BF3-6A613116E2A1}" type="slidenum">
               <a:rPr lang="ko-KR" altLang="en-US" smtClean="0"/>
-              <a:t>22</a:t>
+              <a:t>29</a:t>
             </a:fld>
             <a:endParaRPr lang="ko-KR" altLang="en-US"/>
+          </a:p>
+        </p:txBody>
+      </p:sp>
+      <p:sp>
+        <p:nvSpPr>
+          <p:cNvPr id="7" name="제목 1">
+            <a:extLst>
+              <a:ext uri="{FF2B5EF4-FFF2-40B4-BE49-F238E27FC236}">
+                <a16:creationId xmlns:a16="http://schemas.microsoft.com/office/drawing/2014/main" id="{F7BA6FFD-890A-1B62-9230-139A081897CC}"/>
+              </a:ext>
+            </a:extLst>
+          </p:cNvPr>
+          <p:cNvSpPr>
+            <a:spLocks noGrp="1"/>
+          </p:cNvSpPr>
+          <p:nvPr>
+            <p:ph type="title"/>
+          </p:nvPr>
+        </p:nvSpPr>
+        <p:spPr>
+          <a:xfrm>
+            <a:off x="831850" y="3765550"/>
+            <a:ext cx="11150600" cy="652818"/>
+          </a:xfrm>
+          <a:effectLst>
+            <a:reflection blurRad="50800" stA="45000" endPos="44000" dir="5400000" sy="-100000" algn="bl" rotWithShape="0"/>
+          </a:effectLst>
+        </p:spPr>
+        <p:txBody>
+          <a:bodyPr anchor="b"/>
+          <a:lstStyle/>
+          <a:p>
+            <a:r>
+              <a:rPr lang="en-US" altLang="ko-KR" sz="4000" b="1" i="0" spc="150" dirty="0"/>
+              <a:t>Section 7. </a:t>
+            </a:r>
+            <a:r>
+              <a:rPr lang="ko-KR" altLang="en-US" sz="4000" b="1" i="0" spc="150" dirty="0"/>
+              <a:t>석탄산업의 구조와 경쟁</a:t>
+            </a:r>
+            <a:endParaRPr lang="ko-KR" altLang="en-US" sz="3600" i="0" spc="150" dirty="0"/>
           </a:p>
         </p:txBody>
       </p:sp>
     </p:spTree>
     <p:extLst>
       <p:ext uri="{BB962C8B-B14F-4D97-AF65-F5344CB8AC3E}">
-        <p14:creationId xmlns:p14="http://schemas.microsoft.com/office/powerpoint/2010/main" val="103939182"/>
+        <p14:creationId xmlns:p14="http://schemas.microsoft.com/office/powerpoint/2010/main" val="3862282321"/>
       </p:ext>
     </p:extLst>
   </p:cSld>
@@ -10697,6 +14951,725 @@
     <p:extLst>
       <p:ext uri="{BB962C8B-B14F-4D97-AF65-F5344CB8AC3E}">
         <p14:creationId xmlns:p14="http://schemas.microsoft.com/office/powerpoint/2010/main" val="2957073077"/>
+      </p:ext>
+    </p:extLst>
+  </p:cSld>
+  <p:clrMapOvr>
+    <a:masterClrMapping/>
+  </p:clrMapOvr>
+</p:sld>
+</file>
+
+<file path=ppt/slides/slide30.xml><?xml version="1.0" encoding="utf-8"?>
+<p:sld xmlns:a="http://schemas.openxmlformats.org/drawingml/2006/main" xmlns:r="http://schemas.openxmlformats.org/officeDocument/2006/relationships" xmlns:p="http://schemas.openxmlformats.org/presentationml/2006/main">
+  <p:cSld>
+    <p:spTree>
+      <p:nvGrpSpPr>
+        <p:cNvPr id="1" name="">
+          <a:extLst>
+            <a:ext uri="{FF2B5EF4-FFF2-40B4-BE49-F238E27FC236}">
+              <a16:creationId xmlns:a16="http://schemas.microsoft.com/office/drawing/2014/main" id="{A8EC7BC0-44CC-D7F4-E6DD-57DD5DF7AA34}"/>
+            </a:ext>
+          </a:extLst>
+        </p:cNvPr>
+        <p:cNvGrpSpPr/>
+        <p:nvPr/>
+      </p:nvGrpSpPr>
+      <p:grpSpPr>
+        <a:xfrm>
+          <a:off x="0" y="0"/>
+          <a:ext cx="0" cy="0"/>
+          <a:chOff x="0" y="0"/>
+          <a:chExt cx="0" cy="0"/>
+        </a:xfrm>
+      </p:grpSpPr>
+      <p:pic>
+        <p:nvPicPr>
+          <p:cNvPr id="6" name="그림 5" descr="텍스트, 로고, 원, 폰트이(가) 표시된 사진&#10;&#10;AI 생성 콘텐츠는 정확하지 않을 수 있습니다.">
+            <a:extLst>
+              <a:ext uri="{FF2B5EF4-FFF2-40B4-BE49-F238E27FC236}">
+                <a16:creationId xmlns:a16="http://schemas.microsoft.com/office/drawing/2014/main" id="{B81F0DEA-AE25-B4E8-343A-FEF36817CAB9}"/>
+              </a:ext>
+            </a:extLst>
+          </p:cNvPr>
+          <p:cNvPicPr>
+            <a:picLocks noChangeAspect="1"/>
+          </p:cNvPicPr>
+          <p:nvPr/>
+        </p:nvPicPr>
+        <p:blipFill>
+          <a:blip r:embed="rId2">
+            <a:alphaModFix amt="20000"/>
+            <a:extLst>
+              <a:ext uri="{28A0092B-C50C-407E-A947-70E740481C1C}">
+                <a14:useLocalDpi xmlns:a14="http://schemas.microsoft.com/office/drawing/2010/main" val="0"/>
+              </a:ext>
+            </a:extLst>
+          </a:blip>
+          <a:stretch>
+            <a:fillRect/>
+          </a:stretch>
+        </p:blipFill>
+        <p:spPr>
+          <a:xfrm>
+            <a:off x="4012070" y="1673061"/>
+            <a:ext cx="4167861" cy="4167861"/>
+          </a:xfrm>
+          <a:prstGeom prst="rect">
+            <a:avLst/>
+          </a:prstGeom>
+        </p:spPr>
+      </p:pic>
+      <p:sp>
+        <p:nvSpPr>
+          <p:cNvPr id="4" name="슬라이드 번호 개체 틀 3">
+            <a:extLst>
+              <a:ext uri="{FF2B5EF4-FFF2-40B4-BE49-F238E27FC236}">
+                <a16:creationId xmlns:a16="http://schemas.microsoft.com/office/drawing/2014/main" id="{CB5BD1CC-4832-28EA-F890-0A6C9BA90D0C}"/>
+              </a:ext>
+            </a:extLst>
+          </p:cNvPr>
+          <p:cNvSpPr>
+            <a:spLocks noGrp="1"/>
+          </p:cNvSpPr>
+          <p:nvPr>
+            <p:ph type="sldNum" sz="quarter" idx="12"/>
+          </p:nvPr>
+        </p:nvSpPr>
+        <p:spPr/>
+        <p:txBody>
+          <a:bodyPr/>
+          <a:lstStyle/>
+          <a:p>
+            <a:fld id="{109C872D-39A9-4065-8BF3-6A613116E2A1}" type="slidenum">
+              <a:rPr lang="ko-KR" altLang="en-US" smtClean="0"/>
+              <a:t>30</a:t>
+            </a:fld>
+            <a:endParaRPr lang="ko-KR" altLang="en-US"/>
+          </a:p>
+        </p:txBody>
+      </p:sp>
+      <p:sp>
+        <p:nvSpPr>
+          <p:cNvPr id="7" name="제목 1">
+            <a:extLst>
+              <a:ext uri="{FF2B5EF4-FFF2-40B4-BE49-F238E27FC236}">
+                <a16:creationId xmlns:a16="http://schemas.microsoft.com/office/drawing/2014/main" id="{4E50D6D8-C49D-3D8B-C6BD-1CFAA1E59A4F}"/>
+              </a:ext>
+            </a:extLst>
+          </p:cNvPr>
+          <p:cNvSpPr>
+            <a:spLocks noGrp="1"/>
+          </p:cNvSpPr>
+          <p:nvPr>
+            <p:ph type="title"/>
+          </p:nvPr>
+        </p:nvSpPr>
+        <p:spPr>
+          <a:xfrm>
+            <a:off x="831850" y="3765550"/>
+            <a:ext cx="11150600" cy="652818"/>
+          </a:xfrm>
+          <a:effectLst>
+            <a:reflection blurRad="50800" stA="45000" endPos="44000" dir="5400000" sy="-100000" algn="bl" rotWithShape="0"/>
+          </a:effectLst>
+        </p:spPr>
+        <p:txBody>
+          <a:bodyPr anchor="b"/>
+          <a:lstStyle/>
+          <a:p>
+            <a:r>
+              <a:rPr lang="en-US" altLang="ko-KR" sz="4000" b="1" i="0" spc="150" dirty="0"/>
+              <a:t>Section 8. </a:t>
+            </a:r>
+            <a:r>
+              <a:rPr lang="ko-KR" altLang="en-US" sz="4000" b="1" i="0" spc="150" dirty="0"/>
+              <a:t>석탄시장의 거래 현황</a:t>
+            </a:r>
+            <a:endParaRPr lang="ko-KR" altLang="en-US" sz="3600" i="0" spc="150" dirty="0"/>
+          </a:p>
+        </p:txBody>
+      </p:sp>
+    </p:spTree>
+    <p:extLst>
+      <p:ext uri="{BB962C8B-B14F-4D97-AF65-F5344CB8AC3E}">
+        <p14:creationId xmlns:p14="http://schemas.microsoft.com/office/powerpoint/2010/main" val="1523942650"/>
+      </p:ext>
+    </p:extLst>
+  </p:cSld>
+  <p:clrMapOvr>
+    <a:masterClrMapping/>
+  </p:clrMapOvr>
+</p:sld>
+</file>
+
+<file path=ppt/slides/slide31.xml><?xml version="1.0" encoding="utf-8"?>
+<p:sld xmlns:a="http://schemas.openxmlformats.org/drawingml/2006/main" xmlns:r="http://schemas.openxmlformats.org/officeDocument/2006/relationships" xmlns:p="http://schemas.openxmlformats.org/presentationml/2006/main">
+  <p:cSld>
+    <p:spTree>
+      <p:nvGrpSpPr>
+        <p:cNvPr id="1" name="">
+          <a:extLst>
+            <a:ext uri="{FF2B5EF4-FFF2-40B4-BE49-F238E27FC236}">
+              <a16:creationId xmlns:a16="http://schemas.microsoft.com/office/drawing/2014/main" id="{BD16502F-0528-3EDF-A225-5DDABB306E5B}"/>
+            </a:ext>
+          </a:extLst>
+        </p:cNvPr>
+        <p:cNvGrpSpPr/>
+        <p:nvPr/>
+      </p:nvGrpSpPr>
+      <p:grpSpPr>
+        <a:xfrm>
+          <a:off x="0" y="0"/>
+          <a:ext cx="0" cy="0"/>
+          <a:chOff x="0" y="0"/>
+          <a:chExt cx="0" cy="0"/>
+        </a:xfrm>
+      </p:grpSpPr>
+      <p:pic>
+        <p:nvPicPr>
+          <p:cNvPr id="6" name="그림 5" descr="텍스트, 로고, 원, 폰트이(가) 표시된 사진&#10;&#10;AI 생성 콘텐츠는 정확하지 않을 수 있습니다.">
+            <a:extLst>
+              <a:ext uri="{FF2B5EF4-FFF2-40B4-BE49-F238E27FC236}">
+                <a16:creationId xmlns:a16="http://schemas.microsoft.com/office/drawing/2014/main" id="{92A372EA-D856-6D5C-A598-D9FB00ABE1AB}"/>
+              </a:ext>
+            </a:extLst>
+          </p:cNvPr>
+          <p:cNvPicPr>
+            <a:picLocks noChangeAspect="1"/>
+          </p:cNvPicPr>
+          <p:nvPr/>
+        </p:nvPicPr>
+        <p:blipFill>
+          <a:blip r:embed="rId2">
+            <a:alphaModFix amt="20000"/>
+            <a:extLst>
+              <a:ext uri="{28A0092B-C50C-407E-A947-70E740481C1C}">
+                <a14:useLocalDpi xmlns:a14="http://schemas.microsoft.com/office/drawing/2010/main" val="0"/>
+              </a:ext>
+            </a:extLst>
+          </a:blip>
+          <a:stretch>
+            <a:fillRect/>
+          </a:stretch>
+        </p:blipFill>
+        <p:spPr>
+          <a:xfrm>
+            <a:off x="4012070" y="1673061"/>
+            <a:ext cx="4167861" cy="4167861"/>
+          </a:xfrm>
+          <a:prstGeom prst="rect">
+            <a:avLst/>
+          </a:prstGeom>
+        </p:spPr>
+      </p:pic>
+      <p:sp>
+        <p:nvSpPr>
+          <p:cNvPr id="4" name="슬라이드 번호 개체 틀 3">
+            <a:extLst>
+              <a:ext uri="{FF2B5EF4-FFF2-40B4-BE49-F238E27FC236}">
+                <a16:creationId xmlns:a16="http://schemas.microsoft.com/office/drawing/2014/main" id="{05FF8610-BFF7-A94E-BE6D-005ED2BAE116}"/>
+              </a:ext>
+            </a:extLst>
+          </p:cNvPr>
+          <p:cNvSpPr>
+            <a:spLocks noGrp="1"/>
+          </p:cNvSpPr>
+          <p:nvPr>
+            <p:ph type="sldNum" sz="quarter" idx="12"/>
+          </p:nvPr>
+        </p:nvSpPr>
+        <p:spPr/>
+        <p:txBody>
+          <a:bodyPr/>
+          <a:lstStyle/>
+          <a:p>
+            <a:fld id="{109C872D-39A9-4065-8BF3-6A613116E2A1}" type="slidenum">
+              <a:rPr lang="ko-KR" altLang="en-US" smtClean="0"/>
+              <a:t>31</a:t>
+            </a:fld>
+            <a:endParaRPr lang="ko-KR" altLang="en-US"/>
+          </a:p>
+        </p:txBody>
+      </p:sp>
+      <p:sp>
+        <p:nvSpPr>
+          <p:cNvPr id="7" name="제목 1">
+            <a:extLst>
+              <a:ext uri="{FF2B5EF4-FFF2-40B4-BE49-F238E27FC236}">
+                <a16:creationId xmlns:a16="http://schemas.microsoft.com/office/drawing/2014/main" id="{64D21FAA-7D58-50E2-4F0A-D7ED0636E014}"/>
+              </a:ext>
+            </a:extLst>
+          </p:cNvPr>
+          <p:cNvSpPr>
+            <a:spLocks noGrp="1"/>
+          </p:cNvSpPr>
+          <p:nvPr>
+            <p:ph type="title"/>
+          </p:nvPr>
+        </p:nvSpPr>
+        <p:spPr>
+          <a:xfrm>
+            <a:off x="831850" y="3765550"/>
+            <a:ext cx="11150600" cy="652818"/>
+          </a:xfrm>
+          <a:effectLst>
+            <a:reflection blurRad="50800" stA="45000" endPos="44000" dir="5400000" sy="-100000" algn="bl" rotWithShape="0"/>
+          </a:effectLst>
+        </p:spPr>
+        <p:txBody>
+          <a:bodyPr anchor="b"/>
+          <a:lstStyle/>
+          <a:p>
+            <a:r>
+              <a:rPr lang="en-US" altLang="ko-KR" sz="4000" b="1" i="0" spc="150" dirty="0"/>
+              <a:t>Section 9. </a:t>
+            </a:r>
+            <a:r>
+              <a:rPr lang="ko-KR" altLang="en-US" sz="4000" b="1" i="0" spc="150" dirty="0"/>
+              <a:t>석탄산업의 혁신과 청정 석탄기술</a:t>
+            </a:r>
+            <a:endParaRPr lang="ko-KR" altLang="en-US" sz="3600" i="0" spc="150" dirty="0"/>
+          </a:p>
+        </p:txBody>
+      </p:sp>
+    </p:spTree>
+    <p:extLst>
+      <p:ext uri="{BB962C8B-B14F-4D97-AF65-F5344CB8AC3E}">
+        <p14:creationId xmlns:p14="http://schemas.microsoft.com/office/powerpoint/2010/main" val="1453959967"/>
+      </p:ext>
+    </p:extLst>
+  </p:cSld>
+  <p:clrMapOvr>
+    <a:masterClrMapping/>
+  </p:clrMapOvr>
+</p:sld>
+</file>
+
+<file path=ppt/slides/slide32.xml><?xml version="1.0" encoding="utf-8"?>
+<p:sld xmlns:a="http://schemas.openxmlformats.org/drawingml/2006/main" xmlns:r="http://schemas.openxmlformats.org/officeDocument/2006/relationships" xmlns:p="http://schemas.openxmlformats.org/presentationml/2006/main">
+  <p:cSld>
+    <p:spTree>
+      <p:nvGrpSpPr>
+        <p:cNvPr id="1" name="">
+          <a:extLst>
+            <a:ext uri="{FF2B5EF4-FFF2-40B4-BE49-F238E27FC236}">
+              <a16:creationId xmlns:a16="http://schemas.microsoft.com/office/drawing/2014/main" id="{7FAEBC00-A2FB-71AC-F2E7-A6AB1A2A6E10}"/>
+            </a:ext>
+          </a:extLst>
+        </p:cNvPr>
+        <p:cNvGrpSpPr/>
+        <p:nvPr/>
+      </p:nvGrpSpPr>
+      <p:grpSpPr>
+        <a:xfrm>
+          <a:off x="0" y="0"/>
+          <a:ext cx="0" cy="0"/>
+          <a:chOff x="0" y="0"/>
+          <a:chExt cx="0" cy="0"/>
+        </a:xfrm>
+      </p:grpSpPr>
+      <p:pic>
+        <p:nvPicPr>
+          <p:cNvPr id="6" name="그림 5" descr="텍스트, 로고, 원, 폰트이(가) 표시된 사진&#10;&#10;AI 생성 콘텐츠는 정확하지 않을 수 있습니다.">
+            <a:extLst>
+              <a:ext uri="{FF2B5EF4-FFF2-40B4-BE49-F238E27FC236}">
+                <a16:creationId xmlns:a16="http://schemas.microsoft.com/office/drawing/2014/main" id="{132D39AE-6E93-E852-0031-629430E3D819}"/>
+              </a:ext>
+            </a:extLst>
+          </p:cNvPr>
+          <p:cNvPicPr>
+            <a:picLocks noChangeAspect="1"/>
+          </p:cNvPicPr>
+          <p:nvPr/>
+        </p:nvPicPr>
+        <p:blipFill>
+          <a:blip r:embed="rId2">
+            <a:alphaModFix amt="20000"/>
+            <a:extLst>
+              <a:ext uri="{28A0092B-C50C-407E-A947-70E740481C1C}">
+                <a14:useLocalDpi xmlns:a14="http://schemas.microsoft.com/office/drawing/2010/main" val="0"/>
+              </a:ext>
+            </a:extLst>
+          </a:blip>
+          <a:stretch>
+            <a:fillRect/>
+          </a:stretch>
+        </p:blipFill>
+        <p:spPr>
+          <a:xfrm>
+            <a:off x="4012070" y="1673061"/>
+            <a:ext cx="4167861" cy="4167861"/>
+          </a:xfrm>
+          <a:prstGeom prst="rect">
+            <a:avLst/>
+          </a:prstGeom>
+        </p:spPr>
+      </p:pic>
+      <p:sp>
+        <p:nvSpPr>
+          <p:cNvPr id="4" name="슬라이드 번호 개체 틀 3">
+            <a:extLst>
+              <a:ext uri="{FF2B5EF4-FFF2-40B4-BE49-F238E27FC236}">
+                <a16:creationId xmlns:a16="http://schemas.microsoft.com/office/drawing/2014/main" id="{16216CA1-E430-58F6-13F3-CB0FBB12A1B1}"/>
+              </a:ext>
+            </a:extLst>
+          </p:cNvPr>
+          <p:cNvSpPr>
+            <a:spLocks noGrp="1"/>
+          </p:cNvSpPr>
+          <p:nvPr>
+            <p:ph type="sldNum" sz="quarter" idx="12"/>
+          </p:nvPr>
+        </p:nvSpPr>
+        <p:spPr/>
+        <p:txBody>
+          <a:bodyPr/>
+          <a:lstStyle/>
+          <a:p>
+            <a:fld id="{109C872D-39A9-4065-8BF3-6A613116E2A1}" type="slidenum">
+              <a:rPr lang="ko-KR" altLang="en-US" smtClean="0"/>
+              <a:t>32</a:t>
+            </a:fld>
+            <a:endParaRPr lang="ko-KR" altLang="en-US"/>
+          </a:p>
+        </p:txBody>
+      </p:sp>
+      <p:sp>
+        <p:nvSpPr>
+          <p:cNvPr id="7" name="제목 1">
+            <a:extLst>
+              <a:ext uri="{FF2B5EF4-FFF2-40B4-BE49-F238E27FC236}">
+                <a16:creationId xmlns:a16="http://schemas.microsoft.com/office/drawing/2014/main" id="{8D4DF8D8-9F32-5507-3E2A-E5E0B0B01B3F}"/>
+              </a:ext>
+            </a:extLst>
+          </p:cNvPr>
+          <p:cNvSpPr>
+            <a:spLocks noGrp="1"/>
+          </p:cNvSpPr>
+          <p:nvPr>
+            <p:ph type="title"/>
+          </p:nvPr>
+        </p:nvSpPr>
+        <p:spPr>
+          <a:xfrm>
+            <a:off x="831850" y="3765550"/>
+            <a:ext cx="11150600" cy="652818"/>
+          </a:xfrm>
+          <a:effectLst>
+            <a:reflection blurRad="50800" stA="45000" endPos="44000" dir="5400000" sy="-100000" algn="bl" rotWithShape="0"/>
+          </a:effectLst>
+        </p:spPr>
+        <p:txBody>
+          <a:bodyPr anchor="b"/>
+          <a:lstStyle/>
+          <a:p>
+            <a:r>
+              <a:rPr lang="en-US" altLang="ko-KR" sz="4000" b="1" i="0" spc="150" dirty="0"/>
+              <a:t>Section 10. </a:t>
+            </a:r>
+            <a:r>
+              <a:rPr lang="ko-KR" altLang="en-US" sz="4000" b="1" i="0" spc="150" dirty="0"/>
+              <a:t>석탄시장의 구조변화와 좌초자산</a:t>
+            </a:r>
+            <a:endParaRPr lang="ko-KR" altLang="en-US" sz="3600" i="0" spc="150" dirty="0"/>
+          </a:p>
+        </p:txBody>
+      </p:sp>
+    </p:spTree>
+    <p:extLst>
+      <p:ext uri="{BB962C8B-B14F-4D97-AF65-F5344CB8AC3E}">
+        <p14:creationId xmlns:p14="http://schemas.microsoft.com/office/powerpoint/2010/main" val="707442002"/>
+      </p:ext>
+    </p:extLst>
+  </p:cSld>
+  <p:clrMapOvr>
+    <a:masterClrMapping/>
+  </p:clrMapOvr>
+</p:sld>
+</file>
+
+<file path=ppt/slides/slide33.xml><?xml version="1.0" encoding="utf-8"?>
+<p:sld xmlns:a="http://schemas.openxmlformats.org/drawingml/2006/main" xmlns:r="http://schemas.openxmlformats.org/officeDocument/2006/relationships" xmlns:p="http://schemas.openxmlformats.org/presentationml/2006/main">
+  <p:cSld>
+    <p:spTree>
+      <p:nvGrpSpPr>
+        <p:cNvPr id="1" name="">
+          <a:extLst>
+            <a:ext uri="{FF2B5EF4-FFF2-40B4-BE49-F238E27FC236}">
+              <a16:creationId xmlns:a16="http://schemas.microsoft.com/office/drawing/2014/main" id="{58D1A724-FF5F-F795-8171-E14A2B4F16F8}"/>
+            </a:ext>
+          </a:extLst>
+        </p:cNvPr>
+        <p:cNvGrpSpPr/>
+        <p:nvPr/>
+      </p:nvGrpSpPr>
+      <p:grpSpPr>
+        <a:xfrm>
+          <a:off x="0" y="0"/>
+          <a:ext cx="0" cy="0"/>
+          <a:chOff x="0" y="0"/>
+          <a:chExt cx="0" cy="0"/>
+        </a:xfrm>
+      </p:grpSpPr>
+      <p:pic>
+        <p:nvPicPr>
+          <p:cNvPr id="6" name="그림 5" descr="텍스트, 로고, 원, 폰트이(가) 표시된 사진&#10;&#10;AI 생성 콘텐츠는 정확하지 않을 수 있습니다.">
+            <a:extLst>
+              <a:ext uri="{FF2B5EF4-FFF2-40B4-BE49-F238E27FC236}">
+                <a16:creationId xmlns:a16="http://schemas.microsoft.com/office/drawing/2014/main" id="{BBB9BD40-31B0-CF75-80CC-4964C75E9B88}"/>
+              </a:ext>
+            </a:extLst>
+          </p:cNvPr>
+          <p:cNvPicPr>
+            <a:picLocks noChangeAspect="1"/>
+          </p:cNvPicPr>
+          <p:nvPr/>
+        </p:nvPicPr>
+        <p:blipFill>
+          <a:blip r:embed="rId2">
+            <a:alphaModFix amt="20000"/>
+            <a:extLst>
+              <a:ext uri="{28A0092B-C50C-407E-A947-70E740481C1C}">
+                <a14:useLocalDpi xmlns:a14="http://schemas.microsoft.com/office/drawing/2010/main" val="0"/>
+              </a:ext>
+            </a:extLst>
+          </a:blip>
+          <a:stretch>
+            <a:fillRect/>
+          </a:stretch>
+        </p:blipFill>
+        <p:spPr>
+          <a:xfrm>
+            <a:off x="4012070" y="1673061"/>
+            <a:ext cx="4167861" cy="4167861"/>
+          </a:xfrm>
+          <a:prstGeom prst="rect">
+            <a:avLst/>
+          </a:prstGeom>
+        </p:spPr>
+      </p:pic>
+      <p:sp>
+        <p:nvSpPr>
+          <p:cNvPr id="4" name="슬라이드 번호 개체 틀 3">
+            <a:extLst>
+              <a:ext uri="{FF2B5EF4-FFF2-40B4-BE49-F238E27FC236}">
+                <a16:creationId xmlns:a16="http://schemas.microsoft.com/office/drawing/2014/main" id="{D747C5E9-0275-EAE5-E692-6C80776F901A}"/>
+              </a:ext>
+            </a:extLst>
+          </p:cNvPr>
+          <p:cNvSpPr>
+            <a:spLocks noGrp="1"/>
+          </p:cNvSpPr>
+          <p:nvPr>
+            <p:ph type="sldNum" sz="quarter" idx="12"/>
+          </p:nvPr>
+        </p:nvSpPr>
+        <p:spPr/>
+        <p:txBody>
+          <a:bodyPr/>
+          <a:lstStyle/>
+          <a:p>
+            <a:fld id="{109C872D-39A9-4065-8BF3-6A613116E2A1}" type="slidenum">
+              <a:rPr lang="ko-KR" altLang="en-US" smtClean="0"/>
+              <a:t>33</a:t>
+            </a:fld>
+            <a:endParaRPr lang="ko-KR" altLang="en-US"/>
+          </a:p>
+        </p:txBody>
+      </p:sp>
+      <p:sp>
+        <p:nvSpPr>
+          <p:cNvPr id="7" name="제목 1">
+            <a:extLst>
+              <a:ext uri="{FF2B5EF4-FFF2-40B4-BE49-F238E27FC236}">
+                <a16:creationId xmlns:a16="http://schemas.microsoft.com/office/drawing/2014/main" id="{AF1A278D-627D-B7E6-D54B-C4D6D391DA7F}"/>
+              </a:ext>
+            </a:extLst>
+          </p:cNvPr>
+          <p:cNvSpPr>
+            <a:spLocks noGrp="1"/>
+          </p:cNvSpPr>
+          <p:nvPr>
+            <p:ph type="title"/>
+          </p:nvPr>
+        </p:nvSpPr>
+        <p:spPr>
+          <a:xfrm>
+            <a:off x="831850" y="3765550"/>
+            <a:ext cx="11150600" cy="652818"/>
+          </a:xfrm>
+          <a:effectLst>
+            <a:reflection blurRad="50800" stA="45000" endPos="44000" dir="5400000" sy="-100000" algn="bl" rotWithShape="0"/>
+          </a:effectLst>
+        </p:spPr>
+        <p:txBody>
+          <a:bodyPr anchor="b"/>
+          <a:lstStyle/>
+          <a:p>
+            <a:r>
+              <a:rPr lang="en-US" altLang="ko-KR" sz="4000" b="1" i="0" spc="150" dirty="0"/>
+              <a:t>Section 1. </a:t>
+            </a:r>
+            <a:r>
+              <a:rPr lang="ko-KR" altLang="en-US" sz="4000" b="1" i="0" spc="150" dirty="0"/>
+              <a:t>개 론</a:t>
+            </a:r>
+            <a:endParaRPr lang="ko-KR" altLang="en-US" sz="3600" i="0" spc="150" dirty="0"/>
+          </a:p>
+        </p:txBody>
+      </p:sp>
+    </p:spTree>
+    <p:extLst>
+      <p:ext uri="{BB962C8B-B14F-4D97-AF65-F5344CB8AC3E}">
+        <p14:creationId xmlns:p14="http://schemas.microsoft.com/office/powerpoint/2010/main" val="4221688942"/>
+      </p:ext>
+    </p:extLst>
+  </p:cSld>
+  <p:clrMapOvr>
+    <a:masterClrMapping/>
+  </p:clrMapOvr>
+</p:sld>
+</file>
+
+<file path=ppt/slides/slide34.xml><?xml version="1.0" encoding="utf-8"?>
+<p:sld xmlns:a="http://schemas.openxmlformats.org/drawingml/2006/main" xmlns:r="http://schemas.openxmlformats.org/officeDocument/2006/relationships" xmlns:p="http://schemas.openxmlformats.org/presentationml/2006/main">
+  <p:cSld>
+    <p:spTree>
+      <p:nvGrpSpPr>
+        <p:cNvPr id="1" name="">
+          <a:extLst>
+            <a:ext uri="{FF2B5EF4-FFF2-40B4-BE49-F238E27FC236}">
+              <a16:creationId xmlns:a16="http://schemas.microsoft.com/office/drawing/2014/main" id="{2221EDDE-B308-8FA7-8116-DAD482D863C8}"/>
+            </a:ext>
+          </a:extLst>
+        </p:cNvPr>
+        <p:cNvGrpSpPr/>
+        <p:nvPr/>
+      </p:nvGrpSpPr>
+      <p:grpSpPr>
+        <a:xfrm>
+          <a:off x="0" y="0"/>
+          <a:ext cx="0" cy="0"/>
+          <a:chOff x="0" y="0"/>
+          <a:chExt cx="0" cy="0"/>
+        </a:xfrm>
+      </p:grpSpPr>
+      <p:pic>
+        <p:nvPicPr>
+          <p:cNvPr id="3" name="그림 2" descr="텍스트, 로고, 원, 폰트이(가) 표시된 사진&#10;&#10;AI 생성 콘텐츠는 정확하지 않을 수 있습니다.">
+            <a:extLst>
+              <a:ext uri="{FF2B5EF4-FFF2-40B4-BE49-F238E27FC236}">
+                <a16:creationId xmlns:a16="http://schemas.microsoft.com/office/drawing/2014/main" id="{396FF0BD-25A1-7840-4B63-B2ECDF7CFA54}"/>
+              </a:ext>
+            </a:extLst>
+          </p:cNvPr>
+          <p:cNvPicPr>
+            <a:picLocks noChangeAspect="1"/>
+          </p:cNvPicPr>
+          <p:nvPr/>
+        </p:nvPicPr>
+        <p:blipFill>
+          <a:blip r:embed="rId2">
+            <a:alphaModFix amt="20000"/>
+            <a:extLst>
+              <a:ext uri="{28A0092B-C50C-407E-A947-70E740481C1C}">
+                <a14:useLocalDpi xmlns:a14="http://schemas.microsoft.com/office/drawing/2010/main" val="0"/>
+              </a:ext>
+            </a:extLst>
+          </a:blip>
+          <a:stretch>
+            <a:fillRect/>
+          </a:stretch>
+        </p:blipFill>
+        <p:spPr>
+          <a:xfrm>
+            <a:off x="4012070" y="1673061"/>
+            <a:ext cx="4167861" cy="4167861"/>
+          </a:xfrm>
+          <a:prstGeom prst="rect">
+            <a:avLst/>
+          </a:prstGeom>
+        </p:spPr>
+      </p:pic>
+      <p:sp>
+        <p:nvSpPr>
+          <p:cNvPr id="2" name="제목 1">
+            <a:extLst>
+              <a:ext uri="{FF2B5EF4-FFF2-40B4-BE49-F238E27FC236}">
+                <a16:creationId xmlns:a16="http://schemas.microsoft.com/office/drawing/2014/main" id="{CA03F291-495C-4A31-DF0A-8F9CC97672B8}"/>
+              </a:ext>
+            </a:extLst>
+          </p:cNvPr>
+          <p:cNvSpPr>
+            <a:spLocks noGrp="1"/>
+          </p:cNvSpPr>
+          <p:nvPr>
+            <p:ph type="title"/>
+          </p:nvPr>
+        </p:nvSpPr>
+        <p:spPr>
+          <a:xfrm>
+            <a:off x="831850" y="1709739"/>
+            <a:ext cx="10515600" cy="2134292"/>
+          </a:xfrm>
+          <a:effectLst>
+            <a:reflection blurRad="50800" stA="45000" endPos="44000" dir="5400000" sy="-100000" algn="bl" rotWithShape="0"/>
+          </a:effectLst>
+        </p:spPr>
+        <p:txBody>
+          <a:bodyPr/>
+          <a:lstStyle/>
+          <a:p>
+            <a:r>
+              <a:rPr lang="en-US" altLang="ko-KR" b="1" i="0" spc="150">
+                <a:solidFill>
+                  <a:schemeClr val="accent2"/>
+                </a:solidFill>
+              </a:rPr>
+              <a:t>T</a:t>
+            </a:r>
+            <a:r>
+              <a:rPr lang="en-US" altLang="ko-KR" sz="5400" i="0" spc="100"/>
+              <a:t>hank you</a:t>
+            </a:r>
+            <a:endParaRPr lang="ko-KR" altLang="en-US" sz="5400" i="0" spc="100"/>
+          </a:p>
+        </p:txBody>
+      </p:sp>
+      <p:sp>
+        <p:nvSpPr>
+          <p:cNvPr id="4" name="슬라이드 번호 개체 틀 3">
+            <a:extLst>
+              <a:ext uri="{FF2B5EF4-FFF2-40B4-BE49-F238E27FC236}">
+                <a16:creationId xmlns:a16="http://schemas.microsoft.com/office/drawing/2014/main" id="{6EFC0B50-C677-27B7-56F6-14F7BF9A70A9}"/>
+              </a:ext>
+            </a:extLst>
+          </p:cNvPr>
+          <p:cNvSpPr>
+            <a:spLocks noGrp="1"/>
+          </p:cNvSpPr>
+          <p:nvPr>
+            <p:ph type="sldNum" sz="quarter" idx="12"/>
+          </p:nvPr>
+        </p:nvSpPr>
+        <p:spPr/>
+        <p:txBody>
+          <a:bodyPr/>
+          <a:lstStyle/>
+          <a:p>
+            <a:fld id="{109C872D-39A9-4065-8BF3-6A613116E2A1}" type="slidenum">
+              <a:rPr lang="ko-KR" altLang="en-US" smtClean="0"/>
+              <a:t>34</a:t>
+            </a:fld>
+            <a:endParaRPr lang="ko-KR" altLang="en-US"/>
+          </a:p>
+        </p:txBody>
+      </p:sp>
+    </p:spTree>
+    <p:extLst>
+      <p:ext uri="{BB962C8B-B14F-4D97-AF65-F5344CB8AC3E}">
+        <p14:creationId xmlns:p14="http://schemas.microsoft.com/office/powerpoint/2010/main" val="103939182"/>
       </p:ext>
     </p:extLst>
   </p:cSld>

--- a/에너지경제학/자원에너지경제학_Chapter_4 (석탄).pptx
+++ b/에너지경제학/자원에너지경제학_Chapter_4 (석탄).pptx
@@ -5,7 +5,7 @@
     <p:sldMasterId id="2147483648" r:id="rId1"/>
   </p:sldMasterIdLst>
   <p:notesMasterIdLst>
-    <p:notesMasterId r:id="rId45"/>
+    <p:notesMasterId r:id="rId49"/>
   </p:notesMasterIdLst>
   <p:sldIdLst>
     <p:sldId id="375" r:id="rId2"/>
@@ -47,10 +47,14 @@
     <p:sldId id="635" r:id="rId38"/>
     <p:sldId id="636" r:id="rId39"/>
     <p:sldId id="637" r:id="rId40"/>
-    <p:sldId id="607" r:id="rId41"/>
-    <p:sldId id="608" r:id="rId42"/>
-    <p:sldId id="600" r:id="rId43"/>
-    <p:sldId id="598" r:id="rId44"/>
+    <p:sldId id="638" r:id="rId41"/>
+    <p:sldId id="639" r:id="rId42"/>
+    <p:sldId id="640" r:id="rId43"/>
+    <p:sldId id="641" r:id="rId44"/>
+    <p:sldId id="607" r:id="rId45"/>
+    <p:sldId id="608" r:id="rId46"/>
+    <p:sldId id="600" r:id="rId47"/>
+    <p:sldId id="598" r:id="rId48"/>
   </p:sldIdLst>
   <p:sldSz cx="12192000" cy="6858000"/>
   <p:notesSz cx="6858000" cy="9144000"/>
@@ -261,7 +265,7 @@
           <a:p>
             <a:fld id="{4A5E00EF-AEA4-43E2-9451-8F9C59A39471}" type="datetimeFigureOut">
               <a:rPr lang="ko-KR" altLang="en-US" smtClean="0"/>
-              <a:t>2026-06-15</a:t>
+              <a:t>2026-06-17</a:t>
             </a:fld>
             <a:endParaRPr lang="ko-KR" altLang="en-US"/>
           </a:p>
@@ -683,7 +687,7 @@
           <a:p>
             <a:fld id="{CD32C56F-BD27-4999-9E6D-D4EACE3DA9F4}" type="datetime1">
               <a:rPr lang="ko-KR" altLang="en-US" smtClean="0"/>
-              <a:t>2026-06-15</a:t>
+              <a:t>2026-06-17</a:t>
             </a:fld>
             <a:endParaRPr lang="ko-KR" altLang="en-US"/>
           </a:p>
@@ -897,7 +901,7 @@
           <a:p>
             <a:fld id="{8EF4A19C-72C8-45CA-8E3F-68A7FA345D6C}" type="datetime1">
               <a:rPr lang="ko-KR" altLang="en-US" smtClean="0"/>
-              <a:t>2026-06-15</a:t>
+              <a:t>2026-06-17</a:t>
             </a:fld>
             <a:endParaRPr lang="ko-KR" altLang="en-US"/>
           </a:p>
@@ -1121,7 +1125,7 @@
           <a:p>
             <a:fld id="{56A175B2-010B-4341-954C-5F8F5C70B124}" type="datetime1">
               <a:rPr lang="ko-KR" altLang="en-US" smtClean="0"/>
-              <a:t>2026-06-15</a:t>
+              <a:t>2026-06-17</a:t>
             </a:fld>
             <a:endParaRPr lang="ko-KR" altLang="en-US"/>
           </a:p>
@@ -1335,7 +1339,7 @@
           <a:p>
             <a:fld id="{16B83F9E-22C9-45CA-9E85-070F1D3EF530}" type="datetime1">
               <a:rPr lang="ko-KR" altLang="en-US" smtClean="0"/>
-              <a:t>2026-06-15</a:t>
+              <a:t>2026-06-17</a:t>
             </a:fld>
             <a:endParaRPr lang="ko-KR" altLang="en-US"/>
           </a:p>
@@ -1626,7 +1630,7 @@
           <a:p>
             <a:fld id="{03278F45-FB3C-4C4D-B89A-7BC3F5F229F6}" type="datetime1">
               <a:rPr lang="ko-KR" altLang="en-US" smtClean="0"/>
-              <a:t>2026-06-15</a:t>
+              <a:t>2026-06-17</a:t>
             </a:fld>
             <a:endParaRPr lang="ko-KR" altLang="en-US"/>
           </a:p>
@@ -2019,7 +2023,7 @@
           <a:p>
             <a:fld id="{38FDAC3C-35A6-415C-9F03-738A6AC328B1}" type="datetime1">
               <a:rPr lang="ko-KR" altLang="en-US" smtClean="0"/>
-              <a:t>2026-06-15</a:t>
+              <a:t>2026-06-17</a:t>
             </a:fld>
             <a:endParaRPr lang="ko-KR" altLang="en-US"/>
           </a:p>
@@ -3613,7 +3617,7 @@
           <a:p>
             <a:fld id="{507A0DF1-AEE6-4B0D-89D2-351E7B3EF65C}" type="datetime1">
               <a:rPr lang="ko-KR" altLang="en-US" smtClean="0"/>
-              <a:t>2026-06-15</a:t>
+              <a:t>2026-06-17</a:t>
             </a:fld>
             <a:endParaRPr lang="ko-KR" altLang="en-US"/>
           </a:p>
@@ -4041,7 +4045,7 @@
           <a:p>
             <a:fld id="{CA93B8C9-630F-4D57-944D-04FD37CECCD3}" type="datetime1">
               <a:rPr lang="ko-KR" altLang="en-US" smtClean="0"/>
-              <a:t>2026-06-15</a:t>
+              <a:t>2026-06-17</a:t>
             </a:fld>
             <a:endParaRPr lang="ko-KR" altLang="en-US"/>
           </a:p>
@@ -4198,7 +4202,7 @@
           <a:p>
             <a:fld id="{E986165A-AC43-4902-9541-874ECD310BA3}" type="datetime1">
               <a:rPr lang="ko-KR" altLang="en-US" smtClean="0"/>
-              <a:t>2026-06-15</a:t>
+              <a:t>2026-06-17</a:t>
             </a:fld>
             <a:endParaRPr lang="ko-KR" altLang="en-US"/>
           </a:p>
@@ -4525,7 +4529,7 @@
           <a:p>
             <a:fld id="{47E6EE6D-2B0E-43A9-87A2-7354CDB998F4}" type="datetime1">
               <a:rPr lang="ko-KR" altLang="en-US" smtClean="0"/>
-              <a:t>2026-06-15</a:t>
+              <a:t>2026-06-17</a:t>
             </a:fld>
             <a:endParaRPr lang="ko-KR" altLang="en-US"/>
           </a:p>
@@ -4829,7 +4833,7 @@
           <a:p>
             <a:fld id="{5CC5944E-0BC8-4FAA-9F94-6B4B05834E10}" type="datetime1">
               <a:rPr lang="ko-KR" altLang="en-US" smtClean="0"/>
-              <a:t>2026-06-15</a:t>
+              <a:t>2026-06-17</a:t>
             </a:fld>
             <a:endParaRPr lang="ko-KR" altLang="en-US"/>
           </a:p>
@@ -35226,6 +35230,1404 @@
         <p:cNvPr id="1" name="">
           <a:extLst>
             <a:ext uri="{FF2B5EF4-FFF2-40B4-BE49-F238E27FC236}">
+              <a16:creationId xmlns:a16="http://schemas.microsoft.com/office/drawing/2014/main" id="{1D046290-F616-6805-8E00-A2323E595A77}"/>
+            </a:ext>
+          </a:extLst>
+        </p:cNvPr>
+        <p:cNvGrpSpPr/>
+        <p:nvPr/>
+      </p:nvGrpSpPr>
+      <p:grpSpPr>
+        <a:xfrm>
+          <a:off x="0" y="0"/>
+          <a:ext cx="0" cy="0"/>
+          <a:chOff x="0" y="0"/>
+          <a:chExt cx="0" cy="0"/>
+        </a:xfrm>
+      </p:grpSpPr>
+      <p:sp>
+        <p:nvSpPr>
+          <p:cNvPr id="2" name="제목 1">
+            <a:extLst>
+              <a:ext uri="{FF2B5EF4-FFF2-40B4-BE49-F238E27FC236}">
+                <a16:creationId xmlns:a16="http://schemas.microsoft.com/office/drawing/2014/main" id="{A2BBA19B-0600-1AEE-4248-AC9AF097DB17}"/>
+              </a:ext>
+            </a:extLst>
+          </p:cNvPr>
+          <p:cNvSpPr>
+            <a:spLocks noGrp="1"/>
+          </p:cNvSpPr>
+          <p:nvPr>
+            <p:ph type="title"/>
+          </p:nvPr>
+        </p:nvSpPr>
+        <p:spPr/>
+        <p:txBody>
+          <a:bodyPr/>
+          <a:lstStyle/>
+          <a:p>
+            <a:r>
+              <a:rPr lang="ko-KR" altLang="en-US" dirty="0"/>
+              <a:t>석탄 수출입</a:t>
+            </a:r>
+          </a:p>
+        </p:txBody>
+      </p:sp>
+      <p:sp>
+        <p:nvSpPr>
+          <p:cNvPr id="4" name="슬라이드 번호 개체 틀 3">
+            <a:extLst>
+              <a:ext uri="{FF2B5EF4-FFF2-40B4-BE49-F238E27FC236}">
+                <a16:creationId xmlns:a16="http://schemas.microsoft.com/office/drawing/2014/main" id="{B067FA55-0EB1-6255-797C-3D927C708202}"/>
+              </a:ext>
+            </a:extLst>
+          </p:cNvPr>
+          <p:cNvSpPr>
+            <a:spLocks noGrp="1"/>
+          </p:cNvSpPr>
+          <p:nvPr>
+            <p:ph type="sldNum" sz="quarter" idx="12"/>
+          </p:nvPr>
+        </p:nvSpPr>
+        <p:spPr/>
+        <p:txBody>
+          <a:bodyPr/>
+          <a:lstStyle/>
+          <a:p>
+            <a:fld id="{109C872D-39A9-4065-8BF3-6A613116E2A1}" type="slidenum">
+              <a:rPr lang="ko-KR" altLang="en-US" smtClean="0"/>
+              <a:t>40</a:t>
+            </a:fld>
+            <a:endParaRPr lang="ko-KR" altLang="en-US"/>
+          </a:p>
+        </p:txBody>
+      </p:sp>
+      <p:sp>
+        <p:nvSpPr>
+          <p:cNvPr id="6" name="TextBox 5">
+            <a:extLst>
+              <a:ext uri="{FF2B5EF4-FFF2-40B4-BE49-F238E27FC236}">
+                <a16:creationId xmlns:a16="http://schemas.microsoft.com/office/drawing/2014/main" id="{1795DA04-EC5C-2C8E-671F-07D20499E18D}"/>
+              </a:ext>
+            </a:extLst>
+          </p:cNvPr>
+          <p:cNvSpPr txBox="1"/>
+          <p:nvPr/>
+        </p:nvSpPr>
+        <p:spPr>
+          <a:xfrm>
+            <a:off x="288790" y="958844"/>
+            <a:ext cx="11118453" cy="3738011"/>
+          </a:xfrm>
+          <a:prstGeom prst="rect">
+            <a:avLst/>
+          </a:prstGeom>
+          <a:noFill/>
+        </p:spPr>
+        <p:txBody>
+          <a:bodyPr wrap="square" rtlCol="0" anchor="t">
+            <a:spAutoFit/>
+          </a:bodyPr>
+          <a:lstStyle/>
+          <a:p>
+            <a:pPr marL="377825" indent="-285750">
+              <a:lnSpc>
+                <a:spcPct val="150000"/>
+              </a:lnSpc>
+              <a:buFont typeface="Arial" panose="020B0604020202020204" pitchFamily="34" charset="0"/>
+              <a:buChar char="•"/>
+            </a:pPr>
+            <a:r>
+              <a:rPr lang="ko-KR" altLang="en-US" sz="1600" dirty="0"/>
+              <a:t>글로벌 석탄 교역은 생산과 소비가 특정 국가에 집중된 구조를 명확히 반영하고 있다</a:t>
+            </a:r>
+            <a:r>
+              <a:rPr lang="en-US" altLang="ko-KR" sz="1600" dirty="0"/>
+              <a:t>.</a:t>
+            </a:r>
+          </a:p>
+          <a:p>
+            <a:pPr marL="835025" lvl="1" indent="-285750">
+              <a:lnSpc>
+                <a:spcPct val="150000"/>
+              </a:lnSpc>
+              <a:buFont typeface="Wingdings" panose="05000000000000000000" pitchFamily="2" charset="2"/>
+              <a:buChar char="ü"/>
+            </a:pPr>
+            <a:r>
+              <a:rPr lang="ko-KR" altLang="en-US" sz="1600" dirty="0"/>
+              <a:t>석탄 수출은 호주</a:t>
+            </a:r>
+            <a:r>
+              <a:rPr lang="en-US" altLang="ko-KR" sz="1600" dirty="0"/>
+              <a:t>, </a:t>
+            </a:r>
+            <a:r>
+              <a:rPr lang="ko-KR" altLang="en-US" sz="1600" dirty="0"/>
+              <a:t>인도네시아</a:t>
+            </a:r>
+            <a:r>
+              <a:rPr lang="en-US" altLang="ko-KR" sz="1600" dirty="0"/>
+              <a:t>, </a:t>
+            </a:r>
+            <a:r>
+              <a:rPr lang="ko-KR" altLang="en-US" sz="1600" dirty="0"/>
+              <a:t>러시아</a:t>
+            </a:r>
+            <a:r>
+              <a:rPr lang="en-US" altLang="ko-KR" sz="1600" dirty="0"/>
+              <a:t>, </a:t>
+            </a:r>
+            <a:r>
+              <a:rPr lang="ko-KR" altLang="en-US" sz="1600" dirty="0"/>
+              <a:t>남아공</a:t>
+            </a:r>
+            <a:r>
+              <a:rPr lang="en-US" altLang="ko-KR" sz="1600" dirty="0"/>
+              <a:t>, </a:t>
+            </a:r>
+            <a:r>
+              <a:rPr lang="ko-KR" altLang="en-US" sz="1600" dirty="0"/>
+              <a:t>미국 등 소수의 주요 생산국이 주도 하고 있다</a:t>
+            </a:r>
+            <a:r>
+              <a:rPr lang="en-US" altLang="ko-KR" sz="1600" dirty="0"/>
+              <a:t>.</a:t>
+            </a:r>
+          </a:p>
+          <a:p>
+            <a:pPr marL="1292225" lvl="2" indent="-285750">
+              <a:lnSpc>
+                <a:spcPct val="150000"/>
+              </a:lnSpc>
+              <a:buFont typeface="Wingdings" panose="05000000000000000000" pitchFamily="2" charset="2"/>
+              <a:buChar char="Ø"/>
+            </a:pPr>
+            <a:r>
+              <a:rPr lang="ko-KR" altLang="en-US" sz="1600" dirty="0"/>
+              <a:t>호주는 고품질 제철용 </a:t>
+            </a:r>
+            <a:r>
+              <a:rPr lang="ko-KR" altLang="en-US" sz="1600" dirty="0" err="1"/>
+              <a:t>코크스탄의</a:t>
+            </a:r>
+            <a:r>
+              <a:rPr lang="ko-KR" altLang="en-US" sz="1600" dirty="0"/>
+              <a:t> 최대 수출국으로 한국</a:t>
+            </a:r>
+            <a:r>
+              <a:rPr lang="en-US" altLang="ko-KR" sz="1600" dirty="0"/>
+              <a:t>, </a:t>
+            </a:r>
+            <a:r>
+              <a:rPr lang="ko-KR" altLang="en-US" sz="1600" dirty="0"/>
+              <a:t>일본</a:t>
+            </a:r>
+            <a:r>
+              <a:rPr lang="en-US" altLang="ko-KR" sz="1600" dirty="0"/>
+              <a:t>, </a:t>
+            </a:r>
+            <a:r>
+              <a:rPr lang="ko-KR" altLang="en-US" sz="1600" dirty="0"/>
+              <a:t>인도 등 주요 철강 생산국에 공급하고 있다</a:t>
+            </a:r>
+            <a:r>
+              <a:rPr lang="en-US" altLang="ko-KR" sz="1600" dirty="0"/>
+              <a:t>.</a:t>
+            </a:r>
+          </a:p>
+          <a:p>
+            <a:pPr marL="1292225" lvl="2" indent="-285750">
+              <a:lnSpc>
+                <a:spcPct val="150000"/>
+              </a:lnSpc>
+              <a:buFont typeface="Wingdings" panose="05000000000000000000" pitchFamily="2" charset="2"/>
+              <a:buChar char="Ø"/>
+            </a:pPr>
+            <a:r>
+              <a:rPr lang="ko-KR" altLang="en-US" sz="1600" dirty="0"/>
+              <a:t>인도네시아는 저비용 </a:t>
+            </a:r>
+            <a:r>
+              <a:rPr lang="ko-KR" altLang="en-US" sz="1600" dirty="0" err="1"/>
+              <a:t>저열량의</a:t>
+            </a:r>
+            <a:r>
+              <a:rPr lang="ko-KR" altLang="en-US" sz="1600" dirty="0"/>
+              <a:t> </a:t>
+            </a:r>
+            <a:r>
+              <a:rPr lang="ko-KR" altLang="en-US" sz="1600" dirty="0" err="1"/>
+              <a:t>열탄을</a:t>
+            </a:r>
+            <a:r>
+              <a:rPr lang="ko-KR" altLang="en-US" sz="1600" dirty="0"/>
+              <a:t> 중심으로 아시아 발전시장에 특화된 공급구조를 형성하고 있다</a:t>
+            </a:r>
+            <a:r>
+              <a:rPr lang="en-US" altLang="ko-KR" sz="1600" dirty="0"/>
+              <a:t>.</a:t>
+            </a:r>
+          </a:p>
+          <a:p>
+            <a:pPr marL="835025" lvl="1" indent="-285750">
+              <a:lnSpc>
+                <a:spcPct val="150000"/>
+              </a:lnSpc>
+              <a:buFont typeface="Wingdings" panose="05000000000000000000" pitchFamily="2" charset="2"/>
+              <a:buChar char="ü"/>
+            </a:pPr>
+            <a:r>
+              <a:rPr lang="ko-KR" altLang="en-US" sz="1600" dirty="0"/>
+              <a:t>석탄 수입은 에너지 수요가 많고</a:t>
+            </a:r>
+            <a:r>
+              <a:rPr lang="en-US" altLang="ko-KR" sz="1600" dirty="0"/>
+              <a:t>,</a:t>
+            </a:r>
+            <a:r>
+              <a:rPr lang="ko-KR" altLang="en-US" sz="1600" dirty="0"/>
+              <a:t> 자원 자립도가 낮은 국가를 중심으로 이루어지고</a:t>
+            </a:r>
+            <a:r>
+              <a:rPr lang="en-US" altLang="ko-KR" sz="1600" dirty="0"/>
+              <a:t>, </a:t>
+            </a:r>
+            <a:r>
+              <a:rPr lang="ko-KR" altLang="en-US" sz="1600" dirty="0"/>
+              <a:t>중국</a:t>
+            </a:r>
+            <a:r>
+              <a:rPr lang="en-US" altLang="ko-KR" sz="1600" dirty="0"/>
+              <a:t>, </a:t>
+            </a:r>
+            <a:r>
+              <a:rPr lang="ko-KR" altLang="en-US" sz="1600" dirty="0"/>
+              <a:t>인도</a:t>
+            </a:r>
+            <a:r>
+              <a:rPr lang="en-US" altLang="ko-KR" sz="1600" dirty="0"/>
+              <a:t>, </a:t>
+            </a:r>
+            <a:r>
+              <a:rPr lang="ko-KR" altLang="en-US" sz="1600" dirty="0"/>
+              <a:t>일본</a:t>
+            </a:r>
+            <a:r>
+              <a:rPr lang="en-US" altLang="ko-KR" sz="1600" dirty="0"/>
+              <a:t>, </a:t>
+            </a:r>
+            <a:r>
+              <a:rPr lang="ko-KR" altLang="en-US" sz="1600" dirty="0"/>
+              <a:t>한국 등 아시아 국가들이 글로벌 수입 시장의 </a:t>
+            </a:r>
+            <a:r>
+              <a:rPr lang="ko-KR" altLang="en-US" sz="1600" dirty="0" err="1"/>
+              <a:t>핵심축이다</a:t>
+            </a:r>
+            <a:r>
+              <a:rPr lang="en-US" altLang="ko-KR" sz="1600" dirty="0"/>
+              <a:t>.</a:t>
+            </a:r>
+          </a:p>
+          <a:p>
+            <a:pPr marL="1292225" lvl="2" indent="-285750">
+              <a:lnSpc>
+                <a:spcPct val="150000"/>
+              </a:lnSpc>
+              <a:buFont typeface="Wingdings" panose="05000000000000000000" pitchFamily="2" charset="2"/>
+              <a:buChar char="Ø"/>
+            </a:pPr>
+            <a:r>
+              <a:rPr lang="ko-KR" altLang="en-US" sz="1600" dirty="0"/>
+              <a:t>중국과 인도는 세계 최대 석탄 생산국임에도</a:t>
+            </a:r>
+            <a:r>
+              <a:rPr lang="en-US" altLang="ko-KR" sz="1600" dirty="0"/>
+              <a:t>, </a:t>
+            </a:r>
+            <a:r>
+              <a:rPr lang="ko-KR" altLang="en-US" sz="1600" dirty="0"/>
+              <a:t>특정 품질의 석탄에 대한 내적 부족</a:t>
+            </a:r>
+            <a:r>
+              <a:rPr lang="en-US" altLang="ko-KR" sz="1600" dirty="0"/>
+              <a:t>, </a:t>
+            </a:r>
+            <a:r>
+              <a:rPr lang="ko-KR" altLang="en-US" sz="1600" dirty="0"/>
+              <a:t>수급 불균형</a:t>
+            </a:r>
+            <a:r>
+              <a:rPr lang="en-US" altLang="ko-KR" sz="1600" dirty="0"/>
+              <a:t>, </a:t>
+            </a:r>
+            <a:r>
+              <a:rPr lang="ko-KR" altLang="en-US" sz="1600" dirty="0"/>
+              <a:t>물류 비효율성 등의 이유로 여전히 상당량의 석탄을 수입하고 있다</a:t>
+            </a:r>
+            <a:r>
+              <a:rPr lang="en-US" altLang="ko-KR" sz="1600" dirty="0"/>
+              <a:t>.</a:t>
+            </a:r>
+          </a:p>
+          <a:p>
+            <a:pPr marL="1292225" lvl="2" indent="-285750">
+              <a:lnSpc>
+                <a:spcPct val="150000"/>
+              </a:lnSpc>
+              <a:buFont typeface="Wingdings" panose="05000000000000000000" pitchFamily="2" charset="2"/>
+              <a:buChar char="Ø"/>
+            </a:pPr>
+            <a:r>
+              <a:rPr lang="ko-KR" altLang="en-US" sz="1600" dirty="0"/>
+              <a:t>일본과 한국은 국내 석탄 자원이 거의 전무한 전형적인 순수입국으로</a:t>
+            </a:r>
+            <a:r>
+              <a:rPr lang="en-US" altLang="ko-KR" sz="1600" dirty="0"/>
+              <a:t>, </a:t>
+            </a:r>
+            <a:r>
+              <a:rPr lang="ko-KR" altLang="en-US" sz="1600" dirty="0"/>
+              <a:t>국제 가격 변동성 및 지정학적 리스크에 민감하게 반응하며</a:t>
+            </a:r>
+            <a:r>
+              <a:rPr lang="en-US" altLang="ko-KR" sz="1600" dirty="0"/>
+              <a:t>, </a:t>
+            </a:r>
+            <a:r>
+              <a:rPr lang="ko-KR" altLang="en-US" sz="1600" dirty="0"/>
+              <a:t>이에 따라 장기계약과 공급원 다변화 전략을 병행하고 있다</a:t>
+            </a:r>
+            <a:r>
+              <a:rPr lang="en-US" altLang="ko-KR" sz="1600" dirty="0"/>
+              <a:t>.</a:t>
+            </a:r>
+          </a:p>
+        </p:txBody>
+      </p:sp>
+    </p:spTree>
+    <p:extLst>
+      <p:ext uri="{BB962C8B-B14F-4D97-AF65-F5344CB8AC3E}">
+        <p14:creationId xmlns:p14="http://schemas.microsoft.com/office/powerpoint/2010/main" val="1751479640"/>
+      </p:ext>
+    </p:extLst>
+  </p:cSld>
+  <p:clrMapOvr>
+    <a:masterClrMapping/>
+  </p:clrMapOvr>
+</p:sld>
+</file>
+
+<file path=ppt/slides/slide41.xml><?xml version="1.0" encoding="utf-8"?>
+<p:sld xmlns:a="http://schemas.openxmlformats.org/drawingml/2006/main" xmlns:r="http://schemas.openxmlformats.org/officeDocument/2006/relationships" xmlns:p="http://schemas.openxmlformats.org/presentationml/2006/main">
+  <p:cSld>
+    <p:spTree>
+      <p:nvGrpSpPr>
+        <p:cNvPr id="1" name="">
+          <a:extLst>
+            <a:ext uri="{FF2B5EF4-FFF2-40B4-BE49-F238E27FC236}">
+              <a16:creationId xmlns:a16="http://schemas.microsoft.com/office/drawing/2014/main" id="{45B92199-0FA2-522A-EFDA-39A9628D7CBC}"/>
+            </a:ext>
+          </a:extLst>
+        </p:cNvPr>
+        <p:cNvGrpSpPr/>
+        <p:nvPr/>
+      </p:nvGrpSpPr>
+      <p:grpSpPr>
+        <a:xfrm>
+          <a:off x="0" y="0"/>
+          <a:ext cx="0" cy="0"/>
+          <a:chOff x="0" y="0"/>
+          <a:chExt cx="0" cy="0"/>
+        </a:xfrm>
+      </p:grpSpPr>
+      <p:sp>
+        <p:nvSpPr>
+          <p:cNvPr id="2" name="제목 1">
+            <a:extLst>
+              <a:ext uri="{FF2B5EF4-FFF2-40B4-BE49-F238E27FC236}">
+                <a16:creationId xmlns:a16="http://schemas.microsoft.com/office/drawing/2014/main" id="{B2A0F025-487C-D0D3-07F2-6B151E53A74B}"/>
+              </a:ext>
+            </a:extLst>
+          </p:cNvPr>
+          <p:cNvSpPr>
+            <a:spLocks noGrp="1"/>
+          </p:cNvSpPr>
+          <p:nvPr>
+            <p:ph type="title"/>
+          </p:nvPr>
+        </p:nvSpPr>
+        <p:spPr/>
+        <p:txBody>
+          <a:bodyPr/>
+          <a:lstStyle/>
+          <a:p>
+            <a:r>
+              <a:rPr lang="ko-KR" altLang="en-US" dirty="0"/>
+              <a:t>석탄 수출입</a:t>
+            </a:r>
+          </a:p>
+        </p:txBody>
+      </p:sp>
+      <p:sp>
+        <p:nvSpPr>
+          <p:cNvPr id="4" name="슬라이드 번호 개체 틀 3">
+            <a:extLst>
+              <a:ext uri="{FF2B5EF4-FFF2-40B4-BE49-F238E27FC236}">
+                <a16:creationId xmlns:a16="http://schemas.microsoft.com/office/drawing/2014/main" id="{95040264-DB57-B281-930D-B96119186EB4}"/>
+              </a:ext>
+            </a:extLst>
+          </p:cNvPr>
+          <p:cNvSpPr>
+            <a:spLocks noGrp="1"/>
+          </p:cNvSpPr>
+          <p:nvPr>
+            <p:ph type="sldNum" sz="quarter" idx="12"/>
+          </p:nvPr>
+        </p:nvSpPr>
+        <p:spPr/>
+        <p:txBody>
+          <a:bodyPr/>
+          <a:lstStyle/>
+          <a:p>
+            <a:fld id="{109C872D-39A9-4065-8BF3-6A613116E2A1}" type="slidenum">
+              <a:rPr lang="ko-KR" altLang="en-US" smtClean="0"/>
+              <a:t>41</a:t>
+            </a:fld>
+            <a:endParaRPr lang="ko-KR" altLang="en-US"/>
+          </a:p>
+        </p:txBody>
+      </p:sp>
+      <p:pic>
+        <p:nvPicPr>
+          <p:cNvPr id="3" name="Content Placeholder 2">
+            <a:extLst>
+              <a:ext uri="{FF2B5EF4-FFF2-40B4-BE49-F238E27FC236}">
+                <a16:creationId xmlns:a16="http://schemas.microsoft.com/office/drawing/2014/main" id="{CCD7CA4D-B80F-D443-5AC0-E7B099AE6B4E}"/>
+              </a:ext>
+            </a:extLst>
+          </p:cNvPr>
+          <p:cNvPicPr>
+            <a:picLocks noGrp="1" noChangeAspect="1"/>
+          </p:cNvPicPr>
+          <p:nvPr>
+            <p:ph idx="1"/>
+          </p:nvPr>
+        </p:nvPicPr>
+        <p:blipFill rotWithShape="1">
+          <a:blip r:embed="rId2"/>
+          <a:srcRect l="2407" b="4582"/>
+          <a:stretch>
+            <a:fillRect/>
+          </a:stretch>
+        </p:blipFill>
+        <p:spPr>
+          <a:xfrm>
+            <a:off x="759793" y="2429564"/>
+            <a:ext cx="4850296" cy="2663688"/>
+          </a:xfrm>
+          <a:prstGeom prst="rect">
+            <a:avLst/>
+          </a:prstGeom>
+        </p:spPr>
+      </p:pic>
+      <p:pic>
+        <p:nvPicPr>
+          <p:cNvPr id="5" name="Content Placeholder 2">
+            <a:extLst>
+              <a:ext uri="{FF2B5EF4-FFF2-40B4-BE49-F238E27FC236}">
+                <a16:creationId xmlns:a16="http://schemas.microsoft.com/office/drawing/2014/main" id="{4288E905-0032-8886-B168-F854BA5E3EFE}"/>
+              </a:ext>
+            </a:extLst>
+          </p:cNvPr>
+          <p:cNvPicPr>
+            <a:picLocks noChangeAspect="1"/>
+          </p:cNvPicPr>
+          <p:nvPr/>
+        </p:nvPicPr>
+        <p:blipFill rotWithShape="1">
+          <a:blip r:embed="rId3"/>
+          <a:srcRect l="2934" b="6260"/>
+          <a:stretch>
+            <a:fillRect/>
+          </a:stretch>
+        </p:blipFill>
+        <p:spPr>
+          <a:xfrm>
+            <a:off x="6517776" y="2376557"/>
+            <a:ext cx="4850296" cy="2716695"/>
+          </a:xfrm>
+          <a:prstGeom prst="rect">
+            <a:avLst/>
+          </a:prstGeom>
+        </p:spPr>
+      </p:pic>
+      <p:sp>
+        <p:nvSpPr>
+          <p:cNvPr id="8" name="TextBox 7">
+            <a:extLst>
+              <a:ext uri="{FF2B5EF4-FFF2-40B4-BE49-F238E27FC236}">
+                <a16:creationId xmlns:a16="http://schemas.microsoft.com/office/drawing/2014/main" id="{1EEDFB38-EE65-8DB1-F932-418377E59A3F}"/>
+              </a:ext>
+            </a:extLst>
+          </p:cNvPr>
+          <p:cNvSpPr txBox="1"/>
+          <p:nvPr/>
+        </p:nvSpPr>
+        <p:spPr>
+          <a:xfrm>
+            <a:off x="1038356" y="2291064"/>
+            <a:ext cx="4024436" cy="276999"/>
+          </a:xfrm>
+          <a:prstGeom prst="rect">
+            <a:avLst/>
+          </a:prstGeom>
+          <a:noFill/>
+        </p:spPr>
+        <p:txBody>
+          <a:bodyPr wrap="square">
+            <a:spAutoFit/>
+          </a:bodyPr>
+          <a:lstStyle/>
+          <a:p>
+            <a:pPr algn="ctr"/>
+            <a:r>
+              <a:rPr lang="en-US" altLang="ko-KR" sz="1200" spc="-50" dirty="0"/>
+              <a:t>&lt; </a:t>
+            </a:r>
+            <a:r>
+              <a:rPr lang="ko-KR" altLang="en-US" sz="1200" spc="-50" dirty="0"/>
+              <a:t>주요 석탄 수입국의 수입량</a:t>
+            </a:r>
+            <a:r>
+              <a:rPr lang="en-US" altLang="ko-KR" sz="1200" spc="-50" dirty="0"/>
+              <a:t> (</a:t>
+            </a:r>
+            <a:r>
+              <a:rPr lang="ko-KR" altLang="en-US" sz="1200" spc="-50" dirty="0"/>
+              <a:t>단위</a:t>
+            </a:r>
+            <a:r>
+              <a:rPr lang="en-US" altLang="ko-KR" sz="1200" spc="-50" dirty="0"/>
+              <a:t>: </a:t>
+            </a:r>
+            <a:r>
+              <a:rPr lang="ko-KR" altLang="en-US" sz="1200" spc="-50" dirty="0" err="1"/>
+              <a:t>엑사줄</a:t>
+            </a:r>
+            <a:r>
+              <a:rPr lang="en-US" altLang="ko-KR" sz="1200" spc="-50" dirty="0"/>
+              <a:t>, exajoules) &gt;</a:t>
+            </a:r>
+            <a:endParaRPr lang="ko-KR" altLang="en-US" sz="1200" dirty="0"/>
+          </a:p>
+        </p:txBody>
+      </p:sp>
+      <p:sp>
+        <p:nvSpPr>
+          <p:cNvPr id="9" name="TextBox 8">
+            <a:extLst>
+              <a:ext uri="{FF2B5EF4-FFF2-40B4-BE49-F238E27FC236}">
+                <a16:creationId xmlns:a16="http://schemas.microsoft.com/office/drawing/2014/main" id="{602E3014-0FF7-7712-DF7B-6BF8130B6D88}"/>
+              </a:ext>
+            </a:extLst>
+          </p:cNvPr>
+          <p:cNvSpPr txBox="1"/>
+          <p:nvPr/>
+        </p:nvSpPr>
+        <p:spPr>
+          <a:xfrm>
+            <a:off x="6962539" y="2291064"/>
+            <a:ext cx="3829148" cy="276999"/>
+          </a:xfrm>
+          <a:prstGeom prst="rect">
+            <a:avLst/>
+          </a:prstGeom>
+          <a:noFill/>
+        </p:spPr>
+        <p:txBody>
+          <a:bodyPr wrap="square">
+            <a:spAutoFit/>
+          </a:bodyPr>
+          <a:lstStyle/>
+          <a:p>
+            <a:pPr algn="ctr"/>
+            <a:r>
+              <a:rPr lang="en-US" altLang="ko-KR" sz="1200" spc="-50" dirty="0"/>
+              <a:t>&lt; </a:t>
+            </a:r>
+            <a:r>
+              <a:rPr lang="ko-KR" altLang="en-US" sz="1200" spc="-50" dirty="0"/>
+              <a:t>주요 석탄 수출국의 수입량</a:t>
+            </a:r>
+            <a:r>
+              <a:rPr lang="en-US" altLang="ko-KR" sz="1200" spc="-50" dirty="0"/>
+              <a:t> (</a:t>
+            </a:r>
+            <a:r>
+              <a:rPr lang="ko-KR" altLang="en-US" sz="1200" spc="-50" dirty="0"/>
+              <a:t>단위</a:t>
+            </a:r>
+            <a:r>
+              <a:rPr lang="en-US" altLang="ko-KR" sz="1200" spc="-50" dirty="0"/>
+              <a:t>: </a:t>
+            </a:r>
+            <a:r>
+              <a:rPr lang="ko-KR" altLang="en-US" sz="1200" spc="-50" dirty="0" err="1"/>
+              <a:t>엑사줄</a:t>
+            </a:r>
+            <a:r>
+              <a:rPr lang="en-US" altLang="ko-KR" sz="1200" spc="-50" dirty="0"/>
+              <a:t>, exajoules) &gt;</a:t>
+            </a:r>
+            <a:endParaRPr lang="ko-KR" altLang="en-US" sz="1200" dirty="0"/>
+          </a:p>
+        </p:txBody>
+      </p:sp>
+      <p:sp>
+        <p:nvSpPr>
+          <p:cNvPr id="11" name="TextBox 10">
+            <a:extLst>
+              <a:ext uri="{FF2B5EF4-FFF2-40B4-BE49-F238E27FC236}">
+                <a16:creationId xmlns:a16="http://schemas.microsoft.com/office/drawing/2014/main" id="{19310A48-E158-8E85-FAD3-0B188DC9A901}"/>
+              </a:ext>
+            </a:extLst>
+          </p:cNvPr>
+          <p:cNvSpPr txBox="1"/>
+          <p:nvPr/>
+        </p:nvSpPr>
+        <p:spPr>
+          <a:xfrm>
+            <a:off x="288790" y="958844"/>
+            <a:ext cx="11118453" cy="783356"/>
+          </a:xfrm>
+          <a:prstGeom prst="rect">
+            <a:avLst/>
+          </a:prstGeom>
+          <a:noFill/>
+        </p:spPr>
+        <p:txBody>
+          <a:bodyPr wrap="square" rtlCol="0" anchor="t">
+            <a:spAutoFit/>
+          </a:bodyPr>
+          <a:lstStyle/>
+          <a:p>
+            <a:pPr marL="377825" indent="-285750">
+              <a:lnSpc>
+                <a:spcPct val="150000"/>
+              </a:lnSpc>
+              <a:buFont typeface="Arial" panose="020B0604020202020204" pitchFamily="34" charset="0"/>
+              <a:buChar char="•"/>
+            </a:pPr>
+            <a:r>
+              <a:rPr lang="ko-KR" altLang="en-US" sz="1600" dirty="0"/>
+              <a:t>아래 그림은 </a:t>
+            </a:r>
+            <a:r>
+              <a:rPr lang="en-US" altLang="ko-KR" sz="1600" dirty="0"/>
+              <a:t>2013</a:t>
+            </a:r>
+            <a:r>
+              <a:rPr lang="ko-KR" altLang="en-US" sz="1600" dirty="0"/>
+              <a:t>년부터 </a:t>
+            </a:r>
+            <a:r>
+              <a:rPr lang="en-US" altLang="ko-KR" sz="1600" dirty="0"/>
+              <a:t>2023</a:t>
+            </a:r>
+            <a:r>
+              <a:rPr lang="ko-KR" altLang="en-US" sz="1600" dirty="0"/>
+              <a:t>년까지 주요국의 석탄 수입량과 수출량을 나타내고 있다</a:t>
+            </a:r>
+            <a:r>
+              <a:rPr lang="en-US" altLang="ko-KR" sz="1600" dirty="0"/>
+              <a:t>.</a:t>
+            </a:r>
+          </a:p>
+          <a:p>
+            <a:pPr marL="835025" lvl="1" indent="-285750">
+              <a:lnSpc>
+                <a:spcPct val="150000"/>
+              </a:lnSpc>
+              <a:buFont typeface="Wingdings" panose="05000000000000000000" pitchFamily="2" charset="2"/>
+              <a:buChar char="ü"/>
+            </a:pPr>
+            <a:r>
+              <a:rPr lang="ko-KR" altLang="en-US" sz="1600" dirty="0"/>
+              <a:t>설명은 전 슬라이드 참고</a:t>
+            </a:r>
+            <a:endParaRPr lang="en-US" altLang="ko-KR" sz="1600" dirty="0"/>
+          </a:p>
+        </p:txBody>
+      </p:sp>
+    </p:spTree>
+    <p:extLst>
+      <p:ext uri="{BB962C8B-B14F-4D97-AF65-F5344CB8AC3E}">
+        <p14:creationId xmlns:p14="http://schemas.microsoft.com/office/powerpoint/2010/main" val="3904048967"/>
+      </p:ext>
+    </p:extLst>
+  </p:cSld>
+  <p:clrMapOvr>
+    <a:masterClrMapping/>
+  </p:clrMapOvr>
+</p:sld>
+</file>
+
+<file path=ppt/slides/slide42.xml><?xml version="1.0" encoding="utf-8"?>
+<p:sld xmlns:a="http://schemas.openxmlformats.org/drawingml/2006/main" xmlns:r="http://schemas.openxmlformats.org/officeDocument/2006/relationships" xmlns:p="http://schemas.openxmlformats.org/presentationml/2006/main">
+  <p:cSld>
+    <p:spTree>
+      <p:nvGrpSpPr>
+        <p:cNvPr id="1" name="">
+          <a:extLst>
+            <a:ext uri="{FF2B5EF4-FFF2-40B4-BE49-F238E27FC236}">
+              <a16:creationId xmlns:a16="http://schemas.microsoft.com/office/drawing/2014/main" id="{88D0D8EE-1BD4-CD15-C2A4-77807A540876}"/>
+            </a:ext>
+          </a:extLst>
+        </p:cNvPr>
+        <p:cNvGrpSpPr/>
+        <p:nvPr/>
+      </p:nvGrpSpPr>
+      <p:grpSpPr>
+        <a:xfrm>
+          <a:off x="0" y="0"/>
+          <a:ext cx="0" cy="0"/>
+          <a:chOff x="0" y="0"/>
+          <a:chExt cx="0" cy="0"/>
+        </a:xfrm>
+      </p:grpSpPr>
+      <p:sp>
+        <p:nvSpPr>
+          <p:cNvPr id="2" name="제목 1">
+            <a:extLst>
+              <a:ext uri="{FF2B5EF4-FFF2-40B4-BE49-F238E27FC236}">
+                <a16:creationId xmlns:a16="http://schemas.microsoft.com/office/drawing/2014/main" id="{637F4B20-508C-57DF-CB58-22ADBE5F5BE3}"/>
+              </a:ext>
+            </a:extLst>
+          </p:cNvPr>
+          <p:cNvSpPr>
+            <a:spLocks noGrp="1"/>
+          </p:cNvSpPr>
+          <p:nvPr>
+            <p:ph type="title"/>
+          </p:nvPr>
+        </p:nvSpPr>
+        <p:spPr/>
+        <p:txBody>
+          <a:bodyPr/>
+          <a:lstStyle/>
+          <a:p>
+            <a:r>
+              <a:rPr lang="ko-KR" altLang="en-US" dirty="0"/>
+              <a:t>석탄 가격</a:t>
+            </a:r>
+          </a:p>
+        </p:txBody>
+      </p:sp>
+      <p:sp>
+        <p:nvSpPr>
+          <p:cNvPr id="4" name="슬라이드 번호 개체 틀 3">
+            <a:extLst>
+              <a:ext uri="{FF2B5EF4-FFF2-40B4-BE49-F238E27FC236}">
+                <a16:creationId xmlns:a16="http://schemas.microsoft.com/office/drawing/2014/main" id="{B81F065F-7C6B-4EC9-78BD-C20B30CF873A}"/>
+              </a:ext>
+            </a:extLst>
+          </p:cNvPr>
+          <p:cNvSpPr>
+            <a:spLocks noGrp="1"/>
+          </p:cNvSpPr>
+          <p:nvPr>
+            <p:ph type="sldNum" sz="quarter" idx="12"/>
+          </p:nvPr>
+        </p:nvSpPr>
+        <p:spPr/>
+        <p:txBody>
+          <a:bodyPr/>
+          <a:lstStyle/>
+          <a:p>
+            <a:fld id="{109C872D-39A9-4065-8BF3-6A613116E2A1}" type="slidenum">
+              <a:rPr lang="ko-KR" altLang="en-US" smtClean="0"/>
+              <a:t>42</a:t>
+            </a:fld>
+            <a:endParaRPr lang="ko-KR" altLang="en-US"/>
+          </a:p>
+        </p:txBody>
+      </p:sp>
+      <p:sp>
+        <p:nvSpPr>
+          <p:cNvPr id="6" name="TextBox 5">
+            <a:extLst>
+              <a:ext uri="{FF2B5EF4-FFF2-40B4-BE49-F238E27FC236}">
+                <a16:creationId xmlns:a16="http://schemas.microsoft.com/office/drawing/2014/main" id="{092839AA-357E-A2E4-FA06-0455661D7CAC}"/>
+              </a:ext>
+            </a:extLst>
+          </p:cNvPr>
+          <p:cNvSpPr txBox="1"/>
+          <p:nvPr/>
+        </p:nvSpPr>
+        <p:spPr>
+          <a:xfrm>
+            <a:off x="288790" y="958844"/>
+            <a:ext cx="11118453" cy="1891352"/>
+          </a:xfrm>
+          <a:prstGeom prst="rect">
+            <a:avLst/>
+          </a:prstGeom>
+          <a:noFill/>
+        </p:spPr>
+        <p:txBody>
+          <a:bodyPr wrap="square" rtlCol="0" anchor="t">
+            <a:spAutoFit/>
+          </a:bodyPr>
+          <a:lstStyle/>
+          <a:p>
+            <a:pPr marL="377825" indent="-285750">
+              <a:lnSpc>
+                <a:spcPct val="150000"/>
+              </a:lnSpc>
+              <a:buFont typeface="Arial" panose="020B0604020202020204" pitchFamily="34" charset="0"/>
+              <a:buChar char="•"/>
+            </a:pPr>
+            <a:r>
+              <a:rPr lang="ko-KR" altLang="en-US" sz="1600" dirty="0"/>
+              <a:t>석탄 가격 결정의 기본적 메커니즘은 시장에서의 수급 균형이다</a:t>
+            </a:r>
+            <a:r>
+              <a:rPr lang="en-US" altLang="ko-KR" sz="1600" dirty="0"/>
+              <a:t>.</a:t>
+            </a:r>
+          </a:p>
+          <a:p>
+            <a:pPr marL="835025" lvl="1" indent="-285750">
+              <a:lnSpc>
+                <a:spcPct val="150000"/>
+              </a:lnSpc>
+              <a:buFont typeface="Wingdings" panose="05000000000000000000" pitchFamily="2" charset="2"/>
+              <a:buChar char="ü"/>
+            </a:pPr>
+            <a:r>
+              <a:rPr lang="ko-KR" altLang="en-US" sz="1600" dirty="0"/>
+              <a:t>공급 측면에서는 주요생산국인 중국</a:t>
+            </a:r>
+            <a:r>
+              <a:rPr lang="en-US" altLang="ko-KR" sz="1600" dirty="0"/>
+              <a:t>, </a:t>
+            </a:r>
+            <a:r>
+              <a:rPr lang="ko-KR" altLang="en-US" sz="1600" dirty="0"/>
+              <a:t>인도</a:t>
+            </a:r>
+            <a:r>
+              <a:rPr lang="en-US" altLang="ko-KR" sz="1600" dirty="0"/>
+              <a:t>, </a:t>
+            </a:r>
+            <a:r>
+              <a:rPr lang="ko-KR" altLang="en-US" sz="1600" dirty="0"/>
+              <a:t>호주</a:t>
+            </a:r>
+            <a:r>
+              <a:rPr lang="en-US" altLang="ko-KR" sz="1600" dirty="0"/>
+              <a:t>, </a:t>
+            </a:r>
+            <a:r>
+              <a:rPr lang="ko-KR" altLang="en-US" sz="1600" dirty="0"/>
+              <a:t>미국의 생산 능력</a:t>
+            </a:r>
+            <a:r>
+              <a:rPr lang="en-US" altLang="ko-KR" sz="1600" dirty="0"/>
+              <a:t>, </a:t>
+            </a:r>
+            <a:r>
+              <a:rPr lang="ko-KR" altLang="en-US" sz="1600" dirty="0"/>
+              <a:t>채굴비용</a:t>
+            </a:r>
+            <a:r>
+              <a:rPr lang="en-US" altLang="ko-KR" sz="1600" dirty="0"/>
+              <a:t>, </a:t>
+            </a:r>
+            <a:r>
+              <a:rPr lang="ko-KR" altLang="en-US" sz="1600" dirty="0"/>
+              <a:t>기후 및 정책 환경이 결정적 역할을 한다</a:t>
+            </a:r>
+            <a:r>
+              <a:rPr lang="en-US" altLang="ko-KR" sz="1600" dirty="0"/>
+              <a:t>.</a:t>
+            </a:r>
+          </a:p>
+          <a:p>
+            <a:pPr marL="835025" lvl="1" indent="-285750">
+              <a:lnSpc>
+                <a:spcPct val="150000"/>
+              </a:lnSpc>
+              <a:buFont typeface="Wingdings" panose="05000000000000000000" pitchFamily="2" charset="2"/>
+              <a:buChar char="ü"/>
+            </a:pPr>
+            <a:r>
+              <a:rPr lang="ko-KR" altLang="en-US" sz="1600" dirty="0"/>
+              <a:t>수요측면에서는 중국과 인도의 전력 수요 증가가 석탄소비를 견인하여 가격 상승 압력을 가중시킨다</a:t>
+            </a:r>
+            <a:r>
+              <a:rPr lang="en-US" altLang="ko-KR" sz="1600" dirty="0"/>
+              <a:t>.</a:t>
+            </a:r>
+          </a:p>
+          <a:p>
+            <a:pPr marL="835025" lvl="1" indent="-285750">
+              <a:lnSpc>
+                <a:spcPct val="150000"/>
+              </a:lnSpc>
+              <a:buFont typeface="Wingdings" panose="05000000000000000000" pitchFamily="2" charset="2"/>
+              <a:buChar char="ü"/>
+            </a:pPr>
+            <a:r>
+              <a:rPr lang="ko-KR" altLang="en-US" sz="1600" dirty="0"/>
+              <a:t>아래는 지역별 석탄 가격을 보여주고 있다</a:t>
+            </a:r>
+            <a:r>
+              <a:rPr lang="en-US" altLang="ko-KR" sz="1600" dirty="0"/>
+              <a:t>. (</a:t>
+            </a:r>
+            <a:r>
+              <a:rPr lang="ko-KR" altLang="en-US" sz="1600" dirty="0"/>
+              <a:t>자세한 설명은 다음 슬라이드</a:t>
+            </a:r>
+            <a:r>
+              <a:rPr lang="en-US" altLang="ko-KR" sz="1600" dirty="0"/>
+              <a:t>)</a:t>
+            </a:r>
+          </a:p>
+        </p:txBody>
+      </p:sp>
+      <p:pic>
+        <p:nvPicPr>
+          <p:cNvPr id="5" name="그림 4">
+            <a:extLst>
+              <a:ext uri="{FF2B5EF4-FFF2-40B4-BE49-F238E27FC236}">
+                <a16:creationId xmlns:a16="http://schemas.microsoft.com/office/drawing/2014/main" id="{B41A075B-C71D-3CE5-5915-747C1FD40F11}"/>
+              </a:ext>
+            </a:extLst>
+          </p:cNvPr>
+          <p:cNvPicPr>
+            <a:picLocks noChangeAspect="1"/>
+          </p:cNvPicPr>
+          <p:nvPr/>
+        </p:nvPicPr>
+        <p:blipFill rotWithShape="1">
+          <a:blip r:embed="rId2"/>
+          <a:stretch>
+            <a:fillRect/>
+          </a:stretch>
+        </p:blipFill>
+        <p:spPr>
+          <a:xfrm>
+            <a:off x="2898758" y="3219581"/>
+            <a:ext cx="5542878" cy="3361572"/>
+          </a:xfrm>
+          <a:prstGeom prst="rect">
+            <a:avLst/>
+          </a:prstGeom>
+        </p:spPr>
+      </p:pic>
+      <p:sp>
+        <p:nvSpPr>
+          <p:cNvPr id="8" name="TextBox 7">
+            <a:extLst>
+              <a:ext uri="{FF2B5EF4-FFF2-40B4-BE49-F238E27FC236}">
+                <a16:creationId xmlns:a16="http://schemas.microsoft.com/office/drawing/2014/main" id="{CCED08A4-C8B5-3C6E-D8E0-12A93032AA85}"/>
+              </a:ext>
+            </a:extLst>
+          </p:cNvPr>
+          <p:cNvSpPr txBox="1"/>
+          <p:nvPr/>
+        </p:nvSpPr>
+        <p:spPr>
+          <a:xfrm>
+            <a:off x="3657978" y="3081081"/>
+            <a:ext cx="4024436" cy="276999"/>
+          </a:xfrm>
+          <a:prstGeom prst="rect">
+            <a:avLst/>
+          </a:prstGeom>
+          <a:noFill/>
+        </p:spPr>
+        <p:txBody>
+          <a:bodyPr wrap="square">
+            <a:spAutoFit/>
+          </a:bodyPr>
+          <a:lstStyle/>
+          <a:p>
+            <a:pPr algn="ctr"/>
+            <a:r>
+              <a:rPr lang="en-US" altLang="ko-KR" sz="1200" spc="-50" dirty="0"/>
+              <a:t>&lt; </a:t>
+            </a:r>
+            <a:r>
+              <a:rPr lang="ko-KR" altLang="en-US" sz="1200" spc="-50" dirty="0"/>
+              <a:t>지역별 석탄 가격 </a:t>
+            </a:r>
+            <a:r>
+              <a:rPr lang="en-US" altLang="ko-KR" sz="1200" spc="-50" dirty="0"/>
+              <a:t>(</a:t>
+            </a:r>
+            <a:r>
+              <a:rPr lang="ko-KR" altLang="en-US" sz="1200" spc="-50" dirty="0"/>
+              <a:t>달러</a:t>
+            </a:r>
+            <a:r>
+              <a:rPr lang="en-US" altLang="ko-KR" sz="1200" spc="-50" dirty="0"/>
+              <a:t>/</a:t>
+            </a:r>
+            <a:r>
+              <a:rPr lang="ko-KR" altLang="en-US" sz="1200" spc="-50" dirty="0"/>
+              <a:t>톤</a:t>
+            </a:r>
+            <a:r>
+              <a:rPr lang="en-US" altLang="ko-KR" sz="1200" spc="-50" dirty="0"/>
+              <a:t>) &gt;</a:t>
+            </a:r>
+            <a:endParaRPr lang="ko-KR" altLang="en-US" sz="1200" dirty="0"/>
+          </a:p>
+        </p:txBody>
+      </p:sp>
+    </p:spTree>
+    <p:extLst>
+      <p:ext uri="{BB962C8B-B14F-4D97-AF65-F5344CB8AC3E}">
+        <p14:creationId xmlns:p14="http://schemas.microsoft.com/office/powerpoint/2010/main" val="996498942"/>
+      </p:ext>
+    </p:extLst>
+  </p:cSld>
+  <p:clrMapOvr>
+    <a:masterClrMapping/>
+  </p:clrMapOvr>
+</p:sld>
+</file>
+
+<file path=ppt/slides/slide43.xml><?xml version="1.0" encoding="utf-8"?>
+<p:sld xmlns:a="http://schemas.openxmlformats.org/drawingml/2006/main" xmlns:r="http://schemas.openxmlformats.org/officeDocument/2006/relationships" xmlns:p="http://schemas.openxmlformats.org/presentationml/2006/main">
+  <p:cSld>
+    <p:spTree>
+      <p:nvGrpSpPr>
+        <p:cNvPr id="1" name="">
+          <a:extLst>
+            <a:ext uri="{FF2B5EF4-FFF2-40B4-BE49-F238E27FC236}">
+              <a16:creationId xmlns:a16="http://schemas.microsoft.com/office/drawing/2014/main" id="{A2E1E337-E1DC-8A94-A7E5-995446497075}"/>
+            </a:ext>
+          </a:extLst>
+        </p:cNvPr>
+        <p:cNvGrpSpPr/>
+        <p:nvPr/>
+      </p:nvGrpSpPr>
+      <p:grpSpPr>
+        <a:xfrm>
+          <a:off x="0" y="0"/>
+          <a:ext cx="0" cy="0"/>
+          <a:chOff x="0" y="0"/>
+          <a:chExt cx="0" cy="0"/>
+        </a:xfrm>
+      </p:grpSpPr>
+      <p:sp>
+        <p:nvSpPr>
+          <p:cNvPr id="2" name="제목 1">
+            <a:extLst>
+              <a:ext uri="{FF2B5EF4-FFF2-40B4-BE49-F238E27FC236}">
+                <a16:creationId xmlns:a16="http://schemas.microsoft.com/office/drawing/2014/main" id="{22FC55EF-EB1A-8BD6-3719-39021C488EEA}"/>
+              </a:ext>
+            </a:extLst>
+          </p:cNvPr>
+          <p:cNvSpPr>
+            <a:spLocks noGrp="1"/>
+          </p:cNvSpPr>
+          <p:nvPr>
+            <p:ph type="title"/>
+          </p:nvPr>
+        </p:nvSpPr>
+        <p:spPr/>
+        <p:txBody>
+          <a:bodyPr/>
+          <a:lstStyle/>
+          <a:p>
+            <a:r>
+              <a:rPr lang="ko-KR" altLang="en-US" dirty="0"/>
+              <a:t>석탄 가격</a:t>
+            </a:r>
+          </a:p>
+        </p:txBody>
+      </p:sp>
+      <p:sp>
+        <p:nvSpPr>
+          <p:cNvPr id="4" name="슬라이드 번호 개체 틀 3">
+            <a:extLst>
+              <a:ext uri="{FF2B5EF4-FFF2-40B4-BE49-F238E27FC236}">
+                <a16:creationId xmlns:a16="http://schemas.microsoft.com/office/drawing/2014/main" id="{23B42DB1-6D48-FA09-33DC-3669912C8914}"/>
+              </a:ext>
+            </a:extLst>
+          </p:cNvPr>
+          <p:cNvSpPr>
+            <a:spLocks noGrp="1"/>
+          </p:cNvSpPr>
+          <p:nvPr>
+            <p:ph type="sldNum" sz="quarter" idx="12"/>
+          </p:nvPr>
+        </p:nvSpPr>
+        <p:spPr/>
+        <p:txBody>
+          <a:bodyPr/>
+          <a:lstStyle/>
+          <a:p>
+            <a:fld id="{109C872D-39A9-4065-8BF3-6A613116E2A1}" type="slidenum">
+              <a:rPr lang="ko-KR" altLang="en-US" smtClean="0"/>
+              <a:t>43</a:t>
+            </a:fld>
+            <a:endParaRPr lang="ko-KR" altLang="en-US"/>
+          </a:p>
+        </p:txBody>
+      </p:sp>
+      <p:sp>
+        <p:nvSpPr>
+          <p:cNvPr id="6" name="TextBox 5">
+            <a:extLst>
+              <a:ext uri="{FF2B5EF4-FFF2-40B4-BE49-F238E27FC236}">
+                <a16:creationId xmlns:a16="http://schemas.microsoft.com/office/drawing/2014/main" id="{A3F7EBA6-AE55-D2D7-A887-AB5AF2A302FA}"/>
+              </a:ext>
+            </a:extLst>
+          </p:cNvPr>
+          <p:cNvSpPr txBox="1"/>
+          <p:nvPr/>
+        </p:nvSpPr>
+        <p:spPr>
+          <a:xfrm>
+            <a:off x="288790" y="958844"/>
+            <a:ext cx="11118453" cy="4846007"/>
+          </a:xfrm>
+          <a:prstGeom prst="rect">
+            <a:avLst/>
+          </a:prstGeom>
+          <a:noFill/>
+        </p:spPr>
+        <p:txBody>
+          <a:bodyPr wrap="square" rtlCol="0" anchor="t">
+            <a:spAutoFit/>
+          </a:bodyPr>
+          <a:lstStyle/>
+          <a:p>
+            <a:pPr marL="377825" indent="-285750">
+              <a:lnSpc>
+                <a:spcPct val="150000"/>
+              </a:lnSpc>
+              <a:buFont typeface="Arial" panose="020B0604020202020204" pitchFamily="34" charset="0"/>
+              <a:buChar char="•"/>
+            </a:pPr>
+            <a:r>
+              <a:rPr lang="ko-KR" altLang="en-US" sz="1600" dirty="0"/>
+              <a:t>지정학적 갈등과 무역정책의 변화도 석탄 가격에 중대한 영향을 미친다</a:t>
+            </a:r>
+            <a:r>
+              <a:rPr lang="en-US" altLang="ko-KR" sz="1600" dirty="0"/>
+              <a:t>.</a:t>
+            </a:r>
+          </a:p>
+          <a:p>
+            <a:pPr marL="835025" lvl="1" indent="-285750">
+              <a:lnSpc>
+                <a:spcPct val="150000"/>
+              </a:lnSpc>
+              <a:buFont typeface="Wingdings" panose="05000000000000000000" pitchFamily="2" charset="2"/>
+              <a:buChar char="ü"/>
+            </a:pPr>
+            <a:r>
+              <a:rPr lang="ko-KR" altLang="en-US" sz="1600" dirty="0"/>
+              <a:t>수출입 제재</a:t>
+            </a:r>
+            <a:r>
+              <a:rPr lang="en-US" altLang="ko-KR" sz="1600" dirty="0"/>
+              <a:t>, </a:t>
+            </a:r>
+            <a:r>
+              <a:rPr lang="ko-KR" altLang="en-US" sz="1600" dirty="0"/>
+              <a:t>수출 통제</a:t>
+            </a:r>
+            <a:r>
+              <a:rPr lang="en-US" altLang="ko-KR" sz="1600" dirty="0"/>
+              <a:t>, </a:t>
+            </a:r>
+            <a:r>
+              <a:rPr lang="ko-KR" altLang="en-US" sz="1600" dirty="0"/>
+              <a:t>무역 분쟁 등은 글로벌 공급망에 혼란을 야기하고 공급 부족을 초래하여 가격 급등을 유발할 수 있다</a:t>
+            </a:r>
+            <a:r>
+              <a:rPr lang="en-US" altLang="ko-KR" sz="1600" dirty="0"/>
+              <a:t>.</a:t>
+            </a:r>
+          </a:p>
+          <a:p>
+            <a:pPr marL="1292225" lvl="2" indent="-285750">
+              <a:lnSpc>
+                <a:spcPct val="150000"/>
+              </a:lnSpc>
+              <a:buFont typeface="Wingdings" panose="05000000000000000000" pitchFamily="2" charset="2"/>
+              <a:buChar char="Ø"/>
+            </a:pPr>
+            <a:r>
+              <a:rPr lang="ko-KR" altLang="en-US" sz="1600" dirty="0"/>
+              <a:t>러시아</a:t>
+            </a:r>
+            <a:r>
+              <a:rPr lang="en-US" altLang="ko-KR" sz="1600" dirty="0"/>
+              <a:t>-</a:t>
+            </a:r>
+            <a:r>
+              <a:rPr lang="ko-KR" altLang="en-US" sz="1600" dirty="0"/>
+              <a:t>우크라이나 전쟁 이후 유럽의 러시아산 석탄 수입 중단이 대표적인 사례로</a:t>
+            </a:r>
+            <a:r>
+              <a:rPr lang="en-US" altLang="ko-KR" sz="1600" dirty="0"/>
+              <a:t>, </a:t>
+            </a:r>
+            <a:r>
+              <a:rPr lang="ko-KR" altLang="en-US" sz="1600" dirty="0"/>
+              <a:t>비러시아산 석탄의 수입 수요가 증가하면서 가격이 크게 상승하였다</a:t>
+            </a:r>
+            <a:r>
+              <a:rPr lang="en-US" altLang="ko-KR" sz="1600" dirty="0"/>
+              <a:t>.</a:t>
+            </a:r>
+          </a:p>
+          <a:p>
+            <a:pPr marL="377825" indent="-285750">
+              <a:lnSpc>
+                <a:spcPct val="150000"/>
+              </a:lnSpc>
+              <a:buFont typeface="Arial" panose="020B0604020202020204" pitchFamily="34" charset="0"/>
+              <a:buChar char="•"/>
+            </a:pPr>
+            <a:r>
+              <a:rPr lang="ko-KR" altLang="en-US" sz="1600" dirty="0"/>
+              <a:t>환경정책의 변화 또 석탄가격에 중요한 영향을 미치고 있다</a:t>
+            </a:r>
+            <a:r>
+              <a:rPr lang="en-US" altLang="ko-KR" sz="1600" dirty="0"/>
+              <a:t>.</a:t>
+            </a:r>
+          </a:p>
+          <a:p>
+            <a:pPr marL="835025" lvl="1" indent="-285750">
+              <a:lnSpc>
+                <a:spcPct val="150000"/>
+              </a:lnSpc>
+              <a:buFont typeface="Wingdings" panose="05000000000000000000" pitchFamily="2" charset="2"/>
+              <a:buChar char="ü"/>
+            </a:pPr>
+            <a:r>
+              <a:rPr lang="ko-KR" altLang="en-US" sz="1600" dirty="0"/>
+              <a:t>유럽 연합과 북미 지역은 강화된 탄소 규제를 통해 석탄 소비를 구조적으로 억제하고 있다</a:t>
+            </a:r>
+            <a:r>
+              <a:rPr lang="en-US" altLang="ko-KR" sz="1600" dirty="0"/>
+              <a:t>.</a:t>
+            </a:r>
+          </a:p>
+          <a:p>
+            <a:pPr marL="835025" lvl="1" indent="-285750">
+              <a:lnSpc>
+                <a:spcPct val="150000"/>
+              </a:lnSpc>
+              <a:buFont typeface="Wingdings" panose="05000000000000000000" pitchFamily="2" charset="2"/>
+              <a:buChar char="ü"/>
+            </a:pPr>
+            <a:r>
+              <a:rPr lang="ko-KR" altLang="en-US" sz="1600" dirty="0"/>
+              <a:t>환경규제가 느슨한 일부 개발도상국은 여전히 석탄이 주요 에너지원으로 활용되고 있다</a:t>
+            </a:r>
+            <a:r>
+              <a:rPr lang="en-US" altLang="ko-KR" sz="1600" dirty="0"/>
+              <a:t>.</a:t>
+            </a:r>
+          </a:p>
+          <a:p>
+            <a:pPr marL="377825" indent="-285750">
+              <a:lnSpc>
+                <a:spcPct val="150000"/>
+              </a:lnSpc>
+              <a:buFont typeface="Arial" panose="020B0604020202020204" pitchFamily="34" charset="0"/>
+              <a:buChar char="•"/>
+            </a:pPr>
+            <a:r>
+              <a:rPr lang="ko-KR" altLang="en-US" sz="1600" dirty="0"/>
+              <a:t>국가 내 시장 구조에 따라서도 석탄 가격이 달라진다</a:t>
+            </a:r>
+            <a:r>
+              <a:rPr lang="en-US" altLang="ko-KR" sz="1600" dirty="0"/>
+              <a:t>.</a:t>
+            </a:r>
+          </a:p>
+          <a:p>
+            <a:pPr marL="835025" lvl="1" indent="-285750">
+              <a:lnSpc>
+                <a:spcPct val="150000"/>
+              </a:lnSpc>
+              <a:buFont typeface="Wingdings" panose="05000000000000000000" pitchFamily="2" charset="2"/>
+              <a:buChar char="ü"/>
+            </a:pPr>
+            <a:r>
+              <a:rPr lang="ko-KR" altLang="en-US" sz="1600" dirty="0"/>
+              <a:t>호주와 인도네시아처럼 소수의 대형 생산자가 우위를 점하고 있는 시장에서는 공급량의 전략적 조절로 인해 가격 안정성이 높아지는 경향이 있다</a:t>
+            </a:r>
+            <a:r>
+              <a:rPr lang="en-US" altLang="ko-KR" sz="1600" dirty="0"/>
+              <a:t>.</a:t>
+            </a:r>
+          </a:p>
+          <a:p>
+            <a:pPr marL="835025" lvl="1" indent="-285750">
+              <a:lnSpc>
+                <a:spcPct val="150000"/>
+              </a:lnSpc>
+              <a:buFont typeface="Wingdings" panose="05000000000000000000" pitchFamily="2" charset="2"/>
+              <a:buChar char="ü"/>
+            </a:pPr>
+            <a:r>
+              <a:rPr lang="ko-KR" altLang="en-US" sz="1600" dirty="0"/>
+              <a:t>한편 중소 생산자가 난립하는 시장에서는 경쟁 심화로 인해 가격 변동성이 크게 나타난다</a:t>
+            </a:r>
+            <a:r>
+              <a:rPr lang="en-US" altLang="ko-KR" sz="1600" dirty="0"/>
+              <a:t>.</a:t>
+            </a:r>
+          </a:p>
+          <a:p>
+            <a:pPr marL="835025" lvl="1" indent="-285750">
+              <a:lnSpc>
+                <a:spcPct val="150000"/>
+              </a:lnSpc>
+              <a:buFont typeface="Wingdings" panose="05000000000000000000" pitchFamily="2" charset="2"/>
+              <a:buChar char="Ø"/>
+            </a:pPr>
+            <a:endParaRPr lang="en-US" altLang="ko-KR" sz="1600" dirty="0"/>
+          </a:p>
+        </p:txBody>
+      </p:sp>
+    </p:spTree>
+    <p:extLst>
+      <p:ext uri="{BB962C8B-B14F-4D97-AF65-F5344CB8AC3E}">
+        <p14:creationId xmlns:p14="http://schemas.microsoft.com/office/powerpoint/2010/main" val="3530947591"/>
+      </p:ext>
+    </p:extLst>
+  </p:cSld>
+  <p:clrMapOvr>
+    <a:masterClrMapping/>
+  </p:clrMapOvr>
+</p:sld>
+</file>
+
+<file path=ppt/slides/slide44.xml><?xml version="1.0" encoding="utf-8"?>
+<p:sld xmlns:a="http://schemas.openxmlformats.org/drawingml/2006/main" xmlns:r="http://schemas.openxmlformats.org/officeDocument/2006/relationships" xmlns:p="http://schemas.openxmlformats.org/presentationml/2006/main">
+  <p:cSld>
+    <p:spTree>
+      <p:nvGrpSpPr>
+        <p:cNvPr id="1" name="">
+          <a:extLst>
+            <a:ext uri="{FF2B5EF4-FFF2-40B4-BE49-F238E27FC236}">
               <a16:creationId xmlns:a16="http://schemas.microsoft.com/office/drawing/2014/main" id="{BD16502F-0528-3EDF-A225-5DDABB306E5B}"/>
             </a:ext>
           </a:extLst>
@@ -35301,7 +36703,7 @@
           <a:p>
             <a:fld id="{109C872D-39A9-4065-8BF3-6A613116E2A1}" type="slidenum">
               <a:rPr lang="ko-KR" altLang="en-US" smtClean="0"/>
-              <a:t>40</a:t>
+              <a:t>44</a:t>
             </a:fld>
             <a:endParaRPr lang="ko-KR" altLang="en-US"/>
           </a:p>
@@ -35361,7 +36763,7 @@
 </p:sld>
 </file>
 
-<file path=ppt/slides/slide41.xml><?xml version="1.0" encoding="utf-8"?>
+<file path=ppt/slides/slide45.xml><?xml version="1.0" encoding="utf-8"?>
 <p:sld xmlns:a="http://schemas.openxmlformats.org/drawingml/2006/main" xmlns:r="http://schemas.openxmlformats.org/officeDocument/2006/relationships" xmlns:p="http://schemas.openxmlformats.org/presentationml/2006/main">
   <p:cSld>
     <p:spTree>
@@ -35444,7 +36846,7 @@
           <a:p>
             <a:fld id="{109C872D-39A9-4065-8BF3-6A613116E2A1}" type="slidenum">
               <a:rPr lang="ko-KR" altLang="en-US" smtClean="0"/>
-              <a:t>41</a:t>
+              <a:t>45</a:t>
             </a:fld>
             <a:endParaRPr lang="ko-KR" altLang="en-US"/>
           </a:p>
@@ -35504,7 +36906,7 @@
 </p:sld>
 </file>
 
-<file path=ppt/slides/slide42.xml><?xml version="1.0" encoding="utf-8"?>
+<file path=ppt/slides/slide46.xml><?xml version="1.0" encoding="utf-8"?>
 <p:sld xmlns:a="http://schemas.openxmlformats.org/drawingml/2006/main" xmlns:r="http://schemas.openxmlformats.org/officeDocument/2006/relationships" xmlns:p="http://schemas.openxmlformats.org/presentationml/2006/main">
   <p:cSld>
     <p:spTree>
@@ -35587,7 +36989,7 @@
           <a:p>
             <a:fld id="{109C872D-39A9-4065-8BF3-6A613116E2A1}" type="slidenum">
               <a:rPr lang="ko-KR" altLang="en-US" smtClean="0"/>
-              <a:t>42</a:t>
+              <a:t>46</a:t>
             </a:fld>
             <a:endParaRPr lang="ko-KR" altLang="en-US"/>
           </a:p>
@@ -35647,7 +37049,7 @@
 </p:sld>
 </file>
 
-<file path=ppt/slides/slide43.xml><?xml version="1.0" encoding="utf-8"?>
+<file path=ppt/slides/slide47.xml><?xml version="1.0" encoding="utf-8"?>
 <p:sld xmlns:a="http://schemas.openxmlformats.org/drawingml/2006/main" xmlns:r="http://schemas.openxmlformats.org/officeDocument/2006/relationships" xmlns:p="http://schemas.openxmlformats.org/presentationml/2006/main">
   <p:cSld>
     <p:spTree>
@@ -35775,7 +37177,7 @@
           <a:p>
             <a:fld id="{109C872D-39A9-4065-8BF3-6A613116E2A1}" type="slidenum">
               <a:rPr lang="ko-KR" altLang="en-US" smtClean="0"/>
-              <a:t>43</a:t>
+              <a:t>47</a:t>
             </a:fld>
             <a:endParaRPr lang="ko-KR" altLang="en-US"/>
           </a:p>

--- a/에너지경제학/자원에너지경제학_Chapter_4 (석탄).pptx
+++ b/에너지경제학/자원에너지경제학_Chapter_4 (석탄).pptx
@@ -5,7 +5,7 @@
     <p:sldMasterId id="2147483648" r:id="rId1"/>
   </p:sldMasterIdLst>
   <p:notesMasterIdLst>
-    <p:notesMasterId r:id="rId49"/>
+    <p:notesMasterId r:id="rId54"/>
   </p:notesMasterIdLst>
   <p:sldIdLst>
     <p:sldId id="375" r:id="rId2"/>
@@ -51,10 +51,15 @@
     <p:sldId id="639" r:id="rId42"/>
     <p:sldId id="640" r:id="rId43"/>
     <p:sldId id="641" r:id="rId44"/>
-    <p:sldId id="607" r:id="rId45"/>
-    <p:sldId id="608" r:id="rId46"/>
-    <p:sldId id="600" r:id="rId47"/>
-    <p:sldId id="598" r:id="rId48"/>
+    <p:sldId id="642" r:id="rId45"/>
+    <p:sldId id="607" r:id="rId46"/>
+    <p:sldId id="643" r:id="rId47"/>
+    <p:sldId id="644" r:id="rId48"/>
+    <p:sldId id="645" r:id="rId49"/>
+    <p:sldId id="608" r:id="rId50"/>
+    <p:sldId id="646" r:id="rId51"/>
+    <p:sldId id="647" r:id="rId52"/>
+    <p:sldId id="598" r:id="rId53"/>
   </p:sldIdLst>
   <p:sldSz cx="12192000" cy="6858000"/>
   <p:notesSz cx="6858000" cy="9144000"/>
@@ -265,7 +270,7 @@
           <a:p>
             <a:fld id="{4A5E00EF-AEA4-43E2-9451-8F9C59A39471}" type="datetimeFigureOut">
               <a:rPr lang="ko-KR" altLang="en-US" smtClean="0"/>
-              <a:t>2026-06-17</a:t>
+              <a:t>2026-06-18</a:t>
             </a:fld>
             <a:endParaRPr lang="ko-KR" altLang="en-US"/>
           </a:p>
@@ -687,7 +692,7 @@
           <a:p>
             <a:fld id="{CD32C56F-BD27-4999-9E6D-D4EACE3DA9F4}" type="datetime1">
               <a:rPr lang="ko-KR" altLang="en-US" smtClean="0"/>
-              <a:t>2026-06-17</a:t>
+              <a:t>2026-06-18</a:t>
             </a:fld>
             <a:endParaRPr lang="ko-KR" altLang="en-US"/>
           </a:p>
@@ -901,7 +906,7 @@
           <a:p>
             <a:fld id="{8EF4A19C-72C8-45CA-8E3F-68A7FA345D6C}" type="datetime1">
               <a:rPr lang="ko-KR" altLang="en-US" smtClean="0"/>
-              <a:t>2026-06-17</a:t>
+              <a:t>2026-06-18</a:t>
             </a:fld>
             <a:endParaRPr lang="ko-KR" altLang="en-US"/>
           </a:p>
@@ -1125,7 +1130,7 @@
           <a:p>
             <a:fld id="{56A175B2-010B-4341-954C-5F8F5C70B124}" type="datetime1">
               <a:rPr lang="ko-KR" altLang="en-US" smtClean="0"/>
-              <a:t>2026-06-17</a:t>
+              <a:t>2026-06-18</a:t>
             </a:fld>
             <a:endParaRPr lang="ko-KR" altLang="en-US"/>
           </a:p>
@@ -1339,7 +1344,7 @@
           <a:p>
             <a:fld id="{16B83F9E-22C9-45CA-9E85-070F1D3EF530}" type="datetime1">
               <a:rPr lang="ko-KR" altLang="en-US" smtClean="0"/>
-              <a:t>2026-06-17</a:t>
+              <a:t>2026-06-18</a:t>
             </a:fld>
             <a:endParaRPr lang="ko-KR" altLang="en-US"/>
           </a:p>
@@ -1630,7 +1635,7 @@
           <a:p>
             <a:fld id="{03278F45-FB3C-4C4D-B89A-7BC3F5F229F6}" type="datetime1">
               <a:rPr lang="ko-KR" altLang="en-US" smtClean="0"/>
-              <a:t>2026-06-17</a:t>
+              <a:t>2026-06-18</a:t>
             </a:fld>
             <a:endParaRPr lang="ko-KR" altLang="en-US"/>
           </a:p>
@@ -2023,7 +2028,7 @@
           <a:p>
             <a:fld id="{38FDAC3C-35A6-415C-9F03-738A6AC328B1}" type="datetime1">
               <a:rPr lang="ko-KR" altLang="en-US" smtClean="0"/>
-              <a:t>2026-06-17</a:t>
+              <a:t>2026-06-18</a:t>
             </a:fld>
             <a:endParaRPr lang="ko-KR" altLang="en-US"/>
           </a:p>
@@ -3617,7 +3622,7 @@
           <a:p>
             <a:fld id="{507A0DF1-AEE6-4B0D-89D2-351E7B3EF65C}" type="datetime1">
               <a:rPr lang="ko-KR" altLang="en-US" smtClean="0"/>
-              <a:t>2026-06-17</a:t>
+              <a:t>2026-06-18</a:t>
             </a:fld>
             <a:endParaRPr lang="ko-KR" altLang="en-US"/>
           </a:p>
@@ -4045,7 +4050,7 @@
           <a:p>
             <a:fld id="{CA93B8C9-630F-4D57-944D-04FD37CECCD3}" type="datetime1">
               <a:rPr lang="ko-KR" altLang="en-US" smtClean="0"/>
-              <a:t>2026-06-17</a:t>
+              <a:t>2026-06-18</a:t>
             </a:fld>
             <a:endParaRPr lang="ko-KR" altLang="en-US"/>
           </a:p>
@@ -4202,7 +4207,7 @@
           <a:p>
             <a:fld id="{E986165A-AC43-4902-9541-874ECD310BA3}" type="datetime1">
               <a:rPr lang="ko-KR" altLang="en-US" smtClean="0"/>
-              <a:t>2026-06-17</a:t>
+              <a:t>2026-06-18</a:t>
             </a:fld>
             <a:endParaRPr lang="ko-KR" altLang="en-US"/>
           </a:p>
@@ -4529,7 +4534,7 @@
           <a:p>
             <a:fld id="{47E6EE6D-2B0E-43A9-87A2-7354CDB998F4}" type="datetime1">
               <a:rPr lang="ko-KR" altLang="en-US" smtClean="0"/>
-              <a:t>2026-06-17</a:t>
+              <a:t>2026-06-18</a:t>
             </a:fld>
             <a:endParaRPr lang="ko-KR" altLang="en-US"/>
           </a:p>
@@ -4833,7 +4838,7 @@
           <a:p>
             <a:fld id="{5CC5944E-0BC8-4FAA-9F94-6B4B05834E10}" type="datetime1">
               <a:rPr lang="ko-KR" altLang="en-US" smtClean="0"/>
-              <a:t>2026-06-17</a:t>
+              <a:t>2026-06-18</a:t>
             </a:fld>
             <a:endParaRPr lang="ko-KR" altLang="en-US"/>
           </a:p>
@@ -36398,7 +36403,7 @@
         <p:spPr>
           <a:xfrm>
             <a:off x="288790" y="958844"/>
-            <a:ext cx="11118453" cy="4846007"/>
+            <a:ext cx="11118453" cy="5584670"/>
           </a:xfrm>
           <a:prstGeom prst="rect">
             <a:avLst/>
@@ -36494,6 +36499,16 @@
             </a:r>
           </a:p>
           <a:p>
+            <a:pPr marL="1292225" lvl="2" indent="-285750">
+              <a:lnSpc>
+                <a:spcPct val="150000"/>
+              </a:lnSpc>
+              <a:buFont typeface="Wingdings" panose="05000000000000000000" pitchFamily="2" charset="2"/>
+              <a:buChar char="Ø"/>
+            </a:pPr>
+            <a:endParaRPr lang="en-US" altLang="ko-KR" sz="1600" dirty="0"/>
+          </a:p>
+          <a:p>
             <a:pPr marL="377825" indent="-285750">
               <a:lnSpc>
                 <a:spcPct val="150000"/>
@@ -36543,6 +36558,16 @@
               <a:rPr lang="en-US" altLang="ko-KR" sz="1600" dirty="0"/>
               <a:t>.</a:t>
             </a:r>
+          </a:p>
+          <a:p>
+            <a:pPr marL="835025" lvl="1" indent="-285750">
+              <a:lnSpc>
+                <a:spcPct val="150000"/>
+              </a:lnSpc>
+              <a:buFont typeface="Wingdings" panose="05000000000000000000" pitchFamily="2" charset="2"/>
+              <a:buChar char="ü"/>
+            </a:pPr>
+            <a:endParaRPr lang="en-US" altLang="ko-KR" sz="1600" dirty="0"/>
           </a:p>
           <a:p>
             <a:pPr marL="377825" indent="-285750">
@@ -36621,6 +36646,340 @@
 </file>
 
 <file path=ppt/slides/slide44.xml><?xml version="1.0" encoding="utf-8"?>
+<p:sld xmlns:a="http://schemas.openxmlformats.org/drawingml/2006/main" xmlns:r="http://schemas.openxmlformats.org/officeDocument/2006/relationships" xmlns:p="http://schemas.openxmlformats.org/presentationml/2006/main">
+  <p:cSld>
+    <p:spTree>
+      <p:nvGrpSpPr>
+        <p:cNvPr id="1" name="">
+          <a:extLst>
+            <a:ext uri="{FF2B5EF4-FFF2-40B4-BE49-F238E27FC236}">
+              <a16:creationId xmlns:a16="http://schemas.microsoft.com/office/drawing/2014/main" id="{244FF8D1-ABAE-ABB4-6592-797349E60220}"/>
+            </a:ext>
+          </a:extLst>
+        </p:cNvPr>
+        <p:cNvGrpSpPr/>
+        <p:nvPr/>
+      </p:nvGrpSpPr>
+      <p:grpSpPr>
+        <a:xfrm>
+          <a:off x="0" y="0"/>
+          <a:ext cx="0" cy="0"/>
+          <a:chOff x="0" y="0"/>
+          <a:chExt cx="0" cy="0"/>
+        </a:xfrm>
+      </p:grpSpPr>
+      <p:sp>
+        <p:nvSpPr>
+          <p:cNvPr id="2" name="제목 1">
+            <a:extLst>
+              <a:ext uri="{FF2B5EF4-FFF2-40B4-BE49-F238E27FC236}">
+                <a16:creationId xmlns:a16="http://schemas.microsoft.com/office/drawing/2014/main" id="{01995533-90C1-4667-4C10-13C4DC0B1B1D}"/>
+              </a:ext>
+            </a:extLst>
+          </p:cNvPr>
+          <p:cNvSpPr>
+            <a:spLocks noGrp="1"/>
+          </p:cNvSpPr>
+          <p:nvPr>
+            <p:ph type="title"/>
+          </p:nvPr>
+        </p:nvSpPr>
+        <p:spPr/>
+        <p:txBody>
+          <a:bodyPr/>
+          <a:lstStyle/>
+          <a:p>
+            <a:r>
+              <a:rPr lang="ko-KR" altLang="en-US" dirty="0"/>
+              <a:t>석탄 가격</a:t>
+            </a:r>
+          </a:p>
+        </p:txBody>
+      </p:sp>
+      <p:sp>
+        <p:nvSpPr>
+          <p:cNvPr id="4" name="슬라이드 번호 개체 틀 3">
+            <a:extLst>
+              <a:ext uri="{FF2B5EF4-FFF2-40B4-BE49-F238E27FC236}">
+                <a16:creationId xmlns:a16="http://schemas.microsoft.com/office/drawing/2014/main" id="{53656CD9-8DD8-38BA-0636-31124A12878C}"/>
+              </a:ext>
+            </a:extLst>
+          </p:cNvPr>
+          <p:cNvSpPr>
+            <a:spLocks noGrp="1"/>
+          </p:cNvSpPr>
+          <p:nvPr>
+            <p:ph type="sldNum" sz="quarter" idx="12"/>
+          </p:nvPr>
+        </p:nvSpPr>
+        <p:spPr/>
+        <p:txBody>
+          <a:bodyPr/>
+          <a:lstStyle/>
+          <a:p>
+            <a:fld id="{109C872D-39A9-4065-8BF3-6A613116E2A1}" type="slidenum">
+              <a:rPr lang="ko-KR" altLang="en-US" smtClean="0"/>
+              <a:t>44</a:t>
+            </a:fld>
+            <a:endParaRPr lang="ko-KR" altLang="en-US"/>
+          </a:p>
+        </p:txBody>
+      </p:sp>
+      <p:sp>
+        <p:nvSpPr>
+          <p:cNvPr id="6" name="TextBox 5">
+            <a:extLst>
+              <a:ext uri="{FF2B5EF4-FFF2-40B4-BE49-F238E27FC236}">
+                <a16:creationId xmlns:a16="http://schemas.microsoft.com/office/drawing/2014/main" id="{02B4D4BB-FC7F-1081-DA7D-4C3AE549AE48}"/>
+              </a:ext>
+            </a:extLst>
+          </p:cNvPr>
+          <p:cNvSpPr txBox="1"/>
+          <p:nvPr/>
+        </p:nvSpPr>
+        <p:spPr>
+          <a:xfrm>
+            <a:off x="288790" y="958844"/>
+            <a:ext cx="11118453" cy="3738011"/>
+          </a:xfrm>
+          <a:prstGeom prst="rect">
+            <a:avLst/>
+          </a:prstGeom>
+          <a:noFill/>
+        </p:spPr>
+        <p:txBody>
+          <a:bodyPr wrap="square" rtlCol="0" anchor="t">
+            <a:spAutoFit/>
+          </a:bodyPr>
+          <a:lstStyle/>
+          <a:p>
+            <a:pPr marL="377825" indent="-285750">
+              <a:lnSpc>
+                <a:spcPct val="150000"/>
+              </a:lnSpc>
+              <a:buFont typeface="Arial" panose="020B0604020202020204" pitchFamily="34" charset="0"/>
+              <a:buChar char="•"/>
+            </a:pPr>
+            <a:r>
+              <a:rPr lang="ko-KR" altLang="en-US" sz="1600" dirty="0"/>
+              <a:t>석탄 가격은 용도별로 구분되는 시장 구조의 영향을 받기도 한다</a:t>
+            </a:r>
+            <a:r>
+              <a:rPr lang="en-US" altLang="ko-KR" sz="1600" dirty="0"/>
+              <a:t>.</a:t>
+            </a:r>
+          </a:p>
+          <a:p>
+            <a:pPr marL="835025" lvl="1" indent="-285750">
+              <a:lnSpc>
+                <a:spcPct val="150000"/>
+              </a:lnSpc>
+              <a:buFont typeface="Wingdings" panose="05000000000000000000" pitchFamily="2" charset="2"/>
+              <a:buChar char="ü"/>
+            </a:pPr>
+            <a:r>
+              <a:rPr lang="ko-KR" altLang="en-US" sz="1600" dirty="0"/>
+              <a:t>발전용 석탄과 제철용 </a:t>
+            </a:r>
+            <a:r>
+              <a:rPr lang="ko-KR" altLang="en-US" sz="1600" dirty="0" err="1"/>
+              <a:t>코크스탄은</a:t>
+            </a:r>
+            <a:r>
+              <a:rPr lang="ko-KR" altLang="en-US" sz="1600" dirty="0"/>
+              <a:t> 각각 독립된 시장을 형성하고 있다</a:t>
+            </a:r>
+            <a:r>
+              <a:rPr lang="en-US" altLang="ko-KR" sz="1600" dirty="0"/>
+              <a:t>.</a:t>
+            </a:r>
+          </a:p>
+          <a:p>
+            <a:pPr marL="1292225" lvl="2" indent="-285750">
+              <a:lnSpc>
+                <a:spcPct val="150000"/>
+              </a:lnSpc>
+              <a:buFont typeface="Wingdings" panose="05000000000000000000" pitchFamily="2" charset="2"/>
+              <a:buChar char="Ø"/>
+            </a:pPr>
+            <a:r>
+              <a:rPr lang="ko-KR" altLang="en-US" sz="1600" dirty="0"/>
+              <a:t>발전용 석탄은 계절적 수요</a:t>
+            </a:r>
+            <a:r>
+              <a:rPr lang="en-US" altLang="ko-KR" sz="1600" dirty="0"/>
+              <a:t>, </a:t>
+            </a:r>
+            <a:r>
+              <a:rPr lang="ko-KR" altLang="en-US" sz="1600" dirty="0"/>
+              <a:t>기온</a:t>
+            </a:r>
+            <a:r>
+              <a:rPr lang="en-US" altLang="ko-KR" sz="1600" dirty="0"/>
+              <a:t>, LNG </a:t>
+            </a:r>
+            <a:r>
+              <a:rPr lang="ko-KR" altLang="en-US" sz="1600" dirty="0"/>
+              <a:t>가격에 민감한 반응을 보인다</a:t>
+            </a:r>
+            <a:r>
+              <a:rPr lang="en-US" altLang="ko-KR" sz="1600" dirty="0"/>
+              <a:t>.</a:t>
+            </a:r>
+          </a:p>
+          <a:p>
+            <a:pPr marL="1292225" lvl="2" indent="-285750">
+              <a:lnSpc>
+                <a:spcPct val="150000"/>
+              </a:lnSpc>
+              <a:buFont typeface="Wingdings" panose="05000000000000000000" pitchFamily="2" charset="2"/>
+              <a:buChar char="Ø"/>
+            </a:pPr>
+            <a:r>
+              <a:rPr lang="ko-KR" altLang="en-US" sz="1600" dirty="0" err="1"/>
+              <a:t>코크스탄은</a:t>
+            </a:r>
+            <a:r>
+              <a:rPr lang="ko-KR" altLang="en-US" sz="1600" dirty="0"/>
+              <a:t> 철강 수요와 글로벌 경기 흐름에 크게 의존한다</a:t>
+            </a:r>
+            <a:r>
+              <a:rPr lang="en-US" altLang="ko-KR" sz="1600" dirty="0"/>
+              <a:t>.</a:t>
+            </a:r>
+          </a:p>
+          <a:p>
+            <a:pPr marL="1292225" lvl="2" indent="-285750">
+              <a:lnSpc>
+                <a:spcPct val="150000"/>
+              </a:lnSpc>
+              <a:buFont typeface="Wingdings" panose="05000000000000000000" pitchFamily="2" charset="2"/>
+              <a:buChar char="Ø"/>
+            </a:pPr>
+            <a:endParaRPr lang="en-US" altLang="ko-KR" sz="1600" dirty="0"/>
+          </a:p>
+          <a:p>
+            <a:pPr marL="377825" indent="-285750">
+              <a:lnSpc>
+                <a:spcPct val="150000"/>
+              </a:lnSpc>
+              <a:buFont typeface="Arial" panose="020B0604020202020204" pitchFamily="34" charset="0"/>
+              <a:buChar char="•"/>
+            </a:pPr>
+            <a:r>
+              <a:rPr lang="ko-KR" altLang="en-US" sz="1600" dirty="0"/>
+              <a:t>국제 석탄 시장에서는 표준화된 가격지수가 거래의 기준 역할을 한다</a:t>
+            </a:r>
+            <a:r>
+              <a:rPr lang="en-US" altLang="ko-KR" sz="1600" dirty="0"/>
+              <a:t>.</a:t>
+            </a:r>
+          </a:p>
+          <a:p>
+            <a:pPr marL="835025" lvl="1" indent="-285750">
+              <a:lnSpc>
+                <a:spcPct val="150000"/>
+              </a:lnSpc>
+              <a:buFont typeface="Wingdings" panose="05000000000000000000" pitchFamily="2" charset="2"/>
+              <a:buChar char="ü"/>
+            </a:pPr>
+            <a:r>
+              <a:rPr lang="ko-KR" altLang="en-US" sz="1600" dirty="0"/>
+              <a:t>호주 뉴캐슬 가격지수는 아시아 지역의 발전용 석탄 가격을 반영한다</a:t>
+            </a:r>
+            <a:r>
+              <a:rPr lang="en-US" altLang="ko-KR" sz="1600" dirty="0"/>
+              <a:t>.</a:t>
+            </a:r>
+          </a:p>
+          <a:p>
+            <a:pPr marL="835025" lvl="1" indent="-285750">
+              <a:lnSpc>
+                <a:spcPct val="150000"/>
+              </a:lnSpc>
+              <a:buFont typeface="Wingdings" panose="05000000000000000000" pitchFamily="2" charset="2"/>
+              <a:buChar char="ü"/>
+            </a:pPr>
+            <a:r>
+              <a:rPr lang="en-US" altLang="ko-KR" sz="1600" dirty="0"/>
+              <a:t>API2 </a:t>
+            </a:r>
+            <a:r>
+              <a:rPr lang="ko-KR" altLang="en-US" sz="1600" dirty="0"/>
+              <a:t>지수는 유럽 내 석탄 수입가격의 벤치마크로 활용된다</a:t>
+            </a:r>
+            <a:r>
+              <a:rPr lang="en-US" altLang="ko-KR" sz="1600" dirty="0"/>
+              <a:t>.</a:t>
+            </a:r>
+          </a:p>
+          <a:p>
+            <a:pPr marL="835025" lvl="1" indent="-285750">
+              <a:lnSpc>
+                <a:spcPct val="150000"/>
+              </a:lnSpc>
+              <a:buFont typeface="Wingdings" panose="05000000000000000000" pitchFamily="2" charset="2"/>
+              <a:buChar char="ü"/>
+            </a:pPr>
+            <a:r>
+              <a:rPr lang="ko-KR" altLang="en-US" sz="1600" dirty="0"/>
+              <a:t>이들 지수는 품질</a:t>
+            </a:r>
+            <a:r>
+              <a:rPr lang="en-US" altLang="ko-KR" sz="1600" dirty="0"/>
+              <a:t>, </a:t>
+            </a:r>
+            <a:r>
+              <a:rPr lang="ko-KR" altLang="en-US" sz="1600" dirty="0"/>
+              <a:t>지역</a:t>
+            </a:r>
+            <a:r>
+              <a:rPr lang="en-US" altLang="ko-KR" sz="1600" dirty="0"/>
+              <a:t>, </a:t>
+            </a:r>
+            <a:r>
+              <a:rPr lang="ko-KR" altLang="en-US" sz="1600" dirty="0"/>
+              <a:t>운송조건 등을 반영한 가격정보를 제공하며</a:t>
+            </a:r>
+            <a:r>
+              <a:rPr lang="en-US" altLang="ko-KR" sz="1600" dirty="0"/>
+              <a:t>, </a:t>
+            </a:r>
+            <a:r>
+              <a:rPr lang="ko-KR" altLang="en-US" sz="1600" dirty="0"/>
+              <a:t>실물계약과 선물거래 모두에서 활용된다</a:t>
+            </a:r>
+            <a:r>
+              <a:rPr lang="en-US" altLang="ko-KR" sz="1600" dirty="0"/>
+              <a:t>.</a:t>
+            </a:r>
+          </a:p>
+          <a:p>
+            <a:pPr marL="377825" indent="-285750">
+              <a:lnSpc>
+                <a:spcPct val="150000"/>
+              </a:lnSpc>
+              <a:buFont typeface="Arial" panose="020B0604020202020204" pitchFamily="34" charset="0"/>
+              <a:buChar char="•"/>
+            </a:pPr>
+            <a:endParaRPr lang="en-US" altLang="ko-KR" sz="1600" dirty="0"/>
+          </a:p>
+        </p:txBody>
+      </p:sp>
+    </p:spTree>
+    <p:extLst>
+      <p:ext uri="{BB962C8B-B14F-4D97-AF65-F5344CB8AC3E}">
+        <p14:creationId xmlns:p14="http://schemas.microsoft.com/office/powerpoint/2010/main" val="447430884"/>
+      </p:ext>
+    </p:extLst>
+  </p:cSld>
+  <p:clrMapOvr>
+    <a:masterClrMapping/>
+  </p:clrMapOvr>
+</p:sld>
+</file>
+
+<file path=ppt/slides/slide45.xml><?xml version="1.0" encoding="utf-8"?>
 <p:sld xmlns:a="http://schemas.openxmlformats.org/drawingml/2006/main" xmlns:r="http://schemas.openxmlformats.org/officeDocument/2006/relationships" xmlns:p="http://schemas.openxmlformats.org/presentationml/2006/main">
   <p:cSld>
     <p:spTree>
@@ -36703,7 +37062,7 @@
           <a:p>
             <a:fld id="{109C872D-39A9-4065-8BF3-6A613116E2A1}" type="slidenum">
               <a:rPr lang="ko-KR" altLang="en-US" smtClean="0"/>
-              <a:t>44</a:t>
+              <a:t>45</a:t>
             </a:fld>
             <a:endParaRPr lang="ko-KR" altLang="en-US"/>
           </a:p>
@@ -36744,7 +37103,7 @@
             </a:r>
             <a:r>
               <a:rPr lang="ko-KR" altLang="en-US" sz="4000" b="1" i="0" spc="150" dirty="0"/>
-              <a:t>석탄산업의 혁신과 청정 석탄기술</a:t>
+              <a:t>청정 석탄기술</a:t>
             </a:r>
             <a:endParaRPr lang="ko-KR" altLang="en-US" sz="3600" i="0" spc="150" dirty="0"/>
           </a:p>
@@ -36763,7 +37122,1037 @@
 </p:sld>
 </file>
 
-<file path=ppt/slides/slide45.xml><?xml version="1.0" encoding="utf-8"?>
+<file path=ppt/slides/slide46.xml><?xml version="1.0" encoding="utf-8"?>
+<p:sld xmlns:a="http://schemas.openxmlformats.org/drawingml/2006/main" xmlns:r="http://schemas.openxmlformats.org/officeDocument/2006/relationships" xmlns:p="http://schemas.openxmlformats.org/presentationml/2006/main">
+  <p:cSld>
+    <p:spTree>
+      <p:nvGrpSpPr>
+        <p:cNvPr id="1" name="">
+          <a:extLst>
+            <a:ext uri="{FF2B5EF4-FFF2-40B4-BE49-F238E27FC236}">
+              <a16:creationId xmlns:a16="http://schemas.microsoft.com/office/drawing/2014/main" id="{28FB9157-59D8-5BEB-F154-C1B829A9E1D4}"/>
+            </a:ext>
+          </a:extLst>
+        </p:cNvPr>
+        <p:cNvGrpSpPr/>
+        <p:nvPr/>
+      </p:nvGrpSpPr>
+      <p:grpSpPr>
+        <a:xfrm>
+          <a:off x="0" y="0"/>
+          <a:ext cx="0" cy="0"/>
+          <a:chOff x="0" y="0"/>
+          <a:chExt cx="0" cy="0"/>
+        </a:xfrm>
+      </p:grpSpPr>
+      <p:sp>
+        <p:nvSpPr>
+          <p:cNvPr id="2" name="제목 1">
+            <a:extLst>
+              <a:ext uri="{FF2B5EF4-FFF2-40B4-BE49-F238E27FC236}">
+                <a16:creationId xmlns:a16="http://schemas.microsoft.com/office/drawing/2014/main" id="{327A51B3-6FB5-4640-CD8E-98CEAF776AE8}"/>
+              </a:ext>
+            </a:extLst>
+          </p:cNvPr>
+          <p:cNvSpPr>
+            <a:spLocks noGrp="1"/>
+          </p:cNvSpPr>
+          <p:nvPr>
+            <p:ph type="title"/>
+          </p:nvPr>
+        </p:nvSpPr>
+        <p:spPr/>
+        <p:txBody>
+          <a:bodyPr/>
+          <a:lstStyle/>
+          <a:p>
+            <a:r>
+              <a:rPr lang="ko-KR" altLang="en-US" dirty="0"/>
+              <a:t>청정 석탄기술</a:t>
+            </a:r>
+          </a:p>
+        </p:txBody>
+      </p:sp>
+      <p:sp>
+        <p:nvSpPr>
+          <p:cNvPr id="4" name="슬라이드 번호 개체 틀 3">
+            <a:extLst>
+              <a:ext uri="{FF2B5EF4-FFF2-40B4-BE49-F238E27FC236}">
+                <a16:creationId xmlns:a16="http://schemas.microsoft.com/office/drawing/2014/main" id="{C340C0E2-4A6E-2496-BE6E-F9B8EA8D5069}"/>
+              </a:ext>
+            </a:extLst>
+          </p:cNvPr>
+          <p:cNvSpPr>
+            <a:spLocks noGrp="1"/>
+          </p:cNvSpPr>
+          <p:nvPr>
+            <p:ph type="sldNum" sz="quarter" idx="12"/>
+          </p:nvPr>
+        </p:nvSpPr>
+        <p:spPr/>
+        <p:txBody>
+          <a:bodyPr/>
+          <a:lstStyle/>
+          <a:p>
+            <a:fld id="{109C872D-39A9-4065-8BF3-6A613116E2A1}" type="slidenum">
+              <a:rPr lang="ko-KR" altLang="en-US" smtClean="0"/>
+              <a:t>46</a:t>
+            </a:fld>
+            <a:endParaRPr lang="ko-KR" altLang="en-US"/>
+          </a:p>
+        </p:txBody>
+      </p:sp>
+      <p:sp>
+        <p:nvSpPr>
+          <p:cNvPr id="6" name="TextBox 5">
+            <a:extLst>
+              <a:ext uri="{FF2B5EF4-FFF2-40B4-BE49-F238E27FC236}">
+                <a16:creationId xmlns:a16="http://schemas.microsoft.com/office/drawing/2014/main" id="{95A59A97-D98A-434E-33E2-8F34F74DAF98}"/>
+              </a:ext>
+            </a:extLst>
+          </p:cNvPr>
+          <p:cNvSpPr txBox="1"/>
+          <p:nvPr/>
+        </p:nvSpPr>
+        <p:spPr>
+          <a:xfrm>
+            <a:off x="288790" y="958844"/>
+            <a:ext cx="11118453" cy="4846007"/>
+          </a:xfrm>
+          <a:prstGeom prst="rect">
+            <a:avLst/>
+          </a:prstGeom>
+          <a:noFill/>
+        </p:spPr>
+        <p:txBody>
+          <a:bodyPr wrap="square" rtlCol="0" anchor="t">
+            <a:spAutoFit/>
+          </a:bodyPr>
+          <a:lstStyle/>
+          <a:p>
+            <a:pPr marL="377825" indent="-285750">
+              <a:lnSpc>
+                <a:spcPct val="150000"/>
+              </a:lnSpc>
+              <a:buFont typeface="Arial" panose="020B0604020202020204" pitchFamily="34" charset="0"/>
+              <a:buChar char="•"/>
+            </a:pPr>
+            <a:r>
+              <a:rPr lang="ko-KR" altLang="en-US" sz="1600" dirty="0"/>
+              <a:t>전통적인 석탄 연소에 따른 환경적 영향을 완화 하고자 다양한 청정 석탄 기술이 개발되고 있다</a:t>
+            </a:r>
+            <a:r>
+              <a:rPr lang="en-US" altLang="ko-KR" sz="1600" dirty="0"/>
+              <a:t>.</a:t>
+            </a:r>
+          </a:p>
+          <a:p>
+            <a:pPr marL="835025" lvl="1" indent="-285750">
+              <a:lnSpc>
+                <a:spcPct val="150000"/>
+              </a:lnSpc>
+              <a:buFont typeface="Wingdings" panose="05000000000000000000" pitchFamily="2" charset="2"/>
+              <a:buChar char="ü"/>
+            </a:pPr>
+            <a:r>
+              <a:rPr lang="ko-KR" altLang="en-US" sz="1600" dirty="0"/>
+              <a:t>초초임계압 발전</a:t>
+            </a:r>
+            <a:r>
+              <a:rPr lang="en-US" altLang="ko-KR" sz="1600" dirty="0"/>
+              <a:t> (USC, Ultra-Supercritical), </a:t>
+            </a:r>
+            <a:r>
+              <a:rPr lang="ko-KR" altLang="en-US" sz="1600" dirty="0"/>
+              <a:t>석탄가스화 복합발전</a:t>
+            </a:r>
+            <a:r>
+              <a:rPr lang="en-US" altLang="ko-KR" sz="1600" dirty="0"/>
+              <a:t> (IGCC: Integrated Gasification Combined Cycle), </a:t>
+            </a:r>
+            <a:r>
+              <a:rPr lang="ko-KR" altLang="en-US" sz="1600" dirty="0" err="1"/>
+              <a:t>탄소포집저장</a:t>
+            </a:r>
+            <a:r>
+              <a:rPr lang="en-US" altLang="ko-KR" sz="1600" dirty="0"/>
+              <a:t> (CCS: Carbon Capture and Storage) </a:t>
+            </a:r>
+            <a:r>
+              <a:rPr lang="ko-KR" altLang="en-US" sz="1600" dirty="0"/>
+              <a:t>기술이 가장 널리 주목 받고 있다</a:t>
+            </a:r>
+            <a:r>
+              <a:rPr lang="en-US" altLang="ko-KR" sz="1600" dirty="0"/>
+              <a:t>.</a:t>
+            </a:r>
+          </a:p>
+          <a:p>
+            <a:pPr marL="835025" lvl="1" indent="-285750">
+              <a:lnSpc>
+                <a:spcPct val="150000"/>
+              </a:lnSpc>
+              <a:buFont typeface="Wingdings" panose="05000000000000000000" pitchFamily="2" charset="2"/>
+              <a:buChar char="ü"/>
+            </a:pPr>
+            <a:r>
+              <a:rPr lang="ko-KR" altLang="en-US" sz="1600" dirty="0"/>
+              <a:t>이러한 기술들은 석탄을 보다 효율적이고 친환경적으로 활용하기 위한 방안으로 제시되어 왔으며</a:t>
+            </a:r>
+            <a:r>
+              <a:rPr lang="en-US" altLang="ko-KR" sz="1600" dirty="0"/>
+              <a:t>, </a:t>
+            </a:r>
+            <a:r>
+              <a:rPr lang="ko-KR" altLang="en-US" sz="1600" dirty="0"/>
+              <a:t>일부 국가는 실제 발전소에 적용하여 상용화하거나 실증단계에 진입한 사례도 있다</a:t>
+            </a:r>
+            <a:r>
+              <a:rPr lang="en-US" altLang="ko-KR" sz="1600" dirty="0"/>
+              <a:t>.</a:t>
+            </a:r>
+          </a:p>
+          <a:p>
+            <a:pPr marL="835025" lvl="1" indent="-285750">
+              <a:lnSpc>
+                <a:spcPct val="150000"/>
+              </a:lnSpc>
+              <a:buFont typeface="Wingdings" panose="05000000000000000000" pitchFamily="2" charset="2"/>
+              <a:buChar char="ü"/>
+            </a:pPr>
+            <a:endParaRPr lang="en-US" altLang="ko-KR" sz="1600" dirty="0"/>
+          </a:p>
+          <a:p>
+            <a:pPr marL="377825" indent="-285750">
+              <a:lnSpc>
+                <a:spcPct val="150000"/>
+              </a:lnSpc>
+              <a:buFont typeface="Arial" panose="020B0604020202020204" pitchFamily="34" charset="0"/>
+              <a:buChar char="•"/>
+            </a:pPr>
+            <a:r>
+              <a:rPr lang="ko-KR" altLang="en-US" sz="1600" dirty="0"/>
+              <a:t>초초임계압 발전 기술은 물의 임계점인 </a:t>
+            </a:r>
+            <a:r>
+              <a:rPr lang="en-US" altLang="ko-KR" sz="1600" dirty="0"/>
+              <a:t>374℃</a:t>
+            </a:r>
+            <a:r>
+              <a:rPr lang="ko-KR" altLang="en-US" sz="1600" dirty="0"/>
+              <a:t>와 </a:t>
+            </a:r>
+            <a:r>
+              <a:rPr lang="en-US" altLang="ko-KR" sz="1600" dirty="0"/>
+              <a:t>22.1MPa</a:t>
+            </a:r>
+            <a:r>
+              <a:rPr lang="ko-KR" altLang="en-US" sz="1600" dirty="0"/>
+              <a:t>를 초과하는 고온</a:t>
+            </a:r>
+            <a:r>
+              <a:rPr lang="en-US" altLang="ko-KR" sz="1600" dirty="0"/>
+              <a:t>·</a:t>
+            </a:r>
+            <a:r>
+              <a:rPr lang="ko-KR" altLang="en-US" sz="1600" dirty="0"/>
+              <a:t>고압 조건에서 작동하여 증기터빈의 효율을 극대화함으로써 기존 석탄 발전 대비 열효율을 약 </a:t>
+            </a:r>
+            <a:r>
+              <a:rPr lang="en-US" altLang="ko-KR" sz="1600" dirty="0"/>
+              <a:t>10~15%</a:t>
+            </a:r>
+            <a:r>
+              <a:rPr lang="ko-KR" altLang="en-US" sz="1600" dirty="0"/>
+              <a:t>까지 향상시킬 수 있으며</a:t>
+            </a:r>
+            <a:r>
+              <a:rPr lang="en-US" altLang="ko-KR" sz="1600" dirty="0"/>
+              <a:t>, </a:t>
+            </a:r>
+            <a:r>
+              <a:rPr lang="ko-KR" altLang="en-US" sz="1600" dirty="0"/>
+              <a:t>이에 따라 이산화탄소 배출량도 동일한 전력 생산 기준에서 상당 부분 저감될 수 있다</a:t>
+            </a:r>
+            <a:r>
+              <a:rPr lang="en-US" altLang="ko-KR" sz="1600" dirty="0"/>
+              <a:t>.</a:t>
+            </a:r>
+          </a:p>
+          <a:p>
+            <a:pPr marL="835025" lvl="1" indent="-285750">
+              <a:lnSpc>
+                <a:spcPct val="150000"/>
+              </a:lnSpc>
+              <a:buFont typeface="Wingdings" panose="05000000000000000000" pitchFamily="2" charset="2"/>
+              <a:buChar char="ü"/>
+            </a:pPr>
+            <a:r>
+              <a:rPr lang="ko-KR" altLang="en-US" sz="1600" dirty="0"/>
+              <a:t>한국</a:t>
+            </a:r>
+            <a:r>
+              <a:rPr lang="en-US" altLang="ko-KR" sz="1600" dirty="0"/>
+              <a:t>, </a:t>
+            </a:r>
+            <a:r>
+              <a:rPr lang="ko-KR" altLang="en-US" sz="1600" dirty="0"/>
+              <a:t>일본</a:t>
+            </a:r>
+            <a:r>
+              <a:rPr lang="en-US" altLang="ko-KR" sz="1600" dirty="0"/>
+              <a:t>, </a:t>
+            </a:r>
+            <a:r>
+              <a:rPr lang="ko-KR" altLang="en-US" sz="1600" dirty="0"/>
+              <a:t>독일 등의 국가에서는 이미 </a:t>
+            </a:r>
+            <a:r>
+              <a:rPr lang="en-US" altLang="ko-KR" sz="1600" dirty="0"/>
+              <a:t>USC </a:t>
+            </a:r>
+            <a:r>
+              <a:rPr lang="ko-KR" altLang="en-US" sz="1600" dirty="0"/>
+              <a:t>기술을 상용화하여 발전소에 적용하고 있으며</a:t>
+            </a:r>
+            <a:r>
+              <a:rPr lang="en-US" altLang="ko-KR" sz="1600" dirty="0"/>
+              <a:t>, </a:t>
+            </a:r>
+            <a:r>
+              <a:rPr lang="ko-KR" altLang="en-US" sz="1600" dirty="0"/>
+              <a:t>기술 성숙도도 비교적 높은 수준으로 평가받고 있다</a:t>
+            </a:r>
+            <a:r>
+              <a:rPr lang="en-US" altLang="ko-KR" sz="1600" dirty="0"/>
+              <a:t>.</a:t>
+            </a:r>
+          </a:p>
+          <a:p>
+            <a:pPr marL="835025" lvl="1" indent="-285750">
+              <a:lnSpc>
+                <a:spcPct val="150000"/>
+              </a:lnSpc>
+              <a:buFont typeface="Wingdings" panose="05000000000000000000" pitchFamily="2" charset="2"/>
+              <a:buChar char="ü"/>
+            </a:pPr>
+            <a:r>
+              <a:rPr lang="ko-KR" altLang="en-US" sz="1600" dirty="0"/>
+              <a:t>그러나 여전히 석탄을 주연료로 한다는 점에서 탄소중립 목표 달성에는 구조적인 한계가 있고</a:t>
+            </a:r>
+            <a:r>
+              <a:rPr lang="en-US" altLang="ko-KR" sz="1600" dirty="0"/>
+              <a:t>, </a:t>
+            </a:r>
+            <a:r>
+              <a:rPr lang="ko-KR" altLang="en-US" sz="1600" dirty="0"/>
+              <a:t>기후변화 대응 전략과도 거리가 있다</a:t>
+            </a:r>
+            <a:r>
+              <a:rPr lang="en-US" altLang="ko-KR" sz="1600" dirty="0"/>
+              <a:t>.</a:t>
+            </a:r>
+          </a:p>
+        </p:txBody>
+      </p:sp>
+    </p:spTree>
+    <p:extLst>
+      <p:ext uri="{BB962C8B-B14F-4D97-AF65-F5344CB8AC3E}">
+        <p14:creationId xmlns:p14="http://schemas.microsoft.com/office/powerpoint/2010/main" val="1953103848"/>
+      </p:ext>
+    </p:extLst>
+  </p:cSld>
+  <p:clrMapOvr>
+    <a:masterClrMapping/>
+  </p:clrMapOvr>
+</p:sld>
+</file>
+
+<file path=ppt/slides/slide47.xml><?xml version="1.0" encoding="utf-8"?>
+<p:sld xmlns:a="http://schemas.openxmlformats.org/drawingml/2006/main" xmlns:r="http://schemas.openxmlformats.org/officeDocument/2006/relationships" xmlns:p="http://schemas.openxmlformats.org/presentationml/2006/main">
+  <p:cSld>
+    <p:spTree>
+      <p:nvGrpSpPr>
+        <p:cNvPr id="1" name="">
+          <a:extLst>
+            <a:ext uri="{FF2B5EF4-FFF2-40B4-BE49-F238E27FC236}">
+              <a16:creationId xmlns:a16="http://schemas.microsoft.com/office/drawing/2014/main" id="{B97B2A06-EBCC-693B-D736-E46231475B93}"/>
+            </a:ext>
+          </a:extLst>
+        </p:cNvPr>
+        <p:cNvGrpSpPr/>
+        <p:nvPr/>
+      </p:nvGrpSpPr>
+      <p:grpSpPr>
+        <a:xfrm>
+          <a:off x="0" y="0"/>
+          <a:ext cx="0" cy="0"/>
+          <a:chOff x="0" y="0"/>
+          <a:chExt cx="0" cy="0"/>
+        </a:xfrm>
+      </p:grpSpPr>
+      <p:sp>
+        <p:nvSpPr>
+          <p:cNvPr id="2" name="제목 1">
+            <a:extLst>
+              <a:ext uri="{FF2B5EF4-FFF2-40B4-BE49-F238E27FC236}">
+                <a16:creationId xmlns:a16="http://schemas.microsoft.com/office/drawing/2014/main" id="{18EEA1D4-2D13-E0D0-059B-4981719E5DDB}"/>
+              </a:ext>
+            </a:extLst>
+          </p:cNvPr>
+          <p:cNvSpPr>
+            <a:spLocks noGrp="1"/>
+          </p:cNvSpPr>
+          <p:nvPr>
+            <p:ph type="title"/>
+          </p:nvPr>
+        </p:nvSpPr>
+        <p:spPr/>
+        <p:txBody>
+          <a:bodyPr/>
+          <a:lstStyle/>
+          <a:p>
+            <a:r>
+              <a:rPr lang="ko-KR" altLang="en-US" dirty="0"/>
+              <a:t>청정 석탄기술</a:t>
+            </a:r>
+          </a:p>
+        </p:txBody>
+      </p:sp>
+      <p:sp>
+        <p:nvSpPr>
+          <p:cNvPr id="4" name="슬라이드 번호 개체 틀 3">
+            <a:extLst>
+              <a:ext uri="{FF2B5EF4-FFF2-40B4-BE49-F238E27FC236}">
+                <a16:creationId xmlns:a16="http://schemas.microsoft.com/office/drawing/2014/main" id="{6D810118-6AE9-AB3B-8F6E-132032A60665}"/>
+              </a:ext>
+            </a:extLst>
+          </p:cNvPr>
+          <p:cNvSpPr>
+            <a:spLocks noGrp="1"/>
+          </p:cNvSpPr>
+          <p:nvPr>
+            <p:ph type="sldNum" sz="quarter" idx="12"/>
+          </p:nvPr>
+        </p:nvSpPr>
+        <p:spPr/>
+        <p:txBody>
+          <a:bodyPr/>
+          <a:lstStyle/>
+          <a:p>
+            <a:fld id="{109C872D-39A9-4065-8BF3-6A613116E2A1}" type="slidenum">
+              <a:rPr lang="ko-KR" altLang="en-US" smtClean="0"/>
+              <a:t>47</a:t>
+            </a:fld>
+            <a:endParaRPr lang="ko-KR" altLang="en-US"/>
+          </a:p>
+        </p:txBody>
+      </p:sp>
+      <p:sp>
+        <p:nvSpPr>
+          <p:cNvPr id="6" name="TextBox 5">
+            <a:extLst>
+              <a:ext uri="{FF2B5EF4-FFF2-40B4-BE49-F238E27FC236}">
+                <a16:creationId xmlns:a16="http://schemas.microsoft.com/office/drawing/2014/main" id="{56DEF6FC-FAB0-6EE9-2D0C-2AA27A730C5B}"/>
+              </a:ext>
+            </a:extLst>
+          </p:cNvPr>
+          <p:cNvSpPr txBox="1"/>
+          <p:nvPr/>
+        </p:nvSpPr>
+        <p:spPr>
+          <a:xfrm>
+            <a:off x="288790" y="958844"/>
+            <a:ext cx="11118453" cy="4476675"/>
+          </a:xfrm>
+          <a:prstGeom prst="rect">
+            <a:avLst/>
+          </a:prstGeom>
+          <a:noFill/>
+        </p:spPr>
+        <p:txBody>
+          <a:bodyPr wrap="square" rtlCol="0" anchor="t">
+            <a:spAutoFit/>
+          </a:bodyPr>
+          <a:lstStyle/>
+          <a:p>
+            <a:pPr marL="377825" indent="-285750">
+              <a:lnSpc>
+                <a:spcPct val="150000"/>
+              </a:lnSpc>
+              <a:buFont typeface="Arial" panose="020B0604020202020204" pitchFamily="34" charset="0"/>
+              <a:buChar char="•"/>
+            </a:pPr>
+            <a:r>
+              <a:rPr lang="ko-KR" altLang="en-US" sz="1600" dirty="0"/>
+              <a:t>석탄가스화 복합발전 </a:t>
+            </a:r>
+            <a:r>
+              <a:rPr lang="en-US" altLang="ko-KR" sz="1600" dirty="0"/>
+              <a:t>(IGCC)</a:t>
+            </a:r>
+            <a:r>
+              <a:rPr lang="ko-KR" altLang="en-US" sz="1600" dirty="0"/>
+              <a:t>은 석탄을 직접 연소하는 대신 </a:t>
+            </a:r>
+            <a:r>
+              <a:rPr lang="ko-KR" altLang="en-US" sz="1600" dirty="0" err="1"/>
+              <a:t>고온에서</a:t>
+            </a:r>
+            <a:r>
+              <a:rPr lang="ko-KR" altLang="en-US" sz="1600" dirty="0"/>
+              <a:t> </a:t>
+            </a:r>
+            <a:r>
+              <a:rPr lang="ko-KR" altLang="en-US" sz="1600" dirty="0" err="1"/>
+              <a:t>가스화하여</a:t>
+            </a:r>
+            <a:r>
+              <a:rPr lang="ko-KR" altLang="en-US" sz="1600" dirty="0"/>
+              <a:t> 일산화탄소와 수소로 구성된 합성가스를 생산한 뒤 이를 연소하여 터빈을 구동하는 방식으로 작동한다</a:t>
+            </a:r>
+            <a:r>
+              <a:rPr lang="en-US" altLang="ko-KR" sz="1600" dirty="0"/>
+              <a:t>.</a:t>
+            </a:r>
+          </a:p>
+          <a:p>
+            <a:pPr marL="835025" lvl="1" indent="-285750">
+              <a:lnSpc>
+                <a:spcPct val="150000"/>
+              </a:lnSpc>
+              <a:buFont typeface="Wingdings" panose="05000000000000000000" pitchFamily="2" charset="2"/>
+              <a:buChar char="ü"/>
+            </a:pPr>
+            <a:r>
+              <a:rPr lang="ko-KR" altLang="en-US" sz="1600" dirty="0"/>
+              <a:t>오염물질을 연소 이전의 가스화 단계에서 제거하므로</a:t>
+            </a:r>
+            <a:r>
+              <a:rPr lang="en-US" altLang="ko-KR" sz="1600" dirty="0"/>
+              <a:t>,</a:t>
+            </a:r>
+            <a:r>
+              <a:rPr lang="ko-KR" altLang="en-US" sz="1600" dirty="0"/>
+              <a:t> 환경적 측면에서 상대적으로 우수한 기술로 평가된다</a:t>
+            </a:r>
+            <a:r>
+              <a:rPr lang="en-US" altLang="ko-KR" sz="1600" dirty="0"/>
+              <a:t>.</a:t>
+            </a:r>
+          </a:p>
+          <a:p>
+            <a:pPr marL="835025" lvl="1" indent="-285750">
+              <a:lnSpc>
+                <a:spcPct val="150000"/>
+              </a:lnSpc>
+              <a:buFont typeface="Wingdings" panose="05000000000000000000" pitchFamily="2" charset="2"/>
+              <a:buChar char="ü"/>
+            </a:pPr>
+            <a:r>
+              <a:rPr lang="ko-KR" altLang="en-US" sz="1600" dirty="0"/>
+              <a:t>그러나 설계 및 운전 시스템이 복잡하고</a:t>
+            </a:r>
+            <a:r>
+              <a:rPr lang="en-US" altLang="ko-KR" sz="1600" dirty="0"/>
+              <a:t>, </a:t>
+            </a:r>
+            <a:r>
+              <a:rPr lang="ko-KR" altLang="en-US" sz="1600" dirty="0"/>
+              <a:t>초기 투자비용이 기존 발전소 대비 </a:t>
+            </a:r>
+            <a:r>
+              <a:rPr lang="en-US" altLang="ko-KR" sz="1600" dirty="0"/>
+              <a:t>30~50%</a:t>
+            </a:r>
+            <a:r>
+              <a:rPr lang="ko-KR" altLang="en-US" sz="1600" dirty="0"/>
+              <a:t>이상 높고</a:t>
+            </a:r>
+            <a:r>
+              <a:rPr lang="en-US" altLang="ko-KR" sz="1600" dirty="0"/>
+              <a:t>, </a:t>
+            </a:r>
+            <a:r>
+              <a:rPr lang="ko-KR" altLang="en-US" sz="1600" dirty="0"/>
+              <a:t>운영의 안정성 확보가 쉽지 않다는 점에서 경제적 확장성이 낮다는 평가를 받고 있다</a:t>
+            </a:r>
+            <a:r>
+              <a:rPr lang="en-US" altLang="ko-KR" sz="1600" dirty="0"/>
+              <a:t>.</a:t>
+            </a:r>
+          </a:p>
+          <a:p>
+            <a:pPr marL="377825" indent="-285750">
+              <a:lnSpc>
+                <a:spcPct val="150000"/>
+              </a:lnSpc>
+              <a:buFont typeface="Arial" panose="020B0604020202020204" pitchFamily="34" charset="0"/>
+              <a:buChar char="•"/>
+            </a:pPr>
+            <a:endParaRPr lang="en-US" altLang="ko-KR" sz="1600" dirty="0"/>
+          </a:p>
+          <a:p>
+            <a:pPr marL="377825" indent="-285750">
+              <a:lnSpc>
+                <a:spcPct val="150000"/>
+              </a:lnSpc>
+              <a:buFont typeface="Arial" panose="020B0604020202020204" pitchFamily="34" charset="0"/>
+              <a:buChar char="•"/>
+            </a:pPr>
+            <a:r>
+              <a:rPr lang="ko-KR" altLang="en-US" sz="1600" dirty="0" err="1"/>
+              <a:t>탄소포집저장</a:t>
+            </a:r>
+            <a:r>
+              <a:rPr lang="ko-KR" altLang="en-US" sz="1600" dirty="0"/>
+              <a:t> </a:t>
+            </a:r>
+            <a:r>
+              <a:rPr lang="en-US" altLang="ko-KR" sz="1600" dirty="0"/>
+              <a:t>(CCS) </a:t>
+            </a:r>
+            <a:r>
+              <a:rPr lang="ko-KR" altLang="en-US" sz="1600" dirty="0"/>
+              <a:t>기술은 석탄 연소 과정에서 배출되는 이산화탄소를 </a:t>
+            </a:r>
+            <a:r>
+              <a:rPr lang="ko-KR" altLang="en-US" sz="1600" dirty="0" err="1"/>
+              <a:t>포집하여</a:t>
+            </a:r>
+            <a:r>
+              <a:rPr lang="ko-KR" altLang="en-US" sz="1600" dirty="0"/>
+              <a:t> 압축한 뒤 지하 지질 구조에 영구 저장함으로써 대기 중 배출을 차단하는 기술로</a:t>
+            </a:r>
+            <a:r>
+              <a:rPr lang="en-US" altLang="ko-KR" sz="1600" dirty="0"/>
+              <a:t>, </a:t>
+            </a:r>
+            <a:r>
+              <a:rPr lang="ko-KR" altLang="en-US" sz="1600" dirty="0"/>
+              <a:t>이론적으로는 발전소에서 배출하는 이산화탄소의 </a:t>
+            </a:r>
+            <a:r>
+              <a:rPr lang="en-US" altLang="ko-KR" sz="1600" dirty="0"/>
+              <a:t>90% </a:t>
+            </a:r>
+            <a:r>
+              <a:rPr lang="ko-KR" altLang="en-US" sz="1600" dirty="0"/>
+              <a:t>이상을 제거할 수 있는 고효율 기술이다</a:t>
+            </a:r>
+            <a:r>
+              <a:rPr lang="en-US" altLang="ko-KR" sz="1600" dirty="0"/>
+              <a:t>.</a:t>
+            </a:r>
+          </a:p>
+          <a:p>
+            <a:pPr marL="835025" lvl="1" indent="-285750">
+              <a:lnSpc>
+                <a:spcPct val="150000"/>
+              </a:lnSpc>
+              <a:buFont typeface="Wingdings" panose="05000000000000000000" pitchFamily="2" charset="2"/>
+              <a:buChar char="ü"/>
+            </a:pPr>
+            <a:r>
+              <a:rPr lang="ko-KR" altLang="en-US" sz="1600" dirty="0"/>
+              <a:t>높은 설비비와 운영비</a:t>
+            </a:r>
+            <a:r>
+              <a:rPr lang="en-US" altLang="ko-KR" sz="1600" dirty="0"/>
+              <a:t>, </a:t>
+            </a:r>
+            <a:r>
+              <a:rPr lang="ko-KR" altLang="en-US" sz="1600" dirty="0" err="1"/>
+              <a:t>포집한</a:t>
+            </a:r>
+            <a:r>
+              <a:rPr lang="ko-KR" altLang="en-US" sz="1600" dirty="0"/>
+              <a:t> 이산화탄소의 운송 및 저장에 따른 기술적</a:t>
+            </a:r>
+            <a:r>
+              <a:rPr lang="en-US" altLang="ko-KR" sz="1600" dirty="0"/>
+              <a:t>·</a:t>
+            </a:r>
+            <a:r>
+              <a:rPr lang="ko-KR" altLang="en-US" sz="1600" dirty="0"/>
+              <a:t>지질학적 리스크로 인해 경제성 확보에 큰 어려움이 있다</a:t>
+            </a:r>
+            <a:r>
+              <a:rPr lang="en-US" altLang="ko-KR" sz="1600" dirty="0"/>
+              <a:t>.</a:t>
+            </a:r>
+          </a:p>
+          <a:p>
+            <a:pPr marL="835025" lvl="1" indent="-285750">
+              <a:lnSpc>
+                <a:spcPct val="150000"/>
+              </a:lnSpc>
+              <a:buFont typeface="Wingdings" panose="05000000000000000000" pitchFamily="2" charset="2"/>
+              <a:buChar char="ü"/>
+            </a:pPr>
+            <a:r>
+              <a:rPr lang="ko-KR" altLang="en-US" sz="1600" dirty="0"/>
+              <a:t>전통 석탄화력발전소에 적용하는 경우 발전단가가 </a:t>
+            </a:r>
+            <a:r>
+              <a:rPr lang="en-US" altLang="ko-KR" sz="1600" dirty="0"/>
+              <a:t>50% </a:t>
+            </a:r>
+            <a:r>
+              <a:rPr lang="ko-KR" altLang="en-US" sz="1600" dirty="0"/>
+              <a:t>이상 증가할 수 있는 것으로 분석된다</a:t>
+            </a:r>
+            <a:r>
+              <a:rPr lang="en-US" altLang="ko-KR" sz="1600" dirty="0"/>
+              <a:t>.</a:t>
+            </a:r>
+          </a:p>
+        </p:txBody>
+      </p:sp>
+    </p:spTree>
+    <p:extLst>
+      <p:ext uri="{BB962C8B-B14F-4D97-AF65-F5344CB8AC3E}">
+        <p14:creationId xmlns:p14="http://schemas.microsoft.com/office/powerpoint/2010/main" val="1365869301"/>
+      </p:ext>
+    </p:extLst>
+  </p:cSld>
+  <p:clrMapOvr>
+    <a:masterClrMapping/>
+  </p:clrMapOvr>
+</p:sld>
+</file>
+
+<file path=ppt/slides/slide48.xml><?xml version="1.0" encoding="utf-8"?>
+<p:sld xmlns:a="http://schemas.openxmlformats.org/drawingml/2006/main" xmlns:r="http://schemas.openxmlformats.org/officeDocument/2006/relationships" xmlns:p="http://schemas.openxmlformats.org/presentationml/2006/main">
+  <p:cSld>
+    <p:spTree>
+      <p:nvGrpSpPr>
+        <p:cNvPr id="1" name="">
+          <a:extLst>
+            <a:ext uri="{FF2B5EF4-FFF2-40B4-BE49-F238E27FC236}">
+              <a16:creationId xmlns:a16="http://schemas.microsoft.com/office/drawing/2014/main" id="{6BF82891-EEDE-D309-E8C3-7ADBDDDC5C91}"/>
+            </a:ext>
+          </a:extLst>
+        </p:cNvPr>
+        <p:cNvGrpSpPr/>
+        <p:nvPr/>
+      </p:nvGrpSpPr>
+      <p:grpSpPr>
+        <a:xfrm>
+          <a:off x="0" y="0"/>
+          <a:ext cx="0" cy="0"/>
+          <a:chOff x="0" y="0"/>
+          <a:chExt cx="0" cy="0"/>
+        </a:xfrm>
+      </p:grpSpPr>
+      <p:sp>
+        <p:nvSpPr>
+          <p:cNvPr id="2" name="제목 1">
+            <a:extLst>
+              <a:ext uri="{FF2B5EF4-FFF2-40B4-BE49-F238E27FC236}">
+                <a16:creationId xmlns:a16="http://schemas.microsoft.com/office/drawing/2014/main" id="{235095BA-A911-18C5-4783-FA5D832D1C8C}"/>
+              </a:ext>
+            </a:extLst>
+          </p:cNvPr>
+          <p:cNvSpPr>
+            <a:spLocks noGrp="1"/>
+          </p:cNvSpPr>
+          <p:nvPr>
+            <p:ph type="title"/>
+          </p:nvPr>
+        </p:nvSpPr>
+        <p:spPr/>
+        <p:txBody>
+          <a:bodyPr/>
+          <a:lstStyle/>
+          <a:p>
+            <a:r>
+              <a:rPr lang="ko-KR" altLang="en-US" dirty="0"/>
+              <a:t>청정 석탄기술</a:t>
+            </a:r>
+          </a:p>
+        </p:txBody>
+      </p:sp>
+      <p:sp>
+        <p:nvSpPr>
+          <p:cNvPr id="4" name="슬라이드 번호 개체 틀 3">
+            <a:extLst>
+              <a:ext uri="{FF2B5EF4-FFF2-40B4-BE49-F238E27FC236}">
+                <a16:creationId xmlns:a16="http://schemas.microsoft.com/office/drawing/2014/main" id="{00849E8E-A614-768A-1A2B-650A2C6CD4E9}"/>
+              </a:ext>
+            </a:extLst>
+          </p:cNvPr>
+          <p:cNvSpPr>
+            <a:spLocks noGrp="1"/>
+          </p:cNvSpPr>
+          <p:nvPr>
+            <p:ph type="sldNum" sz="quarter" idx="12"/>
+          </p:nvPr>
+        </p:nvSpPr>
+        <p:spPr/>
+        <p:txBody>
+          <a:bodyPr/>
+          <a:lstStyle/>
+          <a:p>
+            <a:fld id="{109C872D-39A9-4065-8BF3-6A613116E2A1}" type="slidenum">
+              <a:rPr lang="ko-KR" altLang="en-US" smtClean="0"/>
+              <a:t>48</a:t>
+            </a:fld>
+            <a:endParaRPr lang="ko-KR" altLang="en-US"/>
+          </a:p>
+        </p:txBody>
+      </p:sp>
+      <p:sp>
+        <p:nvSpPr>
+          <p:cNvPr id="6" name="TextBox 5">
+            <a:extLst>
+              <a:ext uri="{FF2B5EF4-FFF2-40B4-BE49-F238E27FC236}">
+                <a16:creationId xmlns:a16="http://schemas.microsoft.com/office/drawing/2014/main" id="{33893A53-418E-E89D-75BE-8C39114E44D3}"/>
+              </a:ext>
+            </a:extLst>
+          </p:cNvPr>
+          <p:cNvSpPr txBox="1"/>
+          <p:nvPr/>
+        </p:nvSpPr>
+        <p:spPr>
+          <a:xfrm>
+            <a:off x="288790" y="958844"/>
+            <a:ext cx="11118453" cy="4476675"/>
+          </a:xfrm>
+          <a:prstGeom prst="rect">
+            <a:avLst/>
+          </a:prstGeom>
+          <a:noFill/>
+        </p:spPr>
+        <p:txBody>
+          <a:bodyPr wrap="square" rtlCol="0" anchor="t">
+            <a:spAutoFit/>
+          </a:bodyPr>
+          <a:lstStyle/>
+          <a:p>
+            <a:pPr marL="377825" indent="-285750">
+              <a:lnSpc>
+                <a:spcPct val="150000"/>
+              </a:lnSpc>
+              <a:buFont typeface="Arial" panose="020B0604020202020204" pitchFamily="34" charset="0"/>
+              <a:buChar char="•"/>
+            </a:pPr>
+            <a:r>
+              <a:rPr lang="ko-KR" altLang="en-US" sz="1600" dirty="0"/>
+              <a:t>앞서 설명한 기술들은 에너지 효율성 제고와 온실가스 감축 측면에서 분명한 가능성을 보이고 있으나 경제성과 사회적 수용성의 측면에서는 여전히 많은 도전 과제를 안고 있다</a:t>
+            </a:r>
+            <a:r>
+              <a:rPr lang="en-US" altLang="ko-KR" sz="1600" dirty="0"/>
+              <a:t>.</a:t>
+            </a:r>
+          </a:p>
+          <a:p>
+            <a:pPr marL="835025" lvl="1" indent="-285750">
+              <a:lnSpc>
+                <a:spcPct val="150000"/>
+              </a:lnSpc>
+              <a:buFont typeface="Wingdings" panose="05000000000000000000" pitchFamily="2" charset="2"/>
+              <a:buChar char="ü"/>
+            </a:pPr>
+            <a:r>
+              <a:rPr lang="ko-KR" altLang="en-US" sz="1600" dirty="0"/>
+              <a:t>초초임계압 발전은 고온</a:t>
+            </a:r>
+            <a:r>
+              <a:rPr lang="en-US" altLang="ko-KR" sz="1600" dirty="0"/>
+              <a:t>·</a:t>
+            </a:r>
+            <a:r>
+              <a:rPr lang="ko-KR" altLang="en-US" sz="1600" dirty="0"/>
+              <a:t>고압을 견딜 수 있는 특수 소재와 복잡한 운전 기술이 요구되기 때문에 건설 및 유지관리 비용이 높아</a:t>
+            </a:r>
+            <a:r>
+              <a:rPr lang="en-US" altLang="ko-KR" sz="1600" dirty="0"/>
+              <a:t>, </a:t>
+            </a:r>
+            <a:r>
+              <a:rPr lang="ko-KR" altLang="en-US" sz="1600" dirty="0"/>
+              <a:t>천연가스 복합발전이나 태양광</a:t>
+            </a:r>
+            <a:r>
+              <a:rPr lang="en-US" altLang="ko-KR" sz="1600" dirty="0"/>
+              <a:t>·</a:t>
+            </a:r>
+            <a:r>
+              <a:rPr lang="ko-KR" altLang="en-US" sz="1600" dirty="0"/>
+              <a:t>풍력 등 재생에너지에 비해 상대적으로 낮은 시장 경쟁력을 보인다</a:t>
+            </a:r>
+            <a:r>
+              <a:rPr lang="en-US" altLang="ko-KR" sz="1600" dirty="0"/>
+              <a:t>.</a:t>
+            </a:r>
+          </a:p>
+          <a:p>
+            <a:pPr marL="835025" lvl="1" indent="-285750">
+              <a:lnSpc>
+                <a:spcPct val="150000"/>
+              </a:lnSpc>
+              <a:buFont typeface="Wingdings" panose="05000000000000000000" pitchFamily="2" charset="2"/>
+              <a:buChar char="ü"/>
+            </a:pPr>
+            <a:r>
+              <a:rPr lang="ko-KR" altLang="en-US" sz="1600" dirty="0"/>
+              <a:t>석탄가스화 복합발전은 이론적으로 이상적인 기술이나</a:t>
+            </a:r>
+            <a:r>
+              <a:rPr lang="en-US" altLang="ko-KR" sz="1600" dirty="0"/>
+              <a:t>, </a:t>
+            </a:r>
+            <a:r>
+              <a:rPr lang="ko-KR" altLang="en-US" sz="1600" dirty="0"/>
+              <a:t>공정의 복잡성과 수익성 부족으로 상업화에 어려움이 있다</a:t>
+            </a:r>
+            <a:r>
+              <a:rPr lang="en-US" altLang="ko-KR" sz="1600" dirty="0"/>
+              <a:t>.</a:t>
+            </a:r>
+          </a:p>
+          <a:p>
+            <a:pPr marL="835025" lvl="1" indent="-285750">
+              <a:lnSpc>
+                <a:spcPct val="150000"/>
+              </a:lnSpc>
+              <a:buFont typeface="Wingdings" panose="05000000000000000000" pitchFamily="2" charset="2"/>
+              <a:buChar char="ü"/>
+            </a:pPr>
+            <a:r>
+              <a:rPr lang="ko-KR" altLang="en-US" sz="1600" dirty="0" err="1"/>
+              <a:t>탄소포집저장</a:t>
+            </a:r>
+            <a:r>
+              <a:rPr lang="ko-KR" altLang="en-US" sz="1600" dirty="0"/>
+              <a:t> 기술 또한 정책적 지원 없이는 채택되기 어려운 수준의 경제성과 기술적 제약을 갖고 있다</a:t>
+            </a:r>
+            <a:r>
+              <a:rPr lang="en-US" altLang="ko-KR" sz="1600" dirty="0"/>
+              <a:t>.</a:t>
+            </a:r>
+          </a:p>
+          <a:p>
+            <a:pPr marL="835025" lvl="1" indent="-285750">
+              <a:lnSpc>
+                <a:spcPct val="150000"/>
+              </a:lnSpc>
+              <a:buFont typeface="Wingdings" panose="05000000000000000000" pitchFamily="2" charset="2"/>
+              <a:buChar char="ü"/>
+            </a:pPr>
+            <a:endParaRPr lang="en-US" altLang="ko-KR" sz="1600" dirty="0"/>
+          </a:p>
+          <a:p>
+            <a:pPr marL="377825" indent="-285750">
+              <a:lnSpc>
+                <a:spcPct val="150000"/>
+              </a:lnSpc>
+              <a:buFont typeface="Arial" panose="020B0604020202020204" pitchFamily="34" charset="0"/>
+              <a:buChar char="•"/>
+            </a:pPr>
+            <a:r>
+              <a:rPr lang="ko-KR" altLang="en-US" sz="1600" dirty="0"/>
+              <a:t>기술적</a:t>
+            </a:r>
+            <a:r>
+              <a:rPr lang="en-US" altLang="ko-KR" sz="1600" dirty="0"/>
+              <a:t>, </a:t>
+            </a:r>
+            <a:r>
+              <a:rPr lang="ko-KR" altLang="en-US" sz="1600" dirty="0"/>
+              <a:t>경제적 성숙도 외에도 정책</a:t>
+            </a:r>
+            <a:r>
+              <a:rPr lang="en-US" altLang="ko-KR" sz="1600" dirty="0"/>
+              <a:t>, </a:t>
+            </a:r>
+            <a:r>
+              <a:rPr lang="ko-KR" altLang="en-US" sz="1600" dirty="0"/>
+              <a:t>제도</a:t>
+            </a:r>
+            <a:r>
+              <a:rPr lang="en-US" altLang="ko-KR" sz="1600" dirty="0"/>
+              <a:t>, </a:t>
+            </a:r>
+            <a:r>
+              <a:rPr lang="ko-KR" altLang="en-US" sz="1600" dirty="0"/>
+              <a:t>사회 인식 등의 환경에 따라 기술의 확산 속도가 좌우 된다</a:t>
+            </a:r>
+            <a:r>
+              <a:rPr lang="en-US" altLang="ko-KR" sz="1600" dirty="0"/>
+              <a:t>.</a:t>
+            </a:r>
+          </a:p>
+          <a:p>
+            <a:pPr marL="835025" lvl="1" indent="-285750">
+              <a:lnSpc>
+                <a:spcPct val="150000"/>
+              </a:lnSpc>
+              <a:buFont typeface="Wingdings" panose="05000000000000000000" pitchFamily="2" charset="2"/>
+              <a:buChar char="ü"/>
+            </a:pPr>
+            <a:r>
+              <a:rPr lang="en-US" altLang="ko-KR" sz="1600" dirty="0"/>
+              <a:t>ESG </a:t>
+            </a:r>
+            <a:r>
+              <a:rPr lang="ko-KR" altLang="en-US" sz="1600" dirty="0"/>
+              <a:t>기준의 강화</a:t>
+            </a:r>
+            <a:r>
+              <a:rPr lang="en-US" altLang="ko-KR" sz="1600" dirty="0"/>
+              <a:t>, </a:t>
+            </a:r>
+            <a:r>
+              <a:rPr lang="ko-KR" altLang="en-US" sz="1600" dirty="0"/>
+              <a:t>금융기관의 </a:t>
+            </a:r>
+            <a:r>
+              <a:rPr lang="ko-KR" altLang="en-US" sz="1600" dirty="0" err="1"/>
+              <a:t>탈석탄</a:t>
+            </a:r>
+            <a:r>
+              <a:rPr lang="ko-KR" altLang="en-US" sz="1600" dirty="0"/>
+              <a:t> 선언</a:t>
+            </a:r>
+            <a:r>
+              <a:rPr lang="en-US" altLang="ko-KR" sz="1600" dirty="0"/>
+              <a:t>, </a:t>
+            </a:r>
+            <a:r>
+              <a:rPr lang="ko-KR" altLang="en-US" sz="1600" dirty="0"/>
+              <a:t>탄소중립을 명시한 국가들이 확산되면서 석탄을 기반으로 하는 기술에 대한 신규 투자는 정치적</a:t>
+            </a:r>
+            <a:r>
+              <a:rPr lang="en-US" altLang="ko-KR" sz="1600" dirty="0"/>
+              <a:t>, </a:t>
+            </a:r>
+            <a:r>
+              <a:rPr lang="ko-KR" altLang="en-US" sz="1600" dirty="0"/>
+              <a:t>사회적으로 부담이 커지고 있는 현실이다</a:t>
+            </a:r>
+            <a:r>
+              <a:rPr lang="en-US" altLang="ko-KR" sz="1600" dirty="0"/>
+              <a:t>.</a:t>
+            </a:r>
+          </a:p>
+        </p:txBody>
+      </p:sp>
+    </p:spTree>
+    <p:extLst>
+      <p:ext uri="{BB962C8B-B14F-4D97-AF65-F5344CB8AC3E}">
+        <p14:creationId xmlns:p14="http://schemas.microsoft.com/office/powerpoint/2010/main" val="1880865900"/>
+      </p:ext>
+    </p:extLst>
+  </p:cSld>
+  <p:clrMapOvr>
+    <a:masterClrMapping/>
+  </p:clrMapOvr>
+</p:sld>
+</file>
+
+<file path=ppt/slides/slide49.xml><?xml version="1.0" encoding="utf-8"?>
 <p:sld xmlns:a="http://schemas.openxmlformats.org/drawingml/2006/main" xmlns:r="http://schemas.openxmlformats.org/officeDocument/2006/relationships" xmlns:p="http://schemas.openxmlformats.org/presentationml/2006/main">
   <p:cSld>
     <p:spTree>
@@ -36846,7 +38235,7 @@
           <a:p>
             <a:fld id="{109C872D-39A9-4065-8BF3-6A613116E2A1}" type="slidenum">
               <a:rPr lang="ko-KR" altLang="en-US" smtClean="0"/>
-              <a:t>45</a:t>
+              <a:t>49</a:t>
             </a:fld>
             <a:endParaRPr lang="ko-KR" altLang="en-US"/>
           </a:p>
@@ -36906,7 +38295,7 @@
 </p:sld>
 </file>
 
-<file path=ppt/slides/slide46.xml><?xml version="1.0" encoding="utf-8"?>
+<file path=ppt/slides/slide5.xml><?xml version="1.0" encoding="utf-8"?>
 <p:sld xmlns:a="http://schemas.openxmlformats.org/drawingml/2006/main" xmlns:r="http://schemas.openxmlformats.org/officeDocument/2006/relationships" xmlns:p="http://schemas.openxmlformats.org/presentationml/2006/main">
   <p:cSld>
     <p:spTree>
@@ -36914,7 +38303,7 @@
         <p:cNvPr id="1" name="">
           <a:extLst>
             <a:ext uri="{FF2B5EF4-FFF2-40B4-BE49-F238E27FC236}">
-              <a16:creationId xmlns:a16="http://schemas.microsoft.com/office/drawing/2014/main" id="{58D1A724-FF5F-F795-8171-E14A2B4F16F8}"/>
+              <a16:creationId xmlns:a16="http://schemas.microsoft.com/office/drawing/2014/main" id="{397CA923-B4DD-A907-2D8B-D6044F6F5282}"/>
             </a:ext>
           </a:extLst>
         </p:cNvPr>
@@ -36929,49 +38318,40 @@
           <a:chExt cx="0" cy="0"/>
         </a:xfrm>
       </p:grpSpPr>
-      <p:pic>
-        <p:nvPicPr>
-          <p:cNvPr id="6" name="그림 5" descr="텍스트, 로고, 원, 폰트이(가) 표시된 사진&#10;&#10;AI 생성 콘텐츠는 정확하지 않을 수 있습니다.">
+      <p:sp>
+        <p:nvSpPr>
+          <p:cNvPr id="2" name="제목 1">
             <a:extLst>
               <a:ext uri="{FF2B5EF4-FFF2-40B4-BE49-F238E27FC236}">
-                <a16:creationId xmlns:a16="http://schemas.microsoft.com/office/drawing/2014/main" id="{BBB9BD40-31B0-CF75-80CC-4964C75E9B88}"/>
+                <a16:creationId xmlns:a16="http://schemas.microsoft.com/office/drawing/2014/main" id="{5AE1A0F4-CC65-8E27-4A59-54417250F3EB}"/>
               </a:ext>
             </a:extLst>
           </p:cNvPr>
-          <p:cNvPicPr>
-            <a:picLocks noChangeAspect="1"/>
-          </p:cNvPicPr>
-          <p:nvPr/>
-        </p:nvPicPr>
-        <p:blipFill>
-          <a:blip r:embed="rId2">
-            <a:alphaModFix amt="20000"/>
-            <a:extLst>
-              <a:ext uri="{28A0092B-C50C-407E-A947-70E740481C1C}">
-                <a14:useLocalDpi xmlns:a14="http://schemas.microsoft.com/office/drawing/2010/main" val="0"/>
-              </a:ext>
-            </a:extLst>
-          </a:blip>
-          <a:stretch>
-            <a:fillRect/>
-          </a:stretch>
-        </p:blipFill>
-        <p:spPr>
-          <a:xfrm>
-            <a:off x="4012070" y="1673061"/>
-            <a:ext cx="4167861" cy="4167861"/>
-          </a:xfrm>
-          <a:prstGeom prst="rect">
-            <a:avLst/>
-          </a:prstGeom>
-        </p:spPr>
-      </p:pic>
+          <p:cNvSpPr>
+            <a:spLocks noGrp="1"/>
+          </p:cNvSpPr>
+          <p:nvPr>
+            <p:ph type="title"/>
+          </p:nvPr>
+        </p:nvSpPr>
+        <p:spPr/>
+        <p:txBody>
+          <a:bodyPr/>
+          <a:lstStyle/>
+          <a:p>
+            <a:r>
+              <a:rPr lang="ko-KR" altLang="en-US" dirty="0"/>
+              <a:t>서론</a:t>
+            </a:r>
+          </a:p>
+        </p:txBody>
+      </p:sp>
       <p:sp>
         <p:nvSpPr>
           <p:cNvPr id="4" name="슬라이드 번호 개체 틀 3">
             <a:extLst>
               <a:ext uri="{FF2B5EF4-FFF2-40B4-BE49-F238E27FC236}">
-                <a16:creationId xmlns:a16="http://schemas.microsoft.com/office/drawing/2014/main" id="{D747C5E9-0275-EAE5-E692-6C80776F901A}"/>
+                <a16:creationId xmlns:a16="http://schemas.microsoft.com/office/drawing/2014/main" id="{2D05026A-C2F6-E1CD-95EA-4269B6F0A911}"/>
               </a:ext>
             </a:extLst>
           </p:cNvPr>
@@ -36989,7 +38369,7 @@
           <a:p>
             <a:fld id="{109C872D-39A9-4065-8BF3-6A613116E2A1}" type="slidenum">
               <a:rPr lang="ko-KR" altLang="en-US" smtClean="0"/>
-              <a:t>46</a:t>
+              <a:t>5</a:t>
             </a:fld>
             <a:endParaRPr lang="ko-KR" altLang="en-US"/>
           </a:p>
@@ -36997,10 +38377,331 @@
       </p:sp>
       <p:sp>
         <p:nvSpPr>
-          <p:cNvPr id="7" name="제목 1">
+          <p:cNvPr id="3" name="TextBox 2">
             <a:extLst>
               <a:ext uri="{FF2B5EF4-FFF2-40B4-BE49-F238E27FC236}">
-                <a16:creationId xmlns:a16="http://schemas.microsoft.com/office/drawing/2014/main" id="{AF1A278D-627D-B7E6-D54B-C4D6D391DA7F}"/>
+                <a16:creationId xmlns:a16="http://schemas.microsoft.com/office/drawing/2014/main" id="{B48FC786-BA6B-5C03-44D8-6D9CE0578FA6}"/>
+              </a:ext>
+            </a:extLst>
+          </p:cNvPr>
+          <p:cNvSpPr txBox="1"/>
+          <p:nvPr/>
+        </p:nvSpPr>
+        <p:spPr>
+          <a:xfrm>
+            <a:off x="288790" y="958844"/>
+            <a:ext cx="11118453" cy="5215338"/>
+          </a:xfrm>
+          <a:prstGeom prst="rect">
+            <a:avLst/>
+          </a:prstGeom>
+          <a:noFill/>
+        </p:spPr>
+        <p:txBody>
+          <a:bodyPr wrap="square" rtlCol="0" anchor="t">
+            <a:spAutoFit/>
+          </a:bodyPr>
+          <a:lstStyle/>
+          <a:p>
+            <a:pPr marL="377825" indent="-285750">
+              <a:lnSpc>
+                <a:spcPct val="150000"/>
+              </a:lnSpc>
+              <a:buFont typeface="Arial" panose="020B0604020202020204" pitchFamily="34" charset="0"/>
+              <a:buChar char="•"/>
+            </a:pPr>
+            <a:r>
+              <a:rPr lang="en-US" altLang="ko-KR" sz="1600" dirty="0"/>
+              <a:t>20</a:t>
+            </a:r>
+            <a:r>
+              <a:rPr lang="ko-KR" altLang="en-US" sz="1600" dirty="0"/>
+              <a:t>세기 중반 이후 석유 및 천연가스와 같은</a:t>
+            </a:r>
+            <a:r>
+              <a:rPr lang="en-US" altLang="ko-KR" sz="1600" dirty="0"/>
+              <a:t>, </a:t>
+            </a:r>
+            <a:r>
+              <a:rPr lang="ko-KR" altLang="en-US" sz="1600" dirty="0"/>
+              <a:t>보다 높은 에너지 밀도와 유연성을 지닌 에너지원의 등장</a:t>
+            </a:r>
+            <a:r>
+              <a:rPr lang="en-US" altLang="ko-KR" sz="1600" dirty="0"/>
+              <a:t>, </a:t>
+            </a:r>
+            <a:r>
+              <a:rPr lang="ko-KR" altLang="en-US" sz="1600" dirty="0"/>
+              <a:t>그리고 원자력 발전의 도입은 석탄의 상대적 위상을 점차 약화시키는 계기가 되었다</a:t>
+            </a:r>
+            <a:r>
+              <a:rPr lang="en-US" altLang="ko-KR" sz="1600" dirty="0"/>
+              <a:t>.</a:t>
+            </a:r>
+          </a:p>
+          <a:p>
+            <a:pPr marL="835025" lvl="1" indent="-285750">
+              <a:lnSpc>
+                <a:spcPct val="150000"/>
+              </a:lnSpc>
+              <a:buFont typeface="Wingdings" panose="05000000000000000000" pitchFamily="2" charset="2"/>
+              <a:buChar char="ü"/>
+            </a:pPr>
+            <a:r>
+              <a:rPr lang="ko-KR" altLang="en-US" sz="1600" dirty="0"/>
+              <a:t>더욱이</a:t>
+            </a:r>
+            <a:r>
+              <a:rPr lang="en-US" altLang="ko-KR" sz="1600" dirty="0"/>
+              <a:t>, </a:t>
+            </a:r>
+            <a:r>
+              <a:rPr lang="ko-KR" altLang="en-US" sz="1600" dirty="0"/>
+              <a:t>석탄 채굴 및 연소 과정에서의 대기오염</a:t>
+            </a:r>
+            <a:r>
+              <a:rPr lang="en-US" altLang="ko-KR" sz="1600" dirty="0"/>
+              <a:t>, </a:t>
+            </a:r>
+            <a:r>
+              <a:rPr lang="ko-KR" altLang="en-US" sz="1600" dirty="0"/>
+              <a:t>온실가스 배출</a:t>
+            </a:r>
+            <a:r>
+              <a:rPr lang="en-US" altLang="ko-KR" sz="1600" dirty="0"/>
+              <a:t>, </a:t>
+            </a:r>
+            <a:r>
+              <a:rPr lang="ko-KR" altLang="en-US" sz="1600" dirty="0"/>
+              <a:t>광산 노동자의 건강 문제 등 부정적 외부효과는 석탄 산업에 대한 국제사회의 비판적 시각을 </a:t>
+            </a:r>
+            <a:r>
+              <a:rPr lang="ko-KR" altLang="en-US" sz="1600" dirty="0" err="1"/>
+              <a:t>강화시켰으며</a:t>
+            </a:r>
+            <a:r>
+              <a:rPr lang="en-US" altLang="ko-KR" sz="1600" dirty="0"/>
+              <a:t>, </a:t>
+            </a:r>
+            <a:r>
+              <a:rPr lang="ko-KR" altLang="en-US" sz="1600" dirty="0"/>
+              <a:t>환경 규제의 강화와 탈탄소화 전환을 촉진하는 요인으로 작용하였다</a:t>
+            </a:r>
+            <a:r>
+              <a:rPr lang="en-US" altLang="ko-KR" sz="1600" dirty="0"/>
+              <a:t>. </a:t>
+            </a:r>
+          </a:p>
+          <a:p>
+            <a:pPr marL="835025" lvl="1" indent="-285750">
+              <a:lnSpc>
+                <a:spcPct val="150000"/>
+              </a:lnSpc>
+              <a:buFont typeface="Wingdings" panose="05000000000000000000" pitchFamily="2" charset="2"/>
+              <a:buChar char="ü"/>
+            </a:pPr>
+            <a:r>
+              <a:rPr lang="ko-KR" altLang="en-US" sz="1600" dirty="0"/>
+              <a:t>기후변화 대응을 위한 글로벌 협약과 국가별 탄소중립 목표는 석탄의 단계적 축소를 </a:t>
+            </a:r>
+            <a:r>
+              <a:rPr lang="ko-KR" altLang="en-US" sz="1600" dirty="0" err="1"/>
+              <a:t>가속화시키고</a:t>
+            </a:r>
+            <a:r>
+              <a:rPr lang="ko-KR" altLang="en-US" sz="1600" dirty="0"/>
+              <a:t> 있다</a:t>
+            </a:r>
+            <a:r>
+              <a:rPr lang="en-US" altLang="ko-KR" sz="1600"/>
+              <a:t>.</a:t>
+            </a:r>
+          </a:p>
+          <a:p>
+            <a:pPr marL="377825" indent="-285750">
+              <a:lnSpc>
+                <a:spcPct val="150000"/>
+              </a:lnSpc>
+              <a:buFont typeface="Arial" panose="020B0604020202020204" pitchFamily="34" charset="0"/>
+              <a:buChar char="•"/>
+            </a:pPr>
+            <a:endParaRPr lang="en-US" altLang="ko-KR" sz="1600" dirty="0"/>
+          </a:p>
+          <a:p>
+            <a:pPr marL="377825" indent="-285750">
+              <a:lnSpc>
+                <a:spcPct val="150000"/>
+              </a:lnSpc>
+              <a:buFont typeface="Arial" panose="020B0604020202020204" pitchFamily="34" charset="0"/>
+              <a:buChar char="•"/>
+            </a:pPr>
+            <a:endParaRPr lang="en-US" altLang="ko-KR" sz="1600" dirty="0"/>
+          </a:p>
+          <a:p>
+            <a:pPr marL="377825" indent="-285750">
+              <a:lnSpc>
+                <a:spcPct val="150000"/>
+              </a:lnSpc>
+              <a:buFont typeface="Arial" panose="020B0604020202020204" pitchFamily="34" charset="0"/>
+              <a:buChar char="•"/>
+            </a:pPr>
+            <a:r>
+              <a:rPr lang="ko-KR" altLang="en-US" sz="1600" dirty="0"/>
+              <a:t>그럼에도 불구하고</a:t>
+            </a:r>
+            <a:r>
+              <a:rPr lang="en-US" altLang="ko-KR" sz="1600" dirty="0"/>
+              <a:t>, </a:t>
+            </a:r>
+            <a:r>
+              <a:rPr lang="ko-KR" altLang="en-US" sz="1600" dirty="0"/>
+              <a:t>석탄은 여전히 세계 에너지 믹스의 약 </a:t>
+            </a:r>
+            <a:r>
+              <a:rPr lang="en-US" altLang="ko-KR" sz="1600" dirty="0"/>
+              <a:t>25~30%</a:t>
+            </a:r>
+            <a:r>
+              <a:rPr lang="ko-KR" altLang="en-US" sz="1600" dirty="0"/>
+              <a:t>를 차지하는 주요 자원으로 남아 있다</a:t>
+            </a:r>
+            <a:r>
+              <a:rPr lang="en-US" altLang="ko-KR" sz="1600" dirty="0"/>
+              <a:t>.</a:t>
+            </a:r>
+          </a:p>
+          <a:p>
+            <a:pPr marL="835025" lvl="1" indent="-285750">
+              <a:lnSpc>
+                <a:spcPct val="150000"/>
+              </a:lnSpc>
+              <a:buFont typeface="Wingdings" panose="05000000000000000000" pitchFamily="2" charset="2"/>
+              <a:buChar char="ü"/>
+            </a:pPr>
+            <a:r>
+              <a:rPr lang="ko-KR" altLang="en-US" sz="1600" dirty="0"/>
+              <a:t>전력 수급의 신뢰성과 가격경쟁력을 중시하는 개발도상국에서는 에너지 안보 확보와 경제성 측면에서 여전히 전략적인 에너지원으로 활용되고 있다</a:t>
+            </a:r>
+            <a:r>
+              <a:rPr lang="en-US" altLang="ko-KR" sz="1600" dirty="0"/>
+              <a:t>.</a:t>
+            </a:r>
+          </a:p>
+          <a:p>
+            <a:pPr marL="835025" lvl="1" indent="-285750">
+              <a:lnSpc>
+                <a:spcPct val="150000"/>
+              </a:lnSpc>
+              <a:buFont typeface="Wingdings" panose="05000000000000000000" pitchFamily="2" charset="2"/>
+              <a:buChar char="ü"/>
+            </a:pPr>
+            <a:endParaRPr lang="en-US" altLang="ko-KR" sz="1600" dirty="0"/>
+          </a:p>
+          <a:p>
+            <a:pPr marL="377825" indent="-285750">
+              <a:lnSpc>
+                <a:spcPct val="150000"/>
+              </a:lnSpc>
+              <a:buFont typeface="Arial" panose="020B0604020202020204" pitchFamily="34" charset="0"/>
+              <a:buChar char="•"/>
+            </a:pPr>
+            <a:r>
+              <a:rPr lang="ko-KR" altLang="en-US" sz="1600" dirty="0"/>
+              <a:t>현대의 석탄시장은 공급망 리스크</a:t>
+            </a:r>
+            <a:r>
+              <a:rPr lang="en-US" altLang="ko-KR" sz="1600" dirty="0"/>
+              <a:t>, </a:t>
+            </a:r>
+            <a:r>
+              <a:rPr lang="ko-KR" altLang="en-US" sz="1600" dirty="0"/>
+              <a:t>지정학 변수</a:t>
+            </a:r>
+            <a:r>
+              <a:rPr lang="en-US" altLang="ko-KR" sz="1600" dirty="0"/>
+              <a:t>, </a:t>
+            </a:r>
+            <a:r>
+              <a:rPr lang="ko-KR" altLang="en-US" sz="1600" dirty="0" err="1"/>
+              <a:t>탈석탄</a:t>
+            </a:r>
+            <a:r>
+              <a:rPr lang="ko-KR" altLang="en-US" sz="1600" dirty="0"/>
+              <a:t> 정책과의 충돌</a:t>
+            </a:r>
+            <a:r>
+              <a:rPr lang="en-US" altLang="ko-KR" sz="1600" dirty="0"/>
+              <a:t>, </a:t>
+            </a:r>
+            <a:r>
+              <a:rPr lang="ko-KR" altLang="en-US" sz="1600" dirty="0"/>
+              <a:t>청정기술 도입</a:t>
+            </a:r>
+            <a:r>
+              <a:rPr lang="en-US" altLang="ko-KR" sz="1600" dirty="0"/>
+              <a:t>, </a:t>
+            </a:r>
+            <a:r>
+              <a:rPr lang="ko-KR" altLang="en-US" sz="1600" dirty="0"/>
+              <a:t>국제 금융의 탈석탄화 흐름</a:t>
+            </a:r>
+            <a:r>
+              <a:rPr lang="en-US" altLang="ko-KR" sz="1600" dirty="0"/>
+              <a:t> </a:t>
+            </a:r>
+            <a:r>
+              <a:rPr lang="ko-KR" altLang="en-US" sz="1600" dirty="0"/>
+              <a:t>등 복합적인 요소가 작용하는 불확실성으로 특징지어진다</a:t>
+            </a:r>
+            <a:r>
+              <a:rPr lang="en-US" altLang="ko-KR" sz="1600" dirty="0"/>
+              <a:t>.</a:t>
+            </a:r>
+          </a:p>
+        </p:txBody>
+      </p:sp>
+    </p:spTree>
+    <p:extLst>
+      <p:ext uri="{BB962C8B-B14F-4D97-AF65-F5344CB8AC3E}">
+        <p14:creationId xmlns:p14="http://schemas.microsoft.com/office/powerpoint/2010/main" val="3817818921"/>
+      </p:ext>
+    </p:extLst>
+  </p:cSld>
+  <p:clrMapOvr>
+    <a:masterClrMapping/>
+  </p:clrMapOvr>
+</p:sld>
+</file>
+
+<file path=ppt/slides/slide50.xml><?xml version="1.0" encoding="utf-8"?>
+<p:sld xmlns:a="http://schemas.openxmlformats.org/drawingml/2006/main" xmlns:r="http://schemas.openxmlformats.org/officeDocument/2006/relationships" xmlns:p="http://schemas.openxmlformats.org/presentationml/2006/main">
+  <p:cSld>
+    <p:spTree>
+      <p:nvGrpSpPr>
+        <p:cNvPr id="1" name="">
+          <a:extLst>
+            <a:ext uri="{FF2B5EF4-FFF2-40B4-BE49-F238E27FC236}">
+              <a16:creationId xmlns:a16="http://schemas.microsoft.com/office/drawing/2014/main" id="{8261C836-248D-B35F-E2E1-62C6055AD1B4}"/>
+            </a:ext>
+          </a:extLst>
+        </p:cNvPr>
+        <p:cNvGrpSpPr/>
+        <p:nvPr/>
+      </p:nvGrpSpPr>
+      <p:grpSpPr>
+        <a:xfrm>
+          <a:off x="0" y="0"/>
+          <a:ext cx="0" cy="0"/>
+          <a:chOff x="0" y="0"/>
+          <a:chExt cx="0" cy="0"/>
+        </a:xfrm>
+      </p:grpSpPr>
+      <p:sp>
+        <p:nvSpPr>
+          <p:cNvPr id="2" name="제목 1">
+            <a:extLst>
+              <a:ext uri="{FF2B5EF4-FFF2-40B4-BE49-F238E27FC236}">
+                <a16:creationId xmlns:a16="http://schemas.microsoft.com/office/drawing/2014/main" id="{30730B4B-1BEA-20AB-96D2-8E981D4D87E0}"/>
               </a:ext>
             </a:extLst>
           </p:cNvPr>
@@ -37011,35 +38712,337 @@
             <p:ph type="title"/>
           </p:nvPr>
         </p:nvSpPr>
+        <p:spPr/>
+        <p:txBody>
+          <a:bodyPr/>
+          <a:lstStyle/>
+          <a:p>
+            <a:r>
+              <a:rPr lang="ko-KR" altLang="en-US" dirty="0"/>
+              <a:t>석탄시장의 구조변화와 좌초자산</a:t>
+            </a:r>
+          </a:p>
+        </p:txBody>
+      </p:sp>
+      <p:sp>
+        <p:nvSpPr>
+          <p:cNvPr id="4" name="슬라이드 번호 개체 틀 3">
+            <a:extLst>
+              <a:ext uri="{FF2B5EF4-FFF2-40B4-BE49-F238E27FC236}">
+                <a16:creationId xmlns:a16="http://schemas.microsoft.com/office/drawing/2014/main" id="{062EB122-D369-3440-248C-6DFF5C58B31B}"/>
+              </a:ext>
+            </a:extLst>
+          </p:cNvPr>
+          <p:cNvSpPr>
+            <a:spLocks noGrp="1"/>
+          </p:cNvSpPr>
+          <p:nvPr>
+            <p:ph type="sldNum" sz="quarter" idx="12"/>
+          </p:nvPr>
+        </p:nvSpPr>
+        <p:spPr/>
+        <p:txBody>
+          <a:bodyPr/>
+          <a:lstStyle/>
+          <a:p>
+            <a:fld id="{109C872D-39A9-4065-8BF3-6A613116E2A1}" type="slidenum">
+              <a:rPr lang="ko-KR" altLang="en-US" smtClean="0"/>
+              <a:t>50</a:t>
+            </a:fld>
+            <a:endParaRPr lang="ko-KR" altLang="en-US"/>
+          </a:p>
+        </p:txBody>
+      </p:sp>
+      <p:sp>
+        <p:nvSpPr>
+          <p:cNvPr id="6" name="TextBox 5">
+            <a:extLst>
+              <a:ext uri="{FF2B5EF4-FFF2-40B4-BE49-F238E27FC236}">
+                <a16:creationId xmlns:a16="http://schemas.microsoft.com/office/drawing/2014/main" id="{E697CAD7-EB33-9C78-F115-A8E6EEC95A1E}"/>
+              </a:ext>
+            </a:extLst>
+          </p:cNvPr>
+          <p:cNvSpPr txBox="1"/>
+          <p:nvPr/>
+        </p:nvSpPr>
         <p:spPr>
           <a:xfrm>
-            <a:off x="831850" y="3765550"/>
-            <a:ext cx="11150600" cy="652818"/>
+            <a:off x="288790" y="958844"/>
+            <a:ext cx="11118453" cy="4846007"/>
           </a:xfrm>
-          <a:effectLst>
-            <a:reflection blurRad="50800" stA="45000" endPos="44000" dir="5400000" sy="-100000" algn="bl" rotWithShape="0"/>
-          </a:effectLst>
+          <a:prstGeom prst="rect">
+            <a:avLst/>
+          </a:prstGeom>
+          <a:noFill/>
         </p:spPr>
         <p:txBody>
-          <a:bodyPr anchor="b"/>
+          <a:bodyPr wrap="square" rtlCol="0" anchor="t">
+            <a:spAutoFit/>
+          </a:bodyPr>
           <a:lstStyle/>
           <a:p>
-            <a:r>
-              <a:rPr lang="en-US" altLang="ko-KR" sz="4000" b="1" i="0" spc="150" dirty="0"/>
-              <a:t>Section 1. </a:t>
-            </a:r>
-            <a:r>
-              <a:rPr lang="ko-KR" altLang="en-US" sz="4000" b="1" i="0" spc="150" dirty="0"/>
-              <a:t>개 론</a:t>
-            </a:r>
-            <a:endParaRPr lang="ko-KR" altLang="en-US" sz="3600" i="0" spc="150" dirty="0"/>
+            <a:pPr marL="377825" indent="-285750">
+              <a:lnSpc>
+                <a:spcPct val="150000"/>
+              </a:lnSpc>
+              <a:buFont typeface="Arial" panose="020B0604020202020204" pitchFamily="34" charset="0"/>
+              <a:buChar char="•"/>
+            </a:pPr>
+            <a:r>
+              <a:rPr lang="ko-KR" altLang="en-US" sz="1600" dirty="0"/>
+              <a:t>석탄시장은 세계적인 에너지 전환 흐름에 따라 근본적인 구조 변화를 겪고 있다</a:t>
+            </a:r>
+            <a:r>
+              <a:rPr lang="en-US" altLang="ko-KR" sz="1600" dirty="0"/>
+              <a:t>.</a:t>
+            </a:r>
+          </a:p>
+          <a:p>
+            <a:pPr marL="835025" lvl="1" indent="-285750">
+              <a:lnSpc>
+                <a:spcPct val="150000"/>
+              </a:lnSpc>
+              <a:buFont typeface="Wingdings" panose="05000000000000000000" pitchFamily="2" charset="2"/>
+              <a:buChar char="ü"/>
+            </a:pPr>
+            <a:r>
+              <a:rPr lang="ko-KR" altLang="en-US" sz="1600" dirty="0"/>
+              <a:t>재생에너지와 천연가스 기술의 진보</a:t>
+            </a:r>
+            <a:r>
+              <a:rPr lang="en-US" altLang="ko-KR" sz="1600" dirty="0"/>
+              <a:t>, </a:t>
+            </a:r>
+            <a:r>
+              <a:rPr lang="ko-KR" altLang="en-US" sz="1600" dirty="0"/>
+              <a:t>그리고 가격경쟁력의 향상으로 인해</a:t>
+            </a:r>
+            <a:r>
+              <a:rPr lang="en-US" altLang="ko-KR" sz="1600" dirty="0"/>
+              <a:t>, </a:t>
+            </a:r>
+            <a:r>
+              <a:rPr lang="ko-KR" altLang="en-US" sz="1600" dirty="0"/>
+              <a:t>과거 석탄에 의존하던 국가들조차 석탄 소비를 점차 줄이는 추세를 보이고 있다</a:t>
+            </a:r>
+            <a:r>
+              <a:rPr lang="en-US" altLang="ko-KR" sz="1600" dirty="0"/>
+              <a:t>.</a:t>
+            </a:r>
+          </a:p>
+          <a:p>
+            <a:pPr marL="835025" lvl="1" indent="-285750">
+              <a:lnSpc>
+                <a:spcPct val="150000"/>
+              </a:lnSpc>
+              <a:buFont typeface="Wingdings" panose="05000000000000000000" pitchFamily="2" charset="2"/>
+              <a:buChar char="ü"/>
+            </a:pPr>
+            <a:r>
+              <a:rPr lang="ko-KR" altLang="en-US" sz="1600" dirty="0"/>
+              <a:t>이러한 변화는 단순한 수요 감소를 넘어</a:t>
+            </a:r>
+            <a:r>
+              <a:rPr lang="en-US" altLang="ko-KR" sz="1600" dirty="0"/>
+              <a:t>, </a:t>
+            </a:r>
+            <a:r>
+              <a:rPr lang="ko-KR" altLang="en-US" sz="1600" dirty="0"/>
+              <a:t>석탄 발전소</a:t>
+            </a:r>
+            <a:r>
+              <a:rPr lang="en-US" altLang="ko-KR" sz="1600" dirty="0"/>
+              <a:t>, </a:t>
+            </a:r>
+            <a:r>
+              <a:rPr lang="ko-KR" altLang="en-US" sz="1600" dirty="0"/>
+              <a:t>탄광</a:t>
+            </a:r>
+            <a:r>
+              <a:rPr lang="en-US" altLang="ko-KR" sz="1600" dirty="0"/>
+              <a:t>, </a:t>
+            </a:r>
+            <a:r>
+              <a:rPr lang="ko-KR" altLang="en-US" sz="1600" dirty="0"/>
+              <a:t>물류 인프라 등 석탄 관련 자산의 경제적 가치 하락을 초래하며</a:t>
+            </a:r>
+            <a:r>
+              <a:rPr lang="en-US" altLang="ko-KR" sz="1600" dirty="0"/>
+              <a:t>, ‘</a:t>
+            </a:r>
+            <a:r>
+              <a:rPr lang="ko-KR" altLang="en-US" sz="1600" dirty="0"/>
+              <a:t>좌초자산 </a:t>
+            </a:r>
+            <a:r>
+              <a:rPr lang="en-US" altLang="ko-KR" sz="1600" dirty="0"/>
+              <a:t>(stranded assets)‘ </a:t>
+            </a:r>
+            <a:r>
+              <a:rPr lang="ko-KR" altLang="en-US" sz="1600" dirty="0"/>
+              <a:t>문제를 </a:t>
+            </a:r>
+            <a:r>
+              <a:rPr lang="ko-KR" altLang="en-US" sz="1600" dirty="0" err="1"/>
+              <a:t>심화시키고</a:t>
+            </a:r>
+            <a:r>
+              <a:rPr lang="ko-KR" altLang="en-US" sz="1600" dirty="0"/>
+              <a:t> 있다</a:t>
+            </a:r>
+            <a:r>
+              <a:rPr lang="en-US" altLang="ko-KR" sz="1600" dirty="0"/>
+              <a:t>.</a:t>
+            </a:r>
+          </a:p>
+          <a:p>
+            <a:pPr marL="835025" lvl="1" indent="-285750">
+              <a:lnSpc>
+                <a:spcPct val="150000"/>
+              </a:lnSpc>
+              <a:buFont typeface="Wingdings" panose="05000000000000000000" pitchFamily="2" charset="2"/>
+              <a:buChar char="ü"/>
+            </a:pPr>
+            <a:endParaRPr lang="en-US" altLang="ko-KR" sz="1600" dirty="0"/>
+          </a:p>
+          <a:p>
+            <a:pPr marL="377825" indent="-285750">
+              <a:lnSpc>
+                <a:spcPct val="150000"/>
+              </a:lnSpc>
+              <a:buFont typeface="Arial" panose="020B0604020202020204" pitchFamily="34" charset="0"/>
+              <a:buChar char="•"/>
+            </a:pPr>
+            <a:r>
+              <a:rPr lang="ko-KR" altLang="en-US" sz="1600" dirty="0"/>
+              <a:t>좌초자산은 기술</a:t>
+            </a:r>
+            <a:r>
+              <a:rPr lang="en-US" altLang="ko-KR" sz="1600" dirty="0"/>
+              <a:t>, </a:t>
+            </a:r>
+            <a:r>
+              <a:rPr lang="ko-KR" altLang="en-US" sz="1600" dirty="0"/>
+              <a:t>시장</a:t>
+            </a:r>
+            <a:r>
+              <a:rPr lang="en-US" altLang="ko-KR" sz="1600" dirty="0"/>
+              <a:t>, </a:t>
+            </a:r>
+            <a:r>
+              <a:rPr lang="ko-KR" altLang="en-US" sz="1600" dirty="0"/>
+              <a:t>규제 환경의 변화로 인해 자산으로부터 기대하던 수익을 실현하지 못하고 조기에 사용이 중단되는 자산을 의미한다</a:t>
+            </a:r>
+            <a:r>
+              <a:rPr lang="en-US" altLang="ko-KR" sz="1600" dirty="0"/>
+              <a:t>.</a:t>
+            </a:r>
+          </a:p>
+          <a:p>
+            <a:pPr marL="835025" lvl="1" indent="-285750">
+              <a:lnSpc>
+                <a:spcPct val="150000"/>
+              </a:lnSpc>
+              <a:buFont typeface="Wingdings" panose="05000000000000000000" pitchFamily="2" charset="2"/>
+              <a:buChar char="ü"/>
+            </a:pPr>
+            <a:r>
+              <a:rPr lang="ko-KR" altLang="en-US" sz="1600" dirty="0"/>
+              <a:t>석탄 화력발전소는 보통 </a:t>
+            </a:r>
+            <a:r>
+              <a:rPr lang="en-US" altLang="ko-KR" sz="1600" dirty="0"/>
+              <a:t>30~40</a:t>
+            </a:r>
+            <a:r>
+              <a:rPr lang="ko-KR" altLang="en-US" sz="1600" dirty="0"/>
+              <a:t>년의 경제적 수명을 전제로 설계되었으나</a:t>
+            </a:r>
+            <a:r>
+              <a:rPr lang="en-US" altLang="ko-KR" sz="1600" dirty="0"/>
+              <a:t>, </a:t>
+            </a:r>
+            <a:r>
+              <a:rPr lang="ko-KR" altLang="en-US" sz="1600" dirty="0"/>
+              <a:t>실제 운용기간이 단축되고 조기 </a:t>
+            </a:r>
+            <a:r>
+              <a:rPr lang="ko-KR" altLang="en-US" sz="1600" dirty="0" err="1"/>
+              <a:t>폐쇠하는</a:t>
+            </a:r>
+            <a:r>
+              <a:rPr lang="ko-KR" altLang="en-US" sz="1600" dirty="0"/>
+              <a:t> 사례가 늘고 있다</a:t>
+            </a:r>
+            <a:r>
+              <a:rPr lang="en-US" altLang="ko-KR" sz="1600" dirty="0"/>
+              <a:t>.</a:t>
+            </a:r>
+          </a:p>
+          <a:p>
+            <a:pPr marL="835025" lvl="1" indent="-285750">
+              <a:lnSpc>
+                <a:spcPct val="150000"/>
+              </a:lnSpc>
+              <a:buFont typeface="Wingdings" panose="05000000000000000000" pitchFamily="2" charset="2"/>
+              <a:buChar char="ü"/>
+            </a:pPr>
+            <a:r>
+              <a:rPr lang="ko-KR" altLang="en-US" sz="1600" dirty="0"/>
+              <a:t>독일은 </a:t>
+            </a:r>
+            <a:r>
+              <a:rPr lang="en-US" altLang="ko-KR" sz="1600" dirty="0"/>
+              <a:t>2038</a:t>
+            </a:r>
+            <a:r>
+              <a:rPr lang="ko-KR" altLang="en-US" sz="1600" dirty="0"/>
+              <a:t>년까지 모든 석탄발전소를 폐쇄하겠다는 목표를 세워</a:t>
+            </a:r>
+            <a:r>
+              <a:rPr lang="en-US" altLang="ko-KR" sz="1600" dirty="0"/>
+              <a:t>, </a:t>
+            </a:r>
+            <a:r>
+              <a:rPr lang="ko-KR" altLang="en-US" sz="1600" dirty="0"/>
+              <a:t>상당수 발전설비가 좌초자산으로 전환되고 있다</a:t>
+            </a:r>
+            <a:r>
+              <a:rPr lang="en-US" altLang="ko-KR" sz="1600" dirty="0"/>
+              <a:t>.</a:t>
+            </a:r>
+          </a:p>
+          <a:p>
+            <a:pPr marL="835025" lvl="1" indent="-285750">
+              <a:lnSpc>
+                <a:spcPct val="150000"/>
+              </a:lnSpc>
+              <a:buFont typeface="Wingdings" panose="05000000000000000000" pitchFamily="2" charset="2"/>
+              <a:buChar char="ü"/>
+            </a:pPr>
+            <a:r>
+              <a:rPr lang="ko-KR" altLang="en-US" sz="1600" dirty="0"/>
+              <a:t>호주와</a:t>
+            </a:r>
+            <a:r>
+              <a:rPr lang="en-US" altLang="ko-KR" sz="1600" dirty="0"/>
+              <a:t> </a:t>
+            </a:r>
+            <a:r>
+              <a:rPr lang="ko-KR" altLang="en-US" sz="1600" dirty="0"/>
+              <a:t>미국에서도 석탄발전 설비의 조기 폐쇄와 설비 가동 중단이 급증하고 있다</a:t>
+            </a:r>
+            <a:r>
+              <a:rPr lang="en-US" altLang="ko-KR" sz="1600" dirty="0"/>
+              <a:t>.</a:t>
+            </a:r>
           </a:p>
         </p:txBody>
       </p:sp>
     </p:spTree>
     <p:extLst>
       <p:ext uri="{BB962C8B-B14F-4D97-AF65-F5344CB8AC3E}">
-        <p14:creationId xmlns:p14="http://schemas.microsoft.com/office/powerpoint/2010/main" val="4221688942"/>
+        <p14:creationId xmlns:p14="http://schemas.microsoft.com/office/powerpoint/2010/main" val="2216061975"/>
       </p:ext>
     </p:extLst>
   </p:cSld>
@@ -37049,7 +39052,375 @@
 </p:sld>
 </file>
 
-<file path=ppt/slides/slide47.xml><?xml version="1.0" encoding="utf-8"?>
+<file path=ppt/slides/slide51.xml><?xml version="1.0" encoding="utf-8"?>
+<p:sld xmlns:a="http://schemas.openxmlformats.org/drawingml/2006/main" xmlns:r="http://schemas.openxmlformats.org/officeDocument/2006/relationships" xmlns:p="http://schemas.openxmlformats.org/presentationml/2006/main">
+  <p:cSld>
+    <p:spTree>
+      <p:nvGrpSpPr>
+        <p:cNvPr id="1" name="">
+          <a:extLst>
+            <a:ext uri="{FF2B5EF4-FFF2-40B4-BE49-F238E27FC236}">
+              <a16:creationId xmlns:a16="http://schemas.microsoft.com/office/drawing/2014/main" id="{7044B4C5-1150-83E2-D4D5-8BB342F8B103}"/>
+            </a:ext>
+          </a:extLst>
+        </p:cNvPr>
+        <p:cNvGrpSpPr/>
+        <p:nvPr/>
+      </p:nvGrpSpPr>
+      <p:grpSpPr>
+        <a:xfrm>
+          <a:off x="0" y="0"/>
+          <a:ext cx="0" cy="0"/>
+          <a:chOff x="0" y="0"/>
+          <a:chExt cx="0" cy="0"/>
+        </a:xfrm>
+      </p:grpSpPr>
+      <p:sp>
+        <p:nvSpPr>
+          <p:cNvPr id="2" name="제목 1">
+            <a:extLst>
+              <a:ext uri="{FF2B5EF4-FFF2-40B4-BE49-F238E27FC236}">
+                <a16:creationId xmlns:a16="http://schemas.microsoft.com/office/drawing/2014/main" id="{AF55F67C-1E0A-50C5-C12F-71FD205EEFB7}"/>
+              </a:ext>
+            </a:extLst>
+          </p:cNvPr>
+          <p:cNvSpPr>
+            <a:spLocks noGrp="1"/>
+          </p:cNvSpPr>
+          <p:nvPr>
+            <p:ph type="title"/>
+          </p:nvPr>
+        </p:nvSpPr>
+        <p:spPr/>
+        <p:txBody>
+          <a:bodyPr/>
+          <a:lstStyle/>
+          <a:p>
+            <a:r>
+              <a:rPr lang="ko-KR" altLang="en-US" dirty="0"/>
+              <a:t>석탄시장의 구조변화와 좌초자산</a:t>
+            </a:r>
+          </a:p>
+        </p:txBody>
+      </p:sp>
+      <p:sp>
+        <p:nvSpPr>
+          <p:cNvPr id="4" name="슬라이드 번호 개체 틀 3">
+            <a:extLst>
+              <a:ext uri="{FF2B5EF4-FFF2-40B4-BE49-F238E27FC236}">
+                <a16:creationId xmlns:a16="http://schemas.microsoft.com/office/drawing/2014/main" id="{D9D9B6CB-6C34-D0DE-D2E8-DEA423D5AE65}"/>
+              </a:ext>
+            </a:extLst>
+          </p:cNvPr>
+          <p:cNvSpPr>
+            <a:spLocks noGrp="1"/>
+          </p:cNvSpPr>
+          <p:nvPr>
+            <p:ph type="sldNum" sz="quarter" idx="12"/>
+          </p:nvPr>
+        </p:nvSpPr>
+        <p:spPr/>
+        <p:txBody>
+          <a:bodyPr/>
+          <a:lstStyle/>
+          <a:p>
+            <a:fld id="{109C872D-39A9-4065-8BF3-6A613116E2A1}" type="slidenum">
+              <a:rPr lang="ko-KR" altLang="en-US" smtClean="0"/>
+              <a:t>51</a:t>
+            </a:fld>
+            <a:endParaRPr lang="ko-KR" altLang="en-US"/>
+          </a:p>
+        </p:txBody>
+      </p:sp>
+      <p:sp>
+        <p:nvSpPr>
+          <p:cNvPr id="6" name="TextBox 5">
+            <a:extLst>
+              <a:ext uri="{FF2B5EF4-FFF2-40B4-BE49-F238E27FC236}">
+                <a16:creationId xmlns:a16="http://schemas.microsoft.com/office/drawing/2014/main" id="{2B404B55-7FF2-119D-BB16-5CFE84DEFC00}"/>
+              </a:ext>
+            </a:extLst>
+          </p:cNvPr>
+          <p:cNvSpPr txBox="1"/>
+          <p:nvPr/>
+        </p:nvSpPr>
+        <p:spPr>
+          <a:xfrm>
+            <a:off x="288790" y="958844"/>
+            <a:ext cx="11118453" cy="4476675"/>
+          </a:xfrm>
+          <a:prstGeom prst="rect">
+            <a:avLst/>
+          </a:prstGeom>
+          <a:noFill/>
+        </p:spPr>
+        <p:txBody>
+          <a:bodyPr wrap="square" rtlCol="0" anchor="t">
+            <a:spAutoFit/>
+          </a:bodyPr>
+          <a:lstStyle/>
+          <a:p>
+            <a:pPr marL="377825" indent="-285750">
+              <a:lnSpc>
+                <a:spcPct val="150000"/>
+              </a:lnSpc>
+              <a:buFont typeface="Arial" panose="020B0604020202020204" pitchFamily="34" charset="0"/>
+              <a:buChar char="•"/>
+            </a:pPr>
+            <a:r>
+              <a:rPr lang="ko-KR" altLang="en-US" sz="1600" dirty="0"/>
+              <a:t>이러한 좌초자산 문제는 에너지 부문을 넘어 금융시장 전반에도 부정적인 파급효과를 가져오고 있다</a:t>
+            </a:r>
+            <a:r>
+              <a:rPr lang="en-US" altLang="ko-KR" sz="1600" dirty="0"/>
+              <a:t>.</a:t>
+            </a:r>
+          </a:p>
+          <a:p>
+            <a:pPr marL="835025" lvl="1" indent="-285750">
+              <a:lnSpc>
+                <a:spcPct val="150000"/>
+              </a:lnSpc>
+              <a:buFont typeface="Wingdings" panose="05000000000000000000" pitchFamily="2" charset="2"/>
+              <a:buChar char="ü"/>
+            </a:pPr>
+            <a:r>
+              <a:rPr lang="ko-KR" altLang="en-US" sz="1600" dirty="0"/>
+              <a:t>세계 주요 연기금과 민간 금융기관들은 석탄 관련 자산에서 투자 철회를 확대하고 있으며</a:t>
+            </a:r>
+            <a:r>
+              <a:rPr lang="en-US" altLang="ko-KR" sz="1600" dirty="0"/>
+              <a:t>, </a:t>
+            </a:r>
+            <a:r>
+              <a:rPr lang="ko-KR" altLang="en-US" sz="1600" dirty="0"/>
+              <a:t>그 결과로 석탄관련 기업의 주가 하락</a:t>
+            </a:r>
+            <a:r>
+              <a:rPr lang="en-US" altLang="ko-KR" sz="1600" dirty="0"/>
+              <a:t>, </a:t>
+            </a:r>
+            <a:r>
+              <a:rPr lang="ko-KR" altLang="en-US" sz="1600" dirty="0"/>
+              <a:t>신용등급 저하</a:t>
+            </a:r>
+            <a:r>
+              <a:rPr lang="en-US" altLang="ko-KR" sz="1600" dirty="0"/>
+              <a:t>, </a:t>
+            </a:r>
+            <a:r>
+              <a:rPr lang="ko-KR" altLang="en-US" sz="1600" dirty="0"/>
+              <a:t>자금조달 비용 상승 등 금융적 좌초 현상이 현실화되고 있다</a:t>
+            </a:r>
+            <a:r>
+              <a:rPr lang="en-US" altLang="ko-KR" sz="1600" dirty="0"/>
+              <a:t>.</a:t>
+            </a:r>
+          </a:p>
+          <a:p>
+            <a:pPr marL="377825" indent="-285750">
+              <a:lnSpc>
+                <a:spcPct val="150000"/>
+              </a:lnSpc>
+              <a:buFont typeface="Arial" panose="020B0604020202020204" pitchFamily="34" charset="0"/>
+              <a:buChar char="•"/>
+            </a:pPr>
+            <a:endParaRPr lang="en-US" altLang="ko-KR" sz="1600" dirty="0"/>
+          </a:p>
+          <a:p>
+            <a:pPr marL="377825" indent="-285750">
+              <a:lnSpc>
+                <a:spcPct val="150000"/>
+              </a:lnSpc>
+              <a:buFont typeface="Arial" panose="020B0604020202020204" pitchFamily="34" charset="0"/>
+              <a:buChar char="•"/>
+            </a:pPr>
+            <a:r>
+              <a:rPr lang="ko-KR" altLang="en-US" sz="1600" dirty="0"/>
+              <a:t>좌초자산은 지역사회와 고용시장에도 심각한 사회경제적 충격을 야기할 수 있다</a:t>
+            </a:r>
+            <a:r>
+              <a:rPr lang="en-US" altLang="ko-KR" sz="1600" dirty="0"/>
+              <a:t>.</a:t>
+            </a:r>
+          </a:p>
+          <a:p>
+            <a:pPr marL="835025" lvl="1" indent="-285750">
+              <a:lnSpc>
+                <a:spcPct val="150000"/>
+              </a:lnSpc>
+              <a:buFont typeface="Wingdings" panose="05000000000000000000" pitchFamily="2" charset="2"/>
+              <a:buChar char="ü"/>
+            </a:pPr>
+            <a:r>
+              <a:rPr lang="ko-KR" altLang="en-US" sz="1600" dirty="0"/>
+              <a:t>석탄 산업이 지역경제의 중심을 이루는 지방정부의 경우</a:t>
+            </a:r>
+            <a:r>
+              <a:rPr lang="en-US" altLang="ko-KR" sz="1600" dirty="0"/>
+              <a:t>, </a:t>
+            </a:r>
+            <a:r>
+              <a:rPr lang="ko-KR" altLang="en-US" sz="1600" dirty="0"/>
+              <a:t>석탄자산의 조기 퇴출은 고용 감소</a:t>
+            </a:r>
+            <a:r>
+              <a:rPr lang="en-US" altLang="ko-KR" sz="1600" dirty="0"/>
+              <a:t>, </a:t>
+            </a:r>
+            <a:r>
+              <a:rPr lang="ko-KR" altLang="en-US" sz="1600" dirty="0"/>
+              <a:t>세수 축소</a:t>
+            </a:r>
+            <a:r>
+              <a:rPr lang="en-US" altLang="ko-KR" sz="1600" dirty="0"/>
+              <a:t>, </a:t>
+            </a:r>
+            <a:r>
+              <a:rPr lang="ko-KR" altLang="en-US" sz="1600" dirty="0"/>
+              <a:t>소비 위축으로 이어지며</a:t>
+            </a:r>
+            <a:r>
+              <a:rPr lang="en-US" altLang="ko-KR" sz="1600" dirty="0"/>
+              <a:t>, </a:t>
+            </a:r>
+            <a:r>
+              <a:rPr lang="ko-KR" altLang="en-US" sz="1600" dirty="0"/>
+              <a:t>이는 에너지 전환 과정에서 정의롭지 못한 결과를 보여주는 사례가 될 수 있다</a:t>
+            </a:r>
+            <a:r>
+              <a:rPr lang="en-US" altLang="ko-KR" sz="1600" dirty="0"/>
+              <a:t>.</a:t>
+            </a:r>
+          </a:p>
+          <a:p>
+            <a:pPr marL="835025" lvl="1" indent="-285750">
+              <a:lnSpc>
+                <a:spcPct val="150000"/>
+              </a:lnSpc>
+              <a:buFont typeface="Wingdings" panose="05000000000000000000" pitchFamily="2" charset="2"/>
+              <a:buChar char="ü"/>
+            </a:pPr>
+            <a:r>
+              <a:rPr lang="ko-KR" altLang="en-US" sz="1600" dirty="0"/>
+              <a:t>사회안전망이 취약한 개발도상국에서는 노동 전환이 어려워</a:t>
+            </a:r>
+            <a:r>
+              <a:rPr lang="en-US" altLang="ko-KR" sz="1600" dirty="0"/>
+              <a:t>, </a:t>
+            </a:r>
+            <a:r>
+              <a:rPr lang="ko-KR" altLang="en-US" sz="1600" dirty="0"/>
+              <a:t>에너지 정의와 </a:t>
+            </a:r>
+            <a:r>
+              <a:rPr lang="en-US" altLang="ko-KR" sz="1600" dirty="0"/>
+              <a:t>‘</a:t>
+            </a:r>
+            <a:r>
+              <a:rPr lang="ko-KR" altLang="en-US" sz="1600" dirty="0"/>
+              <a:t>공정 전환</a:t>
+            </a:r>
+            <a:r>
+              <a:rPr lang="en-US" altLang="ko-KR" sz="1600" dirty="0"/>
+              <a:t>‘ </a:t>
+            </a:r>
+            <a:r>
+              <a:rPr lang="ko-KR" altLang="en-US" sz="1600" dirty="0"/>
+              <a:t>실현을 위한 정책적 개입이 더욱 중요하다</a:t>
+            </a:r>
+            <a:r>
+              <a:rPr lang="en-US" altLang="ko-KR" sz="1600" dirty="0"/>
+              <a:t>.</a:t>
+            </a:r>
+          </a:p>
+          <a:p>
+            <a:pPr marL="835025" lvl="1" indent="-285750">
+              <a:lnSpc>
+                <a:spcPct val="150000"/>
+              </a:lnSpc>
+              <a:buFont typeface="Wingdings" panose="05000000000000000000" pitchFamily="2" charset="2"/>
+              <a:buChar char="ü"/>
+            </a:pPr>
+            <a:endParaRPr lang="en-US" altLang="ko-KR" sz="1600" dirty="0"/>
+          </a:p>
+          <a:p>
+            <a:pPr marL="377825" indent="-285750">
+              <a:lnSpc>
+                <a:spcPct val="150000"/>
+              </a:lnSpc>
+              <a:buFont typeface="Arial" panose="020B0604020202020204" pitchFamily="34" charset="0"/>
+              <a:buChar char="•"/>
+            </a:pPr>
+            <a:r>
+              <a:rPr lang="ko-KR" altLang="en-US" sz="1600" dirty="0"/>
+              <a:t>이에 대한 정책적 대응 전략으로</a:t>
+            </a:r>
+            <a:r>
+              <a:rPr lang="en-US" altLang="ko-KR" sz="1600" dirty="0"/>
+              <a:t>, </a:t>
+            </a:r>
+            <a:r>
+              <a:rPr lang="ko-KR" altLang="en-US" sz="1600" dirty="0"/>
+              <a:t>좌초위험 자산의 조기 식별</a:t>
+            </a:r>
+            <a:r>
+              <a:rPr lang="en-US" altLang="ko-KR" sz="1600" dirty="0"/>
+              <a:t>, </a:t>
+            </a:r>
+            <a:r>
+              <a:rPr lang="ko-KR" altLang="en-US" sz="1600" dirty="0"/>
+              <a:t>평가 시스템 구축</a:t>
+            </a:r>
+            <a:r>
+              <a:rPr lang="en-US" altLang="ko-KR" sz="1600" dirty="0"/>
+              <a:t>, </a:t>
+            </a:r>
+            <a:r>
+              <a:rPr lang="ko-KR" altLang="en-US" sz="1600" dirty="0" err="1"/>
+              <a:t>탈석탄</a:t>
+            </a:r>
+            <a:r>
+              <a:rPr lang="ko-KR" altLang="en-US" sz="1600" dirty="0"/>
+              <a:t> 기업에 대한 보상 및 고용 전환 지원 프로그램 설계</a:t>
+            </a:r>
+            <a:r>
+              <a:rPr lang="en-US" altLang="ko-KR" sz="1600" dirty="0"/>
+              <a:t>, </a:t>
+            </a:r>
+            <a:r>
+              <a:rPr lang="ko-KR" altLang="en-US" sz="1600" dirty="0"/>
+              <a:t>재교육 인프라 확충</a:t>
+            </a:r>
+            <a:r>
+              <a:rPr lang="en-US" altLang="ko-KR" sz="1600" dirty="0"/>
+              <a:t> </a:t>
+            </a:r>
+            <a:r>
+              <a:rPr lang="ko-KR" altLang="en-US" sz="1600" dirty="0"/>
+              <a:t>등이 병행되어야 한다</a:t>
+            </a:r>
+            <a:r>
+              <a:rPr lang="en-US" altLang="ko-KR" sz="1600" dirty="0"/>
+              <a:t>.</a:t>
+            </a:r>
+          </a:p>
+        </p:txBody>
+      </p:sp>
+    </p:spTree>
+    <p:extLst>
+      <p:ext uri="{BB962C8B-B14F-4D97-AF65-F5344CB8AC3E}">
+        <p14:creationId xmlns:p14="http://schemas.microsoft.com/office/powerpoint/2010/main" val="887690126"/>
+      </p:ext>
+    </p:extLst>
+  </p:cSld>
+  <p:clrMapOvr>
+    <a:masterClrMapping/>
+  </p:clrMapOvr>
+</p:sld>
+</file>
+
+<file path=ppt/slides/slide52.xml><?xml version="1.0" encoding="utf-8"?>
 <p:sld xmlns:a="http://schemas.openxmlformats.org/drawingml/2006/main" xmlns:r="http://schemas.openxmlformats.org/officeDocument/2006/relationships" xmlns:p="http://schemas.openxmlformats.org/presentationml/2006/main">
   <p:cSld>
     <p:spTree>
@@ -37177,7 +39548,7 @@
           <a:p>
             <a:fld id="{109C872D-39A9-4065-8BF3-6A613116E2A1}" type="slidenum">
               <a:rPr lang="ko-KR" altLang="en-US" smtClean="0"/>
-              <a:t>47</a:t>
+              <a:t>52</a:t>
             </a:fld>
             <a:endParaRPr lang="ko-KR" altLang="en-US"/>
           </a:p>
@@ -37187,384 +39558,6 @@
     <p:extLst>
       <p:ext uri="{BB962C8B-B14F-4D97-AF65-F5344CB8AC3E}">
         <p14:creationId xmlns:p14="http://schemas.microsoft.com/office/powerpoint/2010/main" val="103939182"/>
-      </p:ext>
-    </p:extLst>
-  </p:cSld>
-  <p:clrMapOvr>
-    <a:masterClrMapping/>
-  </p:clrMapOvr>
-</p:sld>
-</file>
-
-<file path=ppt/slides/slide5.xml><?xml version="1.0" encoding="utf-8"?>
-<p:sld xmlns:a="http://schemas.openxmlformats.org/drawingml/2006/main" xmlns:r="http://schemas.openxmlformats.org/officeDocument/2006/relationships" xmlns:p="http://schemas.openxmlformats.org/presentationml/2006/main">
-  <p:cSld>
-    <p:spTree>
-      <p:nvGrpSpPr>
-        <p:cNvPr id="1" name="">
-          <a:extLst>
-            <a:ext uri="{FF2B5EF4-FFF2-40B4-BE49-F238E27FC236}">
-              <a16:creationId xmlns:a16="http://schemas.microsoft.com/office/drawing/2014/main" id="{397CA923-B4DD-A907-2D8B-D6044F6F5282}"/>
-            </a:ext>
-          </a:extLst>
-        </p:cNvPr>
-        <p:cNvGrpSpPr/>
-        <p:nvPr/>
-      </p:nvGrpSpPr>
-      <p:grpSpPr>
-        <a:xfrm>
-          <a:off x="0" y="0"/>
-          <a:ext cx="0" cy="0"/>
-          <a:chOff x="0" y="0"/>
-          <a:chExt cx="0" cy="0"/>
-        </a:xfrm>
-      </p:grpSpPr>
-      <p:sp>
-        <p:nvSpPr>
-          <p:cNvPr id="2" name="제목 1">
-            <a:extLst>
-              <a:ext uri="{FF2B5EF4-FFF2-40B4-BE49-F238E27FC236}">
-                <a16:creationId xmlns:a16="http://schemas.microsoft.com/office/drawing/2014/main" id="{5AE1A0F4-CC65-8E27-4A59-54417250F3EB}"/>
-              </a:ext>
-            </a:extLst>
-          </p:cNvPr>
-          <p:cNvSpPr>
-            <a:spLocks noGrp="1"/>
-          </p:cNvSpPr>
-          <p:nvPr>
-            <p:ph type="title"/>
-          </p:nvPr>
-        </p:nvSpPr>
-        <p:spPr/>
-        <p:txBody>
-          <a:bodyPr/>
-          <a:lstStyle/>
-          <a:p>
-            <a:r>
-              <a:rPr lang="ko-KR" altLang="en-US" dirty="0"/>
-              <a:t>서론</a:t>
-            </a:r>
-          </a:p>
-        </p:txBody>
-      </p:sp>
-      <p:sp>
-        <p:nvSpPr>
-          <p:cNvPr id="4" name="슬라이드 번호 개체 틀 3">
-            <a:extLst>
-              <a:ext uri="{FF2B5EF4-FFF2-40B4-BE49-F238E27FC236}">
-                <a16:creationId xmlns:a16="http://schemas.microsoft.com/office/drawing/2014/main" id="{2D05026A-C2F6-E1CD-95EA-4269B6F0A911}"/>
-              </a:ext>
-            </a:extLst>
-          </p:cNvPr>
-          <p:cNvSpPr>
-            <a:spLocks noGrp="1"/>
-          </p:cNvSpPr>
-          <p:nvPr>
-            <p:ph type="sldNum" sz="quarter" idx="12"/>
-          </p:nvPr>
-        </p:nvSpPr>
-        <p:spPr/>
-        <p:txBody>
-          <a:bodyPr/>
-          <a:lstStyle/>
-          <a:p>
-            <a:fld id="{109C872D-39A9-4065-8BF3-6A613116E2A1}" type="slidenum">
-              <a:rPr lang="ko-KR" altLang="en-US" smtClean="0"/>
-              <a:t>5</a:t>
-            </a:fld>
-            <a:endParaRPr lang="ko-KR" altLang="en-US"/>
-          </a:p>
-        </p:txBody>
-      </p:sp>
-      <p:sp>
-        <p:nvSpPr>
-          <p:cNvPr id="3" name="TextBox 2">
-            <a:extLst>
-              <a:ext uri="{FF2B5EF4-FFF2-40B4-BE49-F238E27FC236}">
-                <a16:creationId xmlns:a16="http://schemas.microsoft.com/office/drawing/2014/main" id="{B48FC786-BA6B-5C03-44D8-6D9CE0578FA6}"/>
-              </a:ext>
-            </a:extLst>
-          </p:cNvPr>
-          <p:cNvSpPr txBox="1"/>
-          <p:nvPr/>
-        </p:nvSpPr>
-        <p:spPr>
-          <a:xfrm>
-            <a:off x="288790" y="958844"/>
-            <a:ext cx="11118453" cy="5215338"/>
-          </a:xfrm>
-          <a:prstGeom prst="rect">
-            <a:avLst/>
-          </a:prstGeom>
-          <a:noFill/>
-        </p:spPr>
-        <p:txBody>
-          <a:bodyPr wrap="square" rtlCol="0" anchor="t">
-            <a:spAutoFit/>
-          </a:bodyPr>
-          <a:lstStyle/>
-          <a:p>
-            <a:pPr marL="377825" indent="-285750">
-              <a:lnSpc>
-                <a:spcPct val="150000"/>
-              </a:lnSpc>
-              <a:buFont typeface="Arial" panose="020B0604020202020204" pitchFamily="34" charset="0"/>
-              <a:buChar char="•"/>
-            </a:pPr>
-            <a:r>
-              <a:rPr lang="en-US" altLang="ko-KR" sz="1600" dirty="0"/>
-              <a:t>20</a:t>
-            </a:r>
-            <a:r>
-              <a:rPr lang="ko-KR" altLang="en-US" sz="1600" dirty="0"/>
-              <a:t>세기 중반 이후 석유 및 천연가스와 같은</a:t>
-            </a:r>
-            <a:r>
-              <a:rPr lang="en-US" altLang="ko-KR" sz="1600" dirty="0"/>
-              <a:t>, </a:t>
-            </a:r>
-            <a:r>
-              <a:rPr lang="ko-KR" altLang="en-US" sz="1600" dirty="0"/>
-              <a:t>보다 높은 에너지 밀도와 유연성을 지닌 에너지원의 등장</a:t>
-            </a:r>
-            <a:r>
-              <a:rPr lang="en-US" altLang="ko-KR" sz="1600" dirty="0"/>
-              <a:t>, </a:t>
-            </a:r>
-            <a:r>
-              <a:rPr lang="ko-KR" altLang="en-US" sz="1600" dirty="0"/>
-              <a:t>그리고 원자력 발전의 도입은 석탄의 상대적 위상을 점차 약화시키는 계기가 되었다</a:t>
-            </a:r>
-            <a:r>
-              <a:rPr lang="en-US" altLang="ko-KR" sz="1600" dirty="0"/>
-              <a:t>.</a:t>
-            </a:r>
-          </a:p>
-          <a:p>
-            <a:pPr marL="835025" lvl="1" indent="-285750">
-              <a:lnSpc>
-                <a:spcPct val="150000"/>
-              </a:lnSpc>
-              <a:buFont typeface="Wingdings" panose="05000000000000000000" pitchFamily="2" charset="2"/>
-              <a:buChar char="ü"/>
-            </a:pPr>
-            <a:r>
-              <a:rPr lang="ko-KR" altLang="en-US" sz="1600" dirty="0"/>
-              <a:t>더욱이</a:t>
-            </a:r>
-            <a:r>
-              <a:rPr lang="en-US" altLang="ko-KR" sz="1600" dirty="0"/>
-              <a:t>, </a:t>
-            </a:r>
-            <a:r>
-              <a:rPr lang="ko-KR" altLang="en-US" sz="1600" dirty="0"/>
-              <a:t>석탄 채굴 및 연소 과정에서의 대기오염</a:t>
-            </a:r>
-            <a:r>
-              <a:rPr lang="en-US" altLang="ko-KR" sz="1600" dirty="0"/>
-              <a:t>, </a:t>
-            </a:r>
-            <a:r>
-              <a:rPr lang="ko-KR" altLang="en-US" sz="1600" dirty="0"/>
-              <a:t>온실가스 배출</a:t>
-            </a:r>
-            <a:r>
-              <a:rPr lang="en-US" altLang="ko-KR" sz="1600" dirty="0"/>
-              <a:t>, </a:t>
-            </a:r>
-            <a:r>
-              <a:rPr lang="ko-KR" altLang="en-US" sz="1600" dirty="0"/>
-              <a:t>광산 노동자의 건강 문제 등 부정적 외부효과는 석탄 산업에 대한 국제사회의 비판적 시각을 </a:t>
-            </a:r>
-            <a:r>
-              <a:rPr lang="ko-KR" altLang="en-US" sz="1600" dirty="0" err="1"/>
-              <a:t>강화시켰으며</a:t>
-            </a:r>
-            <a:r>
-              <a:rPr lang="en-US" altLang="ko-KR" sz="1600" dirty="0"/>
-              <a:t>, </a:t>
-            </a:r>
-            <a:r>
-              <a:rPr lang="ko-KR" altLang="en-US" sz="1600" dirty="0"/>
-              <a:t>환경 규제의 강화와 탈탄소화 전환을 촉진하는 요인으로 작용하였다</a:t>
-            </a:r>
-            <a:r>
-              <a:rPr lang="en-US" altLang="ko-KR" sz="1600" dirty="0"/>
-              <a:t>. </a:t>
-            </a:r>
-          </a:p>
-          <a:p>
-            <a:pPr marL="835025" lvl="1" indent="-285750">
-              <a:lnSpc>
-                <a:spcPct val="150000"/>
-              </a:lnSpc>
-              <a:buFont typeface="Wingdings" panose="05000000000000000000" pitchFamily="2" charset="2"/>
-              <a:buChar char="ü"/>
-            </a:pPr>
-            <a:r>
-              <a:rPr lang="ko-KR" altLang="en-US" sz="1600" dirty="0"/>
-              <a:t>기후변화 대응을 위한 글로벌 협약과 국가별 탄소중립 목표는 석탄의 단계적 축소를 </a:t>
-            </a:r>
-            <a:r>
-              <a:rPr lang="ko-KR" altLang="en-US" sz="1600" dirty="0" err="1"/>
-              <a:t>가속화시키고</a:t>
-            </a:r>
-            <a:r>
-              <a:rPr lang="ko-KR" altLang="en-US" sz="1600" dirty="0"/>
-              <a:t> 있다</a:t>
-            </a:r>
-            <a:r>
-              <a:rPr lang="en-US" altLang="ko-KR" sz="1600"/>
-              <a:t>.</a:t>
-            </a:r>
-          </a:p>
-          <a:p>
-            <a:pPr marL="377825" indent="-285750">
-              <a:lnSpc>
-                <a:spcPct val="150000"/>
-              </a:lnSpc>
-              <a:buFont typeface="Arial" panose="020B0604020202020204" pitchFamily="34" charset="0"/>
-              <a:buChar char="•"/>
-            </a:pPr>
-            <a:endParaRPr lang="en-US" altLang="ko-KR" sz="1600" dirty="0"/>
-          </a:p>
-          <a:p>
-            <a:pPr marL="377825" indent="-285750">
-              <a:lnSpc>
-                <a:spcPct val="150000"/>
-              </a:lnSpc>
-              <a:buFont typeface="Arial" panose="020B0604020202020204" pitchFamily="34" charset="0"/>
-              <a:buChar char="•"/>
-            </a:pPr>
-            <a:endParaRPr lang="en-US" altLang="ko-KR" sz="1600" dirty="0"/>
-          </a:p>
-          <a:p>
-            <a:pPr marL="377825" indent="-285750">
-              <a:lnSpc>
-                <a:spcPct val="150000"/>
-              </a:lnSpc>
-              <a:buFont typeface="Arial" panose="020B0604020202020204" pitchFamily="34" charset="0"/>
-              <a:buChar char="•"/>
-            </a:pPr>
-            <a:r>
-              <a:rPr lang="ko-KR" altLang="en-US" sz="1600" dirty="0"/>
-              <a:t>그럼에도 불구하고</a:t>
-            </a:r>
-            <a:r>
-              <a:rPr lang="en-US" altLang="ko-KR" sz="1600" dirty="0"/>
-              <a:t>, </a:t>
-            </a:r>
-            <a:r>
-              <a:rPr lang="ko-KR" altLang="en-US" sz="1600" dirty="0"/>
-              <a:t>석탄은 여전히 세계 에너지 믹스의 약 </a:t>
-            </a:r>
-            <a:r>
-              <a:rPr lang="en-US" altLang="ko-KR" sz="1600" dirty="0"/>
-              <a:t>25~30%</a:t>
-            </a:r>
-            <a:r>
-              <a:rPr lang="ko-KR" altLang="en-US" sz="1600" dirty="0"/>
-              <a:t>를 차지하는 주요 자원으로 남아 있다</a:t>
-            </a:r>
-            <a:r>
-              <a:rPr lang="en-US" altLang="ko-KR" sz="1600" dirty="0"/>
-              <a:t>.</a:t>
-            </a:r>
-          </a:p>
-          <a:p>
-            <a:pPr marL="835025" lvl="1" indent="-285750">
-              <a:lnSpc>
-                <a:spcPct val="150000"/>
-              </a:lnSpc>
-              <a:buFont typeface="Wingdings" panose="05000000000000000000" pitchFamily="2" charset="2"/>
-              <a:buChar char="ü"/>
-            </a:pPr>
-            <a:r>
-              <a:rPr lang="ko-KR" altLang="en-US" sz="1600" dirty="0"/>
-              <a:t>전력 수급의 신뢰성과 가격경쟁력을 중시하는 개발도상국에서는 에너지 안보 확보와 경제성 측면에서 여전히 전략적인 에너지원으로 활용되고 있다</a:t>
-            </a:r>
-            <a:r>
-              <a:rPr lang="en-US" altLang="ko-KR" sz="1600" dirty="0"/>
-              <a:t>.</a:t>
-            </a:r>
-          </a:p>
-          <a:p>
-            <a:pPr marL="835025" lvl="1" indent="-285750">
-              <a:lnSpc>
-                <a:spcPct val="150000"/>
-              </a:lnSpc>
-              <a:buFont typeface="Wingdings" panose="05000000000000000000" pitchFamily="2" charset="2"/>
-              <a:buChar char="ü"/>
-            </a:pPr>
-            <a:endParaRPr lang="en-US" altLang="ko-KR" sz="1600" dirty="0"/>
-          </a:p>
-          <a:p>
-            <a:pPr marL="377825" indent="-285750">
-              <a:lnSpc>
-                <a:spcPct val="150000"/>
-              </a:lnSpc>
-              <a:buFont typeface="Arial" panose="020B0604020202020204" pitchFamily="34" charset="0"/>
-              <a:buChar char="•"/>
-            </a:pPr>
-            <a:r>
-              <a:rPr lang="ko-KR" altLang="en-US" sz="1600" dirty="0"/>
-              <a:t>현대의 석탄시장은 공급망 리스크</a:t>
-            </a:r>
-            <a:r>
-              <a:rPr lang="en-US" altLang="ko-KR" sz="1600" dirty="0"/>
-              <a:t>, </a:t>
-            </a:r>
-            <a:r>
-              <a:rPr lang="ko-KR" altLang="en-US" sz="1600" dirty="0"/>
-              <a:t>지정학 변수</a:t>
-            </a:r>
-            <a:r>
-              <a:rPr lang="en-US" altLang="ko-KR" sz="1600" dirty="0"/>
-              <a:t>, </a:t>
-            </a:r>
-            <a:r>
-              <a:rPr lang="ko-KR" altLang="en-US" sz="1600" dirty="0" err="1"/>
-              <a:t>탈석탄</a:t>
-            </a:r>
-            <a:r>
-              <a:rPr lang="ko-KR" altLang="en-US" sz="1600" dirty="0"/>
-              <a:t> 정책과의 충돌</a:t>
-            </a:r>
-            <a:r>
-              <a:rPr lang="en-US" altLang="ko-KR" sz="1600" dirty="0"/>
-              <a:t>, </a:t>
-            </a:r>
-            <a:r>
-              <a:rPr lang="ko-KR" altLang="en-US" sz="1600" dirty="0"/>
-              <a:t>청정기술 도입</a:t>
-            </a:r>
-            <a:r>
-              <a:rPr lang="en-US" altLang="ko-KR" sz="1600" dirty="0"/>
-              <a:t>, </a:t>
-            </a:r>
-            <a:r>
-              <a:rPr lang="ko-KR" altLang="en-US" sz="1600" dirty="0"/>
-              <a:t>국제 금융의 탈석탄화 흐름</a:t>
-            </a:r>
-            <a:r>
-              <a:rPr lang="en-US" altLang="ko-KR" sz="1600" dirty="0"/>
-              <a:t> </a:t>
-            </a:r>
-            <a:r>
-              <a:rPr lang="ko-KR" altLang="en-US" sz="1600" dirty="0"/>
-              <a:t>등 복합적인 요소가 작용하는 불확실성으로 특징지어진다</a:t>
-            </a:r>
-            <a:r>
-              <a:rPr lang="en-US" altLang="ko-KR" sz="1600" dirty="0"/>
-              <a:t>.</a:t>
-            </a:r>
-          </a:p>
-        </p:txBody>
-      </p:sp>
-    </p:spTree>
-    <p:extLst>
-      <p:ext uri="{BB962C8B-B14F-4D97-AF65-F5344CB8AC3E}">
-        <p14:creationId xmlns:p14="http://schemas.microsoft.com/office/powerpoint/2010/main" val="3817818921"/>
       </p:ext>
     </p:extLst>
   </p:cSld>

--- a/에너지경제학/자원에너지경제학_Chapter_4 (석탄).pptx
+++ b/에너지경제학/자원에너지경제학_Chapter_4 (석탄).pptx
@@ -270,7 +270,7 @@
           <a:p>
             <a:fld id="{4A5E00EF-AEA4-43E2-9451-8F9C59A39471}" type="datetimeFigureOut">
               <a:rPr lang="ko-KR" altLang="en-US" smtClean="0"/>
-              <a:t>2026-06-18</a:t>
+              <a:t>2026-06-23</a:t>
             </a:fld>
             <a:endParaRPr lang="ko-KR" altLang="en-US"/>
           </a:p>
@@ -692,7 +692,7 @@
           <a:p>
             <a:fld id="{CD32C56F-BD27-4999-9E6D-D4EACE3DA9F4}" type="datetime1">
               <a:rPr lang="ko-KR" altLang="en-US" smtClean="0"/>
-              <a:t>2026-06-18</a:t>
+              <a:t>2026-06-23</a:t>
             </a:fld>
             <a:endParaRPr lang="ko-KR" altLang="en-US"/>
           </a:p>
@@ -906,7 +906,7 @@
           <a:p>
             <a:fld id="{8EF4A19C-72C8-45CA-8E3F-68A7FA345D6C}" type="datetime1">
               <a:rPr lang="ko-KR" altLang="en-US" smtClean="0"/>
-              <a:t>2026-06-18</a:t>
+              <a:t>2026-06-23</a:t>
             </a:fld>
             <a:endParaRPr lang="ko-KR" altLang="en-US"/>
           </a:p>
@@ -1130,7 +1130,7 @@
           <a:p>
             <a:fld id="{56A175B2-010B-4341-954C-5F8F5C70B124}" type="datetime1">
               <a:rPr lang="ko-KR" altLang="en-US" smtClean="0"/>
-              <a:t>2026-06-18</a:t>
+              <a:t>2026-06-23</a:t>
             </a:fld>
             <a:endParaRPr lang="ko-KR" altLang="en-US"/>
           </a:p>
@@ -1344,7 +1344,7 @@
           <a:p>
             <a:fld id="{16B83F9E-22C9-45CA-9E85-070F1D3EF530}" type="datetime1">
               <a:rPr lang="ko-KR" altLang="en-US" smtClean="0"/>
-              <a:t>2026-06-18</a:t>
+              <a:t>2026-06-23</a:t>
             </a:fld>
             <a:endParaRPr lang="ko-KR" altLang="en-US"/>
           </a:p>
@@ -1635,7 +1635,7 @@
           <a:p>
             <a:fld id="{03278F45-FB3C-4C4D-B89A-7BC3F5F229F6}" type="datetime1">
               <a:rPr lang="ko-KR" altLang="en-US" smtClean="0"/>
-              <a:t>2026-06-18</a:t>
+              <a:t>2026-06-23</a:t>
             </a:fld>
             <a:endParaRPr lang="ko-KR" altLang="en-US"/>
           </a:p>
@@ -2028,7 +2028,7 @@
           <a:p>
             <a:fld id="{38FDAC3C-35A6-415C-9F03-738A6AC328B1}" type="datetime1">
               <a:rPr lang="ko-KR" altLang="en-US" smtClean="0"/>
-              <a:t>2026-06-18</a:t>
+              <a:t>2026-06-23</a:t>
             </a:fld>
             <a:endParaRPr lang="ko-KR" altLang="en-US"/>
           </a:p>
@@ -3622,7 +3622,7 @@
           <a:p>
             <a:fld id="{507A0DF1-AEE6-4B0D-89D2-351E7B3EF65C}" type="datetime1">
               <a:rPr lang="ko-KR" altLang="en-US" smtClean="0"/>
-              <a:t>2026-06-18</a:t>
+              <a:t>2026-06-23</a:t>
             </a:fld>
             <a:endParaRPr lang="ko-KR" altLang="en-US"/>
           </a:p>
@@ -4050,7 +4050,7 @@
           <a:p>
             <a:fld id="{CA93B8C9-630F-4D57-944D-04FD37CECCD3}" type="datetime1">
               <a:rPr lang="ko-KR" altLang="en-US" smtClean="0"/>
-              <a:t>2026-06-18</a:t>
+              <a:t>2026-06-23</a:t>
             </a:fld>
             <a:endParaRPr lang="ko-KR" altLang="en-US"/>
           </a:p>
@@ -4207,7 +4207,7 @@
           <a:p>
             <a:fld id="{E986165A-AC43-4902-9541-874ECD310BA3}" type="datetime1">
               <a:rPr lang="ko-KR" altLang="en-US" smtClean="0"/>
-              <a:t>2026-06-18</a:t>
+              <a:t>2026-06-23</a:t>
             </a:fld>
             <a:endParaRPr lang="ko-KR" altLang="en-US"/>
           </a:p>
@@ -4534,7 +4534,7 @@
           <a:p>
             <a:fld id="{47E6EE6D-2B0E-43A9-87A2-7354CDB998F4}" type="datetime1">
               <a:rPr lang="ko-KR" altLang="en-US" smtClean="0"/>
-              <a:t>2026-06-18</a:t>
+              <a:t>2026-06-23</a:t>
             </a:fld>
             <a:endParaRPr lang="ko-KR" altLang="en-US"/>
           </a:p>
@@ -4838,7 +4838,7 @@
           <a:p>
             <a:fld id="{5CC5944E-0BC8-4FAA-9F94-6B4B05834E10}" type="datetime1">
               <a:rPr lang="ko-KR" altLang="en-US" smtClean="0"/>
-              <a:t>2026-06-18</a:t>
+              <a:t>2026-06-23</a:t>
             </a:fld>
             <a:endParaRPr lang="ko-KR" altLang="en-US"/>
           </a:p>
@@ -11500,8 +11500,8 @@
           <a:lstStyle/>
           <a:p>
             <a:r>
-              <a:rPr lang="en-US" altLang="ko-KR" sz="4000" b="1" i="0" spc="150" dirty="0"/>
-              <a:t>Chapter 3</a:t>
+              <a:rPr lang="en-US" altLang="ko-KR" sz="4000" b="1" i="0" spc="150"/>
+              <a:t>Chapter 4</a:t>
             </a:r>
             <a:br>
               <a:rPr lang="en-US" altLang="ko-KR" sz="4000" b="1" i="0" spc="150" dirty="0"/>
